--- a/erm-migration/docs/ERM-Migration-Jury-Pitch.pptx
+++ b/erm-migration/docs/ERM-Migration-Jury-Pitch.pptx
@@ -11,9 +11,10 @@
     <p:sldId id="259" r:id="rId5"/>
     <p:sldId id="260" r:id="rId6"/>
     <p:sldId id="261" r:id="rId7"/>
+    <p:sldId id="262" r:id="rId8"/>
   </p:sldIdLst>
   <p:notesMasterIdLst>
-    <p:notesMasterId r:id="rId8"/>
+    <p:notesMasterId r:id="rId9"/>
   </p:notesMasterIdLst>
   <p:sldSz cx="12192000" cy="6858000"/>
   <p:notesSz cx="6858000" cy="12192000"/>
@@ -112,26 +113,27 @@
   <p:extLst>
     <p:ext uri="{521415D9-36F7-43E2-AB2F-B90AF26B5E84}">
       <p14:sectionLst xmlns:p14="http://schemas.microsoft.com/office/powerpoint/2010/main">
-        <p14:section name="Pitch" id="{86083955-bdef-98c2-40e8-3a933b03741f}">
+        <p14:section name="Pitch" id="{c5fdbef1-2242-f2f2-7c49-bd7fd0e4346e}">
           <p14:sldIdLst>
             <p14:sldId id="256"/>
           </p14:sldIdLst>
         </p14:section>
-        <p14:section name="Problem and method" id="{ddd2c1b2-85ac-b277-c521-2b01fd1dc946}">
+        <p14:section name="Problem and method" id="{45e1f99c-1e2b-c64c-9a7a-4dfa2194a18e}">
           <p14:sldIdLst>
             <p14:sldId id="257"/>
             <p14:sldId id="258"/>
           </p14:sldIdLst>
         </p14:section>
-        <p14:section name="Impact" id="{1047cabb-0ab7-f3e9-a1fb-e7ecdc95b7bb}">
+        <p14:section name="Impact" id="{243a8934-3c6e-b6b2-b366-ecd90d319511}">
           <p14:sldIdLst>
             <p14:sldId id="259"/>
             <p14:sldId id="260"/>
+            <p14:sldId id="261"/>
           </p14:sldIdLst>
         </p14:section>
-        <p14:section name="Reuse" id="{e95f85d1-b111-5f68-21bc-546e72b5e859}">
+        <p14:section name="Reuse" id="{e594c4fd-50d8-de63-a813-b28990026acf}">
           <p14:sldIdLst>
-            <p14:sldId id="261"/>
+            <p14:sldId id="262"/>
           </p14:sldIdLst>
         </p14:section>
       </p14:sectionLst>
@@ -890,7 +892,7 @@
           <a:p>
             <a:r>
               <a:rPr lang="en-US" dirty="0"/>
-              <a:t>Four results. One: every one of the 105 features is tracked in the comparison document. Two: real gaps were fixed, for example how board members get access to risks when a dashboard is created or edited; that fix is deployed. Three: the React app does more than the old one; show the new features here. Four: the app now has architecture and lifecycle diagrams, for dashboards and for risks. Switch to the live app for the demo here if time allows.</a:t>
+              <a:t>Fill in the numbers before presenting. Give the estimate the migration would have needed without AI, and say where it came from (for example the original PI planning). Then the actual effort: one PI, with the number of sprints and people. The percentage saved is (estimate minus actual) divided by estimate. Then say where the time went: discovery was the biggest saving, because the AI catalogued 105 features straight from the Slate exports with no documentation to read; gap analysis, because every feature was checked against the packed React code; and documentation, because the diagrams were produced alongside the work instead of afterwards.</a:t>
             </a:r>
             <a:endParaRPr lang="en-US" dirty="0"/>
           </a:p>
@@ -978,7 +980,7 @@
           <a:p>
             <a:r>
               <a:rPr lang="en-US" dirty="0"/>
-              <a:t>Close on reuse. This was a team effort across business, data and security, backend and frontend; name the teams. The method needs only the legacy export, the new codebase and an AI model, so it carries over to other Slate apps and to other legacy tools. The pieces are ready: pack-project.ts, the comparison document layout and the diagram formats. End with the five-word playbook and invite questions.</a:t>
+              <a:t>Four results. One: every one of the 105 features is tracked in the comparison document. Two: real gaps were fixed, for example how board members get access to risks when a dashboard is created or edited; that fix is deployed. Three: the React app does more than the old one; show the new features here. Four: the app now has architecture and lifecycle diagrams, for dashboards and for risks. Switch to the live app for the demo here if time allows.</a:t>
             </a:r>
             <a:endParaRPr lang="en-US" dirty="0"/>
           </a:p>
@@ -1002,6 +1004,94 @@
             <a:fld id="{F7021451-1387-4CA6-816F-3879F97B5CBC}" type="slidenum">
               <a:rPr lang="en-US"/>
               <a:t>6</a:t>
+            </a:fld>
+            <a:endParaRPr lang="en-US"/>
+          </a:p>
+        </p:txBody>
+      </p:sp>
+    </p:spTree>
+    <p:extLst>
+      <p:ext uri="{BB962C8B-B14F-4D97-AF65-F5344CB8AC3E}">
+        <p14:creationId xmlns:p14="http://schemas.microsoft.com/office/powerpoint/2010/main" val="1024086991"/>
+      </p:ext>
+    </p:extLst>
+  </p:cSld>
+  <p:clrMapOvr>
+    <a:masterClrMapping/>
+  </p:clrMapOvr>
+</p:notes>
+</file>
+
+<file path=ppt/notesSlides/notesSlide7.xml><?xml version="1.0" encoding="utf-8"?>
+<p:notes xmlns:a="http://schemas.openxmlformats.org/drawingml/2006/main" xmlns:r="http://schemas.openxmlformats.org/officeDocument/2006/relationships" xmlns:p="http://schemas.openxmlformats.org/presentationml/2006/main">
+  <p:cSld>
+    <p:spTree>
+      <p:nvGrpSpPr>
+        <p:cNvPr id="1" name=""/>
+        <p:cNvGrpSpPr/>
+        <p:nvPr/>
+      </p:nvGrpSpPr>
+      <p:grpSpPr>
+        <a:xfrm>
+          <a:off x="0" y="0"/>
+          <a:ext cx="0" cy="0"/>
+          <a:chOff x="0" y="0"/>
+          <a:chExt cx="0" cy="0"/>
+        </a:xfrm>
+      </p:grpSpPr>
+      <p:sp>
+        <p:nvSpPr>
+          <p:cNvPr id="2" name="Slide Image Placeholder 1"/>
+          <p:cNvSpPr>
+            <a:spLocks noGrp="1" noRot="1" noChangeAspect="1"/>
+          </p:cNvSpPr>
+          <p:nvPr>
+            <p:ph type="sldImg"/>
+          </p:nvPr>
+        </p:nvSpPr>
+        <p:spPr/>
+      </p:sp>
+      <p:sp>
+        <p:nvSpPr>
+          <p:cNvPr id="3" name="Notes Placeholder 2"/>
+          <p:cNvSpPr>
+            <a:spLocks noGrp="1"/>
+          </p:cNvSpPr>
+          <p:nvPr>
+            <p:ph type="body" idx="1"/>
+          </p:nvPr>
+        </p:nvSpPr>
+        <p:spPr/>
+        <p:txBody>
+          <a:bodyPr/>
+          <a:lstStyle/>
+          <a:p>
+            <a:r>
+              <a:rPr lang="en-US" dirty="0"/>
+              <a:t>Close on reuse. This was a team effort across business, data and security, backend and frontend; name the teams. The method needs only the legacy export, the new codebase and an AI model, so it carries over to other Slate apps and to other legacy tools. The pieces are ready: pack-project.ts, the comparison document layout and the diagram formats. End with the five-word playbook and invite questions.</a:t>
+            </a:r>
+            <a:endParaRPr lang="en-US" dirty="0"/>
+          </a:p>
+        </p:txBody>
+      </p:sp>
+      <p:sp>
+        <p:nvSpPr>
+          <p:cNvPr id="4" name="Slide Number Placeholder 3"/>
+          <p:cNvSpPr>
+            <a:spLocks noGrp="1"/>
+          </p:cNvSpPr>
+          <p:nvPr>
+            <p:ph type="sldNum" sz="quarter" idx="10"/>
+          </p:nvPr>
+        </p:nvSpPr>
+        <p:spPr/>
+        <p:txBody>
+          <a:bodyPr/>
+          <a:lstStyle/>
+          <a:p>
+            <a:fld id="{F7021451-1387-4CA6-816F-3879F97B5CBC}" type="slidenum">
+              <a:rPr lang="en-US"/>
+              <a:t>7</a:t>
             </a:fld>
             <a:endParaRPr lang="en-US"/>
           </a:p>
@@ -3207,7 +3297,7 @@
                   <a:schemeClr val="tx1"/>
                 </a:solidFill>
               </a:rPr>
-              <a:t>What we delivered in one SAFe PI</a:t>
+              <a:t>Effort saved: [__] sprints in one PI</a:t>
             </a:r>
             <a:endParaRPr lang="en-US" sz="3600" dirty="0"/>
           </a:p>
@@ -3215,18 +3305,18 @@
       </p:sp>
       <p:sp>
         <p:nvSpPr>
-          <p:cNvPr id="3" name="result-0-card"/>
+          <p:cNvPr id="3" name="effort-0-card"/>
           <p:cNvSpPr/>
           <p:nvPr/>
         </p:nvSpPr>
         <p:spPr>
           <a:xfrm>
             <a:off x="548640" y="1600200"/>
-            <a:ext cx="5410048" cy="2057400"/>
+            <a:ext cx="3515258" cy="2286000"/>
           </a:xfrm>
           <a:prstGeom prst="roundRect">
             <a:avLst>
-              <a:gd name="adj" fmla="val 5333"/>
+              <a:gd name="adj" fmla="val 4800"/>
             </a:avLst>
           </a:prstGeom>
           <a:solidFill>
@@ -3237,90 +3327,126 @@
       </p:sp>
       <p:sp>
         <p:nvSpPr>
-          <p:cNvPr id="4" name="result-0-title"/>
-          <p:cNvSpPr txBox="1"/>
-          <p:nvPr/>
-        </p:nvSpPr>
-        <p:spPr>
-          <a:xfrm>
-            <a:off x="868680" y="1920240"/>
-            <a:ext cx="4769968" cy="685800"/>
-          </a:xfrm>
-          <a:prstGeom prst="rect">
-            <a:avLst/>
-          </a:prstGeom>
-          <a:noFill/>
-          <a:ln/>
-        </p:spPr>
-        <p:txBody>
-          <a:bodyPr wrap="square" lIns="0" tIns="0" rIns="0" bIns="0" rtlCol="0" anchor="t"/>
-          <a:lstStyle/>
-          <a:p>
-            <a:pPr indent="0" marL="0">
-              <a:buNone/>
-            </a:pPr>
-            <a:r>
-              <a:rPr lang="en-US" sz="3200" b="1" dirty="0">
-                <a:solidFill>
-                  <a:schemeClr val="accent3"/>
-                </a:solidFill>
-              </a:rPr>
-              <a:t>105 features</a:t>
-            </a:r>
-            <a:endParaRPr lang="en-US" sz="3200" dirty="0"/>
-          </a:p>
-        </p:txBody>
-      </p:sp>
-      <p:sp>
-        <p:nvSpPr>
-          <p:cNvPr id="5" name="result-0-body"/>
-          <p:cNvSpPr txBox="1"/>
-          <p:nvPr/>
-        </p:nvSpPr>
-        <p:spPr>
-          <a:xfrm>
-            <a:off x="868680" y="2651760"/>
-            <a:ext cx="4769968" cy="731520"/>
-          </a:xfrm>
-          <a:prstGeom prst="rect">
-            <a:avLst/>
-          </a:prstGeom>
-          <a:noFill/>
-          <a:ln/>
-        </p:spPr>
-        <p:txBody>
-          <a:bodyPr wrap="square" lIns="0" tIns="0" rIns="0" bIns="0" rtlCol="0" anchor="t"/>
-          <a:lstStyle/>
-          <a:p>
-            <a:pPr indent="0" marL="0">
-              <a:buNone/>
-            </a:pPr>
-            <a:r>
-              <a:rPr lang="en-US" sz="1600" dirty="0">
+          <p:cNvPr id="4" name="effort-0-value"/>
+          <p:cNvSpPr txBox="1"/>
+          <p:nvPr/>
+        </p:nvSpPr>
+        <p:spPr>
+          <a:xfrm>
+            <a:off x="868680" y="1874520"/>
+            <a:ext cx="2875178" cy="868680"/>
+          </a:xfrm>
+          <a:prstGeom prst="rect">
+            <a:avLst/>
+          </a:prstGeom>
+          <a:noFill/>
+          <a:ln/>
+        </p:spPr>
+        <p:txBody>
+          <a:bodyPr wrap="square" lIns="0" tIns="0" rIns="0" bIns="0" rtlCol="0" anchor="t"/>
+          <a:lstStyle/>
+          <a:p>
+            <a:pPr indent="0" marL="0">
+              <a:buNone/>
+            </a:pPr>
+            <a:r>
+              <a:rPr lang="en-US" sz="4800" b="1" dirty="0">
+                <a:solidFill>
+                  <a:schemeClr val="tx1"/>
+                </a:solidFill>
+              </a:rPr>
+              <a:t>[__]</a:t>
+            </a:r>
+            <a:endParaRPr lang="en-US" sz="4800" dirty="0"/>
+          </a:p>
+        </p:txBody>
+      </p:sp>
+      <p:sp>
+        <p:nvSpPr>
+          <p:cNvPr id="5" name="effort-0-label"/>
+          <p:cNvSpPr txBox="1"/>
+          <p:nvPr/>
+        </p:nvSpPr>
+        <p:spPr>
+          <a:xfrm>
+            <a:off x="868680" y="2788920"/>
+            <a:ext cx="2875178" cy="411480"/>
+          </a:xfrm>
+          <a:prstGeom prst="rect">
+            <a:avLst/>
+          </a:prstGeom>
+          <a:noFill/>
+          <a:ln/>
+        </p:spPr>
+        <p:txBody>
+          <a:bodyPr wrap="square" lIns="0" tIns="0" rIns="0" bIns="0" rtlCol="0" anchor="t"/>
+          <a:lstStyle/>
+          <a:p>
+            <a:pPr indent="0" marL="0">
+              <a:buNone/>
+            </a:pPr>
+            <a:r>
+              <a:rPr lang="en-US" sz="1800" b="1" dirty="0">
+                <a:solidFill>
+                  <a:schemeClr val="tx1"/>
+                </a:solidFill>
+              </a:rPr>
+              <a:t>Estimate without AI</a:t>
+            </a:r>
+            <a:endParaRPr lang="en-US" sz="1800" dirty="0"/>
+          </a:p>
+        </p:txBody>
+      </p:sp>
+      <p:sp>
+        <p:nvSpPr>
+          <p:cNvPr id="6" name="effort-0-sub"/>
+          <p:cNvSpPr txBox="1"/>
+          <p:nvPr/>
+        </p:nvSpPr>
+        <p:spPr>
+          <a:xfrm>
+            <a:off x="868680" y="3200400"/>
+            <a:ext cx="2875178" cy="548640"/>
+          </a:xfrm>
+          <a:prstGeom prst="rect">
+            <a:avLst/>
+          </a:prstGeom>
+          <a:noFill/>
+          <a:ln/>
+        </p:spPr>
+        <p:txBody>
+          <a:bodyPr wrap="square" lIns="0" tIns="0" rIns="0" bIns="0" rtlCol="0" anchor="t"/>
+          <a:lstStyle/>
+          <a:p>
+            <a:pPr indent="0" marL="0">
+              <a:buNone/>
+            </a:pPr>
+            <a:r>
+              <a:rPr lang="en-US" sz="1400" dirty="0">
                 <a:solidFill>
                   <a:schemeClr val="tx2"/>
                 </a:solidFill>
               </a:rPr>
-              <a:t>Catalogued and compared one by one, so nothing was lost by accident</a:t>
-            </a:r>
-            <a:endParaRPr lang="en-US" sz="1600" dirty="0"/>
-          </a:p>
-        </p:txBody>
-      </p:sp>
-      <p:sp>
-        <p:nvSpPr>
-          <p:cNvPr id="6" name="result-1-card"/>
+              <a:t>sprints, from [source, e.g. PI planning]</a:t>
+            </a:r>
+            <a:endParaRPr lang="en-US" sz="1400" dirty="0"/>
+          </a:p>
+        </p:txBody>
+      </p:sp>
+      <p:sp>
+        <p:nvSpPr>
+          <p:cNvPr id="7" name="effort-1-card"/>
           <p:cNvSpPr/>
           <p:nvPr/>
         </p:nvSpPr>
         <p:spPr>
           <a:xfrm>
-            <a:off x="6233008" y="1600200"/>
-            <a:ext cx="5410048" cy="2057400"/>
+            <a:off x="4338218" y="1600200"/>
+            <a:ext cx="3515258" cy="2286000"/>
           </a:xfrm>
           <a:prstGeom prst="roundRect">
             <a:avLst>
-              <a:gd name="adj" fmla="val 5333"/>
+              <a:gd name="adj" fmla="val 4800"/>
             </a:avLst>
           </a:prstGeom>
           <a:solidFill>
@@ -3331,165 +3457,381 @@
       </p:sp>
       <p:sp>
         <p:nvSpPr>
-          <p:cNvPr id="7" name="result-1-title"/>
-          <p:cNvSpPr txBox="1"/>
-          <p:nvPr/>
-        </p:nvSpPr>
-        <p:spPr>
-          <a:xfrm>
-            <a:off x="6553048" y="1920240"/>
-            <a:ext cx="4769968" cy="685800"/>
-          </a:xfrm>
-          <a:prstGeom prst="rect">
-            <a:avLst/>
-          </a:prstGeom>
-          <a:noFill/>
-          <a:ln/>
-        </p:spPr>
-        <p:txBody>
-          <a:bodyPr wrap="square" lIns="0" tIns="0" rIns="0" bIns="0" rtlCol="0" anchor="t"/>
-          <a:lstStyle/>
-          <a:p>
-            <a:pPr indent="0" marL="0">
-              <a:buNone/>
-            </a:pPr>
-            <a:r>
-              <a:rPr lang="en-US" sz="3200" b="1" dirty="0">
+          <p:cNvPr id="8" name="effort-1-value"/>
+          <p:cNvSpPr txBox="1"/>
+          <p:nvPr/>
+        </p:nvSpPr>
+        <p:spPr>
+          <a:xfrm>
+            <a:off x="4658258" y="1874520"/>
+            <a:ext cx="2875178" cy="868680"/>
+          </a:xfrm>
+          <a:prstGeom prst="rect">
+            <a:avLst/>
+          </a:prstGeom>
+          <a:noFill/>
+          <a:ln/>
+        </p:spPr>
+        <p:txBody>
+          <a:bodyPr wrap="square" lIns="0" tIns="0" rIns="0" bIns="0" rtlCol="0" anchor="t"/>
+          <a:lstStyle/>
+          <a:p>
+            <a:pPr indent="0" marL="0">
+              <a:buNone/>
+            </a:pPr>
+            <a:r>
+              <a:rPr lang="en-US" sz="4800" b="1" dirty="0">
                 <a:solidFill>
                   <a:schemeClr val="tx1"/>
                 </a:solidFill>
               </a:rPr>
-              <a:t>Gaps fixed</a:t>
-            </a:r>
-            <a:endParaRPr lang="en-US" sz="3200" dirty="0"/>
-          </a:p>
-        </p:txBody>
-      </p:sp>
-      <p:sp>
-        <p:nvSpPr>
-          <p:cNvPr id="8" name="result-1-body"/>
-          <p:cNvSpPr txBox="1"/>
-          <p:nvPr/>
-        </p:nvSpPr>
-        <p:spPr>
-          <a:xfrm>
-            <a:off x="6553048" y="2651760"/>
-            <a:ext cx="4769968" cy="731520"/>
-          </a:xfrm>
-          <a:prstGeom prst="rect">
-            <a:avLst/>
-          </a:prstGeom>
-          <a:noFill/>
-          <a:ln/>
-        </p:spPr>
-        <p:txBody>
-          <a:bodyPr wrap="square" lIns="0" tIns="0" rIns="0" bIns="0" rtlCol="0" anchor="t"/>
-          <a:lstStyle/>
-          <a:p>
-            <a:pPr indent="0" marL="0">
-              <a:buNone/>
-            </a:pPr>
-            <a:r>
-              <a:rPr lang="en-US" sz="1600" dirty="0">
+              <a:t>1 PI</a:t>
+            </a:r>
+            <a:endParaRPr lang="en-US" sz="4800" dirty="0"/>
+          </a:p>
+        </p:txBody>
+      </p:sp>
+      <p:sp>
+        <p:nvSpPr>
+          <p:cNvPr id="9" name="effort-1-label"/>
+          <p:cNvSpPr txBox="1"/>
+          <p:nvPr/>
+        </p:nvSpPr>
+        <p:spPr>
+          <a:xfrm>
+            <a:off x="4658258" y="2788920"/>
+            <a:ext cx="2875178" cy="411480"/>
+          </a:xfrm>
+          <a:prstGeom prst="rect">
+            <a:avLst/>
+          </a:prstGeom>
+          <a:noFill/>
+          <a:ln/>
+        </p:spPr>
+        <p:txBody>
+          <a:bodyPr wrap="square" lIns="0" tIns="0" rIns="0" bIns="0" rtlCol="0" anchor="t"/>
+          <a:lstStyle/>
+          <a:p>
+            <a:pPr indent="0" marL="0">
+              <a:buNone/>
+            </a:pPr>
+            <a:r>
+              <a:rPr lang="en-US" sz="1800" b="1" dirty="0">
+                <a:solidFill>
+                  <a:schemeClr val="tx1"/>
+                </a:solidFill>
+              </a:rPr>
+              <a:t>Actual effort with AI</a:t>
+            </a:r>
+            <a:endParaRPr lang="en-US" sz="1800" dirty="0"/>
+          </a:p>
+        </p:txBody>
+      </p:sp>
+      <p:sp>
+        <p:nvSpPr>
+          <p:cNvPr id="10" name="effort-1-sub"/>
+          <p:cNvSpPr txBox="1"/>
+          <p:nvPr/>
+        </p:nvSpPr>
+        <p:spPr>
+          <a:xfrm>
+            <a:off x="4658258" y="3200400"/>
+            <a:ext cx="2875178" cy="548640"/>
+          </a:xfrm>
+          <a:prstGeom prst="rect">
+            <a:avLst/>
+          </a:prstGeom>
+          <a:noFill/>
+          <a:ln/>
+        </p:spPr>
+        <p:txBody>
+          <a:bodyPr wrap="square" lIns="0" tIns="0" rIns="0" bIns="0" rtlCol="0" anchor="t"/>
+          <a:lstStyle/>
+          <a:p>
+            <a:pPr indent="0" marL="0">
+              <a:buNone/>
+            </a:pPr>
+            <a:r>
+              <a:rPr lang="en-US" sz="1400" dirty="0">
                 <a:solidFill>
                   <a:schemeClr val="tx2"/>
                 </a:solidFill>
               </a:rPr>
-              <a:t>Including dashboard sharing access in the backend workflow, now deployed</a:t>
-            </a:r>
-            <a:endParaRPr lang="en-US" sz="1600" dirty="0"/>
-          </a:p>
-        </p:txBody>
-      </p:sp>
-      <p:sp>
-        <p:nvSpPr>
-          <p:cNvPr id="9" name="result-2-card"/>
+              <a:t>[__] sprints, [__] people</a:t>
+            </a:r>
+            <a:endParaRPr lang="en-US" sz="1400" dirty="0"/>
+          </a:p>
+        </p:txBody>
+      </p:sp>
+      <p:sp>
+        <p:nvSpPr>
+          <p:cNvPr id="11" name="effort-2-card"/>
           <p:cNvSpPr/>
           <p:nvPr/>
         </p:nvSpPr>
         <p:spPr>
           <a:xfrm>
-            <a:off x="548640" y="3931920"/>
-            <a:ext cx="5410048" cy="2057400"/>
+            <a:off x="8127797" y="1600200"/>
+            <a:ext cx="3515258" cy="2286000"/>
           </a:xfrm>
           <a:prstGeom prst="roundRect">
             <a:avLst>
-              <a:gd name="adj" fmla="val 5333"/>
+              <a:gd name="adj" fmla="val 4800"/>
             </a:avLst>
           </a:prstGeom>
           <a:solidFill>
-            <a:schemeClr val="bg1"/>
+            <a:schemeClr val="tx1"/>
           </a:solidFill>
           <a:ln/>
         </p:spPr>
       </p:sp>
       <p:sp>
         <p:nvSpPr>
-          <p:cNvPr id="10" name="result-2-title"/>
-          <p:cNvSpPr txBox="1"/>
-          <p:nvPr/>
-        </p:nvSpPr>
-        <p:spPr>
-          <a:xfrm>
-            <a:off x="868680" y="4251960"/>
-            <a:ext cx="4769968" cy="685800"/>
-          </a:xfrm>
-          <a:prstGeom prst="rect">
-            <a:avLst/>
-          </a:prstGeom>
-          <a:noFill/>
-          <a:ln/>
-        </p:spPr>
-        <p:txBody>
-          <a:bodyPr wrap="square" lIns="0" tIns="0" rIns="0" bIns="0" rtlCol="0" anchor="t"/>
-          <a:lstStyle/>
-          <a:p>
-            <a:pPr indent="0" marL="0">
-              <a:buNone/>
-            </a:pPr>
-            <a:r>
-              <a:rPr lang="en-US" sz="3200" b="1" dirty="0">
+          <p:cNvPr id="12" name="effort-2-value"/>
+          <p:cNvSpPr txBox="1"/>
+          <p:nvPr/>
+        </p:nvSpPr>
+        <p:spPr>
+          <a:xfrm>
+            <a:off x="8447837" y="1874520"/>
+            <a:ext cx="2875178" cy="868680"/>
+          </a:xfrm>
+          <a:prstGeom prst="rect">
+            <a:avLst/>
+          </a:prstGeom>
+          <a:noFill/>
+          <a:ln/>
+        </p:spPr>
+        <p:txBody>
+          <a:bodyPr wrap="square" lIns="0" tIns="0" rIns="0" bIns="0" rtlCol="0" anchor="t"/>
+          <a:lstStyle/>
+          <a:p>
+            <a:pPr indent="0" marL="0">
+              <a:buNone/>
+            </a:pPr>
+            <a:r>
+              <a:rPr lang="en-US" sz="4800" b="1" dirty="0">
+                <a:solidFill>
+                  <a:schemeClr val="accent1"/>
+                </a:solidFill>
+              </a:rPr>
+              <a:t>[__]%</a:t>
+            </a:r>
+            <a:endParaRPr lang="en-US" sz="4800" dirty="0"/>
+          </a:p>
+        </p:txBody>
+      </p:sp>
+      <p:sp>
+        <p:nvSpPr>
+          <p:cNvPr id="13" name="effort-2-label"/>
+          <p:cNvSpPr txBox="1"/>
+          <p:nvPr/>
+        </p:nvSpPr>
+        <p:spPr>
+          <a:xfrm>
+            <a:off x="8447837" y="2788920"/>
+            <a:ext cx="2875178" cy="411480"/>
+          </a:xfrm>
+          <a:prstGeom prst="rect">
+            <a:avLst/>
+          </a:prstGeom>
+          <a:noFill/>
+          <a:ln/>
+        </p:spPr>
+        <p:txBody>
+          <a:bodyPr wrap="square" lIns="0" tIns="0" rIns="0" bIns="0" rtlCol="0" anchor="t"/>
+          <a:lstStyle/>
+          <a:p>
+            <a:pPr indent="0" marL="0">
+              <a:buNone/>
+            </a:pPr>
+            <a:r>
+              <a:rPr lang="en-US" sz="1800" b="1" dirty="0">
+                <a:solidFill>
+                  <a:schemeClr val="bg1"/>
+                </a:solidFill>
+              </a:rPr>
+              <a:t>Effort saved</a:t>
+            </a:r>
+            <a:endParaRPr lang="en-US" sz="1800" dirty="0"/>
+          </a:p>
+        </p:txBody>
+      </p:sp>
+      <p:sp>
+        <p:nvSpPr>
+          <p:cNvPr id="14" name="effort-2-sub"/>
+          <p:cNvSpPr txBox="1"/>
+          <p:nvPr/>
+        </p:nvSpPr>
+        <p:spPr>
+          <a:xfrm>
+            <a:off x="8447837" y="3200400"/>
+            <a:ext cx="2875178" cy="548640"/>
+          </a:xfrm>
+          <a:prstGeom prst="rect">
+            <a:avLst/>
+          </a:prstGeom>
+          <a:noFill/>
+          <a:ln/>
+        </p:spPr>
+        <p:txBody>
+          <a:bodyPr wrap="square" lIns="0" tIns="0" rIns="0" bIns="0" rtlCol="0" anchor="t"/>
+          <a:lstStyle/>
+          <a:p>
+            <a:pPr indent="0" marL="0">
+              <a:buNone/>
+            </a:pPr>
+            <a:r>
+              <a:rPr lang="en-US" sz="1400" dirty="0">
+                <a:solidFill>
+                  <a:schemeClr val="accent5"/>
+                </a:solidFill>
+              </a:rPr>
+              <a:t>(estimate − actual) ÷ estimate</a:t>
+            </a:r>
+            <a:endParaRPr lang="en-US" sz="1400" dirty="0"/>
+          </a:p>
+        </p:txBody>
+      </p:sp>
+      <p:sp>
+        <p:nvSpPr>
+          <p:cNvPr id="15" name="where-title"/>
+          <p:cNvSpPr txBox="1"/>
+          <p:nvPr/>
+        </p:nvSpPr>
+        <p:spPr>
+          <a:xfrm>
+            <a:off x="548640" y="4206240"/>
+            <a:ext cx="11094415" cy="411480"/>
+          </a:xfrm>
+          <a:prstGeom prst="rect">
+            <a:avLst/>
+          </a:prstGeom>
+          <a:noFill/>
+          <a:ln/>
+        </p:spPr>
+        <p:txBody>
+          <a:bodyPr wrap="square" lIns="0" tIns="0" rIns="0" bIns="0" rtlCol="0" anchor="t"/>
+          <a:lstStyle/>
+          <a:p>
+            <a:pPr indent="0" marL="0">
+              <a:buNone/>
+            </a:pPr>
+            <a:r>
+              <a:rPr lang="en-US" sz="2000" b="1" dirty="0">
                 <a:solidFill>
                   <a:schemeClr val="tx1"/>
                 </a:solidFill>
               </a:rPr>
-              <a:t>New features</a:t>
-            </a:r>
-            <a:endParaRPr lang="en-US" sz="3200" dirty="0"/>
-          </a:p>
-        </p:txBody>
-      </p:sp>
-      <p:sp>
-        <p:nvSpPr>
-          <p:cNvPr id="11" name="result-2-body"/>
-          <p:cNvSpPr txBox="1"/>
-          <p:nvPr/>
-        </p:nvSpPr>
-        <p:spPr>
-          <a:xfrm>
-            <a:off x="868680" y="4983480"/>
-            <a:ext cx="4769968" cy="731520"/>
-          </a:xfrm>
-          <a:prstGeom prst="rect">
-            <a:avLst/>
-          </a:prstGeom>
-          <a:noFill/>
-          <a:ln/>
-        </p:spPr>
-        <p:txBody>
-          <a:bodyPr wrap="square" lIns="0" tIns="0" rIns="0" bIns="0" rtlCol="0" anchor="t"/>
-          <a:lstStyle/>
-          <a:p>
-            <a:pPr indent="0" marL="0">
-              <a:buNone/>
-            </a:pPr>
-            <a:r>
-              <a:rPr lang="en-US" sz="1600" dirty="0">
+              <a:t>Where the AI saved the most time</a:t>
+            </a:r>
+            <a:endParaRPr lang="en-US" sz="2000" dirty="0"/>
+          </a:p>
+        </p:txBody>
+      </p:sp>
+      <p:sp>
+        <p:nvSpPr>
+          <p:cNvPr id="16" name="where-0-title"/>
+          <p:cNvSpPr txBox="1"/>
+          <p:nvPr/>
+        </p:nvSpPr>
+        <p:spPr>
+          <a:xfrm>
+            <a:off x="548640" y="4754880"/>
+            <a:ext cx="3515258" cy="365760"/>
+          </a:xfrm>
+          <a:prstGeom prst="rect">
+            <a:avLst/>
+          </a:prstGeom>
+          <a:noFill/>
+          <a:ln/>
+        </p:spPr>
+        <p:txBody>
+          <a:bodyPr wrap="square" lIns="0" tIns="0" rIns="0" bIns="0" rtlCol="0" anchor="t"/>
+          <a:lstStyle/>
+          <a:p>
+            <a:pPr indent="0" marL="0">
+              <a:buNone/>
+            </a:pPr>
+            <a:r>
+              <a:rPr lang="en-US" sz="1600" b="1" dirty="0">
+                <a:solidFill>
+                  <a:schemeClr val="accent3"/>
+                </a:solidFill>
+              </a:rPr>
+              <a:t>Discovery</a:t>
+            </a:r>
+            <a:endParaRPr lang="en-US" sz="1600" dirty="0"/>
+          </a:p>
+        </p:txBody>
+      </p:sp>
+      <p:sp>
+        <p:nvSpPr>
+          <p:cNvPr id="17" name="where-0-body"/>
+          <p:cNvSpPr txBox="1"/>
+          <p:nvPr/>
+        </p:nvSpPr>
+        <p:spPr>
+          <a:xfrm>
+            <a:off x="548640" y="5138928"/>
+            <a:ext cx="3515258" cy="685800"/>
+          </a:xfrm>
+          <a:prstGeom prst="rect">
+            <a:avLst/>
+          </a:prstGeom>
+          <a:noFill/>
+          <a:ln/>
+        </p:spPr>
+        <p:txBody>
+          <a:bodyPr wrap="square" lIns="0" tIns="0" rIns="0" bIns="0" rtlCol="0" anchor="t"/>
+          <a:lstStyle/>
+          <a:p>
+            <a:pPr indent="0" marL="0">
+              <a:buNone/>
+            </a:pPr>
+            <a:r>
+              <a:rPr lang="en-US" sz="1500" dirty="0">
                 <a:solidFill>
                   <a:schemeClr val="tx2"/>
                 </a:solidFill>
               </a:rPr>
-              <a:t>[List the new React features you will demo]</a:t>
+              <a:t>105 features catalogued from the exports, with no docs to read</a:t>
+            </a:r>
+            <a:endParaRPr lang="en-US" sz="1500" dirty="0"/>
+          </a:p>
+        </p:txBody>
+      </p:sp>
+      <p:sp>
+        <p:nvSpPr>
+          <p:cNvPr id="18" name="where-1-title"/>
+          <p:cNvSpPr txBox="1"/>
+          <p:nvPr/>
+        </p:nvSpPr>
+        <p:spPr>
+          <a:xfrm>
+            <a:off x="4338218" y="4754880"/>
+            <a:ext cx="3515258" cy="365760"/>
+          </a:xfrm>
+          <a:prstGeom prst="rect">
+            <a:avLst/>
+          </a:prstGeom>
+          <a:noFill/>
+          <a:ln/>
+        </p:spPr>
+        <p:txBody>
+          <a:bodyPr wrap="square" lIns="0" tIns="0" rIns="0" bIns="0" rtlCol="0" anchor="t"/>
+          <a:lstStyle/>
+          <a:p>
+            <a:pPr indent="0" marL="0">
+              <a:buNone/>
+            </a:pPr>
+            <a:r>
+              <a:rPr lang="en-US" sz="1600" b="1" dirty="0">
+                <a:solidFill>
+                  <a:schemeClr val="accent3"/>
+                </a:solidFill>
+              </a:rPr>
+              <a:t>Gap analysis</a:t>
             </a:r>
             <a:endParaRPr lang="en-US" sz="1600" dirty="0"/>
           </a:p>
@@ -3497,95 +3839,109 @@
       </p:sp>
       <p:sp>
         <p:nvSpPr>
-          <p:cNvPr id="12" name="result-3-card"/>
-          <p:cNvSpPr/>
-          <p:nvPr/>
-        </p:nvSpPr>
-        <p:spPr>
-          <a:xfrm>
-            <a:off x="6233008" y="3931920"/>
-            <a:ext cx="5410048" cy="2057400"/>
-          </a:xfrm>
-          <a:prstGeom prst="roundRect">
-            <a:avLst>
-              <a:gd name="adj" fmla="val 5333"/>
-            </a:avLst>
-          </a:prstGeom>
-          <a:solidFill>
-            <a:schemeClr val="bg1"/>
-          </a:solidFill>
-          <a:ln/>
-        </p:spPr>
-      </p:sp>
-      <p:sp>
-        <p:nvSpPr>
-          <p:cNvPr id="13" name="result-3-title"/>
-          <p:cNvSpPr txBox="1"/>
-          <p:nvPr/>
-        </p:nvSpPr>
-        <p:spPr>
-          <a:xfrm>
-            <a:off x="6553048" y="4251960"/>
-            <a:ext cx="4769968" cy="685800"/>
-          </a:xfrm>
-          <a:prstGeom prst="rect">
-            <a:avLst/>
-          </a:prstGeom>
-          <a:noFill/>
-          <a:ln/>
-        </p:spPr>
-        <p:txBody>
-          <a:bodyPr wrap="square" lIns="0" tIns="0" rIns="0" bIns="0" rtlCol="0" anchor="t"/>
-          <a:lstStyle/>
-          <a:p>
-            <a:pPr indent="0" marL="0">
-              <a:buNone/>
-            </a:pPr>
-            <a:r>
-              <a:rPr lang="en-US" sz="3200" b="1" dirty="0">
-                <a:solidFill>
-                  <a:schemeClr val="tx1"/>
-                </a:solidFill>
-              </a:rPr>
-              <a:t>Documented</a:t>
-            </a:r>
-            <a:endParaRPr lang="en-US" sz="3200" dirty="0"/>
-          </a:p>
-        </p:txBody>
-      </p:sp>
-      <p:sp>
-        <p:nvSpPr>
-          <p:cNvPr id="14" name="result-3-body"/>
-          <p:cNvSpPr txBox="1"/>
-          <p:nvPr/>
-        </p:nvSpPr>
-        <p:spPr>
-          <a:xfrm>
-            <a:off x="6553048" y="4983480"/>
-            <a:ext cx="4769968" cy="731520"/>
-          </a:xfrm>
-          <a:prstGeom prst="rect">
-            <a:avLst/>
-          </a:prstGeom>
-          <a:noFill/>
-          <a:ln/>
-        </p:spPr>
-        <p:txBody>
-          <a:bodyPr wrap="square" lIns="0" tIns="0" rIns="0" bIns="0" rtlCol="0" anchor="t"/>
-          <a:lstStyle/>
-          <a:p>
-            <a:pPr indent="0" marL="0">
-              <a:buNone/>
-            </a:pPr>
-            <a:r>
-              <a:rPr lang="en-US" sz="1600" dirty="0">
+          <p:cNvPr id="19" name="where-1-body"/>
+          <p:cNvSpPr txBox="1"/>
+          <p:nvPr/>
+        </p:nvSpPr>
+        <p:spPr>
+          <a:xfrm>
+            <a:off x="4338218" y="5138928"/>
+            <a:ext cx="3515258" cy="685800"/>
+          </a:xfrm>
+          <a:prstGeom prst="rect">
+            <a:avLst/>
+          </a:prstGeom>
+          <a:noFill/>
+          <a:ln/>
+        </p:spPr>
+        <p:txBody>
+          <a:bodyPr wrap="square" lIns="0" tIns="0" rIns="0" bIns="0" rtlCol="0" anchor="t"/>
+          <a:lstStyle/>
+          <a:p>
+            <a:pPr indent="0" marL="0">
+              <a:buNone/>
+            </a:pPr>
+            <a:r>
+              <a:rPr lang="en-US" sz="1500" dirty="0">
                 <a:solidFill>
                   <a:schemeClr val="tx2"/>
                 </a:solidFill>
               </a:rPr>
-              <a:t>Architecture and lifecycle diagrams for both apps, where none existed</a:t>
+              <a:t>Every feature checked against the packed React code</a:t>
+            </a:r>
+            <a:endParaRPr lang="en-US" sz="1500" dirty="0"/>
+          </a:p>
+        </p:txBody>
+      </p:sp>
+      <p:sp>
+        <p:nvSpPr>
+          <p:cNvPr id="20" name="where-2-title"/>
+          <p:cNvSpPr txBox="1"/>
+          <p:nvPr/>
+        </p:nvSpPr>
+        <p:spPr>
+          <a:xfrm>
+            <a:off x="8127797" y="4754880"/>
+            <a:ext cx="3515258" cy="365760"/>
+          </a:xfrm>
+          <a:prstGeom prst="rect">
+            <a:avLst/>
+          </a:prstGeom>
+          <a:noFill/>
+          <a:ln/>
+        </p:spPr>
+        <p:txBody>
+          <a:bodyPr wrap="square" lIns="0" tIns="0" rIns="0" bIns="0" rtlCol="0" anchor="t"/>
+          <a:lstStyle/>
+          <a:p>
+            <a:pPr indent="0" marL="0">
+              <a:buNone/>
+            </a:pPr>
+            <a:r>
+              <a:rPr lang="en-US" sz="1600" b="1" dirty="0">
+                <a:solidFill>
+                  <a:schemeClr val="accent3"/>
+                </a:solidFill>
+              </a:rPr>
+              <a:t>Documentation</a:t>
             </a:r>
             <a:endParaRPr lang="en-US" sz="1600" dirty="0"/>
+          </a:p>
+        </p:txBody>
+      </p:sp>
+      <p:sp>
+        <p:nvSpPr>
+          <p:cNvPr id="21" name="where-2-body"/>
+          <p:cNvSpPr txBox="1"/>
+          <p:nvPr/>
+        </p:nvSpPr>
+        <p:spPr>
+          <a:xfrm>
+            <a:off x="8127797" y="5138928"/>
+            <a:ext cx="3515258" cy="685800"/>
+          </a:xfrm>
+          <a:prstGeom prst="rect">
+            <a:avLst/>
+          </a:prstGeom>
+          <a:noFill/>
+          <a:ln/>
+        </p:spPr>
+        <p:txBody>
+          <a:bodyPr wrap="square" lIns="0" tIns="0" rIns="0" bIns="0" rtlCol="0" anchor="t"/>
+          <a:lstStyle/>
+          <a:p>
+            <a:pPr indent="0" marL="0">
+              <a:buNone/>
+            </a:pPr>
+            <a:r>
+              <a:rPr lang="en-US" sz="1500" dirty="0">
+                <a:solidFill>
+                  <a:schemeClr val="tx2"/>
+                </a:solidFill>
+              </a:rPr>
+              <a:t>8 architecture and lifecycle diagrams produced alongside the work</a:t>
+            </a:r>
+            <a:endParaRPr lang="en-US" sz="1500" dirty="0"/>
           </a:p>
         </p:txBody>
       </p:sp>
@@ -3600,6 +3956,445 @@
 <file path=ppt/slides/slide6.xml><?xml version="1.0" encoding="utf-8"?>
 <p:sld xmlns:a="http://schemas.openxmlformats.org/drawingml/2006/main" xmlns:r="http://schemas.openxmlformats.org/officeDocument/2006/relationships" xmlns:p="http://schemas.openxmlformats.org/presentationml/2006/main">
   <p:cSld name="Slide 6">
+    <p:spTree>
+      <p:nvGrpSpPr>
+        <p:cNvPr id="1" name=""/>
+        <p:cNvGrpSpPr/>
+        <p:nvPr/>
+      </p:nvGrpSpPr>
+      <p:grpSpPr>
+        <a:xfrm>
+          <a:off x="0" y="0"/>
+          <a:ext cx="0" cy="0"/>
+          <a:chOff x="0" y="0"/>
+          <a:chExt cx="0" cy="0"/>
+        </a:xfrm>
+      </p:grpSpPr>
+      <p:sp>
+        <p:nvSpPr>
+          <p:cNvPr id="2" name="Text 0"/>
+          <p:cNvSpPr/>
+          <p:nvPr>
+            <p:ph idx="100" type="title" hasCustomPrompt="1"/>
+          </p:nvPr>
+        </p:nvSpPr>
+        <p:spPr>
+          <a:xfrm>
+            <a:off x="548640" y="502920"/>
+            <a:ext cx="11094415" cy="822960"/>
+          </a:xfrm>
+          <a:prstGeom prst="rect">
+            <a:avLst/>
+          </a:prstGeom>
+          <a:noFill/>
+          <a:ln/>
+        </p:spPr>
+        <p:txBody>
+          <a:bodyPr wrap="square" lIns="0" tIns="0" rIns="0" bIns="0" rtlCol="0" anchor="t"/>
+          <a:lstStyle/>
+          <a:p>
+            <a:pPr algn="l" indent="0" marL="0">
+              <a:buNone/>
+            </a:pPr>
+            <a:r>
+              <a:rPr lang="en-US" sz="3600" b="1" dirty="0">
+                <a:solidFill>
+                  <a:schemeClr val="tx1"/>
+                </a:solidFill>
+              </a:rPr>
+              <a:t>What we delivered in one SAFe PI</a:t>
+            </a:r>
+            <a:endParaRPr lang="en-US" sz="3600" dirty="0"/>
+          </a:p>
+        </p:txBody>
+      </p:sp>
+      <p:sp>
+        <p:nvSpPr>
+          <p:cNvPr id="3" name="result-0-card"/>
+          <p:cNvSpPr/>
+          <p:nvPr/>
+        </p:nvSpPr>
+        <p:spPr>
+          <a:xfrm>
+            <a:off x="548640" y="1600200"/>
+            <a:ext cx="5410048" cy="2057400"/>
+          </a:xfrm>
+          <a:prstGeom prst="roundRect">
+            <a:avLst>
+              <a:gd name="adj" fmla="val 5333"/>
+            </a:avLst>
+          </a:prstGeom>
+          <a:solidFill>
+            <a:schemeClr val="bg1"/>
+          </a:solidFill>
+          <a:ln/>
+        </p:spPr>
+      </p:sp>
+      <p:sp>
+        <p:nvSpPr>
+          <p:cNvPr id="4" name="result-0-title"/>
+          <p:cNvSpPr txBox="1"/>
+          <p:nvPr/>
+        </p:nvSpPr>
+        <p:spPr>
+          <a:xfrm>
+            <a:off x="868680" y="1920240"/>
+            <a:ext cx="4769968" cy="685800"/>
+          </a:xfrm>
+          <a:prstGeom prst="rect">
+            <a:avLst/>
+          </a:prstGeom>
+          <a:noFill/>
+          <a:ln/>
+        </p:spPr>
+        <p:txBody>
+          <a:bodyPr wrap="square" lIns="0" tIns="0" rIns="0" bIns="0" rtlCol="0" anchor="t"/>
+          <a:lstStyle/>
+          <a:p>
+            <a:pPr indent="0" marL="0">
+              <a:buNone/>
+            </a:pPr>
+            <a:r>
+              <a:rPr lang="en-US" sz="3200" b="1" dirty="0">
+                <a:solidFill>
+                  <a:schemeClr val="accent3"/>
+                </a:solidFill>
+              </a:rPr>
+              <a:t>105 features</a:t>
+            </a:r>
+            <a:endParaRPr lang="en-US" sz="3200" dirty="0"/>
+          </a:p>
+        </p:txBody>
+      </p:sp>
+      <p:sp>
+        <p:nvSpPr>
+          <p:cNvPr id="5" name="result-0-body"/>
+          <p:cNvSpPr txBox="1"/>
+          <p:nvPr/>
+        </p:nvSpPr>
+        <p:spPr>
+          <a:xfrm>
+            <a:off x="868680" y="2651760"/>
+            <a:ext cx="4769968" cy="731520"/>
+          </a:xfrm>
+          <a:prstGeom prst="rect">
+            <a:avLst/>
+          </a:prstGeom>
+          <a:noFill/>
+          <a:ln/>
+        </p:spPr>
+        <p:txBody>
+          <a:bodyPr wrap="square" lIns="0" tIns="0" rIns="0" bIns="0" rtlCol="0" anchor="t"/>
+          <a:lstStyle/>
+          <a:p>
+            <a:pPr indent="0" marL="0">
+              <a:buNone/>
+            </a:pPr>
+            <a:r>
+              <a:rPr lang="en-US" sz="1600" dirty="0">
+                <a:solidFill>
+                  <a:schemeClr val="tx2"/>
+                </a:solidFill>
+              </a:rPr>
+              <a:t>Catalogued and compared one by one, so nothing was lost by accident</a:t>
+            </a:r>
+            <a:endParaRPr lang="en-US" sz="1600" dirty="0"/>
+          </a:p>
+        </p:txBody>
+      </p:sp>
+      <p:sp>
+        <p:nvSpPr>
+          <p:cNvPr id="6" name="result-1-card"/>
+          <p:cNvSpPr/>
+          <p:nvPr/>
+        </p:nvSpPr>
+        <p:spPr>
+          <a:xfrm>
+            <a:off x="6233008" y="1600200"/>
+            <a:ext cx="5410048" cy="2057400"/>
+          </a:xfrm>
+          <a:prstGeom prst="roundRect">
+            <a:avLst>
+              <a:gd name="adj" fmla="val 5333"/>
+            </a:avLst>
+          </a:prstGeom>
+          <a:solidFill>
+            <a:schemeClr val="bg1"/>
+          </a:solidFill>
+          <a:ln/>
+        </p:spPr>
+      </p:sp>
+      <p:sp>
+        <p:nvSpPr>
+          <p:cNvPr id="7" name="result-1-title"/>
+          <p:cNvSpPr txBox="1"/>
+          <p:nvPr/>
+        </p:nvSpPr>
+        <p:spPr>
+          <a:xfrm>
+            <a:off x="6553048" y="1920240"/>
+            <a:ext cx="4769968" cy="685800"/>
+          </a:xfrm>
+          <a:prstGeom prst="rect">
+            <a:avLst/>
+          </a:prstGeom>
+          <a:noFill/>
+          <a:ln/>
+        </p:spPr>
+        <p:txBody>
+          <a:bodyPr wrap="square" lIns="0" tIns="0" rIns="0" bIns="0" rtlCol="0" anchor="t"/>
+          <a:lstStyle/>
+          <a:p>
+            <a:pPr indent="0" marL="0">
+              <a:buNone/>
+            </a:pPr>
+            <a:r>
+              <a:rPr lang="en-US" sz="3200" b="1" dirty="0">
+                <a:solidFill>
+                  <a:schemeClr val="tx1"/>
+                </a:solidFill>
+              </a:rPr>
+              <a:t>Gaps fixed</a:t>
+            </a:r>
+            <a:endParaRPr lang="en-US" sz="3200" dirty="0"/>
+          </a:p>
+        </p:txBody>
+      </p:sp>
+      <p:sp>
+        <p:nvSpPr>
+          <p:cNvPr id="8" name="result-1-body"/>
+          <p:cNvSpPr txBox="1"/>
+          <p:nvPr/>
+        </p:nvSpPr>
+        <p:spPr>
+          <a:xfrm>
+            <a:off x="6553048" y="2651760"/>
+            <a:ext cx="4769968" cy="731520"/>
+          </a:xfrm>
+          <a:prstGeom prst="rect">
+            <a:avLst/>
+          </a:prstGeom>
+          <a:noFill/>
+          <a:ln/>
+        </p:spPr>
+        <p:txBody>
+          <a:bodyPr wrap="square" lIns="0" tIns="0" rIns="0" bIns="0" rtlCol="0" anchor="t"/>
+          <a:lstStyle/>
+          <a:p>
+            <a:pPr indent="0" marL="0">
+              <a:buNone/>
+            </a:pPr>
+            <a:r>
+              <a:rPr lang="en-US" sz="1600" dirty="0">
+                <a:solidFill>
+                  <a:schemeClr val="tx2"/>
+                </a:solidFill>
+              </a:rPr>
+              <a:t>Including dashboard sharing access in the backend workflow, now deployed</a:t>
+            </a:r>
+            <a:endParaRPr lang="en-US" sz="1600" dirty="0"/>
+          </a:p>
+        </p:txBody>
+      </p:sp>
+      <p:sp>
+        <p:nvSpPr>
+          <p:cNvPr id="9" name="result-2-card"/>
+          <p:cNvSpPr/>
+          <p:nvPr/>
+        </p:nvSpPr>
+        <p:spPr>
+          <a:xfrm>
+            <a:off x="548640" y="3931920"/>
+            <a:ext cx="5410048" cy="2057400"/>
+          </a:xfrm>
+          <a:prstGeom prst="roundRect">
+            <a:avLst>
+              <a:gd name="adj" fmla="val 5333"/>
+            </a:avLst>
+          </a:prstGeom>
+          <a:solidFill>
+            <a:schemeClr val="bg1"/>
+          </a:solidFill>
+          <a:ln/>
+        </p:spPr>
+      </p:sp>
+      <p:sp>
+        <p:nvSpPr>
+          <p:cNvPr id="10" name="result-2-title"/>
+          <p:cNvSpPr txBox="1"/>
+          <p:nvPr/>
+        </p:nvSpPr>
+        <p:spPr>
+          <a:xfrm>
+            <a:off x="868680" y="4251960"/>
+            <a:ext cx="4769968" cy="685800"/>
+          </a:xfrm>
+          <a:prstGeom prst="rect">
+            <a:avLst/>
+          </a:prstGeom>
+          <a:noFill/>
+          <a:ln/>
+        </p:spPr>
+        <p:txBody>
+          <a:bodyPr wrap="square" lIns="0" tIns="0" rIns="0" bIns="0" rtlCol="0" anchor="t"/>
+          <a:lstStyle/>
+          <a:p>
+            <a:pPr indent="0" marL="0">
+              <a:buNone/>
+            </a:pPr>
+            <a:r>
+              <a:rPr lang="en-US" sz="3200" b="1" dirty="0">
+                <a:solidFill>
+                  <a:schemeClr val="tx1"/>
+                </a:solidFill>
+              </a:rPr>
+              <a:t>New features</a:t>
+            </a:r>
+            <a:endParaRPr lang="en-US" sz="3200" dirty="0"/>
+          </a:p>
+        </p:txBody>
+      </p:sp>
+      <p:sp>
+        <p:nvSpPr>
+          <p:cNvPr id="11" name="result-2-body"/>
+          <p:cNvSpPr txBox="1"/>
+          <p:nvPr/>
+        </p:nvSpPr>
+        <p:spPr>
+          <a:xfrm>
+            <a:off x="868680" y="4983480"/>
+            <a:ext cx="4769968" cy="731520"/>
+          </a:xfrm>
+          <a:prstGeom prst="rect">
+            <a:avLst/>
+          </a:prstGeom>
+          <a:noFill/>
+          <a:ln/>
+        </p:spPr>
+        <p:txBody>
+          <a:bodyPr wrap="square" lIns="0" tIns="0" rIns="0" bIns="0" rtlCol="0" anchor="t"/>
+          <a:lstStyle/>
+          <a:p>
+            <a:pPr indent="0" marL="0">
+              <a:buNone/>
+            </a:pPr>
+            <a:r>
+              <a:rPr lang="en-US" sz="1600" dirty="0">
+                <a:solidFill>
+                  <a:schemeClr val="tx2"/>
+                </a:solidFill>
+              </a:rPr>
+              <a:t>[List the new React features you will demo]</a:t>
+            </a:r>
+            <a:endParaRPr lang="en-US" sz="1600" dirty="0"/>
+          </a:p>
+        </p:txBody>
+      </p:sp>
+      <p:sp>
+        <p:nvSpPr>
+          <p:cNvPr id="12" name="result-3-card"/>
+          <p:cNvSpPr/>
+          <p:nvPr/>
+        </p:nvSpPr>
+        <p:spPr>
+          <a:xfrm>
+            <a:off x="6233008" y="3931920"/>
+            <a:ext cx="5410048" cy="2057400"/>
+          </a:xfrm>
+          <a:prstGeom prst="roundRect">
+            <a:avLst>
+              <a:gd name="adj" fmla="val 5333"/>
+            </a:avLst>
+          </a:prstGeom>
+          <a:solidFill>
+            <a:schemeClr val="bg1"/>
+          </a:solidFill>
+          <a:ln/>
+        </p:spPr>
+      </p:sp>
+      <p:sp>
+        <p:nvSpPr>
+          <p:cNvPr id="13" name="result-3-title"/>
+          <p:cNvSpPr txBox="1"/>
+          <p:nvPr/>
+        </p:nvSpPr>
+        <p:spPr>
+          <a:xfrm>
+            <a:off x="6553048" y="4251960"/>
+            <a:ext cx="4769968" cy="685800"/>
+          </a:xfrm>
+          <a:prstGeom prst="rect">
+            <a:avLst/>
+          </a:prstGeom>
+          <a:noFill/>
+          <a:ln/>
+        </p:spPr>
+        <p:txBody>
+          <a:bodyPr wrap="square" lIns="0" tIns="0" rIns="0" bIns="0" rtlCol="0" anchor="t"/>
+          <a:lstStyle/>
+          <a:p>
+            <a:pPr indent="0" marL="0">
+              <a:buNone/>
+            </a:pPr>
+            <a:r>
+              <a:rPr lang="en-US" sz="3200" b="1" dirty="0">
+                <a:solidFill>
+                  <a:schemeClr val="tx1"/>
+                </a:solidFill>
+              </a:rPr>
+              <a:t>Documented</a:t>
+            </a:r>
+            <a:endParaRPr lang="en-US" sz="3200" dirty="0"/>
+          </a:p>
+        </p:txBody>
+      </p:sp>
+      <p:sp>
+        <p:nvSpPr>
+          <p:cNvPr id="14" name="result-3-body"/>
+          <p:cNvSpPr txBox="1"/>
+          <p:nvPr/>
+        </p:nvSpPr>
+        <p:spPr>
+          <a:xfrm>
+            <a:off x="6553048" y="4983480"/>
+            <a:ext cx="4769968" cy="731520"/>
+          </a:xfrm>
+          <a:prstGeom prst="rect">
+            <a:avLst/>
+          </a:prstGeom>
+          <a:noFill/>
+          <a:ln/>
+        </p:spPr>
+        <p:txBody>
+          <a:bodyPr wrap="square" lIns="0" tIns="0" rIns="0" bIns="0" rtlCol="0" anchor="t"/>
+          <a:lstStyle/>
+          <a:p>
+            <a:pPr indent="0" marL="0">
+              <a:buNone/>
+            </a:pPr>
+            <a:r>
+              <a:rPr lang="en-US" sz="1600" dirty="0">
+                <a:solidFill>
+                  <a:schemeClr val="tx2"/>
+                </a:solidFill>
+              </a:rPr>
+              <a:t>Architecture and lifecycle diagrams for both apps, where none existed</a:t>
+            </a:r>
+            <a:endParaRPr lang="en-US" sz="1600" dirty="0"/>
+          </a:p>
+        </p:txBody>
+      </p:sp>
+    </p:spTree>
+  </p:cSld>
+  <p:clrMapOvr>
+    <a:masterClrMapping/>
+  </p:clrMapOvr>
+</p:sld>
+</file>
+
+<file path=ppt/slides/slide7.xml><?xml version="1.0" encoding="utf-8"?>
+<p:sld xmlns:a="http://schemas.openxmlformats.org/drawingml/2006/main" xmlns:r="http://schemas.openxmlformats.org/officeDocument/2006/relationships" xmlns:p="http://schemas.openxmlformats.org/presentationml/2006/main">
+  <p:cSld name="Slide 7">
     <p:spTree>
       <p:nvGrpSpPr>
         <p:cNvPr id="1" name=""/>

--- a/erm-migration/docs/ERM-Migration-Jury-Pitch.pptx
+++ b/erm-migration/docs/ERM-Migration-Jury-Pitch.pptx
@@ -113,25 +113,25 @@
   <p:extLst>
     <p:ext uri="{521415D9-36F7-43E2-AB2F-B90AF26B5E84}">
       <p14:sectionLst xmlns:p14="http://schemas.microsoft.com/office/powerpoint/2010/main">
-        <p14:section name="Pitch" id="{c5fdbef1-2242-f2f2-7c49-bd7fd0e4346e}">
+        <p14:section name="Pitch" id="{f9d7b542-1bb9-af64-8da4-219e9bdf59af}">
           <p14:sldIdLst>
             <p14:sldId id="256"/>
           </p14:sldIdLst>
         </p14:section>
-        <p14:section name="Problem and method" id="{45e1f99c-1e2b-c64c-9a7a-4dfa2194a18e}">
+        <p14:section name="Problem and method" id="{e840d901-d90f-1a05-676e-e0f15e83fea3}">
           <p14:sldIdLst>
             <p14:sldId id="257"/>
             <p14:sldId id="258"/>
           </p14:sldIdLst>
         </p14:section>
-        <p14:section name="Impact" id="{243a8934-3c6e-b6b2-b366-ecd90d319511}">
+        <p14:section name="Impact" id="{28961b5f-3114-2e9c-40db-c9292b2ea9fd}">
           <p14:sldIdLst>
             <p14:sldId id="259"/>
             <p14:sldId id="260"/>
             <p14:sldId id="261"/>
           </p14:sldIdLst>
         </p14:section>
-        <p14:section name="Reuse" id="{e594c4fd-50d8-de63-a813-b28990026acf}">
+        <p14:section name="Reuse" id="{0078f65d-e0ff-5fdd-4c8b-1a5aa75b7031}">
           <p14:sldIdLst>
             <p14:sldId id="262"/>
           </p14:sldIdLst>
@@ -892,7 +892,7 @@
           <a:p>
             <a:r>
               <a:rPr lang="en-US" dirty="0"/>
-              <a:t>Fill in the numbers before presenting. Give the estimate the migration would have needed without AI, and say where it came from (for example the original PI planning). Then the actual effort: one PI, with the number of sprints and people. The percentage saved is (estimate minus actual) divided by estimate. Then say where the time went: discovery was the biggest saving, because the AI catalogued 105 features straight from the Slate exports with no documentation to read; gap analysis, because every feature was checked against the packed React code; and documentation, because the diagrams were produced alongside the work instead of afterwards.</a:t>
+              <a:t>These are generic industry-style estimates, not our measured baseline; say so if asked. A manual migration of 105 features typically needs about half a day per feature to reverse-engineer it, two days to rebuild it and half a day to test parity, plus about 25 days to document the app: roughly 340 person-days, or about 7 sprints for a team of 5. We did it in one PI, 4 development sprints, which is about 40% less effort. Then say where the time went: discovery was the biggest saving, because the AI catalogued 105 features straight from the Slate exports with no documentation to read; gap analysis, because every feature was checked against the packed React code; and documentation, because the diagrams were produced alongside the work instead of afterwards.</a:t>
             </a:r>
             <a:endParaRPr lang="en-US" dirty="0"/>
           </a:p>
@@ -3297,7 +3297,7 @@
                   <a:schemeClr val="tx1"/>
                 </a:solidFill>
               </a:rPr>
-              <a:t>Effort saved: [__] sprints in one PI</a:t>
+              <a:t>Effort saved: about 40% versus manual</a:t>
             </a:r>
             <a:endParaRPr lang="en-US" sz="3600" dirty="0"/>
           </a:p>
@@ -3355,7 +3355,7 @@
                   <a:schemeClr val="tx1"/>
                 </a:solidFill>
               </a:rPr>
-              <a:t>[__]</a:t>
+              <a:t>~7</a:t>
             </a:r>
             <a:endParaRPr lang="en-US" sz="4800" dirty="0"/>
           </a:p>
@@ -3391,7 +3391,7 @@
                   <a:schemeClr val="tx1"/>
                 </a:solidFill>
               </a:rPr>
-              <a:t>Estimate without AI</a:t>
+              <a:t>Manual estimate</a:t>
             </a:r>
             <a:endParaRPr lang="en-US" sz="1800" dirty="0"/>
           </a:p>
@@ -3427,7 +3427,7 @@
                   <a:schemeClr val="tx2"/>
                 </a:solidFill>
               </a:rPr>
-              <a:t>sprints, from [source, e.g. PI planning]</a:t>
+              <a:t>sprints, ≈ 340 person-days</a:t>
             </a:r>
             <a:endParaRPr lang="en-US" sz="1400" dirty="0"/>
           </a:p>
@@ -3485,7 +3485,7 @@
                   <a:schemeClr val="tx1"/>
                 </a:solidFill>
               </a:rPr>
-              <a:t>1 PI</a:t>
+              <a:t>4</a:t>
             </a:r>
             <a:endParaRPr lang="en-US" sz="4800" dirty="0"/>
           </a:p>
@@ -3521,7 +3521,7 @@
                   <a:schemeClr val="tx1"/>
                 </a:solidFill>
               </a:rPr>
-              <a:t>Actual effort with AI</a:t>
+              <a:t>Actual with AI</a:t>
             </a:r>
             <a:endParaRPr lang="en-US" sz="1800" dirty="0"/>
           </a:p>
@@ -3557,7 +3557,7 @@
                   <a:schemeClr val="tx2"/>
                 </a:solidFill>
               </a:rPr>
-              <a:t>[__] sprints, [__] people</a:t>
+              <a:t>sprints, in one PI</a:t>
             </a:r>
             <a:endParaRPr lang="en-US" sz="1400" dirty="0"/>
           </a:p>
@@ -3615,7 +3615,7 @@
                   <a:schemeClr val="accent1"/>
                 </a:solidFill>
               </a:rPr>
-              <a:t>[__]%</a:t>
+              <a:t>~40%</a:t>
             </a:r>
             <a:endParaRPr lang="en-US" sz="4800" dirty="0"/>
           </a:p>
@@ -3687,7 +3687,7 @@
                   <a:schemeClr val="accent5"/>
                 </a:solidFill>
               </a:rPr>
-              <a:t>(estimate − actual) ÷ estimate</a:t>
+              <a:t>(7 − 4) ÷ 7 sprints</a:t>
             </a:r>
             <a:endParaRPr lang="en-US" sz="1400" dirty="0"/>
           </a:p>
@@ -3942,6 +3942,42 @@
               <a:t>8 architecture and lifecycle diagrams produced alongside the work</a:t>
             </a:r>
             <a:endParaRPr lang="en-US" sz="1500" dirty="0"/>
+          </a:p>
+        </p:txBody>
+      </p:sp>
+      <p:sp>
+        <p:nvSpPr>
+          <p:cNvPr id="22" name="effort-assumptions"/>
+          <p:cNvSpPr txBox="1"/>
+          <p:nvPr/>
+        </p:nvSpPr>
+        <p:spPr>
+          <a:xfrm>
+            <a:off x="548640" y="5989320"/>
+            <a:ext cx="11094415" cy="457200"/>
+          </a:xfrm>
+          <a:prstGeom prst="rect">
+            <a:avLst/>
+          </a:prstGeom>
+          <a:noFill/>
+          <a:ln/>
+        </p:spPr>
+        <p:txBody>
+          <a:bodyPr wrap="square" lIns="0" tIns="0" rIns="0" bIns="0" rtlCol="0" anchor="t"/>
+          <a:lstStyle/>
+          <a:p>
+            <a:pPr indent="0" marL="0">
+              <a:buNone/>
+            </a:pPr>
+            <a:r>
+              <a:rPr lang="en-US" sz="1100" i="1" dirty="0">
+                <a:solidFill>
+                  <a:schemeClr val="tx2"/>
+                </a:solidFill>
+              </a:rPr>
+              <a:t>Generic estimate, not a measured baseline: 105 features × (0.5 day discovery + 2 days build + 0.5 day parity testing) + 25 days documentation ≈ 340 person-days. Team of 5, 2-week sprints = 50 person-days per sprint; 1 PI = 4 development sprints.</a:t>
+            </a:r>
+            <a:endParaRPr lang="en-US" sz="1100" dirty="0"/>
           </a:p>
         </p:txBody>
       </p:sp>

--- a/erm-migration/docs/ERM-Migration-Jury-Pitch.pptx
+++ b/erm-migration/docs/ERM-Migration-Jury-Pitch.pptx
@@ -12,9 +12,10 @@
     <p:sldId id="260" r:id="rId6"/>
     <p:sldId id="261" r:id="rId7"/>
     <p:sldId id="262" r:id="rId8"/>
+    <p:sldId id="263" r:id="rId9"/>
   </p:sldIdLst>
   <p:notesMasterIdLst>
-    <p:notesMasterId r:id="rId9"/>
+    <p:notesMasterId r:id="rId10"/>
   </p:notesMasterIdLst>
   <p:sldSz cx="12192000" cy="6858000"/>
   <p:notesSz cx="6858000" cy="12192000"/>
@@ -113,27 +114,28 @@
   <p:extLst>
     <p:ext uri="{521415D9-36F7-43E2-AB2F-B90AF26B5E84}">
       <p14:sectionLst xmlns:p14="http://schemas.microsoft.com/office/powerpoint/2010/main">
-        <p14:section name="Pitch" id="{f9d7b542-1bb9-af64-8da4-219e9bdf59af}">
+        <p14:section name="Pitch" id="{33ca7ca2-bc01-2ed2-fb6a-97406a12c4f4}">
           <p14:sldIdLst>
             <p14:sldId id="256"/>
           </p14:sldIdLst>
         </p14:section>
-        <p14:section name="Problem and method" id="{e840d901-d90f-1a05-676e-e0f15e83fea3}">
+        <p14:section name="Problem and method" id="{de6ffe95-0ce3-e50b-5752-1e7c262878da}">
           <p14:sldIdLst>
             <p14:sldId id="257"/>
             <p14:sldId id="258"/>
           </p14:sldIdLst>
         </p14:section>
-        <p14:section name="Impact" id="{28961b5f-3114-2e9c-40db-c9292b2ea9fd}">
+        <p14:section name="Impact" id="{42ae12a4-0680-d832-7970-7c67feddbf72}">
           <p14:sldIdLst>
             <p14:sldId id="259"/>
             <p14:sldId id="260"/>
             <p14:sldId id="261"/>
+            <p14:sldId id="262"/>
           </p14:sldIdLst>
         </p14:section>
-        <p14:section name="Reuse" id="{0078f65d-e0ff-5fdd-4c8b-1a5aa75b7031}">
+        <p14:section name="Reuse" id="{e8beae28-e3cb-39fb-e193-be7fb727433d}">
           <p14:sldIdLst>
-            <p14:sldId id="262"/>
+            <p14:sldId id="263"/>
           </p14:sldIdLst>
         </p14:section>
       </p14:sectionLst>
@@ -892,7 +894,7 @@
           <a:p>
             <a:r>
               <a:rPr lang="en-US" dirty="0"/>
-              <a:t>These are generic industry-style estimates, not our measured baseline; say so if asked. A manual migration of 105 features typically needs about half a day per feature to reverse-engineer it, two days to rebuild it and half a day to test parity, plus about 25 days to document the app: roughly 340 person-days, or about 7 sprints for a team of 5. We did it in one PI, 4 development sprints, which is about 40% less effort. Then say where the time went: discovery was the biggest saving, because the AI catalogued 105 features straight from the Slate exports with no documentation to read; gap analysis, because every feature was checked against the packed React code; and documentation, because the diagrams were produced alongside the work instead of afterwards.</a:t>
+              <a:t>These are generic industry-style estimates, not our measured baseline; say so if asked. A manual migration of 105 features typically needs about half a day per feature to reverse-engineer it, two days to rebuild it and half a day to test parity, plus about 25 days to document the app: roughly 340 person-days, or about 17 sprints for our team of 2 developers, more than 4 PIs. We did it in one PI, 4 development sprints, which is about 76% less effort. Then say where the time went: discovery was the biggest saving, because the AI catalogued 105 features straight from the Slate exports with no documentation to read; gap analysis, because every feature was checked against the packed React code; and documentation, because the diagrams were produced alongside the work instead of afterwards.</a:t>
             </a:r>
             <a:endParaRPr lang="en-US" dirty="0"/>
           </a:p>
@@ -1068,7 +1070,7 @@
           <a:p>
             <a:r>
               <a:rPr lang="en-US" dirty="0"/>
-              <a:t>Close on reuse. This was a team effort across business, data and security, backend and frontend; name the teams. The method needs only the legacy export, the new codebase and an AI model, so it carries over to other Slate apps and to other legacy tools. The pieces are ready: pack-project.ts, the comparison document layout and the diagram formats. End with the five-word playbook and invite questions.</a:t>
+              <a:t>This slide ties the work to the 2026 objectives; each row appears in turn. Leverage AI to solve business problems: this is an AI-assisted migration of a complex, undocumented app, and the method is now a playbook. Deliver on time, cost and quality: two developers did it in one PI, about 76% less effort than a generic manual estimate. Manage our risks: the AI review caught 7 security and data-integrity issues, the restricted-view access model was kept, and we removed a dependency on Slate configuration by moving to standard React and OSDK code. Digital Design Authority: the app now has 8 architecture and lifecycle diagrams and a documented feature catalogue. Digital acumen and competencies: pack-project.ts and the playbook let other teams repeat this. Customer satisfaction: ERM users get 5 enhancements the old app did not have.</a:t>
             </a:r>
             <a:endParaRPr lang="en-US" dirty="0"/>
           </a:p>
@@ -1092,6 +1094,94 @@
             <a:fld id="{F7021451-1387-4CA6-816F-3879F97B5CBC}" type="slidenum">
               <a:rPr lang="en-US"/>
               <a:t>7</a:t>
+            </a:fld>
+            <a:endParaRPr lang="en-US"/>
+          </a:p>
+        </p:txBody>
+      </p:sp>
+    </p:spTree>
+    <p:extLst>
+      <p:ext uri="{BB962C8B-B14F-4D97-AF65-F5344CB8AC3E}">
+        <p14:creationId xmlns:p14="http://schemas.microsoft.com/office/powerpoint/2010/main" val="1024086991"/>
+      </p:ext>
+    </p:extLst>
+  </p:cSld>
+  <p:clrMapOvr>
+    <a:masterClrMapping/>
+  </p:clrMapOvr>
+</p:notes>
+</file>
+
+<file path=ppt/notesSlides/notesSlide8.xml><?xml version="1.0" encoding="utf-8"?>
+<p:notes xmlns:a="http://schemas.openxmlformats.org/drawingml/2006/main" xmlns:r="http://schemas.openxmlformats.org/officeDocument/2006/relationships" xmlns:p="http://schemas.openxmlformats.org/presentationml/2006/main">
+  <p:cSld>
+    <p:spTree>
+      <p:nvGrpSpPr>
+        <p:cNvPr id="1" name=""/>
+        <p:cNvGrpSpPr/>
+        <p:nvPr/>
+      </p:nvGrpSpPr>
+      <p:grpSpPr>
+        <a:xfrm>
+          <a:off x="0" y="0"/>
+          <a:ext cx="0" cy="0"/>
+          <a:chOff x="0" y="0"/>
+          <a:chExt cx="0" cy="0"/>
+        </a:xfrm>
+      </p:grpSpPr>
+      <p:sp>
+        <p:nvSpPr>
+          <p:cNvPr id="2" name="Slide Image Placeholder 1"/>
+          <p:cNvSpPr>
+            <a:spLocks noGrp="1" noRot="1" noChangeAspect="1"/>
+          </p:cNvSpPr>
+          <p:nvPr>
+            <p:ph type="sldImg"/>
+          </p:nvPr>
+        </p:nvSpPr>
+        <p:spPr/>
+      </p:sp>
+      <p:sp>
+        <p:nvSpPr>
+          <p:cNvPr id="3" name="Notes Placeholder 2"/>
+          <p:cNvSpPr>
+            <a:spLocks noGrp="1"/>
+          </p:cNvSpPr>
+          <p:nvPr>
+            <p:ph type="body" idx="1"/>
+          </p:nvPr>
+        </p:nvSpPr>
+        <p:spPr/>
+        <p:txBody>
+          <a:bodyPr/>
+          <a:lstStyle/>
+          <a:p>
+            <a:r>
+              <a:rPr lang="en-US" dirty="0"/>
+              <a:t>Close on reuse. This was a team effort across business, data and security, backend and frontend; name the teams. The method needs only the legacy export, the new codebase and an AI model, so it carries over to other Slate apps and to other legacy tools. The pieces are ready: pack-project.ts, the comparison document layout and the diagram formats. End with the five-word playbook and invite questions.</a:t>
+            </a:r>
+            <a:endParaRPr lang="en-US" dirty="0"/>
+          </a:p>
+        </p:txBody>
+      </p:sp>
+      <p:sp>
+        <p:nvSpPr>
+          <p:cNvPr id="4" name="Slide Number Placeholder 3"/>
+          <p:cNvSpPr>
+            <a:spLocks noGrp="1"/>
+          </p:cNvSpPr>
+          <p:nvPr>
+            <p:ph type="sldNum" sz="quarter" idx="10"/>
+          </p:nvPr>
+        </p:nvSpPr>
+        <p:spPr/>
+        <p:txBody>
+          <a:bodyPr/>
+          <a:lstStyle/>
+          <a:p>
+            <a:fld id="{F7021451-1387-4CA6-816F-3879F97B5CBC}" type="slidenum">
+              <a:rPr lang="en-US"/>
+              <a:t>8</a:t>
             </a:fld>
             <a:endParaRPr lang="en-US"/>
           </a:p>
@@ -3297,7 +3387,7 @@
                   <a:schemeClr val="tx1"/>
                 </a:solidFill>
               </a:rPr>
-              <a:t>Effort saved: about 40% versus manual</a:t>
+              <a:t>Effort saved: about 76% versus manual</a:t>
             </a:r>
             <a:endParaRPr lang="en-US" sz="3600" dirty="0"/>
           </a:p>
@@ -3355,7 +3445,7 @@
                   <a:schemeClr val="tx1"/>
                 </a:solidFill>
               </a:rPr>
-              <a:t>~7</a:t>
+              <a:t>~17</a:t>
             </a:r>
             <a:endParaRPr lang="en-US" sz="4800" dirty="0"/>
           </a:p>
@@ -3615,7 +3705,7 @@
                   <a:schemeClr val="accent1"/>
                 </a:solidFill>
               </a:rPr>
-              <a:t>~40%</a:t>
+              <a:t>~76%</a:t>
             </a:r>
             <a:endParaRPr lang="en-US" sz="4800" dirty="0"/>
           </a:p>
@@ -3687,7 +3777,7 @@
                   <a:schemeClr val="accent5"/>
                 </a:solidFill>
               </a:rPr>
-              <a:t>(7 − 4) ÷ 7 sprints</a:t>
+              <a:t>(17 − 4) ÷ 17 sprints</a:t>
             </a:r>
             <a:endParaRPr lang="en-US" sz="1400" dirty="0"/>
           </a:p>
@@ -3975,7 +4065,7 @@
                   <a:schemeClr val="tx2"/>
                 </a:solidFill>
               </a:rPr>
-              <a:t>Generic estimate, not a measured baseline: 105 features × (0.5 day discovery + 2 days build + 0.5 day parity testing) + 25 days documentation ≈ 340 person-days. Team of 5, 2-week sprints = 50 person-days per sprint; 1 PI = 4 development sprints.</a:t>
+              <a:t>Generic estimate, not a measured baseline: 105 features × (0.5 day discovery + 2 days build + 0.5 day parity testing) + 25 days documentation ≈ 340 person-days. Team of 2 developers, 2-week sprints = 20 person-days per sprint; 1 PI = 4 development sprints.</a:t>
             </a:r>
             <a:endParaRPr lang="en-US" sz="1100" dirty="0"/>
           </a:p>
@@ -4431,6 +4521,2252 @@
 <file path=ppt/slides/slide7.xml><?xml version="1.0" encoding="utf-8"?>
 <p:sld xmlns:a="http://schemas.openxmlformats.org/drawingml/2006/main" xmlns:r="http://schemas.openxmlformats.org/officeDocument/2006/relationships" xmlns:p="http://schemas.openxmlformats.org/presentationml/2006/main">
   <p:cSld name="Slide 7">
+    <p:spTree>
+      <p:nvGrpSpPr>
+        <p:cNvPr id="1" name=""/>
+        <p:cNvGrpSpPr/>
+        <p:nvPr/>
+      </p:nvGrpSpPr>
+      <p:grpSpPr>
+        <a:xfrm>
+          <a:off x="0" y="0"/>
+          <a:ext cx="0" cy="0"/>
+          <a:chOff x="0" y="0"/>
+          <a:chExt cx="0" cy="0"/>
+        </a:xfrm>
+      </p:grpSpPr>
+      <p:sp>
+        <p:nvSpPr>
+          <p:cNvPr id="2" name="Text 0"/>
+          <p:cNvSpPr/>
+          <p:nvPr>
+            <p:ph idx="100" type="title" hasCustomPrompt="1"/>
+          </p:nvPr>
+        </p:nvSpPr>
+        <p:spPr>
+          <a:xfrm>
+            <a:off x="548640" y="502920"/>
+            <a:ext cx="11094415" cy="822960"/>
+          </a:xfrm>
+          <a:prstGeom prst="rect">
+            <a:avLst/>
+          </a:prstGeom>
+          <a:noFill/>
+          <a:ln/>
+        </p:spPr>
+        <p:txBody>
+          <a:bodyPr wrap="square" lIns="0" tIns="0" rIns="0" bIns="0" rtlCol="0" anchor="t"/>
+          <a:lstStyle/>
+          <a:p>
+            <a:pPr algn="l" indent="0" marL="0">
+              <a:buNone/>
+            </a:pPr>
+            <a:r>
+              <a:rPr lang="en-US" sz="3600" b="1" dirty="0">
+                <a:solidFill>
+                  <a:schemeClr val="tx1"/>
+                </a:solidFill>
+              </a:rPr>
+              <a:t>Our contribution to the 2026 objectives</a:t>
+            </a:r>
+            <a:endParaRPr lang="en-US" sz="3600" dirty="0"/>
+          </a:p>
+        </p:txBody>
+      </p:sp>
+      <p:sp>
+        <p:nvSpPr>
+          <p:cNvPr id="3" name="objhead-left"/>
+          <p:cNvSpPr txBox="1"/>
+          <p:nvPr/>
+        </p:nvSpPr>
+        <p:spPr>
+          <a:xfrm>
+            <a:off x="548640" y="1280160"/>
+            <a:ext cx="4617720" cy="274320"/>
+          </a:xfrm>
+          <a:prstGeom prst="rect">
+            <a:avLst/>
+          </a:prstGeom>
+          <a:noFill/>
+          <a:ln/>
+        </p:spPr>
+        <p:txBody>
+          <a:bodyPr wrap="square" lIns="0" tIns="0" rIns="0" bIns="0" rtlCol="0" anchor="t"/>
+          <a:lstStyle/>
+          <a:p>
+            <a:pPr indent="0" marL="0">
+              <a:buNone/>
+            </a:pPr>
+            <a:r>
+              <a:rPr lang="en-US" sz="1100" b="1" spc="100" kern="0" dirty="0">
+                <a:solidFill>
+                  <a:schemeClr val="tx2"/>
+                </a:solidFill>
+              </a:rPr>
+              <a:t>2026 OBJECTIVE</a:t>
+            </a:r>
+            <a:endParaRPr lang="en-US" sz="1100" dirty="0"/>
+          </a:p>
+        </p:txBody>
+      </p:sp>
+      <p:sp>
+        <p:nvSpPr>
+          <p:cNvPr id="4" name="objhead-right"/>
+          <p:cNvSpPr txBox="1"/>
+          <p:nvPr/>
+        </p:nvSpPr>
+        <p:spPr>
+          <a:xfrm>
+            <a:off x="5577840" y="1280160"/>
+            <a:ext cx="6062472" cy="274320"/>
+          </a:xfrm>
+          <a:prstGeom prst="rect">
+            <a:avLst/>
+          </a:prstGeom>
+          <a:noFill/>
+          <a:ln/>
+        </p:spPr>
+        <p:txBody>
+          <a:bodyPr wrap="square" lIns="0" tIns="0" rIns="0" bIns="0" rtlCol="0" anchor="t"/>
+          <a:lstStyle/>
+          <a:p>
+            <a:pPr indent="0" marL="0">
+              <a:buNone/>
+            </a:pPr>
+            <a:r>
+              <a:rPr lang="en-US" sz="1100" b="1" spc="100" kern="0" dirty="0">
+                <a:solidFill>
+                  <a:schemeClr val="tx2"/>
+                </a:solidFill>
+              </a:rPr>
+              <a:t>WHAT WE CONTRIBUTED</a:t>
+            </a:r>
+            <a:endParaRPr lang="en-US" sz="1100" dirty="0"/>
+          </a:p>
+        </p:txBody>
+      </p:sp>
+      <p:sp>
+        <p:nvSpPr>
+          <p:cNvPr id="5" name="objrow-0-objbox"/>
+          <p:cNvSpPr/>
+          <p:nvPr/>
+        </p:nvSpPr>
+        <p:spPr>
+          <a:xfrm>
+            <a:off x="548640" y="1645920"/>
+            <a:ext cx="4617720" cy="676656"/>
+          </a:xfrm>
+          <a:prstGeom prst="roundRect">
+            <a:avLst>
+              <a:gd name="adj" fmla="val 16216"/>
+            </a:avLst>
+          </a:prstGeom>
+          <a:solidFill>
+            <a:schemeClr val="tx1"/>
+          </a:solidFill>
+          <a:ln/>
+        </p:spPr>
+      </p:sp>
+      <p:sp>
+        <p:nvSpPr>
+          <p:cNvPr id="6" name="objrow-0-objtext"/>
+          <p:cNvSpPr txBox="1"/>
+          <p:nvPr/>
+        </p:nvSpPr>
+        <p:spPr>
+          <a:xfrm>
+            <a:off x="731520" y="1719072"/>
+            <a:ext cx="4297680" cy="530352"/>
+          </a:xfrm>
+          <a:prstGeom prst="rect">
+            <a:avLst/>
+          </a:prstGeom>
+          <a:noFill/>
+          <a:ln/>
+        </p:spPr>
+        <p:txBody>
+          <a:bodyPr wrap="square" lIns="0" tIns="0" rIns="0" bIns="0" rtlCol="0" anchor="ctr"/>
+          <a:lstStyle/>
+          <a:p>
+            <a:pPr indent="0" marL="0">
+              <a:buNone/>
+            </a:pPr>
+            <a:r>
+              <a:rPr lang="en-US" sz="1300" b="1" dirty="0">
+                <a:solidFill>
+                  <a:schemeClr val="bg1"/>
+                </a:solidFill>
+              </a:rPr>
+              <a:t>Leverage AI to solve business problems</a:t>
+            </a:r>
+            <a:endParaRPr lang="en-US" sz="1300" dirty="0"/>
+          </a:p>
+          <a:p>
+            <a:pPr indent="0" marL="0">
+              <a:buNone/>
+            </a:pPr>
+            <a:r>
+              <a:rPr lang="en-US" sz="1100" dirty="0">
+                <a:solidFill>
+                  <a:schemeClr val="accent5"/>
+                </a:solidFill>
+              </a:rPr>
+              <a:t>Digital: democratise AI · India TFO</a:t>
+            </a:r>
+            <a:endParaRPr lang="en-US" sz="1300" dirty="0"/>
+          </a:p>
+        </p:txBody>
+      </p:sp>
+      <p:sp>
+        <p:nvSpPr>
+          <p:cNvPr id="7" name="objrow-0-arrow"/>
+          <p:cNvSpPr/>
+          <p:nvPr/>
+        </p:nvSpPr>
+        <p:spPr>
+          <a:xfrm>
+            <a:off x="5248656" y="1856232"/>
+            <a:ext cx="237744" cy="256032"/>
+          </a:xfrm>
+          <a:prstGeom prst="rightArrow">
+            <a:avLst/>
+          </a:prstGeom>
+          <a:solidFill>
+            <a:schemeClr val="accent1"/>
+          </a:solidFill>
+          <a:ln w="12700">
+            <a:solidFill>
+              <a:schemeClr val="accent1"/>
+            </a:solidFill>
+            <a:prstDash val="solid"/>
+          </a:ln>
+        </p:spPr>
+      </p:sp>
+      <p:sp>
+        <p:nvSpPr>
+          <p:cNvPr id="8" name="objrow-0-contribbox"/>
+          <p:cNvSpPr/>
+          <p:nvPr/>
+        </p:nvSpPr>
+        <p:spPr>
+          <a:xfrm>
+            <a:off x="5577840" y="1645920"/>
+            <a:ext cx="6062472" cy="676656"/>
+          </a:xfrm>
+          <a:prstGeom prst="roundRect">
+            <a:avLst>
+              <a:gd name="adj" fmla="val 16216"/>
+            </a:avLst>
+          </a:prstGeom>
+          <a:solidFill>
+            <a:schemeClr val="bg2"/>
+          </a:solidFill>
+          <a:ln/>
+        </p:spPr>
+      </p:sp>
+      <p:sp>
+        <p:nvSpPr>
+          <p:cNvPr id="9" name="objrow-0-contribtext"/>
+          <p:cNvSpPr txBox="1"/>
+          <p:nvPr/>
+        </p:nvSpPr>
+        <p:spPr>
+          <a:xfrm>
+            <a:off x="5760720" y="1719072"/>
+            <a:ext cx="5696712" cy="530352"/>
+          </a:xfrm>
+          <a:prstGeom prst="rect">
+            <a:avLst/>
+          </a:prstGeom>
+          <a:noFill/>
+          <a:ln/>
+        </p:spPr>
+        <p:txBody>
+          <a:bodyPr wrap="square" lIns="0" tIns="0" rIns="0" bIns="0" rtlCol="0" anchor="ctr"/>
+          <a:lstStyle/>
+          <a:p>
+            <a:pPr indent="0" marL="0">
+              <a:buNone/>
+            </a:pPr>
+            <a:r>
+              <a:rPr lang="en-US" sz="1400" dirty="0">
+                <a:solidFill>
+                  <a:schemeClr val="tx1"/>
+                </a:solidFill>
+              </a:rPr>
+              <a:t>AI-assisted migration of an undocumented, multi-module app, packaged as a reusable playbook</a:t>
+            </a:r>
+            <a:endParaRPr lang="en-US" sz="1400" dirty="0"/>
+          </a:p>
+        </p:txBody>
+      </p:sp>
+      <p:sp>
+        <p:nvSpPr>
+          <p:cNvPr id="10" name="objrow-1-objbox"/>
+          <p:cNvSpPr/>
+          <p:nvPr/>
+        </p:nvSpPr>
+        <p:spPr>
+          <a:xfrm>
+            <a:off x="548640" y="2432304"/>
+            <a:ext cx="4617720" cy="676656"/>
+          </a:xfrm>
+          <a:prstGeom prst="roundRect">
+            <a:avLst>
+              <a:gd name="adj" fmla="val 16216"/>
+            </a:avLst>
+          </a:prstGeom>
+          <a:solidFill>
+            <a:schemeClr val="tx1"/>
+          </a:solidFill>
+          <a:ln/>
+        </p:spPr>
+      </p:sp>
+      <p:sp>
+        <p:nvSpPr>
+          <p:cNvPr id="11" name="objrow-1-objtext"/>
+          <p:cNvSpPr txBox="1"/>
+          <p:nvPr/>
+        </p:nvSpPr>
+        <p:spPr>
+          <a:xfrm>
+            <a:off x="731520" y="2505456"/>
+            <a:ext cx="4297680" cy="530352"/>
+          </a:xfrm>
+          <a:prstGeom prst="rect">
+            <a:avLst/>
+          </a:prstGeom>
+          <a:noFill/>
+          <a:ln/>
+        </p:spPr>
+        <p:txBody>
+          <a:bodyPr wrap="square" lIns="0" tIns="0" rIns="0" bIns="0" rtlCol="0" anchor="ctr"/>
+          <a:lstStyle/>
+          <a:p>
+            <a:pPr indent="0" marL="0">
+              <a:buNone/>
+            </a:pPr>
+            <a:r>
+              <a:rPr lang="en-US" sz="1300" b="1" dirty="0">
+                <a:solidFill>
+                  <a:schemeClr val="bg1"/>
+                </a:solidFill>
+              </a:rPr>
+              <a:t>Deliver on time, on cost, on quality</a:t>
+            </a:r>
+            <a:endParaRPr lang="en-US" sz="1300" dirty="0"/>
+          </a:p>
+          <a:p>
+            <a:pPr indent="0" marL="0">
+              <a:buNone/>
+            </a:pPr>
+            <a:r>
+              <a:rPr lang="en-US" sz="1100" dirty="0">
+                <a:solidFill>
+                  <a:schemeClr val="accent5"/>
+                </a:solidFill>
+              </a:rPr>
+              <a:t>Digital: optimise our resources · Company: financial</a:t>
+            </a:r>
+            <a:endParaRPr lang="en-US" sz="1300" dirty="0"/>
+          </a:p>
+        </p:txBody>
+      </p:sp>
+      <p:sp>
+        <p:nvSpPr>
+          <p:cNvPr id="12" name="objrow-1-arrow"/>
+          <p:cNvSpPr/>
+          <p:nvPr/>
+        </p:nvSpPr>
+        <p:spPr>
+          <a:xfrm>
+            <a:off x="5248656" y="2642616"/>
+            <a:ext cx="237744" cy="256032"/>
+          </a:xfrm>
+          <a:prstGeom prst="rightArrow">
+            <a:avLst/>
+          </a:prstGeom>
+          <a:solidFill>
+            <a:schemeClr val="accent1"/>
+          </a:solidFill>
+          <a:ln w="12700">
+            <a:solidFill>
+              <a:schemeClr val="accent1"/>
+            </a:solidFill>
+            <a:prstDash val="solid"/>
+          </a:ln>
+        </p:spPr>
+      </p:sp>
+      <p:sp>
+        <p:nvSpPr>
+          <p:cNvPr id="13" name="objrow-1-contribbox"/>
+          <p:cNvSpPr/>
+          <p:nvPr/>
+        </p:nvSpPr>
+        <p:spPr>
+          <a:xfrm>
+            <a:off x="5577840" y="2432304"/>
+            <a:ext cx="6062472" cy="676656"/>
+          </a:xfrm>
+          <a:prstGeom prst="roundRect">
+            <a:avLst>
+              <a:gd name="adj" fmla="val 16216"/>
+            </a:avLst>
+          </a:prstGeom>
+          <a:solidFill>
+            <a:schemeClr val="bg2"/>
+          </a:solidFill>
+          <a:ln/>
+        </p:spPr>
+      </p:sp>
+      <p:sp>
+        <p:nvSpPr>
+          <p:cNvPr id="14" name="objrow-1-contribtext"/>
+          <p:cNvSpPr txBox="1"/>
+          <p:nvPr/>
+        </p:nvSpPr>
+        <p:spPr>
+          <a:xfrm>
+            <a:off x="5760720" y="2505456"/>
+            <a:ext cx="5696712" cy="530352"/>
+          </a:xfrm>
+          <a:prstGeom prst="rect">
+            <a:avLst/>
+          </a:prstGeom>
+          <a:noFill/>
+          <a:ln/>
+        </p:spPr>
+        <p:txBody>
+          <a:bodyPr wrap="square" lIns="0" tIns="0" rIns="0" bIns="0" rtlCol="0" anchor="ctr"/>
+          <a:lstStyle/>
+          <a:p>
+            <a:pPr indent="0" marL="0">
+              <a:buNone/>
+            </a:pPr>
+            <a:r>
+              <a:rPr lang="en-US" sz="1400" dirty="0">
+                <a:solidFill>
+                  <a:schemeClr val="tx1"/>
+                </a:solidFill>
+              </a:rPr>
+              <a:t>2 developers, 1 PI, about 76% less effort than a manual estimate</a:t>
+            </a:r>
+            <a:endParaRPr lang="en-US" sz="1400" dirty="0"/>
+          </a:p>
+        </p:txBody>
+      </p:sp>
+      <p:sp>
+        <p:nvSpPr>
+          <p:cNvPr id="15" name="objrow-2-objbox"/>
+          <p:cNvSpPr/>
+          <p:nvPr/>
+        </p:nvSpPr>
+        <p:spPr>
+          <a:xfrm>
+            <a:off x="548640" y="3218688"/>
+            <a:ext cx="4617720" cy="676656"/>
+          </a:xfrm>
+          <a:prstGeom prst="roundRect">
+            <a:avLst>
+              <a:gd name="adj" fmla="val 16216"/>
+            </a:avLst>
+          </a:prstGeom>
+          <a:solidFill>
+            <a:schemeClr val="tx1"/>
+          </a:solidFill>
+          <a:ln/>
+        </p:spPr>
+      </p:sp>
+      <p:sp>
+        <p:nvSpPr>
+          <p:cNvPr id="16" name="objrow-2-objtext"/>
+          <p:cNvSpPr txBox="1"/>
+          <p:nvPr/>
+        </p:nvSpPr>
+        <p:spPr>
+          <a:xfrm>
+            <a:off x="731520" y="3291840"/>
+            <a:ext cx="4297680" cy="530352"/>
+          </a:xfrm>
+          <a:prstGeom prst="rect">
+            <a:avLst/>
+          </a:prstGeom>
+          <a:noFill/>
+          <a:ln/>
+        </p:spPr>
+        <p:txBody>
+          <a:bodyPr wrap="square" lIns="0" tIns="0" rIns="0" bIns="0" rtlCol="0" anchor="ctr"/>
+          <a:lstStyle/>
+          <a:p>
+            <a:pPr indent="0" marL="0">
+              <a:buNone/>
+            </a:pPr>
+            <a:r>
+              <a:rPr lang="en-US" sz="1300" b="1" dirty="0">
+                <a:solidFill>
+                  <a:schemeClr val="bg1"/>
+                </a:solidFill>
+              </a:rPr>
+              <a:t>Manage our risks</a:t>
+            </a:r>
+            <a:endParaRPr lang="en-US" sz="1300" dirty="0"/>
+          </a:p>
+          <a:p>
+            <a:pPr indent="0" marL="0">
+              <a:buNone/>
+            </a:pPr>
+            <a:r>
+              <a:rPr lang="en-US" sz="1100" dirty="0">
+                <a:solidFill>
+                  <a:schemeClr val="accent5"/>
+                </a:solidFill>
+              </a:rPr>
+              <a:t>Digital: cybersecurity, compliance, dependencies</a:t>
+            </a:r>
+            <a:endParaRPr lang="en-US" sz="1300" dirty="0"/>
+          </a:p>
+        </p:txBody>
+      </p:sp>
+      <p:sp>
+        <p:nvSpPr>
+          <p:cNvPr id="17" name="objrow-2-arrow"/>
+          <p:cNvSpPr/>
+          <p:nvPr/>
+        </p:nvSpPr>
+        <p:spPr>
+          <a:xfrm>
+            <a:off x="5248656" y="3429000"/>
+            <a:ext cx="237744" cy="256032"/>
+          </a:xfrm>
+          <a:prstGeom prst="rightArrow">
+            <a:avLst/>
+          </a:prstGeom>
+          <a:solidFill>
+            <a:schemeClr val="accent1"/>
+          </a:solidFill>
+          <a:ln w="12700">
+            <a:solidFill>
+              <a:schemeClr val="accent1"/>
+            </a:solidFill>
+            <a:prstDash val="solid"/>
+          </a:ln>
+        </p:spPr>
+      </p:sp>
+      <p:sp>
+        <p:nvSpPr>
+          <p:cNvPr id="18" name="objrow-2-contribbox"/>
+          <p:cNvSpPr/>
+          <p:nvPr/>
+        </p:nvSpPr>
+        <p:spPr>
+          <a:xfrm>
+            <a:off x="5577840" y="3218688"/>
+            <a:ext cx="6062472" cy="676656"/>
+          </a:xfrm>
+          <a:prstGeom prst="roundRect">
+            <a:avLst>
+              <a:gd name="adj" fmla="val 16216"/>
+            </a:avLst>
+          </a:prstGeom>
+          <a:solidFill>
+            <a:schemeClr val="bg2"/>
+          </a:solidFill>
+          <a:ln/>
+        </p:spPr>
+      </p:sp>
+      <p:sp>
+        <p:nvSpPr>
+          <p:cNvPr id="19" name="objrow-2-contribtext"/>
+          <p:cNvSpPr txBox="1"/>
+          <p:nvPr/>
+        </p:nvSpPr>
+        <p:spPr>
+          <a:xfrm>
+            <a:off x="5760720" y="3291840"/>
+            <a:ext cx="5696712" cy="530352"/>
+          </a:xfrm>
+          <a:prstGeom prst="rect">
+            <a:avLst/>
+          </a:prstGeom>
+          <a:noFill/>
+          <a:ln/>
+        </p:spPr>
+        <p:txBody>
+          <a:bodyPr wrap="square" lIns="0" tIns="0" rIns="0" bIns="0" rtlCol="0" anchor="ctr"/>
+          <a:lstStyle/>
+          <a:p>
+            <a:pPr indent="0" marL="0">
+              <a:buNone/>
+            </a:pPr>
+            <a:r>
+              <a:rPr lang="en-US" sz="1400" dirty="0">
+                <a:solidFill>
+                  <a:schemeClr val="tx1"/>
+                </a:solidFill>
+              </a:rPr>
+              <a:t>7 security and data-integrity issues caught in review; restricted views kept; off Slate onto standard React + OSDK</a:t>
+            </a:r>
+            <a:endParaRPr lang="en-US" sz="1400" dirty="0"/>
+          </a:p>
+        </p:txBody>
+      </p:sp>
+      <p:sp>
+        <p:nvSpPr>
+          <p:cNvPr id="20" name="objrow-3-objbox"/>
+          <p:cNvSpPr/>
+          <p:nvPr/>
+        </p:nvSpPr>
+        <p:spPr>
+          <a:xfrm>
+            <a:off x="548640" y="4005072"/>
+            <a:ext cx="4617720" cy="676656"/>
+          </a:xfrm>
+          <a:prstGeom prst="roundRect">
+            <a:avLst>
+              <a:gd name="adj" fmla="val 16216"/>
+            </a:avLst>
+          </a:prstGeom>
+          <a:solidFill>
+            <a:schemeClr val="tx1"/>
+          </a:solidFill>
+          <a:ln/>
+        </p:spPr>
+      </p:sp>
+      <p:sp>
+        <p:nvSpPr>
+          <p:cNvPr id="21" name="objrow-3-objtext"/>
+          <p:cNvSpPr txBox="1"/>
+          <p:nvPr/>
+        </p:nvSpPr>
+        <p:spPr>
+          <a:xfrm>
+            <a:off x="731520" y="4078224"/>
+            <a:ext cx="4297680" cy="530352"/>
+          </a:xfrm>
+          <a:prstGeom prst="rect">
+            <a:avLst/>
+          </a:prstGeom>
+          <a:noFill/>
+          <a:ln/>
+        </p:spPr>
+        <p:txBody>
+          <a:bodyPr wrap="square" lIns="0" tIns="0" rIns="0" bIns="0" rtlCol="0" anchor="ctr"/>
+          <a:lstStyle/>
+          <a:p>
+            <a:pPr indent="0" marL="0">
+              <a:buNone/>
+            </a:pPr>
+            <a:r>
+              <a:rPr lang="en-US" sz="1300" b="1" dirty="0">
+                <a:solidFill>
+                  <a:schemeClr val="bg1"/>
+                </a:solidFill>
+              </a:rPr>
+              <a:t>Reinforce the Digital Design Authority</a:t>
+            </a:r>
+            <a:endParaRPr lang="en-US" sz="1300" dirty="0"/>
+          </a:p>
+          <a:p>
+            <a:pPr indent="0" marL="0">
+              <a:buNone/>
+            </a:pPr>
+            <a:r>
+              <a:rPr lang="en-US" sz="1100" dirty="0">
+                <a:solidFill>
+                  <a:schemeClr val="accent5"/>
+                </a:solidFill>
+              </a:rPr>
+              <a:t>Digital: enable our future</a:t>
+            </a:r>
+            <a:endParaRPr lang="en-US" sz="1300" dirty="0"/>
+          </a:p>
+        </p:txBody>
+      </p:sp>
+      <p:sp>
+        <p:nvSpPr>
+          <p:cNvPr id="22" name="objrow-3-arrow"/>
+          <p:cNvSpPr/>
+          <p:nvPr/>
+        </p:nvSpPr>
+        <p:spPr>
+          <a:xfrm>
+            <a:off x="5248656" y="4215384"/>
+            <a:ext cx="237744" cy="256032"/>
+          </a:xfrm>
+          <a:prstGeom prst="rightArrow">
+            <a:avLst/>
+          </a:prstGeom>
+          <a:solidFill>
+            <a:schemeClr val="accent1"/>
+          </a:solidFill>
+          <a:ln w="12700">
+            <a:solidFill>
+              <a:schemeClr val="accent1"/>
+            </a:solidFill>
+            <a:prstDash val="solid"/>
+          </a:ln>
+        </p:spPr>
+      </p:sp>
+      <p:sp>
+        <p:nvSpPr>
+          <p:cNvPr id="23" name="objrow-3-contribbox"/>
+          <p:cNvSpPr/>
+          <p:nvPr/>
+        </p:nvSpPr>
+        <p:spPr>
+          <a:xfrm>
+            <a:off x="5577840" y="4005072"/>
+            <a:ext cx="6062472" cy="676656"/>
+          </a:xfrm>
+          <a:prstGeom prst="roundRect">
+            <a:avLst>
+              <a:gd name="adj" fmla="val 16216"/>
+            </a:avLst>
+          </a:prstGeom>
+          <a:solidFill>
+            <a:schemeClr val="bg2"/>
+          </a:solidFill>
+          <a:ln/>
+        </p:spPr>
+      </p:sp>
+      <p:sp>
+        <p:nvSpPr>
+          <p:cNvPr id="24" name="objrow-3-contribtext"/>
+          <p:cNvSpPr txBox="1"/>
+          <p:nvPr/>
+        </p:nvSpPr>
+        <p:spPr>
+          <a:xfrm>
+            <a:off x="5760720" y="4078224"/>
+            <a:ext cx="5696712" cy="530352"/>
+          </a:xfrm>
+          <a:prstGeom prst="rect">
+            <a:avLst/>
+          </a:prstGeom>
+          <a:noFill/>
+          <a:ln/>
+        </p:spPr>
+        <p:txBody>
+          <a:bodyPr wrap="square" lIns="0" tIns="0" rIns="0" bIns="0" rtlCol="0" anchor="ctr"/>
+          <a:lstStyle/>
+          <a:p>
+            <a:pPr indent="0" marL="0">
+              <a:buNone/>
+            </a:pPr>
+            <a:r>
+              <a:rPr lang="en-US" sz="1400" dirty="0">
+                <a:solidFill>
+                  <a:schemeClr val="tx1"/>
+                </a:solidFill>
+              </a:rPr>
+              <a:t>8 architecture and lifecycle diagrams; 105 features documented where nothing existed</a:t>
+            </a:r>
+            <a:endParaRPr lang="en-US" sz="1400" dirty="0"/>
+          </a:p>
+        </p:txBody>
+      </p:sp>
+      <p:sp>
+        <p:nvSpPr>
+          <p:cNvPr id="25" name="objrow-4-objbox"/>
+          <p:cNvSpPr/>
+          <p:nvPr/>
+        </p:nvSpPr>
+        <p:spPr>
+          <a:xfrm>
+            <a:off x="548640" y="4791456"/>
+            <a:ext cx="4617720" cy="676656"/>
+          </a:xfrm>
+          <a:prstGeom prst="roundRect">
+            <a:avLst>
+              <a:gd name="adj" fmla="val 16216"/>
+            </a:avLst>
+          </a:prstGeom>
+          <a:solidFill>
+            <a:schemeClr val="tx1"/>
+          </a:solidFill>
+          <a:ln/>
+        </p:spPr>
+      </p:sp>
+      <p:sp>
+        <p:nvSpPr>
+          <p:cNvPr id="26" name="objrow-4-objtext"/>
+          <p:cNvSpPr txBox="1"/>
+          <p:nvPr/>
+        </p:nvSpPr>
+        <p:spPr>
+          <a:xfrm>
+            <a:off x="731520" y="4864608"/>
+            <a:ext cx="4297680" cy="530352"/>
+          </a:xfrm>
+          <a:prstGeom prst="rect">
+            <a:avLst/>
+          </a:prstGeom>
+          <a:noFill/>
+          <a:ln/>
+        </p:spPr>
+        <p:txBody>
+          <a:bodyPr wrap="square" lIns="0" tIns="0" rIns="0" bIns="0" rtlCol="0" anchor="ctr"/>
+          <a:lstStyle/>
+          <a:p>
+            <a:pPr indent="0" marL="0">
+              <a:buNone/>
+            </a:pPr>
+            <a:r>
+              <a:rPr lang="en-US" sz="1300" b="1" dirty="0">
+                <a:solidFill>
+                  <a:schemeClr val="bg1"/>
+                </a:solidFill>
+              </a:rPr>
+              <a:t>Grow digital acumen and competencies</a:t>
+            </a:r>
+            <a:endParaRPr lang="en-US" sz="1300" dirty="0"/>
+          </a:p>
+          <a:p>
+            <a:pPr indent="0" marL="0">
+              <a:buNone/>
+            </a:pPr>
+            <a:r>
+              <a:rPr lang="en-US" sz="1100" dirty="0">
+                <a:solidFill>
+                  <a:schemeClr val="accent5"/>
+                </a:solidFill>
+              </a:rPr>
+              <a:t>Digital: develop our people · India TFO</a:t>
+            </a:r>
+            <a:endParaRPr lang="en-US" sz="1300" dirty="0"/>
+          </a:p>
+        </p:txBody>
+      </p:sp>
+      <p:sp>
+        <p:nvSpPr>
+          <p:cNvPr id="27" name="objrow-4-arrow"/>
+          <p:cNvSpPr/>
+          <p:nvPr/>
+        </p:nvSpPr>
+        <p:spPr>
+          <a:xfrm>
+            <a:off x="5248656" y="5001768"/>
+            <a:ext cx="237744" cy="256032"/>
+          </a:xfrm>
+          <a:prstGeom prst="rightArrow">
+            <a:avLst/>
+          </a:prstGeom>
+          <a:solidFill>
+            <a:schemeClr val="accent1"/>
+          </a:solidFill>
+          <a:ln w="12700">
+            <a:solidFill>
+              <a:schemeClr val="accent1"/>
+            </a:solidFill>
+            <a:prstDash val="solid"/>
+          </a:ln>
+        </p:spPr>
+      </p:sp>
+      <p:sp>
+        <p:nvSpPr>
+          <p:cNvPr id="28" name="objrow-4-contribbox"/>
+          <p:cNvSpPr/>
+          <p:nvPr/>
+        </p:nvSpPr>
+        <p:spPr>
+          <a:xfrm>
+            <a:off x="5577840" y="4791456"/>
+            <a:ext cx="6062472" cy="676656"/>
+          </a:xfrm>
+          <a:prstGeom prst="roundRect">
+            <a:avLst>
+              <a:gd name="adj" fmla="val 16216"/>
+            </a:avLst>
+          </a:prstGeom>
+          <a:solidFill>
+            <a:schemeClr val="bg2"/>
+          </a:solidFill>
+          <a:ln/>
+        </p:spPr>
+      </p:sp>
+      <p:sp>
+        <p:nvSpPr>
+          <p:cNvPr id="29" name="objrow-4-contribtext"/>
+          <p:cNvSpPr txBox="1"/>
+          <p:nvPr/>
+        </p:nvSpPr>
+        <p:spPr>
+          <a:xfrm>
+            <a:off x="5760720" y="4864608"/>
+            <a:ext cx="5696712" cy="530352"/>
+          </a:xfrm>
+          <a:prstGeom prst="rect">
+            <a:avLst/>
+          </a:prstGeom>
+          <a:noFill/>
+          <a:ln/>
+        </p:spPr>
+        <p:txBody>
+          <a:bodyPr wrap="square" lIns="0" tIns="0" rIns="0" bIns="0" rtlCol="0" anchor="ctr"/>
+          <a:lstStyle/>
+          <a:p>
+            <a:pPr indent="0" marL="0">
+              <a:buNone/>
+            </a:pPr>
+            <a:r>
+              <a:rPr lang="en-US" sz="1400" dirty="0">
+                <a:solidFill>
+                  <a:schemeClr val="tx1"/>
+                </a:solidFill>
+              </a:rPr>
+              <a:t>pack-project.ts and the playbook let other teams repeat the method</a:t>
+            </a:r>
+            <a:endParaRPr lang="en-US" sz="1400" dirty="0"/>
+          </a:p>
+        </p:txBody>
+      </p:sp>
+      <p:sp>
+        <p:nvSpPr>
+          <p:cNvPr id="30" name="objrow-5-objbox"/>
+          <p:cNvSpPr/>
+          <p:nvPr/>
+        </p:nvSpPr>
+        <p:spPr>
+          <a:xfrm>
+            <a:off x="548640" y="5577840"/>
+            <a:ext cx="4617720" cy="676656"/>
+          </a:xfrm>
+          <a:prstGeom prst="roundRect">
+            <a:avLst>
+              <a:gd name="adj" fmla="val 16216"/>
+            </a:avLst>
+          </a:prstGeom>
+          <a:solidFill>
+            <a:schemeClr val="tx1"/>
+          </a:solidFill>
+          <a:ln/>
+        </p:spPr>
+      </p:sp>
+      <p:sp>
+        <p:nvSpPr>
+          <p:cNvPr id="31" name="objrow-5-objtext"/>
+          <p:cNvSpPr txBox="1"/>
+          <p:nvPr/>
+        </p:nvSpPr>
+        <p:spPr>
+          <a:xfrm>
+            <a:off x="731520" y="5650992"/>
+            <a:ext cx="4297680" cy="530352"/>
+          </a:xfrm>
+          <a:prstGeom prst="rect">
+            <a:avLst/>
+          </a:prstGeom>
+          <a:noFill/>
+          <a:ln/>
+        </p:spPr>
+        <p:txBody>
+          <a:bodyPr wrap="square" lIns="0" tIns="0" rIns="0" bIns="0" rtlCol="0" anchor="ctr"/>
+          <a:lstStyle/>
+          <a:p>
+            <a:pPr indent="0" marL="0">
+              <a:buNone/>
+            </a:pPr>
+            <a:r>
+              <a:rPr lang="en-US" sz="1300" b="1" dirty="0">
+                <a:solidFill>
+                  <a:schemeClr val="bg1"/>
+                </a:solidFill>
+              </a:rPr>
+              <a:t>Increase customer satisfaction</a:t>
+            </a:r>
+            <a:endParaRPr lang="en-US" sz="1300" dirty="0"/>
+          </a:p>
+          <a:p>
+            <a:pPr indent="0" marL="0">
+              <a:buNone/>
+            </a:pPr>
+            <a:r>
+              <a:rPr lang="en-US" sz="1100" dirty="0">
+                <a:solidFill>
+                  <a:schemeClr val="accent5"/>
+                </a:solidFill>
+              </a:rPr>
+              <a:t>Company: customer</a:t>
+            </a:r>
+            <a:endParaRPr lang="en-US" sz="1300" dirty="0"/>
+          </a:p>
+        </p:txBody>
+      </p:sp>
+      <p:sp>
+        <p:nvSpPr>
+          <p:cNvPr id="32" name="objrow-5-arrow"/>
+          <p:cNvSpPr/>
+          <p:nvPr/>
+        </p:nvSpPr>
+        <p:spPr>
+          <a:xfrm>
+            <a:off x="5248656" y="5788152"/>
+            <a:ext cx="237744" cy="256032"/>
+          </a:xfrm>
+          <a:prstGeom prst="rightArrow">
+            <a:avLst/>
+          </a:prstGeom>
+          <a:solidFill>
+            <a:schemeClr val="accent1"/>
+          </a:solidFill>
+          <a:ln w="12700">
+            <a:solidFill>
+              <a:schemeClr val="accent1"/>
+            </a:solidFill>
+            <a:prstDash val="solid"/>
+          </a:ln>
+        </p:spPr>
+      </p:sp>
+      <p:sp>
+        <p:nvSpPr>
+          <p:cNvPr id="33" name="objrow-5-contribbox"/>
+          <p:cNvSpPr/>
+          <p:nvPr/>
+        </p:nvSpPr>
+        <p:spPr>
+          <a:xfrm>
+            <a:off x="5577840" y="5577840"/>
+            <a:ext cx="6062472" cy="676656"/>
+          </a:xfrm>
+          <a:prstGeom prst="roundRect">
+            <a:avLst>
+              <a:gd name="adj" fmla="val 16216"/>
+            </a:avLst>
+          </a:prstGeom>
+          <a:solidFill>
+            <a:schemeClr val="bg2"/>
+          </a:solidFill>
+          <a:ln/>
+        </p:spPr>
+      </p:sp>
+      <p:sp>
+        <p:nvSpPr>
+          <p:cNvPr id="34" name="objrow-5-contribtext"/>
+          <p:cNvSpPr txBox="1"/>
+          <p:nvPr/>
+        </p:nvSpPr>
+        <p:spPr>
+          <a:xfrm>
+            <a:off x="5760720" y="5650992"/>
+            <a:ext cx="5696712" cy="530352"/>
+          </a:xfrm>
+          <a:prstGeom prst="rect">
+            <a:avLst/>
+          </a:prstGeom>
+          <a:noFill/>
+          <a:ln/>
+        </p:spPr>
+        <p:txBody>
+          <a:bodyPr wrap="square" lIns="0" tIns="0" rIns="0" bIns="0" rtlCol="0" anchor="ctr"/>
+          <a:lstStyle/>
+          <a:p>
+            <a:pPr indent="0" marL="0">
+              <a:buNone/>
+            </a:pPr>
+            <a:r>
+              <a:rPr lang="en-US" sz="1400" dirty="0">
+                <a:solidFill>
+                  <a:schemeClr val="tx1"/>
+                </a:solidFill>
+              </a:rPr>
+              <a:t>5 enhancements for ERM users, such as the report slideshow and resizable tables</a:t>
+            </a:r>
+            <a:endParaRPr lang="en-US" sz="1400" dirty="0"/>
+          </a:p>
+        </p:txBody>
+      </p:sp>
+    </p:spTree>
+  </p:cSld>
+  <p:clrMapOvr>
+    <a:masterClrMapping/>
+  </p:clrMapOvr>
+  <p:transition spd="med">
+    <p:fade/>
+  </p:transition>
+  <p:timing>
+    <p:tnLst>
+      <p:par>
+        <p:cTn id="1" dur="indefinite" restart="never" nodeType="tmRoot">
+          <p:childTnLst>
+            <p:seq concurrent="1" nextAc="seek">
+              <p:cTn id="2" dur="indefinite" nodeType="mainSeq">
+                <p:childTnLst>
+                  <p:par>
+                    <p:cTn id="99" fill="hold">
+                      <p:stCondLst>
+                        <p:cond delay="indefinite"/>
+                        <p:cond evt="onBegin" delay="0">
+                          <p:tn val="2"/>
+                        </p:cond>
+                      </p:stCondLst>
+                      <p:childTnLst>
+                        <p:par>
+                          <p:cTn id="18" fill="hold">
+                            <p:stCondLst>
+                              <p:cond delay="0"/>
+                            </p:stCondLst>
+                            <p:childTnLst>
+                              <p:par>
+                                <p:cTn id="3" presetID="10" presetClass="entr" presetSubtype="0" fill="hold" grpId="0" nodeType="afterEffect">
+                                  <p:stCondLst>
+                                    <p:cond delay="0"/>
+                                  </p:stCondLst>
+                                  <p:childTnLst>
+                                    <p:set>
+                                      <p:cBhvr>
+                                        <p:cTn id="4" dur="1" fill="hold">
+                                          <p:stCondLst>
+                                            <p:cond delay="0"/>
+                                          </p:stCondLst>
+                                        </p:cTn>
+                                        <p:tgtEl>
+                                          <p:spTgt spid="5"/>
+                                        </p:tgtEl>
+                                        <p:attrNameLst>
+                                          <p:attrName>style.visibility</p:attrName>
+                                        </p:attrNameLst>
+                                      </p:cBhvr>
+                                      <p:to>
+                                        <p:strVal val="visible"/>
+                                      </p:to>
+                                    </p:set>
+                                    <p:animEffect transition="in" filter="fade">
+                                      <p:cBhvr>
+                                        <p:cTn id="5" dur="450"/>
+                                        <p:tgtEl>
+                                          <p:spTgt spid="5"/>
+                                        </p:tgtEl>
+                                      </p:cBhvr>
+                                    </p:animEffect>
+                                  </p:childTnLst>
+                                </p:cTn>
+                              </p:par>
+                              <p:par>
+                                <p:cTn id="6" presetID="10" presetClass="entr" presetSubtype="0" fill="hold" grpId="0" nodeType="withEffect">
+                                  <p:stCondLst>
+                                    <p:cond delay="0"/>
+                                  </p:stCondLst>
+                                  <p:childTnLst>
+                                    <p:set>
+                                      <p:cBhvr>
+                                        <p:cTn id="7" dur="1" fill="hold">
+                                          <p:stCondLst>
+                                            <p:cond delay="0"/>
+                                          </p:stCondLst>
+                                        </p:cTn>
+                                        <p:tgtEl>
+                                          <p:spTgt spid="6"/>
+                                        </p:tgtEl>
+                                        <p:attrNameLst>
+                                          <p:attrName>style.visibility</p:attrName>
+                                        </p:attrNameLst>
+                                      </p:cBhvr>
+                                      <p:to>
+                                        <p:strVal val="visible"/>
+                                      </p:to>
+                                    </p:set>
+                                    <p:animEffect transition="in" filter="fade">
+                                      <p:cBhvr>
+                                        <p:cTn id="8" dur="450"/>
+                                        <p:tgtEl>
+                                          <p:spTgt spid="6"/>
+                                        </p:tgtEl>
+                                      </p:cBhvr>
+                                    </p:animEffect>
+                                  </p:childTnLst>
+                                </p:cTn>
+                              </p:par>
+                              <p:par>
+                                <p:cTn id="9" presetID="22" presetClass="entr" presetSubtype="8" fill="hold" grpId="0" nodeType="withEffect">
+                                  <p:stCondLst>
+                                    <p:cond delay="200"/>
+                                  </p:stCondLst>
+                                  <p:childTnLst>
+                                    <p:set>
+                                      <p:cBhvr>
+                                        <p:cTn id="10" dur="1" fill="hold">
+                                          <p:stCondLst>
+                                            <p:cond delay="0"/>
+                                          </p:stCondLst>
+                                        </p:cTn>
+                                        <p:tgtEl>
+                                          <p:spTgt spid="7"/>
+                                        </p:tgtEl>
+                                        <p:attrNameLst>
+                                          <p:attrName>style.visibility</p:attrName>
+                                        </p:attrNameLst>
+                                      </p:cBhvr>
+                                      <p:to>
+                                        <p:strVal val="visible"/>
+                                      </p:to>
+                                    </p:set>
+                                    <p:animEffect transition="in" filter="wipe(left)">
+                                      <p:cBhvr>
+                                        <p:cTn id="11" dur="450"/>
+                                        <p:tgtEl>
+                                          <p:spTgt spid="7"/>
+                                        </p:tgtEl>
+                                      </p:cBhvr>
+                                    </p:animEffect>
+                                  </p:childTnLst>
+                                </p:cTn>
+                              </p:par>
+                              <p:par>
+                                <p:cTn id="12" presetID="22" presetClass="entr" presetSubtype="8" fill="hold" grpId="0" nodeType="withEffect">
+                                  <p:stCondLst>
+                                    <p:cond delay="300"/>
+                                  </p:stCondLst>
+                                  <p:childTnLst>
+                                    <p:set>
+                                      <p:cBhvr>
+                                        <p:cTn id="13" dur="1" fill="hold">
+                                          <p:stCondLst>
+                                            <p:cond delay="0"/>
+                                          </p:stCondLst>
+                                        </p:cTn>
+                                        <p:tgtEl>
+                                          <p:spTgt spid="8"/>
+                                        </p:tgtEl>
+                                        <p:attrNameLst>
+                                          <p:attrName>style.visibility</p:attrName>
+                                        </p:attrNameLst>
+                                      </p:cBhvr>
+                                      <p:to>
+                                        <p:strVal val="visible"/>
+                                      </p:to>
+                                    </p:set>
+                                    <p:animEffect transition="in" filter="wipe(left)">
+                                      <p:cBhvr>
+                                        <p:cTn id="14" dur="450"/>
+                                        <p:tgtEl>
+                                          <p:spTgt spid="8"/>
+                                        </p:tgtEl>
+                                      </p:cBhvr>
+                                    </p:animEffect>
+                                  </p:childTnLst>
+                                </p:cTn>
+                              </p:par>
+                              <p:par>
+                                <p:cTn id="15" presetID="22" presetClass="entr" presetSubtype="8" fill="hold" grpId="0" nodeType="withEffect">
+                                  <p:stCondLst>
+                                    <p:cond delay="300"/>
+                                  </p:stCondLst>
+                                  <p:childTnLst>
+                                    <p:set>
+                                      <p:cBhvr>
+                                        <p:cTn id="16" dur="1" fill="hold">
+                                          <p:stCondLst>
+                                            <p:cond delay="0"/>
+                                          </p:stCondLst>
+                                        </p:cTn>
+                                        <p:tgtEl>
+                                          <p:spTgt spid="9"/>
+                                        </p:tgtEl>
+                                        <p:attrNameLst>
+                                          <p:attrName>style.visibility</p:attrName>
+                                        </p:attrNameLst>
+                                      </p:cBhvr>
+                                      <p:to>
+                                        <p:strVal val="visible"/>
+                                      </p:to>
+                                    </p:set>
+                                    <p:animEffect transition="in" filter="wipe(left)">
+                                      <p:cBhvr>
+                                        <p:cTn id="17" dur="450"/>
+                                        <p:tgtEl>
+                                          <p:spTgt spid="9"/>
+                                        </p:tgtEl>
+                                      </p:cBhvr>
+                                    </p:animEffect>
+                                  </p:childTnLst>
+                                </p:cTn>
+                              </p:par>
+                            </p:childTnLst>
+                          </p:cTn>
+                        </p:par>
+                        <p:par>
+                          <p:cTn id="34" fill="hold">
+                            <p:stCondLst>
+                              <p:cond delay="650"/>
+                            </p:stCondLst>
+                            <p:childTnLst>
+                              <p:par>
+                                <p:cTn id="19" presetID="10" presetClass="entr" presetSubtype="0" fill="hold" grpId="0" nodeType="afterEffect">
+                                  <p:stCondLst>
+                                    <p:cond delay="0"/>
+                                  </p:stCondLst>
+                                  <p:childTnLst>
+                                    <p:set>
+                                      <p:cBhvr>
+                                        <p:cTn id="20" dur="1" fill="hold">
+                                          <p:stCondLst>
+                                            <p:cond delay="0"/>
+                                          </p:stCondLst>
+                                        </p:cTn>
+                                        <p:tgtEl>
+                                          <p:spTgt spid="10"/>
+                                        </p:tgtEl>
+                                        <p:attrNameLst>
+                                          <p:attrName>style.visibility</p:attrName>
+                                        </p:attrNameLst>
+                                      </p:cBhvr>
+                                      <p:to>
+                                        <p:strVal val="visible"/>
+                                      </p:to>
+                                    </p:set>
+                                    <p:animEffect transition="in" filter="fade">
+                                      <p:cBhvr>
+                                        <p:cTn id="21" dur="450"/>
+                                        <p:tgtEl>
+                                          <p:spTgt spid="10"/>
+                                        </p:tgtEl>
+                                      </p:cBhvr>
+                                    </p:animEffect>
+                                  </p:childTnLst>
+                                </p:cTn>
+                              </p:par>
+                              <p:par>
+                                <p:cTn id="22" presetID="10" presetClass="entr" presetSubtype="0" fill="hold" grpId="0" nodeType="withEffect">
+                                  <p:stCondLst>
+                                    <p:cond delay="0"/>
+                                  </p:stCondLst>
+                                  <p:childTnLst>
+                                    <p:set>
+                                      <p:cBhvr>
+                                        <p:cTn id="23" dur="1" fill="hold">
+                                          <p:stCondLst>
+                                            <p:cond delay="0"/>
+                                          </p:stCondLst>
+                                        </p:cTn>
+                                        <p:tgtEl>
+                                          <p:spTgt spid="11"/>
+                                        </p:tgtEl>
+                                        <p:attrNameLst>
+                                          <p:attrName>style.visibility</p:attrName>
+                                        </p:attrNameLst>
+                                      </p:cBhvr>
+                                      <p:to>
+                                        <p:strVal val="visible"/>
+                                      </p:to>
+                                    </p:set>
+                                    <p:animEffect transition="in" filter="fade">
+                                      <p:cBhvr>
+                                        <p:cTn id="24" dur="450"/>
+                                        <p:tgtEl>
+                                          <p:spTgt spid="11"/>
+                                        </p:tgtEl>
+                                      </p:cBhvr>
+                                    </p:animEffect>
+                                  </p:childTnLst>
+                                </p:cTn>
+                              </p:par>
+                              <p:par>
+                                <p:cTn id="25" presetID="22" presetClass="entr" presetSubtype="8" fill="hold" grpId="0" nodeType="withEffect">
+                                  <p:stCondLst>
+                                    <p:cond delay="200"/>
+                                  </p:stCondLst>
+                                  <p:childTnLst>
+                                    <p:set>
+                                      <p:cBhvr>
+                                        <p:cTn id="26" dur="1" fill="hold">
+                                          <p:stCondLst>
+                                            <p:cond delay="0"/>
+                                          </p:stCondLst>
+                                        </p:cTn>
+                                        <p:tgtEl>
+                                          <p:spTgt spid="12"/>
+                                        </p:tgtEl>
+                                        <p:attrNameLst>
+                                          <p:attrName>style.visibility</p:attrName>
+                                        </p:attrNameLst>
+                                      </p:cBhvr>
+                                      <p:to>
+                                        <p:strVal val="visible"/>
+                                      </p:to>
+                                    </p:set>
+                                    <p:animEffect transition="in" filter="wipe(left)">
+                                      <p:cBhvr>
+                                        <p:cTn id="27" dur="450"/>
+                                        <p:tgtEl>
+                                          <p:spTgt spid="12"/>
+                                        </p:tgtEl>
+                                      </p:cBhvr>
+                                    </p:animEffect>
+                                  </p:childTnLst>
+                                </p:cTn>
+                              </p:par>
+                              <p:par>
+                                <p:cTn id="28" presetID="22" presetClass="entr" presetSubtype="8" fill="hold" grpId="0" nodeType="withEffect">
+                                  <p:stCondLst>
+                                    <p:cond delay="300"/>
+                                  </p:stCondLst>
+                                  <p:childTnLst>
+                                    <p:set>
+                                      <p:cBhvr>
+                                        <p:cTn id="29" dur="1" fill="hold">
+                                          <p:stCondLst>
+                                            <p:cond delay="0"/>
+                                          </p:stCondLst>
+                                        </p:cTn>
+                                        <p:tgtEl>
+                                          <p:spTgt spid="13"/>
+                                        </p:tgtEl>
+                                        <p:attrNameLst>
+                                          <p:attrName>style.visibility</p:attrName>
+                                        </p:attrNameLst>
+                                      </p:cBhvr>
+                                      <p:to>
+                                        <p:strVal val="visible"/>
+                                      </p:to>
+                                    </p:set>
+                                    <p:animEffect transition="in" filter="wipe(left)">
+                                      <p:cBhvr>
+                                        <p:cTn id="30" dur="450"/>
+                                        <p:tgtEl>
+                                          <p:spTgt spid="13"/>
+                                        </p:tgtEl>
+                                      </p:cBhvr>
+                                    </p:animEffect>
+                                  </p:childTnLst>
+                                </p:cTn>
+                              </p:par>
+                              <p:par>
+                                <p:cTn id="31" presetID="22" presetClass="entr" presetSubtype="8" fill="hold" grpId="0" nodeType="withEffect">
+                                  <p:stCondLst>
+                                    <p:cond delay="300"/>
+                                  </p:stCondLst>
+                                  <p:childTnLst>
+                                    <p:set>
+                                      <p:cBhvr>
+                                        <p:cTn id="32" dur="1" fill="hold">
+                                          <p:stCondLst>
+                                            <p:cond delay="0"/>
+                                          </p:stCondLst>
+                                        </p:cTn>
+                                        <p:tgtEl>
+                                          <p:spTgt spid="14"/>
+                                        </p:tgtEl>
+                                        <p:attrNameLst>
+                                          <p:attrName>style.visibility</p:attrName>
+                                        </p:attrNameLst>
+                                      </p:cBhvr>
+                                      <p:to>
+                                        <p:strVal val="visible"/>
+                                      </p:to>
+                                    </p:set>
+                                    <p:animEffect transition="in" filter="wipe(left)">
+                                      <p:cBhvr>
+                                        <p:cTn id="33" dur="450"/>
+                                        <p:tgtEl>
+                                          <p:spTgt spid="14"/>
+                                        </p:tgtEl>
+                                      </p:cBhvr>
+                                    </p:animEffect>
+                                  </p:childTnLst>
+                                </p:cTn>
+                              </p:par>
+                            </p:childTnLst>
+                          </p:cTn>
+                        </p:par>
+                        <p:par>
+                          <p:cTn id="50" fill="hold">
+                            <p:stCondLst>
+                              <p:cond delay="1300"/>
+                            </p:stCondLst>
+                            <p:childTnLst>
+                              <p:par>
+                                <p:cTn id="35" presetID="10" presetClass="entr" presetSubtype="0" fill="hold" grpId="0" nodeType="afterEffect">
+                                  <p:stCondLst>
+                                    <p:cond delay="0"/>
+                                  </p:stCondLst>
+                                  <p:childTnLst>
+                                    <p:set>
+                                      <p:cBhvr>
+                                        <p:cTn id="36" dur="1" fill="hold">
+                                          <p:stCondLst>
+                                            <p:cond delay="0"/>
+                                          </p:stCondLst>
+                                        </p:cTn>
+                                        <p:tgtEl>
+                                          <p:spTgt spid="15"/>
+                                        </p:tgtEl>
+                                        <p:attrNameLst>
+                                          <p:attrName>style.visibility</p:attrName>
+                                        </p:attrNameLst>
+                                      </p:cBhvr>
+                                      <p:to>
+                                        <p:strVal val="visible"/>
+                                      </p:to>
+                                    </p:set>
+                                    <p:animEffect transition="in" filter="fade">
+                                      <p:cBhvr>
+                                        <p:cTn id="37" dur="450"/>
+                                        <p:tgtEl>
+                                          <p:spTgt spid="15"/>
+                                        </p:tgtEl>
+                                      </p:cBhvr>
+                                    </p:animEffect>
+                                  </p:childTnLst>
+                                </p:cTn>
+                              </p:par>
+                              <p:par>
+                                <p:cTn id="38" presetID="10" presetClass="entr" presetSubtype="0" fill="hold" grpId="0" nodeType="withEffect">
+                                  <p:stCondLst>
+                                    <p:cond delay="0"/>
+                                  </p:stCondLst>
+                                  <p:childTnLst>
+                                    <p:set>
+                                      <p:cBhvr>
+                                        <p:cTn id="39" dur="1" fill="hold">
+                                          <p:stCondLst>
+                                            <p:cond delay="0"/>
+                                          </p:stCondLst>
+                                        </p:cTn>
+                                        <p:tgtEl>
+                                          <p:spTgt spid="16"/>
+                                        </p:tgtEl>
+                                        <p:attrNameLst>
+                                          <p:attrName>style.visibility</p:attrName>
+                                        </p:attrNameLst>
+                                      </p:cBhvr>
+                                      <p:to>
+                                        <p:strVal val="visible"/>
+                                      </p:to>
+                                    </p:set>
+                                    <p:animEffect transition="in" filter="fade">
+                                      <p:cBhvr>
+                                        <p:cTn id="40" dur="450"/>
+                                        <p:tgtEl>
+                                          <p:spTgt spid="16"/>
+                                        </p:tgtEl>
+                                      </p:cBhvr>
+                                    </p:animEffect>
+                                  </p:childTnLst>
+                                </p:cTn>
+                              </p:par>
+                              <p:par>
+                                <p:cTn id="41" presetID="22" presetClass="entr" presetSubtype="8" fill="hold" grpId="0" nodeType="withEffect">
+                                  <p:stCondLst>
+                                    <p:cond delay="200"/>
+                                  </p:stCondLst>
+                                  <p:childTnLst>
+                                    <p:set>
+                                      <p:cBhvr>
+                                        <p:cTn id="42" dur="1" fill="hold">
+                                          <p:stCondLst>
+                                            <p:cond delay="0"/>
+                                          </p:stCondLst>
+                                        </p:cTn>
+                                        <p:tgtEl>
+                                          <p:spTgt spid="17"/>
+                                        </p:tgtEl>
+                                        <p:attrNameLst>
+                                          <p:attrName>style.visibility</p:attrName>
+                                        </p:attrNameLst>
+                                      </p:cBhvr>
+                                      <p:to>
+                                        <p:strVal val="visible"/>
+                                      </p:to>
+                                    </p:set>
+                                    <p:animEffect transition="in" filter="wipe(left)">
+                                      <p:cBhvr>
+                                        <p:cTn id="43" dur="450"/>
+                                        <p:tgtEl>
+                                          <p:spTgt spid="17"/>
+                                        </p:tgtEl>
+                                      </p:cBhvr>
+                                    </p:animEffect>
+                                  </p:childTnLst>
+                                </p:cTn>
+                              </p:par>
+                              <p:par>
+                                <p:cTn id="44" presetID="22" presetClass="entr" presetSubtype="8" fill="hold" grpId="0" nodeType="withEffect">
+                                  <p:stCondLst>
+                                    <p:cond delay="300"/>
+                                  </p:stCondLst>
+                                  <p:childTnLst>
+                                    <p:set>
+                                      <p:cBhvr>
+                                        <p:cTn id="45" dur="1" fill="hold">
+                                          <p:stCondLst>
+                                            <p:cond delay="0"/>
+                                          </p:stCondLst>
+                                        </p:cTn>
+                                        <p:tgtEl>
+                                          <p:spTgt spid="18"/>
+                                        </p:tgtEl>
+                                        <p:attrNameLst>
+                                          <p:attrName>style.visibility</p:attrName>
+                                        </p:attrNameLst>
+                                      </p:cBhvr>
+                                      <p:to>
+                                        <p:strVal val="visible"/>
+                                      </p:to>
+                                    </p:set>
+                                    <p:animEffect transition="in" filter="wipe(left)">
+                                      <p:cBhvr>
+                                        <p:cTn id="46" dur="450"/>
+                                        <p:tgtEl>
+                                          <p:spTgt spid="18"/>
+                                        </p:tgtEl>
+                                      </p:cBhvr>
+                                    </p:animEffect>
+                                  </p:childTnLst>
+                                </p:cTn>
+                              </p:par>
+                              <p:par>
+                                <p:cTn id="47" presetID="22" presetClass="entr" presetSubtype="8" fill="hold" grpId="0" nodeType="withEffect">
+                                  <p:stCondLst>
+                                    <p:cond delay="300"/>
+                                  </p:stCondLst>
+                                  <p:childTnLst>
+                                    <p:set>
+                                      <p:cBhvr>
+                                        <p:cTn id="48" dur="1" fill="hold">
+                                          <p:stCondLst>
+                                            <p:cond delay="0"/>
+                                          </p:stCondLst>
+                                        </p:cTn>
+                                        <p:tgtEl>
+                                          <p:spTgt spid="19"/>
+                                        </p:tgtEl>
+                                        <p:attrNameLst>
+                                          <p:attrName>style.visibility</p:attrName>
+                                        </p:attrNameLst>
+                                      </p:cBhvr>
+                                      <p:to>
+                                        <p:strVal val="visible"/>
+                                      </p:to>
+                                    </p:set>
+                                    <p:animEffect transition="in" filter="wipe(left)">
+                                      <p:cBhvr>
+                                        <p:cTn id="49" dur="450"/>
+                                        <p:tgtEl>
+                                          <p:spTgt spid="19"/>
+                                        </p:tgtEl>
+                                      </p:cBhvr>
+                                    </p:animEffect>
+                                  </p:childTnLst>
+                                </p:cTn>
+                              </p:par>
+                            </p:childTnLst>
+                          </p:cTn>
+                        </p:par>
+                        <p:par>
+                          <p:cTn id="66" fill="hold">
+                            <p:stCondLst>
+                              <p:cond delay="1950"/>
+                            </p:stCondLst>
+                            <p:childTnLst>
+                              <p:par>
+                                <p:cTn id="51" presetID="10" presetClass="entr" presetSubtype="0" fill="hold" grpId="0" nodeType="afterEffect">
+                                  <p:stCondLst>
+                                    <p:cond delay="0"/>
+                                  </p:stCondLst>
+                                  <p:childTnLst>
+                                    <p:set>
+                                      <p:cBhvr>
+                                        <p:cTn id="52" dur="1" fill="hold">
+                                          <p:stCondLst>
+                                            <p:cond delay="0"/>
+                                          </p:stCondLst>
+                                        </p:cTn>
+                                        <p:tgtEl>
+                                          <p:spTgt spid="20"/>
+                                        </p:tgtEl>
+                                        <p:attrNameLst>
+                                          <p:attrName>style.visibility</p:attrName>
+                                        </p:attrNameLst>
+                                      </p:cBhvr>
+                                      <p:to>
+                                        <p:strVal val="visible"/>
+                                      </p:to>
+                                    </p:set>
+                                    <p:animEffect transition="in" filter="fade">
+                                      <p:cBhvr>
+                                        <p:cTn id="53" dur="450"/>
+                                        <p:tgtEl>
+                                          <p:spTgt spid="20"/>
+                                        </p:tgtEl>
+                                      </p:cBhvr>
+                                    </p:animEffect>
+                                  </p:childTnLst>
+                                </p:cTn>
+                              </p:par>
+                              <p:par>
+                                <p:cTn id="54" presetID="10" presetClass="entr" presetSubtype="0" fill="hold" grpId="0" nodeType="withEffect">
+                                  <p:stCondLst>
+                                    <p:cond delay="0"/>
+                                  </p:stCondLst>
+                                  <p:childTnLst>
+                                    <p:set>
+                                      <p:cBhvr>
+                                        <p:cTn id="55" dur="1" fill="hold">
+                                          <p:stCondLst>
+                                            <p:cond delay="0"/>
+                                          </p:stCondLst>
+                                        </p:cTn>
+                                        <p:tgtEl>
+                                          <p:spTgt spid="21"/>
+                                        </p:tgtEl>
+                                        <p:attrNameLst>
+                                          <p:attrName>style.visibility</p:attrName>
+                                        </p:attrNameLst>
+                                      </p:cBhvr>
+                                      <p:to>
+                                        <p:strVal val="visible"/>
+                                      </p:to>
+                                    </p:set>
+                                    <p:animEffect transition="in" filter="fade">
+                                      <p:cBhvr>
+                                        <p:cTn id="56" dur="450"/>
+                                        <p:tgtEl>
+                                          <p:spTgt spid="21"/>
+                                        </p:tgtEl>
+                                      </p:cBhvr>
+                                    </p:animEffect>
+                                  </p:childTnLst>
+                                </p:cTn>
+                              </p:par>
+                              <p:par>
+                                <p:cTn id="57" presetID="22" presetClass="entr" presetSubtype="8" fill="hold" grpId="0" nodeType="withEffect">
+                                  <p:stCondLst>
+                                    <p:cond delay="200"/>
+                                  </p:stCondLst>
+                                  <p:childTnLst>
+                                    <p:set>
+                                      <p:cBhvr>
+                                        <p:cTn id="58" dur="1" fill="hold">
+                                          <p:stCondLst>
+                                            <p:cond delay="0"/>
+                                          </p:stCondLst>
+                                        </p:cTn>
+                                        <p:tgtEl>
+                                          <p:spTgt spid="22"/>
+                                        </p:tgtEl>
+                                        <p:attrNameLst>
+                                          <p:attrName>style.visibility</p:attrName>
+                                        </p:attrNameLst>
+                                      </p:cBhvr>
+                                      <p:to>
+                                        <p:strVal val="visible"/>
+                                      </p:to>
+                                    </p:set>
+                                    <p:animEffect transition="in" filter="wipe(left)">
+                                      <p:cBhvr>
+                                        <p:cTn id="59" dur="450"/>
+                                        <p:tgtEl>
+                                          <p:spTgt spid="22"/>
+                                        </p:tgtEl>
+                                      </p:cBhvr>
+                                    </p:animEffect>
+                                  </p:childTnLst>
+                                </p:cTn>
+                              </p:par>
+                              <p:par>
+                                <p:cTn id="60" presetID="22" presetClass="entr" presetSubtype="8" fill="hold" grpId="0" nodeType="withEffect">
+                                  <p:stCondLst>
+                                    <p:cond delay="300"/>
+                                  </p:stCondLst>
+                                  <p:childTnLst>
+                                    <p:set>
+                                      <p:cBhvr>
+                                        <p:cTn id="61" dur="1" fill="hold">
+                                          <p:stCondLst>
+                                            <p:cond delay="0"/>
+                                          </p:stCondLst>
+                                        </p:cTn>
+                                        <p:tgtEl>
+                                          <p:spTgt spid="23"/>
+                                        </p:tgtEl>
+                                        <p:attrNameLst>
+                                          <p:attrName>style.visibility</p:attrName>
+                                        </p:attrNameLst>
+                                      </p:cBhvr>
+                                      <p:to>
+                                        <p:strVal val="visible"/>
+                                      </p:to>
+                                    </p:set>
+                                    <p:animEffect transition="in" filter="wipe(left)">
+                                      <p:cBhvr>
+                                        <p:cTn id="62" dur="450"/>
+                                        <p:tgtEl>
+                                          <p:spTgt spid="23"/>
+                                        </p:tgtEl>
+                                      </p:cBhvr>
+                                    </p:animEffect>
+                                  </p:childTnLst>
+                                </p:cTn>
+                              </p:par>
+                              <p:par>
+                                <p:cTn id="63" presetID="22" presetClass="entr" presetSubtype="8" fill="hold" grpId="0" nodeType="withEffect">
+                                  <p:stCondLst>
+                                    <p:cond delay="300"/>
+                                  </p:stCondLst>
+                                  <p:childTnLst>
+                                    <p:set>
+                                      <p:cBhvr>
+                                        <p:cTn id="64" dur="1" fill="hold">
+                                          <p:stCondLst>
+                                            <p:cond delay="0"/>
+                                          </p:stCondLst>
+                                        </p:cTn>
+                                        <p:tgtEl>
+                                          <p:spTgt spid="24"/>
+                                        </p:tgtEl>
+                                        <p:attrNameLst>
+                                          <p:attrName>style.visibility</p:attrName>
+                                        </p:attrNameLst>
+                                      </p:cBhvr>
+                                      <p:to>
+                                        <p:strVal val="visible"/>
+                                      </p:to>
+                                    </p:set>
+                                    <p:animEffect transition="in" filter="wipe(left)">
+                                      <p:cBhvr>
+                                        <p:cTn id="65" dur="450"/>
+                                        <p:tgtEl>
+                                          <p:spTgt spid="24"/>
+                                        </p:tgtEl>
+                                      </p:cBhvr>
+                                    </p:animEffect>
+                                  </p:childTnLst>
+                                </p:cTn>
+                              </p:par>
+                            </p:childTnLst>
+                          </p:cTn>
+                        </p:par>
+                        <p:par>
+                          <p:cTn id="82" fill="hold">
+                            <p:stCondLst>
+                              <p:cond delay="2600"/>
+                            </p:stCondLst>
+                            <p:childTnLst>
+                              <p:par>
+                                <p:cTn id="67" presetID="10" presetClass="entr" presetSubtype="0" fill="hold" grpId="0" nodeType="afterEffect">
+                                  <p:stCondLst>
+                                    <p:cond delay="0"/>
+                                  </p:stCondLst>
+                                  <p:childTnLst>
+                                    <p:set>
+                                      <p:cBhvr>
+                                        <p:cTn id="68" dur="1" fill="hold">
+                                          <p:stCondLst>
+                                            <p:cond delay="0"/>
+                                          </p:stCondLst>
+                                        </p:cTn>
+                                        <p:tgtEl>
+                                          <p:spTgt spid="25"/>
+                                        </p:tgtEl>
+                                        <p:attrNameLst>
+                                          <p:attrName>style.visibility</p:attrName>
+                                        </p:attrNameLst>
+                                      </p:cBhvr>
+                                      <p:to>
+                                        <p:strVal val="visible"/>
+                                      </p:to>
+                                    </p:set>
+                                    <p:animEffect transition="in" filter="fade">
+                                      <p:cBhvr>
+                                        <p:cTn id="69" dur="450"/>
+                                        <p:tgtEl>
+                                          <p:spTgt spid="25"/>
+                                        </p:tgtEl>
+                                      </p:cBhvr>
+                                    </p:animEffect>
+                                  </p:childTnLst>
+                                </p:cTn>
+                              </p:par>
+                              <p:par>
+                                <p:cTn id="70" presetID="10" presetClass="entr" presetSubtype="0" fill="hold" grpId="0" nodeType="withEffect">
+                                  <p:stCondLst>
+                                    <p:cond delay="0"/>
+                                  </p:stCondLst>
+                                  <p:childTnLst>
+                                    <p:set>
+                                      <p:cBhvr>
+                                        <p:cTn id="71" dur="1" fill="hold">
+                                          <p:stCondLst>
+                                            <p:cond delay="0"/>
+                                          </p:stCondLst>
+                                        </p:cTn>
+                                        <p:tgtEl>
+                                          <p:spTgt spid="26"/>
+                                        </p:tgtEl>
+                                        <p:attrNameLst>
+                                          <p:attrName>style.visibility</p:attrName>
+                                        </p:attrNameLst>
+                                      </p:cBhvr>
+                                      <p:to>
+                                        <p:strVal val="visible"/>
+                                      </p:to>
+                                    </p:set>
+                                    <p:animEffect transition="in" filter="fade">
+                                      <p:cBhvr>
+                                        <p:cTn id="72" dur="450"/>
+                                        <p:tgtEl>
+                                          <p:spTgt spid="26"/>
+                                        </p:tgtEl>
+                                      </p:cBhvr>
+                                    </p:animEffect>
+                                  </p:childTnLst>
+                                </p:cTn>
+                              </p:par>
+                              <p:par>
+                                <p:cTn id="73" presetID="22" presetClass="entr" presetSubtype="8" fill="hold" grpId="0" nodeType="withEffect">
+                                  <p:stCondLst>
+                                    <p:cond delay="200"/>
+                                  </p:stCondLst>
+                                  <p:childTnLst>
+                                    <p:set>
+                                      <p:cBhvr>
+                                        <p:cTn id="74" dur="1" fill="hold">
+                                          <p:stCondLst>
+                                            <p:cond delay="0"/>
+                                          </p:stCondLst>
+                                        </p:cTn>
+                                        <p:tgtEl>
+                                          <p:spTgt spid="27"/>
+                                        </p:tgtEl>
+                                        <p:attrNameLst>
+                                          <p:attrName>style.visibility</p:attrName>
+                                        </p:attrNameLst>
+                                      </p:cBhvr>
+                                      <p:to>
+                                        <p:strVal val="visible"/>
+                                      </p:to>
+                                    </p:set>
+                                    <p:animEffect transition="in" filter="wipe(left)">
+                                      <p:cBhvr>
+                                        <p:cTn id="75" dur="450"/>
+                                        <p:tgtEl>
+                                          <p:spTgt spid="27"/>
+                                        </p:tgtEl>
+                                      </p:cBhvr>
+                                    </p:animEffect>
+                                  </p:childTnLst>
+                                </p:cTn>
+                              </p:par>
+                              <p:par>
+                                <p:cTn id="76" presetID="22" presetClass="entr" presetSubtype="8" fill="hold" grpId="0" nodeType="withEffect">
+                                  <p:stCondLst>
+                                    <p:cond delay="300"/>
+                                  </p:stCondLst>
+                                  <p:childTnLst>
+                                    <p:set>
+                                      <p:cBhvr>
+                                        <p:cTn id="77" dur="1" fill="hold">
+                                          <p:stCondLst>
+                                            <p:cond delay="0"/>
+                                          </p:stCondLst>
+                                        </p:cTn>
+                                        <p:tgtEl>
+                                          <p:spTgt spid="28"/>
+                                        </p:tgtEl>
+                                        <p:attrNameLst>
+                                          <p:attrName>style.visibility</p:attrName>
+                                        </p:attrNameLst>
+                                      </p:cBhvr>
+                                      <p:to>
+                                        <p:strVal val="visible"/>
+                                      </p:to>
+                                    </p:set>
+                                    <p:animEffect transition="in" filter="wipe(left)">
+                                      <p:cBhvr>
+                                        <p:cTn id="78" dur="450"/>
+                                        <p:tgtEl>
+                                          <p:spTgt spid="28"/>
+                                        </p:tgtEl>
+                                      </p:cBhvr>
+                                    </p:animEffect>
+                                  </p:childTnLst>
+                                </p:cTn>
+                              </p:par>
+                              <p:par>
+                                <p:cTn id="79" presetID="22" presetClass="entr" presetSubtype="8" fill="hold" grpId="0" nodeType="withEffect">
+                                  <p:stCondLst>
+                                    <p:cond delay="300"/>
+                                  </p:stCondLst>
+                                  <p:childTnLst>
+                                    <p:set>
+                                      <p:cBhvr>
+                                        <p:cTn id="80" dur="1" fill="hold">
+                                          <p:stCondLst>
+                                            <p:cond delay="0"/>
+                                          </p:stCondLst>
+                                        </p:cTn>
+                                        <p:tgtEl>
+                                          <p:spTgt spid="29"/>
+                                        </p:tgtEl>
+                                        <p:attrNameLst>
+                                          <p:attrName>style.visibility</p:attrName>
+                                        </p:attrNameLst>
+                                      </p:cBhvr>
+                                      <p:to>
+                                        <p:strVal val="visible"/>
+                                      </p:to>
+                                    </p:set>
+                                    <p:animEffect transition="in" filter="wipe(left)">
+                                      <p:cBhvr>
+                                        <p:cTn id="81" dur="450"/>
+                                        <p:tgtEl>
+                                          <p:spTgt spid="29"/>
+                                        </p:tgtEl>
+                                      </p:cBhvr>
+                                    </p:animEffect>
+                                  </p:childTnLst>
+                                </p:cTn>
+                              </p:par>
+                            </p:childTnLst>
+                          </p:cTn>
+                        </p:par>
+                        <p:par>
+                          <p:cTn id="98" fill="hold">
+                            <p:stCondLst>
+                              <p:cond delay="3250"/>
+                            </p:stCondLst>
+                            <p:childTnLst>
+                              <p:par>
+                                <p:cTn id="83" presetID="10" presetClass="entr" presetSubtype="0" fill="hold" grpId="0" nodeType="afterEffect">
+                                  <p:stCondLst>
+                                    <p:cond delay="0"/>
+                                  </p:stCondLst>
+                                  <p:childTnLst>
+                                    <p:set>
+                                      <p:cBhvr>
+                                        <p:cTn id="84" dur="1" fill="hold">
+                                          <p:stCondLst>
+                                            <p:cond delay="0"/>
+                                          </p:stCondLst>
+                                        </p:cTn>
+                                        <p:tgtEl>
+                                          <p:spTgt spid="30"/>
+                                        </p:tgtEl>
+                                        <p:attrNameLst>
+                                          <p:attrName>style.visibility</p:attrName>
+                                        </p:attrNameLst>
+                                      </p:cBhvr>
+                                      <p:to>
+                                        <p:strVal val="visible"/>
+                                      </p:to>
+                                    </p:set>
+                                    <p:animEffect transition="in" filter="fade">
+                                      <p:cBhvr>
+                                        <p:cTn id="85" dur="450"/>
+                                        <p:tgtEl>
+                                          <p:spTgt spid="30"/>
+                                        </p:tgtEl>
+                                      </p:cBhvr>
+                                    </p:animEffect>
+                                  </p:childTnLst>
+                                </p:cTn>
+                              </p:par>
+                              <p:par>
+                                <p:cTn id="86" presetID="10" presetClass="entr" presetSubtype="0" fill="hold" grpId="0" nodeType="withEffect">
+                                  <p:stCondLst>
+                                    <p:cond delay="0"/>
+                                  </p:stCondLst>
+                                  <p:childTnLst>
+                                    <p:set>
+                                      <p:cBhvr>
+                                        <p:cTn id="87" dur="1" fill="hold">
+                                          <p:stCondLst>
+                                            <p:cond delay="0"/>
+                                          </p:stCondLst>
+                                        </p:cTn>
+                                        <p:tgtEl>
+                                          <p:spTgt spid="31"/>
+                                        </p:tgtEl>
+                                        <p:attrNameLst>
+                                          <p:attrName>style.visibility</p:attrName>
+                                        </p:attrNameLst>
+                                      </p:cBhvr>
+                                      <p:to>
+                                        <p:strVal val="visible"/>
+                                      </p:to>
+                                    </p:set>
+                                    <p:animEffect transition="in" filter="fade">
+                                      <p:cBhvr>
+                                        <p:cTn id="88" dur="450"/>
+                                        <p:tgtEl>
+                                          <p:spTgt spid="31"/>
+                                        </p:tgtEl>
+                                      </p:cBhvr>
+                                    </p:animEffect>
+                                  </p:childTnLst>
+                                </p:cTn>
+                              </p:par>
+                              <p:par>
+                                <p:cTn id="89" presetID="22" presetClass="entr" presetSubtype="8" fill="hold" grpId="0" nodeType="withEffect">
+                                  <p:stCondLst>
+                                    <p:cond delay="200"/>
+                                  </p:stCondLst>
+                                  <p:childTnLst>
+                                    <p:set>
+                                      <p:cBhvr>
+                                        <p:cTn id="90" dur="1" fill="hold">
+                                          <p:stCondLst>
+                                            <p:cond delay="0"/>
+                                          </p:stCondLst>
+                                        </p:cTn>
+                                        <p:tgtEl>
+                                          <p:spTgt spid="32"/>
+                                        </p:tgtEl>
+                                        <p:attrNameLst>
+                                          <p:attrName>style.visibility</p:attrName>
+                                        </p:attrNameLst>
+                                      </p:cBhvr>
+                                      <p:to>
+                                        <p:strVal val="visible"/>
+                                      </p:to>
+                                    </p:set>
+                                    <p:animEffect transition="in" filter="wipe(left)">
+                                      <p:cBhvr>
+                                        <p:cTn id="91" dur="450"/>
+                                        <p:tgtEl>
+                                          <p:spTgt spid="32"/>
+                                        </p:tgtEl>
+                                      </p:cBhvr>
+                                    </p:animEffect>
+                                  </p:childTnLst>
+                                </p:cTn>
+                              </p:par>
+                              <p:par>
+                                <p:cTn id="92" presetID="22" presetClass="entr" presetSubtype="8" fill="hold" grpId="0" nodeType="withEffect">
+                                  <p:stCondLst>
+                                    <p:cond delay="300"/>
+                                  </p:stCondLst>
+                                  <p:childTnLst>
+                                    <p:set>
+                                      <p:cBhvr>
+                                        <p:cTn id="93" dur="1" fill="hold">
+                                          <p:stCondLst>
+                                            <p:cond delay="0"/>
+                                          </p:stCondLst>
+                                        </p:cTn>
+                                        <p:tgtEl>
+                                          <p:spTgt spid="33"/>
+                                        </p:tgtEl>
+                                        <p:attrNameLst>
+                                          <p:attrName>style.visibility</p:attrName>
+                                        </p:attrNameLst>
+                                      </p:cBhvr>
+                                      <p:to>
+                                        <p:strVal val="visible"/>
+                                      </p:to>
+                                    </p:set>
+                                    <p:animEffect transition="in" filter="wipe(left)">
+                                      <p:cBhvr>
+                                        <p:cTn id="94" dur="450"/>
+                                        <p:tgtEl>
+                                          <p:spTgt spid="33"/>
+                                        </p:tgtEl>
+                                      </p:cBhvr>
+                                    </p:animEffect>
+                                  </p:childTnLst>
+                                </p:cTn>
+                              </p:par>
+                              <p:par>
+                                <p:cTn id="95" presetID="22" presetClass="entr" presetSubtype="8" fill="hold" grpId="0" nodeType="withEffect">
+                                  <p:stCondLst>
+                                    <p:cond delay="300"/>
+                                  </p:stCondLst>
+                                  <p:childTnLst>
+                                    <p:set>
+                                      <p:cBhvr>
+                                        <p:cTn id="96" dur="1" fill="hold">
+                                          <p:stCondLst>
+                                            <p:cond delay="0"/>
+                                          </p:stCondLst>
+                                        </p:cTn>
+                                        <p:tgtEl>
+                                          <p:spTgt spid="34"/>
+                                        </p:tgtEl>
+                                        <p:attrNameLst>
+                                          <p:attrName>style.visibility</p:attrName>
+                                        </p:attrNameLst>
+                                      </p:cBhvr>
+                                      <p:to>
+                                        <p:strVal val="visible"/>
+                                      </p:to>
+                                    </p:set>
+                                    <p:animEffect transition="in" filter="wipe(left)">
+                                      <p:cBhvr>
+                                        <p:cTn id="97" dur="450"/>
+                                        <p:tgtEl>
+                                          <p:spTgt spid="34"/>
+                                        </p:tgtEl>
+                                      </p:cBhvr>
+                                    </p:animEffect>
+                                  </p:childTnLst>
+                                </p:cTn>
+                              </p:par>
+                            </p:childTnLst>
+                          </p:cTn>
+                        </p:par>
+                      </p:childTnLst>
+                    </p:cTn>
+                  </p:par>
+                </p:childTnLst>
+              </p:cTn>
+              <p:prevCondLst>
+                <p:cond evt="onPrev" delay="0">
+                  <p:tgtEl>
+                    <p:sldTgt/>
+                  </p:tgtEl>
+                </p:cond>
+              </p:prevCondLst>
+              <p:nextCondLst>
+                <p:cond evt="onNext" delay="0">
+                  <p:tgtEl>
+                    <p:sldTgt/>
+                  </p:tgtEl>
+                </p:cond>
+              </p:nextCondLst>
+            </p:seq>
+          </p:childTnLst>
+        </p:cTn>
+      </p:par>
+    </p:tnLst>
+    <p:bldLst>
+      <p:bldP spid="5" grpId="0" animBg="1"/>
+      <p:bldP spid="6" grpId="0" animBg="1"/>
+      <p:bldP spid="7" grpId="0" animBg="1"/>
+      <p:bldP spid="8" grpId="0" animBg="1"/>
+      <p:bldP spid="9" grpId="0" animBg="1"/>
+      <p:bldP spid="10" grpId="0" animBg="1"/>
+      <p:bldP spid="11" grpId="0" animBg="1"/>
+      <p:bldP spid="12" grpId="0" animBg="1"/>
+      <p:bldP spid="13" grpId="0" animBg="1"/>
+      <p:bldP spid="14" grpId="0" animBg="1"/>
+      <p:bldP spid="15" grpId="0" animBg="1"/>
+      <p:bldP spid="16" grpId="0" animBg="1"/>
+      <p:bldP spid="17" grpId="0" animBg="1"/>
+      <p:bldP spid="18" grpId="0" animBg="1"/>
+      <p:bldP spid="19" grpId="0" animBg="1"/>
+      <p:bldP spid="20" grpId="0" animBg="1"/>
+      <p:bldP spid="21" grpId="0" animBg="1"/>
+      <p:bldP spid="22" grpId="0" animBg="1"/>
+      <p:bldP spid="23" grpId="0" animBg="1"/>
+      <p:bldP spid="24" grpId="0" animBg="1"/>
+      <p:bldP spid="25" grpId="0" animBg="1"/>
+      <p:bldP spid="26" grpId="0" animBg="1"/>
+      <p:bldP spid="27" grpId="0" animBg="1"/>
+      <p:bldP spid="28" grpId="0" animBg="1"/>
+      <p:bldP spid="29" grpId="0" animBg="1"/>
+      <p:bldP spid="30" grpId="0" animBg="1"/>
+      <p:bldP spid="31" grpId="0" animBg="1"/>
+      <p:bldP spid="32" grpId="0" animBg="1"/>
+      <p:bldP spid="33" grpId="0" animBg="1"/>
+      <p:bldP spid="34" grpId="0" animBg="1"/>
+    </p:bldLst>
+  </p:timing>
+</p:sld>
+</file>
+
+<file path=ppt/slides/slide8.xml><?xml version="1.0" encoding="utf-8"?>
+<p:sld xmlns:a="http://schemas.openxmlformats.org/drawingml/2006/main" xmlns:r="http://schemas.openxmlformats.org/officeDocument/2006/relationships" xmlns:p="http://schemas.openxmlformats.org/presentationml/2006/main">
+  <p:cSld name="Slide 8">
     <p:spTree>
       <p:nvGrpSpPr>
         <p:cNvPr id="1" name=""/>

--- a/erm-migration/docs/ERM-Migration-Jury-Pitch.pptx
+++ b/erm-migration/docs/ERM-Migration-Jury-Pitch.pptx
@@ -114,18 +114,18 @@
   <p:extLst>
     <p:ext uri="{521415D9-36F7-43E2-AB2F-B90AF26B5E84}">
       <p14:sectionLst xmlns:p14="http://schemas.microsoft.com/office/powerpoint/2010/main">
-        <p14:section name="Pitch" id="{33ca7ca2-bc01-2ed2-fb6a-97406a12c4f4}">
+        <p14:section name="Pitch" id="{68cee248-ac56-9275-01e0-833e31471027}">
           <p14:sldIdLst>
             <p14:sldId id="256"/>
           </p14:sldIdLst>
         </p14:section>
-        <p14:section name="Problem and method" id="{de6ffe95-0ce3-e50b-5752-1e7c262878da}">
+        <p14:section name="Problem and method" id="{5e3557c1-594e-cbe3-d84d-735b845b56c9}">
           <p14:sldIdLst>
             <p14:sldId id="257"/>
             <p14:sldId id="258"/>
           </p14:sldIdLst>
         </p14:section>
-        <p14:section name="Impact" id="{42ae12a4-0680-d832-7970-7c67feddbf72}">
+        <p14:section name="Impact" id="{0a0c7880-fca0-b643-b453-781e7b2042c3}">
           <p14:sldIdLst>
             <p14:sldId id="259"/>
             <p14:sldId id="260"/>
@@ -133,7 +133,7 @@
             <p14:sldId id="262"/>
           </p14:sldIdLst>
         </p14:section>
-        <p14:section name="Reuse" id="{e8beae28-e3cb-39fb-e193-be7fb727433d}">
+        <p14:section name="Reuse" id="{d7bb1c21-0d15-3ccb-43df-1626f229b72a}">
           <p14:sldIdLst>
             <p14:sldId id="263"/>
           </p14:sldIdLst>
@@ -1070,7 +1070,7 @@
           <a:p>
             <a:r>
               <a:rPr lang="en-US" dirty="0"/>
-              <a:t>This slide ties the work to the 2026 objectives; each row appears in turn. Leverage AI to solve business problems: this is an AI-assisted migration of a complex, undocumented app, and the method is now a playbook. Deliver on time, cost and quality: two developers did it in one PI, about 76% less effort than a generic manual estimate. Manage our risks: the AI review caught 7 security and data-integrity issues, the restricted-view access model was kept, and we removed a dependency on Slate configuration by moving to standard React and OSDK code. Digital Design Authority: the app now has 8 architecture and lifecycle diagrams and a documented feature catalogue. Digital acumen and competencies: pack-project.ts and the playbook let other teams repeat this. Customer satisfaction: ERM users get 5 enhancements the old app did not have.</a:t>
+              <a:t>This slide ties the project to four 2026 objectives; the flow builds one branch at a time. One: Leverage AI to solve business problems. The AI read all 8 Slate exports and the packed React code, recovered 105 features from an undocumented app and found 31 gaps. Two: Deliver on time, on cost, on quality. Two developers delivered it in one PI, about 76% less effort than a generic manual estimate. Three: Ensure our operational performance. ERM is a business system; every one of its 105 features was tracked for parity, and it now runs on standard, maintainable React and OSDK code instead of legacy Slate configuration. Four: Grow digital acumen and competencies. pack-project.ts and the playbook mean other teams can repeat this, which builds AI-assisted engineering skills across the organisation.</a:t>
             </a:r>
             <a:endParaRPr lang="en-US" dirty="0"/>
           </a:p>
@@ -4575,14 +4575,14 @@
       </p:sp>
       <p:sp>
         <p:nvSpPr>
-          <p:cNvPr id="3" name="objhead-left"/>
+          <p:cNvPr id="3" name="flowhead-src"/>
           <p:cNvSpPr txBox="1"/>
           <p:nvPr/>
         </p:nvSpPr>
         <p:spPr>
           <a:xfrm>
             <a:off x="548640" y="1280160"/>
-            <a:ext cx="4617720" cy="274320"/>
+            <a:ext cx="2377440" cy="274320"/>
           </a:xfrm>
           <a:prstGeom prst="rect">
             <a:avLst/>
@@ -4603,6 +4603,78 @@
                   <a:schemeClr val="tx2"/>
                 </a:solidFill>
               </a:rPr>
+              <a:t>OUR PROJECT</a:t>
+            </a:r>
+            <a:endParaRPr lang="en-US" sz="1100" dirty="0"/>
+          </a:p>
+        </p:txBody>
+      </p:sp>
+      <p:sp>
+        <p:nvSpPr>
+          <p:cNvPr id="4" name="flowhead-ev"/>
+          <p:cNvSpPr txBox="1"/>
+          <p:nvPr/>
+        </p:nvSpPr>
+        <p:spPr>
+          <a:xfrm>
+            <a:off x="3429000" y="1280160"/>
+            <a:ext cx="4069080" cy="274320"/>
+          </a:xfrm>
+          <a:prstGeom prst="rect">
+            <a:avLst/>
+          </a:prstGeom>
+          <a:noFill/>
+          <a:ln/>
+        </p:spPr>
+        <p:txBody>
+          <a:bodyPr wrap="square" lIns="0" tIns="0" rIns="0" bIns="0" rtlCol="0" anchor="t"/>
+          <a:lstStyle/>
+          <a:p>
+            <a:pPr indent="0" marL="0">
+              <a:buNone/>
+            </a:pPr>
+            <a:r>
+              <a:rPr lang="en-US" sz="1100" b="1" spc="100" kern="0" dirty="0">
+                <a:solidFill>
+                  <a:schemeClr val="tx2"/>
+                </a:solidFill>
+              </a:rPr>
+              <a:t>EVIDENCE</a:t>
+            </a:r>
+            <a:endParaRPr lang="en-US" sz="1100" dirty="0"/>
+          </a:p>
+        </p:txBody>
+      </p:sp>
+      <p:sp>
+        <p:nvSpPr>
+          <p:cNvPr id="5" name="flowhead-obj"/>
+          <p:cNvSpPr txBox="1"/>
+          <p:nvPr/>
+        </p:nvSpPr>
+        <p:spPr>
+          <a:xfrm>
+            <a:off x="8001000" y="1280160"/>
+            <a:ext cx="3639312" cy="274320"/>
+          </a:xfrm>
+          <a:prstGeom prst="rect">
+            <a:avLst/>
+          </a:prstGeom>
+          <a:noFill/>
+          <a:ln/>
+        </p:spPr>
+        <p:txBody>
+          <a:bodyPr wrap="square" lIns="0" tIns="0" rIns="0" bIns="0" rtlCol="0" anchor="t"/>
+          <a:lstStyle/>
+          <a:p>
+            <a:pPr indent="0" marL="0">
+              <a:buNone/>
+            </a:pPr>
+            <a:r>
+              <a:rPr lang="en-US" sz="1100" b="1" spc="100" kern="0" dirty="0">
+                <a:solidFill>
+                  <a:schemeClr val="tx2"/>
+                </a:solidFill>
+              </a:rPr>
               <a:t>2026 OBJECTIVE</a:t>
             </a:r>
             <a:endParaRPr lang="en-US" sz="1100" dirty="0"/>
@@ -4611,54 +4683,238 @@
       </p:sp>
       <p:sp>
         <p:nvSpPr>
-          <p:cNvPr id="4" name="objhead-right"/>
-          <p:cNvSpPr txBox="1"/>
-          <p:nvPr/>
-        </p:nvSpPr>
-        <p:spPr>
-          <a:xfrm>
-            <a:off x="5577840" y="1280160"/>
-            <a:ext cx="6062472" cy="274320"/>
-          </a:xfrm>
-          <a:prstGeom prst="rect">
-            <a:avLst/>
-          </a:prstGeom>
-          <a:noFill/>
-          <a:ln/>
-        </p:spPr>
-        <p:txBody>
-          <a:bodyPr wrap="square" lIns="0" tIns="0" rIns="0" bIns="0" rtlCol="0" anchor="t"/>
-          <a:lstStyle/>
-          <a:p>
-            <a:pPr indent="0" marL="0">
-              <a:buNone/>
-            </a:pPr>
-            <a:r>
-              <a:rPr lang="en-US" sz="1100" b="1" spc="100" kern="0" dirty="0">
-                <a:solidFill>
-                  <a:schemeClr val="tx2"/>
-                </a:solidFill>
-              </a:rPr>
-              <a:t>WHAT WE CONTRIBUTED</a:t>
-            </a:r>
-            <a:endParaRPr lang="en-US" sz="1100" dirty="0"/>
-          </a:p>
-        </p:txBody>
-      </p:sp>
-      <p:sp>
-        <p:nvSpPr>
-          <p:cNvPr id="5" name="objrow-0-objbox"/>
+          <p:cNvPr id="6" name="flow-src-box"/>
           <p:cNvSpPr/>
           <p:nvPr/>
         </p:nvSpPr>
         <p:spPr>
           <a:xfrm>
             <a:off x="548640" y="1645920"/>
-            <a:ext cx="4617720" cy="676656"/>
+            <a:ext cx="2377440" cy="4498848"/>
           </a:xfrm>
           <a:prstGeom prst="roundRect">
             <a:avLst>
-              <a:gd name="adj" fmla="val 16216"/>
+              <a:gd name="adj" fmla="val 4615"/>
+            </a:avLst>
+          </a:prstGeom>
+          <a:solidFill>
+            <a:schemeClr val="accent1"/>
+          </a:solidFill>
+          <a:ln/>
+        </p:spPr>
+      </p:sp>
+      <p:sp>
+        <p:nvSpPr>
+          <p:cNvPr id="7" name="flow-src-text"/>
+          <p:cNvSpPr txBox="1"/>
+          <p:nvPr/>
+        </p:nvSpPr>
+        <p:spPr>
+          <a:xfrm>
+            <a:off x="777240" y="1920240"/>
+            <a:ext cx="1920240" cy="3950208"/>
+          </a:xfrm>
+          <a:prstGeom prst="rect">
+            <a:avLst/>
+          </a:prstGeom>
+          <a:noFill/>
+          <a:ln/>
+        </p:spPr>
+        <p:txBody>
+          <a:bodyPr wrap="square" lIns="0" tIns="0" rIns="0" bIns="0" rtlCol="0" anchor="ctr"/>
+          <a:lstStyle/>
+          <a:p>
+            <a:pPr indent="0" marL="0">
+              <a:buNone/>
+            </a:pPr>
+            <a:r>
+              <a:rPr lang="en-US" sz="2000" b="1" dirty="0">
+                <a:solidFill>
+                  <a:schemeClr val="tx1"/>
+                </a:solidFill>
+              </a:rPr>
+              <a:t>AI-assisted migration of ERM</a:t>
+            </a:r>
+            <a:endParaRPr lang="en-US" sz="2000" dirty="0"/>
+          </a:p>
+          <a:p>
+            <a:pPr indent="0" marL="0">
+              <a:buNone/>
+            </a:pPr>
+            <a:r>
+              <a:rPr lang="en-US" sz="1000" dirty="0">
+                <a:solidFill>
+                  <a:srgbClr val="000000"/>
+                </a:solidFill>
+              </a:rPr>
+              <a:t> </a:t>
+            </a:r>
+            <a:endParaRPr lang="en-US" sz="2000" dirty="0"/>
+          </a:p>
+          <a:p>
+            <a:pPr indent="0" marL="0">
+              <a:buNone/>
+            </a:pPr>
+            <a:r>
+              <a:rPr lang="en-US" sz="1400" dirty="0">
+                <a:solidFill>
+                  <a:schemeClr val="tx1"/>
+                </a:solidFill>
+              </a:rPr>
+              <a:t>Slate to React + OSDK</a:t>
+            </a:r>
+            <a:endParaRPr lang="en-US" sz="2000" dirty="0"/>
+          </a:p>
+          <a:p>
+            <a:pPr indent="0" marL="0">
+              <a:buNone/>
+            </a:pPr>
+            <a:r>
+              <a:rPr lang="en-US" sz="1400" dirty="0">
+                <a:solidFill>
+                  <a:schemeClr val="tx1"/>
+                </a:solidFill>
+              </a:rPr>
+              <a:t>2 developers · 1 PI</a:t>
+            </a:r>
+            <a:endParaRPr lang="en-US" sz="2000" dirty="0"/>
+          </a:p>
+          <a:p>
+            <a:pPr indent="0" marL="0">
+              <a:buNone/>
+            </a:pPr>
+            <a:r>
+              <a:rPr lang="en-US" sz="1400" dirty="0">
+                <a:solidFill>
+                  <a:schemeClr val="tx1"/>
+                </a:solidFill>
+              </a:rPr>
+              <a:t>pack-project.ts</a:t>
+            </a:r>
+            <a:endParaRPr lang="en-US" sz="2000" dirty="0"/>
+          </a:p>
+        </p:txBody>
+      </p:sp>
+      <p:sp>
+        <p:nvSpPr>
+          <p:cNvPr id="8" name="flow-0-arrow1"/>
+          <p:cNvSpPr/>
+          <p:nvPr/>
+        </p:nvSpPr>
+        <p:spPr>
+          <a:xfrm>
+            <a:off x="2971800" y="2139696"/>
+            <a:ext cx="411480" cy="0"/>
+          </a:xfrm>
+          <a:prstGeom prst="line">
+            <a:avLst/>
+          </a:prstGeom>
+          <a:noFill/>
+          <a:ln w="22225">
+            <a:solidFill>
+              <a:schemeClr val="tx2"/>
+            </a:solidFill>
+            <a:prstDash val="solid"/>
+            <a:tailEnd type="triangle"/>
+          </a:ln>
+        </p:spPr>
+      </p:sp>
+      <p:sp>
+        <p:nvSpPr>
+          <p:cNvPr id="9" name="flow-0-evbox"/>
+          <p:cNvSpPr/>
+          <p:nvPr/>
+        </p:nvSpPr>
+        <p:spPr>
+          <a:xfrm>
+            <a:off x="3429000" y="1645920"/>
+            <a:ext cx="4069080" cy="987552"/>
+          </a:xfrm>
+          <a:prstGeom prst="roundRect">
+            <a:avLst>
+              <a:gd name="adj" fmla="val 11111"/>
+            </a:avLst>
+          </a:prstGeom>
+          <a:solidFill>
+            <a:schemeClr val="bg2"/>
+          </a:solidFill>
+          <a:ln/>
+        </p:spPr>
+      </p:sp>
+      <p:sp>
+        <p:nvSpPr>
+          <p:cNvPr id="10" name="flow-0-evtext"/>
+          <p:cNvSpPr txBox="1"/>
+          <p:nvPr/>
+        </p:nvSpPr>
+        <p:spPr>
+          <a:xfrm>
+            <a:off x="3611880" y="1737360"/>
+            <a:ext cx="3703320" cy="804672"/>
+          </a:xfrm>
+          <a:prstGeom prst="rect">
+            <a:avLst/>
+          </a:prstGeom>
+          <a:noFill/>
+          <a:ln/>
+        </p:spPr>
+        <p:txBody>
+          <a:bodyPr wrap="square" lIns="0" tIns="0" rIns="0" bIns="0" rtlCol="0" anchor="ctr"/>
+          <a:lstStyle/>
+          <a:p>
+            <a:pPr indent="0" marL="0">
+              <a:buNone/>
+            </a:pPr>
+            <a:r>
+              <a:rPr lang="en-US" sz="1400" dirty="0">
+                <a:solidFill>
+                  <a:schemeClr val="tx1"/>
+                </a:solidFill>
+              </a:rPr>
+              <a:t>AI read 8 Slate exports and the packed React code: 105 features recovered, 31 gaps found</a:t>
+            </a:r>
+            <a:endParaRPr lang="en-US" sz="1400" dirty="0"/>
+          </a:p>
+        </p:txBody>
+      </p:sp>
+      <p:sp>
+        <p:nvSpPr>
+          <p:cNvPr id="11" name="flow-0-arrow2"/>
+          <p:cNvSpPr/>
+          <p:nvPr/>
+        </p:nvSpPr>
+        <p:spPr>
+          <a:xfrm>
+            <a:off x="7543800" y="2139696"/>
+            <a:ext cx="411480" cy="0"/>
+          </a:xfrm>
+          <a:prstGeom prst="line">
+            <a:avLst/>
+          </a:prstGeom>
+          <a:noFill/>
+          <a:ln w="22225">
+            <a:solidFill>
+              <a:schemeClr val="tx2"/>
+            </a:solidFill>
+            <a:prstDash val="solid"/>
+            <a:tailEnd type="triangle"/>
+          </a:ln>
+        </p:spPr>
+      </p:sp>
+      <p:sp>
+        <p:nvSpPr>
+          <p:cNvPr id="12" name="flow-0-objbox"/>
+          <p:cNvSpPr/>
+          <p:nvPr/>
+        </p:nvSpPr>
+        <p:spPr>
+          <a:xfrm>
+            <a:off x="8001000" y="1645920"/>
+            <a:ext cx="3639312" cy="987552"/>
+          </a:xfrm>
+          <a:prstGeom prst="roundRect">
+            <a:avLst>
+              <a:gd name="adj" fmla="val 11111"/>
             </a:avLst>
           </a:prstGeom>
           <a:solidFill>
@@ -4669,14 +4925,14 @@
       </p:sp>
       <p:sp>
         <p:nvSpPr>
-          <p:cNvPr id="6" name="objrow-0-objtext"/>
+          <p:cNvPr id="13" name="flow-0-objtext"/>
           <p:cNvSpPr txBox="1"/>
           <p:nvPr/>
         </p:nvSpPr>
         <p:spPr>
           <a:xfrm>
-            <a:off x="731520" y="1719072"/>
-            <a:ext cx="4297680" cy="530352"/>
+            <a:off x="8183880" y="1737360"/>
+            <a:ext cx="3273552" cy="804672"/>
           </a:xfrm>
           <a:prstGeom prst="rect">
             <a:avLst/>
@@ -4692,14 +4948,14 @@
               <a:buNone/>
             </a:pPr>
             <a:r>
-              <a:rPr lang="en-US" sz="1300" b="1" dirty="0">
+              <a:rPr lang="en-US" sz="1500" b="1" dirty="0">
                 <a:solidFill>
                   <a:schemeClr val="bg1"/>
                 </a:solidFill>
               </a:rPr>
               <a:t>Leverage AI to solve business problems</a:t>
             </a:r>
-            <a:endParaRPr lang="en-US" sz="1300" dirty="0"/>
+            <a:endParaRPr lang="en-US" sz="1500" dirty="0"/>
           </a:p>
           <a:p>
             <a:pPr indent="0" marL="0">
@@ -4711,51 +4967,50 @@
                   <a:schemeClr val="accent5"/>
                 </a:solidFill>
               </a:rPr>
-              <a:t>Digital: democratise AI · India TFO</a:t>
-            </a:r>
-            <a:endParaRPr lang="en-US" sz="1300" dirty="0"/>
-          </a:p>
-        </p:txBody>
-      </p:sp>
-      <p:sp>
-        <p:nvSpPr>
-          <p:cNvPr id="7" name="objrow-0-arrow"/>
+              <a:t>India TFO · Digital: democratise AI</a:t>
+            </a:r>
+            <a:endParaRPr lang="en-US" sz="1500" dirty="0"/>
+          </a:p>
+        </p:txBody>
+      </p:sp>
+      <p:sp>
+        <p:nvSpPr>
+          <p:cNvPr id="14" name="flow-1-arrow1"/>
           <p:cNvSpPr/>
           <p:nvPr/>
         </p:nvSpPr>
         <p:spPr>
           <a:xfrm>
-            <a:off x="5248656" y="1856232"/>
-            <a:ext cx="237744" cy="256032"/>
-          </a:xfrm>
-          <a:prstGeom prst="rightArrow">
-            <a:avLst/>
-          </a:prstGeom>
-          <a:solidFill>
-            <a:schemeClr val="accent1"/>
-          </a:solidFill>
-          <a:ln w="12700">
+            <a:off x="2971800" y="3310128"/>
+            <a:ext cx="411480" cy="0"/>
+          </a:xfrm>
+          <a:prstGeom prst="line">
+            <a:avLst/>
+          </a:prstGeom>
+          <a:noFill/>
+          <a:ln w="22225">
             <a:solidFill>
-              <a:schemeClr val="accent1"/>
+              <a:schemeClr val="tx2"/>
             </a:solidFill>
             <a:prstDash val="solid"/>
+            <a:tailEnd type="triangle"/>
           </a:ln>
         </p:spPr>
       </p:sp>
       <p:sp>
         <p:nvSpPr>
-          <p:cNvPr id="8" name="objrow-0-contribbox"/>
+          <p:cNvPr id="15" name="flow-1-evbox"/>
           <p:cNvSpPr/>
           <p:nvPr/>
         </p:nvSpPr>
         <p:spPr>
           <a:xfrm>
-            <a:off x="5577840" y="1645920"/>
-            <a:ext cx="6062472" cy="676656"/>
+            <a:off x="3429000" y="2816352"/>
+            <a:ext cx="4069080" cy="987552"/>
           </a:xfrm>
           <a:prstGeom prst="roundRect">
             <a:avLst>
-              <a:gd name="adj" fmla="val 16216"/>
+              <a:gd name="adj" fmla="val 11111"/>
             </a:avLst>
           </a:prstGeom>
           <a:solidFill>
@@ -4766,14 +5021,14 @@
       </p:sp>
       <p:sp>
         <p:nvSpPr>
-          <p:cNvPr id="9" name="objrow-0-contribtext"/>
+          <p:cNvPr id="16" name="flow-1-evtext"/>
           <p:cNvSpPr txBox="1"/>
           <p:nvPr/>
         </p:nvSpPr>
         <p:spPr>
           <a:xfrm>
-            <a:off x="5760720" y="1719072"/>
-            <a:ext cx="5696712" cy="530352"/>
+            <a:off x="3611880" y="2907792"/>
+            <a:ext cx="3703320" cy="804672"/>
           </a:xfrm>
           <a:prstGeom prst="rect">
             <a:avLst/>
@@ -4794,7 +5049,7 @@
                   <a:schemeClr val="tx1"/>
                 </a:solidFill>
               </a:rPr>
-              <a:t>AI-assisted migration of an undocumented, multi-module app, packaged as a reusable playbook</a:t>
+              <a:t>Delivered in 1 PI by 2 developers, about 76% less effort than a manual estimate</a:t>
             </a:r>
             <a:endParaRPr lang="en-US" sz="1400" dirty="0"/>
           </a:p>
@@ -4802,18 +5057,42 @@
       </p:sp>
       <p:sp>
         <p:nvSpPr>
-          <p:cNvPr id="10" name="objrow-1-objbox"/>
+          <p:cNvPr id="17" name="flow-1-arrow2"/>
           <p:cNvSpPr/>
           <p:nvPr/>
         </p:nvSpPr>
         <p:spPr>
           <a:xfrm>
-            <a:off x="548640" y="2432304"/>
-            <a:ext cx="4617720" cy="676656"/>
+            <a:off x="7543800" y="3310128"/>
+            <a:ext cx="411480" cy="0"/>
+          </a:xfrm>
+          <a:prstGeom prst="line">
+            <a:avLst/>
+          </a:prstGeom>
+          <a:noFill/>
+          <a:ln w="22225">
+            <a:solidFill>
+              <a:schemeClr val="tx2"/>
+            </a:solidFill>
+            <a:prstDash val="solid"/>
+            <a:tailEnd type="triangle"/>
+          </a:ln>
+        </p:spPr>
+      </p:sp>
+      <p:sp>
+        <p:nvSpPr>
+          <p:cNvPr id="18" name="flow-1-objbox"/>
+          <p:cNvSpPr/>
+          <p:nvPr/>
+        </p:nvSpPr>
+        <p:spPr>
+          <a:xfrm>
+            <a:off x="8001000" y="2816352"/>
+            <a:ext cx="3639312" cy="987552"/>
           </a:xfrm>
           <a:prstGeom prst="roundRect">
             <a:avLst>
-              <a:gd name="adj" fmla="val 16216"/>
+              <a:gd name="adj" fmla="val 11111"/>
             </a:avLst>
           </a:prstGeom>
           <a:solidFill>
@@ -4824,14 +5103,14 @@
       </p:sp>
       <p:sp>
         <p:nvSpPr>
-          <p:cNvPr id="11" name="objrow-1-objtext"/>
+          <p:cNvPr id="19" name="flow-1-objtext"/>
           <p:cNvSpPr txBox="1"/>
           <p:nvPr/>
         </p:nvSpPr>
         <p:spPr>
           <a:xfrm>
-            <a:off x="731520" y="2505456"/>
-            <a:ext cx="4297680" cy="530352"/>
+            <a:off x="8183880" y="2907792"/>
+            <a:ext cx="3273552" cy="804672"/>
           </a:xfrm>
           <a:prstGeom prst="rect">
             <a:avLst/>
@@ -4847,14 +5126,14 @@
               <a:buNone/>
             </a:pPr>
             <a:r>
-              <a:rPr lang="en-US" sz="1300" b="1" dirty="0">
+              <a:rPr lang="en-US" sz="1500" b="1" dirty="0">
                 <a:solidFill>
                   <a:schemeClr val="bg1"/>
                 </a:solidFill>
               </a:rPr>
               <a:t>Deliver on time, on cost, on quality</a:t>
             </a:r>
-            <a:endParaRPr lang="en-US" sz="1300" dirty="0"/>
+            <a:endParaRPr lang="en-US" sz="1500" dirty="0"/>
           </a:p>
           <a:p>
             <a:pPr indent="0" marL="0">
@@ -4866,51 +5145,50 @@
                   <a:schemeClr val="accent5"/>
                 </a:solidFill>
               </a:rPr>
-              <a:t>Digital: optimise our resources · Company: financial</a:t>
-            </a:r>
-            <a:endParaRPr lang="en-US" sz="1300" dirty="0"/>
-          </a:p>
-        </p:txBody>
-      </p:sp>
-      <p:sp>
-        <p:nvSpPr>
-          <p:cNvPr id="12" name="objrow-1-arrow"/>
+              <a:t>Digital: optimise our digital resources</a:t>
+            </a:r>
+            <a:endParaRPr lang="en-US" sz="1500" dirty="0"/>
+          </a:p>
+        </p:txBody>
+      </p:sp>
+      <p:sp>
+        <p:nvSpPr>
+          <p:cNvPr id="20" name="flow-2-arrow1"/>
           <p:cNvSpPr/>
           <p:nvPr/>
         </p:nvSpPr>
         <p:spPr>
           <a:xfrm>
-            <a:off x="5248656" y="2642616"/>
-            <a:ext cx="237744" cy="256032"/>
-          </a:xfrm>
-          <a:prstGeom prst="rightArrow">
-            <a:avLst/>
-          </a:prstGeom>
-          <a:solidFill>
-            <a:schemeClr val="accent1"/>
-          </a:solidFill>
-          <a:ln w="12700">
+            <a:off x="2971800" y="4480560"/>
+            <a:ext cx="411480" cy="0"/>
+          </a:xfrm>
+          <a:prstGeom prst="line">
+            <a:avLst/>
+          </a:prstGeom>
+          <a:noFill/>
+          <a:ln w="22225">
             <a:solidFill>
-              <a:schemeClr val="accent1"/>
+              <a:schemeClr val="tx2"/>
             </a:solidFill>
             <a:prstDash val="solid"/>
+            <a:tailEnd type="triangle"/>
           </a:ln>
         </p:spPr>
       </p:sp>
       <p:sp>
         <p:nvSpPr>
-          <p:cNvPr id="13" name="objrow-1-contribbox"/>
+          <p:cNvPr id="21" name="flow-2-evbox"/>
           <p:cNvSpPr/>
           <p:nvPr/>
         </p:nvSpPr>
         <p:spPr>
           <a:xfrm>
-            <a:off x="5577840" y="2432304"/>
-            <a:ext cx="6062472" cy="676656"/>
+            <a:off x="3429000" y="3986784"/>
+            <a:ext cx="4069080" cy="987552"/>
           </a:xfrm>
           <a:prstGeom prst="roundRect">
             <a:avLst>
-              <a:gd name="adj" fmla="val 16216"/>
+              <a:gd name="adj" fmla="val 11111"/>
             </a:avLst>
           </a:prstGeom>
           <a:solidFill>
@@ -4921,14 +5199,14 @@
       </p:sp>
       <p:sp>
         <p:nvSpPr>
-          <p:cNvPr id="14" name="objrow-1-contribtext"/>
+          <p:cNvPr id="22" name="flow-2-evtext"/>
           <p:cNvSpPr txBox="1"/>
           <p:nvPr/>
         </p:nvSpPr>
         <p:spPr>
           <a:xfrm>
-            <a:off x="5760720" y="2505456"/>
-            <a:ext cx="5696712" cy="530352"/>
+            <a:off x="3611880" y="4078224"/>
+            <a:ext cx="3703320" cy="804672"/>
           </a:xfrm>
           <a:prstGeom prst="rect">
             <a:avLst/>
@@ -4949,7 +5227,7 @@
                   <a:schemeClr val="tx1"/>
                 </a:solidFill>
               </a:rPr>
-              <a:t>2 developers, 1 PI, about 76% less effort than a manual estimate</a:t>
+              <a:t>All 105 features tracked for parity; ERM moved off legacy Slate onto a standard, maintainable stack</a:t>
             </a:r>
             <a:endParaRPr lang="en-US" sz="1400" dirty="0"/>
           </a:p>
@@ -4957,18 +5235,42 @@
       </p:sp>
       <p:sp>
         <p:nvSpPr>
-          <p:cNvPr id="15" name="objrow-2-objbox"/>
+          <p:cNvPr id="23" name="flow-2-arrow2"/>
           <p:cNvSpPr/>
           <p:nvPr/>
         </p:nvSpPr>
         <p:spPr>
           <a:xfrm>
-            <a:off x="548640" y="3218688"/>
-            <a:ext cx="4617720" cy="676656"/>
+            <a:off x="7543800" y="4480560"/>
+            <a:ext cx="411480" cy="0"/>
+          </a:xfrm>
+          <a:prstGeom prst="line">
+            <a:avLst/>
+          </a:prstGeom>
+          <a:noFill/>
+          <a:ln w="22225">
+            <a:solidFill>
+              <a:schemeClr val="tx2"/>
+            </a:solidFill>
+            <a:prstDash val="solid"/>
+            <a:tailEnd type="triangle"/>
+          </a:ln>
+        </p:spPr>
+      </p:sp>
+      <p:sp>
+        <p:nvSpPr>
+          <p:cNvPr id="24" name="flow-2-objbox"/>
+          <p:cNvSpPr/>
+          <p:nvPr/>
+        </p:nvSpPr>
+        <p:spPr>
+          <a:xfrm>
+            <a:off x="8001000" y="3986784"/>
+            <a:ext cx="3639312" cy="987552"/>
           </a:xfrm>
           <a:prstGeom prst="roundRect">
             <a:avLst>
-              <a:gd name="adj" fmla="val 16216"/>
+              <a:gd name="adj" fmla="val 11111"/>
             </a:avLst>
           </a:prstGeom>
           <a:solidFill>
@@ -4979,14 +5281,14 @@
       </p:sp>
       <p:sp>
         <p:nvSpPr>
-          <p:cNvPr id="16" name="objrow-2-objtext"/>
+          <p:cNvPr id="25" name="flow-2-objtext"/>
           <p:cNvSpPr txBox="1"/>
           <p:nvPr/>
         </p:nvSpPr>
         <p:spPr>
           <a:xfrm>
-            <a:off x="731520" y="3291840"/>
-            <a:ext cx="4297680" cy="530352"/>
+            <a:off x="8183880" y="4078224"/>
+            <a:ext cx="3273552" cy="804672"/>
           </a:xfrm>
           <a:prstGeom prst="rect">
             <a:avLst/>
@@ -5002,14 +5304,14 @@
               <a:buNone/>
             </a:pPr>
             <a:r>
-              <a:rPr lang="en-US" sz="1300" b="1" dirty="0">
+              <a:rPr lang="en-US" sz="1500" b="1" dirty="0">
                 <a:solidFill>
                   <a:schemeClr val="bg1"/>
                 </a:solidFill>
               </a:rPr>
-              <a:t>Manage our risks</a:t>
-            </a:r>
-            <a:endParaRPr lang="en-US" sz="1300" dirty="0"/>
+              <a:t>Ensure our operational performance</a:t>
+            </a:r>
+            <a:endParaRPr lang="en-US" sz="1500" dirty="0"/>
           </a:p>
           <a:p>
             <a:pPr indent="0" marL="0">
@@ -5021,51 +5323,50 @@
                   <a:schemeClr val="accent5"/>
                 </a:solidFill>
               </a:rPr>
-              <a:t>Digital: cybersecurity, compliance, dependencies</a:t>
-            </a:r>
-            <a:endParaRPr lang="en-US" sz="1300" dirty="0"/>
-          </a:p>
-        </p:txBody>
-      </p:sp>
-      <p:sp>
-        <p:nvSpPr>
-          <p:cNvPr id="17" name="objrow-2-arrow"/>
+              <a:t>Digital: availability of systems for operations</a:t>
+            </a:r>
+            <a:endParaRPr lang="en-US" sz="1500" dirty="0"/>
+          </a:p>
+        </p:txBody>
+      </p:sp>
+      <p:sp>
+        <p:nvSpPr>
+          <p:cNvPr id="26" name="flow-3-arrow1"/>
           <p:cNvSpPr/>
           <p:nvPr/>
         </p:nvSpPr>
         <p:spPr>
           <a:xfrm>
-            <a:off x="5248656" y="3429000"/>
-            <a:ext cx="237744" cy="256032"/>
-          </a:xfrm>
-          <a:prstGeom prst="rightArrow">
-            <a:avLst/>
-          </a:prstGeom>
-          <a:solidFill>
-            <a:schemeClr val="accent1"/>
-          </a:solidFill>
-          <a:ln w="12700">
+            <a:off x="2971800" y="5650992"/>
+            <a:ext cx="411480" cy="0"/>
+          </a:xfrm>
+          <a:prstGeom prst="line">
+            <a:avLst/>
+          </a:prstGeom>
+          <a:noFill/>
+          <a:ln w="22225">
             <a:solidFill>
-              <a:schemeClr val="accent1"/>
+              <a:schemeClr val="tx2"/>
             </a:solidFill>
             <a:prstDash val="solid"/>
+            <a:tailEnd type="triangle"/>
           </a:ln>
         </p:spPr>
       </p:sp>
       <p:sp>
         <p:nvSpPr>
-          <p:cNvPr id="18" name="objrow-2-contribbox"/>
+          <p:cNvPr id="27" name="flow-3-evbox"/>
           <p:cNvSpPr/>
           <p:nvPr/>
         </p:nvSpPr>
         <p:spPr>
           <a:xfrm>
-            <a:off x="5577840" y="3218688"/>
-            <a:ext cx="6062472" cy="676656"/>
+            <a:off x="3429000" y="5157216"/>
+            <a:ext cx="4069080" cy="987552"/>
           </a:xfrm>
           <a:prstGeom prst="roundRect">
             <a:avLst>
-              <a:gd name="adj" fmla="val 16216"/>
+              <a:gd name="adj" fmla="val 11111"/>
             </a:avLst>
           </a:prstGeom>
           <a:solidFill>
@@ -5076,14 +5377,14 @@
       </p:sp>
       <p:sp>
         <p:nvSpPr>
-          <p:cNvPr id="19" name="objrow-2-contribtext"/>
+          <p:cNvPr id="28" name="flow-3-evtext"/>
           <p:cNvSpPr txBox="1"/>
           <p:nvPr/>
         </p:nvSpPr>
         <p:spPr>
           <a:xfrm>
-            <a:off x="5760720" y="3291840"/>
-            <a:ext cx="5696712" cy="530352"/>
+            <a:off x="3611880" y="5248656"/>
+            <a:ext cx="3703320" cy="804672"/>
           </a:xfrm>
           <a:prstGeom prst="rect">
             <a:avLst/>
@@ -5104,7 +5405,7 @@
                   <a:schemeClr val="tx1"/>
                 </a:solidFill>
               </a:rPr>
-              <a:t>7 security and data-integrity issues caught in review; restricted views kept; off Slate onto standard React + OSDK</a:t>
+              <a:t>pack-project.ts and the playbook let any team repeat the method</a:t>
             </a:r>
             <a:endParaRPr lang="en-US" sz="1400" dirty="0"/>
           </a:p>
@@ -5112,18 +5413,42 @@
       </p:sp>
       <p:sp>
         <p:nvSpPr>
-          <p:cNvPr id="20" name="objrow-3-objbox"/>
+          <p:cNvPr id="29" name="flow-3-arrow2"/>
           <p:cNvSpPr/>
           <p:nvPr/>
         </p:nvSpPr>
         <p:spPr>
           <a:xfrm>
-            <a:off x="548640" y="4005072"/>
-            <a:ext cx="4617720" cy="676656"/>
+            <a:off x="7543800" y="5650992"/>
+            <a:ext cx="411480" cy="0"/>
+          </a:xfrm>
+          <a:prstGeom prst="line">
+            <a:avLst/>
+          </a:prstGeom>
+          <a:noFill/>
+          <a:ln w="22225">
+            <a:solidFill>
+              <a:schemeClr val="tx2"/>
+            </a:solidFill>
+            <a:prstDash val="solid"/>
+            <a:tailEnd type="triangle"/>
+          </a:ln>
+        </p:spPr>
+      </p:sp>
+      <p:sp>
+        <p:nvSpPr>
+          <p:cNvPr id="30" name="flow-3-objbox"/>
+          <p:cNvSpPr/>
+          <p:nvPr/>
+        </p:nvSpPr>
+        <p:spPr>
+          <a:xfrm>
+            <a:off x="8001000" y="5157216"/>
+            <a:ext cx="3639312" cy="987552"/>
           </a:xfrm>
           <a:prstGeom prst="roundRect">
             <a:avLst>
-              <a:gd name="adj" fmla="val 16216"/>
+              <a:gd name="adj" fmla="val 11111"/>
             </a:avLst>
           </a:prstGeom>
           <a:solidFill>
@@ -5134,14 +5459,14 @@
       </p:sp>
       <p:sp>
         <p:nvSpPr>
-          <p:cNvPr id="21" name="objrow-3-objtext"/>
+          <p:cNvPr id="31" name="flow-3-objtext"/>
           <p:cNvSpPr txBox="1"/>
           <p:nvPr/>
         </p:nvSpPr>
         <p:spPr>
           <a:xfrm>
-            <a:off x="731520" y="4078224"/>
-            <a:ext cx="4297680" cy="530352"/>
+            <a:off x="8183880" y="5248656"/>
+            <a:ext cx="3273552" cy="804672"/>
           </a:xfrm>
           <a:prstGeom prst="rect">
             <a:avLst/>
@@ -5157,14 +5482,14 @@
               <a:buNone/>
             </a:pPr>
             <a:r>
-              <a:rPr lang="en-US" sz="1300" b="1" dirty="0">
+              <a:rPr lang="en-US" sz="1500" b="1" dirty="0">
                 <a:solidFill>
                   <a:schemeClr val="bg1"/>
                 </a:solidFill>
               </a:rPr>
-              <a:t>Reinforce the Digital Design Authority</a:t>
-            </a:r>
-            <a:endParaRPr lang="en-US" sz="1300" dirty="0"/>
+              <a:t>Grow digital acumen and competencies</a:t>
+            </a:r>
+            <a:endParaRPr lang="en-US" sz="1500" dirty="0"/>
           </a:p>
           <a:p>
             <a:pPr indent="0" marL="0">
@@ -5176,402 +5501,9 @@
                   <a:schemeClr val="accent5"/>
                 </a:solidFill>
               </a:rPr>
-              <a:t>Digital: enable our future</a:t>
-            </a:r>
-            <a:endParaRPr lang="en-US" sz="1300" dirty="0"/>
-          </a:p>
-        </p:txBody>
-      </p:sp>
-      <p:sp>
-        <p:nvSpPr>
-          <p:cNvPr id="22" name="objrow-3-arrow"/>
-          <p:cNvSpPr/>
-          <p:nvPr/>
-        </p:nvSpPr>
-        <p:spPr>
-          <a:xfrm>
-            <a:off x="5248656" y="4215384"/>
-            <a:ext cx="237744" cy="256032"/>
-          </a:xfrm>
-          <a:prstGeom prst="rightArrow">
-            <a:avLst/>
-          </a:prstGeom>
-          <a:solidFill>
-            <a:schemeClr val="accent1"/>
-          </a:solidFill>
-          <a:ln w="12700">
-            <a:solidFill>
-              <a:schemeClr val="accent1"/>
-            </a:solidFill>
-            <a:prstDash val="solid"/>
-          </a:ln>
-        </p:spPr>
-      </p:sp>
-      <p:sp>
-        <p:nvSpPr>
-          <p:cNvPr id="23" name="objrow-3-contribbox"/>
-          <p:cNvSpPr/>
-          <p:nvPr/>
-        </p:nvSpPr>
-        <p:spPr>
-          <a:xfrm>
-            <a:off x="5577840" y="4005072"/>
-            <a:ext cx="6062472" cy="676656"/>
-          </a:xfrm>
-          <a:prstGeom prst="roundRect">
-            <a:avLst>
-              <a:gd name="adj" fmla="val 16216"/>
-            </a:avLst>
-          </a:prstGeom>
-          <a:solidFill>
-            <a:schemeClr val="bg2"/>
-          </a:solidFill>
-          <a:ln/>
-        </p:spPr>
-      </p:sp>
-      <p:sp>
-        <p:nvSpPr>
-          <p:cNvPr id="24" name="objrow-3-contribtext"/>
-          <p:cNvSpPr txBox="1"/>
-          <p:nvPr/>
-        </p:nvSpPr>
-        <p:spPr>
-          <a:xfrm>
-            <a:off x="5760720" y="4078224"/>
-            <a:ext cx="5696712" cy="530352"/>
-          </a:xfrm>
-          <a:prstGeom prst="rect">
-            <a:avLst/>
-          </a:prstGeom>
-          <a:noFill/>
-          <a:ln/>
-        </p:spPr>
-        <p:txBody>
-          <a:bodyPr wrap="square" lIns="0" tIns="0" rIns="0" bIns="0" rtlCol="0" anchor="ctr"/>
-          <a:lstStyle/>
-          <a:p>
-            <a:pPr indent="0" marL="0">
-              <a:buNone/>
-            </a:pPr>
-            <a:r>
-              <a:rPr lang="en-US" sz="1400" dirty="0">
-                <a:solidFill>
-                  <a:schemeClr val="tx1"/>
-                </a:solidFill>
-              </a:rPr>
-              <a:t>8 architecture and lifecycle diagrams; 105 features documented where nothing existed</a:t>
-            </a:r>
-            <a:endParaRPr lang="en-US" sz="1400" dirty="0"/>
-          </a:p>
-        </p:txBody>
-      </p:sp>
-      <p:sp>
-        <p:nvSpPr>
-          <p:cNvPr id="25" name="objrow-4-objbox"/>
-          <p:cNvSpPr/>
-          <p:nvPr/>
-        </p:nvSpPr>
-        <p:spPr>
-          <a:xfrm>
-            <a:off x="548640" y="4791456"/>
-            <a:ext cx="4617720" cy="676656"/>
-          </a:xfrm>
-          <a:prstGeom prst="roundRect">
-            <a:avLst>
-              <a:gd name="adj" fmla="val 16216"/>
-            </a:avLst>
-          </a:prstGeom>
-          <a:solidFill>
-            <a:schemeClr val="tx1"/>
-          </a:solidFill>
-          <a:ln/>
-        </p:spPr>
-      </p:sp>
-      <p:sp>
-        <p:nvSpPr>
-          <p:cNvPr id="26" name="objrow-4-objtext"/>
-          <p:cNvSpPr txBox="1"/>
-          <p:nvPr/>
-        </p:nvSpPr>
-        <p:spPr>
-          <a:xfrm>
-            <a:off x="731520" y="4864608"/>
-            <a:ext cx="4297680" cy="530352"/>
-          </a:xfrm>
-          <a:prstGeom prst="rect">
-            <a:avLst/>
-          </a:prstGeom>
-          <a:noFill/>
-          <a:ln/>
-        </p:spPr>
-        <p:txBody>
-          <a:bodyPr wrap="square" lIns="0" tIns="0" rIns="0" bIns="0" rtlCol="0" anchor="ctr"/>
-          <a:lstStyle/>
-          <a:p>
-            <a:pPr indent="0" marL="0">
-              <a:buNone/>
-            </a:pPr>
-            <a:r>
-              <a:rPr lang="en-US" sz="1300" b="1" dirty="0">
-                <a:solidFill>
-                  <a:schemeClr val="bg1"/>
-                </a:solidFill>
-              </a:rPr>
-              <a:t>Grow digital acumen and competencies</a:t>
-            </a:r>
-            <a:endParaRPr lang="en-US" sz="1300" dirty="0"/>
-          </a:p>
-          <a:p>
-            <a:pPr indent="0" marL="0">
-              <a:buNone/>
-            </a:pPr>
-            <a:r>
-              <a:rPr lang="en-US" sz="1100" dirty="0">
-                <a:solidFill>
-                  <a:schemeClr val="accent5"/>
-                </a:solidFill>
-              </a:rPr>
               <a:t>Digital: develop our people · India TFO</a:t>
             </a:r>
-            <a:endParaRPr lang="en-US" sz="1300" dirty="0"/>
-          </a:p>
-        </p:txBody>
-      </p:sp>
-      <p:sp>
-        <p:nvSpPr>
-          <p:cNvPr id="27" name="objrow-4-arrow"/>
-          <p:cNvSpPr/>
-          <p:nvPr/>
-        </p:nvSpPr>
-        <p:spPr>
-          <a:xfrm>
-            <a:off x="5248656" y="5001768"/>
-            <a:ext cx="237744" cy="256032"/>
-          </a:xfrm>
-          <a:prstGeom prst="rightArrow">
-            <a:avLst/>
-          </a:prstGeom>
-          <a:solidFill>
-            <a:schemeClr val="accent1"/>
-          </a:solidFill>
-          <a:ln w="12700">
-            <a:solidFill>
-              <a:schemeClr val="accent1"/>
-            </a:solidFill>
-            <a:prstDash val="solid"/>
-          </a:ln>
-        </p:spPr>
-      </p:sp>
-      <p:sp>
-        <p:nvSpPr>
-          <p:cNvPr id="28" name="objrow-4-contribbox"/>
-          <p:cNvSpPr/>
-          <p:nvPr/>
-        </p:nvSpPr>
-        <p:spPr>
-          <a:xfrm>
-            <a:off x="5577840" y="4791456"/>
-            <a:ext cx="6062472" cy="676656"/>
-          </a:xfrm>
-          <a:prstGeom prst="roundRect">
-            <a:avLst>
-              <a:gd name="adj" fmla="val 16216"/>
-            </a:avLst>
-          </a:prstGeom>
-          <a:solidFill>
-            <a:schemeClr val="bg2"/>
-          </a:solidFill>
-          <a:ln/>
-        </p:spPr>
-      </p:sp>
-      <p:sp>
-        <p:nvSpPr>
-          <p:cNvPr id="29" name="objrow-4-contribtext"/>
-          <p:cNvSpPr txBox="1"/>
-          <p:nvPr/>
-        </p:nvSpPr>
-        <p:spPr>
-          <a:xfrm>
-            <a:off x="5760720" y="4864608"/>
-            <a:ext cx="5696712" cy="530352"/>
-          </a:xfrm>
-          <a:prstGeom prst="rect">
-            <a:avLst/>
-          </a:prstGeom>
-          <a:noFill/>
-          <a:ln/>
-        </p:spPr>
-        <p:txBody>
-          <a:bodyPr wrap="square" lIns="0" tIns="0" rIns="0" bIns="0" rtlCol="0" anchor="ctr"/>
-          <a:lstStyle/>
-          <a:p>
-            <a:pPr indent="0" marL="0">
-              <a:buNone/>
-            </a:pPr>
-            <a:r>
-              <a:rPr lang="en-US" sz="1400" dirty="0">
-                <a:solidFill>
-                  <a:schemeClr val="tx1"/>
-                </a:solidFill>
-              </a:rPr>
-              <a:t>pack-project.ts and the playbook let other teams repeat the method</a:t>
-            </a:r>
-            <a:endParaRPr lang="en-US" sz="1400" dirty="0"/>
-          </a:p>
-        </p:txBody>
-      </p:sp>
-      <p:sp>
-        <p:nvSpPr>
-          <p:cNvPr id="30" name="objrow-5-objbox"/>
-          <p:cNvSpPr/>
-          <p:nvPr/>
-        </p:nvSpPr>
-        <p:spPr>
-          <a:xfrm>
-            <a:off x="548640" y="5577840"/>
-            <a:ext cx="4617720" cy="676656"/>
-          </a:xfrm>
-          <a:prstGeom prst="roundRect">
-            <a:avLst>
-              <a:gd name="adj" fmla="val 16216"/>
-            </a:avLst>
-          </a:prstGeom>
-          <a:solidFill>
-            <a:schemeClr val="tx1"/>
-          </a:solidFill>
-          <a:ln/>
-        </p:spPr>
-      </p:sp>
-      <p:sp>
-        <p:nvSpPr>
-          <p:cNvPr id="31" name="objrow-5-objtext"/>
-          <p:cNvSpPr txBox="1"/>
-          <p:nvPr/>
-        </p:nvSpPr>
-        <p:spPr>
-          <a:xfrm>
-            <a:off x="731520" y="5650992"/>
-            <a:ext cx="4297680" cy="530352"/>
-          </a:xfrm>
-          <a:prstGeom prst="rect">
-            <a:avLst/>
-          </a:prstGeom>
-          <a:noFill/>
-          <a:ln/>
-        </p:spPr>
-        <p:txBody>
-          <a:bodyPr wrap="square" lIns="0" tIns="0" rIns="0" bIns="0" rtlCol="0" anchor="ctr"/>
-          <a:lstStyle/>
-          <a:p>
-            <a:pPr indent="0" marL="0">
-              <a:buNone/>
-            </a:pPr>
-            <a:r>
-              <a:rPr lang="en-US" sz="1300" b="1" dirty="0">
-                <a:solidFill>
-                  <a:schemeClr val="bg1"/>
-                </a:solidFill>
-              </a:rPr>
-              <a:t>Increase customer satisfaction</a:t>
-            </a:r>
-            <a:endParaRPr lang="en-US" sz="1300" dirty="0"/>
-          </a:p>
-          <a:p>
-            <a:pPr indent="0" marL="0">
-              <a:buNone/>
-            </a:pPr>
-            <a:r>
-              <a:rPr lang="en-US" sz="1100" dirty="0">
-                <a:solidFill>
-                  <a:schemeClr val="accent5"/>
-                </a:solidFill>
-              </a:rPr>
-              <a:t>Company: customer</a:t>
-            </a:r>
-            <a:endParaRPr lang="en-US" sz="1300" dirty="0"/>
-          </a:p>
-        </p:txBody>
-      </p:sp>
-      <p:sp>
-        <p:nvSpPr>
-          <p:cNvPr id="32" name="objrow-5-arrow"/>
-          <p:cNvSpPr/>
-          <p:nvPr/>
-        </p:nvSpPr>
-        <p:spPr>
-          <a:xfrm>
-            <a:off x="5248656" y="5788152"/>
-            <a:ext cx="237744" cy="256032"/>
-          </a:xfrm>
-          <a:prstGeom prst="rightArrow">
-            <a:avLst/>
-          </a:prstGeom>
-          <a:solidFill>
-            <a:schemeClr val="accent1"/>
-          </a:solidFill>
-          <a:ln w="12700">
-            <a:solidFill>
-              <a:schemeClr val="accent1"/>
-            </a:solidFill>
-            <a:prstDash val="solid"/>
-          </a:ln>
-        </p:spPr>
-      </p:sp>
-      <p:sp>
-        <p:nvSpPr>
-          <p:cNvPr id="33" name="objrow-5-contribbox"/>
-          <p:cNvSpPr/>
-          <p:nvPr/>
-        </p:nvSpPr>
-        <p:spPr>
-          <a:xfrm>
-            <a:off x="5577840" y="5577840"/>
-            <a:ext cx="6062472" cy="676656"/>
-          </a:xfrm>
-          <a:prstGeom prst="roundRect">
-            <a:avLst>
-              <a:gd name="adj" fmla="val 16216"/>
-            </a:avLst>
-          </a:prstGeom>
-          <a:solidFill>
-            <a:schemeClr val="bg2"/>
-          </a:solidFill>
-          <a:ln/>
-        </p:spPr>
-      </p:sp>
-      <p:sp>
-        <p:nvSpPr>
-          <p:cNvPr id="34" name="objrow-5-contribtext"/>
-          <p:cNvSpPr txBox="1"/>
-          <p:nvPr/>
-        </p:nvSpPr>
-        <p:spPr>
-          <a:xfrm>
-            <a:off x="5760720" y="5650992"/>
-            <a:ext cx="5696712" cy="530352"/>
-          </a:xfrm>
-          <a:prstGeom prst="rect">
-            <a:avLst/>
-          </a:prstGeom>
-          <a:noFill/>
-          <a:ln/>
-        </p:spPr>
-        <p:txBody>
-          <a:bodyPr wrap="square" lIns="0" tIns="0" rIns="0" bIns="0" rtlCol="0" anchor="ctr"/>
-          <a:lstStyle/>
-          <a:p>
-            <a:pPr indent="0" marL="0">
-              <a:buNone/>
-            </a:pPr>
-            <a:r>
-              <a:rPr lang="en-US" sz="1400" dirty="0">
-                <a:solidFill>
-                  <a:schemeClr val="tx1"/>
-                </a:solidFill>
-              </a:rPr>
-              <a:t>5 enhancements for ERM users, such as the report slideshow and resizable tables</a:t>
-            </a:r>
-            <a:endParaRPr lang="en-US" sz="1400" dirty="0"/>
+            <a:endParaRPr lang="en-US" sz="1500" dirty="0"/>
           </a:p>
         </p:txBody>
       </p:sp>
@@ -5592,7 +5524,7 @@
               <p:cTn id="2" dur="indefinite" nodeType="mainSeq">
                 <p:childTnLst>
                   <p:par>
-                    <p:cTn id="99" fill="hold">
+                    <p:cTn id="86" fill="hold">
                       <p:stCondLst>
                         <p:cond delay="indefinite"/>
                         <p:cond evt="onBegin" delay="0">
@@ -5601,7 +5533,7 @@
                       </p:stCondLst>
                       <p:childTnLst>
                         <p:par>
-                          <p:cTn id="18" fill="hold">
+                          <p:cTn id="9" fill="hold">
                             <p:stCondLst>
                               <p:cond delay="0"/>
                             </p:stCondLst>
@@ -5620,7 +5552,7 @@
                                           </p:stCondLst>
                                         </p:cTn>
                                         <p:tgtEl>
-                                          <p:spTgt spid="5"/>
+                                          <p:spTgt spid="6"/>
                                         </p:tgtEl>
                                         <p:attrNameLst>
                                           <p:attrName>style.visibility</p:attrName>
@@ -5634,7 +5566,7 @@
                                       <p:cBhvr>
                                         <p:cTn id="5" dur="450"/>
                                         <p:tgtEl>
-                                          <p:spTgt spid="5"/>
+                                          <p:spTgt spid="6"/>
                                         </p:tgtEl>
                                       </p:cBhvr>
                                     </p:animEffect>
@@ -5655,7 +5587,7 @@
                                           </p:stCondLst>
                                         </p:cTn>
                                         <p:tgtEl>
-                                          <p:spTgt spid="6"/>
+                                          <p:spTgt spid="7"/>
                                         </p:tgtEl>
                                         <p:attrNameLst>
                                           <p:attrName>style.visibility</p:attrName>
@@ -5669,41 +5601,6 @@
                                       <p:cBhvr>
                                         <p:cTn id="8" dur="450"/>
                                         <p:tgtEl>
-                                          <p:spTgt spid="6"/>
-                                        </p:tgtEl>
-                                      </p:cBhvr>
-                                    </p:animEffect>
-                                  </p:childTnLst>
-                                </p:cTn>
-                              </p:par>
-                              <p:par>
-                                <p:cTn id="9" presetID="22" presetClass="entr" presetSubtype="8" fill="hold" grpId="0" nodeType="withEffect">
-                                  <p:stCondLst>
-                                    <p:cond delay="200"/>
-                                  </p:stCondLst>
-                                  <p:childTnLst>
-                                    <p:set>
-                                      <p:cBhvr>
-                                        <p:cTn id="10" dur="1" fill="hold">
-                                          <p:stCondLst>
-                                            <p:cond delay="0"/>
-                                          </p:stCondLst>
-                                        </p:cTn>
-                                        <p:tgtEl>
-                                          <p:spTgt spid="7"/>
-                                        </p:tgtEl>
-                                        <p:attrNameLst>
-                                          <p:attrName>style.visibility</p:attrName>
-                                        </p:attrNameLst>
-                                      </p:cBhvr>
-                                      <p:to>
-                                        <p:strVal val="visible"/>
-                                      </p:to>
-                                    </p:set>
-                                    <p:animEffect transition="in" filter="wipe(left)">
-                                      <p:cBhvr>
-                                        <p:cTn id="11" dur="450"/>
-                                        <p:tgtEl>
                                           <p:spTgt spid="7"/>
                                         </p:tgtEl>
                                       </p:cBhvr>
@@ -5711,15 +5608,24 @@
                                   </p:childTnLst>
                                 </p:cTn>
                               </p:par>
+                            </p:childTnLst>
+                          </p:cTn>
+                        </p:par>
+                        <p:par>
+                          <p:cTn id="28" fill="hold">
+                            <p:stCondLst>
+                              <p:cond delay="1100"/>
+                            </p:stCondLst>
+                            <p:childTnLst>
                               <p:par>
-                                <p:cTn id="12" presetID="22" presetClass="entr" presetSubtype="8" fill="hold" grpId="0" nodeType="withEffect">
+                                <p:cTn id="10" presetID="22" presetClass="entr" presetSubtype="8" fill="hold" grpId="0" nodeType="afterEffect">
                                   <p:stCondLst>
-                                    <p:cond delay="300"/>
+                                    <p:cond delay="0"/>
                                   </p:stCondLst>
                                   <p:childTnLst>
                                     <p:set>
                                       <p:cBhvr>
-                                        <p:cTn id="13" dur="1" fill="hold">
+                                        <p:cTn id="11" dur="1" fill="hold">
                                           <p:stCondLst>
                                             <p:cond delay="0"/>
                                           </p:stCondLst>
@@ -5737,7 +5643,7 @@
                                     </p:set>
                                     <p:animEffect transition="in" filter="wipe(left)">
                                       <p:cBhvr>
-                                        <p:cTn id="14" dur="450"/>
+                                        <p:cTn id="12" dur="450"/>
                                         <p:tgtEl>
                                           <p:spTgt spid="8"/>
                                         </p:tgtEl>
@@ -5747,14 +5653,14 @@
                                 </p:cTn>
                               </p:par>
                               <p:par>
-                                <p:cTn id="15" presetID="22" presetClass="entr" presetSubtype="8" fill="hold" grpId="0" nodeType="withEffect">
+                                <p:cTn id="13" presetID="10" presetClass="entr" presetSubtype="0" fill="hold" grpId="0" nodeType="withEffect">
                                   <p:stCondLst>
-                                    <p:cond delay="300"/>
+                                    <p:cond delay="250"/>
                                   </p:stCondLst>
                                   <p:childTnLst>
                                     <p:set>
                                       <p:cBhvr>
-                                        <p:cTn id="16" dur="1" fill="hold">
+                                        <p:cTn id="14" dur="1" fill="hold">
                                           <p:stCondLst>
                                             <p:cond delay="0"/>
                                           </p:stCondLst>
@@ -5770,9 +5676,9 @@
                                         <p:strVal val="visible"/>
                                       </p:to>
                                     </p:set>
-                                    <p:animEffect transition="in" filter="wipe(left)">
+                                    <p:animEffect transition="in" filter="fade">
                                       <p:cBhvr>
-                                        <p:cTn id="17" dur="450"/>
+                                        <p:cTn id="15" dur="450"/>
                                         <p:tgtEl>
                                           <p:spTgt spid="9"/>
                                         </p:tgtEl>
@@ -5781,24 +5687,15 @@
                                   </p:childTnLst>
                                 </p:cTn>
                               </p:par>
-                            </p:childTnLst>
-                          </p:cTn>
-                        </p:par>
-                        <p:par>
-                          <p:cTn id="34" fill="hold">
-                            <p:stCondLst>
-                              <p:cond delay="650"/>
-                            </p:stCondLst>
-                            <p:childTnLst>
                               <p:par>
-                                <p:cTn id="19" presetID="10" presetClass="entr" presetSubtype="0" fill="hold" grpId="0" nodeType="afterEffect">
+                                <p:cTn id="16" presetID="10" presetClass="entr" presetSubtype="0" fill="hold" grpId="0" nodeType="withEffect">
                                   <p:stCondLst>
-                                    <p:cond delay="0"/>
+                                    <p:cond delay="250"/>
                                   </p:stCondLst>
                                   <p:childTnLst>
                                     <p:set>
                                       <p:cBhvr>
-                                        <p:cTn id="20" dur="1" fill="hold">
+                                        <p:cTn id="17" dur="1" fill="hold">
                                           <p:stCondLst>
                                             <p:cond delay="0"/>
                                           </p:stCondLst>
@@ -5816,7 +5713,7 @@
                                     </p:set>
                                     <p:animEffect transition="in" filter="fade">
                                       <p:cBhvr>
-                                        <p:cTn id="21" dur="450"/>
+                                        <p:cTn id="18" dur="450"/>
                                         <p:tgtEl>
                                           <p:spTgt spid="10"/>
                                         </p:tgtEl>
@@ -5826,14 +5723,14 @@
                                 </p:cTn>
                               </p:par>
                               <p:par>
-                                <p:cTn id="22" presetID="10" presetClass="entr" presetSubtype="0" fill="hold" grpId="0" nodeType="withEffect">
+                                <p:cTn id="19" presetID="22" presetClass="entr" presetSubtype="8" fill="hold" grpId="0" nodeType="withEffect">
                                   <p:stCondLst>
-                                    <p:cond delay="0"/>
+                                    <p:cond delay="550"/>
                                   </p:stCondLst>
                                   <p:childTnLst>
                                     <p:set>
                                       <p:cBhvr>
-                                        <p:cTn id="23" dur="1" fill="hold">
+                                        <p:cTn id="20" dur="1" fill="hold">
                                           <p:stCondLst>
                                             <p:cond delay="0"/>
                                           </p:stCondLst>
@@ -5849,9 +5746,9 @@
                                         <p:strVal val="visible"/>
                                       </p:to>
                                     </p:set>
-                                    <p:animEffect transition="in" filter="fade">
+                                    <p:animEffect transition="in" filter="wipe(left)">
                                       <p:cBhvr>
-                                        <p:cTn id="24" dur="450"/>
+                                        <p:cTn id="21" dur="450"/>
                                         <p:tgtEl>
                                           <p:spTgt spid="11"/>
                                         </p:tgtEl>
@@ -5861,14 +5758,14 @@
                                 </p:cTn>
                               </p:par>
                               <p:par>
-                                <p:cTn id="25" presetID="22" presetClass="entr" presetSubtype="8" fill="hold" grpId="0" nodeType="withEffect">
+                                <p:cTn id="22" presetID="10" presetClass="entr" presetSubtype="0" fill="hold" grpId="0" nodeType="withEffect">
                                   <p:stCondLst>
-                                    <p:cond delay="200"/>
+                                    <p:cond delay="800"/>
                                   </p:stCondLst>
                                   <p:childTnLst>
                                     <p:set>
                                       <p:cBhvr>
-                                        <p:cTn id="26" dur="1" fill="hold">
+                                        <p:cTn id="23" dur="1" fill="hold">
                                           <p:stCondLst>
                                             <p:cond delay="0"/>
                                           </p:stCondLst>
@@ -5884,9 +5781,9 @@
                                         <p:strVal val="visible"/>
                                       </p:to>
                                     </p:set>
-                                    <p:animEffect transition="in" filter="wipe(left)">
+                                    <p:animEffect transition="in" filter="fade">
                                       <p:cBhvr>
-                                        <p:cTn id="27" dur="450"/>
+                                        <p:cTn id="24" dur="450"/>
                                         <p:tgtEl>
                                           <p:spTgt spid="12"/>
                                         </p:tgtEl>
@@ -5896,14 +5793,14 @@
                                 </p:cTn>
                               </p:par>
                               <p:par>
-                                <p:cTn id="28" presetID="22" presetClass="entr" presetSubtype="8" fill="hold" grpId="0" nodeType="withEffect">
+                                <p:cTn id="25" presetID="10" presetClass="entr" presetSubtype="0" fill="hold" grpId="0" nodeType="withEffect">
                                   <p:stCondLst>
-                                    <p:cond delay="300"/>
+                                    <p:cond delay="800"/>
                                   </p:stCondLst>
                                   <p:childTnLst>
                                     <p:set>
                                       <p:cBhvr>
-                                        <p:cTn id="29" dur="1" fill="hold">
+                                        <p:cTn id="26" dur="1" fill="hold">
                                           <p:stCondLst>
                                             <p:cond delay="0"/>
                                           </p:stCondLst>
@@ -5919,9 +5816,9 @@
                                         <p:strVal val="visible"/>
                                       </p:to>
                                     </p:set>
-                                    <p:animEffect transition="in" filter="wipe(left)">
+                                    <p:animEffect transition="in" filter="fade">
                                       <p:cBhvr>
-                                        <p:cTn id="30" dur="450"/>
+                                        <p:cTn id="27" dur="450"/>
                                         <p:tgtEl>
                                           <p:spTgt spid="13"/>
                                         </p:tgtEl>
@@ -5930,15 +5827,24 @@
                                   </p:childTnLst>
                                 </p:cTn>
                               </p:par>
+                            </p:childTnLst>
+                          </p:cTn>
+                        </p:par>
+                        <p:par>
+                          <p:cTn id="47" fill="hold">
+                            <p:stCondLst>
+                              <p:cond delay="2200"/>
+                            </p:stCondLst>
+                            <p:childTnLst>
                               <p:par>
-                                <p:cTn id="31" presetID="22" presetClass="entr" presetSubtype="8" fill="hold" grpId="0" nodeType="withEffect">
+                                <p:cTn id="29" presetID="22" presetClass="entr" presetSubtype="8" fill="hold" grpId="0" nodeType="afterEffect">
                                   <p:stCondLst>
-                                    <p:cond delay="300"/>
+                                    <p:cond delay="0"/>
                                   </p:stCondLst>
                                   <p:childTnLst>
                                     <p:set>
                                       <p:cBhvr>
-                                        <p:cTn id="32" dur="1" fill="hold">
+                                        <p:cTn id="30" dur="1" fill="hold">
                                           <p:stCondLst>
                                             <p:cond delay="0"/>
                                           </p:stCondLst>
@@ -5956,7 +5862,7 @@
                                     </p:set>
                                     <p:animEffect transition="in" filter="wipe(left)">
                                       <p:cBhvr>
-                                        <p:cTn id="33" dur="450"/>
+                                        <p:cTn id="31" dur="450"/>
                                         <p:tgtEl>
                                           <p:spTgt spid="14"/>
                                         </p:tgtEl>
@@ -5965,24 +5871,15 @@
                                   </p:childTnLst>
                                 </p:cTn>
                               </p:par>
-                            </p:childTnLst>
-                          </p:cTn>
-                        </p:par>
-                        <p:par>
-                          <p:cTn id="50" fill="hold">
-                            <p:stCondLst>
-                              <p:cond delay="1300"/>
-                            </p:stCondLst>
-                            <p:childTnLst>
                               <p:par>
-                                <p:cTn id="35" presetID="10" presetClass="entr" presetSubtype="0" fill="hold" grpId="0" nodeType="afterEffect">
+                                <p:cTn id="32" presetID="10" presetClass="entr" presetSubtype="0" fill="hold" grpId="0" nodeType="withEffect">
                                   <p:stCondLst>
-                                    <p:cond delay="0"/>
+                                    <p:cond delay="250"/>
                                   </p:stCondLst>
                                   <p:childTnLst>
                                     <p:set>
                                       <p:cBhvr>
-                                        <p:cTn id="36" dur="1" fill="hold">
+                                        <p:cTn id="33" dur="1" fill="hold">
                                           <p:stCondLst>
                                             <p:cond delay="0"/>
                                           </p:stCondLst>
@@ -6000,7 +5897,7 @@
                                     </p:set>
                                     <p:animEffect transition="in" filter="fade">
                                       <p:cBhvr>
-                                        <p:cTn id="37" dur="450"/>
+                                        <p:cTn id="34" dur="450"/>
                                         <p:tgtEl>
                                           <p:spTgt spid="15"/>
                                         </p:tgtEl>
@@ -6010,14 +5907,14 @@
                                 </p:cTn>
                               </p:par>
                               <p:par>
-                                <p:cTn id="38" presetID="10" presetClass="entr" presetSubtype="0" fill="hold" grpId="0" nodeType="withEffect">
+                                <p:cTn id="35" presetID="10" presetClass="entr" presetSubtype="0" fill="hold" grpId="0" nodeType="withEffect">
                                   <p:stCondLst>
-                                    <p:cond delay="0"/>
+                                    <p:cond delay="250"/>
                                   </p:stCondLst>
                                   <p:childTnLst>
                                     <p:set>
                                       <p:cBhvr>
-                                        <p:cTn id="39" dur="1" fill="hold">
+                                        <p:cTn id="36" dur="1" fill="hold">
                                           <p:stCondLst>
                                             <p:cond delay="0"/>
                                           </p:stCondLst>
@@ -6035,7 +5932,7 @@
                                     </p:set>
                                     <p:animEffect transition="in" filter="fade">
                                       <p:cBhvr>
-                                        <p:cTn id="40" dur="450"/>
+                                        <p:cTn id="37" dur="450"/>
                                         <p:tgtEl>
                                           <p:spTgt spid="16"/>
                                         </p:tgtEl>
@@ -6045,14 +5942,14 @@
                                 </p:cTn>
                               </p:par>
                               <p:par>
-                                <p:cTn id="41" presetID="22" presetClass="entr" presetSubtype="8" fill="hold" grpId="0" nodeType="withEffect">
+                                <p:cTn id="38" presetID="22" presetClass="entr" presetSubtype="8" fill="hold" grpId="0" nodeType="withEffect">
                                   <p:stCondLst>
-                                    <p:cond delay="200"/>
+                                    <p:cond delay="550"/>
                                   </p:stCondLst>
                                   <p:childTnLst>
                                     <p:set>
                                       <p:cBhvr>
-                                        <p:cTn id="42" dur="1" fill="hold">
+                                        <p:cTn id="39" dur="1" fill="hold">
                                           <p:stCondLst>
                                             <p:cond delay="0"/>
                                           </p:stCondLst>
@@ -6070,7 +5967,7 @@
                                     </p:set>
                                     <p:animEffect transition="in" filter="wipe(left)">
                                       <p:cBhvr>
-                                        <p:cTn id="43" dur="450"/>
+                                        <p:cTn id="40" dur="450"/>
                                         <p:tgtEl>
                                           <p:spTgt spid="17"/>
                                         </p:tgtEl>
@@ -6080,14 +5977,14 @@
                                 </p:cTn>
                               </p:par>
                               <p:par>
-                                <p:cTn id="44" presetID="22" presetClass="entr" presetSubtype="8" fill="hold" grpId="0" nodeType="withEffect">
+                                <p:cTn id="41" presetID="10" presetClass="entr" presetSubtype="0" fill="hold" grpId="0" nodeType="withEffect">
                                   <p:stCondLst>
-                                    <p:cond delay="300"/>
+                                    <p:cond delay="800"/>
                                   </p:stCondLst>
                                   <p:childTnLst>
                                     <p:set>
                                       <p:cBhvr>
-                                        <p:cTn id="45" dur="1" fill="hold">
+                                        <p:cTn id="42" dur="1" fill="hold">
                                           <p:stCondLst>
                                             <p:cond delay="0"/>
                                           </p:stCondLst>
@@ -6103,9 +6000,9 @@
                                         <p:strVal val="visible"/>
                                       </p:to>
                                     </p:set>
-                                    <p:animEffect transition="in" filter="wipe(left)">
+                                    <p:animEffect transition="in" filter="fade">
                                       <p:cBhvr>
-                                        <p:cTn id="46" dur="450"/>
+                                        <p:cTn id="43" dur="450"/>
                                         <p:tgtEl>
                                           <p:spTgt spid="18"/>
                                         </p:tgtEl>
@@ -6115,14 +6012,14 @@
                                 </p:cTn>
                               </p:par>
                               <p:par>
-                                <p:cTn id="47" presetID="22" presetClass="entr" presetSubtype="8" fill="hold" grpId="0" nodeType="withEffect">
+                                <p:cTn id="44" presetID="10" presetClass="entr" presetSubtype="0" fill="hold" grpId="0" nodeType="withEffect">
                                   <p:stCondLst>
-                                    <p:cond delay="300"/>
+                                    <p:cond delay="800"/>
                                   </p:stCondLst>
                                   <p:childTnLst>
                                     <p:set>
                                       <p:cBhvr>
-                                        <p:cTn id="48" dur="1" fill="hold">
+                                        <p:cTn id="45" dur="1" fill="hold">
                                           <p:stCondLst>
                                             <p:cond delay="0"/>
                                           </p:stCondLst>
@@ -6138,9 +6035,9 @@
                                         <p:strVal val="visible"/>
                                       </p:to>
                                     </p:set>
-                                    <p:animEffect transition="in" filter="wipe(left)">
+                                    <p:animEffect transition="in" filter="fade">
                                       <p:cBhvr>
-                                        <p:cTn id="49" dur="450"/>
+                                        <p:cTn id="46" dur="450"/>
                                         <p:tgtEl>
                                           <p:spTgt spid="19"/>
                                         </p:tgtEl>
@@ -6155,18 +6052,18 @@
                         <p:par>
                           <p:cTn id="66" fill="hold">
                             <p:stCondLst>
-                              <p:cond delay="1950"/>
+                              <p:cond delay="3300"/>
                             </p:stCondLst>
                             <p:childTnLst>
                               <p:par>
-                                <p:cTn id="51" presetID="10" presetClass="entr" presetSubtype="0" fill="hold" grpId="0" nodeType="afterEffect">
+                                <p:cTn id="48" presetID="22" presetClass="entr" presetSubtype="8" fill="hold" grpId="0" nodeType="afterEffect">
                                   <p:stCondLst>
                                     <p:cond delay="0"/>
                                   </p:stCondLst>
                                   <p:childTnLst>
                                     <p:set>
                                       <p:cBhvr>
-                                        <p:cTn id="52" dur="1" fill="hold">
+                                        <p:cTn id="49" dur="1" fill="hold">
                                           <p:stCondLst>
                                             <p:cond delay="0"/>
                                           </p:stCondLst>
@@ -6182,9 +6079,9 @@
                                         <p:strVal val="visible"/>
                                       </p:to>
                                     </p:set>
-                                    <p:animEffect transition="in" filter="fade">
+                                    <p:animEffect transition="in" filter="wipe(left)">
                                       <p:cBhvr>
-                                        <p:cTn id="53" dur="450"/>
+                                        <p:cTn id="50" dur="450"/>
                                         <p:tgtEl>
                                           <p:spTgt spid="20"/>
                                         </p:tgtEl>
@@ -6194,14 +6091,14 @@
                                 </p:cTn>
                               </p:par>
                               <p:par>
-                                <p:cTn id="54" presetID="10" presetClass="entr" presetSubtype="0" fill="hold" grpId="0" nodeType="withEffect">
+                                <p:cTn id="51" presetID="10" presetClass="entr" presetSubtype="0" fill="hold" grpId="0" nodeType="withEffect">
                                   <p:stCondLst>
-                                    <p:cond delay="0"/>
+                                    <p:cond delay="250"/>
                                   </p:stCondLst>
                                   <p:childTnLst>
                                     <p:set>
                                       <p:cBhvr>
-                                        <p:cTn id="55" dur="1" fill="hold">
+                                        <p:cTn id="52" dur="1" fill="hold">
                                           <p:stCondLst>
                                             <p:cond delay="0"/>
                                           </p:stCondLst>
@@ -6219,7 +6116,7 @@
                                     </p:set>
                                     <p:animEffect transition="in" filter="fade">
                                       <p:cBhvr>
-                                        <p:cTn id="56" dur="450"/>
+                                        <p:cTn id="53" dur="450"/>
                                         <p:tgtEl>
                                           <p:spTgt spid="21"/>
                                         </p:tgtEl>
@@ -6229,14 +6126,14 @@
                                 </p:cTn>
                               </p:par>
                               <p:par>
-                                <p:cTn id="57" presetID="22" presetClass="entr" presetSubtype="8" fill="hold" grpId="0" nodeType="withEffect">
+                                <p:cTn id="54" presetID="10" presetClass="entr" presetSubtype="0" fill="hold" grpId="0" nodeType="withEffect">
                                   <p:stCondLst>
-                                    <p:cond delay="200"/>
+                                    <p:cond delay="250"/>
                                   </p:stCondLst>
                                   <p:childTnLst>
                                     <p:set>
                                       <p:cBhvr>
-                                        <p:cTn id="58" dur="1" fill="hold">
+                                        <p:cTn id="55" dur="1" fill="hold">
                                           <p:stCondLst>
                                             <p:cond delay="0"/>
                                           </p:stCondLst>
@@ -6252,9 +6149,9 @@
                                         <p:strVal val="visible"/>
                                       </p:to>
                                     </p:set>
-                                    <p:animEffect transition="in" filter="wipe(left)">
+                                    <p:animEffect transition="in" filter="fade">
                                       <p:cBhvr>
-                                        <p:cTn id="59" dur="450"/>
+                                        <p:cTn id="56" dur="450"/>
                                         <p:tgtEl>
                                           <p:spTgt spid="22"/>
                                         </p:tgtEl>
@@ -6264,14 +6161,14 @@
                                 </p:cTn>
                               </p:par>
                               <p:par>
-                                <p:cTn id="60" presetID="22" presetClass="entr" presetSubtype="8" fill="hold" grpId="0" nodeType="withEffect">
+                                <p:cTn id="57" presetID="22" presetClass="entr" presetSubtype="8" fill="hold" grpId="0" nodeType="withEffect">
                                   <p:stCondLst>
-                                    <p:cond delay="300"/>
+                                    <p:cond delay="550"/>
                                   </p:stCondLst>
                                   <p:childTnLst>
                                     <p:set>
                                       <p:cBhvr>
-                                        <p:cTn id="61" dur="1" fill="hold">
+                                        <p:cTn id="58" dur="1" fill="hold">
                                           <p:stCondLst>
                                             <p:cond delay="0"/>
                                           </p:stCondLst>
@@ -6289,7 +6186,7 @@
                                     </p:set>
                                     <p:animEffect transition="in" filter="wipe(left)">
                                       <p:cBhvr>
-                                        <p:cTn id="62" dur="450"/>
+                                        <p:cTn id="59" dur="450"/>
                                         <p:tgtEl>
                                           <p:spTgt spid="23"/>
                                         </p:tgtEl>
@@ -6299,14 +6196,14 @@
                                 </p:cTn>
                               </p:par>
                               <p:par>
-                                <p:cTn id="63" presetID="22" presetClass="entr" presetSubtype="8" fill="hold" grpId="0" nodeType="withEffect">
+                                <p:cTn id="60" presetID="10" presetClass="entr" presetSubtype="0" fill="hold" grpId="0" nodeType="withEffect">
                                   <p:stCondLst>
-                                    <p:cond delay="300"/>
+                                    <p:cond delay="800"/>
                                   </p:stCondLst>
                                   <p:childTnLst>
                                     <p:set>
                                       <p:cBhvr>
-                                        <p:cTn id="64" dur="1" fill="hold">
+                                        <p:cTn id="61" dur="1" fill="hold">
                                           <p:stCondLst>
                                             <p:cond delay="0"/>
                                           </p:stCondLst>
@@ -6322,9 +6219,9 @@
                                         <p:strVal val="visible"/>
                                       </p:to>
                                     </p:set>
-                                    <p:animEffect transition="in" filter="wipe(left)">
+                                    <p:animEffect transition="in" filter="fade">
                                       <p:cBhvr>
-                                        <p:cTn id="65" dur="450"/>
+                                        <p:cTn id="62" dur="450"/>
                                         <p:tgtEl>
                                           <p:spTgt spid="24"/>
                                         </p:tgtEl>
@@ -6333,24 +6230,15 @@
                                   </p:childTnLst>
                                 </p:cTn>
                               </p:par>
-                            </p:childTnLst>
-                          </p:cTn>
-                        </p:par>
-                        <p:par>
-                          <p:cTn id="82" fill="hold">
-                            <p:stCondLst>
-                              <p:cond delay="2600"/>
-                            </p:stCondLst>
-                            <p:childTnLst>
                               <p:par>
-                                <p:cTn id="67" presetID="10" presetClass="entr" presetSubtype="0" fill="hold" grpId="0" nodeType="afterEffect">
+                                <p:cTn id="63" presetID="10" presetClass="entr" presetSubtype="0" fill="hold" grpId="0" nodeType="withEffect">
                                   <p:stCondLst>
-                                    <p:cond delay="0"/>
+                                    <p:cond delay="800"/>
                                   </p:stCondLst>
                                   <p:childTnLst>
                                     <p:set>
                                       <p:cBhvr>
-                                        <p:cTn id="68" dur="1" fill="hold">
+                                        <p:cTn id="64" dur="1" fill="hold">
                                           <p:stCondLst>
                                             <p:cond delay="0"/>
                                           </p:stCondLst>
@@ -6368,7 +6256,7 @@
                                     </p:set>
                                     <p:animEffect transition="in" filter="fade">
                                       <p:cBhvr>
-                                        <p:cTn id="69" dur="450"/>
+                                        <p:cTn id="65" dur="450"/>
                                         <p:tgtEl>
                                           <p:spTgt spid="25"/>
                                         </p:tgtEl>
@@ -6377,15 +6265,24 @@
                                   </p:childTnLst>
                                 </p:cTn>
                               </p:par>
+                            </p:childTnLst>
+                          </p:cTn>
+                        </p:par>
+                        <p:par>
+                          <p:cTn id="85" fill="hold">
+                            <p:stCondLst>
+                              <p:cond delay="4400"/>
+                            </p:stCondLst>
+                            <p:childTnLst>
                               <p:par>
-                                <p:cTn id="70" presetID="10" presetClass="entr" presetSubtype="0" fill="hold" grpId="0" nodeType="withEffect">
+                                <p:cTn id="67" presetID="22" presetClass="entr" presetSubtype="8" fill="hold" grpId="0" nodeType="afterEffect">
                                   <p:stCondLst>
                                     <p:cond delay="0"/>
                                   </p:stCondLst>
                                   <p:childTnLst>
                                     <p:set>
                                       <p:cBhvr>
-                                        <p:cTn id="71" dur="1" fill="hold">
+                                        <p:cTn id="68" dur="1" fill="hold">
                                           <p:stCondLst>
                                             <p:cond delay="0"/>
                                           </p:stCondLst>
@@ -6401,9 +6298,9 @@
                                         <p:strVal val="visible"/>
                                       </p:to>
                                     </p:set>
-                                    <p:animEffect transition="in" filter="fade">
+                                    <p:animEffect transition="in" filter="wipe(left)">
                                       <p:cBhvr>
-                                        <p:cTn id="72" dur="450"/>
+                                        <p:cTn id="69" dur="450"/>
                                         <p:tgtEl>
                                           <p:spTgt spid="26"/>
                                         </p:tgtEl>
@@ -6413,14 +6310,14 @@
                                 </p:cTn>
                               </p:par>
                               <p:par>
-                                <p:cTn id="73" presetID="22" presetClass="entr" presetSubtype="8" fill="hold" grpId="0" nodeType="withEffect">
+                                <p:cTn id="70" presetID="10" presetClass="entr" presetSubtype="0" fill="hold" grpId="0" nodeType="withEffect">
                                   <p:stCondLst>
-                                    <p:cond delay="200"/>
+                                    <p:cond delay="250"/>
                                   </p:stCondLst>
                                   <p:childTnLst>
                                     <p:set>
                                       <p:cBhvr>
-                                        <p:cTn id="74" dur="1" fill="hold">
+                                        <p:cTn id="71" dur="1" fill="hold">
                                           <p:stCondLst>
                                             <p:cond delay="0"/>
                                           </p:stCondLst>
@@ -6436,9 +6333,9 @@
                                         <p:strVal val="visible"/>
                                       </p:to>
                                     </p:set>
-                                    <p:animEffect transition="in" filter="wipe(left)">
+                                    <p:animEffect transition="in" filter="fade">
                                       <p:cBhvr>
-                                        <p:cTn id="75" dur="450"/>
+                                        <p:cTn id="72" dur="450"/>
                                         <p:tgtEl>
                                           <p:spTgt spid="27"/>
                                         </p:tgtEl>
@@ -6448,14 +6345,14 @@
                                 </p:cTn>
                               </p:par>
                               <p:par>
-                                <p:cTn id="76" presetID="22" presetClass="entr" presetSubtype="8" fill="hold" grpId="0" nodeType="withEffect">
+                                <p:cTn id="73" presetID="10" presetClass="entr" presetSubtype="0" fill="hold" grpId="0" nodeType="withEffect">
                                   <p:stCondLst>
-                                    <p:cond delay="300"/>
+                                    <p:cond delay="250"/>
                                   </p:stCondLst>
                                   <p:childTnLst>
                                     <p:set>
                                       <p:cBhvr>
-                                        <p:cTn id="77" dur="1" fill="hold">
+                                        <p:cTn id="74" dur="1" fill="hold">
                                           <p:stCondLst>
                                             <p:cond delay="0"/>
                                           </p:stCondLst>
@@ -6471,9 +6368,9 @@
                                         <p:strVal val="visible"/>
                                       </p:to>
                                     </p:set>
-                                    <p:animEffect transition="in" filter="wipe(left)">
+                                    <p:animEffect transition="in" filter="fade">
                                       <p:cBhvr>
-                                        <p:cTn id="78" dur="450"/>
+                                        <p:cTn id="75" dur="450"/>
                                         <p:tgtEl>
                                           <p:spTgt spid="28"/>
                                         </p:tgtEl>
@@ -6483,14 +6380,14 @@
                                 </p:cTn>
                               </p:par>
                               <p:par>
-                                <p:cTn id="79" presetID="22" presetClass="entr" presetSubtype="8" fill="hold" grpId="0" nodeType="withEffect">
+                                <p:cTn id="76" presetID="22" presetClass="entr" presetSubtype="8" fill="hold" grpId="0" nodeType="withEffect">
                                   <p:stCondLst>
-                                    <p:cond delay="300"/>
+                                    <p:cond delay="550"/>
                                   </p:stCondLst>
                                   <p:childTnLst>
                                     <p:set>
                                       <p:cBhvr>
-                                        <p:cTn id="80" dur="1" fill="hold">
+                                        <p:cTn id="77" dur="1" fill="hold">
                                           <p:stCondLst>
                                             <p:cond delay="0"/>
                                           </p:stCondLst>
@@ -6508,7 +6405,7 @@
                                     </p:set>
                                     <p:animEffect transition="in" filter="wipe(left)">
                                       <p:cBhvr>
-                                        <p:cTn id="81" dur="450"/>
+                                        <p:cTn id="78" dur="450"/>
                                         <p:tgtEl>
                                           <p:spTgt spid="29"/>
                                         </p:tgtEl>
@@ -6517,24 +6414,15 @@
                                   </p:childTnLst>
                                 </p:cTn>
                               </p:par>
-                            </p:childTnLst>
-                          </p:cTn>
-                        </p:par>
-                        <p:par>
-                          <p:cTn id="98" fill="hold">
-                            <p:stCondLst>
-                              <p:cond delay="3250"/>
-                            </p:stCondLst>
-                            <p:childTnLst>
                               <p:par>
-                                <p:cTn id="83" presetID="10" presetClass="entr" presetSubtype="0" fill="hold" grpId="0" nodeType="afterEffect">
+                                <p:cTn id="79" presetID="10" presetClass="entr" presetSubtype="0" fill="hold" grpId="0" nodeType="withEffect">
                                   <p:stCondLst>
-                                    <p:cond delay="0"/>
+                                    <p:cond delay="800"/>
                                   </p:stCondLst>
                                   <p:childTnLst>
                                     <p:set>
                                       <p:cBhvr>
-                                        <p:cTn id="84" dur="1" fill="hold">
+                                        <p:cTn id="80" dur="1" fill="hold">
                                           <p:stCondLst>
                                             <p:cond delay="0"/>
                                           </p:stCondLst>
@@ -6552,7 +6440,7 @@
                                     </p:set>
                                     <p:animEffect transition="in" filter="fade">
                                       <p:cBhvr>
-                                        <p:cTn id="85" dur="450"/>
+                                        <p:cTn id="81" dur="450"/>
                                         <p:tgtEl>
                                           <p:spTgt spid="30"/>
                                         </p:tgtEl>
@@ -6562,14 +6450,14 @@
                                 </p:cTn>
                               </p:par>
                               <p:par>
-                                <p:cTn id="86" presetID="10" presetClass="entr" presetSubtype="0" fill="hold" grpId="0" nodeType="withEffect">
+                                <p:cTn id="82" presetID="10" presetClass="entr" presetSubtype="0" fill="hold" grpId="0" nodeType="withEffect">
                                   <p:stCondLst>
-                                    <p:cond delay="0"/>
+                                    <p:cond delay="800"/>
                                   </p:stCondLst>
                                   <p:childTnLst>
                                     <p:set>
                                       <p:cBhvr>
-                                        <p:cTn id="87" dur="1" fill="hold">
+                                        <p:cTn id="83" dur="1" fill="hold">
                                           <p:stCondLst>
                                             <p:cond delay="0"/>
                                           </p:stCondLst>
@@ -6587,114 +6475,9 @@
                                     </p:set>
                                     <p:animEffect transition="in" filter="fade">
                                       <p:cBhvr>
-                                        <p:cTn id="88" dur="450"/>
+                                        <p:cTn id="84" dur="450"/>
                                         <p:tgtEl>
                                           <p:spTgt spid="31"/>
-                                        </p:tgtEl>
-                                      </p:cBhvr>
-                                    </p:animEffect>
-                                  </p:childTnLst>
-                                </p:cTn>
-                              </p:par>
-                              <p:par>
-                                <p:cTn id="89" presetID="22" presetClass="entr" presetSubtype="8" fill="hold" grpId="0" nodeType="withEffect">
-                                  <p:stCondLst>
-                                    <p:cond delay="200"/>
-                                  </p:stCondLst>
-                                  <p:childTnLst>
-                                    <p:set>
-                                      <p:cBhvr>
-                                        <p:cTn id="90" dur="1" fill="hold">
-                                          <p:stCondLst>
-                                            <p:cond delay="0"/>
-                                          </p:stCondLst>
-                                        </p:cTn>
-                                        <p:tgtEl>
-                                          <p:spTgt spid="32"/>
-                                        </p:tgtEl>
-                                        <p:attrNameLst>
-                                          <p:attrName>style.visibility</p:attrName>
-                                        </p:attrNameLst>
-                                      </p:cBhvr>
-                                      <p:to>
-                                        <p:strVal val="visible"/>
-                                      </p:to>
-                                    </p:set>
-                                    <p:animEffect transition="in" filter="wipe(left)">
-                                      <p:cBhvr>
-                                        <p:cTn id="91" dur="450"/>
-                                        <p:tgtEl>
-                                          <p:spTgt spid="32"/>
-                                        </p:tgtEl>
-                                      </p:cBhvr>
-                                    </p:animEffect>
-                                  </p:childTnLst>
-                                </p:cTn>
-                              </p:par>
-                              <p:par>
-                                <p:cTn id="92" presetID="22" presetClass="entr" presetSubtype="8" fill="hold" grpId="0" nodeType="withEffect">
-                                  <p:stCondLst>
-                                    <p:cond delay="300"/>
-                                  </p:stCondLst>
-                                  <p:childTnLst>
-                                    <p:set>
-                                      <p:cBhvr>
-                                        <p:cTn id="93" dur="1" fill="hold">
-                                          <p:stCondLst>
-                                            <p:cond delay="0"/>
-                                          </p:stCondLst>
-                                        </p:cTn>
-                                        <p:tgtEl>
-                                          <p:spTgt spid="33"/>
-                                        </p:tgtEl>
-                                        <p:attrNameLst>
-                                          <p:attrName>style.visibility</p:attrName>
-                                        </p:attrNameLst>
-                                      </p:cBhvr>
-                                      <p:to>
-                                        <p:strVal val="visible"/>
-                                      </p:to>
-                                    </p:set>
-                                    <p:animEffect transition="in" filter="wipe(left)">
-                                      <p:cBhvr>
-                                        <p:cTn id="94" dur="450"/>
-                                        <p:tgtEl>
-                                          <p:spTgt spid="33"/>
-                                        </p:tgtEl>
-                                      </p:cBhvr>
-                                    </p:animEffect>
-                                  </p:childTnLst>
-                                </p:cTn>
-                              </p:par>
-                              <p:par>
-                                <p:cTn id="95" presetID="22" presetClass="entr" presetSubtype="8" fill="hold" grpId="0" nodeType="withEffect">
-                                  <p:stCondLst>
-                                    <p:cond delay="300"/>
-                                  </p:stCondLst>
-                                  <p:childTnLst>
-                                    <p:set>
-                                      <p:cBhvr>
-                                        <p:cTn id="96" dur="1" fill="hold">
-                                          <p:stCondLst>
-                                            <p:cond delay="0"/>
-                                          </p:stCondLst>
-                                        </p:cTn>
-                                        <p:tgtEl>
-                                          <p:spTgt spid="34"/>
-                                        </p:tgtEl>
-                                        <p:attrNameLst>
-                                          <p:attrName>style.visibility</p:attrName>
-                                        </p:attrNameLst>
-                                      </p:cBhvr>
-                                      <p:to>
-                                        <p:strVal val="visible"/>
-                                      </p:to>
-                                    </p:set>
-                                    <p:animEffect transition="in" filter="wipe(left)">
-                                      <p:cBhvr>
-                                        <p:cTn id="97" dur="450"/>
-                                        <p:tgtEl>
-                                          <p:spTgt spid="34"/>
                                         </p:tgtEl>
                                       </p:cBhvr>
                                     </p:animEffect>
@@ -6729,36 +6512,24 @@
       </p:par>
     </p:tnLst>
     <p:bldLst>
-      <p:bldP spid="5" grpId="0" animBg="1"/>
       <p:bldP spid="6" grpId="0" animBg="1"/>
       <p:bldP spid="7" grpId="0" animBg="1"/>
-      <p:bldP spid="8" grpId="0" animBg="1"/>
       <p:bldP spid="9" grpId="0" animBg="1"/>
       <p:bldP spid="10" grpId="0" animBg="1"/>
-      <p:bldP spid="11" grpId="0" animBg="1"/>
       <p:bldP spid="12" grpId="0" animBg="1"/>
       <p:bldP spid="13" grpId="0" animBg="1"/>
-      <p:bldP spid="14" grpId="0" animBg="1"/>
       <p:bldP spid="15" grpId="0" animBg="1"/>
       <p:bldP spid="16" grpId="0" animBg="1"/>
-      <p:bldP spid="17" grpId="0" animBg="1"/>
       <p:bldP spid="18" grpId="0" animBg="1"/>
       <p:bldP spid="19" grpId="0" animBg="1"/>
-      <p:bldP spid="20" grpId="0" animBg="1"/>
       <p:bldP spid="21" grpId="0" animBg="1"/>
       <p:bldP spid="22" grpId="0" animBg="1"/>
-      <p:bldP spid="23" grpId="0" animBg="1"/>
       <p:bldP spid="24" grpId="0" animBg="1"/>
       <p:bldP spid="25" grpId="0" animBg="1"/>
-      <p:bldP spid="26" grpId="0" animBg="1"/>
       <p:bldP spid="27" grpId="0" animBg="1"/>
       <p:bldP spid="28" grpId="0" animBg="1"/>
-      <p:bldP spid="29" grpId="0" animBg="1"/>
       <p:bldP spid="30" grpId="0" animBg="1"/>
       <p:bldP spid="31" grpId="0" animBg="1"/>
-      <p:bldP spid="32" grpId="0" animBg="1"/>
-      <p:bldP spid="33" grpId="0" animBg="1"/>
-      <p:bldP spid="34" grpId="0" animBg="1"/>
     </p:bldLst>
   </p:timing>
 </p:sld>

--- a/erm-migration/docs/ERM-Migration-Jury-Pitch.pptx
+++ b/erm-migration/docs/ERM-Migration-Jury-Pitch.pptx
@@ -115,31 +115,31 @@
   <p:extLst>
     <p:ext uri="{521415D9-36F7-43E2-AB2F-B90AF26B5E84}">
       <p14:sectionLst xmlns:p14="http://schemas.microsoft.com/office/powerpoint/2010/main">
-        <p14:section name="Pitch" id="{a6b8c539-af5d-9d40-c6ed-4b56507743f5}">
+        <p14:section name="Pitch" id="{853be82f-37cb-3071-5236-597c13728fa0}">
           <p14:sldIdLst>
             <p14:sldId id="256"/>
           </p14:sldIdLst>
         </p14:section>
-        <p14:section name="Context" id="{2fed9648-88eb-020f-b857-1729a9fe55c3}">
+        <p14:section name="Context" id="{17addc18-8c97-9952-eb95-4cafef74b56f}">
           <p14:sldIdLst>
             <p14:sldId id="257"/>
             <p14:sldId id="258"/>
           </p14:sldIdLst>
         </p14:section>
-        <p14:section name="Problem and method" id="{89b656bc-9b3b-5a89-178c-bdb500144a19}">
+        <p14:section name="Problem and method" id="{74955835-f259-be5e-e61d-57f972d936e9}">
           <p14:sldIdLst>
             <p14:sldId id="259"/>
             <p14:sldId id="260"/>
           </p14:sldIdLst>
         </p14:section>
-        <p14:section name="Impact" id="{87eeb092-a30b-3b2b-dd4c-fa2788949f00}">
+        <p14:section name="Impact" id="{0b2bab05-3513-06d5-6bd2-9eae1b80eb52}">
           <p14:sldIdLst>
             <p14:sldId id="261"/>
             <p14:sldId id="262"/>
             <p14:sldId id="263"/>
           </p14:sldIdLst>
         </p14:section>
-        <p14:section name="Reuse" id="{ad97be09-8d8e-abc7-6b9d-09987f9d315d}">
+        <p14:section name="Reuse" id="{fc2a2f20-659d-d93f-2168-1df443d0d753}">
           <p14:sldIdLst>
             <p14:sldId id="264"/>
           </p14:sldIdLst>
@@ -158,41 +158,10 @@
   <c:date1904 val="0"/>
   <c:roundedCorners val="1"/>
   <c:chart>
-    <c:title>
-      <c:tx>
-        <c:rich>
-          <a:bodyPr/>
-          <a:lstStyle/>
-          <a:p>
-            <a:pPr>
-              <a:defRPr sz="1300" b="0" i="0" u="none" strike="noStrike">
-                <a:solidFill>
-                  <a:srgbClr val="00205B"/>
-                </a:solidFill>
-                <a:latin typeface="+mn-lt"/>
-              </a:defRPr>
-            </a:pPr>
-            <a:r>
-              <a:rPr sz="1300" b="0" i="0" u="none" strike="noStrike">
-                <a:solidFill>
-                  <a:srgbClr val="00205B"/>
-                </a:solidFill>
-                <a:latin typeface="+mn-lt"/>
-              </a:rPr>
-              <a:t>ERM users by site</a:t>
-            </a:r>
-          </a:p>
-        </c:rich>
-      </c:tx>
-      <c:layout/>
-      <c:overlay val="0"/>
-    </c:title>
-    <c:autoTitleDeleted val="0"/>
+    <c:autoTitleDeleted val="1"/>
     <c:plotArea>
       <c:layout/>
-      <c:barChart>
-        <c:barDir val="bar"/>
-        <c:grouping val="clustered"/>
+      <c:lineChart>
         <c:varyColors val="0"/>
         <c:ser>
           <c:idx val="0"/>
@@ -203,7 +172,7 @@
               <c:strCache>
                 <c:ptCount val="1"/>
                 <c:pt idx="0">
-                  <c:v>Users</c:v>
+                  <c:v>Unique users</c:v>
                 </c:pt>
               </c:strCache>
             </c:strRef>
@@ -212,6 +181,13 @@
             <a:solidFill>
               <a:srgbClr val="0085CA"/>
             </a:solidFill>
+            <a:ln w="25400" cap="flat">
+              <a:solidFill>
+                <a:srgbClr val="0085CA"/>
+              </a:solidFill>
+              <a:prstDash val="solid"/>
+              <a:round/>
+            </a:ln>
             <a:effectLst/>
           </c:spPr>
           <c:invertIfNegative val="0"/>
@@ -222,52 +198,114 @@
               <a:lstStyle/>
               <a:p>
                 <a:pPr>
-                  <a:defRPr b="0" i="0" strike="noStrike" sz="1100" u="none">
+                  <a:defRPr b="0" i="0" strike="noStrike" sz="1200" u="none">
                     <a:solidFill>
-                      <a:srgbClr val="00205B"/>
+                      <a:srgbClr val="000000"/>
                     </a:solidFill>
-                    <a:latin typeface="+mn-lt"/>
+                    <a:latin typeface="Arial"/>
                   </a:defRPr>
                 </a:pPr>
               </a:p>
             </c:txPr>
             <c:showLegendKey val="0"/>
-            <c:showVal val="1"/>
+            <c:showVal val="0"/>
             <c:showCatName val="0"/>
             <c:showSerName val="0"/>
             <c:showPercent val="0"/>
             <c:showBubbleSize val="0"/>
             <c:showLeaderLines val="0"/>
           </c:dLbls>
+          <c:marker>
+            <c:symbol val="circle"/>
+            <c:size val="5"/>
+            <c:spPr>
+              <a:solidFill>
+                <a:srgbClr val="0085CA"/>
+              </a:solidFill>
+              <a:ln w="9525" cap="flat">
+                <a:solidFill>
+                  <a:srgbClr val="0085CA"/>
+                </a:solidFill>
+                <a:prstDash val="solid"/>
+                <a:round/>
+              </a:ln>
+              <a:effectLst/>
+            </c:spPr>
+          </c:marker>
           <c:cat>
             <c:multiLvlStrRef>
-              <c:f>Sheet1!$A$2:$A$9</c:f>
+              <c:f>Sheet1!$A$2:$A$24</c:f>
               <c:multiLvlStrCache>
-                <c:ptCount val="8"/>
+                <c:ptCount val="23"/>
                 <c:lvl>
                   <c:pt idx="0">
-                    <c:v>Blagnac (FR)</c:v>
+                    <c:v>Aug 24</c:v>
                   </c:pt>
                   <c:pt idx="1">
-                    <c:v>Hamburg (DE)</c:v>
+                    <c:v>Sep 24</c:v>
                   </c:pt>
                   <c:pt idx="2">
-                    <c:v>Saint-Martin (FR)</c:v>
+                    <c:v>Oct 24</c:v>
                   </c:pt>
                   <c:pt idx="3">
-                    <c:v>Broughton (UK)</c:v>
+                    <c:v>Nov 24</c:v>
                   </c:pt>
                   <c:pt idx="4">
-                    <c:v>Filton (UK)</c:v>
+                    <c:v>Dec 24</c:v>
                   </c:pt>
                   <c:pt idx="5">
-                    <c:v>Getafe (ES)</c:v>
+                    <c:v>Jan 25</c:v>
                   </c:pt>
                   <c:pt idx="6">
-                    <c:v>Mirabel (CA)</c:v>
+                    <c:v>Feb 25</c:v>
                   </c:pt>
                   <c:pt idx="7">
-                    <c:v>Bangalore (IN)</c:v>
+                    <c:v>Mar 25</c:v>
+                  </c:pt>
+                  <c:pt idx="8">
+                    <c:v>Apr 25</c:v>
+                  </c:pt>
+                  <c:pt idx="9">
+                    <c:v>May 25</c:v>
+                  </c:pt>
+                  <c:pt idx="10">
+                    <c:v>Jun 25</c:v>
+                  </c:pt>
+                  <c:pt idx="11">
+                    <c:v>Jul 25</c:v>
+                  </c:pt>
+                  <c:pt idx="12">
+                    <c:v>Aug 25</c:v>
+                  </c:pt>
+                  <c:pt idx="13">
+                    <c:v>Sep 25</c:v>
+                  </c:pt>
+                  <c:pt idx="14">
+                    <c:v>Oct 25</c:v>
+                  </c:pt>
+                  <c:pt idx="15">
+                    <c:v>Nov 25</c:v>
+                  </c:pt>
+                  <c:pt idx="16">
+                    <c:v>Dec 25</c:v>
+                  </c:pt>
+                  <c:pt idx="17">
+                    <c:v>Jan 26</c:v>
+                  </c:pt>
+                  <c:pt idx="18">
+                    <c:v>Feb 26</c:v>
+                  </c:pt>
+                  <c:pt idx="19">
+                    <c:v>Mar 26</c:v>
+                  </c:pt>
+                  <c:pt idx="20">
+                    <c:v>Apr 26</c:v>
+                  </c:pt>
+                  <c:pt idx="21">
+                    <c:v>May 26</c:v>
+                  </c:pt>
+                  <c:pt idx="22">
+                    <c:v>Jun 26</c:v>
                   </c:pt>
                 </c:lvl>
               </c:multiLvlStrCache>
@@ -275,37 +313,83 @@
           </c:cat>
           <c:val>
             <c:numRef>
-              <c:f>Sheet1!$B$2:$B$9</c:f>
+              <c:f>Sheet1!$B$2:$B$24</c:f>
               <c:numCache>
                 <c:formatCode>General</c:formatCode>
-                <c:ptCount val="8"/>
+                <c:ptCount val="23"/>
                 <c:pt idx="0">
-                  <c:v>271</c:v>
+                  <c:v>0</c:v>
                 </c:pt>
                 <c:pt idx="1">
-                  <c:v>205</c:v>
+                  <c:v>50</c:v>
                 </c:pt>
                 <c:pt idx="2">
-                  <c:v>43</c:v>
+                  <c:v>95</c:v>
                 </c:pt>
                 <c:pt idx="3">
-                  <c:v>32</c:v>
+                  <c:v>105</c:v>
                 </c:pt>
                 <c:pt idx="4">
-                  <c:v>26</c:v>
+                  <c:v>65</c:v>
                 </c:pt>
                 <c:pt idx="5">
-                  <c:v>25</c:v>
+                  <c:v>110</c:v>
                 </c:pt>
                 <c:pt idx="6">
-                  <c:v>12</c:v>
+                  <c:v>135</c:v>
                 </c:pt>
                 <c:pt idx="7">
-                  <c:v>7</c:v>
+                  <c:v>125</c:v>
+                </c:pt>
+                <c:pt idx="8">
+                  <c:v>150</c:v>
+                </c:pt>
+                <c:pt idx="9">
+                  <c:v>245</c:v>
+                </c:pt>
+                <c:pt idx="10">
+                  <c:v>220</c:v>
+                </c:pt>
+                <c:pt idx="11">
+                  <c:v>230</c:v>
+                </c:pt>
+                <c:pt idx="12">
+                  <c:v>240</c:v>
+                </c:pt>
+                <c:pt idx="13">
+                  <c:v>265</c:v>
+                </c:pt>
+                <c:pt idx="14">
+                  <c:v>230</c:v>
+                </c:pt>
+                <c:pt idx="15">
+                  <c:v>300</c:v>
+                </c:pt>
+                <c:pt idx="16">
+                  <c:v>190</c:v>
+                </c:pt>
+                <c:pt idx="17">
+                  <c:v>210</c:v>
+                </c:pt>
+                <c:pt idx="18">
+                  <c:v>340</c:v>
+                </c:pt>
+                <c:pt idx="19">
+                  <c:v>280</c:v>
+                </c:pt>
+                <c:pt idx="20">
+                  <c:v>220</c:v>
+                </c:pt>
+                <c:pt idx="21">
+                  <c:v>305</c:v>
+                </c:pt>
+                <c:pt idx="22">
+                  <c:v>310</c:v>
                 </c:pt>
               </c:numCache>
             </c:numRef>
           </c:val>
+          <c:smooth val="0"/>
         </c:ser>
         <c:dLbls>
           <c:numFmt formatCode="#,##0" sourceLinked="0"/>
@@ -314,37 +398,120 @@
             <a:lstStyle/>
             <a:p>
               <a:pPr>
-                <a:defRPr b="0" i="0" strike="noStrike" sz="1100" u="none">
+                <a:defRPr b="0" i="0" strike="noStrike" sz="1200" u="none">
                   <a:solidFill>
-                    <a:srgbClr val="00205B"/>
+                    <a:srgbClr val="000000"/>
                   </a:solidFill>
-                  <a:latin typeface="+mn-lt"/>
+                  <a:latin typeface="Arial"/>
                 </a:defRPr>
               </a:pPr>
             </a:p>
           </c:txPr>
           <c:showLegendKey val="0"/>
-          <c:showVal val="1"/>
+          <c:showVal val="0"/>
           <c:showCatName val="0"/>
           <c:showSerName val="0"/>
           <c:showPercent val="0"/>
           <c:showBubbleSize val="0"/>
           <c:showLeaderLines val="0"/>
         </c:dLbls>
-        <c:gapWidth val="60"/>
-        <c:overlap val="0"/>
+        <c:marker val="1"/>
         <c:axId val="2094734554"/>
         <c:axId val="2094734552"/>
         <c:axId val="2094734556"/>
-      </c:barChart>
+      </c:lineChart>
       <c:catAx>
         <c:axId val="2094734554"/>
         <c:scaling>
-          <c:orientation val="maxMin"/>
+          <c:orientation val="minMax"/>
+        </c:scaling>
+        <c:delete val="0"/>
+        <c:axPos val="b"/>
+        <c:numFmt formatCode="General" sourceLinked="1"/>
+        <c:majorTickMark val="out"/>
+        <c:minorTickMark val="none"/>
+        <c:tickLblPos val="low"/>
+        <c:spPr>
+          <a:ln w="12700" cap="flat">
+            <a:solidFill>
+              <a:srgbClr val="888888"/>
+            </a:solidFill>
+            <a:prstDash val="solid"/>
+            <a:round/>
+          </a:ln>
+        </c:spPr>
+        <c:txPr>
+          <a:bodyPr/>
+          <a:lstStyle/>
+          <a:p>
+            <a:pPr>
+              <a:defRPr sz="1000" b="0" i="0" u="none" strike="noStrike">
+                <a:solidFill>
+                  <a:srgbClr val="4A5568"/>
+                </a:solidFill>
+                <a:latin typeface="+mn-lt"/>
+              </a:defRPr>
+            </a:pPr>
+            <a:endParaRPr lang="en-US"/>
+          </a:p>
+        </c:txPr>
+        <c:crossAx val="2094734552"/>
+        <c:crosses val="autoZero"/>
+        <c:auto val="1"/>
+        <c:lblAlgn val="ctr"/>
+        <c:noMultiLvlLbl val="1"/>
+        <c:tickLblSkip val="2"/>
+      </c:catAx>
+      <c:valAx>
+        <c:axId val="2094734552"/>
+        <c:scaling>
+          <c:orientation val="minMax"/>
+          <c:max val="350"/>
+          <c:min val="0"/>
         </c:scaling>
         <c:delete val="0"/>
         <c:axPos val="l"/>
-        <c:numFmt formatCode="General" sourceLinked="1"/>
+        <c:majorGridlines>
+          <c:spPr>
+            <a:ln w="9525" cap="flat">
+              <a:solidFill>
+                <a:srgbClr val="DCE3EE"/>
+              </a:solidFill>
+              <a:prstDash val="solid"/>
+              <a:round/>
+            </a:ln>
+          </c:spPr>
+        </c:majorGridlines>
+        <c:title>
+          <c:tx>
+            <c:rich>
+              <a:bodyPr/>
+              <a:lstStyle/>
+              <a:p>
+                <a:pPr>
+                  <a:defRPr sz="1000" b="0" i="0" u="none" strike="noStrike">
+                    <a:solidFill>
+                      <a:srgbClr val="4A5568"/>
+                    </a:solidFill>
+                    <a:latin typeface="Arial"/>
+                  </a:defRPr>
+                </a:pPr>
+                <a:r>
+                  <a:rPr sz="1000" b="0" i="0" u="none" strike="noStrike">
+                    <a:solidFill>
+                      <a:srgbClr val="4A5568"/>
+                    </a:solidFill>
+                    <a:latin typeface="Arial"/>
+                  </a:rPr>
+                  <a:t>Unique users</a:t>
+                </a:r>
+              </a:p>
+            </c:rich>
+          </c:tx>
+          <c:layout/>
+          <c:overlay val="0"/>
+        </c:title>
+        <c:numFmt formatCode="General" sourceLinked="0"/>
         <c:majorTickMark val="out"/>
         <c:minorTickMark val="none"/>
         <c:tickLblPos val="nextTo"/>
@@ -362,7 +529,7 @@
           <a:lstStyle/>
           <a:p>
             <a:pPr>
-              <a:defRPr sz="1100" b="0" i="0" u="none" strike="noStrike">
+              <a:defRPr sz="1000" b="0" i="0" u="none" strike="noStrike">
                 <a:solidFill>
                   <a:srgbClr val="4A5568"/>
                 </a:solidFill>
@@ -372,50 +539,10 @@
             <a:endParaRPr lang="en-US"/>
           </a:p>
         </c:txPr>
-        <c:crossAx val="2094734552"/>
-        <c:crosses val="autoZero"/>
-        <c:auto val="1"/>
-        <c:lblAlgn val="ctr"/>
-        <c:noMultiLvlLbl val="1"/>
-      </c:catAx>
-      <c:valAx>
-        <c:axId val="2094734552"/>
-        <c:scaling>
-          <c:orientation val="minMax"/>
-        </c:scaling>
-        <c:delete val="1"/>
-        <c:axPos val="b"/>
-        <c:numFmt formatCode="General" sourceLinked="0"/>
-        <c:majorTickMark val="out"/>
-        <c:minorTickMark val="none"/>
-        <c:tickLblPos val="low"/>
-        <c:spPr>
-          <a:ln w="12700" cap="flat">
-            <a:solidFill>
-              <a:srgbClr val="888888"/>
-            </a:solidFill>
-            <a:prstDash val="solid"/>
-            <a:round/>
-          </a:ln>
-        </c:spPr>
-        <c:txPr>
-          <a:bodyPr/>
-          <a:lstStyle/>
-          <a:p>
-            <a:pPr>
-              <a:defRPr sz="1200" b="0" i="0" u="none" strike="noStrike">
-                <a:solidFill>
-                  <a:srgbClr val="000000"/>
-                </a:solidFill>
-                <a:latin typeface="Arial"/>
-              </a:defRPr>
-            </a:pPr>
-            <a:endParaRPr lang="en-US"/>
-          </a:p>
-        </c:txPr>
         <c:crossAx val="2094734554"/>
         <c:crosses val="autoZero"/>
         <c:crossBetween val="between"/>
+        <c:majorUnit val="50"/>
       </c:valAx>
       <c:spPr>
         <a:noFill/>
@@ -1012,7 +1139,7 @@
           <a:p>
             <a:r>
               <a:rPr lang="en-US" dirty="0"/>
-              <a:t>Make the stakes clear. 892 people have used ERM, with a monthly peak above 320 active risk managers. More than 1,600 dashboards have been created and more than 10 are updated every day. Users sit in Blagnac, Hamburg, Saint-Martin, Broughton, Filton, Getafe, Mirabel and Bangalore. That is why the migration could not be a rewrite from memory: every feature had to be found and carried over.</a:t>
+              <a:t>Make the stakes clear. 892 people have used ERM across engineering, programmes and operations, with a monthly peak above 320 active risk managers. More than 1,600 dashboards have been created and more than 10 are updated every day. The trend shows monthly unique users growing from launch in summer 2024 to around 300 a month in 2026. Usage spans France, Germany, the UK, Spain, Canada and India, led by Blagnac and Hamburg. That is why the migration could not be a rewrite from memory: every feature had to be found and carried over.</a:t>
             </a:r>
             <a:endParaRPr lang="en-US" dirty="0"/>
           </a:p>
@@ -5626,7 +5753,7 @@
                   <a:schemeClr val="tx1"/>
                 </a:solidFill>
               </a:rPr>
-              <a:t>Hundreds of risk managers rely on ERM</a:t>
+              <a:t>ERM adoption and user metrics</a:t>
             </a:r>
             <a:endParaRPr lang="en-US" sz="3600" dirty="0"/>
           </a:p>
@@ -5634,18 +5761,54 @@
       </p:sp>
       <p:sp>
         <p:nvSpPr>
-          <p:cNvPr id="3" name="adopt-0-card"/>
+          <p:cNvPr id="3" name="adopt-sub"/>
+          <p:cNvSpPr txBox="1"/>
+          <p:nvPr/>
+        </p:nvSpPr>
+        <p:spPr>
+          <a:xfrm>
+            <a:off x="548640" y="1115568"/>
+            <a:ext cx="11094415" cy="320040"/>
+          </a:xfrm>
+          <a:prstGeom prst="rect">
+            <a:avLst/>
+          </a:prstGeom>
+          <a:noFill/>
+          <a:ln/>
+        </p:spPr>
+        <p:txBody>
+          <a:bodyPr wrap="square" lIns="0" tIns="0" rIns="0" bIns="0" rtlCol="0" anchor="t"/>
+          <a:lstStyle/>
+          <a:p>
+            <a:pPr indent="0" marL="0">
+              <a:buNone/>
+            </a:pPr>
+            <a:r>
+              <a:rPr lang="en-US" sz="1400" dirty="0">
+                <a:solidFill>
+                  <a:schemeClr val="tx2"/>
+                </a:solidFill>
+              </a:rPr>
+              <a:t>A migration that broke a feature would disrupt risk reporting for hundreds of risk managers in 6 countries</a:t>
+            </a:r>
+            <a:endParaRPr lang="en-US" sz="1400" dirty="0"/>
+          </a:p>
+        </p:txBody>
+      </p:sp>
+      <p:sp>
+        <p:nvSpPr>
+          <p:cNvPr id="4" name="adopt-0-card"/>
           <p:cNvSpPr/>
           <p:nvPr/>
         </p:nvSpPr>
         <p:spPr>
           <a:xfrm>
-            <a:off x="548640" y="1371600"/>
-            <a:ext cx="2567864" cy="1737360"/>
+            <a:off x="548640" y="1554480"/>
+            <a:ext cx="2567864" cy="1417320"/>
           </a:xfrm>
           <a:prstGeom prst="roundRect">
             <a:avLst>
-              <a:gd name="adj" fmla="val 6316"/>
+              <a:gd name="adj" fmla="val 7742"/>
             </a:avLst>
           </a:prstGeom>
           <a:solidFill>
@@ -5656,14 +5819,14 @@
       </p:sp>
       <p:sp>
         <p:nvSpPr>
-          <p:cNvPr id="4" name="adopt-0-value"/>
+          <p:cNvPr id="5" name="adopt-0-label"/>
           <p:cNvSpPr txBox="1"/>
           <p:nvPr/>
         </p:nvSpPr>
         <p:spPr>
           <a:xfrm>
-            <a:off x="777240" y="1554480"/>
-            <a:ext cx="2110664" cy="731520"/>
+            <a:off x="749808" y="1664208"/>
+            <a:ext cx="2165528" cy="256032"/>
           </a:xfrm>
           <a:prstGeom prst="rect">
             <a:avLst/>
@@ -5679,27 +5842,63 @@
               <a:buNone/>
             </a:pPr>
             <a:r>
-              <a:rPr lang="en-US" sz="4000" b="1" dirty="0">
+              <a:rPr lang="en-US" sz="1000" b="1" spc="100" kern="0" dirty="0">
+                <a:solidFill>
+                  <a:schemeClr val="accent5"/>
+                </a:solidFill>
+              </a:rPr>
+              <a:t>LIFETIME UNIQUE USERS</a:t>
+            </a:r>
+            <a:endParaRPr lang="en-US" sz="1000" dirty="0"/>
+          </a:p>
+        </p:txBody>
+      </p:sp>
+      <p:sp>
+        <p:nvSpPr>
+          <p:cNvPr id="6" name="adopt-0-value"/>
+          <p:cNvSpPr txBox="1"/>
+          <p:nvPr/>
+        </p:nvSpPr>
+        <p:spPr>
+          <a:xfrm>
+            <a:off x="749808" y="1920240"/>
+            <a:ext cx="2165528" cy="594360"/>
+          </a:xfrm>
+          <a:prstGeom prst="rect">
+            <a:avLst/>
+          </a:prstGeom>
+          <a:noFill/>
+          <a:ln/>
+        </p:spPr>
+        <p:txBody>
+          <a:bodyPr wrap="square" lIns="0" tIns="0" rIns="0" bIns="0" rtlCol="0" anchor="t"/>
+          <a:lstStyle/>
+          <a:p>
+            <a:pPr indent="0" marL="0">
+              <a:buNone/>
+            </a:pPr>
+            <a:r>
+              <a:rPr lang="en-US" sz="3400" b="1" dirty="0">
                 <a:solidFill>
                   <a:schemeClr val="bg1"/>
                 </a:solidFill>
               </a:rPr>
               <a:t>892</a:t>
             </a:r>
-            <a:endParaRPr lang="en-US" sz="4000" dirty="0"/>
+            <a:endParaRPr lang="en-US" sz="3400" dirty="0"/>
           </a:p>
         </p:txBody>
       </p:sp>
       <p:sp>
         <p:nvSpPr>
-          <p:cNvPr id="5" name="adopt-0-label"/>
+          <p:cNvPr id="7" name="adopt-0-desc"/>
           <p:cNvSpPr txBox="1"/>
           <p:nvPr/>
         </p:nvSpPr>
         <p:spPr>
           <a:xfrm>
-            <a:off x="777240" y="2286000"/>
-            <a:ext cx="2110664" cy="685800"/>
+            <a:off x="749808" y="2514600"/>
+            <a:ext cx="2165528" cy="365760"/>
           </a:xfrm>
           <a:prstGeom prst="rect">
             <a:avLst/>
@@ -5715,31 +5914,31 @@
               <a:buNone/>
             </a:pPr>
             <a:r>
-              <a:rPr lang="en-US" sz="1300" dirty="0">
+              <a:rPr lang="en-US" sz="1200" dirty="0">
                 <a:solidFill>
                   <a:schemeClr val="accent5"/>
                 </a:solidFill>
               </a:rPr>
-              <a:t>lifetime unique users across engineering, programmes and operations</a:t>
-            </a:r>
-            <a:endParaRPr lang="en-US" sz="1300" dirty="0"/>
+              <a:t>Across engineering, programmes and operations</a:t>
+            </a:r>
+            <a:endParaRPr lang="en-US" sz="1200" dirty="0"/>
           </a:p>
         </p:txBody>
       </p:sp>
       <p:sp>
         <p:nvSpPr>
-          <p:cNvPr id="6" name="adopt-1-card"/>
+          <p:cNvPr id="8" name="adopt-1-card"/>
           <p:cNvSpPr/>
           <p:nvPr/>
         </p:nvSpPr>
         <p:spPr>
           <a:xfrm>
-            <a:off x="3390824" y="1371600"/>
-            <a:ext cx="2567864" cy="1737360"/>
+            <a:off x="3390824" y="1554480"/>
+            <a:ext cx="2567864" cy="1417320"/>
           </a:xfrm>
           <a:prstGeom prst="roundRect">
             <a:avLst>
-              <a:gd name="adj" fmla="val 6316"/>
+              <a:gd name="adj" fmla="val 7742"/>
             </a:avLst>
           </a:prstGeom>
           <a:solidFill>
@@ -5750,14 +5949,14 @@
       </p:sp>
       <p:sp>
         <p:nvSpPr>
-          <p:cNvPr id="7" name="adopt-1-value"/>
+          <p:cNvPr id="9" name="adopt-1-label"/>
           <p:cNvSpPr txBox="1"/>
           <p:nvPr/>
         </p:nvSpPr>
         <p:spPr>
           <a:xfrm>
-            <a:off x="3619424" y="1554480"/>
-            <a:ext cx="2110664" cy="731520"/>
+            <a:off x="3591992" y="1664208"/>
+            <a:ext cx="2165528" cy="256032"/>
           </a:xfrm>
           <a:prstGeom prst="rect">
             <a:avLst/>
@@ -5773,27 +5972,63 @@
               <a:buNone/>
             </a:pPr>
             <a:r>
-              <a:rPr lang="en-US" sz="4000" b="1" dirty="0">
+              <a:rPr lang="en-US" sz="1000" b="1" spc="100" kern="0" dirty="0">
+                <a:solidFill>
+                  <a:schemeClr val="tx2"/>
+                </a:solidFill>
+              </a:rPr>
+              <a:t>MONTHLY ACTIVE PEAK</a:t>
+            </a:r>
+            <a:endParaRPr lang="en-US" sz="1000" dirty="0"/>
+          </a:p>
+        </p:txBody>
+      </p:sp>
+      <p:sp>
+        <p:nvSpPr>
+          <p:cNvPr id="10" name="adopt-1-value"/>
+          <p:cNvSpPr txBox="1"/>
+          <p:nvPr/>
+        </p:nvSpPr>
+        <p:spPr>
+          <a:xfrm>
+            <a:off x="3591992" y="1920240"/>
+            <a:ext cx="2165528" cy="594360"/>
+          </a:xfrm>
+          <a:prstGeom prst="rect">
+            <a:avLst/>
+          </a:prstGeom>
+          <a:noFill/>
+          <a:ln/>
+        </p:spPr>
+        <p:txBody>
+          <a:bodyPr wrap="square" lIns="0" tIns="0" rIns="0" bIns="0" rtlCol="0" anchor="t"/>
+          <a:lstStyle/>
+          <a:p>
+            <a:pPr indent="0" marL="0">
+              <a:buNone/>
+            </a:pPr>
+            <a:r>
+              <a:rPr lang="en-US" sz="3400" b="1" dirty="0">
                 <a:solidFill>
                   <a:schemeClr val="tx1"/>
                 </a:solidFill>
               </a:rPr>
               <a:t>320+</a:t>
             </a:r>
-            <a:endParaRPr lang="en-US" sz="4000" dirty="0"/>
+            <a:endParaRPr lang="en-US" sz="3400" dirty="0"/>
           </a:p>
         </p:txBody>
       </p:sp>
       <p:sp>
         <p:nvSpPr>
-          <p:cNvPr id="8" name="adopt-1-label"/>
+          <p:cNvPr id="11" name="adopt-1-desc"/>
           <p:cNvSpPr txBox="1"/>
           <p:nvPr/>
         </p:nvSpPr>
         <p:spPr>
           <a:xfrm>
-            <a:off x="3619424" y="2286000"/>
-            <a:ext cx="2110664" cy="685800"/>
+            <a:off x="3591992" y="2514600"/>
+            <a:ext cx="2165528" cy="365760"/>
           </a:xfrm>
           <a:prstGeom prst="rect">
             <a:avLst/>
@@ -5809,31 +6044,31 @@
               <a:buNone/>
             </a:pPr>
             <a:r>
-              <a:rPr lang="en-US" sz="1300" dirty="0">
+              <a:rPr lang="en-US" sz="1200" dirty="0">
                 <a:solidFill>
                   <a:schemeClr val="tx2"/>
                 </a:solidFill>
               </a:rPr>
-              <a:t>monthly active risk managers at peak</a:t>
-            </a:r>
-            <a:endParaRPr lang="en-US" sz="1300" dirty="0"/>
+              <a:t>Active risk managers per reporting month</a:t>
+            </a:r>
+            <a:endParaRPr lang="en-US" sz="1200" dirty="0"/>
           </a:p>
         </p:txBody>
       </p:sp>
       <p:sp>
         <p:nvSpPr>
-          <p:cNvPr id="9" name="adopt-2-card"/>
+          <p:cNvPr id="12" name="adopt-2-card"/>
           <p:cNvSpPr/>
           <p:nvPr/>
         </p:nvSpPr>
         <p:spPr>
           <a:xfrm>
-            <a:off x="6233008" y="1371600"/>
-            <a:ext cx="2567864" cy="1737360"/>
+            <a:off x="6233008" y="1554480"/>
+            <a:ext cx="2567864" cy="1417320"/>
           </a:xfrm>
           <a:prstGeom prst="roundRect">
             <a:avLst>
-              <a:gd name="adj" fmla="val 6316"/>
+              <a:gd name="adj" fmla="val 7742"/>
             </a:avLst>
           </a:prstGeom>
           <a:solidFill>
@@ -5844,14 +6079,14 @@
       </p:sp>
       <p:sp>
         <p:nvSpPr>
-          <p:cNvPr id="10" name="adopt-2-value"/>
+          <p:cNvPr id="13" name="adopt-2-label"/>
           <p:cNvSpPr txBox="1"/>
           <p:nvPr/>
         </p:nvSpPr>
         <p:spPr>
           <a:xfrm>
-            <a:off x="6461608" y="1554480"/>
-            <a:ext cx="2110664" cy="731520"/>
+            <a:off x="6434176" y="1664208"/>
+            <a:ext cx="2165528" cy="256032"/>
           </a:xfrm>
           <a:prstGeom prst="rect">
             <a:avLst/>
@@ -5867,27 +6102,63 @@
               <a:buNone/>
             </a:pPr>
             <a:r>
-              <a:rPr lang="en-US" sz="4000" b="1" dirty="0">
+              <a:rPr lang="en-US" sz="1000" b="1" spc="100" kern="0" dirty="0">
+                <a:solidFill>
+                  <a:schemeClr val="tx2"/>
+                </a:solidFill>
+              </a:rPr>
+              <a:t>DASHBOARDS CREATED</a:t>
+            </a:r>
+            <a:endParaRPr lang="en-US" sz="1000" dirty="0"/>
+          </a:p>
+        </p:txBody>
+      </p:sp>
+      <p:sp>
+        <p:nvSpPr>
+          <p:cNvPr id="14" name="adopt-2-value"/>
+          <p:cNvSpPr txBox="1"/>
+          <p:nvPr/>
+        </p:nvSpPr>
+        <p:spPr>
+          <a:xfrm>
+            <a:off x="6434176" y="1920240"/>
+            <a:ext cx="2165528" cy="594360"/>
+          </a:xfrm>
+          <a:prstGeom prst="rect">
+            <a:avLst/>
+          </a:prstGeom>
+          <a:noFill/>
+          <a:ln/>
+        </p:spPr>
+        <p:txBody>
+          <a:bodyPr wrap="square" lIns="0" tIns="0" rIns="0" bIns="0" rtlCol="0" anchor="t"/>
+          <a:lstStyle/>
+          <a:p>
+            <a:pPr indent="0" marL="0">
+              <a:buNone/>
+            </a:pPr>
+            <a:r>
+              <a:rPr lang="en-US" sz="3400" b="1" dirty="0">
                 <a:solidFill>
                   <a:schemeClr val="tx1"/>
                 </a:solidFill>
               </a:rPr>
               <a:t>1,600+</a:t>
             </a:r>
-            <a:endParaRPr lang="en-US" sz="4000" dirty="0"/>
+            <a:endParaRPr lang="en-US" sz="3400" dirty="0"/>
           </a:p>
         </p:txBody>
       </p:sp>
       <p:sp>
         <p:nvSpPr>
-          <p:cNvPr id="11" name="adopt-2-label"/>
+          <p:cNvPr id="15" name="adopt-2-desc"/>
           <p:cNvSpPr txBox="1"/>
           <p:nvPr/>
         </p:nvSpPr>
         <p:spPr>
           <a:xfrm>
-            <a:off x="6461608" y="2286000"/>
-            <a:ext cx="2110664" cy="685800"/>
+            <a:off x="6434176" y="2514600"/>
+            <a:ext cx="2165528" cy="365760"/>
           </a:xfrm>
           <a:prstGeom prst="rect">
             <a:avLst/>
@@ -5903,31 +6174,31 @@
               <a:buNone/>
             </a:pPr>
             <a:r>
-              <a:rPr lang="en-US" sz="1300" dirty="0">
+              <a:rPr lang="en-US" sz="1200" dirty="0">
                 <a:solidFill>
                   <a:schemeClr val="tx2"/>
                 </a:solidFill>
               </a:rPr>
-              <a:t>custom dashboards created to date</a:t>
-            </a:r>
-            <a:endParaRPr lang="en-US" sz="1300" dirty="0"/>
+              <a:t>Custom dashboards created to date</a:t>
+            </a:r>
+            <a:endParaRPr lang="en-US" sz="1200" dirty="0"/>
           </a:p>
         </p:txBody>
       </p:sp>
       <p:sp>
         <p:nvSpPr>
-          <p:cNvPr id="12" name="adopt-3-card"/>
+          <p:cNvPr id="16" name="adopt-3-card"/>
           <p:cNvSpPr/>
           <p:nvPr/>
         </p:nvSpPr>
         <p:spPr>
           <a:xfrm>
-            <a:off x="9075191" y="1371600"/>
-            <a:ext cx="2567864" cy="1737360"/>
+            <a:off x="9075191" y="1554480"/>
+            <a:ext cx="2567864" cy="1417320"/>
           </a:xfrm>
           <a:prstGeom prst="roundRect">
             <a:avLst>
-              <a:gd name="adj" fmla="val 6316"/>
+              <a:gd name="adj" fmla="val 7742"/>
             </a:avLst>
           </a:prstGeom>
           <a:solidFill>
@@ -5938,14 +6209,14 @@
       </p:sp>
       <p:sp>
         <p:nvSpPr>
-          <p:cNvPr id="13" name="adopt-3-value"/>
+          <p:cNvPr id="17" name="adopt-3-label"/>
           <p:cNvSpPr txBox="1"/>
           <p:nvPr/>
         </p:nvSpPr>
         <p:spPr>
           <a:xfrm>
-            <a:off x="9303791" y="1554480"/>
-            <a:ext cx="2110664" cy="731520"/>
+            <a:off x="9276359" y="1664208"/>
+            <a:ext cx="2165528" cy="256032"/>
           </a:xfrm>
           <a:prstGeom prst="rect">
             <a:avLst/>
@@ -5961,27 +6232,63 @@
               <a:buNone/>
             </a:pPr>
             <a:r>
-              <a:rPr lang="en-US" sz="4000" b="1" dirty="0">
+              <a:rPr lang="en-US" sz="1000" b="1" spc="100" kern="0" dirty="0">
+                <a:solidFill>
+                  <a:schemeClr val="tx2"/>
+                </a:solidFill>
+              </a:rPr>
+              <a:t>UPDATED DAILY</a:t>
+            </a:r>
+            <a:endParaRPr lang="en-US" sz="1000" dirty="0"/>
+          </a:p>
+        </p:txBody>
+      </p:sp>
+      <p:sp>
+        <p:nvSpPr>
+          <p:cNvPr id="18" name="adopt-3-value"/>
+          <p:cNvSpPr txBox="1"/>
+          <p:nvPr/>
+        </p:nvSpPr>
+        <p:spPr>
+          <a:xfrm>
+            <a:off x="9276359" y="1920240"/>
+            <a:ext cx="2165528" cy="594360"/>
+          </a:xfrm>
+          <a:prstGeom prst="rect">
+            <a:avLst/>
+          </a:prstGeom>
+          <a:noFill/>
+          <a:ln/>
+        </p:spPr>
+        <p:txBody>
+          <a:bodyPr wrap="square" lIns="0" tIns="0" rIns="0" bIns="0" rtlCol="0" anchor="t"/>
+          <a:lstStyle/>
+          <a:p>
+            <a:pPr indent="0" marL="0">
+              <a:buNone/>
+            </a:pPr>
+            <a:r>
+              <a:rPr lang="en-US" sz="3400" b="1" dirty="0">
                 <a:solidFill>
                   <a:schemeClr val="tx1"/>
                 </a:solidFill>
               </a:rPr>
               <a:t>10+</a:t>
             </a:r>
-            <a:endParaRPr lang="en-US" sz="4000" dirty="0"/>
+            <a:endParaRPr lang="en-US" sz="3400" dirty="0"/>
           </a:p>
         </p:txBody>
       </p:sp>
       <p:sp>
         <p:nvSpPr>
-          <p:cNvPr id="14" name="adopt-3-label"/>
+          <p:cNvPr id="19" name="adopt-3-desc"/>
           <p:cNvSpPr txBox="1"/>
           <p:nvPr/>
         </p:nvSpPr>
         <p:spPr>
           <a:xfrm>
-            <a:off x="9303791" y="2286000"/>
-            <a:ext cx="2110664" cy="685800"/>
+            <a:off x="9276359" y="2514600"/>
+            <a:ext cx="2165528" cy="365760"/>
           </a:xfrm>
           <a:prstGeom prst="rect">
             <a:avLst/>
@@ -5997,26 +6304,84 @@
               <a:buNone/>
             </a:pPr>
             <a:r>
-              <a:rPr lang="en-US" sz="1300" dirty="0">
+              <a:rPr lang="en-US" sz="1200" dirty="0">
                 <a:solidFill>
                   <a:schemeClr val="tx2"/>
                 </a:solidFill>
               </a:rPr>
-              <a:t>dashboards updated every day by risk owners</a:t>
-            </a:r>
-            <a:endParaRPr lang="en-US" sz="1300" dirty="0"/>
+              <a:t>Maintained continuously by risk owners</a:t>
+            </a:r>
+            <a:endParaRPr lang="en-US" sz="1200" dirty="0"/>
+          </a:p>
+        </p:txBody>
+      </p:sp>
+      <p:sp>
+        <p:nvSpPr>
+          <p:cNvPr id="20" name="trend-card"/>
+          <p:cNvSpPr/>
+          <p:nvPr/>
+        </p:nvSpPr>
+        <p:spPr>
+          <a:xfrm>
+            <a:off x="548640" y="3200400"/>
+            <a:ext cx="6583680" cy="3246120"/>
+          </a:xfrm>
+          <a:prstGeom prst="roundRect">
+            <a:avLst>
+              <a:gd name="adj" fmla="val 3380"/>
+            </a:avLst>
+          </a:prstGeom>
+          <a:solidFill>
+            <a:schemeClr val="bg1"/>
+          </a:solidFill>
+          <a:ln/>
+        </p:spPr>
+      </p:sp>
+      <p:sp>
+        <p:nvSpPr>
+          <p:cNvPr id="21" name="trend-title"/>
+          <p:cNvSpPr txBox="1"/>
+          <p:nvPr/>
+        </p:nvSpPr>
+        <p:spPr>
+          <a:xfrm>
+            <a:off x="777240" y="3310128"/>
+            <a:ext cx="6126480" cy="274320"/>
+          </a:xfrm>
+          <a:prstGeom prst="rect">
+            <a:avLst/>
+          </a:prstGeom>
+          <a:noFill/>
+          <a:ln/>
+        </p:spPr>
+        <p:txBody>
+          <a:bodyPr wrap="square" lIns="0" tIns="0" rIns="0" bIns="0" rtlCol="0" anchor="t"/>
+          <a:lstStyle/>
+          <a:p>
+            <a:pPr indent="0" marL="0">
+              <a:buNone/>
+            </a:pPr>
+            <a:r>
+              <a:rPr lang="en-US" sz="1100" b="1" spc="100" kern="0" dirty="0">
+                <a:solidFill>
+                  <a:schemeClr val="tx1"/>
+                </a:solidFill>
+              </a:rPr>
+              <a:t>MONTHLY UNIQUE USERS TREND</a:t>
+            </a:r>
+            <a:endParaRPr lang="en-US" sz="1100" dirty="0"/>
           </a:p>
         </p:txBody>
       </p:sp>
       <p:graphicFrame>
         <p:nvGraphicFramePr>
-          <p:cNvPr id="15" name="users-by-site" descr=""/>
+          <p:cNvPr id="22" name="users-trend" descr=""/>
           <p:cNvGraphicFramePr/>
           <p:nvPr/>
         </p:nvGraphicFramePr>
         <p:xfrm>
-          <a:off x="548640" y="3337560"/>
-          <a:ext cx="6949440" cy="3063240"/>
+          <a:off x="640080" y="3611880"/>
+          <a:ext cx="6400800" cy="2560320"/>
         </p:xfrm>
         <a:graphic xmlns:a="http://schemas.openxmlformats.org/drawingml/2006/main">
           <a:graphicData uri="http://schemas.openxmlformats.org/drawingml/2006/chart">
@@ -6026,36 +6391,14 @@
       </p:graphicFrame>
       <p:sp>
         <p:nvSpPr>
-          <p:cNvPr id="16" name="adopt-why"/>
-          <p:cNvSpPr/>
-          <p:nvPr/>
-        </p:nvSpPr>
-        <p:spPr>
-          <a:xfrm>
-            <a:off x="7863840" y="3337560"/>
-            <a:ext cx="3776472" cy="3063240"/>
-          </a:xfrm>
-          <a:prstGeom prst="roundRect">
-            <a:avLst>
-              <a:gd name="adj" fmla="val 3582"/>
-            </a:avLst>
-          </a:prstGeom>
-          <a:solidFill>
-            <a:schemeClr val="tx1"/>
-          </a:solidFill>
-          <a:ln/>
-        </p:spPr>
-      </p:sp>
-      <p:sp>
-        <p:nvSpPr>
-          <p:cNvPr id="17" name="adopt-why-text"/>
+          <p:cNvPr id="23" name="trend-caption"/>
           <p:cNvSpPr txBox="1"/>
           <p:nvPr/>
         </p:nvSpPr>
         <p:spPr>
           <a:xfrm>
-            <a:off x="8092440" y="3566160"/>
-            <a:ext cx="3319272" cy="2606040"/>
+            <a:off x="777240" y="6172200"/>
+            <a:ext cx="6126480" cy="228600"/>
           </a:xfrm>
           <a:prstGeom prst="rect">
             <a:avLst/>
@@ -6071,42 +6414,254 @@
               <a:buNone/>
             </a:pPr>
             <a:r>
-              <a:rPr lang="en-US" sz="1800" b="1" dirty="0">
+              <a:rPr lang="en-US" sz="1000" i="1" dirty="0">
                 <a:solidFill>
-                  <a:schemeClr val="bg1"/>
+                  <a:schemeClr val="tx2"/>
                 </a:solidFill>
               </a:rPr>
-              <a:t>Why it had to be done right</a:t>
-            </a:r>
-            <a:endParaRPr lang="en-US" sz="1800" dirty="0"/>
-          </a:p>
+              <a:t>Approximate monthly values, read from the ERM usage chart</a:t>
+            </a:r>
+            <a:endParaRPr lang="en-US" sz="1000" dirty="0"/>
+          </a:p>
+        </p:txBody>
+      </p:sp>
+      <p:sp>
+        <p:nvSpPr>
+          <p:cNvPr id="24" name="loc-card"/>
+          <p:cNvSpPr/>
+          <p:nvPr/>
+        </p:nvSpPr>
+        <p:spPr>
+          <a:xfrm>
+            <a:off x="7406640" y="3200400"/>
+            <a:ext cx="4233672" cy="3246120"/>
+          </a:xfrm>
+          <a:prstGeom prst="roundRect">
+            <a:avLst>
+              <a:gd name="adj" fmla="val 3380"/>
+            </a:avLst>
+          </a:prstGeom>
+          <a:solidFill>
+            <a:schemeClr val="bg1"/>
+          </a:solidFill>
+          <a:ln/>
+        </p:spPr>
+      </p:sp>
+      <p:sp>
+        <p:nvSpPr>
+          <p:cNvPr id="25" name="loc-title"/>
+          <p:cNvSpPr txBox="1"/>
+          <p:nvPr/>
+        </p:nvSpPr>
+        <p:spPr>
+          <a:xfrm>
+            <a:off x="7635240" y="3310128"/>
+            <a:ext cx="3840480" cy="274320"/>
+          </a:xfrm>
+          <a:prstGeom prst="rect">
+            <a:avLst/>
+          </a:prstGeom>
+          <a:noFill/>
+          <a:ln/>
+        </p:spPr>
+        <p:txBody>
+          <a:bodyPr wrap="square" lIns="0" tIns="0" rIns="0" bIns="0" rtlCol="0" anchor="t"/>
+          <a:lstStyle/>
           <a:p>
             <a:pPr indent="0" marL="0">
               <a:buNone/>
             </a:pPr>
             <a:r>
-              <a:rPr lang="en-US" sz="800" dirty="0">
+              <a:rPr lang="en-US" sz="1100" b="1" spc="100" kern="0" dirty="0">
                 <a:solidFill>
-                  <a:srgbClr val="000000"/>
+                  <a:schemeClr val="tx1"/>
                 </a:solidFill>
               </a:rPr>
-              <a:t> </a:t>
-            </a:r>
-            <a:endParaRPr lang="en-US" sz="1800" dirty="0"/>
-          </a:p>
+              <a:t>LOCATION PROFILE: GLOBAL MULTI-SITE USE</a:t>
+            </a:r>
+            <a:endParaRPr lang="en-US" sz="1100" dirty="0"/>
+          </a:p>
+        </p:txBody>
+      </p:sp>
+      <p:sp>
+        <p:nvSpPr>
+          <p:cNvPr id="26" name="loc-intro"/>
+          <p:cNvSpPr txBox="1"/>
+          <p:nvPr/>
+        </p:nvSpPr>
+        <p:spPr>
+          <a:xfrm>
+            <a:off x="7635240" y="3657600"/>
+            <a:ext cx="3840480" cy="320040"/>
+          </a:xfrm>
+          <a:prstGeom prst="rect">
+            <a:avLst/>
+          </a:prstGeom>
+          <a:noFill/>
+          <a:ln/>
+        </p:spPr>
+        <p:txBody>
+          <a:bodyPr wrap="square" lIns="0" tIns="0" rIns="0" bIns="0" rtlCol="0" anchor="t"/>
+          <a:lstStyle/>
           <a:p>
             <a:pPr indent="0" marL="0">
               <a:buNone/>
             </a:pPr>
             <a:r>
-              <a:rPr lang="en-US" sz="1400" dirty="0">
+              <a:rPr lang="en-US" sz="1300" dirty="0">
                 <a:solidFill>
-                  <a:schemeClr val="accent5"/>
+                  <a:schemeClr val="tx2"/>
                 </a:solidFill>
               </a:rPr>
-              <a:t>ERM is part of how Airbus manages risk. A migration that broke a feature would disrupt reporting for hundreds of risk managers across sites.</a:t>
-            </a:r>
-            <a:endParaRPr lang="en-US" sz="1800" dirty="0"/>
+              <a:t>Usage spans countries and engineering campuses:</a:t>
+            </a:r>
+            <a:endParaRPr lang="en-US" sz="1300" dirty="0"/>
+          </a:p>
+        </p:txBody>
+      </p:sp>
+      <p:sp>
+        <p:nvSpPr>
+          <p:cNvPr id="27" name="loc-list"/>
+          <p:cNvSpPr txBox="1"/>
+          <p:nvPr/>
+        </p:nvSpPr>
+        <p:spPr>
+          <a:xfrm>
+            <a:off x="7635240" y="4069080"/>
+            <a:ext cx="3840480" cy="2240280"/>
+          </a:xfrm>
+          <a:prstGeom prst="rect">
+            <a:avLst/>
+          </a:prstGeom>
+          <a:noFill/>
+          <a:ln/>
+        </p:spPr>
+        <p:txBody>
+          <a:bodyPr wrap="square" lIns="0" tIns="0" rIns="0" bIns="0" rtlCol="0" anchor="t"/>
+          <a:lstStyle/>
+          <a:p>
+            <a:pPr indent="0" marL="0">
+              <a:buNone/>
+            </a:pPr>
+            <a:r>
+              <a:rPr lang="en-US" sz="1300" b="1" dirty="0">
+                <a:solidFill>
+                  <a:schemeClr val="tx1"/>
+                </a:solidFill>
+              </a:rPr>
+              <a:t>France</a:t>
+            </a:r>
+            <a:endParaRPr lang="en-US" sz="1300" dirty="0"/>
+          </a:p>
+          <a:p>
+            <a:pPr indent="0" marL="0">
+              <a:spcAft>
+                <a:spcPts val="800"/>
+              </a:spcAft>
+              <a:buNone/>
+            </a:pPr>
+            <a:r>
+              <a:rPr lang="en-US" sz="1300" dirty="0">
+                <a:solidFill>
+                  <a:schemeClr val="tx2"/>
+                </a:solidFill>
+              </a:rPr>
+              <a:t>Blagnac Wings Campus (271 users), Saint-Martin (43)</a:t>
+            </a:r>
+            <a:endParaRPr lang="en-US" sz="1300" dirty="0"/>
+          </a:p>
+          <a:p>
+            <a:pPr indent="0" marL="0">
+              <a:buNone/>
+            </a:pPr>
+            <a:r>
+              <a:rPr lang="en-US" sz="1300" b="1" dirty="0">
+                <a:solidFill>
+                  <a:schemeClr val="tx1"/>
+                </a:solidFill>
+              </a:rPr>
+              <a:t>Germany</a:t>
+            </a:r>
+            <a:endParaRPr lang="en-US" sz="1300" dirty="0"/>
+          </a:p>
+          <a:p>
+            <a:pPr indent="0" marL="0">
+              <a:spcAft>
+                <a:spcPts val="800"/>
+              </a:spcAft>
+              <a:buNone/>
+            </a:pPr>
+            <a:r>
+              <a:rPr lang="en-US" sz="1300" dirty="0">
+                <a:solidFill>
+                  <a:schemeClr val="tx2"/>
+                </a:solidFill>
+              </a:rPr>
+              <a:t>Hamburg Finkenwerder (205 users)</a:t>
+            </a:r>
+            <a:endParaRPr lang="en-US" sz="1300" dirty="0"/>
+          </a:p>
+          <a:p>
+            <a:pPr indent="0" marL="0">
+              <a:buNone/>
+            </a:pPr>
+            <a:r>
+              <a:rPr lang="en-US" sz="1300" b="1" dirty="0">
+                <a:solidFill>
+                  <a:schemeClr val="tx1"/>
+                </a:solidFill>
+              </a:rPr>
+              <a:t>United Kingdom</a:t>
+            </a:r>
+            <a:endParaRPr lang="en-US" sz="1300" dirty="0"/>
+          </a:p>
+          <a:p>
+            <a:pPr indent="0" marL="0">
+              <a:spcAft>
+                <a:spcPts val="800"/>
+              </a:spcAft>
+              <a:buNone/>
+            </a:pPr>
+            <a:r>
+              <a:rPr lang="en-US" sz="1300" dirty="0">
+                <a:solidFill>
+                  <a:schemeClr val="tx2"/>
+                </a:solidFill>
+              </a:rPr>
+              <a:t>Broughton (32 users), Filton (26)</a:t>
+            </a:r>
+            <a:endParaRPr lang="en-US" sz="1300" dirty="0"/>
+          </a:p>
+          <a:p>
+            <a:pPr indent="0" marL="0">
+              <a:buNone/>
+            </a:pPr>
+            <a:r>
+              <a:rPr lang="en-US" sz="1300" b="1" dirty="0">
+                <a:solidFill>
+                  <a:schemeClr val="tx1"/>
+                </a:solidFill>
+              </a:rPr>
+              <a:t>Spain and international</a:t>
+            </a:r>
+            <a:endParaRPr lang="en-US" sz="1300" dirty="0"/>
+          </a:p>
+          <a:p>
+            <a:pPr indent="0" marL="0">
+              <a:spcAft>
+                <a:spcPts val="800"/>
+              </a:spcAft>
+              <a:buNone/>
+            </a:pPr>
+            <a:r>
+              <a:rPr lang="en-US" sz="1300" dirty="0">
+                <a:solidFill>
+                  <a:schemeClr val="tx2"/>
+                </a:solidFill>
+              </a:rPr>
+              <a:t>Getafe (25 users), Mirabel Canada (12), Bangalore India (7)</a:t>
+            </a:r>
+            <a:endParaRPr lang="en-US" sz="1300" dirty="0"/>
           </a:p>
         </p:txBody>
       </p:sp>
@@ -6127,7 +6682,7 @@
               <p:cTn id="2" dur="indefinite" nodeType="mainSeq">
                 <p:childTnLst>
                   <p:par>
-                    <p:cTn id="54" fill="hold">
+                    <p:cTn id="86" fill="hold">
                       <p:stCondLst>
                         <p:cond delay="indefinite"/>
                         <p:cond evt="onBegin" delay="0">
@@ -6136,7 +6691,7 @@
                       </p:stCondLst>
                       <p:childTnLst>
                         <p:par>
-                          <p:cTn id="12" fill="hold">
+                          <p:cTn id="6" fill="hold">
                             <p:stCondLst>
                               <p:cond delay="0"/>
                             </p:stCondLst>
@@ -6176,93 +6731,93 @@
                                   </p:childTnLst>
                                 </p:cTn>
                               </p:par>
-                              <p:par>
-                                <p:cTn id="6" presetID="10" presetClass="entr" presetSubtype="0" fill="hold" grpId="0" nodeType="withEffect">
-                                  <p:stCondLst>
-                                    <p:cond delay="0"/>
-                                  </p:stCondLst>
-                                  <p:childTnLst>
-                                    <p:set>
-                                      <p:cBhvr>
-                                        <p:cTn id="7" dur="1" fill="hold">
-                                          <p:stCondLst>
-                                            <p:cond delay="0"/>
-                                          </p:stCondLst>
-                                        </p:cTn>
-                                        <p:tgtEl>
-                                          <p:spTgt spid="4"/>
-                                        </p:tgtEl>
-                                        <p:attrNameLst>
-                                          <p:attrName>style.visibility</p:attrName>
-                                        </p:attrNameLst>
-                                      </p:cBhvr>
-                                      <p:to>
-                                        <p:strVal val="visible"/>
-                                      </p:to>
-                                    </p:set>
-                                    <p:animEffect transition="in" filter="fade">
-                                      <p:cBhvr>
-                                        <p:cTn id="8" dur="450"/>
-                                        <p:tgtEl>
-                                          <p:spTgt spid="4"/>
-                                        </p:tgtEl>
-                                      </p:cBhvr>
-                                    </p:animEffect>
-                                  </p:childTnLst>
-                                </p:cTn>
-                              </p:par>
-                              <p:par>
-                                <p:cTn id="9" presetID="10" presetClass="entr" presetSubtype="0" fill="hold" grpId="0" nodeType="withEffect">
-                                  <p:stCondLst>
-                                    <p:cond delay="0"/>
-                                  </p:stCondLst>
-                                  <p:childTnLst>
-                                    <p:set>
-                                      <p:cBhvr>
-                                        <p:cTn id="10" dur="1" fill="hold">
-                                          <p:stCondLst>
-                                            <p:cond delay="0"/>
-                                          </p:stCondLst>
-                                        </p:cTn>
-                                        <p:tgtEl>
-                                          <p:spTgt spid="5"/>
-                                        </p:tgtEl>
-                                        <p:attrNameLst>
-                                          <p:attrName>style.visibility</p:attrName>
-                                        </p:attrNameLst>
-                                      </p:cBhvr>
-                                      <p:to>
-                                        <p:strVal val="visible"/>
-                                      </p:to>
-                                    </p:set>
-                                    <p:animEffect transition="in" filter="fade">
-                                      <p:cBhvr>
-                                        <p:cTn id="11" dur="450"/>
-                                        <p:tgtEl>
-                                          <p:spTgt spid="5"/>
-                                        </p:tgtEl>
-                                      </p:cBhvr>
-                                    </p:animEffect>
-                                  </p:childTnLst>
-                                </p:cTn>
-                              </p:par>
                             </p:childTnLst>
                           </p:cTn>
                         </p:par>
                         <p:par>
-                          <p:cTn id="22" fill="hold">
+                          <p:cTn id="19" fill="hold">
                             <p:stCondLst>
-                              <p:cond delay="450"/>
+                              <p:cond delay="400"/>
                             </p:stCondLst>
                             <p:childTnLst>
                               <p:par>
-                                <p:cTn id="13" presetID="10" presetClass="entr" presetSubtype="0" fill="hold" grpId="0" nodeType="afterEffect">
+                                <p:cTn id="7" presetID="10" presetClass="entr" presetSubtype="0" fill="hold" grpId="0" nodeType="afterEffect">
                                   <p:stCondLst>
                                     <p:cond delay="0"/>
                                   </p:stCondLst>
                                   <p:childTnLst>
                                     <p:set>
                                       <p:cBhvr>
+                                        <p:cTn id="8" dur="1" fill="hold">
+                                          <p:stCondLst>
+                                            <p:cond delay="0"/>
+                                          </p:stCondLst>
+                                        </p:cTn>
+                                        <p:tgtEl>
+                                          <p:spTgt spid="4"/>
+                                        </p:tgtEl>
+                                        <p:attrNameLst>
+                                          <p:attrName>style.visibility</p:attrName>
+                                        </p:attrNameLst>
+                                      </p:cBhvr>
+                                      <p:to>
+                                        <p:strVal val="visible"/>
+                                      </p:to>
+                                    </p:set>
+                                    <p:animEffect transition="in" filter="fade">
+                                      <p:cBhvr>
+                                        <p:cTn id="9" dur="450"/>
+                                        <p:tgtEl>
+                                          <p:spTgt spid="4"/>
+                                        </p:tgtEl>
+                                      </p:cBhvr>
+                                    </p:animEffect>
+                                  </p:childTnLst>
+                                </p:cTn>
+                              </p:par>
+                              <p:par>
+                                <p:cTn id="10" presetID="10" presetClass="entr" presetSubtype="0" fill="hold" grpId="0" nodeType="withEffect">
+                                  <p:stCondLst>
+                                    <p:cond delay="0"/>
+                                  </p:stCondLst>
+                                  <p:childTnLst>
+                                    <p:set>
+                                      <p:cBhvr>
+                                        <p:cTn id="11" dur="1" fill="hold">
+                                          <p:stCondLst>
+                                            <p:cond delay="0"/>
+                                          </p:stCondLst>
+                                        </p:cTn>
+                                        <p:tgtEl>
+                                          <p:spTgt spid="5"/>
+                                        </p:tgtEl>
+                                        <p:attrNameLst>
+                                          <p:attrName>style.visibility</p:attrName>
+                                        </p:attrNameLst>
+                                      </p:cBhvr>
+                                      <p:to>
+                                        <p:strVal val="visible"/>
+                                      </p:to>
+                                    </p:set>
+                                    <p:animEffect transition="in" filter="fade">
+                                      <p:cBhvr>
+                                        <p:cTn id="12" dur="450"/>
+                                        <p:tgtEl>
+                                          <p:spTgt spid="5"/>
+                                        </p:tgtEl>
+                                      </p:cBhvr>
+                                    </p:animEffect>
+                                  </p:childTnLst>
+                                </p:cTn>
+                              </p:par>
+                              <p:par>
+                                <p:cTn id="13" presetID="10" presetClass="entr" presetSubtype="0" fill="hold" grpId="0" nodeType="withEffect">
+                                  <p:stCondLst>
+                                    <p:cond delay="0"/>
+                                  </p:stCondLst>
+                                  <p:childTnLst>
+                                    <p:set>
+                                      <p:cBhvr>
                                         <p:cTn id="14" dur="1" fill="hold">
                                           <p:stCondLst>
                                             <p:cond delay="0"/>
@@ -6319,41 +6874,6 @@
                                         <p:cTn id="18" dur="450"/>
                                         <p:tgtEl>
                                           <p:spTgt spid="7"/>
-                                        </p:tgtEl>
-                                      </p:cBhvr>
-                                    </p:animEffect>
-                                  </p:childTnLst>
-                                </p:cTn>
-                              </p:par>
-                              <p:par>
-                                <p:cTn id="19" presetID="10" presetClass="entr" presetSubtype="0" fill="hold" grpId="0" nodeType="withEffect">
-                                  <p:stCondLst>
-                                    <p:cond delay="0"/>
-                                  </p:stCondLst>
-                                  <p:childTnLst>
-                                    <p:set>
-                                      <p:cBhvr>
-                                        <p:cTn id="20" dur="1" fill="hold">
-                                          <p:stCondLst>
-                                            <p:cond delay="0"/>
-                                          </p:stCondLst>
-                                        </p:cTn>
-                                        <p:tgtEl>
-                                          <p:spTgt spid="8"/>
-                                        </p:tgtEl>
-                                        <p:attrNameLst>
-                                          <p:attrName>style.visibility</p:attrName>
-                                        </p:attrNameLst>
-                                      </p:cBhvr>
-                                      <p:to>
-                                        <p:strVal val="visible"/>
-                                      </p:to>
-                                    </p:set>
-                                    <p:animEffect transition="in" filter="fade">
-                                      <p:cBhvr>
-                                        <p:cTn id="21" dur="450"/>
-                                        <p:tgtEl>
-                                          <p:spTgt spid="8"/>
                                         </p:tgtEl>
                                       </p:cBhvr>
                                     </p:animEffect>
@@ -6366,11 +6886,46 @@
                         <p:par>
                           <p:cTn id="32" fill="hold">
                             <p:stCondLst>
-                              <p:cond delay="900"/>
+                              <p:cond delay="800"/>
                             </p:stCondLst>
                             <p:childTnLst>
                               <p:par>
-                                <p:cTn id="23" presetID="10" presetClass="entr" presetSubtype="0" fill="hold" grpId="0" nodeType="afterEffect">
+                                <p:cTn id="20" presetID="10" presetClass="entr" presetSubtype="0" fill="hold" grpId="0" nodeType="afterEffect">
+                                  <p:stCondLst>
+                                    <p:cond delay="0"/>
+                                  </p:stCondLst>
+                                  <p:childTnLst>
+                                    <p:set>
+                                      <p:cBhvr>
+                                        <p:cTn id="21" dur="1" fill="hold">
+                                          <p:stCondLst>
+                                            <p:cond delay="0"/>
+                                          </p:stCondLst>
+                                        </p:cTn>
+                                        <p:tgtEl>
+                                          <p:spTgt spid="8"/>
+                                        </p:tgtEl>
+                                        <p:attrNameLst>
+                                          <p:attrName>style.visibility</p:attrName>
+                                        </p:attrNameLst>
+                                      </p:cBhvr>
+                                      <p:to>
+                                        <p:strVal val="visible"/>
+                                      </p:to>
+                                    </p:set>
+                                    <p:animEffect transition="in" filter="fade">
+                                      <p:cBhvr>
+                                        <p:cTn id="22" dur="450"/>
+                                        <p:tgtEl>
+                                          <p:spTgt spid="8"/>
+                                        </p:tgtEl>
+                                      </p:cBhvr>
+                                    </p:animEffect>
+                                  </p:childTnLst>
+                                </p:cTn>
+                              </p:par>
+                              <p:par>
+                                <p:cTn id="23" presetID="10" presetClass="entr" presetSubtype="0" fill="hold" grpId="0" nodeType="withEffect">
                                   <p:stCondLst>
                                     <p:cond delay="0"/>
                                   </p:stCondLst>
@@ -6478,9 +7033,9 @@
                           </p:cTn>
                         </p:par>
                         <p:par>
-                          <p:cTn id="42" fill="hold">
+                          <p:cTn id="45" fill="hold">
                             <p:stCondLst>
-                              <p:cond delay="1350"/>
+                              <p:cond delay="1200"/>
                             </p:stCondLst>
                             <p:childTnLst>
                               <p:par>
@@ -6582,6 +7137,41 @@
                                         <p:cTn id="41" dur="450"/>
                                         <p:tgtEl>
                                           <p:spTgt spid="14"/>
+                                        </p:tgtEl>
+                                      </p:cBhvr>
+                                    </p:animEffect>
+                                  </p:childTnLst>
+                                </p:cTn>
+                              </p:par>
+                              <p:par>
+                                <p:cTn id="42" presetID="10" presetClass="entr" presetSubtype="0" fill="hold" grpId="0" nodeType="withEffect">
+                                  <p:stCondLst>
+                                    <p:cond delay="0"/>
+                                  </p:stCondLst>
+                                  <p:childTnLst>
+                                    <p:set>
+                                      <p:cBhvr>
+                                        <p:cTn id="43" dur="1" fill="hold">
+                                          <p:stCondLst>
+                                            <p:cond delay="0"/>
+                                          </p:stCondLst>
+                                        </p:cTn>
+                                        <p:tgtEl>
+                                          <p:spTgt spid="15"/>
+                                        </p:tgtEl>
+                                        <p:attrNameLst>
+                                          <p:attrName>style.visibility</p:attrName>
+                                        </p:attrNameLst>
+                                      </p:cBhvr>
+                                      <p:to>
+                                        <p:strVal val="visible"/>
+                                      </p:to>
+                                    </p:set>
+                                    <p:animEffect transition="in" filter="fade">
+                                      <p:cBhvr>
+                                        <p:cTn id="44" dur="450"/>
+                                        <p:tgtEl>
+                                          <p:spTgt spid="15"/>
                                         </p:tgtEl>
                                       </p:cBhvr>
                                     </p:animEffect>
@@ -6592,40 +7182,145 @@
                           </p:cTn>
                         </p:par>
                         <p:par>
-                          <p:cTn id="46" fill="hold">
+                          <p:cTn id="58" fill="hold">
                             <p:stCondLst>
-                              <p:cond delay="1800"/>
+                              <p:cond delay="1600"/>
                             </p:stCondLst>
                             <p:childTnLst>
                               <p:par>
-                                <p:cTn id="43" presetID="22" presetClass="entr" presetSubtype="8" fill="hold" grpId="0" nodeType="afterEffect">
+                                <p:cTn id="46" presetID="10" presetClass="entr" presetSubtype="0" fill="hold" grpId="0" nodeType="afterEffect">
                                   <p:stCondLst>
                                     <p:cond delay="0"/>
                                   </p:stCondLst>
                                   <p:childTnLst>
                                     <p:set>
                                       <p:cBhvr>
-                                        <p:cTn id="44" dur="1" fill="hold">
-                                          <p:stCondLst>
-                                            <p:cond delay="0"/>
-                                          </p:stCondLst>
-                                        </p:cTn>
-                                        <p:tgtEl>
-                                          <p:spTgt spid="15"/>
-                                        </p:tgtEl>
-                                        <p:attrNameLst>
-                                          <p:attrName>style.visibility</p:attrName>
-                                        </p:attrNameLst>
-                                      </p:cBhvr>
-                                      <p:to>
-                                        <p:strVal val="visible"/>
-                                      </p:to>
-                                    </p:set>
-                                    <p:animEffect transition="in" filter="wipe(left)">
-                                      <p:cBhvr>
-                                        <p:cTn id="45" dur="450"/>
-                                        <p:tgtEl>
-                                          <p:spTgt spid="15"/>
+                                        <p:cTn id="47" dur="1" fill="hold">
+                                          <p:stCondLst>
+                                            <p:cond delay="0"/>
+                                          </p:stCondLst>
+                                        </p:cTn>
+                                        <p:tgtEl>
+                                          <p:spTgt spid="16"/>
+                                        </p:tgtEl>
+                                        <p:attrNameLst>
+                                          <p:attrName>style.visibility</p:attrName>
+                                        </p:attrNameLst>
+                                      </p:cBhvr>
+                                      <p:to>
+                                        <p:strVal val="visible"/>
+                                      </p:to>
+                                    </p:set>
+                                    <p:animEffect transition="in" filter="fade">
+                                      <p:cBhvr>
+                                        <p:cTn id="48" dur="450"/>
+                                        <p:tgtEl>
+                                          <p:spTgt spid="16"/>
+                                        </p:tgtEl>
+                                      </p:cBhvr>
+                                    </p:animEffect>
+                                  </p:childTnLst>
+                                </p:cTn>
+                              </p:par>
+                              <p:par>
+                                <p:cTn id="49" presetID="10" presetClass="entr" presetSubtype="0" fill="hold" grpId="0" nodeType="withEffect">
+                                  <p:stCondLst>
+                                    <p:cond delay="0"/>
+                                  </p:stCondLst>
+                                  <p:childTnLst>
+                                    <p:set>
+                                      <p:cBhvr>
+                                        <p:cTn id="50" dur="1" fill="hold">
+                                          <p:stCondLst>
+                                            <p:cond delay="0"/>
+                                          </p:stCondLst>
+                                        </p:cTn>
+                                        <p:tgtEl>
+                                          <p:spTgt spid="17"/>
+                                        </p:tgtEl>
+                                        <p:attrNameLst>
+                                          <p:attrName>style.visibility</p:attrName>
+                                        </p:attrNameLst>
+                                      </p:cBhvr>
+                                      <p:to>
+                                        <p:strVal val="visible"/>
+                                      </p:to>
+                                    </p:set>
+                                    <p:animEffect transition="in" filter="fade">
+                                      <p:cBhvr>
+                                        <p:cTn id="51" dur="450"/>
+                                        <p:tgtEl>
+                                          <p:spTgt spid="17"/>
+                                        </p:tgtEl>
+                                      </p:cBhvr>
+                                    </p:animEffect>
+                                  </p:childTnLst>
+                                </p:cTn>
+                              </p:par>
+                              <p:par>
+                                <p:cTn id="52" presetID="10" presetClass="entr" presetSubtype="0" fill="hold" grpId="0" nodeType="withEffect">
+                                  <p:stCondLst>
+                                    <p:cond delay="0"/>
+                                  </p:stCondLst>
+                                  <p:childTnLst>
+                                    <p:set>
+                                      <p:cBhvr>
+                                        <p:cTn id="53" dur="1" fill="hold">
+                                          <p:stCondLst>
+                                            <p:cond delay="0"/>
+                                          </p:stCondLst>
+                                        </p:cTn>
+                                        <p:tgtEl>
+                                          <p:spTgt spid="18"/>
+                                        </p:tgtEl>
+                                        <p:attrNameLst>
+                                          <p:attrName>style.visibility</p:attrName>
+                                        </p:attrNameLst>
+                                      </p:cBhvr>
+                                      <p:to>
+                                        <p:strVal val="visible"/>
+                                      </p:to>
+                                    </p:set>
+                                    <p:animEffect transition="in" filter="fade">
+                                      <p:cBhvr>
+                                        <p:cTn id="54" dur="450"/>
+                                        <p:tgtEl>
+                                          <p:spTgt spid="18"/>
+                                        </p:tgtEl>
+                                      </p:cBhvr>
+                                    </p:animEffect>
+                                  </p:childTnLst>
+                                </p:cTn>
+                              </p:par>
+                              <p:par>
+                                <p:cTn id="55" presetID="10" presetClass="entr" presetSubtype="0" fill="hold" grpId="0" nodeType="withEffect">
+                                  <p:stCondLst>
+                                    <p:cond delay="0"/>
+                                  </p:stCondLst>
+                                  <p:childTnLst>
+                                    <p:set>
+                                      <p:cBhvr>
+                                        <p:cTn id="56" dur="1" fill="hold">
+                                          <p:stCondLst>
+                                            <p:cond delay="0"/>
+                                          </p:stCondLst>
+                                        </p:cTn>
+                                        <p:tgtEl>
+                                          <p:spTgt spid="19"/>
+                                        </p:tgtEl>
+                                        <p:attrNameLst>
+                                          <p:attrName>style.visibility</p:attrName>
+                                        </p:attrNameLst>
+                                      </p:cBhvr>
+                                      <p:to>
+                                        <p:strVal val="visible"/>
+                                      </p:to>
+                                    </p:set>
+                                    <p:animEffect transition="in" filter="fade">
+                                      <p:cBhvr>
+                                        <p:cTn id="57" dur="450"/>
+                                        <p:tgtEl>
+                                          <p:spTgt spid="19"/>
                                         </p:tgtEl>
                                       </p:cBhvr>
                                     </p:animEffect>
@@ -6636,26 +7331,26 @@
                           </p:cTn>
                         </p:par>
                         <p:par>
-                          <p:cTn id="53" fill="hold">
+                          <p:cTn id="71" fill="hold">
                             <p:stCondLst>
-                              <p:cond delay="2250"/>
+                              <p:cond delay="2000"/>
                             </p:stCondLst>
                             <p:childTnLst>
                               <p:par>
-                                <p:cTn id="47" presetID="10" presetClass="entr" presetSubtype="0" fill="hold" grpId="0" nodeType="afterEffect">
+                                <p:cTn id="59" presetID="10" presetClass="entr" presetSubtype="0" fill="hold" grpId="0" nodeType="afterEffect">
                                   <p:stCondLst>
                                     <p:cond delay="0"/>
                                   </p:stCondLst>
                                   <p:childTnLst>
                                     <p:set>
                                       <p:cBhvr>
-                                        <p:cTn id="48" dur="1" fill="hold">
-                                          <p:stCondLst>
-                                            <p:cond delay="0"/>
-                                          </p:stCondLst>
-                                        </p:cTn>
-                                        <p:tgtEl>
-                                          <p:spTgt spid="16"/>
+                                        <p:cTn id="60" dur="1" fill="hold">
+                                          <p:stCondLst>
+                                            <p:cond delay="0"/>
+                                          </p:stCondLst>
+                                        </p:cTn>
+                                        <p:tgtEl>
+                                          <p:spTgt spid="20"/>
                                         </p:tgtEl>
                                         <p:attrNameLst>
                                           <p:attrName>style.visibility</p:attrName>
@@ -6667,30 +7362,30 @@
                                     </p:set>
                                     <p:animEffect transition="in" filter="fade">
                                       <p:cBhvr>
-                                        <p:cTn id="49" dur="450"/>
-                                        <p:tgtEl>
-                                          <p:spTgt spid="16"/>
-                                        </p:tgtEl>
-                                      </p:cBhvr>
-                                    </p:animEffect>
-                                  </p:childTnLst>
-                                </p:cTn>
-                              </p:par>
-                              <p:par>
-                                <p:cTn id="50" presetID="10" presetClass="entr" presetSubtype="0" fill="hold" grpId="0" nodeType="withEffect">
+                                        <p:cTn id="61" dur="450"/>
+                                        <p:tgtEl>
+                                          <p:spTgt spid="20"/>
+                                        </p:tgtEl>
+                                      </p:cBhvr>
+                                    </p:animEffect>
+                                  </p:childTnLst>
+                                </p:cTn>
+                              </p:par>
+                              <p:par>
+                                <p:cTn id="62" presetID="10" presetClass="entr" presetSubtype="0" fill="hold" grpId="0" nodeType="withEffect">
                                   <p:stCondLst>
                                     <p:cond delay="0"/>
                                   </p:stCondLst>
                                   <p:childTnLst>
                                     <p:set>
                                       <p:cBhvr>
-                                        <p:cTn id="51" dur="1" fill="hold">
-                                          <p:stCondLst>
-                                            <p:cond delay="0"/>
-                                          </p:stCondLst>
-                                        </p:cTn>
-                                        <p:tgtEl>
-                                          <p:spTgt spid="17"/>
+                                        <p:cTn id="63" dur="1" fill="hold">
+                                          <p:stCondLst>
+                                            <p:cond delay="0"/>
+                                          </p:stCondLst>
+                                        </p:cTn>
+                                        <p:tgtEl>
+                                          <p:spTgt spid="21"/>
                                         </p:tgtEl>
                                         <p:attrNameLst>
                                           <p:attrName>style.visibility</p:attrName>
@@ -6702,9 +7397,237 @@
                                     </p:set>
                                     <p:animEffect transition="in" filter="fade">
                                       <p:cBhvr>
-                                        <p:cTn id="52" dur="450"/>
-                                        <p:tgtEl>
-                                          <p:spTgt spid="17"/>
+                                        <p:cTn id="64" dur="450"/>
+                                        <p:tgtEl>
+                                          <p:spTgt spid="21"/>
+                                        </p:tgtEl>
+                                      </p:cBhvr>
+                                    </p:animEffect>
+                                  </p:childTnLst>
+                                </p:cTn>
+                              </p:par>
+                              <p:par>
+                                <p:cTn id="65" presetID="10" presetClass="entr" presetSubtype="0" fill="hold" grpId="0" nodeType="withEffect">
+                                  <p:stCondLst>
+                                    <p:cond delay="0"/>
+                                  </p:stCondLst>
+                                  <p:childTnLst>
+                                    <p:set>
+                                      <p:cBhvr>
+                                        <p:cTn id="66" dur="1" fill="hold">
+                                          <p:stCondLst>
+                                            <p:cond delay="0"/>
+                                          </p:stCondLst>
+                                        </p:cTn>
+                                        <p:tgtEl>
+                                          <p:spTgt spid="23"/>
+                                        </p:tgtEl>
+                                        <p:attrNameLst>
+                                          <p:attrName>style.visibility</p:attrName>
+                                        </p:attrNameLst>
+                                      </p:cBhvr>
+                                      <p:to>
+                                        <p:strVal val="visible"/>
+                                      </p:to>
+                                    </p:set>
+                                    <p:animEffect transition="in" filter="fade">
+                                      <p:cBhvr>
+                                        <p:cTn id="67" dur="450"/>
+                                        <p:tgtEl>
+                                          <p:spTgt spid="23"/>
+                                        </p:tgtEl>
+                                      </p:cBhvr>
+                                    </p:animEffect>
+                                  </p:childTnLst>
+                                </p:cTn>
+                              </p:par>
+                              <p:par>
+                                <p:cTn id="68" presetID="22" presetClass="entr" presetSubtype="8" fill="hold" grpId="0" nodeType="withEffect">
+                                  <p:stCondLst>
+                                    <p:cond delay="200"/>
+                                  </p:stCondLst>
+                                  <p:childTnLst>
+                                    <p:set>
+                                      <p:cBhvr>
+                                        <p:cTn id="69" dur="1" fill="hold">
+                                          <p:stCondLst>
+                                            <p:cond delay="0"/>
+                                          </p:stCondLst>
+                                        </p:cTn>
+                                        <p:tgtEl>
+                                          <p:spTgt spid="22"/>
+                                        </p:tgtEl>
+                                        <p:attrNameLst>
+                                          <p:attrName>style.visibility</p:attrName>
+                                        </p:attrNameLst>
+                                      </p:cBhvr>
+                                      <p:to>
+                                        <p:strVal val="visible"/>
+                                      </p:to>
+                                    </p:set>
+                                    <p:animEffect transition="in" filter="wipe(left)">
+                                      <p:cBhvr>
+                                        <p:cTn id="70" dur="450"/>
+                                        <p:tgtEl>
+                                          <p:spTgt spid="22"/>
+                                        </p:tgtEl>
+                                      </p:cBhvr>
+                                    </p:animEffect>
+                                  </p:childTnLst>
+                                </p:cTn>
+                              </p:par>
+                            </p:childTnLst>
+                          </p:cTn>
+                        </p:par>
+                        <p:par>
+                          <p:cTn id="81" fill="hold">
+                            <p:stCondLst>
+                              <p:cond delay="2400"/>
+                            </p:stCondLst>
+                            <p:childTnLst>
+                              <p:par>
+                                <p:cTn id="72" presetID="10" presetClass="entr" presetSubtype="0" fill="hold" grpId="0" nodeType="afterEffect">
+                                  <p:stCondLst>
+                                    <p:cond delay="0"/>
+                                  </p:stCondLst>
+                                  <p:childTnLst>
+                                    <p:set>
+                                      <p:cBhvr>
+                                        <p:cTn id="73" dur="1" fill="hold">
+                                          <p:stCondLst>
+                                            <p:cond delay="0"/>
+                                          </p:stCondLst>
+                                        </p:cTn>
+                                        <p:tgtEl>
+                                          <p:spTgt spid="24"/>
+                                        </p:tgtEl>
+                                        <p:attrNameLst>
+                                          <p:attrName>style.visibility</p:attrName>
+                                        </p:attrNameLst>
+                                      </p:cBhvr>
+                                      <p:to>
+                                        <p:strVal val="visible"/>
+                                      </p:to>
+                                    </p:set>
+                                    <p:animEffect transition="in" filter="fade">
+                                      <p:cBhvr>
+                                        <p:cTn id="74" dur="450"/>
+                                        <p:tgtEl>
+                                          <p:spTgt spid="24"/>
+                                        </p:tgtEl>
+                                      </p:cBhvr>
+                                    </p:animEffect>
+                                  </p:childTnLst>
+                                </p:cTn>
+                              </p:par>
+                              <p:par>
+                                <p:cTn id="75" presetID="10" presetClass="entr" presetSubtype="0" fill="hold" grpId="0" nodeType="withEffect">
+                                  <p:stCondLst>
+                                    <p:cond delay="0"/>
+                                  </p:stCondLst>
+                                  <p:childTnLst>
+                                    <p:set>
+                                      <p:cBhvr>
+                                        <p:cTn id="76" dur="1" fill="hold">
+                                          <p:stCondLst>
+                                            <p:cond delay="0"/>
+                                          </p:stCondLst>
+                                        </p:cTn>
+                                        <p:tgtEl>
+                                          <p:spTgt spid="25"/>
+                                        </p:tgtEl>
+                                        <p:attrNameLst>
+                                          <p:attrName>style.visibility</p:attrName>
+                                        </p:attrNameLst>
+                                      </p:cBhvr>
+                                      <p:to>
+                                        <p:strVal val="visible"/>
+                                      </p:to>
+                                    </p:set>
+                                    <p:animEffect transition="in" filter="fade">
+                                      <p:cBhvr>
+                                        <p:cTn id="77" dur="450"/>
+                                        <p:tgtEl>
+                                          <p:spTgt spid="25"/>
+                                        </p:tgtEl>
+                                      </p:cBhvr>
+                                    </p:animEffect>
+                                  </p:childTnLst>
+                                </p:cTn>
+                              </p:par>
+                              <p:par>
+                                <p:cTn id="78" presetID="10" presetClass="entr" presetSubtype="0" fill="hold" grpId="0" nodeType="withEffect">
+                                  <p:stCondLst>
+                                    <p:cond delay="0"/>
+                                  </p:stCondLst>
+                                  <p:childTnLst>
+                                    <p:set>
+                                      <p:cBhvr>
+                                        <p:cTn id="79" dur="1" fill="hold">
+                                          <p:stCondLst>
+                                            <p:cond delay="0"/>
+                                          </p:stCondLst>
+                                        </p:cTn>
+                                        <p:tgtEl>
+                                          <p:spTgt spid="26"/>
+                                        </p:tgtEl>
+                                        <p:attrNameLst>
+                                          <p:attrName>style.visibility</p:attrName>
+                                        </p:attrNameLst>
+                                      </p:cBhvr>
+                                      <p:to>
+                                        <p:strVal val="visible"/>
+                                      </p:to>
+                                    </p:set>
+                                    <p:animEffect transition="in" filter="fade">
+                                      <p:cBhvr>
+                                        <p:cTn id="80" dur="450"/>
+                                        <p:tgtEl>
+                                          <p:spTgt spid="26"/>
+                                        </p:tgtEl>
+                                      </p:cBhvr>
+                                    </p:animEffect>
+                                  </p:childTnLst>
+                                </p:cTn>
+                              </p:par>
+                            </p:childTnLst>
+                          </p:cTn>
+                        </p:par>
+                        <p:par>
+                          <p:cTn id="85" fill="hold">
+                            <p:stCondLst>
+                              <p:cond delay="2800"/>
+                            </p:stCondLst>
+                            <p:childTnLst>
+                              <p:par>
+                                <p:cTn id="82" presetID="10" presetClass="entr" presetSubtype="0" fill="hold" grpId="0" nodeType="afterEffect">
+                                  <p:stCondLst>
+                                    <p:cond delay="0"/>
+                                  </p:stCondLst>
+                                  <p:childTnLst>
+                                    <p:set>
+                                      <p:cBhvr>
+                                        <p:cTn id="83" dur="1" fill="hold">
+                                          <p:stCondLst>
+                                            <p:cond delay="0"/>
+                                          </p:stCondLst>
+                                        </p:cTn>
+                                        <p:tgtEl>
+                                          <p:spTgt spid="27"/>
+                                        </p:tgtEl>
+                                        <p:attrNameLst>
+                                          <p:attrName>style.visibility</p:attrName>
+                                        </p:attrNameLst>
+                                      </p:cBhvr>
+                                      <p:to>
+                                        <p:strVal val="visible"/>
+                                      </p:to>
+                                    </p:set>
+                                    <p:animEffect transition="in" filter="fade">
+                                      <p:cBhvr>
+                                        <p:cTn id="84" dur="450"/>
+                                        <p:tgtEl>
+                                          <p:spTgt spid="27"/>
                                         </p:tgtEl>
                                       </p:cBhvr>
                                     </p:animEffect>
@@ -6751,8 +7674,18 @@
       <p:bldP spid="12" grpId="0" animBg="1"/>
       <p:bldP spid="13" grpId="0" animBg="1"/>
       <p:bldP spid="14" grpId="0" animBg="1"/>
+      <p:bldP spid="15" grpId="0" animBg="1"/>
       <p:bldP spid="16" grpId="0" animBg="1"/>
       <p:bldP spid="17" grpId="0" animBg="1"/>
+      <p:bldP spid="18" grpId="0" animBg="1"/>
+      <p:bldP spid="19" grpId="0" animBg="1"/>
+      <p:bldP spid="20" grpId="0" animBg="1"/>
+      <p:bldP spid="21" grpId="0" animBg="1"/>
+      <p:bldP spid="23" grpId="0" animBg="1"/>
+      <p:bldP spid="24" grpId="0" animBg="1"/>
+      <p:bldP spid="25" grpId="0" animBg="1"/>
+      <p:bldP spid="26" grpId="0" animBg="1"/>
+      <p:bldP spid="27" grpId="0" animBg="1"/>
     </p:bldLst>
   </p:timing>
 </p:sld>

--- a/erm-migration/docs/ERM-Migration-Jury-Pitch.pptx
+++ b/erm-migration/docs/ERM-Migration-Jury-Pitch.pptx
@@ -14,9 +14,10 @@
     <p:sldId id="262" r:id="rId8"/>
     <p:sldId id="263" r:id="rId9"/>
     <p:sldId id="264" r:id="rId10"/>
+    <p:sldId id="265" r:id="rId11"/>
   </p:sldIdLst>
   <p:notesMasterIdLst>
-    <p:notesMasterId r:id="rId11"/>
+    <p:notesMasterId r:id="rId12"/>
   </p:notesMasterIdLst>
   <p:sldSz cx="12192000" cy="6858000"/>
   <p:notesSz cx="6858000" cy="12192000"/>
@@ -115,33 +116,34 @@
   <p:extLst>
     <p:ext uri="{521415D9-36F7-43E2-AB2F-B90AF26B5E84}">
       <p14:sectionLst xmlns:p14="http://schemas.microsoft.com/office/powerpoint/2010/main">
-        <p14:section name="Pitch" id="{853be82f-37cb-3071-5236-597c13728fa0}">
+        <p14:section name="Pitch" id="{5a4117e8-c564-181e-71ff-e2b3a13fe395}">
           <p14:sldIdLst>
             <p14:sldId id="256"/>
           </p14:sldIdLst>
         </p14:section>
-        <p14:section name="Context" id="{17addc18-8c97-9952-eb95-4cafef74b56f}">
+        <p14:section name="Context" id="{6f710263-6f10-959d-061e-86330f3866bd}">
           <p14:sldIdLst>
             <p14:sldId id="257"/>
             <p14:sldId id="258"/>
           </p14:sldIdLst>
         </p14:section>
-        <p14:section name="Problem and method" id="{74955835-f259-be5e-e61d-57f972d936e9}">
+        <p14:section name="Problem and method" id="{317d8d76-0c4d-1e5c-cccd-62233d700f44}">
           <p14:sldIdLst>
             <p14:sldId id="259"/>
             <p14:sldId id="260"/>
           </p14:sldIdLst>
         </p14:section>
-        <p14:section name="Impact" id="{0b2bab05-3513-06d5-6bd2-9eae1b80eb52}">
+        <p14:section name="Impact" id="{b638069e-a3e6-45a6-1c19-061f13c9ce07}">
           <p14:sldIdLst>
             <p14:sldId id="261"/>
             <p14:sldId id="262"/>
             <p14:sldId id="263"/>
+            <p14:sldId id="264"/>
           </p14:sldIdLst>
         </p14:section>
-        <p14:section name="Reuse" id="{fc2a2f20-659d-d93f-2168-1df443d0d753}">
+        <p14:section name="Reuse" id="{8e6d4886-642c-f9fe-d047-7681406ce1b6}">
           <p14:sldIdLst>
-            <p14:sldId id="264"/>
+            <p14:sldId id="265"/>
           </p14:sldIdLst>
         </p14:section>
       </p14:sectionLst>
@@ -1005,6 +1007,94 @@
 </p:notes>
 </file>
 
+<file path=ppt/notesSlides/notesSlide10.xml><?xml version="1.0" encoding="utf-8"?>
+<p:notes xmlns:a="http://schemas.openxmlformats.org/drawingml/2006/main" xmlns:r="http://schemas.openxmlformats.org/officeDocument/2006/relationships" xmlns:p="http://schemas.openxmlformats.org/presentationml/2006/main">
+  <p:cSld>
+    <p:spTree>
+      <p:nvGrpSpPr>
+        <p:cNvPr id="1" name=""/>
+        <p:cNvGrpSpPr/>
+        <p:nvPr/>
+      </p:nvGrpSpPr>
+      <p:grpSpPr>
+        <a:xfrm>
+          <a:off x="0" y="0"/>
+          <a:ext cx="0" cy="0"/>
+          <a:chOff x="0" y="0"/>
+          <a:chExt cx="0" cy="0"/>
+        </a:xfrm>
+      </p:grpSpPr>
+      <p:sp>
+        <p:nvSpPr>
+          <p:cNvPr id="2" name="Slide Image Placeholder 1"/>
+          <p:cNvSpPr>
+            <a:spLocks noGrp="1" noRot="1" noChangeAspect="1"/>
+          </p:cNvSpPr>
+          <p:nvPr>
+            <p:ph type="sldImg"/>
+          </p:nvPr>
+        </p:nvSpPr>
+        <p:spPr/>
+      </p:sp>
+      <p:sp>
+        <p:nvSpPr>
+          <p:cNvPr id="3" name="Notes Placeholder 2"/>
+          <p:cNvSpPr>
+            <a:spLocks noGrp="1"/>
+          </p:cNvSpPr>
+          <p:nvPr>
+            <p:ph type="body" idx="1"/>
+          </p:nvPr>
+        </p:nvSpPr>
+        <p:spPr/>
+        <p:txBody>
+          <a:bodyPr/>
+          <a:lstStyle/>
+          <a:p>
+            <a:r>
+              <a:rPr lang="en-US" dirty="0"/>
+              <a:t>Close on reuse. This was a team effort across business, data and security, backend and frontend; name the teams. The method needs only the legacy export, the new codebase and an AI model, so it carries over to other Slate apps and to other legacy tools. The pieces are ready: pack-project.ts, the comparison document layout and the diagram formats. End with the five-word playbook and invite questions.</a:t>
+            </a:r>
+            <a:endParaRPr lang="en-US" dirty="0"/>
+          </a:p>
+        </p:txBody>
+      </p:sp>
+      <p:sp>
+        <p:nvSpPr>
+          <p:cNvPr id="4" name="Slide Number Placeholder 3"/>
+          <p:cNvSpPr>
+            <a:spLocks noGrp="1"/>
+          </p:cNvSpPr>
+          <p:nvPr>
+            <p:ph type="sldNum" sz="quarter" idx="10"/>
+          </p:nvPr>
+        </p:nvSpPr>
+        <p:spPr/>
+        <p:txBody>
+          <a:bodyPr/>
+          <a:lstStyle/>
+          <a:p>
+            <a:fld id="{F7021451-1387-4CA6-816F-3879F97B5CBC}" type="slidenum">
+              <a:rPr lang="en-US"/>
+              <a:t>10</a:t>
+            </a:fld>
+            <a:endParaRPr lang="en-US"/>
+          </a:p>
+        </p:txBody>
+      </p:sp>
+    </p:spTree>
+    <p:extLst>
+      <p:ext uri="{BB962C8B-B14F-4D97-AF65-F5344CB8AC3E}">
+        <p14:creationId xmlns:p14="http://schemas.microsoft.com/office/powerpoint/2010/main" val="1024086991"/>
+      </p:ext>
+    </p:extLst>
+  </p:cSld>
+  <p:clrMapOvr>
+    <a:masterClrMapping/>
+  </p:clrMapOvr>
+</p:notes>
+</file>
+
 <file path=ppt/notesSlides/notesSlide2.xml><?xml version="1.0" encoding="utf-8"?>
 <p:notes xmlns:a="http://schemas.openxmlformats.org/drawingml/2006/main" xmlns:r="http://schemas.openxmlformats.org/officeDocument/2006/relationships" xmlns:p="http://schemas.openxmlformats.org/presentationml/2006/main">
   <p:cSld>
@@ -1579,7 +1669,7 @@
           <a:p>
             <a:r>
               <a:rPr lang="en-US" dirty="0"/>
-              <a:t>This slide ties the project to four 2026 objectives; the flow builds one branch at a time. One: Leverage AI to solve business problems. The AI read all 8 Slate exports and the packed React code, recovered 105 features from an undocumented app and found 31 gaps. Two: Deliver on time, on cost, on quality. Two developers delivered it in one PI, about 76% less effort than a generic manual estimate. Three: Ensure our operational performance. ERM is a business system; every one of its 105 features was tracked for parity, and it now runs on standard, maintainable React and OSDK code instead of legacy Slate configuration. Four: Grow digital acumen and competencies. pack-project.ts and the playbook mean other teams can repeat this, which builds AI-assisted engineering skills across the organisation.</a:t>
+              <a:t>Let the business speak. These are testimonials sent by ERM stakeholders in September 2026 about the team and the ERM tool. A member of the ERM centre of competence: teamwork with the business and strong IT skills turned an idea into a proof of concept, and the user interface and performance have significantly improved since. An ERM stakeholder: the ERM dashboard is a tremendous addition to the ERM toolset, and more and more users prepare and run their risk and opportunity reviews with it. A Risk and Opportunity Manager in Hamburg: new features made navigation easier and gave a much clearer view of R&amp;O data, and issues were fixed quickly. Make clear these speak about the team and the tool overall.</a:t>
             </a:r>
             <a:endParaRPr lang="en-US" dirty="0"/>
           </a:p>
@@ -1667,7 +1757,7 @@
           <a:p>
             <a:r>
               <a:rPr lang="en-US" dirty="0"/>
-              <a:t>Close on reuse. This was a team effort across business, data and security, backend and frontend; name the teams. The method needs only the legacy export, the new codebase and an AI model, so it carries over to other Slate apps and to other legacy tools. The pieces are ready: pack-project.ts, the comparison document layout and the diagram formats. End with the five-word playbook and invite questions.</a:t>
+              <a:t>This slide ties the project to four 2026 objectives; the flow builds one branch at a time. One: Leverage AI to solve business problems. The AI read all 8 Slate exports and the packed React code, recovered 105 features from an undocumented app and found 31 gaps. Two: Deliver on time, on cost, on quality. Two developers delivered it in one PI, about 76% less effort than a generic manual estimate. Three: Ensure our operational performance. ERM is a business system; every one of its 105 features was tracked for parity, and it now runs on standard, maintainable React and OSDK code instead of legacy Slate configuration. Four: Grow digital acumen and competencies. pack-project.ts and the playbook mean other teams can repeat this, which builds AI-assisted engineering skills across the organisation.</a:t>
             </a:r>
             <a:endParaRPr lang="en-US" dirty="0"/>
           </a:p>
@@ -2553,6 +2643,699 @@
 </p:sld>
 </file>
 
+<file path=ppt/slides/slide10.xml><?xml version="1.0" encoding="utf-8"?>
+<p:sld xmlns:a="http://schemas.openxmlformats.org/drawingml/2006/main" xmlns:r="http://schemas.openxmlformats.org/officeDocument/2006/relationships" xmlns:p="http://schemas.openxmlformats.org/presentationml/2006/main">
+  <p:cSld name="Slide 10">
+    <p:spTree>
+      <p:nvGrpSpPr>
+        <p:cNvPr id="1" name=""/>
+        <p:cNvGrpSpPr/>
+        <p:nvPr/>
+      </p:nvGrpSpPr>
+      <p:grpSpPr>
+        <a:xfrm>
+          <a:off x="0" y="0"/>
+          <a:ext cx="0" cy="0"/>
+          <a:chOff x="0" y="0"/>
+          <a:chExt cx="0" cy="0"/>
+        </a:xfrm>
+      </p:grpSpPr>
+      <p:sp>
+        <p:nvSpPr>
+          <p:cNvPr id="2" name="Text 1"/>
+          <p:cNvSpPr/>
+          <p:nvPr>
+            <p:ph idx="101" type="title" hasCustomPrompt="1"/>
+          </p:nvPr>
+        </p:nvSpPr>
+        <p:spPr>
+          <a:xfrm>
+            <a:off x="548640" y="502920"/>
+            <a:ext cx="11094415" cy="822960"/>
+          </a:xfrm>
+          <a:prstGeom prst="rect">
+            <a:avLst/>
+          </a:prstGeom>
+          <a:noFill/>
+          <a:ln/>
+        </p:spPr>
+        <p:txBody>
+          <a:bodyPr wrap="square" lIns="0" tIns="0" rIns="0" bIns="0" rtlCol="0" anchor="t"/>
+          <a:lstStyle/>
+          <a:p>
+            <a:pPr algn="l" indent="0" marL="0">
+              <a:buNone/>
+            </a:pPr>
+            <a:r>
+              <a:rPr lang="en-US" sz="3600" b="1" dirty="0">
+                <a:solidFill>
+                  <a:schemeClr val="bg1"/>
+                </a:solidFill>
+              </a:rPr>
+              <a:t>A playbook any team can reuse</a:t>
+            </a:r>
+            <a:endParaRPr lang="en-US" sz="3600" dirty="0"/>
+          </a:p>
+        </p:txBody>
+      </p:sp>
+      <p:sp>
+        <p:nvSpPr>
+          <p:cNvPr id="3" name="reuse-0-card"/>
+          <p:cNvSpPr/>
+          <p:nvPr/>
+        </p:nvSpPr>
+        <p:spPr>
+          <a:xfrm>
+            <a:off x="548640" y="1600200"/>
+            <a:ext cx="5410048" cy="3017520"/>
+          </a:xfrm>
+          <a:prstGeom prst="roundRect">
+            <a:avLst>
+              <a:gd name="adj" fmla="val 3636"/>
+            </a:avLst>
+          </a:prstGeom>
+          <a:solidFill>
+            <a:schemeClr val="accent4"/>
+          </a:solidFill>
+          <a:ln/>
+        </p:spPr>
+      </p:sp>
+      <p:sp>
+        <p:nvSpPr>
+          <p:cNvPr id="4" name="reuse-0-title"/>
+          <p:cNvSpPr txBox="1"/>
+          <p:nvPr/>
+        </p:nvSpPr>
+        <p:spPr>
+          <a:xfrm>
+            <a:off x="868680" y="1874520"/>
+            <a:ext cx="4769968" cy="502920"/>
+          </a:xfrm>
+          <a:prstGeom prst="rect">
+            <a:avLst/>
+          </a:prstGeom>
+          <a:noFill/>
+          <a:ln/>
+        </p:spPr>
+        <p:txBody>
+          <a:bodyPr wrap="square" lIns="0" tIns="0" rIns="0" bIns="0" rtlCol="0" anchor="t"/>
+          <a:lstStyle/>
+          <a:p>
+            <a:pPr indent="0" marL="0">
+              <a:buNone/>
+            </a:pPr>
+            <a:r>
+              <a:rPr lang="en-US" sz="2400" b="1" dirty="0">
+                <a:solidFill>
+                  <a:schemeClr val="accent5"/>
+                </a:solidFill>
+              </a:rPr>
+              <a:t>Built together</a:t>
+            </a:r>
+            <a:endParaRPr lang="en-US" sz="2400" dirty="0"/>
+          </a:p>
+        </p:txBody>
+      </p:sp>
+      <p:sp>
+        <p:nvSpPr>
+          <p:cNvPr id="5" name="reuse-0-list"/>
+          <p:cNvSpPr txBox="1"/>
+          <p:nvPr/>
+        </p:nvSpPr>
+        <p:spPr>
+          <a:xfrm>
+            <a:off x="868680" y="2514600"/>
+            <a:ext cx="4769968" cy="1920240"/>
+          </a:xfrm>
+          <a:prstGeom prst="rect">
+            <a:avLst/>
+          </a:prstGeom>
+          <a:noFill/>
+          <a:ln/>
+        </p:spPr>
+        <p:txBody>
+          <a:bodyPr wrap="square" lIns="0" tIns="0" rIns="0" bIns="0" rtlCol="0" anchor="t"/>
+          <a:lstStyle/>
+          <a:p>
+            <a:pPr marL="342900" indent="-342900">
+              <a:spcAft>
+                <a:spcPts val="800"/>
+              </a:spcAft>
+              <a:buSzPct val="100000"/>
+              <a:buChar char="•"/>
+            </a:pPr>
+            <a:r>
+              <a:rPr lang="en-US" sz="1600" dirty="0">
+                <a:solidFill>
+                  <a:schemeClr val="accent6"/>
+                </a:solidFill>
+              </a:rPr>
+              <a:t>Business users confirmed the feature catalogue</a:t>
+            </a:r>
+            <a:endParaRPr lang="en-US" sz="1600" dirty="0"/>
+          </a:p>
+          <a:p>
+            <a:pPr marL="342900" indent="-342900">
+              <a:spcAft>
+                <a:spcPts val="800"/>
+              </a:spcAft>
+              <a:buSzPct val="100000"/>
+              <a:buChar char="•"/>
+            </a:pPr>
+            <a:r>
+              <a:rPr lang="en-US" sz="1600" dirty="0">
+                <a:solidFill>
+                  <a:schemeClr val="accent6"/>
+                </a:solidFill>
+              </a:rPr>
+              <a:t>Data and security owners kept restricted views intact</a:t>
+            </a:r>
+            <a:endParaRPr lang="en-US" sz="1600" dirty="0"/>
+          </a:p>
+          <a:p>
+            <a:pPr marL="342900" indent="-342900">
+              <a:spcAft>
+                <a:spcPts val="800"/>
+              </a:spcAft>
+              <a:buSzPct val="100000"/>
+              <a:buChar char="•"/>
+            </a:pPr>
+            <a:r>
+              <a:rPr lang="en-US" sz="1600" dirty="0">
+                <a:solidFill>
+                  <a:schemeClr val="accent6"/>
+                </a:solidFill>
+              </a:rPr>
+              <a:t>Backend and frontend fixes shipped together</a:t>
+            </a:r>
+            <a:endParaRPr lang="en-US" sz="1600" dirty="0"/>
+          </a:p>
+        </p:txBody>
+      </p:sp>
+      <p:sp>
+        <p:nvSpPr>
+          <p:cNvPr id="6" name="reuse-1-card"/>
+          <p:cNvSpPr/>
+          <p:nvPr/>
+        </p:nvSpPr>
+        <p:spPr>
+          <a:xfrm>
+            <a:off x="6233008" y="1600200"/>
+            <a:ext cx="5410048" cy="3017520"/>
+          </a:xfrm>
+          <a:prstGeom prst="roundRect">
+            <a:avLst>
+              <a:gd name="adj" fmla="val 3636"/>
+            </a:avLst>
+          </a:prstGeom>
+          <a:solidFill>
+            <a:schemeClr val="accent4"/>
+          </a:solidFill>
+          <a:ln/>
+        </p:spPr>
+      </p:sp>
+      <p:sp>
+        <p:nvSpPr>
+          <p:cNvPr id="7" name="reuse-1-title"/>
+          <p:cNvSpPr txBox="1"/>
+          <p:nvPr/>
+        </p:nvSpPr>
+        <p:spPr>
+          <a:xfrm>
+            <a:off x="6553048" y="1874520"/>
+            <a:ext cx="4769968" cy="502920"/>
+          </a:xfrm>
+          <a:prstGeom prst="rect">
+            <a:avLst/>
+          </a:prstGeom>
+          <a:noFill/>
+          <a:ln/>
+        </p:spPr>
+        <p:txBody>
+          <a:bodyPr wrap="square" lIns="0" tIns="0" rIns="0" bIns="0" rtlCol="0" anchor="t"/>
+          <a:lstStyle/>
+          <a:p>
+            <a:pPr indent="0" marL="0">
+              <a:buNone/>
+            </a:pPr>
+            <a:r>
+              <a:rPr lang="en-US" sz="2400" b="1" dirty="0">
+                <a:solidFill>
+                  <a:schemeClr val="accent5"/>
+                </a:solidFill>
+              </a:rPr>
+              <a:t>Ready to transfer</a:t>
+            </a:r>
+            <a:endParaRPr lang="en-US" sz="2400" dirty="0"/>
+          </a:p>
+        </p:txBody>
+      </p:sp>
+      <p:sp>
+        <p:nvSpPr>
+          <p:cNvPr id="8" name="reuse-1-list"/>
+          <p:cNvSpPr txBox="1"/>
+          <p:nvPr/>
+        </p:nvSpPr>
+        <p:spPr>
+          <a:xfrm>
+            <a:off x="6553048" y="2514600"/>
+            <a:ext cx="4769968" cy="1920240"/>
+          </a:xfrm>
+          <a:prstGeom prst="rect">
+            <a:avLst/>
+          </a:prstGeom>
+          <a:noFill/>
+          <a:ln/>
+        </p:spPr>
+        <p:txBody>
+          <a:bodyPr wrap="square" lIns="0" tIns="0" rIns="0" bIns="0" rtlCol="0" anchor="t"/>
+          <a:lstStyle/>
+          <a:p>
+            <a:pPr marL="342900" indent="-342900">
+              <a:spcAft>
+                <a:spcPts val="800"/>
+              </a:spcAft>
+              <a:buSzPct val="100000"/>
+              <a:buChar char="•"/>
+            </a:pPr>
+            <a:r>
+              <a:rPr lang="en-US" sz="1600" dirty="0">
+                <a:solidFill>
+                  <a:schemeClr val="accent6"/>
+                </a:solidFill>
+              </a:rPr>
+              <a:t>Other Slate apps in [business areas]</a:t>
+            </a:r>
+            <a:endParaRPr lang="en-US" sz="1600" dirty="0"/>
+          </a:p>
+          <a:p>
+            <a:pPr marL="342900" indent="-342900">
+              <a:spcAft>
+                <a:spcPts val="800"/>
+              </a:spcAft>
+              <a:buSzPct val="100000"/>
+              <a:buChar char="•"/>
+            </a:pPr>
+            <a:r>
+              <a:rPr lang="en-US" sz="1600" dirty="0">
+                <a:solidFill>
+                  <a:schemeClr val="accent6"/>
+                </a:solidFill>
+              </a:rPr>
+              <a:t>Any low-code tool with little documentation</a:t>
+            </a:r>
+            <a:endParaRPr lang="en-US" sz="1600" dirty="0"/>
+          </a:p>
+          <a:p>
+            <a:pPr marL="342900" indent="-342900">
+              <a:spcAft>
+                <a:spcPts val="800"/>
+              </a:spcAft>
+              <a:buSzPct val="100000"/>
+              <a:buChar char="•"/>
+            </a:pPr>
+            <a:r>
+              <a:rPr lang="en-US" sz="1600" dirty="0">
+                <a:solidFill>
+                  <a:schemeClr val="accent6"/>
+                </a:solidFill>
+              </a:rPr>
+              <a:t>Reusable as is: pack-project.ts, comparison template, diagrams</a:t>
+            </a:r>
+            <a:endParaRPr lang="en-US" sz="1600" dirty="0"/>
+          </a:p>
+        </p:txBody>
+      </p:sp>
+      <p:sp>
+        <p:nvSpPr>
+          <p:cNvPr id="9" name="closing"/>
+          <p:cNvSpPr txBox="1"/>
+          <p:nvPr/>
+        </p:nvSpPr>
+        <p:spPr>
+          <a:xfrm>
+            <a:off x="548640" y="5120640"/>
+            <a:ext cx="11094415" cy="548640"/>
+          </a:xfrm>
+          <a:prstGeom prst="rect">
+            <a:avLst/>
+          </a:prstGeom>
+          <a:noFill/>
+          <a:ln/>
+        </p:spPr>
+        <p:txBody>
+          <a:bodyPr wrap="square" lIns="0" tIns="0" rIns="0" bIns="0" rtlCol="0" anchor="t"/>
+          <a:lstStyle/>
+          <a:p>
+            <a:pPr indent="0" marL="0">
+              <a:buNone/>
+            </a:pPr>
+            <a:r>
+              <a:rPr lang="en-US" sz="2200" b="1" dirty="0">
+                <a:solidFill>
+                  <a:schemeClr val="bg1"/>
+                </a:solidFill>
+              </a:rPr>
+              <a:t>Pack. Extract. Compare. Fix. Document. Repeat for the next app.</a:t>
+            </a:r>
+            <a:endParaRPr lang="en-US" sz="2200" dirty="0"/>
+          </a:p>
+        </p:txBody>
+      </p:sp>
+    </p:spTree>
+  </p:cSld>
+  <p:clrMapOvr>
+    <a:masterClrMapping/>
+  </p:clrMapOvr>
+  <p:transition spd="med">
+    <p:fade/>
+  </p:transition>
+  <p:timing>
+    <p:tnLst>
+      <p:par>
+        <p:cTn id="1" dur="indefinite" restart="never" nodeType="tmRoot">
+          <p:childTnLst>
+            <p:seq concurrent="1" nextAc="seek">
+              <p:cTn id="2" dur="indefinite" nodeType="mainSeq">
+                <p:childTnLst>
+                  <p:par>
+                    <p:cTn id="27" fill="hold">
+                      <p:stCondLst>
+                        <p:cond delay="indefinite"/>
+                        <p:cond evt="onBegin" delay="0">
+                          <p:tn val="2"/>
+                        </p:cond>
+                      </p:stCondLst>
+                      <p:childTnLst>
+                        <p:par>
+                          <p:cTn id="12" fill="hold">
+                            <p:stCondLst>
+                              <p:cond delay="0"/>
+                            </p:stCondLst>
+                            <p:childTnLst>
+                              <p:par>
+                                <p:cTn id="3" presetID="10" presetClass="entr" presetSubtype="0" fill="hold" grpId="0" nodeType="afterEffect">
+                                  <p:stCondLst>
+                                    <p:cond delay="0"/>
+                                  </p:stCondLst>
+                                  <p:childTnLst>
+                                    <p:set>
+                                      <p:cBhvr>
+                                        <p:cTn id="4" dur="1" fill="hold">
+                                          <p:stCondLst>
+                                            <p:cond delay="0"/>
+                                          </p:stCondLst>
+                                        </p:cTn>
+                                        <p:tgtEl>
+                                          <p:spTgt spid="3"/>
+                                        </p:tgtEl>
+                                        <p:attrNameLst>
+                                          <p:attrName>style.visibility</p:attrName>
+                                        </p:attrNameLst>
+                                      </p:cBhvr>
+                                      <p:to>
+                                        <p:strVal val="visible"/>
+                                      </p:to>
+                                    </p:set>
+                                    <p:animEffect transition="in" filter="fade">
+                                      <p:cBhvr>
+                                        <p:cTn id="5" dur="450"/>
+                                        <p:tgtEl>
+                                          <p:spTgt spid="3"/>
+                                        </p:tgtEl>
+                                      </p:cBhvr>
+                                    </p:animEffect>
+                                  </p:childTnLst>
+                                </p:cTn>
+                              </p:par>
+                              <p:par>
+                                <p:cTn id="6" presetID="10" presetClass="entr" presetSubtype="0" fill="hold" grpId="0" nodeType="withEffect">
+                                  <p:stCondLst>
+                                    <p:cond delay="0"/>
+                                  </p:stCondLst>
+                                  <p:childTnLst>
+                                    <p:set>
+                                      <p:cBhvr>
+                                        <p:cTn id="7" dur="1" fill="hold">
+                                          <p:stCondLst>
+                                            <p:cond delay="0"/>
+                                          </p:stCondLst>
+                                        </p:cTn>
+                                        <p:tgtEl>
+                                          <p:spTgt spid="4"/>
+                                        </p:tgtEl>
+                                        <p:attrNameLst>
+                                          <p:attrName>style.visibility</p:attrName>
+                                        </p:attrNameLst>
+                                      </p:cBhvr>
+                                      <p:to>
+                                        <p:strVal val="visible"/>
+                                      </p:to>
+                                    </p:set>
+                                    <p:animEffect transition="in" filter="fade">
+                                      <p:cBhvr>
+                                        <p:cTn id="8" dur="450"/>
+                                        <p:tgtEl>
+                                          <p:spTgt spid="4"/>
+                                        </p:tgtEl>
+                                      </p:cBhvr>
+                                    </p:animEffect>
+                                  </p:childTnLst>
+                                </p:cTn>
+                              </p:par>
+                              <p:par>
+                                <p:cTn id="9" presetID="10" presetClass="entr" presetSubtype="0" fill="hold" grpId="0" nodeType="withEffect">
+                                  <p:stCondLst>
+                                    <p:cond delay="0"/>
+                                  </p:stCondLst>
+                                  <p:childTnLst>
+                                    <p:set>
+                                      <p:cBhvr>
+                                        <p:cTn id="10" dur="1" fill="hold">
+                                          <p:stCondLst>
+                                            <p:cond delay="0"/>
+                                          </p:stCondLst>
+                                        </p:cTn>
+                                        <p:tgtEl>
+                                          <p:spTgt spid="5"/>
+                                        </p:tgtEl>
+                                        <p:attrNameLst>
+                                          <p:attrName>style.visibility</p:attrName>
+                                        </p:attrNameLst>
+                                      </p:cBhvr>
+                                      <p:to>
+                                        <p:strVal val="visible"/>
+                                      </p:to>
+                                    </p:set>
+                                    <p:animEffect transition="in" filter="fade">
+                                      <p:cBhvr>
+                                        <p:cTn id="11" dur="450"/>
+                                        <p:tgtEl>
+                                          <p:spTgt spid="5"/>
+                                        </p:tgtEl>
+                                      </p:cBhvr>
+                                    </p:animEffect>
+                                  </p:childTnLst>
+                                </p:cTn>
+                              </p:par>
+                            </p:childTnLst>
+                          </p:cTn>
+                        </p:par>
+                        <p:par>
+                          <p:cTn id="22" fill="hold">
+                            <p:stCondLst>
+                              <p:cond delay="600"/>
+                            </p:stCondLst>
+                            <p:childTnLst>
+                              <p:par>
+                                <p:cTn id="13" presetID="10" presetClass="entr" presetSubtype="0" fill="hold" grpId="0" nodeType="afterEffect">
+                                  <p:stCondLst>
+                                    <p:cond delay="0"/>
+                                  </p:stCondLst>
+                                  <p:childTnLst>
+                                    <p:set>
+                                      <p:cBhvr>
+                                        <p:cTn id="14" dur="1" fill="hold">
+                                          <p:stCondLst>
+                                            <p:cond delay="0"/>
+                                          </p:stCondLst>
+                                        </p:cTn>
+                                        <p:tgtEl>
+                                          <p:spTgt spid="6"/>
+                                        </p:tgtEl>
+                                        <p:attrNameLst>
+                                          <p:attrName>style.visibility</p:attrName>
+                                        </p:attrNameLst>
+                                      </p:cBhvr>
+                                      <p:to>
+                                        <p:strVal val="visible"/>
+                                      </p:to>
+                                    </p:set>
+                                    <p:animEffect transition="in" filter="fade">
+                                      <p:cBhvr>
+                                        <p:cTn id="15" dur="450"/>
+                                        <p:tgtEl>
+                                          <p:spTgt spid="6"/>
+                                        </p:tgtEl>
+                                      </p:cBhvr>
+                                    </p:animEffect>
+                                  </p:childTnLst>
+                                </p:cTn>
+                              </p:par>
+                              <p:par>
+                                <p:cTn id="16" presetID="10" presetClass="entr" presetSubtype="0" fill="hold" grpId="0" nodeType="withEffect">
+                                  <p:stCondLst>
+                                    <p:cond delay="0"/>
+                                  </p:stCondLst>
+                                  <p:childTnLst>
+                                    <p:set>
+                                      <p:cBhvr>
+                                        <p:cTn id="17" dur="1" fill="hold">
+                                          <p:stCondLst>
+                                            <p:cond delay="0"/>
+                                          </p:stCondLst>
+                                        </p:cTn>
+                                        <p:tgtEl>
+                                          <p:spTgt spid="7"/>
+                                        </p:tgtEl>
+                                        <p:attrNameLst>
+                                          <p:attrName>style.visibility</p:attrName>
+                                        </p:attrNameLst>
+                                      </p:cBhvr>
+                                      <p:to>
+                                        <p:strVal val="visible"/>
+                                      </p:to>
+                                    </p:set>
+                                    <p:animEffect transition="in" filter="fade">
+                                      <p:cBhvr>
+                                        <p:cTn id="18" dur="450"/>
+                                        <p:tgtEl>
+                                          <p:spTgt spid="7"/>
+                                        </p:tgtEl>
+                                      </p:cBhvr>
+                                    </p:animEffect>
+                                  </p:childTnLst>
+                                </p:cTn>
+                              </p:par>
+                              <p:par>
+                                <p:cTn id="19" presetID="10" presetClass="entr" presetSubtype="0" fill="hold" grpId="0" nodeType="withEffect">
+                                  <p:stCondLst>
+                                    <p:cond delay="0"/>
+                                  </p:stCondLst>
+                                  <p:childTnLst>
+                                    <p:set>
+                                      <p:cBhvr>
+                                        <p:cTn id="20" dur="1" fill="hold">
+                                          <p:stCondLst>
+                                            <p:cond delay="0"/>
+                                          </p:stCondLst>
+                                        </p:cTn>
+                                        <p:tgtEl>
+                                          <p:spTgt spid="8"/>
+                                        </p:tgtEl>
+                                        <p:attrNameLst>
+                                          <p:attrName>style.visibility</p:attrName>
+                                        </p:attrNameLst>
+                                      </p:cBhvr>
+                                      <p:to>
+                                        <p:strVal val="visible"/>
+                                      </p:to>
+                                    </p:set>
+                                    <p:animEffect transition="in" filter="fade">
+                                      <p:cBhvr>
+                                        <p:cTn id="21" dur="450"/>
+                                        <p:tgtEl>
+                                          <p:spTgt spid="8"/>
+                                        </p:tgtEl>
+                                      </p:cBhvr>
+                                    </p:animEffect>
+                                  </p:childTnLst>
+                                </p:cTn>
+                              </p:par>
+                            </p:childTnLst>
+                          </p:cTn>
+                        </p:par>
+                        <p:par>
+                          <p:cTn id="26" fill="hold">
+                            <p:stCondLst>
+                              <p:cond delay="1200"/>
+                            </p:stCondLst>
+                            <p:childTnLst>
+                              <p:par>
+                                <p:cTn id="23" presetID="22" presetClass="entr" presetSubtype="8" fill="hold" grpId="0" nodeType="afterEffect">
+                                  <p:stCondLst>
+                                    <p:cond delay="0"/>
+                                  </p:stCondLst>
+                                  <p:childTnLst>
+                                    <p:set>
+                                      <p:cBhvr>
+                                        <p:cTn id="24" dur="1" fill="hold">
+                                          <p:stCondLst>
+                                            <p:cond delay="0"/>
+                                          </p:stCondLst>
+                                        </p:cTn>
+                                        <p:tgtEl>
+                                          <p:spTgt spid="9"/>
+                                        </p:tgtEl>
+                                        <p:attrNameLst>
+                                          <p:attrName>style.visibility</p:attrName>
+                                        </p:attrNameLst>
+                                      </p:cBhvr>
+                                      <p:to>
+                                        <p:strVal val="visible"/>
+                                      </p:to>
+                                    </p:set>
+                                    <p:animEffect transition="in" filter="wipe(left)">
+                                      <p:cBhvr>
+                                        <p:cTn id="25" dur="450"/>
+                                        <p:tgtEl>
+                                          <p:spTgt spid="9"/>
+                                        </p:tgtEl>
+                                      </p:cBhvr>
+                                    </p:animEffect>
+                                  </p:childTnLst>
+                                </p:cTn>
+                              </p:par>
+                            </p:childTnLst>
+                          </p:cTn>
+                        </p:par>
+                      </p:childTnLst>
+                    </p:cTn>
+                  </p:par>
+                </p:childTnLst>
+              </p:cTn>
+              <p:prevCondLst>
+                <p:cond evt="onPrev" delay="0">
+                  <p:tgtEl>
+                    <p:sldTgt/>
+                  </p:tgtEl>
+                </p:cond>
+              </p:prevCondLst>
+              <p:nextCondLst>
+                <p:cond evt="onNext" delay="0">
+                  <p:tgtEl>
+                    <p:sldTgt/>
+                  </p:tgtEl>
+                </p:cond>
+              </p:nextCondLst>
+            </p:seq>
+          </p:childTnLst>
+        </p:cTn>
+      </p:par>
+    </p:tnLst>
+    <p:bldLst>
+      <p:bldP spid="3" grpId="0" animBg="1"/>
+      <p:bldP spid="4" grpId="0" animBg="1"/>
+      <p:bldP spid="5" grpId="0" animBg="1"/>
+      <p:bldP spid="6" grpId="0" animBg="1"/>
+      <p:bldP spid="7" grpId="0" animBg="1"/>
+      <p:bldP spid="8" grpId="0" animBg="1"/>
+      <p:bldP spid="9" grpId="0" animBg="1"/>
+    </p:bldLst>
+  </p:timing>
+</p:sld>
+</file>
+
 <file path=ppt/slides/slide2.xml><?xml version="1.0" encoding="utf-8"?>
 <p:sld xmlns:a="http://schemas.openxmlformats.org/drawingml/2006/main" xmlns:r="http://schemas.openxmlformats.org/officeDocument/2006/relationships" xmlns:p="http://schemas.openxmlformats.org/presentationml/2006/main">
   <p:cSld name="Slide 2">
@@ -12279,6 +13062,1088 @@
                   <a:schemeClr val="tx1"/>
                 </a:solidFill>
               </a:rPr>
+              <a:t>What the business says</a:t>
+            </a:r>
+            <a:endParaRPr lang="en-US" sz="3600" dirty="0"/>
+          </a:p>
+        </p:txBody>
+      </p:sp>
+      <p:sp>
+        <p:nvSpPr>
+          <p:cNvPr id="3" name="quote-sub"/>
+          <p:cNvSpPr txBox="1"/>
+          <p:nvPr/>
+        </p:nvSpPr>
+        <p:spPr>
+          <a:xfrm>
+            <a:off x="548640" y="1115568"/>
+            <a:ext cx="11094415" cy="320040"/>
+          </a:xfrm>
+          <a:prstGeom prst="rect">
+            <a:avLst/>
+          </a:prstGeom>
+          <a:noFill/>
+          <a:ln/>
+        </p:spPr>
+        <p:txBody>
+          <a:bodyPr wrap="square" lIns="0" tIns="0" rIns="0" bIns="0" rtlCol="0" anchor="t"/>
+          <a:lstStyle/>
+          <a:p>
+            <a:pPr indent="0" marL="0">
+              <a:buNone/>
+            </a:pPr>
+            <a:r>
+              <a:rPr lang="en-US" sz="1400" dirty="0">
+                <a:solidFill>
+                  <a:schemeClr val="tx2"/>
+                </a:solidFill>
+              </a:rPr>
+              <a:t>Feedback from ERM business stakeholders, September 2026</a:t>
+            </a:r>
+            <a:endParaRPr lang="en-US" sz="1400" dirty="0"/>
+          </a:p>
+        </p:txBody>
+      </p:sp>
+      <p:sp>
+        <p:nvSpPr>
+          <p:cNvPr id="4" name="quote-0-card"/>
+          <p:cNvSpPr/>
+          <p:nvPr/>
+        </p:nvSpPr>
+        <p:spPr>
+          <a:xfrm>
+            <a:off x="548640" y="1645920"/>
+            <a:ext cx="3515258" cy="4480560"/>
+          </a:xfrm>
+          <a:prstGeom prst="roundRect">
+            <a:avLst>
+              <a:gd name="adj" fmla="val 3121"/>
+            </a:avLst>
+          </a:prstGeom>
+          <a:solidFill>
+            <a:schemeClr val="tx1"/>
+          </a:solidFill>
+          <a:ln/>
+        </p:spPr>
+      </p:sp>
+      <p:sp>
+        <p:nvSpPr>
+          <p:cNvPr id="5" name="quote-0-mark"/>
+          <p:cNvSpPr txBox="1"/>
+          <p:nvPr/>
+        </p:nvSpPr>
+        <p:spPr>
+          <a:xfrm>
+            <a:off x="822960" y="1783080"/>
+            <a:ext cx="914400" cy="731520"/>
+          </a:xfrm>
+          <a:prstGeom prst="rect">
+            <a:avLst/>
+          </a:prstGeom>
+          <a:noFill/>
+          <a:ln/>
+        </p:spPr>
+        <p:txBody>
+          <a:bodyPr wrap="square" lIns="0" tIns="0" rIns="0" bIns="0" rtlCol="0" anchor="t"/>
+          <a:lstStyle/>
+          <a:p>
+            <a:pPr indent="0" marL="0">
+              <a:buNone/>
+            </a:pPr>
+            <a:r>
+              <a:rPr lang="en-US" sz="6000" b="1" dirty="0">
+                <a:solidFill>
+                  <a:schemeClr val="accent5"/>
+                </a:solidFill>
+              </a:rPr>
+              <a:t>“</a:t>
+            </a:r>
+            <a:endParaRPr lang="en-US" sz="6000" dirty="0"/>
+          </a:p>
+        </p:txBody>
+      </p:sp>
+      <p:sp>
+        <p:nvSpPr>
+          <p:cNvPr id="6" name="quote-0-text"/>
+          <p:cNvSpPr txBox="1"/>
+          <p:nvPr/>
+        </p:nvSpPr>
+        <p:spPr>
+          <a:xfrm>
+            <a:off x="822960" y="2514600"/>
+            <a:ext cx="2966618" cy="2606040"/>
+          </a:xfrm>
+          <a:prstGeom prst="rect">
+            <a:avLst/>
+          </a:prstGeom>
+          <a:noFill/>
+          <a:ln/>
+        </p:spPr>
+        <p:txBody>
+          <a:bodyPr wrap="square" lIns="0" tIns="0" rIns="0" bIns="0" rtlCol="0" anchor="t"/>
+          <a:lstStyle/>
+          <a:p>
+            <a:pPr indent="0" marL="0">
+              <a:buNone/>
+            </a:pPr>
+            <a:r>
+              <a:rPr lang="en-US" sz="1800" i="1" dirty="0">
+                <a:solidFill>
+                  <a:schemeClr val="bg1"/>
+                </a:solidFill>
+              </a:rPr>
+              <a:t>Thanks to a mix of regular teamwork with the business and strong IT skills, they have turned an idea into a proof of concept… User interface and performance have significantly improved since the first proof of concept.</a:t>
+            </a:r>
+            <a:endParaRPr lang="en-US" sz="1800" dirty="0"/>
+          </a:p>
+        </p:txBody>
+      </p:sp>
+      <p:sp>
+        <p:nvSpPr>
+          <p:cNvPr id="7" name="quote-0-who"/>
+          <p:cNvSpPr txBox="1"/>
+          <p:nvPr/>
+        </p:nvSpPr>
+        <p:spPr>
+          <a:xfrm>
+            <a:off x="822960" y="5166360"/>
+            <a:ext cx="2966618" cy="731520"/>
+          </a:xfrm>
+          <a:prstGeom prst="rect">
+            <a:avLst/>
+          </a:prstGeom>
+          <a:noFill/>
+          <a:ln/>
+        </p:spPr>
+        <p:txBody>
+          <a:bodyPr wrap="square" lIns="0" tIns="0" rIns="0" bIns="0" rtlCol="0" anchor="b"/>
+          <a:lstStyle/>
+          <a:p>
+            <a:pPr indent="0" marL="0">
+              <a:buNone/>
+            </a:pPr>
+            <a:r>
+              <a:rPr lang="en-US" sz="1400" b="1" dirty="0">
+                <a:solidFill>
+                  <a:schemeClr val="bg1"/>
+                </a:solidFill>
+              </a:rPr>
+              <a:t>ERM Centre of Competence</a:t>
+            </a:r>
+            <a:endParaRPr lang="en-US" sz="1400" dirty="0"/>
+          </a:p>
+          <a:p>
+            <a:pPr indent="0" marL="0">
+              <a:buNone/>
+            </a:pPr>
+            <a:r>
+              <a:rPr lang="en-US" sz="1200" dirty="0">
+                <a:solidFill>
+                  <a:schemeClr val="accent5"/>
+                </a:solidFill>
+              </a:rPr>
+              <a:t>Enterprise Risk Management</a:t>
+            </a:r>
+            <a:endParaRPr lang="en-US" sz="1400" dirty="0"/>
+          </a:p>
+        </p:txBody>
+      </p:sp>
+      <p:sp>
+        <p:nvSpPr>
+          <p:cNvPr id="8" name="quote-1-card"/>
+          <p:cNvSpPr/>
+          <p:nvPr/>
+        </p:nvSpPr>
+        <p:spPr>
+          <a:xfrm>
+            <a:off x="4338218" y="1645920"/>
+            <a:ext cx="3515258" cy="4480560"/>
+          </a:xfrm>
+          <a:prstGeom prst="roundRect">
+            <a:avLst>
+              <a:gd name="adj" fmla="val 3121"/>
+            </a:avLst>
+          </a:prstGeom>
+          <a:solidFill>
+            <a:schemeClr val="bg1"/>
+          </a:solidFill>
+          <a:ln/>
+        </p:spPr>
+      </p:sp>
+      <p:sp>
+        <p:nvSpPr>
+          <p:cNvPr id="9" name="quote-1-mark"/>
+          <p:cNvSpPr txBox="1"/>
+          <p:nvPr/>
+        </p:nvSpPr>
+        <p:spPr>
+          <a:xfrm>
+            <a:off x="4612538" y="1783080"/>
+            <a:ext cx="914400" cy="731520"/>
+          </a:xfrm>
+          <a:prstGeom prst="rect">
+            <a:avLst/>
+          </a:prstGeom>
+          <a:noFill/>
+          <a:ln/>
+        </p:spPr>
+        <p:txBody>
+          <a:bodyPr wrap="square" lIns="0" tIns="0" rIns="0" bIns="0" rtlCol="0" anchor="t"/>
+          <a:lstStyle/>
+          <a:p>
+            <a:pPr indent="0" marL="0">
+              <a:buNone/>
+            </a:pPr>
+            <a:r>
+              <a:rPr lang="en-US" sz="6000" b="1" dirty="0">
+                <a:solidFill>
+                  <a:schemeClr val="accent3"/>
+                </a:solidFill>
+              </a:rPr>
+              <a:t>“</a:t>
+            </a:r>
+            <a:endParaRPr lang="en-US" sz="6000" dirty="0"/>
+          </a:p>
+        </p:txBody>
+      </p:sp>
+      <p:sp>
+        <p:nvSpPr>
+          <p:cNvPr id="10" name="quote-1-text"/>
+          <p:cNvSpPr txBox="1"/>
+          <p:nvPr/>
+        </p:nvSpPr>
+        <p:spPr>
+          <a:xfrm>
+            <a:off x="4612538" y="2514600"/>
+            <a:ext cx="2966618" cy="2606040"/>
+          </a:xfrm>
+          <a:prstGeom prst="rect">
+            <a:avLst/>
+          </a:prstGeom>
+          <a:noFill/>
+          <a:ln/>
+        </p:spPr>
+        <p:txBody>
+          <a:bodyPr wrap="square" lIns="0" tIns="0" rIns="0" bIns="0" rtlCol="0" anchor="t"/>
+          <a:lstStyle/>
+          <a:p>
+            <a:pPr indent="0" marL="0">
+              <a:buNone/>
+            </a:pPr>
+            <a:r>
+              <a:rPr lang="en-US" sz="1800" i="1" dirty="0">
+                <a:solidFill>
+                  <a:schemeClr val="tx1"/>
+                </a:solidFill>
+              </a:rPr>
+              <a:t>The Skywise ERM dashboard application is a tremendous addition to our ERM toolset… More and more users regularly prepare and facilitate risks &amp; opportunities reviews with the application.</a:t>
+            </a:r>
+            <a:endParaRPr lang="en-US" sz="1800" dirty="0"/>
+          </a:p>
+        </p:txBody>
+      </p:sp>
+      <p:sp>
+        <p:nvSpPr>
+          <p:cNvPr id="11" name="quote-1-who"/>
+          <p:cNvSpPr txBox="1"/>
+          <p:nvPr/>
+        </p:nvSpPr>
+        <p:spPr>
+          <a:xfrm>
+            <a:off x="4612538" y="5166360"/>
+            <a:ext cx="2966618" cy="731520"/>
+          </a:xfrm>
+          <a:prstGeom prst="rect">
+            <a:avLst/>
+          </a:prstGeom>
+          <a:noFill/>
+          <a:ln/>
+        </p:spPr>
+        <p:txBody>
+          <a:bodyPr wrap="square" lIns="0" tIns="0" rIns="0" bIns="0" rtlCol="0" anchor="b"/>
+          <a:lstStyle/>
+          <a:p>
+            <a:pPr indent="0" marL="0">
+              <a:buNone/>
+            </a:pPr>
+            <a:r>
+              <a:rPr lang="en-US" sz="1400" b="1" dirty="0">
+                <a:solidFill>
+                  <a:schemeClr val="tx1"/>
+                </a:solidFill>
+              </a:rPr>
+              <a:t>ERM stakeholder</a:t>
+            </a:r>
+            <a:endParaRPr lang="en-US" sz="1400" dirty="0"/>
+          </a:p>
+          <a:p>
+            <a:pPr indent="0" marL="0">
+              <a:buNone/>
+            </a:pPr>
+            <a:r>
+              <a:rPr lang="en-US" sz="1200" dirty="0">
+                <a:solidFill>
+                  <a:schemeClr val="tx2"/>
+                </a:solidFill>
+              </a:rPr>
+              <a:t>[Role]</a:t>
+            </a:r>
+            <a:endParaRPr lang="en-US" sz="1400" dirty="0"/>
+          </a:p>
+        </p:txBody>
+      </p:sp>
+      <p:sp>
+        <p:nvSpPr>
+          <p:cNvPr id="12" name="quote-2-card"/>
+          <p:cNvSpPr/>
+          <p:nvPr/>
+        </p:nvSpPr>
+        <p:spPr>
+          <a:xfrm>
+            <a:off x="8127797" y="1645920"/>
+            <a:ext cx="3515258" cy="4480560"/>
+          </a:xfrm>
+          <a:prstGeom prst="roundRect">
+            <a:avLst>
+              <a:gd name="adj" fmla="val 3121"/>
+            </a:avLst>
+          </a:prstGeom>
+          <a:solidFill>
+            <a:schemeClr val="bg1"/>
+          </a:solidFill>
+          <a:ln/>
+        </p:spPr>
+      </p:sp>
+      <p:sp>
+        <p:nvSpPr>
+          <p:cNvPr id="13" name="quote-2-mark"/>
+          <p:cNvSpPr txBox="1"/>
+          <p:nvPr/>
+        </p:nvSpPr>
+        <p:spPr>
+          <a:xfrm>
+            <a:off x="8402117" y="1783080"/>
+            <a:ext cx="914400" cy="731520"/>
+          </a:xfrm>
+          <a:prstGeom prst="rect">
+            <a:avLst/>
+          </a:prstGeom>
+          <a:noFill/>
+          <a:ln/>
+        </p:spPr>
+        <p:txBody>
+          <a:bodyPr wrap="square" lIns="0" tIns="0" rIns="0" bIns="0" rtlCol="0" anchor="t"/>
+          <a:lstStyle/>
+          <a:p>
+            <a:pPr indent="0" marL="0">
+              <a:buNone/>
+            </a:pPr>
+            <a:r>
+              <a:rPr lang="en-US" sz="6000" b="1" dirty="0">
+                <a:solidFill>
+                  <a:schemeClr val="accent3"/>
+                </a:solidFill>
+              </a:rPr>
+              <a:t>“</a:t>
+            </a:r>
+            <a:endParaRPr lang="en-US" sz="6000" dirty="0"/>
+          </a:p>
+        </p:txBody>
+      </p:sp>
+      <p:sp>
+        <p:nvSpPr>
+          <p:cNvPr id="14" name="quote-2-text"/>
+          <p:cNvSpPr txBox="1"/>
+          <p:nvPr/>
+        </p:nvSpPr>
+        <p:spPr>
+          <a:xfrm>
+            <a:off x="8402117" y="2514600"/>
+            <a:ext cx="2966618" cy="2606040"/>
+          </a:xfrm>
+          <a:prstGeom prst="rect">
+            <a:avLst/>
+          </a:prstGeom>
+          <a:noFill/>
+          <a:ln/>
+        </p:spPr>
+        <p:txBody>
+          <a:bodyPr wrap="square" lIns="0" tIns="0" rIns="0" bIns="0" rtlCol="0" anchor="t"/>
+          <a:lstStyle/>
+          <a:p>
+            <a:pPr indent="0" marL="0">
+              <a:buNone/>
+            </a:pPr>
+            <a:r>
+              <a:rPr lang="en-US" sz="1800" i="1" dirty="0">
+                <a:solidFill>
+                  <a:schemeClr val="tx1"/>
+                </a:solidFill>
+              </a:rPr>
+              <a:t>They built great new features that make navigation easier and give us a much clearer view of our R&amp;O data. Whenever bugs or issues came up, they fixed them quickly and efficiently.</a:t>
+            </a:r>
+            <a:endParaRPr lang="en-US" sz="1800" dirty="0"/>
+          </a:p>
+        </p:txBody>
+      </p:sp>
+      <p:sp>
+        <p:nvSpPr>
+          <p:cNvPr id="15" name="quote-2-who"/>
+          <p:cNvSpPr txBox="1"/>
+          <p:nvPr/>
+        </p:nvSpPr>
+        <p:spPr>
+          <a:xfrm>
+            <a:off x="8402117" y="5166360"/>
+            <a:ext cx="2966618" cy="731520"/>
+          </a:xfrm>
+          <a:prstGeom prst="rect">
+            <a:avLst/>
+          </a:prstGeom>
+          <a:noFill/>
+          <a:ln/>
+        </p:spPr>
+        <p:txBody>
+          <a:bodyPr wrap="square" lIns="0" tIns="0" rIns="0" bIns="0" rtlCol="0" anchor="b"/>
+          <a:lstStyle/>
+          <a:p>
+            <a:pPr indent="0" marL="0">
+              <a:buNone/>
+            </a:pPr>
+            <a:r>
+              <a:rPr lang="en-US" sz="1400" b="1" dirty="0">
+                <a:solidFill>
+                  <a:schemeClr val="tx1"/>
+                </a:solidFill>
+              </a:rPr>
+              <a:t>Risk and Opportunity Manager</a:t>
+            </a:r>
+            <a:endParaRPr lang="en-US" sz="1400" dirty="0"/>
+          </a:p>
+          <a:p>
+            <a:pPr indent="0" marL="0">
+              <a:buNone/>
+            </a:pPr>
+            <a:r>
+              <a:rPr lang="en-US" sz="1200" dirty="0">
+                <a:solidFill>
+                  <a:schemeClr val="tx2"/>
+                </a:solidFill>
+              </a:rPr>
+              <a:t>Airbus Operations GmbH, Hamburg</a:t>
+            </a:r>
+            <a:endParaRPr lang="en-US" sz="1400" dirty="0"/>
+          </a:p>
+        </p:txBody>
+      </p:sp>
+    </p:spTree>
+  </p:cSld>
+  <p:clrMapOvr>
+    <a:masterClrMapping/>
+  </p:clrMapOvr>
+  <p:transition spd="med">
+    <p:fade/>
+  </p:transition>
+  <p:timing>
+    <p:tnLst>
+      <p:par>
+        <p:cTn id="1" dur="indefinite" restart="never" nodeType="tmRoot">
+          <p:childTnLst>
+            <p:seq concurrent="1" nextAc="seek">
+              <p:cTn id="2" dur="indefinite" nodeType="mainSeq">
+                <p:childTnLst>
+                  <p:par>
+                    <p:cTn id="46" fill="hold">
+                      <p:stCondLst>
+                        <p:cond delay="indefinite"/>
+                        <p:cond evt="onBegin" delay="0">
+                          <p:tn val="2"/>
+                        </p:cond>
+                      </p:stCondLst>
+                      <p:childTnLst>
+                        <p:par>
+                          <p:cTn id="6" fill="hold">
+                            <p:stCondLst>
+                              <p:cond delay="0"/>
+                            </p:stCondLst>
+                            <p:childTnLst>
+                              <p:par>
+                                <p:cTn id="3" presetID="10" presetClass="entr" presetSubtype="0" fill="hold" grpId="0" nodeType="afterEffect">
+                                  <p:stCondLst>
+                                    <p:cond delay="0"/>
+                                  </p:stCondLst>
+                                  <p:childTnLst>
+                                    <p:set>
+                                      <p:cBhvr>
+                                        <p:cTn id="4" dur="1" fill="hold">
+                                          <p:stCondLst>
+                                            <p:cond delay="0"/>
+                                          </p:stCondLst>
+                                        </p:cTn>
+                                        <p:tgtEl>
+                                          <p:spTgt spid="3"/>
+                                        </p:tgtEl>
+                                        <p:attrNameLst>
+                                          <p:attrName>style.visibility</p:attrName>
+                                        </p:attrNameLst>
+                                      </p:cBhvr>
+                                      <p:to>
+                                        <p:strVal val="visible"/>
+                                      </p:to>
+                                    </p:set>
+                                    <p:animEffect transition="in" filter="fade">
+                                      <p:cBhvr>
+                                        <p:cTn id="5" dur="450"/>
+                                        <p:tgtEl>
+                                          <p:spTgt spid="3"/>
+                                        </p:tgtEl>
+                                      </p:cBhvr>
+                                    </p:animEffect>
+                                  </p:childTnLst>
+                                </p:cTn>
+                              </p:par>
+                            </p:childTnLst>
+                          </p:cTn>
+                        </p:par>
+                        <p:par>
+                          <p:cTn id="19" fill="hold">
+                            <p:stCondLst>
+                              <p:cond delay="600"/>
+                            </p:stCondLst>
+                            <p:childTnLst>
+                              <p:par>
+                                <p:cTn id="7" presetID="10" presetClass="entr" presetSubtype="0" fill="hold" grpId="0" nodeType="afterEffect">
+                                  <p:stCondLst>
+                                    <p:cond delay="0"/>
+                                  </p:stCondLst>
+                                  <p:childTnLst>
+                                    <p:set>
+                                      <p:cBhvr>
+                                        <p:cTn id="8" dur="1" fill="hold">
+                                          <p:stCondLst>
+                                            <p:cond delay="0"/>
+                                          </p:stCondLst>
+                                        </p:cTn>
+                                        <p:tgtEl>
+                                          <p:spTgt spid="4"/>
+                                        </p:tgtEl>
+                                        <p:attrNameLst>
+                                          <p:attrName>style.visibility</p:attrName>
+                                        </p:attrNameLst>
+                                      </p:cBhvr>
+                                      <p:to>
+                                        <p:strVal val="visible"/>
+                                      </p:to>
+                                    </p:set>
+                                    <p:animEffect transition="in" filter="fade">
+                                      <p:cBhvr>
+                                        <p:cTn id="9" dur="450"/>
+                                        <p:tgtEl>
+                                          <p:spTgt spid="4"/>
+                                        </p:tgtEl>
+                                      </p:cBhvr>
+                                    </p:animEffect>
+                                  </p:childTnLst>
+                                </p:cTn>
+                              </p:par>
+                              <p:par>
+                                <p:cTn id="10" presetID="10" presetClass="entr" presetSubtype="0" fill="hold" grpId="0" nodeType="withEffect">
+                                  <p:stCondLst>
+                                    <p:cond delay="0"/>
+                                  </p:stCondLst>
+                                  <p:childTnLst>
+                                    <p:set>
+                                      <p:cBhvr>
+                                        <p:cTn id="11" dur="1" fill="hold">
+                                          <p:stCondLst>
+                                            <p:cond delay="0"/>
+                                          </p:stCondLst>
+                                        </p:cTn>
+                                        <p:tgtEl>
+                                          <p:spTgt spid="5"/>
+                                        </p:tgtEl>
+                                        <p:attrNameLst>
+                                          <p:attrName>style.visibility</p:attrName>
+                                        </p:attrNameLst>
+                                      </p:cBhvr>
+                                      <p:to>
+                                        <p:strVal val="visible"/>
+                                      </p:to>
+                                    </p:set>
+                                    <p:animEffect transition="in" filter="fade">
+                                      <p:cBhvr>
+                                        <p:cTn id="12" dur="450"/>
+                                        <p:tgtEl>
+                                          <p:spTgt spid="5"/>
+                                        </p:tgtEl>
+                                      </p:cBhvr>
+                                    </p:animEffect>
+                                  </p:childTnLst>
+                                </p:cTn>
+                              </p:par>
+                              <p:par>
+                                <p:cTn id="13" presetID="10" presetClass="entr" presetSubtype="0" fill="hold" grpId="0" nodeType="withEffect">
+                                  <p:stCondLst>
+                                    <p:cond delay="0"/>
+                                  </p:stCondLst>
+                                  <p:childTnLst>
+                                    <p:set>
+                                      <p:cBhvr>
+                                        <p:cTn id="14" dur="1" fill="hold">
+                                          <p:stCondLst>
+                                            <p:cond delay="0"/>
+                                          </p:stCondLst>
+                                        </p:cTn>
+                                        <p:tgtEl>
+                                          <p:spTgt spid="6"/>
+                                        </p:tgtEl>
+                                        <p:attrNameLst>
+                                          <p:attrName>style.visibility</p:attrName>
+                                        </p:attrNameLst>
+                                      </p:cBhvr>
+                                      <p:to>
+                                        <p:strVal val="visible"/>
+                                      </p:to>
+                                    </p:set>
+                                    <p:animEffect transition="in" filter="fade">
+                                      <p:cBhvr>
+                                        <p:cTn id="15" dur="450"/>
+                                        <p:tgtEl>
+                                          <p:spTgt spid="6"/>
+                                        </p:tgtEl>
+                                      </p:cBhvr>
+                                    </p:animEffect>
+                                  </p:childTnLst>
+                                </p:cTn>
+                              </p:par>
+                              <p:par>
+                                <p:cTn id="16" presetID="10" presetClass="entr" presetSubtype="0" fill="hold" grpId="0" nodeType="withEffect">
+                                  <p:stCondLst>
+                                    <p:cond delay="0"/>
+                                  </p:stCondLst>
+                                  <p:childTnLst>
+                                    <p:set>
+                                      <p:cBhvr>
+                                        <p:cTn id="17" dur="1" fill="hold">
+                                          <p:stCondLst>
+                                            <p:cond delay="0"/>
+                                          </p:stCondLst>
+                                        </p:cTn>
+                                        <p:tgtEl>
+                                          <p:spTgt spid="7"/>
+                                        </p:tgtEl>
+                                        <p:attrNameLst>
+                                          <p:attrName>style.visibility</p:attrName>
+                                        </p:attrNameLst>
+                                      </p:cBhvr>
+                                      <p:to>
+                                        <p:strVal val="visible"/>
+                                      </p:to>
+                                    </p:set>
+                                    <p:animEffect transition="in" filter="fade">
+                                      <p:cBhvr>
+                                        <p:cTn id="18" dur="450"/>
+                                        <p:tgtEl>
+                                          <p:spTgt spid="7"/>
+                                        </p:tgtEl>
+                                      </p:cBhvr>
+                                    </p:animEffect>
+                                  </p:childTnLst>
+                                </p:cTn>
+                              </p:par>
+                            </p:childTnLst>
+                          </p:cTn>
+                        </p:par>
+                        <p:par>
+                          <p:cTn id="32" fill="hold">
+                            <p:stCondLst>
+                              <p:cond delay="1200"/>
+                            </p:stCondLst>
+                            <p:childTnLst>
+                              <p:par>
+                                <p:cTn id="20" presetID="10" presetClass="entr" presetSubtype="0" fill="hold" grpId="0" nodeType="afterEffect">
+                                  <p:stCondLst>
+                                    <p:cond delay="0"/>
+                                  </p:stCondLst>
+                                  <p:childTnLst>
+                                    <p:set>
+                                      <p:cBhvr>
+                                        <p:cTn id="21" dur="1" fill="hold">
+                                          <p:stCondLst>
+                                            <p:cond delay="0"/>
+                                          </p:stCondLst>
+                                        </p:cTn>
+                                        <p:tgtEl>
+                                          <p:spTgt spid="8"/>
+                                        </p:tgtEl>
+                                        <p:attrNameLst>
+                                          <p:attrName>style.visibility</p:attrName>
+                                        </p:attrNameLst>
+                                      </p:cBhvr>
+                                      <p:to>
+                                        <p:strVal val="visible"/>
+                                      </p:to>
+                                    </p:set>
+                                    <p:animEffect transition="in" filter="fade">
+                                      <p:cBhvr>
+                                        <p:cTn id="22" dur="450"/>
+                                        <p:tgtEl>
+                                          <p:spTgt spid="8"/>
+                                        </p:tgtEl>
+                                      </p:cBhvr>
+                                    </p:animEffect>
+                                  </p:childTnLst>
+                                </p:cTn>
+                              </p:par>
+                              <p:par>
+                                <p:cTn id="23" presetID="10" presetClass="entr" presetSubtype="0" fill="hold" grpId="0" nodeType="withEffect">
+                                  <p:stCondLst>
+                                    <p:cond delay="0"/>
+                                  </p:stCondLst>
+                                  <p:childTnLst>
+                                    <p:set>
+                                      <p:cBhvr>
+                                        <p:cTn id="24" dur="1" fill="hold">
+                                          <p:stCondLst>
+                                            <p:cond delay="0"/>
+                                          </p:stCondLst>
+                                        </p:cTn>
+                                        <p:tgtEl>
+                                          <p:spTgt spid="9"/>
+                                        </p:tgtEl>
+                                        <p:attrNameLst>
+                                          <p:attrName>style.visibility</p:attrName>
+                                        </p:attrNameLst>
+                                      </p:cBhvr>
+                                      <p:to>
+                                        <p:strVal val="visible"/>
+                                      </p:to>
+                                    </p:set>
+                                    <p:animEffect transition="in" filter="fade">
+                                      <p:cBhvr>
+                                        <p:cTn id="25" dur="450"/>
+                                        <p:tgtEl>
+                                          <p:spTgt spid="9"/>
+                                        </p:tgtEl>
+                                      </p:cBhvr>
+                                    </p:animEffect>
+                                  </p:childTnLst>
+                                </p:cTn>
+                              </p:par>
+                              <p:par>
+                                <p:cTn id="26" presetID="10" presetClass="entr" presetSubtype="0" fill="hold" grpId="0" nodeType="withEffect">
+                                  <p:stCondLst>
+                                    <p:cond delay="0"/>
+                                  </p:stCondLst>
+                                  <p:childTnLst>
+                                    <p:set>
+                                      <p:cBhvr>
+                                        <p:cTn id="27" dur="1" fill="hold">
+                                          <p:stCondLst>
+                                            <p:cond delay="0"/>
+                                          </p:stCondLst>
+                                        </p:cTn>
+                                        <p:tgtEl>
+                                          <p:spTgt spid="10"/>
+                                        </p:tgtEl>
+                                        <p:attrNameLst>
+                                          <p:attrName>style.visibility</p:attrName>
+                                        </p:attrNameLst>
+                                      </p:cBhvr>
+                                      <p:to>
+                                        <p:strVal val="visible"/>
+                                      </p:to>
+                                    </p:set>
+                                    <p:animEffect transition="in" filter="fade">
+                                      <p:cBhvr>
+                                        <p:cTn id="28" dur="450"/>
+                                        <p:tgtEl>
+                                          <p:spTgt spid="10"/>
+                                        </p:tgtEl>
+                                      </p:cBhvr>
+                                    </p:animEffect>
+                                  </p:childTnLst>
+                                </p:cTn>
+                              </p:par>
+                              <p:par>
+                                <p:cTn id="29" presetID="10" presetClass="entr" presetSubtype="0" fill="hold" grpId="0" nodeType="withEffect">
+                                  <p:stCondLst>
+                                    <p:cond delay="0"/>
+                                  </p:stCondLst>
+                                  <p:childTnLst>
+                                    <p:set>
+                                      <p:cBhvr>
+                                        <p:cTn id="30" dur="1" fill="hold">
+                                          <p:stCondLst>
+                                            <p:cond delay="0"/>
+                                          </p:stCondLst>
+                                        </p:cTn>
+                                        <p:tgtEl>
+                                          <p:spTgt spid="11"/>
+                                        </p:tgtEl>
+                                        <p:attrNameLst>
+                                          <p:attrName>style.visibility</p:attrName>
+                                        </p:attrNameLst>
+                                      </p:cBhvr>
+                                      <p:to>
+                                        <p:strVal val="visible"/>
+                                      </p:to>
+                                    </p:set>
+                                    <p:animEffect transition="in" filter="fade">
+                                      <p:cBhvr>
+                                        <p:cTn id="31" dur="450"/>
+                                        <p:tgtEl>
+                                          <p:spTgt spid="11"/>
+                                        </p:tgtEl>
+                                      </p:cBhvr>
+                                    </p:animEffect>
+                                  </p:childTnLst>
+                                </p:cTn>
+                              </p:par>
+                            </p:childTnLst>
+                          </p:cTn>
+                        </p:par>
+                        <p:par>
+                          <p:cTn id="45" fill="hold">
+                            <p:stCondLst>
+                              <p:cond delay="1800"/>
+                            </p:stCondLst>
+                            <p:childTnLst>
+                              <p:par>
+                                <p:cTn id="33" presetID="10" presetClass="entr" presetSubtype="0" fill="hold" grpId="0" nodeType="afterEffect">
+                                  <p:stCondLst>
+                                    <p:cond delay="0"/>
+                                  </p:stCondLst>
+                                  <p:childTnLst>
+                                    <p:set>
+                                      <p:cBhvr>
+                                        <p:cTn id="34" dur="1" fill="hold">
+                                          <p:stCondLst>
+                                            <p:cond delay="0"/>
+                                          </p:stCondLst>
+                                        </p:cTn>
+                                        <p:tgtEl>
+                                          <p:spTgt spid="12"/>
+                                        </p:tgtEl>
+                                        <p:attrNameLst>
+                                          <p:attrName>style.visibility</p:attrName>
+                                        </p:attrNameLst>
+                                      </p:cBhvr>
+                                      <p:to>
+                                        <p:strVal val="visible"/>
+                                      </p:to>
+                                    </p:set>
+                                    <p:animEffect transition="in" filter="fade">
+                                      <p:cBhvr>
+                                        <p:cTn id="35" dur="450"/>
+                                        <p:tgtEl>
+                                          <p:spTgt spid="12"/>
+                                        </p:tgtEl>
+                                      </p:cBhvr>
+                                    </p:animEffect>
+                                  </p:childTnLst>
+                                </p:cTn>
+                              </p:par>
+                              <p:par>
+                                <p:cTn id="36" presetID="10" presetClass="entr" presetSubtype="0" fill="hold" grpId="0" nodeType="withEffect">
+                                  <p:stCondLst>
+                                    <p:cond delay="0"/>
+                                  </p:stCondLst>
+                                  <p:childTnLst>
+                                    <p:set>
+                                      <p:cBhvr>
+                                        <p:cTn id="37" dur="1" fill="hold">
+                                          <p:stCondLst>
+                                            <p:cond delay="0"/>
+                                          </p:stCondLst>
+                                        </p:cTn>
+                                        <p:tgtEl>
+                                          <p:spTgt spid="13"/>
+                                        </p:tgtEl>
+                                        <p:attrNameLst>
+                                          <p:attrName>style.visibility</p:attrName>
+                                        </p:attrNameLst>
+                                      </p:cBhvr>
+                                      <p:to>
+                                        <p:strVal val="visible"/>
+                                      </p:to>
+                                    </p:set>
+                                    <p:animEffect transition="in" filter="fade">
+                                      <p:cBhvr>
+                                        <p:cTn id="38" dur="450"/>
+                                        <p:tgtEl>
+                                          <p:spTgt spid="13"/>
+                                        </p:tgtEl>
+                                      </p:cBhvr>
+                                    </p:animEffect>
+                                  </p:childTnLst>
+                                </p:cTn>
+                              </p:par>
+                              <p:par>
+                                <p:cTn id="39" presetID="10" presetClass="entr" presetSubtype="0" fill="hold" grpId="0" nodeType="withEffect">
+                                  <p:stCondLst>
+                                    <p:cond delay="0"/>
+                                  </p:stCondLst>
+                                  <p:childTnLst>
+                                    <p:set>
+                                      <p:cBhvr>
+                                        <p:cTn id="40" dur="1" fill="hold">
+                                          <p:stCondLst>
+                                            <p:cond delay="0"/>
+                                          </p:stCondLst>
+                                        </p:cTn>
+                                        <p:tgtEl>
+                                          <p:spTgt spid="14"/>
+                                        </p:tgtEl>
+                                        <p:attrNameLst>
+                                          <p:attrName>style.visibility</p:attrName>
+                                        </p:attrNameLst>
+                                      </p:cBhvr>
+                                      <p:to>
+                                        <p:strVal val="visible"/>
+                                      </p:to>
+                                    </p:set>
+                                    <p:animEffect transition="in" filter="fade">
+                                      <p:cBhvr>
+                                        <p:cTn id="41" dur="450"/>
+                                        <p:tgtEl>
+                                          <p:spTgt spid="14"/>
+                                        </p:tgtEl>
+                                      </p:cBhvr>
+                                    </p:animEffect>
+                                  </p:childTnLst>
+                                </p:cTn>
+                              </p:par>
+                              <p:par>
+                                <p:cTn id="42" presetID="10" presetClass="entr" presetSubtype="0" fill="hold" grpId="0" nodeType="withEffect">
+                                  <p:stCondLst>
+                                    <p:cond delay="0"/>
+                                  </p:stCondLst>
+                                  <p:childTnLst>
+                                    <p:set>
+                                      <p:cBhvr>
+                                        <p:cTn id="43" dur="1" fill="hold">
+                                          <p:stCondLst>
+                                            <p:cond delay="0"/>
+                                          </p:stCondLst>
+                                        </p:cTn>
+                                        <p:tgtEl>
+                                          <p:spTgt spid="15"/>
+                                        </p:tgtEl>
+                                        <p:attrNameLst>
+                                          <p:attrName>style.visibility</p:attrName>
+                                        </p:attrNameLst>
+                                      </p:cBhvr>
+                                      <p:to>
+                                        <p:strVal val="visible"/>
+                                      </p:to>
+                                    </p:set>
+                                    <p:animEffect transition="in" filter="fade">
+                                      <p:cBhvr>
+                                        <p:cTn id="44" dur="450"/>
+                                        <p:tgtEl>
+                                          <p:spTgt spid="15"/>
+                                        </p:tgtEl>
+                                      </p:cBhvr>
+                                    </p:animEffect>
+                                  </p:childTnLst>
+                                </p:cTn>
+                              </p:par>
+                            </p:childTnLst>
+                          </p:cTn>
+                        </p:par>
+                      </p:childTnLst>
+                    </p:cTn>
+                  </p:par>
+                </p:childTnLst>
+              </p:cTn>
+              <p:prevCondLst>
+                <p:cond evt="onPrev" delay="0">
+                  <p:tgtEl>
+                    <p:sldTgt/>
+                  </p:tgtEl>
+                </p:cond>
+              </p:prevCondLst>
+              <p:nextCondLst>
+                <p:cond evt="onNext" delay="0">
+                  <p:tgtEl>
+                    <p:sldTgt/>
+                  </p:tgtEl>
+                </p:cond>
+              </p:nextCondLst>
+            </p:seq>
+          </p:childTnLst>
+        </p:cTn>
+      </p:par>
+    </p:tnLst>
+    <p:bldLst>
+      <p:bldP spid="3" grpId="0" animBg="1"/>
+      <p:bldP spid="4" grpId="0" animBg="1"/>
+      <p:bldP spid="5" grpId="0" animBg="1"/>
+      <p:bldP spid="6" grpId="0" animBg="1"/>
+      <p:bldP spid="7" grpId="0" animBg="1"/>
+      <p:bldP spid="8" grpId="0" animBg="1"/>
+      <p:bldP spid="9" grpId="0" animBg="1"/>
+      <p:bldP spid="10" grpId="0" animBg="1"/>
+      <p:bldP spid="11" grpId="0" animBg="1"/>
+      <p:bldP spid="12" grpId="0" animBg="1"/>
+      <p:bldP spid="13" grpId="0" animBg="1"/>
+      <p:bldP spid="14" grpId="0" animBg="1"/>
+      <p:bldP spid="15" grpId="0" animBg="1"/>
+    </p:bldLst>
+  </p:timing>
+</p:sld>
+</file>
+
+<file path=ppt/slides/slide9.xml><?xml version="1.0" encoding="utf-8"?>
+<p:sld xmlns:a="http://schemas.openxmlformats.org/drawingml/2006/main" xmlns:r="http://schemas.openxmlformats.org/officeDocument/2006/relationships" xmlns:p="http://schemas.openxmlformats.org/presentationml/2006/main">
+  <p:cSld name="Slide 9">
+    <p:spTree>
+      <p:nvGrpSpPr>
+        <p:cNvPr id="1" name=""/>
+        <p:cNvGrpSpPr/>
+        <p:nvPr/>
+      </p:nvGrpSpPr>
+      <p:grpSpPr>
+        <a:xfrm>
+          <a:off x="0" y="0"/>
+          <a:ext cx="0" cy="0"/>
+          <a:chOff x="0" y="0"/>
+          <a:chExt cx="0" cy="0"/>
+        </a:xfrm>
+      </p:grpSpPr>
+      <p:sp>
+        <p:nvSpPr>
+          <p:cNvPr id="2" name="Text 1"/>
+          <p:cNvSpPr/>
+          <p:nvPr>
+            <p:ph idx="101" type="title" hasCustomPrompt="1"/>
+          </p:nvPr>
+        </p:nvSpPr>
+        <p:spPr>
+          <a:xfrm>
+            <a:off x="548640" y="502920"/>
+            <a:ext cx="11094415" cy="822960"/>
+          </a:xfrm>
+          <a:prstGeom prst="rect">
+            <a:avLst/>
+          </a:prstGeom>
+          <a:noFill/>
+          <a:ln/>
+        </p:spPr>
+        <p:txBody>
+          <a:bodyPr wrap="square" lIns="0" tIns="0" rIns="0" bIns="0" rtlCol="0" anchor="t"/>
+          <a:lstStyle/>
+          <a:p>
+            <a:pPr algn="l" indent="0" marL="0">
+              <a:buNone/>
+            </a:pPr>
+            <a:r>
+              <a:rPr lang="en-US" sz="3600" b="1" dirty="0">
+                <a:solidFill>
+                  <a:schemeClr val="tx1"/>
+                </a:solidFill>
+              </a:rPr>
               <a:t>Our contribution to the 2026 objectives</a:t>
             </a:r>
             <a:endParaRPr lang="en-US" sz="3600" dirty="0"/>
@@ -14250,699 +16115,6 @@
       <p:bldP spid="29" grpId="0" animBg="1"/>
       <p:bldP spid="30" grpId="0" animBg="1"/>
       <p:bldP spid="31" grpId="0" animBg="1"/>
-    </p:bldLst>
-  </p:timing>
-</p:sld>
-</file>
-
-<file path=ppt/slides/slide9.xml><?xml version="1.0" encoding="utf-8"?>
-<p:sld xmlns:a="http://schemas.openxmlformats.org/drawingml/2006/main" xmlns:r="http://schemas.openxmlformats.org/officeDocument/2006/relationships" xmlns:p="http://schemas.openxmlformats.org/presentationml/2006/main">
-  <p:cSld name="Slide 9">
-    <p:spTree>
-      <p:nvGrpSpPr>
-        <p:cNvPr id="1" name=""/>
-        <p:cNvGrpSpPr/>
-        <p:nvPr/>
-      </p:nvGrpSpPr>
-      <p:grpSpPr>
-        <a:xfrm>
-          <a:off x="0" y="0"/>
-          <a:ext cx="0" cy="0"/>
-          <a:chOff x="0" y="0"/>
-          <a:chExt cx="0" cy="0"/>
-        </a:xfrm>
-      </p:grpSpPr>
-      <p:sp>
-        <p:nvSpPr>
-          <p:cNvPr id="2" name="Text 1"/>
-          <p:cNvSpPr/>
-          <p:nvPr>
-            <p:ph idx="101" type="title" hasCustomPrompt="1"/>
-          </p:nvPr>
-        </p:nvSpPr>
-        <p:spPr>
-          <a:xfrm>
-            <a:off x="548640" y="502920"/>
-            <a:ext cx="11094415" cy="822960"/>
-          </a:xfrm>
-          <a:prstGeom prst="rect">
-            <a:avLst/>
-          </a:prstGeom>
-          <a:noFill/>
-          <a:ln/>
-        </p:spPr>
-        <p:txBody>
-          <a:bodyPr wrap="square" lIns="0" tIns="0" rIns="0" bIns="0" rtlCol="0" anchor="t"/>
-          <a:lstStyle/>
-          <a:p>
-            <a:pPr algn="l" indent="0" marL="0">
-              <a:buNone/>
-            </a:pPr>
-            <a:r>
-              <a:rPr lang="en-US" sz="3600" b="1" dirty="0">
-                <a:solidFill>
-                  <a:schemeClr val="bg1"/>
-                </a:solidFill>
-              </a:rPr>
-              <a:t>A playbook any team can reuse</a:t>
-            </a:r>
-            <a:endParaRPr lang="en-US" sz="3600" dirty="0"/>
-          </a:p>
-        </p:txBody>
-      </p:sp>
-      <p:sp>
-        <p:nvSpPr>
-          <p:cNvPr id="3" name="reuse-0-card"/>
-          <p:cNvSpPr/>
-          <p:nvPr/>
-        </p:nvSpPr>
-        <p:spPr>
-          <a:xfrm>
-            <a:off x="548640" y="1600200"/>
-            <a:ext cx="5410048" cy="3017520"/>
-          </a:xfrm>
-          <a:prstGeom prst="roundRect">
-            <a:avLst>
-              <a:gd name="adj" fmla="val 3636"/>
-            </a:avLst>
-          </a:prstGeom>
-          <a:solidFill>
-            <a:schemeClr val="accent4"/>
-          </a:solidFill>
-          <a:ln/>
-        </p:spPr>
-      </p:sp>
-      <p:sp>
-        <p:nvSpPr>
-          <p:cNvPr id="4" name="reuse-0-title"/>
-          <p:cNvSpPr txBox="1"/>
-          <p:nvPr/>
-        </p:nvSpPr>
-        <p:spPr>
-          <a:xfrm>
-            <a:off x="868680" y="1874520"/>
-            <a:ext cx="4769968" cy="502920"/>
-          </a:xfrm>
-          <a:prstGeom prst="rect">
-            <a:avLst/>
-          </a:prstGeom>
-          <a:noFill/>
-          <a:ln/>
-        </p:spPr>
-        <p:txBody>
-          <a:bodyPr wrap="square" lIns="0" tIns="0" rIns="0" bIns="0" rtlCol="0" anchor="t"/>
-          <a:lstStyle/>
-          <a:p>
-            <a:pPr indent="0" marL="0">
-              <a:buNone/>
-            </a:pPr>
-            <a:r>
-              <a:rPr lang="en-US" sz="2400" b="1" dirty="0">
-                <a:solidFill>
-                  <a:schemeClr val="accent5"/>
-                </a:solidFill>
-              </a:rPr>
-              <a:t>Built together</a:t>
-            </a:r>
-            <a:endParaRPr lang="en-US" sz="2400" dirty="0"/>
-          </a:p>
-        </p:txBody>
-      </p:sp>
-      <p:sp>
-        <p:nvSpPr>
-          <p:cNvPr id="5" name="reuse-0-list"/>
-          <p:cNvSpPr txBox="1"/>
-          <p:nvPr/>
-        </p:nvSpPr>
-        <p:spPr>
-          <a:xfrm>
-            <a:off x="868680" y="2514600"/>
-            <a:ext cx="4769968" cy="1920240"/>
-          </a:xfrm>
-          <a:prstGeom prst="rect">
-            <a:avLst/>
-          </a:prstGeom>
-          <a:noFill/>
-          <a:ln/>
-        </p:spPr>
-        <p:txBody>
-          <a:bodyPr wrap="square" lIns="0" tIns="0" rIns="0" bIns="0" rtlCol="0" anchor="t"/>
-          <a:lstStyle/>
-          <a:p>
-            <a:pPr marL="342900" indent="-342900">
-              <a:spcAft>
-                <a:spcPts val="800"/>
-              </a:spcAft>
-              <a:buSzPct val="100000"/>
-              <a:buChar char="•"/>
-            </a:pPr>
-            <a:r>
-              <a:rPr lang="en-US" sz="1600" dirty="0">
-                <a:solidFill>
-                  <a:schemeClr val="accent6"/>
-                </a:solidFill>
-              </a:rPr>
-              <a:t>Business users confirmed the feature catalogue</a:t>
-            </a:r>
-            <a:endParaRPr lang="en-US" sz="1600" dirty="0"/>
-          </a:p>
-          <a:p>
-            <a:pPr marL="342900" indent="-342900">
-              <a:spcAft>
-                <a:spcPts val="800"/>
-              </a:spcAft>
-              <a:buSzPct val="100000"/>
-              <a:buChar char="•"/>
-            </a:pPr>
-            <a:r>
-              <a:rPr lang="en-US" sz="1600" dirty="0">
-                <a:solidFill>
-                  <a:schemeClr val="accent6"/>
-                </a:solidFill>
-              </a:rPr>
-              <a:t>Data and security owners kept restricted views intact</a:t>
-            </a:r>
-            <a:endParaRPr lang="en-US" sz="1600" dirty="0"/>
-          </a:p>
-          <a:p>
-            <a:pPr marL="342900" indent="-342900">
-              <a:spcAft>
-                <a:spcPts val="800"/>
-              </a:spcAft>
-              <a:buSzPct val="100000"/>
-              <a:buChar char="•"/>
-            </a:pPr>
-            <a:r>
-              <a:rPr lang="en-US" sz="1600" dirty="0">
-                <a:solidFill>
-                  <a:schemeClr val="accent6"/>
-                </a:solidFill>
-              </a:rPr>
-              <a:t>Backend and frontend fixes shipped together</a:t>
-            </a:r>
-            <a:endParaRPr lang="en-US" sz="1600" dirty="0"/>
-          </a:p>
-        </p:txBody>
-      </p:sp>
-      <p:sp>
-        <p:nvSpPr>
-          <p:cNvPr id="6" name="reuse-1-card"/>
-          <p:cNvSpPr/>
-          <p:nvPr/>
-        </p:nvSpPr>
-        <p:spPr>
-          <a:xfrm>
-            <a:off x="6233008" y="1600200"/>
-            <a:ext cx="5410048" cy="3017520"/>
-          </a:xfrm>
-          <a:prstGeom prst="roundRect">
-            <a:avLst>
-              <a:gd name="adj" fmla="val 3636"/>
-            </a:avLst>
-          </a:prstGeom>
-          <a:solidFill>
-            <a:schemeClr val="accent4"/>
-          </a:solidFill>
-          <a:ln/>
-        </p:spPr>
-      </p:sp>
-      <p:sp>
-        <p:nvSpPr>
-          <p:cNvPr id="7" name="reuse-1-title"/>
-          <p:cNvSpPr txBox="1"/>
-          <p:nvPr/>
-        </p:nvSpPr>
-        <p:spPr>
-          <a:xfrm>
-            <a:off x="6553048" y="1874520"/>
-            <a:ext cx="4769968" cy="502920"/>
-          </a:xfrm>
-          <a:prstGeom prst="rect">
-            <a:avLst/>
-          </a:prstGeom>
-          <a:noFill/>
-          <a:ln/>
-        </p:spPr>
-        <p:txBody>
-          <a:bodyPr wrap="square" lIns="0" tIns="0" rIns="0" bIns="0" rtlCol="0" anchor="t"/>
-          <a:lstStyle/>
-          <a:p>
-            <a:pPr indent="0" marL="0">
-              <a:buNone/>
-            </a:pPr>
-            <a:r>
-              <a:rPr lang="en-US" sz="2400" b="1" dirty="0">
-                <a:solidFill>
-                  <a:schemeClr val="accent5"/>
-                </a:solidFill>
-              </a:rPr>
-              <a:t>Ready to transfer</a:t>
-            </a:r>
-            <a:endParaRPr lang="en-US" sz="2400" dirty="0"/>
-          </a:p>
-        </p:txBody>
-      </p:sp>
-      <p:sp>
-        <p:nvSpPr>
-          <p:cNvPr id="8" name="reuse-1-list"/>
-          <p:cNvSpPr txBox="1"/>
-          <p:nvPr/>
-        </p:nvSpPr>
-        <p:spPr>
-          <a:xfrm>
-            <a:off x="6553048" y="2514600"/>
-            <a:ext cx="4769968" cy="1920240"/>
-          </a:xfrm>
-          <a:prstGeom prst="rect">
-            <a:avLst/>
-          </a:prstGeom>
-          <a:noFill/>
-          <a:ln/>
-        </p:spPr>
-        <p:txBody>
-          <a:bodyPr wrap="square" lIns="0" tIns="0" rIns="0" bIns="0" rtlCol="0" anchor="t"/>
-          <a:lstStyle/>
-          <a:p>
-            <a:pPr marL="342900" indent="-342900">
-              <a:spcAft>
-                <a:spcPts val="800"/>
-              </a:spcAft>
-              <a:buSzPct val="100000"/>
-              <a:buChar char="•"/>
-            </a:pPr>
-            <a:r>
-              <a:rPr lang="en-US" sz="1600" dirty="0">
-                <a:solidFill>
-                  <a:schemeClr val="accent6"/>
-                </a:solidFill>
-              </a:rPr>
-              <a:t>Other Slate apps in [business areas]</a:t>
-            </a:r>
-            <a:endParaRPr lang="en-US" sz="1600" dirty="0"/>
-          </a:p>
-          <a:p>
-            <a:pPr marL="342900" indent="-342900">
-              <a:spcAft>
-                <a:spcPts val="800"/>
-              </a:spcAft>
-              <a:buSzPct val="100000"/>
-              <a:buChar char="•"/>
-            </a:pPr>
-            <a:r>
-              <a:rPr lang="en-US" sz="1600" dirty="0">
-                <a:solidFill>
-                  <a:schemeClr val="accent6"/>
-                </a:solidFill>
-              </a:rPr>
-              <a:t>Any low-code tool with little documentation</a:t>
-            </a:r>
-            <a:endParaRPr lang="en-US" sz="1600" dirty="0"/>
-          </a:p>
-          <a:p>
-            <a:pPr marL="342900" indent="-342900">
-              <a:spcAft>
-                <a:spcPts val="800"/>
-              </a:spcAft>
-              <a:buSzPct val="100000"/>
-              <a:buChar char="•"/>
-            </a:pPr>
-            <a:r>
-              <a:rPr lang="en-US" sz="1600" dirty="0">
-                <a:solidFill>
-                  <a:schemeClr val="accent6"/>
-                </a:solidFill>
-              </a:rPr>
-              <a:t>Reusable as is: pack-project.ts, comparison template, diagrams</a:t>
-            </a:r>
-            <a:endParaRPr lang="en-US" sz="1600" dirty="0"/>
-          </a:p>
-        </p:txBody>
-      </p:sp>
-      <p:sp>
-        <p:nvSpPr>
-          <p:cNvPr id="9" name="closing"/>
-          <p:cNvSpPr txBox="1"/>
-          <p:nvPr/>
-        </p:nvSpPr>
-        <p:spPr>
-          <a:xfrm>
-            <a:off x="548640" y="5120640"/>
-            <a:ext cx="11094415" cy="548640"/>
-          </a:xfrm>
-          <a:prstGeom prst="rect">
-            <a:avLst/>
-          </a:prstGeom>
-          <a:noFill/>
-          <a:ln/>
-        </p:spPr>
-        <p:txBody>
-          <a:bodyPr wrap="square" lIns="0" tIns="0" rIns="0" bIns="0" rtlCol="0" anchor="t"/>
-          <a:lstStyle/>
-          <a:p>
-            <a:pPr indent="0" marL="0">
-              <a:buNone/>
-            </a:pPr>
-            <a:r>
-              <a:rPr lang="en-US" sz="2200" b="1" dirty="0">
-                <a:solidFill>
-                  <a:schemeClr val="bg1"/>
-                </a:solidFill>
-              </a:rPr>
-              <a:t>Pack. Extract. Compare. Fix. Document. Repeat for the next app.</a:t>
-            </a:r>
-            <a:endParaRPr lang="en-US" sz="2200" dirty="0"/>
-          </a:p>
-        </p:txBody>
-      </p:sp>
-    </p:spTree>
-  </p:cSld>
-  <p:clrMapOvr>
-    <a:masterClrMapping/>
-  </p:clrMapOvr>
-  <p:transition spd="med">
-    <p:fade/>
-  </p:transition>
-  <p:timing>
-    <p:tnLst>
-      <p:par>
-        <p:cTn id="1" dur="indefinite" restart="never" nodeType="tmRoot">
-          <p:childTnLst>
-            <p:seq concurrent="1" nextAc="seek">
-              <p:cTn id="2" dur="indefinite" nodeType="mainSeq">
-                <p:childTnLst>
-                  <p:par>
-                    <p:cTn id="27" fill="hold">
-                      <p:stCondLst>
-                        <p:cond delay="indefinite"/>
-                        <p:cond evt="onBegin" delay="0">
-                          <p:tn val="2"/>
-                        </p:cond>
-                      </p:stCondLst>
-                      <p:childTnLst>
-                        <p:par>
-                          <p:cTn id="12" fill="hold">
-                            <p:stCondLst>
-                              <p:cond delay="0"/>
-                            </p:stCondLst>
-                            <p:childTnLst>
-                              <p:par>
-                                <p:cTn id="3" presetID="10" presetClass="entr" presetSubtype="0" fill="hold" grpId="0" nodeType="afterEffect">
-                                  <p:stCondLst>
-                                    <p:cond delay="0"/>
-                                  </p:stCondLst>
-                                  <p:childTnLst>
-                                    <p:set>
-                                      <p:cBhvr>
-                                        <p:cTn id="4" dur="1" fill="hold">
-                                          <p:stCondLst>
-                                            <p:cond delay="0"/>
-                                          </p:stCondLst>
-                                        </p:cTn>
-                                        <p:tgtEl>
-                                          <p:spTgt spid="3"/>
-                                        </p:tgtEl>
-                                        <p:attrNameLst>
-                                          <p:attrName>style.visibility</p:attrName>
-                                        </p:attrNameLst>
-                                      </p:cBhvr>
-                                      <p:to>
-                                        <p:strVal val="visible"/>
-                                      </p:to>
-                                    </p:set>
-                                    <p:animEffect transition="in" filter="fade">
-                                      <p:cBhvr>
-                                        <p:cTn id="5" dur="450"/>
-                                        <p:tgtEl>
-                                          <p:spTgt spid="3"/>
-                                        </p:tgtEl>
-                                      </p:cBhvr>
-                                    </p:animEffect>
-                                  </p:childTnLst>
-                                </p:cTn>
-                              </p:par>
-                              <p:par>
-                                <p:cTn id="6" presetID="10" presetClass="entr" presetSubtype="0" fill="hold" grpId="0" nodeType="withEffect">
-                                  <p:stCondLst>
-                                    <p:cond delay="0"/>
-                                  </p:stCondLst>
-                                  <p:childTnLst>
-                                    <p:set>
-                                      <p:cBhvr>
-                                        <p:cTn id="7" dur="1" fill="hold">
-                                          <p:stCondLst>
-                                            <p:cond delay="0"/>
-                                          </p:stCondLst>
-                                        </p:cTn>
-                                        <p:tgtEl>
-                                          <p:spTgt spid="4"/>
-                                        </p:tgtEl>
-                                        <p:attrNameLst>
-                                          <p:attrName>style.visibility</p:attrName>
-                                        </p:attrNameLst>
-                                      </p:cBhvr>
-                                      <p:to>
-                                        <p:strVal val="visible"/>
-                                      </p:to>
-                                    </p:set>
-                                    <p:animEffect transition="in" filter="fade">
-                                      <p:cBhvr>
-                                        <p:cTn id="8" dur="450"/>
-                                        <p:tgtEl>
-                                          <p:spTgt spid="4"/>
-                                        </p:tgtEl>
-                                      </p:cBhvr>
-                                    </p:animEffect>
-                                  </p:childTnLst>
-                                </p:cTn>
-                              </p:par>
-                              <p:par>
-                                <p:cTn id="9" presetID="10" presetClass="entr" presetSubtype="0" fill="hold" grpId="0" nodeType="withEffect">
-                                  <p:stCondLst>
-                                    <p:cond delay="0"/>
-                                  </p:stCondLst>
-                                  <p:childTnLst>
-                                    <p:set>
-                                      <p:cBhvr>
-                                        <p:cTn id="10" dur="1" fill="hold">
-                                          <p:stCondLst>
-                                            <p:cond delay="0"/>
-                                          </p:stCondLst>
-                                        </p:cTn>
-                                        <p:tgtEl>
-                                          <p:spTgt spid="5"/>
-                                        </p:tgtEl>
-                                        <p:attrNameLst>
-                                          <p:attrName>style.visibility</p:attrName>
-                                        </p:attrNameLst>
-                                      </p:cBhvr>
-                                      <p:to>
-                                        <p:strVal val="visible"/>
-                                      </p:to>
-                                    </p:set>
-                                    <p:animEffect transition="in" filter="fade">
-                                      <p:cBhvr>
-                                        <p:cTn id="11" dur="450"/>
-                                        <p:tgtEl>
-                                          <p:spTgt spid="5"/>
-                                        </p:tgtEl>
-                                      </p:cBhvr>
-                                    </p:animEffect>
-                                  </p:childTnLst>
-                                </p:cTn>
-                              </p:par>
-                            </p:childTnLst>
-                          </p:cTn>
-                        </p:par>
-                        <p:par>
-                          <p:cTn id="22" fill="hold">
-                            <p:stCondLst>
-                              <p:cond delay="600"/>
-                            </p:stCondLst>
-                            <p:childTnLst>
-                              <p:par>
-                                <p:cTn id="13" presetID="10" presetClass="entr" presetSubtype="0" fill="hold" grpId="0" nodeType="afterEffect">
-                                  <p:stCondLst>
-                                    <p:cond delay="0"/>
-                                  </p:stCondLst>
-                                  <p:childTnLst>
-                                    <p:set>
-                                      <p:cBhvr>
-                                        <p:cTn id="14" dur="1" fill="hold">
-                                          <p:stCondLst>
-                                            <p:cond delay="0"/>
-                                          </p:stCondLst>
-                                        </p:cTn>
-                                        <p:tgtEl>
-                                          <p:spTgt spid="6"/>
-                                        </p:tgtEl>
-                                        <p:attrNameLst>
-                                          <p:attrName>style.visibility</p:attrName>
-                                        </p:attrNameLst>
-                                      </p:cBhvr>
-                                      <p:to>
-                                        <p:strVal val="visible"/>
-                                      </p:to>
-                                    </p:set>
-                                    <p:animEffect transition="in" filter="fade">
-                                      <p:cBhvr>
-                                        <p:cTn id="15" dur="450"/>
-                                        <p:tgtEl>
-                                          <p:spTgt spid="6"/>
-                                        </p:tgtEl>
-                                      </p:cBhvr>
-                                    </p:animEffect>
-                                  </p:childTnLst>
-                                </p:cTn>
-                              </p:par>
-                              <p:par>
-                                <p:cTn id="16" presetID="10" presetClass="entr" presetSubtype="0" fill="hold" grpId="0" nodeType="withEffect">
-                                  <p:stCondLst>
-                                    <p:cond delay="0"/>
-                                  </p:stCondLst>
-                                  <p:childTnLst>
-                                    <p:set>
-                                      <p:cBhvr>
-                                        <p:cTn id="17" dur="1" fill="hold">
-                                          <p:stCondLst>
-                                            <p:cond delay="0"/>
-                                          </p:stCondLst>
-                                        </p:cTn>
-                                        <p:tgtEl>
-                                          <p:spTgt spid="7"/>
-                                        </p:tgtEl>
-                                        <p:attrNameLst>
-                                          <p:attrName>style.visibility</p:attrName>
-                                        </p:attrNameLst>
-                                      </p:cBhvr>
-                                      <p:to>
-                                        <p:strVal val="visible"/>
-                                      </p:to>
-                                    </p:set>
-                                    <p:animEffect transition="in" filter="fade">
-                                      <p:cBhvr>
-                                        <p:cTn id="18" dur="450"/>
-                                        <p:tgtEl>
-                                          <p:spTgt spid="7"/>
-                                        </p:tgtEl>
-                                      </p:cBhvr>
-                                    </p:animEffect>
-                                  </p:childTnLst>
-                                </p:cTn>
-                              </p:par>
-                              <p:par>
-                                <p:cTn id="19" presetID="10" presetClass="entr" presetSubtype="0" fill="hold" grpId="0" nodeType="withEffect">
-                                  <p:stCondLst>
-                                    <p:cond delay="0"/>
-                                  </p:stCondLst>
-                                  <p:childTnLst>
-                                    <p:set>
-                                      <p:cBhvr>
-                                        <p:cTn id="20" dur="1" fill="hold">
-                                          <p:stCondLst>
-                                            <p:cond delay="0"/>
-                                          </p:stCondLst>
-                                        </p:cTn>
-                                        <p:tgtEl>
-                                          <p:spTgt spid="8"/>
-                                        </p:tgtEl>
-                                        <p:attrNameLst>
-                                          <p:attrName>style.visibility</p:attrName>
-                                        </p:attrNameLst>
-                                      </p:cBhvr>
-                                      <p:to>
-                                        <p:strVal val="visible"/>
-                                      </p:to>
-                                    </p:set>
-                                    <p:animEffect transition="in" filter="fade">
-                                      <p:cBhvr>
-                                        <p:cTn id="21" dur="450"/>
-                                        <p:tgtEl>
-                                          <p:spTgt spid="8"/>
-                                        </p:tgtEl>
-                                      </p:cBhvr>
-                                    </p:animEffect>
-                                  </p:childTnLst>
-                                </p:cTn>
-                              </p:par>
-                            </p:childTnLst>
-                          </p:cTn>
-                        </p:par>
-                        <p:par>
-                          <p:cTn id="26" fill="hold">
-                            <p:stCondLst>
-                              <p:cond delay="1200"/>
-                            </p:stCondLst>
-                            <p:childTnLst>
-                              <p:par>
-                                <p:cTn id="23" presetID="22" presetClass="entr" presetSubtype="8" fill="hold" grpId="0" nodeType="afterEffect">
-                                  <p:stCondLst>
-                                    <p:cond delay="0"/>
-                                  </p:stCondLst>
-                                  <p:childTnLst>
-                                    <p:set>
-                                      <p:cBhvr>
-                                        <p:cTn id="24" dur="1" fill="hold">
-                                          <p:stCondLst>
-                                            <p:cond delay="0"/>
-                                          </p:stCondLst>
-                                        </p:cTn>
-                                        <p:tgtEl>
-                                          <p:spTgt spid="9"/>
-                                        </p:tgtEl>
-                                        <p:attrNameLst>
-                                          <p:attrName>style.visibility</p:attrName>
-                                        </p:attrNameLst>
-                                      </p:cBhvr>
-                                      <p:to>
-                                        <p:strVal val="visible"/>
-                                      </p:to>
-                                    </p:set>
-                                    <p:animEffect transition="in" filter="wipe(left)">
-                                      <p:cBhvr>
-                                        <p:cTn id="25" dur="450"/>
-                                        <p:tgtEl>
-                                          <p:spTgt spid="9"/>
-                                        </p:tgtEl>
-                                      </p:cBhvr>
-                                    </p:animEffect>
-                                  </p:childTnLst>
-                                </p:cTn>
-                              </p:par>
-                            </p:childTnLst>
-                          </p:cTn>
-                        </p:par>
-                      </p:childTnLst>
-                    </p:cTn>
-                  </p:par>
-                </p:childTnLst>
-              </p:cTn>
-              <p:prevCondLst>
-                <p:cond evt="onPrev" delay="0">
-                  <p:tgtEl>
-                    <p:sldTgt/>
-                  </p:tgtEl>
-                </p:cond>
-              </p:prevCondLst>
-              <p:nextCondLst>
-                <p:cond evt="onNext" delay="0">
-                  <p:tgtEl>
-                    <p:sldTgt/>
-                  </p:tgtEl>
-                </p:cond>
-              </p:nextCondLst>
-            </p:seq>
-          </p:childTnLst>
-        </p:cTn>
-      </p:par>
-    </p:tnLst>
-    <p:bldLst>
-      <p:bldP spid="3" grpId="0" animBg="1"/>
-      <p:bldP spid="4" grpId="0" animBg="1"/>
-      <p:bldP spid="5" grpId="0" animBg="1"/>
-      <p:bldP spid="6" grpId="0" animBg="1"/>
-      <p:bldP spid="7" grpId="0" animBg="1"/>
-      <p:bldP spid="8" grpId="0" animBg="1"/>
-      <p:bldP spid="9" grpId="0" animBg="1"/>
     </p:bldLst>
   </p:timing>
 </p:sld>

--- a/erm-migration/docs/ERM-Migration-Jury-Pitch.pptx
+++ b/erm-migration/docs/ERM-Migration-Jury-Pitch.pptx
@@ -15,9 +15,11 @@
     <p:sldId id="263" r:id="rId9"/>
     <p:sldId id="264" r:id="rId10"/>
     <p:sldId id="265" r:id="rId11"/>
+    <p:sldId id="266" r:id="rId12"/>
+    <p:sldId id="267" r:id="rId13"/>
   </p:sldIdLst>
   <p:notesMasterIdLst>
-    <p:notesMasterId r:id="rId12"/>
+    <p:notesMasterId r:id="rId14"/>
   </p:notesMasterIdLst>
   <p:sldSz cx="12192000" cy="6858000"/>
   <p:notesSz cx="6858000" cy="12192000"/>
@@ -116,34 +118,36 @@
   <p:extLst>
     <p:ext uri="{521415D9-36F7-43E2-AB2F-B90AF26B5E84}">
       <p14:sectionLst xmlns:p14="http://schemas.microsoft.com/office/powerpoint/2010/main">
-        <p14:section name="Pitch" id="{5a4117e8-c564-181e-71ff-e2b3a13fe395}">
+        <p14:section name="Pitch" id="{83b1d746-5b28-bed1-c464-566bdc46c5ea}">
           <p14:sldIdLst>
             <p14:sldId id="256"/>
           </p14:sldIdLst>
         </p14:section>
-        <p14:section name="Context" id="{6f710263-6f10-959d-061e-86330f3866bd}">
+        <p14:section name="Context" id="{53bd2f11-1b3a-425f-dfa3-638970568ff5}">
           <p14:sldIdLst>
             <p14:sldId id="257"/>
             <p14:sldId id="258"/>
+            <p14:sldId id="259"/>
           </p14:sldIdLst>
         </p14:section>
-        <p14:section name="Problem and method" id="{317d8d76-0c4d-1e5c-cccd-62233d700f44}">
+        <p14:section name="Problem and method" id="{81d264ee-4375-f104-7b5e-94509d06cdfc}">
           <p14:sldIdLst>
-            <p14:sldId id="259"/>
             <p14:sldId id="260"/>
+            <p14:sldId id="261"/>
           </p14:sldIdLst>
         </p14:section>
-        <p14:section name="Impact" id="{b638069e-a3e6-45a6-1c19-061f13c9ce07}">
+        <p14:section name="Impact" id="{5a036a39-1e8b-97f6-a7f4-333f28002c40}">
           <p14:sldIdLst>
-            <p14:sldId id="261"/>
             <p14:sldId id="262"/>
             <p14:sldId id="263"/>
             <p14:sldId id="264"/>
+            <p14:sldId id="265"/>
+            <p14:sldId id="266"/>
           </p14:sldIdLst>
         </p14:section>
-        <p14:section name="Reuse" id="{8e6d4886-642c-f9fe-d047-7681406ce1b6}">
+        <p14:section name="Reuse" id="{e309fc29-39cd-325d-1291-d37e4b108333}">
           <p14:sldIdLst>
-            <p14:sldId id="265"/>
+            <p14:sldId id="267"/>
           </p14:sldIdLst>
         </p14:section>
       </p14:sectionLst>
@@ -570,6 +574,273 @@
 </c:chartSpace>
 </file>
 
+<file path=ppt/charts/chart2.xml><?xml version="1.0" encoding="utf-8"?>
+<c:chartSpace xmlns:c="http://schemas.openxmlformats.org/drawingml/2006/chart" xmlns:a="http://schemas.openxmlformats.org/drawingml/2006/main" xmlns:r="http://schemas.openxmlformats.org/officeDocument/2006/relationships">
+  <c:date1904 val="0"/>
+  <c:roundedCorners val="1"/>
+  <c:chart>
+    <c:autoTitleDeleted val="1"/>
+    <c:plotArea>
+      <c:layout/>
+      <c:barChart>
+        <c:barDir val="col"/>
+        <c:grouping val="clustered"/>
+        <c:varyColors val="0"/>
+        <c:ser>
+          <c:idx val="0"/>
+          <c:order val="0"/>
+          <c:tx>
+            <c:strRef>
+              <c:f>Sheet1!$B$1</c:f>
+              <c:strCache>
+                <c:ptCount val="1"/>
+                <c:pt idx="0">
+                  <c:v>Unique users</c:v>
+                </c:pt>
+              </c:strCache>
+            </c:strRef>
+          </c:tx>
+          <c:spPr>
+            <a:solidFill>
+              <a:srgbClr val="0085CA"/>
+            </a:solidFill>
+            <a:effectLst/>
+          </c:spPr>
+          <c:invertIfNegative val="0"/>
+          <c:dLbls>
+            <c:numFmt formatCode="#,##0" sourceLinked="0"/>
+            <c:txPr>
+              <a:bodyPr/>
+              <a:lstStyle/>
+              <a:p>
+                <a:pPr>
+                  <a:defRPr b="0" i="0" strike="noStrike" sz="1100" u="none">
+                    <a:solidFill>
+                      <a:srgbClr val="00205B"/>
+                    </a:solidFill>
+                    <a:latin typeface="+mn-lt"/>
+                  </a:defRPr>
+                </a:pPr>
+              </a:p>
+            </c:txPr>
+            <c:showLegendKey val="0"/>
+            <c:showVal val="1"/>
+            <c:showCatName val="0"/>
+            <c:showSerName val="0"/>
+            <c:showPercent val="0"/>
+            <c:showBubbleSize val="0"/>
+            <c:showLeaderLines val="0"/>
+          </c:dLbls>
+          <c:cat>
+            <c:multiLvlStrRef>
+              <c:f>Sheet1!$A$2:$A$8</c:f>
+              <c:multiLvlStrCache>
+                <c:ptCount val="7"/>
+                <c:lvl>
+                  <c:pt idx="0">
+                    <c:v>B</c:v>
+                  </c:pt>
+                  <c:pt idx="1">
+                    <c:v>O</c:v>
+                  </c:pt>
+                  <c:pt idx="2">
+                    <c:v>P</c:v>
+                  </c:pt>
+                  <c:pt idx="3">
+                    <c:v>A</c:v>
+                  </c:pt>
+                  <c:pt idx="4">
+                    <c:v>L</c:v>
+                  </c:pt>
+                  <c:pt idx="5">
+                    <c:v>S</c:v>
+                  </c:pt>
+                  <c:pt idx="6">
+                    <c:v>K</c:v>
+                  </c:pt>
+                </c:lvl>
+              </c:multiLvlStrCache>
+            </c:multiLvlStrRef>
+          </c:cat>
+          <c:val>
+            <c:numRef>
+              <c:f>Sheet1!$B$2:$B$8</c:f>
+              <c:numCache>
+                <c:formatCode>General</c:formatCode>
+                <c:ptCount val="7"/>
+                <c:pt idx="0">
+                  <c:v>345</c:v>
+                </c:pt>
+                <c:pt idx="1">
+                  <c:v>120</c:v>
+                </c:pt>
+                <c:pt idx="2">
+                  <c:v>95</c:v>
+                </c:pt>
+                <c:pt idx="3">
+                  <c:v>60</c:v>
+                </c:pt>
+                <c:pt idx="4">
+                  <c:v>55</c:v>
+                </c:pt>
+                <c:pt idx="5">
+                  <c:v>55</c:v>
+                </c:pt>
+                <c:pt idx="6">
+                  <c:v>50</c:v>
+                </c:pt>
+              </c:numCache>
+            </c:numRef>
+          </c:val>
+        </c:ser>
+        <c:dLbls>
+          <c:numFmt formatCode="#,##0" sourceLinked="0"/>
+          <c:txPr>
+            <a:bodyPr/>
+            <a:lstStyle/>
+            <a:p>
+              <a:pPr>
+                <a:defRPr b="0" i="0" strike="noStrike" sz="1100" u="none">
+                  <a:solidFill>
+                    <a:srgbClr val="00205B"/>
+                  </a:solidFill>
+                  <a:latin typeface="+mn-lt"/>
+                </a:defRPr>
+              </a:pPr>
+            </a:p>
+          </c:txPr>
+          <c:showLegendKey val="0"/>
+          <c:showVal val="1"/>
+          <c:showCatName val="0"/>
+          <c:showSerName val="0"/>
+          <c:showPercent val="0"/>
+          <c:showBubbleSize val="0"/>
+          <c:showLeaderLines val="0"/>
+        </c:dLbls>
+        <c:gapWidth val="40"/>
+        <c:overlap val="0"/>
+        <c:axId val="2094734554"/>
+        <c:axId val="2094734552"/>
+        <c:axId val="2094734556"/>
+      </c:barChart>
+      <c:catAx>
+        <c:axId val="2094734554"/>
+        <c:scaling>
+          <c:orientation val="minMax"/>
+        </c:scaling>
+        <c:delete val="0"/>
+        <c:axPos val="b"/>
+        <c:numFmt formatCode="General" sourceLinked="1"/>
+        <c:majorTickMark val="out"/>
+        <c:minorTickMark val="none"/>
+        <c:tickLblPos val="low"/>
+        <c:spPr>
+          <a:ln w="12700" cap="flat">
+            <a:solidFill>
+              <a:srgbClr val="888888"/>
+            </a:solidFill>
+            <a:prstDash val="solid"/>
+            <a:round/>
+          </a:ln>
+        </c:spPr>
+        <c:txPr>
+          <a:bodyPr/>
+          <a:lstStyle/>
+          <a:p>
+            <a:pPr>
+              <a:defRPr sz="1200" b="0" i="0" u="none" strike="noStrike">
+                <a:solidFill>
+                  <a:srgbClr val="4A5568"/>
+                </a:solidFill>
+                <a:latin typeface="+mn-lt"/>
+              </a:defRPr>
+            </a:pPr>
+            <a:endParaRPr lang="en-US"/>
+          </a:p>
+        </c:txPr>
+        <c:crossAx val="2094734552"/>
+        <c:crosses val="autoZero"/>
+        <c:auto val="1"/>
+        <c:lblAlgn val="ctr"/>
+        <c:noMultiLvlLbl val="1"/>
+      </c:catAx>
+      <c:valAx>
+        <c:axId val="2094734552"/>
+        <c:scaling>
+          <c:orientation val="minMax"/>
+          <c:max val="400"/>
+          <c:min val="0"/>
+        </c:scaling>
+        <c:delete val="0"/>
+        <c:axPos val="l"/>
+        <c:majorGridlines>
+          <c:spPr>
+            <a:ln w="9525" cap="flat">
+              <a:solidFill>
+                <a:srgbClr val="DCE3EE"/>
+              </a:solidFill>
+              <a:prstDash val="solid"/>
+              <a:round/>
+            </a:ln>
+          </c:spPr>
+        </c:majorGridlines>
+        <c:numFmt formatCode="General" sourceLinked="0"/>
+        <c:majorTickMark val="out"/>
+        <c:minorTickMark val="none"/>
+        <c:tickLblPos val="nextTo"/>
+        <c:spPr>
+          <a:ln w="12700" cap="flat">
+            <a:solidFill>
+              <a:srgbClr val="888888"/>
+            </a:solidFill>
+            <a:prstDash val="solid"/>
+            <a:round/>
+          </a:ln>
+        </c:spPr>
+        <c:txPr>
+          <a:bodyPr/>
+          <a:lstStyle/>
+          <a:p>
+            <a:pPr>
+              <a:defRPr sz="1000" b="0" i="0" u="none" strike="noStrike">
+                <a:solidFill>
+                  <a:srgbClr val="4A5568"/>
+                </a:solidFill>
+                <a:latin typeface="+mn-lt"/>
+              </a:defRPr>
+            </a:pPr>
+            <a:endParaRPr lang="en-US"/>
+          </a:p>
+        </c:txPr>
+        <c:crossAx val="2094734554"/>
+        <c:crosses val="autoZero"/>
+        <c:crossBetween val="between"/>
+        <c:majorUnit val="100"/>
+      </c:valAx>
+      <c:spPr>
+        <a:noFill/>
+        <a:ln>
+          <a:noFill/>
+        </a:ln>
+        <a:effectLst/>
+      </c:spPr>
+    </c:plotArea>
+    <c:plotVisOnly val="1"/>
+    <c:dispBlanksAs val="span"/>
+  </c:chart>
+  <c:spPr>
+    <a:noFill/>
+    <a:ln>
+      <a:noFill/>
+    </a:ln>
+    <a:effectLst/>
+  </c:spPr>
+  <c:externalData r:id="rId1">
+    <c:autoUpdate val="0"/>
+  </c:externalData>
+</c:chartSpace>
+</file>
+
 <file path=ppt/notesMasters/notesMaster1.xml><?xml version="1.0" encoding="utf-8"?>
 <p:notesMaster xmlns:a="http://schemas.openxmlformats.org/drawingml/2006/main" xmlns:r="http://schemas.openxmlformats.org/officeDocument/2006/relationships" xmlns:p="http://schemas.openxmlformats.org/presentationml/2006/main">
   <p:cSld>
@@ -1053,7 +1324,7 @@
           <a:p>
             <a:r>
               <a:rPr lang="en-US" dirty="0"/>
-              <a:t>Close on reuse. This was a team effort across business, data and security, backend and frontend; name the teams. The method needs only the legacy export, the new codebase and an AI model, so it carries over to other Slate apps and to other legacy tools. The pieces are ready: pack-project.ts, the comparison document layout and the diagram formats. End with the five-word playbook and invite questions.</a:t>
+              <a:t>Let the business speak. These are testimonials sent by ERM stakeholders in September 2026 about the team and the ERM tool. A member of the ERM centre of competence: teamwork with the business and strong IT skills turned an idea into a user-friendly industrial solution, ERM reports are now generated in a much more automated way, and the user interface and performance have significantly improved. An ERM stakeholder: the ERM dashboard is a tremendous addition to the ERM toolset, and more and more users prepare and run their risk and opportunity reviews with it. A Risk and Opportunity Manager in Hamburg: new features made navigation easier and gave a much clearer view of R&amp;O data, and issues were fixed quickly. Make clear these speak about the team and the tool overall.</a:t>
             </a:r>
             <a:endParaRPr lang="en-US" dirty="0"/>
           </a:p>
@@ -1077,6 +1348,182 @@
             <a:fld id="{F7021451-1387-4CA6-816F-3879F97B5CBC}" type="slidenum">
               <a:rPr lang="en-US"/>
               <a:t>10</a:t>
+            </a:fld>
+            <a:endParaRPr lang="en-US"/>
+          </a:p>
+        </p:txBody>
+      </p:sp>
+    </p:spTree>
+    <p:extLst>
+      <p:ext uri="{BB962C8B-B14F-4D97-AF65-F5344CB8AC3E}">
+        <p14:creationId xmlns:p14="http://schemas.microsoft.com/office/powerpoint/2010/main" val="1024086991"/>
+      </p:ext>
+    </p:extLst>
+  </p:cSld>
+  <p:clrMapOvr>
+    <a:masterClrMapping/>
+  </p:clrMapOvr>
+</p:notes>
+</file>
+
+<file path=ppt/notesSlides/notesSlide11.xml><?xml version="1.0" encoding="utf-8"?>
+<p:notes xmlns:a="http://schemas.openxmlformats.org/drawingml/2006/main" xmlns:r="http://schemas.openxmlformats.org/officeDocument/2006/relationships" xmlns:p="http://schemas.openxmlformats.org/presentationml/2006/main">
+  <p:cSld>
+    <p:spTree>
+      <p:nvGrpSpPr>
+        <p:cNvPr id="1" name=""/>
+        <p:cNvGrpSpPr/>
+        <p:nvPr/>
+      </p:nvGrpSpPr>
+      <p:grpSpPr>
+        <a:xfrm>
+          <a:off x="0" y="0"/>
+          <a:ext cx="0" cy="0"/>
+          <a:chOff x="0" y="0"/>
+          <a:chExt cx="0" cy="0"/>
+        </a:xfrm>
+      </p:grpSpPr>
+      <p:sp>
+        <p:nvSpPr>
+          <p:cNvPr id="2" name="Slide Image Placeholder 1"/>
+          <p:cNvSpPr>
+            <a:spLocks noGrp="1" noRot="1" noChangeAspect="1"/>
+          </p:cNvSpPr>
+          <p:nvPr>
+            <p:ph type="sldImg"/>
+          </p:nvPr>
+        </p:nvSpPr>
+        <p:spPr/>
+      </p:sp>
+      <p:sp>
+        <p:nvSpPr>
+          <p:cNvPr id="3" name="Notes Placeholder 2"/>
+          <p:cNvSpPr>
+            <a:spLocks noGrp="1"/>
+          </p:cNvSpPr>
+          <p:nvPr>
+            <p:ph type="body" idx="1"/>
+          </p:nvPr>
+        </p:nvSpPr>
+        <p:spPr/>
+        <p:txBody>
+          <a:bodyPr/>
+          <a:lstStyle/>
+          <a:p>
+            <a:r>
+              <a:rPr lang="en-US" dirty="0"/>
+              <a:t>This slide ties the project to four 2026 objectives; the flow builds one branch at a time. One: Leverage AI to solve business problems. The AI read all 8 Slate exports and the packed React code, recovered 105 features from an undocumented app and found 31 gaps. Two: Deliver on time, on cost, on quality. Two developers delivered it in one PI, about 76% less effort than a generic manual estimate. Three: Ensure our operational performance. ERM is a business system; every one of its 105 features was tracked for parity, and it is rebuilt on standard, maintainable React and OSDK code, ready to replace the legacy Slate configuration. Four: Grow digital acumen and competencies. pack-project.ts and the playbook mean other teams can repeat this, which builds AI-assisted engineering skills across the organisation.</a:t>
+            </a:r>
+            <a:endParaRPr lang="en-US" dirty="0"/>
+          </a:p>
+        </p:txBody>
+      </p:sp>
+      <p:sp>
+        <p:nvSpPr>
+          <p:cNvPr id="4" name="Slide Number Placeholder 3"/>
+          <p:cNvSpPr>
+            <a:spLocks noGrp="1"/>
+          </p:cNvSpPr>
+          <p:nvPr>
+            <p:ph type="sldNum" sz="quarter" idx="10"/>
+          </p:nvPr>
+        </p:nvSpPr>
+        <p:spPr/>
+        <p:txBody>
+          <a:bodyPr/>
+          <a:lstStyle/>
+          <a:p>
+            <a:fld id="{F7021451-1387-4CA6-816F-3879F97B5CBC}" type="slidenum">
+              <a:rPr lang="en-US"/>
+              <a:t>11</a:t>
+            </a:fld>
+            <a:endParaRPr lang="en-US"/>
+          </a:p>
+        </p:txBody>
+      </p:sp>
+    </p:spTree>
+    <p:extLst>
+      <p:ext uri="{BB962C8B-B14F-4D97-AF65-F5344CB8AC3E}">
+        <p14:creationId xmlns:p14="http://schemas.microsoft.com/office/powerpoint/2010/main" val="1024086991"/>
+      </p:ext>
+    </p:extLst>
+  </p:cSld>
+  <p:clrMapOvr>
+    <a:masterClrMapping/>
+  </p:clrMapOvr>
+</p:notes>
+</file>
+
+<file path=ppt/notesSlides/notesSlide12.xml><?xml version="1.0" encoding="utf-8"?>
+<p:notes xmlns:a="http://schemas.openxmlformats.org/drawingml/2006/main" xmlns:r="http://schemas.openxmlformats.org/officeDocument/2006/relationships" xmlns:p="http://schemas.openxmlformats.org/presentationml/2006/main">
+  <p:cSld>
+    <p:spTree>
+      <p:nvGrpSpPr>
+        <p:cNvPr id="1" name=""/>
+        <p:cNvGrpSpPr/>
+        <p:nvPr/>
+      </p:nvGrpSpPr>
+      <p:grpSpPr>
+        <a:xfrm>
+          <a:off x="0" y="0"/>
+          <a:ext cx="0" cy="0"/>
+          <a:chOff x="0" y="0"/>
+          <a:chExt cx="0" cy="0"/>
+        </a:xfrm>
+      </p:grpSpPr>
+      <p:sp>
+        <p:nvSpPr>
+          <p:cNvPr id="2" name="Slide Image Placeholder 1"/>
+          <p:cNvSpPr>
+            <a:spLocks noGrp="1" noRot="1" noChangeAspect="1"/>
+          </p:cNvSpPr>
+          <p:nvPr>
+            <p:ph type="sldImg"/>
+          </p:nvPr>
+        </p:nvSpPr>
+        <p:spPr/>
+      </p:sp>
+      <p:sp>
+        <p:nvSpPr>
+          <p:cNvPr id="3" name="Notes Placeholder 2"/>
+          <p:cNvSpPr>
+            <a:spLocks noGrp="1"/>
+          </p:cNvSpPr>
+          <p:nvPr>
+            <p:ph type="body" idx="1"/>
+          </p:nvPr>
+        </p:nvSpPr>
+        <p:spPr/>
+        <p:txBody>
+          <a:bodyPr/>
+          <a:lstStyle/>
+          <a:p>
+            <a:r>
+              <a:rPr lang="en-US" dirty="0"/>
+              <a:t>Close on reuse. This was a team effort across business, data and security, backend and frontend; name the teams. The method needs only the legacy export, the new codebase and an AI model, so it carries over to other Slate apps and to other legacy tools. The pieces are ready: pack-project.ts, the comparison document layout and the diagram formats. End with the five-word playbook and invite questions.</a:t>
+            </a:r>
+            <a:endParaRPr lang="en-US" dirty="0"/>
+          </a:p>
+        </p:txBody>
+      </p:sp>
+      <p:sp>
+        <p:nvSpPr>
+          <p:cNvPr id="4" name="Slide Number Placeholder 3"/>
+          <p:cNvSpPr>
+            <a:spLocks noGrp="1"/>
+          </p:cNvSpPr>
+          <p:nvPr>
+            <p:ph type="sldNum" sz="quarter" idx="10"/>
+          </p:nvPr>
+        </p:nvSpPr>
+        <p:spPr/>
+        <p:txBody>
+          <a:bodyPr/>
+          <a:lstStyle/>
+          <a:p>
+            <a:fld id="{F7021451-1387-4CA6-816F-3879F97B5CBC}" type="slidenum">
+              <a:rPr lang="en-US"/>
+              <a:t>12</a:t>
             </a:fld>
             <a:endParaRPr lang="en-US"/>
           </a:p>
@@ -1229,7 +1676,7 @@
           <a:p>
             <a:r>
               <a:rPr lang="en-US" dirty="0"/>
-              <a:t>Make the stakes clear. 892 people have used ERM across engineering, programmes and operations, with a monthly peak above 320 active risk managers. More than 1,600 dashboards have been created and more than 10 are updated every day. The trend shows monthly unique users growing from launch in summer 2024 to around 300 a month in 2026. Usage spans France, Germany, the UK, Spain, Canada and India, led by Blagnac and Hamburg. That is why the migration could not be a rewrite from memory: every feature had to be found and carried over.</a:t>
+              <a:t>Make the stakes clear. 892 people have used ERM across engineering, programmes and operations, with a monthly peak above 320 active risk managers. More than 1,600 dashboards have been created and more than 10 are updated every day. The trend shows monthly unique users growing from launch in summer 2024 to around 300 a month in 2026. That is why the migration could not be a rewrite from memory: every feature had to be found and carried over.</a:t>
             </a:r>
             <a:endParaRPr lang="en-US" dirty="0"/>
           </a:p>
@@ -1317,7 +1764,7 @@
           <a:p>
             <a:r>
               <a:rPr lang="en-US" dirty="0"/>
-              <a:t>Why migrate at all. In Slate, even a simple action triggers a cascade of widgets, events, actions and variables, so one change can break unrelated features, and every tab switch recalculates large variable trees. On top of that, nothing was documented: 8 exports, about 25 MB of configuration. Let the animation play: we first broke the app into its shell and 7 modules, then had AI extract every feature, 105 in total. The target is Airbus DevX with React and OSDK: modular components that can change safely and navigate instantly.</a:t>
+              <a:t>ERM is not one team's tool. By organisation, the largest group, siglum B, has around 345 users, followed by O, P, A, L, S and K, and about a dozen smaller organisations. By site, Blagnac and Hamburg lead, with users in the UK, Spain, Canada and India too. The values on the organisation chart are read from the usage dashboard, so treat them as approximate. A migration that broke ERM would hit risk reporting across the company.</a:t>
             </a:r>
             <a:endParaRPr lang="en-US" dirty="0"/>
           </a:p>
@@ -1405,7 +1852,7 @@
           <a:p>
             <a:r>
               <a:rPr lang="en-US" dirty="0"/>
-              <a:t>The key idea is context. AI only knows what you give it, so we wrote pack-project.ts: one command walks the React project and writes every source file, under its path, into a single dated dump. The AI sees components, hooks, OSDK calls and types together. The Slate side is already one JSON file per module. With both, the AI compares each of the 105 features to the React code. The animation shows each Slate module landing in its React tab. Gaps get fixed, reviewed and deployed; then we re-pack and re-check until nothing unplanned is left. Features we dropped on purpose, like the heatmap slider and report KPIs, are marked as choices, not gaps.</a:t>
+              <a:t>Why migrate at all. In Slate, even a simple action triggers a cascade of widgets, events, actions and variables, so one change can break unrelated features, and every tab switch recalculates large variable trees. On top of that, nothing was documented: 8 exports, about 25 MB of configuration. Let the animation play: we first broke the app into its shell and 7 modules, then had AI extract every feature, 105 in total. The target is Airbus DevX with React and OSDK: modular components that can change safely and navigate instantly.</a:t>
             </a:r>
             <a:endParaRPr lang="en-US" dirty="0"/>
           </a:p>
@@ -1493,7 +1940,7 @@
           <a:p>
             <a:r>
               <a:rPr lang="en-US" dirty="0"/>
-              <a:t>Walk the numbers left to right. One PI for the whole migration. 105 features recovered from an app with no documentation, out of 8 Slate exports totalling about 25 MB. pack-project.ts turned 75 React files into one context file. The AI review found and prioritised 31 gaps, 7 of them security or data-integrity issues such as unsanitised rich text and permission checks, all caught in review. The React app adds 5 enhancements the old app did not have: a fourth one-pager layout with custom slots, resizable table columns, report classification and cover toggle, a report slideshow, and an explicit new-iteration step. Documentation went from nothing to 10 documents: 8 architecture and lifecycle diagrams, the feature comparison and the playbook.</a:t>
+              <a:t>The key idea is context. AI only knows what you give it, so we wrote pack-project.ts: one command walks the React project and writes every source file, under its path, into a single dated dump. The AI sees components, hooks, OSDK calls and types together. The Slate side is already one JSON file per module. With both, the AI compares each of the 105 features to the React code. The animation shows each Slate module landing in its React tab. Gaps get fixed, reviewed and deployed; then we re-pack and re-check until nothing unplanned is left. Features we dropped on purpose, like the heatmap slider and report KPIs, are marked as choices, not gaps.</a:t>
             </a:r>
             <a:endParaRPr lang="en-US" dirty="0"/>
           </a:p>
@@ -1581,7 +2028,7 @@
           <a:p>
             <a:r>
               <a:rPr lang="en-US" dirty="0"/>
-              <a:t>These are generic industry-style estimates, not our measured baseline; say so if asked. A manual migration of 105 features typically needs about half a day per feature to reverse-engineer it, two days to rebuild it and half a day to test parity, plus about 25 days to document the app: roughly 340 person-days, or about 17 sprints for our team of 2 developers, more than 4 PIs. We did it in one PI, 4 development sprints, which is about 76% less effort. Then say where the time went: discovery was the biggest saving, because the AI catalogued 105 features straight from the Slate exports with no documentation to read; gap analysis, because every feature was checked against the packed React code; and documentation, because the diagrams were produced alongside the work instead of afterwards.</a:t>
+              <a:t>Walk the numbers left to right. One PI for the whole migration. 105 features recovered from an app with no documentation, out of 8 Slate exports totalling about 25 MB. pack-project.ts turned 75 React files into one context file. The AI review found and prioritised 31 gaps, 7 of them security or data-integrity issues such as unsanitised rich text and permission checks, all caught in review. The React app adds 11 features the old app did not have, from a searchable dashboard switcher and a web address per tab to a report slideshow; the next slides show them. Security and data-integrity findings caught in review: stored cross-site scripting from unsanitised rich HTML in 5 places; permission checks that matched e-mails by substring instead of exactly; sharing payload arrays misaligned with the wrong fields; settings JSON overwritten whole from a stale copy; reports printing shared risks the legacy app left out; no 100-risk print cap, a legacy cybersecurity limit; and children edits in the risk drawer silently discarded. Documentation went from nothing to 10 documents: 8 architecture and lifecycle diagrams, the feature comparison and the playbook.</a:t>
             </a:r>
             <a:endParaRPr lang="en-US" dirty="0"/>
           </a:p>
@@ -1669,7 +2116,7 @@
           <a:p>
             <a:r>
               <a:rPr lang="en-US" dirty="0"/>
-              <a:t>Let the business speak. These are testimonials sent by ERM stakeholders in September 2026 about the team and the ERM tool. A member of the ERM centre of competence: teamwork with the business and strong IT skills turned an idea into a proof of concept, and the user interface and performance have significantly improved since. An ERM stakeholder: the ERM dashboard is a tremendous addition to the ERM toolset, and more and more users prepare and run their risk and opportunity reviews with it. A Risk and Opportunity Manager in Hamburg: new features made navigation easier and gave a much clearer view of R&amp;O data, and issues were fixed quickly. Make clear these speak about the team and the tool overall.</a:t>
+              <a:t>These are generic industry-style estimates, not our measured baseline; say so if asked. A manual migration of 105 features typically needs about half a day per feature to reverse-engineer it, two days to rebuild it and half a day to test parity, plus about 25 days to document the app: roughly 340 person-days, or about 17 sprints for our team of 2 developers, more than 4 PIs. We did it in one PI, 4 development sprints, which is about 76% less effort. At $38.50 per developer hour, that is roughly $105,000 of manual effort against about $25,000 actual: around $80,000 saved. Then say where the time went: discovery was the biggest saving, because the AI catalogued 105 features straight from the Slate exports with no documentation to read; gap analysis, because every feature was checked against the packed React code; and documentation, because the diagrams were produced alongside the work instead of afterwards.</a:t>
             </a:r>
             <a:endParaRPr lang="en-US" dirty="0"/>
           </a:p>
@@ -1757,7 +2204,7 @@
           <a:p>
             <a:r>
               <a:rPr lang="en-US" dirty="0"/>
-              <a:t>This slide ties the project to four 2026 objectives; the flow builds one branch at a time. One: Leverage AI to solve business problems. The AI read all 8 Slate exports and the packed React code, recovered 105 features from an undocumented app and found 31 gaps. Two: Deliver on time, on cost, on quality. Two developers delivered it in one PI, about 76% less effort than a generic manual estimate. Three: Ensure our operational performance. ERM is a business system; every one of its 105 features was tracked for parity, and it now runs on standard, maintainable React and OSDK code instead of legacy Slate configuration. Four: Grow digital acumen and competencies. pack-project.ts and the playbook mean other teams can repeat this, which builds AI-assisted engineering skills across the organisation.</a:t>
+              <a:t>Building new features is now easy, and that keeps paying back. During the same PI we shipped 11 features Slate never had: permissions-only edit for locked versions, a web address per tab, a searchable dashboard switcher, a criticality-differs filter, category and impact-category filters, a fourth one-pager layout with custom slots, resizable columns saved per board, report classification and cover toggle, slideshow mode, one-pager selection shortcuts, and showing risks by ID or title. One change added app-wide notifications and automatic list refresh across 11 files. 25 MB of Slate configuration became about 0.8 MB of typed source in 75 files. In Slate, a feature meant wiring widgets, events, variables and functions across 8 exports, with no documentation; in React it is one typed component and one OSDK call, and pack-project.ts gives AI the whole app as context. On recurring cost: using a common rule of thumb that maintenance costs about 20% of build effort a year, a Slate-equivalent app would need about 68 person-days a year, around $21,000 at $38.50 an hour. Assuming modular, typed, documented code halves that, we save around $10,000 a year. Say clearly these are estimates.</a:t>
             </a:r>
             <a:endParaRPr lang="en-US" dirty="0"/>
           </a:p>
@@ -2689,6 +3136,3113 @@
             <a:r>
               <a:rPr lang="en-US" sz="3600" b="1" dirty="0">
                 <a:solidFill>
+                  <a:schemeClr val="tx1"/>
+                </a:solidFill>
+              </a:rPr>
+              <a:t>What the business says</a:t>
+            </a:r>
+            <a:endParaRPr lang="en-US" sz="3600" dirty="0"/>
+          </a:p>
+        </p:txBody>
+      </p:sp>
+      <p:sp>
+        <p:nvSpPr>
+          <p:cNvPr id="3" name="quote-sub"/>
+          <p:cNvSpPr txBox="1"/>
+          <p:nvPr/>
+        </p:nvSpPr>
+        <p:spPr>
+          <a:xfrm>
+            <a:off x="548640" y="1115568"/>
+            <a:ext cx="11094415" cy="320040"/>
+          </a:xfrm>
+          <a:prstGeom prst="rect">
+            <a:avLst/>
+          </a:prstGeom>
+          <a:noFill/>
+          <a:ln/>
+        </p:spPr>
+        <p:txBody>
+          <a:bodyPr wrap="square" lIns="0" tIns="0" rIns="0" bIns="0" rtlCol="0" anchor="t"/>
+          <a:lstStyle/>
+          <a:p>
+            <a:pPr indent="0" marL="0">
+              <a:buNone/>
+            </a:pPr>
+            <a:r>
+              <a:rPr lang="en-US" sz="1400" dirty="0">
+                <a:solidFill>
+                  <a:schemeClr val="tx2"/>
+                </a:solidFill>
+              </a:rPr>
+              <a:t>Feedback from ERM business stakeholders, September 2026</a:t>
+            </a:r>
+            <a:endParaRPr lang="en-US" sz="1400" dirty="0"/>
+          </a:p>
+        </p:txBody>
+      </p:sp>
+      <p:sp>
+        <p:nvSpPr>
+          <p:cNvPr id="4" name="quote-0-card"/>
+          <p:cNvSpPr/>
+          <p:nvPr/>
+        </p:nvSpPr>
+        <p:spPr>
+          <a:xfrm>
+            <a:off x="548640" y="1645920"/>
+            <a:ext cx="3515258" cy="4480560"/>
+          </a:xfrm>
+          <a:prstGeom prst="roundRect">
+            <a:avLst>
+              <a:gd name="adj" fmla="val 3121"/>
+            </a:avLst>
+          </a:prstGeom>
+          <a:solidFill>
+            <a:schemeClr val="tx1"/>
+          </a:solidFill>
+          <a:ln/>
+        </p:spPr>
+      </p:sp>
+      <p:sp>
+        <p:nvSpPr>
+          <p:cNvPr id="5" name="quote-0-mark"/>
+          <p:cNvSpPr txBox="1"/>
+          <p:nvPr/>
+        </p:nvSpPr>
+        <p:spPr>
+          <a:xfrm>
+            <a:off x="822960" y="1783080"/>
+            <a:ext cx="914400" cy="731520"/>
+          </a:xfrm>
+          <a:prstGeom prst="rect">
+            <a:avLst/>
+          </a:prstGeom>
+          <a:noFill/>
+          <a:ln/>
+        </p:spPr>
+        <p:txBody>
+          <a:bodyPr wrap="square" lIns="0" tIns="0" rIns="0" bIns="0" rtlCol="0" anchor="t"/>
+          <a:lstStyle/>
+          <a:p>
+            <a:pPr indent="0" marL="0">
+              <a:buNone/>
+            </a:pPr>
+            <a:r>
+              <a:rPr lang="en-US" sz="6000" b="1" dirty="0">
+                <a:solidFill>
+                  <a:schemeClr val="accent5"/>
+                </a:solidFill>
+              </a:rPr>
+              <a:t>“</a:t>
+            </a:r>
+            <a:endParaRPr lang="en-US" sz="6000" dirty="0"/>
+          </a:p>
+        </p:txBody>
+      </p:sp>
+      <p:sp>
+        <p:nvSpPr>
+          <p:cNvPr id="6" name="quote-0-text"/>
+          <p:cNvSpPr txBox="1"/>
+          <p:nvPr/>
+        </p:nvSpPr>
+        <p:spPr>
+          <a:xfrm>
+            <a:off x="822960" y="2514600"/>
+            <a:ext cx="2966618" cy="2606040"/>
+          </a:xfrm>
+          <a:prstGeom prst="rect">
+            <a:avLst/>
+          </a:prstGeom>
+          <a:noFill/>
+          <a:ln/>
+        </p:spPr>
+        <p:txBody>
+          <a:bodyPr wrap="square" lIns="0" tIns="0" rIns="0" bIns="0" rtlCol="0" anchor="t"/>
+          <a:lstStyle/>
+          <a:p>
+            <a:pPr indent="0" marL="0">
+              <a:buNone/>
+            </a:pPr>
+            <a:r>
+              <a:rPr lang="en-US" sz="1800" i="1" dirty="0">
+                <a:solidFill>
+                  <a:schemeClr val="bg1"/>
+                </a:solidFill>
+              </a:rPr>
+              <a:t>Thanks to a mix of regular teamwork with the business and strong IT skills, they have turned an idea into a user-friendly industrial [solution]… User interface and performance have significantly improved.</a:t>
+            </a:r>
+            <a:endParaRPr lang="en-US" sz="1800" dirty="0"/>
+          </a:p>
+        </p:txBody>
+      </p:sp>
+      <p:sp>
+        <p:nvSpPr>
+          <p:cNvPr id="7" name="quote-0-who"/>
+          <p:cNvSpPr txBox="1"/>
+          <p:nvPr/>
+        </p:nvSpPr>
+        <p:spPr>
+          <a:xfrm>
+            <a:off x="822960" y="5166360"/>
+            <a:ext cx="2966618" cy="731520"/>
+          </a:xfrm>
+          <a:prstGeom prst="rect">
+            <a:avLst/>
+          </a:prstGeom>
+          <a:noFill/>
+          <a:ln/>
+        </p:spPr>
+        <p:txBody>
+          <a:bodyPr wrap="square" lIns="0" tIns="0" rIns="0" bIns="0" rtlCol="0" anchor="b"/>
+          <a:lstStyle/>
+          <a:p>
+            <a:pPr indent="0" marL="0">
+              <a:buNone/>
+            </a:pPr>
+            <a:r>
+              <a:rPr lang="en-US" sz="1400" b="1" dirty="0">
+                <a:solidFill>
+                  <a:schemeClr val="bg1"/>
+                </a:solidFill>
+              </a:rPr>
+              <a:t>ERM Centre of Competence</a:t>
+            </a:r>
+            <a:endParaRPr lang="en-US" sz="1400" dirty="0"/>
+          </a:p>
+          <a:p>
+            <a:pPr indent="0" marL="0">
+              <a:buNone/>
+            </a:pPr>
+            <a:r>
+              <a:rPr lang="en-US" sz="1200" dirty="0">
+                <a:solidFill>
+                  <a:schemeClr val="accent5"/>
+                </a:solidFill>
+              </a:rPr>
+              <a:t>Enterprise Risk Management</a:t>
+            </a:r>
+            <a:endParaRPr lang="en-US" sz="1400" dirty="0"/>
+          </a:p>
+        </p:txBody>
+      </p:sp>
+      <p:sp>
+        <p:nvSpPr>
+          <p:cNvPr id="8" name="quote-1-card"/>
+          <p:cNvSpPr/>
+          <p:nvPr/>
+        </p:nvSpPr>
+        <p:spPr>
+          <a:xfrm>
+            <a:off x="4338218" y="1645920"/>
+            <a:ext cx="3515258" cy="4480560"/>
+          </a:xfrm>
+          <a:prstGeom prst="roundRect">
+            <a:avLst>
+              <a:gd name="adj" fmla="val 3121"/>
+            </a:avLst>
+          </a:prstGeom>
+          <a:solidFill>
+            <a:schemeClr val="bg1"/>
+          </a:solidFill>
+          <a:ln/>
+        </p:spPr>
+      </p:sp>
+      <p:sp>
+        <p:nvSpPr>
+          <p:cNvPr id="9" name="quote-1-mark"/>
+          <p:cNvSpPr txBox="1"/>
+          <p:nvPr/>
+        </p:nvSpPr>
+        <p:spPr>
+          <a:xfrm>
+            <a:off x="4612538" y="1783080"/>
+            <a:ext cx="914400" cy="731520"/>
+          </a:xfrm>
+          <a:prstGeom prst="rect">
+            <a:avLst/>
+          </a:prstGeom>
+          <a:noFill/>
+          <a:ln/>
+        </p:spPr>
+        <p:txBody>
+          <a:bodyPr wrap="square" lIns="0" tIns="0" rIns="0" bIns="0" rtlCol="0" anchor="t"/>
+          <a:lstStyle/>
+          <a:p>
+            <a:pPr indent="0" marL="0">
+              <a:buNone/>
+            </a:pPr>
+            <a:r>
+              <a:rPr lang="en-US" sz="6000" b="1" dirty="0">
+                <a:solidFill>
+                  <a:schemeClr val="accent3"/>
+                </a:solidFill>
+              </a:rPr>
+              <a:t>“</a:t>
+            </a:r>
+            <a:endParaRPr lang="en-US" sz="6000" dirty="0"/>
+          </a:p>
+        </p:txBody>
+      </p:sp>
+      <p:sp>
+        <p:nvSpPr>
+          <p:cNvPr id="10" name="quote-1-text"/>
+          <p:cNvSpPr txBox="1"/>
+          <p:nvPr/>
+        </p:nvSpPr>
+        <p:spPr>
+          <a:xfrm>
+            <a:off x="4612538" y="2514600"/>
+            <a:ext cx="2966618" cy="2606040"/>
+          </a:xfrm>
+          <a:prstGeom prst="rect">
+            <a:avLst/>
+          </a:prstGeom>
+          <a:noFill/>
+          <a:ln/>
+        </p:spPr>
+        <p:txBody>
+          <a:bodyPr wrap="square" lIns="0" tIns="0" rIns="0" bIns="0" rtlCol="0" anchor="t"/>
+          <a:lstStyle/>
+          <a:p>
+            <a:pPr indent="0" marL="0">
+              <a:buNone/>
+            </a:pPr>
+            <a:r>
+              <a:rPr lang="en-US" sz="1800" i="1" dirty="0">
+                <a:solidFill>
+                  <a:schemeClr val="tx1"/>
+                </a:solidFill>
+              </a:rPr>
+              <a:t>The Skywise ERM dashboard application is a tremendous addition to our ERM toolset… More and more users regularly prepare and facilitate risks &amp; opportunities reviews with the application.</a:t>
+            </a:r>
+            <a:endParaRPr lang="en-US" sz="1800" dirty="0"/>
+          </a:p>
+        </p:txBody>
+      </p:sp>
+      <p:sp>
+        <p:nvSpPr>
+          <p:cNvPr id="11" name="quote-1-who"/>
+          <p:cNvSpPr txBox="1"/>
+          <p:nvPr/>
+        </p:nvSpPr>
+        <p:spPr>
+          <a:xfrm>
+            <a:off x="4612538" y="5166360"/>
+            <a:ext cx="2966618" cy="731520"/>
+          </a:xfrm>
+          <a:prstGeom prst="rect">
+            <a:avLst/>
+          </a:prstGeom>
+          <a:noFill/>
+          <a:ln/>
+        </p:spPr>
+        <p:txBody>
+          <a:bodyPr wrap="square" lIns="0" tIns="0" rIns="0" bIns="0" rtlCol="0" anchor="b"/>
+          <a:lstStyle/>
+          <a:p>
+            <a:pPr indent="0" marL="0">
+              <a:buNone/>
+            </a:pPr>
+            <a:r>
+              <a:rPr lang="en-US" sz="1400" b="1" dirty="0">
+                <a:solidFill>
+                  <a:schemeClr val="tx1"/>
+                </a:solidFill>
+              </a:rPr>
+              <a:t>ERM stakeholder</a:t>
+            </a:r>
+            <a:endParaRPr lang="en-US" sz="1400" dirty="0"/>
+          </a:p>
+          <a:p>
+            <a:pPr indent="0" marL="0">
+              <a:buNone/>
+            </a:pPr>
+            <a:r>
+              <a:rPr lang="en-US" sz="1200" dirty="0">
+                <a:solidFill>
+                  <a:schemeClr val="tx2"/>
+                </a:solidFill>
+              </a:rPr>
+              <a:t>[Role]</a:t>
+            </a:r>
+            <a:endParaRPr lang="en-US" sz="1400" dirty="0"/>
+          </a:p>
+        </p:txBody>
+      </p:sp>
+      <p:sp>
+        <p:nvSpPr>
+          <p:cNvPr id="12" name="quote-2-card"/>
+          <p:cNvSpPr/>
+          <p:nvPr/>
+        </p:nvSpPr>
+        <p:spPr>
+          <a:xfrm>
+            <a:off x="8127797" y="1645920"/>
+            <a:ext cx="3515258" cy="4480560"/>
+          </a:xfrm>
+          <a:prstGeom prst="roundRect">
+            <a:avLst>
+              <a:gd name="adj" fmla="val 3121"/>
+            </a:avLst>
+          </a:prstGeom>
+          <a:solidFill>
+            <a:schemeClr val="bg1"/>
+          </a:solidFill>
+          <a:ln/>
+        </p:spPr>
+      </p:sp>
+      <p:sp>
+        <p:nvSpPr>
+          <p:cNvPr id="13" name="quote-2-mark"/>
+          <p:cNvSpPr txBox="1"/>
+          <p:nvPr/>
+        </p:nvSpPr>
+        <p:spPr>
+          <a:xfrm>
+            <a:off x="8402117" y="1783080"/>
+            <a:ext cx="914400" cy="731520"/>
+          </a:xfrm>
+          <a:prstGeom prst="rect">
+            <a:avLst/>
+          </a:prstGeom>
+          <a:noFill/>
+          <a:ln/>
+        </p:spPr>
+        <p:txBody>
+          <a:bodyPr wrap="square" lIns="0" tIns="0" rIns="0" bIns="0" rtlCol="0" anchor="t"/>
+          <a:lstStyle/>
+          <a:p>
+            <a:pPr indent="0" marL="0">
+              <a:buNone/>
+            </a:pPr>
+            <a:r>
+              <a:rPr lang="en-US" sz="6000" b="1" dirty="0">
+                <a:solidFill>
+                  <a:schemeClr val="accent3"/>
+                </a:solidFill>
+              </a:rPr>
+              <a:t>“</a:t>
+            </a:r>
+            <a:endParaRPr lang="en-US" sz="6000" dirty="0"/>
+          </a:p>
+        </p:txBody>
+      </p:sp>
+      <p:sp>
+        <p:nvSpPr>
+          <p:cNvPr id="14" name="quote-2-text"/>
+          <p:cNvSpPr txBox="1"/>
+          <p:nvPr/>
+        </p:nvSpPr>
+        <p:spPr>
+          <a:xfrm>
+            <a:off x="8402117" y="2514600"/>
+            <a:ext cx="2966618" cy="2606040"/>
+          </a:xfrm>
+          <a:prstGeom prst="rect">
+            <a:avLst/>
+          </a:prstGeom>
+          <a:noFill/>
+          <a:ln/>
+        </p:spPr>
+        <p:txBody>
+          <a:bodyPr wrap="square" lIns="0" tIns="0" rIns="0" bIns="0" rtlCol="0" anchor="t"/>
+          <a:lstStyle/>
+          <a:p>
+            <a:pPr indent="0" marL="0">
+              <a:buNone/>
+            </a:pPr>
+            <a:r>
+              <a:rPr lang="en-US" sz="1800" i="1" dirty="0">
+                <a:solidFill>
+                  <a:schemeClr val="tx1"/>
+                </a:solidFill>
+              </a:rPr>
+              <a:t>They built great new features that make navigation easier and give us a much clearer view of our R&amp;O data. Whenever bugs or issues came up, they fixed them quickly and efficiently.</a:t>
+            </a:r>
+            <a:endParaRPr lang="en-US" sz="1800" dirty="0"/>
+          </a:p>
+        </p:txBody>
+      </p:sp>
+      <p:sp>
+        <p:nvSpPr>
+          <p:cNvPr id="15" name="quote-2-who"/>
+          <p:cNvSpPr txBox="1"/>
+          <p:nvPr/>
+        </p:nvSpPr>
+        <p:spPr>
+          <a:xfrm>
+            <a:off x="8402117" y="5166360"/>
+            <a:ext cx="2966618" cy="731520"/>
+          </a:xfrm>
+          <a:prstGeom prst="rect">
+            <a:avLst/>
+          </a:prstGeom>
+          <a:noFill/>
+          <a:ln/>
+        </p:spPr>
+        <p:txBody>
+          <a:bodyPr wrap="square" lIns="0" tIns="0" rIns="0" bIns="0" rtlCol="0" anchor="b"/>
+          <a:lstStyle/>
+          <a:p>
+            <a:pPr indent="0" marL="0">
+              <a:buNone/>
+            </a:pPr>
+            <a:r>
+              <a:rPr lang="en-US" sz="1400" b="1" dirty="0">
+                <a:solidFill>
+                  <a:schemeClr val="tx1"/>
+                </a:solidFill>
+              </a:rPr>
+              <a:t>Risk and Opportunity Manager</a:t>
+            </a:r>
+            <a:endParaRPr lang="en-US" sz="1400" dirty="0"/>
+          </a:p>
+          <a:p>
+            <a:pPr indent="0" marL="0">
+              <a:buNone/>
+            </a:pPr>
+            <a:r>
+              <a:rPr lang="en-US" sz="1200" dirty="0">
+                <a:solidFill>
+                  <a:schemeClr val="tx2"/>
+                </a:solidFill>
+              </a:rPr>
+              <a:t>Airbus Operations GmbH, Hamburg</a:t>
+            </a:r>
+            <a:endParaRPr lang="en-US" sz="1400" dirty="0"/>
+          </a:p>
+        </p:txBody>
+      </p:sp>
+    </p:spTree>
+  </p:cSld>
+  <p:clrMapOvr>
+    <a:masterClrMapping/>
+  </p:clrMapOvr>
+  <p:transition spd="med">
+    <p:fade/>
+  </p:transition>
+  <p:timing>
+    <p:tnLst>
+      <p:par>
+        <p:cTn id="1" dur="indefinite" restart="never" nodeType="tmRoot">
+          <p:childTnLst>
+            <p:seq concurrent="1" nextAc="seek">
+              <p:cTn id="2" dur="indefinite" nodeType="mainSeq">
+                <p:childTnLst>
+                  <p:par>
+                    <p:cTn id="46" fill="hold">
+                      <p:stCondLst>
+                        <p:cond delay="indefinite"/>
+                        <p:cond evt="onBegin" delay="0">
+                          <p:tn val="2"/>
+                        </p:cond>
+                      </p:stCondLst>
+                      <p:childTnLst>
+                        <p:par>
+                          <p:cTn id="6" fill="hold">
+                            <p:stCondLst>
+                              <p:cond delay="0"/>
+                            </p:stCondLst>
+                            <p:childTnLst>
+                              <p:par>
+                                <p:cTn id="3" presetID="10" presetClass="entr" presetSubtype="0" fill="hold" grpId="0" nodeType="afterEffect">
+                                  <p:stCondLst>
+                                    <p:cond delay="0"/>
+                                  </p:stCondLst>
+                                  <p:childTnLst>
+                                    <p:set>
+                                      <p:cBhvr>
+                                        <p:cTn id="4" dur="1" fill="hold">
+                                          <p:stCondLst>
+                                            <p:cond delay="0"/>
+                                          </p:stCondLst>
+                                        </p:cTn>
+                                        <p:tgtEl>
+                                          <p:spTgt spid="3"/>
+                                        </p:tgtEl>
+                                        <p:attrNameLst>
+                                          <p:attrName>style.visibility</p:attrName>
+                                        </p:attrNameLst>
+                                      </p:cBhvr>
+                                      <p:to>
+                                        <p:strVal val="visible"/>
+                                      </p:to>
+                                    </p:set>
+                                    <p:animEffect transition="in" filter="fade">
+                                      <p:cBhvr>
+                                        <p:cTn id="5" dur="450"/>
+                                        <p:tgtEl>
+                                          <p:spTgt spid="3"/>
+                                        </p:tgtEl>
+                                      </p:cBhvr>
+                                    </p:animEffect>
+                                  </p:childTnLst>
+                                </p:cTn>
+                              </p:par>
+                            </p:childTnLst>
+                          </p:cTn>
+                        </p:par>
+                        <p:par>
+                          <p:cTn id="19" fill="hold">
+                            <p:stCondLst>
+                              <p:cond delay="600"/>
+                            </p:stCondLst>
+                            <p:childTnLst>
+                              <p:par>
+                                <p:cTn id="7" presetID="10" presetClass="entr" presetSubtype="0" fill="hold" grpId="0" nodeType="afterEffect">
+                                  <p:stCondLst>
+                                    <p:cond delay="0"/>
+                                  </p:stCondLst>
+                                  <p:childTnLst>
+                                    <p:set>
+                                      <p:cBhvr>
+                                        <p:cTn id="8" dur="1" fill="hold">
+                                          <p:stCondLst>
+                                            <p:cond delay="0"/>
+                                          </p:stCondLst>
+                                        </p:cTn>
+                                        <p:tgtEl>
+                                          <p:spTgt spid="4"/>
+                                        </p:tgtEl>
+                                        <p:attrNameLst>
+                                          <p:attrName>style.visibility</p:attrName>
+                                        </p:attrNameLst>
+                                      </p:cBhvr>
+                                      <p:to>
+                                        <p:strVal val="visible"/>
+                                      </p:to>
+                                    </p:set>
+                                    <p:animEffect transition="in" filter="fade">
+                                      <p:cBhvr>
+                                        <p:cTn id="9" dur="450"/>
+                                        <p:tgtEl>
+                                          <p:spTgt spid="4"/>
+                                        </p:tgtEl>
+                                      </p:cBhvr>
+                                    </p:animEffect>
+                                  </p:childTnLst>
+                                </p:cTn>
+                              </p:par>
+                              <p:par>
+                                <p:cTn id="10" presetID="10" presetClass="entr" presetSubtype="0" fill="hold" grpId="0" nodeType="withEffect">
+                                  <p:stCondLst>
+                                    <p:cond delay="0"/>
+                                  </p:stCondLst>
+                                  <p:childTnLst>
+                                    <p:set>
+                                      <p:cBhvr>
+                                        <p:cTn id="11" dur="1" fill="hold">
+                                          <p:stCondLst>
+                                            <p:cond delay="0"/>
+                                          </p:stCondLst>
+                                        </p:cTn>
+                                        <p:tgtEl>
+                                          <p:spTgt spid="5"/>
+                                        </p:tgtEl>
+                                        <p:attrNameLst>
+                                          <p:attrName>style.visibility</p:attrName>
+                                        </p:attrNameLst>
+                                      </p:cBhvr>
+                                      <p:to>
+                                        <p:strVal val="visible"/>
+                                      </p:to>
+                                    </p:set>
+                                    <p:animEffect transition="in" filter="fade">
+                                      <p:cBhvr>
+                                        <p:cTn id="12" dur="450"/>
+                                        <p:tgtEl>
+                                          <p:spTgt spid="5"/>
+                                        </p:tgtEl>
+                                      </p:cBhvr>
+                                    </p:animEffect>
+                                  </p:childTnLst>
+                                </p:cTn>
+                              </p:par>
+                              <p:par>
+                                <p:cTn id="13" presetID="10" presetClass="entr" presetSubtype="0" fill="hold" grpId="0" nodeType="withEffect">
+                                  <p:stCondLst>
+                                    <p:cond delay="0"/>
+                                  </p:stCondLst>
+                                  <p:childTnLst>
+                                    <p:set>
+                                      <p:cBhvr>
+                                        <p:cTn id="14" dur="1" fill="hold">
+                                          <p:stCondLst>
+                                            <p:cond delay="0"/>
+                                          </p:stCondLst>
+                                        </p:cTn>
+                                        <p:tgtEl>
+                                          <p:spTgt spid="6"/>
+                                        </p:tgtEl>
+                                        <p:attrNameLst>
+                                          <p:attrName>style.visibility</p:attrName>
+                                        </p:attrNameLst>
+                                      </p:cBhvr>
+                                      <p:to>
+                                        <p:strVal val="visible"/>
+                                      </p:to>
+                                    </p:set>
+                                    <p:animEffect transition="in" filter="fade">
+                                      <p:cBhvr>
+                                        <p:cTn id="15" dur="450"/>
+                                        <p:tgtEl>
+                                          <p:spTgt spid="6"/>
+                                        </p:tgtEl>
+                                      </p:cBhvr>
+                                    </p:animEffect>
+                                  </p:childTnLst>
+                                </p:cTn>
+                              </p:par>
+                              <p:par>
+                                <p:cTn id="16" presetID="10" presetClass="entr" presetSubtype="0" fill="hold" grpId="0" nodeType="withEffect">
+                                  <p:stCondLst>
+                                    <p:cond delay="0"/>
+                                  </p:stCondLst>
+                                  <p:childTnLst>
+                                    <p:set>
+                                      <p:cBhvr>
+                                        <p:cTn id="17" dur="1" fill="hold">
+                                          <p:stCondLst>
+                                            <p:cond delay="0"/>
+                                          </p:stCondLst>
+                                        </p:cTn>
+                                        <p:tgtEl>
+                                          <p:spTgt spid="7"/>
+                                        </p:tgtEl>
+                                        <p:attrNameLst>
+                                          <p:attrName>style.visibility</p:attrName>
+                                        </p:attrNameLst>
+                                      </p:cBhvr>
+                                      <p:to>
+                                        <p:strVal val="visible"/>
+                                      </p:to>
+                                    </p:set>
+                                    <p:animEffect transition="in" filter="fade">
+                                      <p:cBhvr>
+                                        <p:cTn id="18" dur="450"/>
+                                        <p:tgtEl>
+                                          <p:spTgt spid="7"/>
+                                        </p:tgtEl>
+                                      </p:cBhvr>
+                                    </p:animEffect>
+                                  </p:childTnLst>
+                                </p:cTn>
+                              </p:par>
+                            </p:childTnLst>
+                          </p:cTn>
+                        </p:par>
+                        <p:par>
+                          <p:cTn id="32" fill="hold">
+                            <p:stCondLst>
+                              <p:cond delay="1200"/>
+                            </p:stCondLst>
+                            <p:childTnLst>
+                              <p:par>
+                                <p:cTn id="20" presetID="10" presetClass="entr" presetSubtype="0" fill="hold" grpId="0" nodeType="afterEffect">
+                                  <p:stCondLst>
+                                    <p:cond delay="0"/>
+                                  </p:stCondLst>
+                                  <p:childTnLst>
+                                    <p:set>
+                                      <p:cBhvr>
+                                        <p:cTn id="21" dur="1" fill="hold">
+                                          <p:stCondLst>
+                                            <p:cond delay="0"/>
+                                          </p:stCondLst>
+                                        </p:cTn>
+                                        <p:tgtEl>
+                                          <p:spTgt spid="8"/>
+                                        </p:tgtEl>
+                                        <p:attrNameLst>
+                                          <p:attrName>style.visibility</p:attrName>
+                                        </p:attrNameLst>
+                                      </p:cBhvr>
+                                      <p:to>
+                                        <p:strVal val="visible"/>
+                                      </p:to>
+                                    </p:set>
+                                    <p:animEffect transition="in" filter="fade">
+                                      <p:cBhvr>
+                                        <p:cTn id="22" dur="450"/>
+                                        <p:tgtEl>
+                                          <p:spTgt spid="8"/>
+                                        </p:tgtEl>
+                                      </p:cBhvr>
+                                    </p:animEffect>
+                                  </p:childTnLst>
+                                </p:cTn>
+                              </p:par>
+                              <p:par>
+                                <p:cTn id="23" presetID="10" presetClass="entr" presetSubtype="0" fill="hold" grpId="0" nodeType="withEffect">
+                                  <p:stCondLst>
+                                    <p:cond delay="0"/>
+                                  </p:stCondLst>
+                                  <p:childTnLst>
+                                    <p:set>
+                                      <p:cBhvr>
+                                        <p:cTn id="24" dur="1" fill="hold">
+                                          <p:stCondLst>
+                                            <p:cond delay="0"/>
+                                          </p:stCondLst>
+                                        </p:cTn>
+                                        <p:tgtEl>
+                                          <p:spTgt spid="9"/>
+                                        </p:tgtEl>
+                                        <p:attrNameLst>
+                                          <p:attrName>style.visibility</p:attrName>
+                                        </p:attrNameLst>
+                                      </p:cBhvr>
+                                      <p:to>
+                                        <p:strVal val="visible"/>
+                                      </p:to>
+                                    </p:set>
+                                    <p:animEffect transition="in" filter="fade">
+                                      <p:cBhvr>
+                                        <p:cTn id="25" dur="450"/>
+                                        <p:tgtEl>
+                                          <p:spTgt spid="9"/>
+                                        </p:tgtEl>
+                                      </p:cBhvr>
+                                    </p:animEffect>
+                                  </p:childTnLst>
+                                </p:cTn>
+                              </p:par>
+                              <p:par>
+                                <p:cTn id="26" presetID="10" presetClass="entr" presetSubtype="0" fill="hold" grpId="0" nodeType="withEffect">
+                                  <p:stCondLst>
+                                    <p:cond delay="0"/>
+                                  </p:stCondLst>
+                                  <p:childTnLst>
+                                    <p:set>
+                                      <p:cBhvr>
+                                        <p:cTn id="27" dur="1" fill="hold">
+                                          <p:stCondLst>
+                                            <p:cond delay="0"/>
+                                          </p:stCondLst>
+                                        </p:cTn>
+                                        <p:tgtEl>
+                                          <p:spTgt spid="10"/>
+                                        </p:tgtEl>
+                                        <p:attrNameLst>
+                                          <p:attrName>style.visibility</p:attrName>
+                                        </p:attrNameLst>
+                                      </p:cBhvr>
+                                      <p:to>
+                                        <p:strVal val="visible"/>
+                                      </p:to>
+                                    </p:set>
+                                    <p:animEffect transition="in" filter="fade">
+                                      <p:cBhvr>
+                                        <p:cTn id="28" dur="450"/>
+                                        <p:tgtEl>
+                                          <p:spTgt spid="10"/>
+                                        </p:tgtEl>
+                                      </p:cBhvr>
+                                    </p:animEffect>
+                                  </p:childTnLst>
+                                </p:cTn>
+                              </p:par>
+                              <p:par>
+                                <p:cTn id="29" presetID="10" presetClass="entr" presetSubtype="0" fill="hold" grpId="0" nodeType="withEffect">
+                                  <p:stCondLst>
+                                    <p:cond delay="0"/>
+                                  </p:stCondLst>
+                                  <p:childTnLst>
+                                    <p:set>
+                                      <p:cBhvr>
+                                        <p:cTn id="30" dur="1" fill="hold">
+                                          <p:stCondLst>
+                                            <p:cond delay="0"/>
+                                          </p:stCondLst>
+                                        </p:cTn>
+                                        <p:tgtEl>
+                                          <p:spTgt spid="11"/>
+                                        </p:tgtEl>
+                                        <p:attrNameLst>
+                                          <p:attrName>style.visibility</p:attrName>
+                                        </p:attrNameLst>
+                                      </p:cBhvr>
+                                      <p:to>
+                                        <p:strVal val="visible"/>
+                                      </p:to>
+                                    </p:set>
+                                    <p:animEffect transition="in" filter="fade">
+                                      <p:cBhvr>
+                                        <p:cTn id="31" dur="450"/>
+                                        <p:tgtEl>
+                                          <p:spTgt spid="11"/>
+                                        </p:tgtEl>
+                                      </p:cBhvr>
+                                    </p:animEffect>
+                                  </p:childTnLst>
+                                </p:cTn>
+                              </p:par>
+                            </p:childTnLst>
+                          </p:cTn>
+                        </p:par>
+                        <p:par>
+                          <p:cTn id="45" fill="hold">
+                            <p:stCondLst>
+                              <p:cond delay="1800"/>
+                            </p:stCondLst>
+                            <p:childTnLst>
+                              <p:par>
+                                <p:cTn id="33" presetID="10" presetClass="entr" presetSubtype="0" fill="hold" grpId="0" nodeType="afterEffect">
+                                  <p:stCondLst>
+                                    <p:cond delay="0"/>
+                                  </p:stCondLst>
+                                  <p:childTnLst>
+                                    <p:set>
+                                      <p:cBhvr>
+                                        <p:cTn id="34" dur="1" fill="hold">
+                                          <p:stCondLst>
+                                            <p:cond delay="0"/>
+                                          </p:stCondLst>
+                                        </p:cTn>
+                                        <p:tgtEl>
+                                          <p:spTgt spid="12"/>
+                                        </p:tgtEl>
+                                        <p:attrNameLst>
+                                          <p:attrName>style.visibility</p:attrName>
+                                        </p:attrNameLst>
+                                      </p:cBhvr>
+                                      <p:to>
+                                        <p:strVal val="visible"/>
+                                      </p:to>
+                                    </p:set>
+                                    <p:animEffect transition="in" filter="fade">
+                                      <p:cBhvr>
+                                        <p:cTn id="35" dur="450"/>
+                                        <p:tgtEl>
+                                          <p:spTgt spid="12"/>
+                                        </p:tgtEl>
+                                      </p:cBhvr>
+                                    </p:animEffect>
+                                  </p:childTnLst>
+                                </p:cTn>
+                              </p:par>
+                              <p:par>
+                                <p:cTn id="36" presetID="10" presetClass="entr" presetSubtype="0" fill="hold" grpId="0" nodeType="withEffect">
+                                  <p:stCondLst>
+                                    <p:cond delay="0"/>
+                                  </p:stCondLst>
+                                  <p:childTnLst>
+                                    <p:set>
+                                      <p:cBhvr>
+                                        <p:cTn id="37" dur="1" fill="hold">
+                                          <p:stCondLst>
+                                            <p:cond delay="0"/>
+                                          </p:stCondLst>
+                                        </p:cTn>
+                                        <p:tgtEl>
+                                          <p:spTgt spid="13"/>
+                                        </p:tgtEl>
+                                        <p:attrNameLst>
+                                          <p:attrName>style.visibility</p:attrName>
+                                        </p:attrNameLst>
+                                      </p:cBhvr>
+                                      <p:to>
+                                        <p:strVal val="visible"/>
+                                      </p:to>
+                                    </p:set>
+                                    <p:animEffect transition="in" filter="fade">
+                                      <p:cBhvr>
+                                        <p:cTn id="38" dur="450"/>
+                                        <p:tgtEl>
+                                          <p:spTgt spid="13"/>
+                                        </p:tgtEl>
+                                      </p:cBhvr>
+                                    </p:animEffect>
+                                  </p:childTnLst>
+                                </p:cTn>
+                              </p:par>
+                              <p:par>
+                                <p:cTn id="39" presetID="10" presetClass="entr" presetSubtype="0" fill="hold" grpId="0" nodeType="withEffect">
+                                  <p:stCondLst>
+                                    <p:cond delay="0"/>
+                                  </p:stCondLst>
+                                  <p:childTnLst>
+                                    <p:set>
+                                      <p:cBhvr>
+                                        <p:cTn id="40" dur="1" fill="hold">
+                                          <p:stCondLst>
+                                            <p:cond delay="0"/>
+                                          </p:stCondLst>
+                                        </p:cTn>
+                                        <p:tgtEl>
+                                          <p:spTgt spid="14"/>
+                                        </p:tgtEl>
+                                        <p:attrNameLst>
+                                          <p:attrName>style.visibility</p:attrName>
+                                        </p:attrNameLst>
+                                      </p:cBhvr>
+                                      <p:to>
+                                        <p:strVal val="visible"/>
+                                      </p:to>
+                                    </p:set>
+                                    <p:animEffect transition="in" filter="fade">
+                                      <p:cBhvr>
+                                        <p:cTn id="41" dur="450"/>
+                                        <p:tgtEl>
+                                          <p:spTgt spid="14"/>
+                                        </p:tgtEl>
+                                      </p:cBhvr>
+                                    </p:animEffect>
+                                  </p:childTnLst>
+                                </p:cTn>
+                              </p:par>
+                              <p:par>
+                                <p:cTn id="42" presetID="10" presetClass="entr" presetSubtype="0" fill="hold" grpId="0" nodeType="withEffect">
+                                  <p:stCondLst>
+                                    <p:cond delay="0"/>
+                                  </p:stCondLst>
+                                  <p:childTnLst>
+                                    <p:set>
+                                      <p:cBhvr>
+                                        <p:cTn id="43" dur="1" fill="hold">
+                                          <p:stCondLst>
+                                            <p:cond delay="0"/>
+                                          </p:stCondLst>
+                                        </p:cTn>
+                                        <p:tgtEl>
+                                          <p:spTgt spid="15"/>
+                                        </p:tgtEl>
+                                        <p:attrNameLst>
+                                          <p:attrName>style.visibility</p:attrName>
+                                        </p:attrNameLst>
+                                      </p:cBhvr>
+                                      <p:to>
+                                        <p:strVal val="visible"/>
+                                      </p:to>
+                                    </p:set>
+                                    <p:animEffect transition="in" filter="fade">
+                                      <p:cBhvr>
+                                        <p:cTn id="44" dur="450"/>
+                                        <p:tgtEl>
+                                          <p:spTgt spid="15"/>
+                                        </p:tgtEl>
+                                      </p:cBhvr>
+                                    </p:animEffect>
+                                  </p:childTnLst>
+                                </p:cTn>
+                              </p:par>
+                            </p:childTnLst>
+                          </p:cTn>
+                        </p:par>
+                      </p:childTnLst>
+                    </p:cTn>
+                  </p:par>
+                </p:childTnLst>
+              </p:cTn>
+              <p:prevCondLst>
+                <p:cond evt="onPrev" delay="0">
+                  <p:tgtEl>
+                    <p:sldTgt/>
+                  </p:tgtEl>
+                </p:cond>
+              </p:prevCondLst>
+              <p:nextCondLst>
+                <p:cond evt="onNext" delay="0">
+                  <p:tgtEl>
+                    <p:sldTgt/>
+                  </p:tgtEl>
+                </p:cond>
+              </p:nextCondLst>
+            </p:seq>
+          </p:childTnLst>
+        </p:cTn>
+      </p:par>
+    </p:tnLst>
+    <p:bldLst>
+      <p:bldP spid="3" grpId="0" animBg="1"/>
+      <p:bldP spid="4" grpId="0" animBg="1"/>
+      <p:bldP spid="5" grpId="0" animBg="1"/>
+      <p:bldP spid="6" grpId="0" animBg="1"/>
+      <p:bldP spid="7" grpId="0" animBg="1"/>
+      <p:bldP spid="8" grpId="0" animBg="1"/>
+      <p:bldP spid="9" grpId="0" animBg="1"/>
+      <p:bldP spid="10" grpId="0" animBg="1"/>
+      <p:bldP spid="11" grpId="0" animBg="1"/>
+      <p:bldP spid="12" grpId="0" animBg="1"/>
+      <p:bldP spid="13" grpId="0" animBg="1"/>
+      <p:bldP spid="14" grpId="0" animBg="1"/>
+      <p:bldP spid="15" grpId="0" animBg="1"/>
+    </p:bldLst>
+  </p:timing>
+</p:sld>
+</file>
+
+<file path=ppt/slides/slide11.xml><?xml version="1.0" encoding="utf-8"?>
+<p:sld xmlns:a="http://schemas.openxmlformats.org/drawingml/2006/main" xmlns:r="http://schemas.openxmlformats.org/officeDocument/2006/relationships" xmlns:p="http://schemas.openxmlformats.org/presentationml/2006/main">
+  <p:cSld name="Slide 11">
+    <p:spTree>
+      <p:nvGrpSpPr>
+        <p:cNvPr id="1" name=""/>
+        <p:cNvGrpSpPr/>
+        <p:nvPr/>
+      </p:nvGrpSpPr>
+      <p:grpSpPr>
+        <a:xfrm>
+          <a:off x="0" y="0"/>
+          <a:ext cx="0" cy="0"/>
+          <a:chOff x="0" y="0"/>
+          <a:chExt cx="0" cy="0"/>
+        </a:xfrm>
+      </p:grpSpPr>
+      <p:sp>
+        <p:nvSpPr>
+          <p:cNvPr id="2" name="Text 1"/>
+          <p:cNvSpPr/>
+          <p:nvPr>
+            <p:ph idx="101" type="title" hasCustomPrompt="1"/>
+          </p:nvPr>
+        </p:nvSpPr>
+        <p:spPr>
+          <a:xfrm>
+            <a:off x="548640" y="502920"/>
+            <a:ext cx="11094415" cy="822960"/>
+          </a:xfrm>
+          <a:prstGeom prst="rect">
+            <a:avLst/>
+          </a:prstGeom>
+          <a:noFill/>
+          <a:ln/>
+        </p:spPr>
+        <p:txBody>
+          <a:bodyPr wrap="square" lIns="0" tIns="0" rIns="0" bIns="0" rtlCol="0" anchor="t"/>
+          <a:lstStyle/>
+          <a:p>
+            <a:pPr algn="l" indent="0" marL="0">
+              <a:buNone/>
+            </a:pPr>
+            <a:r>
+              <a:rPr lang="en-US" sz="3600" b="1" dirty="0">
+                <a:solidFill>
+                  <a:schemeClr val="tx1"/>
+                </a:solidFill>
+              </a:rPr>
+              <a:t>Our contribution to the 2026 objectives</a:t>
+            </a:r>
+            <a:endParaRPr lang="en-US" sz="3600" dirty="0"/>
+          </a:p>
+        </p:txBody>
+      </p:sp>
+      <p:sp>
+        <p:nvSpPr>
+          <p:cNvPr id="3" name="flowhead-src"/>
+          <p:cNvSpPr txBox="1"/>
+          <p:nvPr/>
+        </p:nvSpPr>
+        <p:spPr>
+          <a:xfrm>
+            <a:off x="548640" y="1280160"/>
+            <a:ext cx="2377440" cy="274320"/>
+          </a:xfrm>
+          <a:prstGeom prst="rect">
+            <a:avLst/>
+          </a:prstGeom>
+          <a:noFill/>
+          <a:ln/>
+        </p:spPr>
+        <p:txBody>
+          <a:bodyPr wrap="square" lIns="0" tIns="0" rIns="0" bIns="0" rtlCol="0" anchor="t"/>
+          <a:lstStyle/>
+          <a:p>
+            <a:pPr indent="0" marL="0">
+              <a:buNone/>
+            </a:pPr>
+            <a:r>
+              <a:rPr lang="en-US" sz="1100" b="1" spc="100" kern="0" dirty="0">
+                <a:solidFill>
+                  <a:schemeClr val="tx2"/>
+                </a:solidFill>
+              </a:rPr>
+              <a:t>OUR PROJECT</a:t>
+            </a:r>
+            <a:endParaRPr lang="en-US" sz="1100" dirty="0"/>
+          </a:p>
+        </p:txBody>
+      </p:sp>
+      <p:sp>
+        <p:nvSpPr>
+          <p:cNvPr id="4" name="flowhead-ev"/>
+          <p:cNvSpPr txBox="1"/>
+          <p:nvPr/>
+        </p:nvSpPr>
+        <p:spPr>
+          <a:xfrm>
+            <a:off x="3429000" y="1280160"/>
+            <a:ext cx="4069080" cy="274320"/>
+          </a:xfrm>
+          <a:prstGeom prst="rect">
+            <a:avLst/>
+          </a:prstGeom>
+          <a:noFill/>
+          <a:ln/>
+        </p:spPr>
+        <p:txBody>
+          <a:bodyPr wrap="square" lIns="0" tIns="0" rIns="0" bIns="0" rtlCol="0" anchor="t"/>
+          <a:lstStyle/>
+          <a:p>
+            <a:pPr indent="0" marL="0">
+              <a:buNone/>
+            </a:pPr>
+            <a:r>
+              <a:rPr lang="en-US" sz="1100" b="1" spc="100" kern="0" dirty="0">
+                <a:solidFill>
+                  <a:schemeClr val="tx2"/>
+                </a:solidFill>
+              </a:rPr>
+              <a:t>EVIDENCE</a:t>
+            </a:r>
+            <a:endParaRPr lang="en-US" sz="1100" dirty="0"/>
+          </a:p>
+        </p:txBody>
+      </p:sp>
+      <p:sp>
+        <p:nvSpPr>
+          <p:cNvPr id="5" name="flowhead-obj"/>
+          <p:cNvSpPr txBox="1"/>
+          <p:nvPr/>
+        </p:nvSpPr>
+        <p:spPr>
+          <a:xfrm>
+            <a:off x="8001000" y="1280160"/>
+            <a:ext cx="3639312" cy="274320"/>
+          </a:xfrm>
+          <a:prstGeom prst="rect">
+            <a:avLst/>
+          </a:prstGeom>
+          <a:noFill/>
+          <a:ln/>
+        </p:spPr>
+        <p:txBody>
+          <a:bodyPr wrap="square" lIns="0" tIns="0" rIns="0" bIns="0" rtlCol="0" anchor="t"/>
+          <a:lstStyle/>
+          <a:p>
+            <a:pPr indent="0" marL="0">
+              <a:buNone/>
+            </a:pPr>
+            <a:r>
+              <a:rPr lang="en-US" sz="1100" b="1" spc="100" kern="0" dirty="0">
+                <a:solidFill>
+                  <a:schemeClr val="tx2"/>
+                </a:solidFill>
+              </a:rPr>
+              <a:t>2026 OBJECTIVE</a:t>
+            </a:r>
+            <a:endParaRPr lang="en-US" sz="1100" dirty="0"/>
+          </a:p>
+        </p:txBody>
+      </p:sp>
+      <p:sp>
+        <p:nvSpPr>
+          <p:cNvPr id="6" name="flow-src-box"/>
+          <p:cNvSpPr/>
+          <p:nvPr/>
+        </p:nvSpPr>
+        <p:spPr>
+          <a:xfrm>
+            <a:off x="548640" y="1645920"/>
+            <a:ext cx="2377440" cy="4498848"/>
+          </a:xfrm>
+          <a:prstGeom prst="roundRect">
+            <a:avLst>
+              <a:gd name="adj" fmla="val 4615"/>
+            </a:avLst>
+          </a:prstGeom>
+          <a:solidFill>
+            <a:schemeClr val="accent4"/>
+          </a:solidFill>
+          <a:ln/>
+        </p:spPr>
+      </p:sp>
+      <p:sp>
+        <p:nvSpPr>
+          <p:cNvPr id="7" name="flow-src-text"/>
+          <p:cNvSpPr txBox="1"/>
+          <p:nvPr/>
+        </p:nvSpPr>
+        <p:spPr>
+          <a:xfrm>
+            <a:off x="777240" y="1920240"/>
+            <a:ext cx="1920240" cy="3950208"/>
+          </a:xfrm>
+          <a:prstGeom prst="rect">
+            <a:avLst/>
+          </a:prstGeom>
+          <a:noFill/>
+          <a:ln/>
+        </p:spPr>
+        <p:txBody>
+          <a:bodyPr wrap="square" lIns="0" tIns="0" rIns="0" bIns="0" rtlCol="0" anchor="ctr"/>
+          <a:lstStyle/>
+          <a:p>
+            <a:pPr indent="0" marL="0">
+              <a:buNone/>
+            </a:pPr>
+            <a:r>
+              <a:rPr lang="en-US" sz="2000" b="1" dirty="0">
+                <a:solidFill>
+                  <a:schemeClr val="bg1"/>
+                </a:solidFill>
+              </a:rPr>
+              <a:t>AI-assisted migration of ERM</a:t>
+            </a:r>
+            <a:endParaRPr lang="en-US" sz="2000" dirty="0"/>
+          </a:p>
+          <a:p>
+            <a:pPr indent="0" marL="0">
+              <a:buNone/>
+            </a:pPr>
+            <a:r>
+              <a:rPr lang="en-US" sz="1000" dirty="0">
+                <a:solidFill>
+                  <a:srgbClr val="000000"/>
+                </a:solidFill>
+              </a:rPr>
+              <a:t> </a:t>
+            </a:r>
+            <a:endParaRPr lang="en-US" sz="2000" dirty="0"/>
+          </a:p>
+          <a:p>
+            <a:pPr indent="0" marL="0">
+              <a:buNone/>
+            </a:pPr>
+            <a:r>
+              <a:rPr lang="en-US" sz="1400" dirty="0">
+                <a:solidFill>
+                  <a:schemeClr val="bg1"/>
+                </a:solidFill>
+              </a:rPr>
+              <a:t>Slate to React + OSDK</a:t>
+            </a:r>
+            <a:endParaRPr lang="en-US" sz="2000" dirty="0"/>
+          </a:p>
+          <a:p>
+            <a:pPr indent="0" marL="0">
+              <a:buNone/>
+            </a:pPr>
+            <a:r>
+              <a:rPr lang="en-US" sz="1400" dirty="0">
+                <a:solidFill>
+                  <a:schemeClr val="bg1"/>
+                </a:solidFill>
+              </a:rPr>
+              <a:t>2 developers · 1 PI</a:t>
+            </a:r>
+            <a:endParaRPr lang="en-US" sz="2000" dirty="0"/>
+          </a:p>
+          <a:p>
+            <a:pPr indent="0" marL="0">
+              <a:buNone/>
+            </a:pPr>
+            <a:r>
+              <a:rPr lang="en-US" sz="1400" dirty="0">
+                <a:solidFill>
+                  <a:schemeClr val="bg1"/>
+                </a:solidFill>
+              </a:rPr>
+              <a:t>pack-project.ts</a:t>
+            </a:r>
+            <a:endParaRPr lang="en-US" sz="2000" dirty="0"/>
+          </a:p>
+        </p:txBody>
+      </p:sp>
+      <p:sp>
+        <p:nvSpPr>
+          <p:cNvPr id="8" name="flow-0-arrow1"/>
+          <p:cNvSpPr/>
+          <p:nvPr/>
+        </p:nvSpPr>
+        <p:spPr>
+          <a:xfrm>
+            <a:off x="2971800" y="2139696"/>
+            <a:ext cx="411480" cy="0"/>
+          </a:xfrm>
+          <a:prstGeom prst="line">
+            <a:avLst/>
+          </a:prstGeom>
+          <a:noFill/>
+          <a:ln w="22225">
+            <a:solidFill>
+              <a:schemeClr val="tx2"/>
+            </a:solidFill>
+            <a:prstDash val="solid"/>
+            <a:tailEnd type="triangle"/>
+          </a:ln>
+        </p:spPr>
+      </p:sp>
+      <p:sp>
+        <p:nvSpPr>
+          <p:cNvPr id="9" name="flow-0-evbox"/>
+          <p:cNvSpPr/>
+          <p:nvPr/>
+        </p:nvSpPr>
+        <p:spPr>
+          <a:xfrm>
+            <a:off x="3429000" y="1645920"/>
+            <a:ext cx="4069080" cy="987552"/>
+          </a:xfrm>
+          <a:prstGeom prst="roundRect">
+            <a:avLst>
+              <a:gd name="adj" fmla="val 11111"/>
+            </a:avLst>
+          </a:prstGeom>
+          <a:solidFill>
+            <a:schemeClr val="bg2"/>
+          </a:solidFill>
+          <a:ln/>
+        </p:spPr>
+      </p:sp>
+      <p:sp>
+        <p:nvSpPr>
+          <p:cNvPr id="10" name="flow-0-evtext"/>
+          <p:cNvSpPr txBox="1"/>
+          <p:nvPr/>
+        </p:nvSpPr>
+        <p:spPr>
+          <a:xfrm>
+            <a:off x="3611880" y="1737360"/>
+            <a:ext cx="3703320" cy="804672"/>
+          </a:xfrm>
+          <a:prstGeom prst="rect">
+            <a:avLst/>
+          </a:prstGeom>
+          <a:noFill/>
+          <a:ln/>
+        </p:spPr>
+        <p:txBody>
+          <a:bodyPr wrap="square" lIns="0" tIns="0" rIns="0" bIns="0" rtlCol="0" anchor="ctr"/>
+          <a:lstStyle/>
+          <a:p>
+            <a:pPr indent="0" marL="0">
+              <a:buNone/>
+            </a:pPr>
+            <a:r>
+              <a:rPr lang="en-US" sz="1400" dirty="0">
+                <a:solidFill>
+                  <a:schemeClr val="tx1"/>
+                </a:solidFill>
+              </a:rPr>
+              <a:t>AI read 8 Slate exports and the packed React code: 105 features recovered, 31 gaps found</a:t>
+            </a:r>
+            <a:endParaRPr lang="en-US" sz="1400" dirty="0"/>
+          </a:p>
+        </p:txBody>
+      </p:sp>
+      <p:sp>
+        <p:nvSpPr>
+          <p:cNvPr id="11" name="flow-0-arrow2"/>
+          <p:cNvSpPr/>
+          <p:nvPr/>
+        </p:nvSpPr>
+        <p:spPr>
+          <a:xfrm>
+            <a:off x="7543800" y="2139696"/>
+            <a:ext cx="411480" cy="0"/>
+          </a:xfrm>
+          <a:prstGeom prst="line">
+            <a:avLst/>
+          </a:prstGeom>
+          <a:noFill/>
+          <a:ln w="22225">
+            <a:solidFill>
+              <a:schemeClr val="tx2"/>
+            </a:solidFill>
+            <a:prstDash val="solid"/>
+            <a:tailEnd type="triangle"/>
+          </a:ln>
+        </p:spPr>
+      </p:sp>
+      <p:sp>
+        <p:nvSpPr>
+          <p:cNvPr id="12" name="flow-0-objbox"/>
+          <p:cNvSpPr/>
+          <p:nvPr/>
+        </p:nvSpPr>
+        <p:spPr>
+          <a:xfrm>
+            <a:off x="8001000" y="1645920"/>
+            <a:ext cx="3639312" cy="987552"/>
+          </a:xfrm>
+          <a:prstGeom prst="roundRect">
+            <a:avLst>
+              <a:gd name="adj" fmla="val 11111"/>
+            </a:avLst>
+          </a:prstGeom>
+          <a:solidFill>
+            <a:schemeClr val="tx1"/>
+          </a:solidFill>
+          <a:ln/>
+        </p:spPr>
+      </p:sp>
+      <p:sp>
+        <p:nvSpPr>
+          <p:cNvPr id="13" name="flow-0-objtext"/>
+          <p:cNvSpPr txBox="1"/>
+          <p:nvPr/>
+        </p:nvSpPr>
+        <p:spPr>
+          <a:xfrm>
+            <a:off x="8183880" y="1737360"/>
+            <a:ext cx="3273552" cy="804672"/>
+          </a:xfrm>
+          <a:prstGeom prst="rect">
+            <a:avLst/>
+          </a:prstGeom>
+          <a:noFill/>
+          <a:ln/>
+        </p:spPr>
+        <p:txBody>
+          <a:bodyPr wrap="square" lIns="0" tIns="0" rIns="0" bIns="0" rtlCol="0" anchor="ctr"/>
+          <a:lstStyle/>
+          <a:p>
+            <a:pPr indent="0" marL="0">
+              <a:buNone/>
+            </a:pPr>
+            <a:r>
+              <a:rPr lang="en-US" sz="1500" b="1" dirty="0">
+                <a:solidFill>
+                  <a:schemeClr val="bg1"/>
+                </a:solidFill>
+              </a:rPr>
+              <a:t>Leverage AI to solve business problems</a:t>
+            </a:r>
+            <a:endParaRPr lang="en-US" sz="1500" dirty="0"/>
+          </a:p>
+          <a:p>
+            <a:pPr indent="0" marL="0">
+              <a:buNone/>
+            </a:pPr>
+            <a:r>
+              <a:rPr lang="en-US" sz="1100" dirty="0">
+                <a:solidFill>
+                  <a:schemeClr val="accent5"/>
+                </a:solidFill>
+              </a:rPr>
+              <a:t>India TFO · Digital: democratise AI</a:t>
+            </a:r>
+            <a:endParaRPr lang="en-US" sz="1500" dirty="0"/>
+          </a:p>
+        </p:txBody>
+      </p:sp>
+      <p:sp>
+        <p:nvSpPr>
+          <p:cNvPr id="14" name="flow-1-arrow1"/>
+          <p:cNvSpPr/>
+          <p:nvPr/>
+        </p:nvSpPr>
+        <p:spPr>
+          <a:xfrm>
+            <a:off x="2971800" y="3310128"/>
+            <a:ext cx="411480" cy="0"/>
+          </a:xfrm>
+          <a:prstGeom prst="line">
+            <a:avLst/>
+          </a:prstGeom>
+          <a:noFill/>
+          <a:ln w="22225">
+            <a:solidFill>
+              <a:schemeClr val="tx2"/>
+            </a:solidFill>
+            <a:prstDash val="solid"/>
+            <a:tailEnd type="triangle"/>
+          </a:ln>
+        </p:spPr>
+      </p:sp>
+      <p:sp>
+        <p:nvSpPr>
+          <p:cNvPr id="15" name="flow-1-evbox"/>
+          <p:cNvSpPr/>
+          <p:nvPr/>
+        </p:nvSpPr>
+        <p:spPr>
+          <a:xfrm>
+            <a:off x="3429000" y="2816352"/>
+            <a:ext cx="4069080" cy="987552"/>
+          </a:xfrm>
+          <a:prstGeom prst="roundRect">
+            <a:avLst>
+              <a:gd name="adj" fmla="val 11111"/>
+            </a:avLst>
+          </a:prstGeom>
+          <a:solidFill>
+            <a:schemeClr val="bg2"/>
+          </a:solidFill>
+          <a:ln/>
+        </p:spPr>
+      </p:sp>
+      <p:sp>
+        <p:nvSpPr>
+          <p:cNvPr id="16" name="flow-1-evtext"/>
+          <p:cNvSpPr txBox="1"/>
+          <p:nvPr/>
+        </p:nvSpPr>
+        <p:spPr>
+          <a:xfrm>
+            <a:off x="3611880" y="2907792"/>
+            <a:ext cx="3703320" cy="804672"/>
+          </a:xfrm>
+          <a:prstGeom prst="rect">
+            <a:avLst/>
+          </a:prstGeom>
+          <a:noFill/>
+          <a:ln/>
+        </p:spPr>
+        <p:txBody>
+          <a:bodyPr wrap="square" lIns="0" tIns="0" rIns="0" bIns="0" rtlCol="0" anchor="ctr"/>
+          <a:lstStyle/>
+          <a:p>
+            <a:pPr indent="0" marL="0">
+              <a:buNone/>
+            </a:pPr>
+            <a:r>
+              <a:rPr lang="en-US" sz="1400" dirty="0">
+                <a:solidFill>
+                  <a:schemeClr val="tx1"/>
+                </a:solidFill>
+              </a:rPr>
+              <a:t>Delivered in 1 PI by 2 developers, about 76% less effort than a manual estimate</a:t>
+            </a:r>
+            <a:endParaRPr lang="en-US" sz="1400" dirty="0"/>
+          </a:p>
+        </p:txBody>
+      </p:sp>
+      <p:sp>
+        <p:nvSpPr>
+          <p:cNvPr id="17" name="flow-1-arrow2"/>
+          <p:cNvSpPr/>
+          <p:nvPr/>
+        </p:nvSpPr>
+        <p:spPr>
+          <a:xfrm>
+            <a:off x="7543800" y="3310128"/>
+            <a:ext cx="411480" cy="0"/>
+          </a:xfrm>
+          <a:prstGeom prst="line">
+            <a:avLst/>
+          </a:prstGeom>
+          <a:noFill/>
+          <a:ln w="22225">
+            <a:solidFill>
+              <a:schemeClr val="tx2"/>
+            </a:solidFill>
+            <a:prstDash val="solid"/>
+            <a:tailEnd type="triangle"/>
+          </a:ln>
+        </p:spPr>
+      </p:sp>
+      <p:sp>
+        <p:nvSpPr>
+          <p:cNvPr id="18" name="flow-1-objbox"/>
+          <p:cNvSpPr/>
+          <p:nvPr/>
+        </p:nvSpPr>
+        <p:spPr>
+          <a:xfrm>
+            <a:off x="8001000" y="2816352"/>
+            <a:ext cx="3639312" cy="987552"/>
+          </a:xfrm>
+          <a:prstGeom prst="roundRect">
+            <a:avLst>
+              <a:gd name="adj" fmla="val 11111"/>
+            </a:avLst>
+          </a:prstGeom>
+          <a:solidFill>
+            <a:schemeClr val="tx1"/>
+          </a:solidFill>
+          <a:ln/>
+        </p:spPr>
+      </p:sp>
+      <p:sp>
+        <p:nvSpPr>
+          <p:cNvPr id="19" name="flow-1-objtext"/>
+          <p:cNvSpPr txBox="1"/>
+          <p:nvPr/>
+        </p:nvSpPr>
+        <p:spPr>
+          <a:xfrm>
+            <a:off x="8183880" y="2907792"/>
+            <a:ext cx="3273552" cy="804672"/>
+          </a:xfrm>
+          <a:prstGeom prst="rect">
+            <a:avLst/>
+          </a:prstGeom>
+          <a:noFill/>
+          <a:ln/>
+        </p:spPr>
+        <p:txBody>
+          <a:bodyPr wrap="square" lIns="0" tIns="0" rIns="0" bIns="0" rtlCol="0" anchor="ctr"/>
+          <a:lstStyle/>
+          <a:p>
+            <a:pPr indent="0" marL="0">
+              <a:buNone/>
+            </a:pPr>
+            <a:r>
+              <a:rPr lang="en-US" sz="1500" b="1" dirty="0">
+                <a:solidFill>
+                  <a:schemeClr val="bg1"/>
+                </a:solidFill>
+              </a:rPr>
+              <a:t>Deliver on time, on cost, on quality</a:t>
+            </a:r>
+            <a:endParaRPr lang="en-US" sz="1500" dirty="0"/>
+          </a:p>
+          <a:p>
+            <a:pPr indent="0" marL="0">
+              <a:buNone/>
+            </a:pPr>
+            <a:r>
+              <a:rPr lang="en-US" sz="1100" dirty="0">
+                <a:solidFill>
+                  <a:schemeClr val="accent5"/>
+                </a:solidFill>
+              </a:rPr>
+              <a:t>Digital: optimise our digital resources</a:t>
+            </a:r>
+            <a:endParaRPr lang="en-US" sz="1500" dirty="0"/>
+          </a:p>
+        </p:txBody>
+      </p:sp>
+      <p:sp>
+        <p:nvSpPr>
+          <p:cNvPr id="20" name="flow-2-arrow1"/>
+          <p:cNvSpPr/>
+          <p:nvPr/>
+        </p:nvSpPr>
+        <p:spPr>
+          <a:xfrm>
+            <a:off x="2971800" y="4480560"/>
+            <a:ext cx="411480" cy="0"/>
+          </a:xfrm>
+          <a:prstGeom prst="line">
+            <a:avLst/>
+          </a:prstGeom>
+          <a:noFill/>
+          <a:ln w="22225">
+            <a:solidFill>
+              <a:schemeClr val="tx2"/>
+            </a:solidFill>
+            <a:prstDash val="solid"/>
+            <a:tailEnd type="triangle"/>
+          </a:ln>
+        </p:spPr>
+      </p:sp>
+      <p:sp>
+        <p:nvSpPr>
+          <p:cNvPr id="21" name="flow-2-evbox"/>
+          <p:cNvSpPr/>
+          <p:nvPr/>
+        </p:nvSpPr>
+        <p:spPr>
+          <a:xfrm>
+            <a:off x="3429000" y="3986784"/>
+            <a:ext cx="4069080" cy="987552"/>
+          </a:xfrm>
+          <a:prstGeom prst="roundRect">
+            <a:avLst>
+              <a:gd name="adj" fmla="val 11111"/>
+            </a:avLst>
+          </a:prstGeom>
+          <a:solidFill>
+            <a:schemeClr val="bg2"/>
+          </a:solidFill>
+          <a:ln/>
+        </p:spPr>
+      </p:sp>
+      <p:sp>
+        <p:nvSpPr>
+          <p:cNvPr id="22" name="flow-2-evtext"/>
+          <p:cNvSpPr txBox="1"/>
+          <p:nvPr/>
+        </p:nvSpPr>
+        <p:spPr>
+          <a:xfrm>
+            <a:off x="3611880" y="4078224"/>
+            <a:ext cx="3703320" cy="804672"/>
+          </a:xfrm>
+          <a:prstGeom prst="rect">
+            <a:avLst/>
+          </a:prstGeom>
+          <a:noFill/>
+          <a:ln/>
+        </p:spPr>
+        <p:txBody>
+          <a:bodyPr wrap="square" lIns="0" tIns="0" rIns="0" bIns="0" rtlCol="0" anchor="ctr"/>
+          <a:lstStyle/>
+          <a:p>
+            <a:pPr indent="0" marL="0">
+              <a:buNone/>
+            </a:pPr>
+            <a:r>
+              <a:rPr lang="en-US" sz="1400" dirty="0">
+                <a:solidFill>
+                  <a:schemeClr val="tx1"/>
+                </a:solidFill>
+              </a:rPr>
+              <a:t>All 105 features tracked for parity; ERM rebuilt on a standard, maintainable stack, ready to leave Slate</a:t>
+            </a:r>
+            <a:endParaRPr lang="en-US" sz="1400" dirty="0"/>
+          </a:p>
+        </p:txBody>
+      </p:sp>
+      <p:sp>
+        <p:nvSpPr>
+          <p:cNvPr id="23" name="flow-2-arrow2"/>
+          <p:cNvSpPr/>
+          <p:nvPr/>
+        </p:nvSpPr>
+        <p:spPr>
+          <a:xfrm>
+            <a:off x="7543800" y="4480560"/>
+            <a:ext cx="411480" cy="0"/>
+          </a:xfrm>
+          <a:prstGeom prst="line">
+            <a:avLst/>
+          </a:prstGeom>
+          <a:noFill/>
+          <a:ln w="22225">
+            <a:solidFill>
+              <a:schemeClr val="tx2"/>
+            </a:solidFill>
+            <a:prstDash val="solid"/>
+            <a:tailEnd type="triangle"/>
+          </a:ln>
+        </p:spPr>
+      </p:sp>
+      <p:sp>
+        <p:nvSpPr>
+          <p:cNvPr id="24" name="flow-2-objbox"/>
+          <p:cNvSpPr/>
+          <p:nvPr/>
+        </p:nvSpPr>
+        <p:spPr>
+          <a:xfrm>
+            <a:off x="8001000" y="3986784"/>
+            <a:ext cx="3639312" cy="987552"/>
+          </a:xfrm>
+          <a:prstGeom prst="roundRect">
+            <a:avLst>
+              <a:gd name="adj" fmla="val 11111"/>
+            </a:avLst>
+          </a:prstGeom>
+          <a:solidFill>
+            <a:schemeClr val="tx1"/>
+          </a:solidFill>
+          <a:ln/>
+        </p:spPr>
+      </p:sp>
+      <p:sp>
+        <p:nvSpPr>
+          <p:cNvPr id="25" name="flow-2-objtext"/>
+          <p:cNvSpPr txBox="1"/>
+          <p:nvPr/>
+        </p:nvSpPr>
+        <p:spPr>
+          <a:xfrm>
+            <a:off x="8183880" y="4078224"/>
+            <a:ext cx="3273552" cy="804672"/>
+          </a:xfrm>
+          <a:prstGeom prst="rect">
+            <a:avLst/>
+          </a:prstGeom>
+          <a:noFill/>
+          <a:ln/>
+        </p:spPr>
+        <p:txBody>
+          <a:bodyPr wrap="square" lIns="0" tIns="0" rIns="0" bIns="0" rtlCol="0" anchor="ctr"/>
+          <a:lstStyle/>
+          <a:p>
+            <a:pPr indent="0" marL="0">
+              <a:buNone/>
+            </a:pPr>
+            <a:r>
+              <a:rPr lang="en-US" sz="1500" b="1" dirty="0">
+                <a:solidFill>
+                  <a:schemeClr val="bg1"/>
+                </a:solidFill>
+              </a:rPr>
+              <a:t>Ensure our operational performance</a:t>
+            </a:r>
+            <a:endParaRPr lang="en-US" sz="1500" dirty="0"/>
+          </a:p>
+          <a:p>
+            <a:pPr indent="0" marL="0">
+              <a:buNone/>
+            </a:pPr>
+            <a:r>
+              <a:rPr lang="en-US" sz="1100" dirty="0">
+                <a:solidFill>
+                  <a:schemeClr val="accent5"/>
+                </a:solidFill>
+              </a:rPr>
+              <a:t>Digital: availability of systems for operations</a:t>
+            </a:r>
+            <a:endParaRPr lang="en-US" sz="1500" dirty="0"/>
+          </a:p>
+        </p:txBody>
+      </p:sp>
+      <p:sp>
+        <p:nvSpPr>
+          <p:cNvPr id="26" name="flow-3-arrow1"/>
+          <p:cNvSpPr/>
+          <p:nvPr/>
+        </p:nvSpPr>
+        <p:spPr>
+          <a:xfrm>
+            <a:off x="2971800" y="5650992"/>
+            <a:ext cx="411480" cy="0"/>
+          </a:xfrm>
+          <a:prstGeom prst="line">
+            <a:avLst/>
+          </a:prstGeom>
+          <a:noFill/>
+          <a:ln w="22225">
+            <a:solidFill>
+              <a:schemeClr val="tx2"/>
+            </a:solidFill>
+            <a:prstDash val="solid"/>
+            <a:tailEnd type="triangle"/>
+          </a:ln>
+        </p:spPr>
+      </p:sp>
+      <p:sp>
+        <p:nvSpPr>
+          <p:cNvPr id="27" name="flow-3-evbox"/>
+          <p:cNvSpPr/>
+          <p:nvPr/>
+        </p:nvSpPr>
+        <p:spPr>
+          <a:xfrm>
+            <a:off x="3429000" y="5157216"/>
+            <a:ext cx="4069080" cy="987552"/>
+          </a:xfrm>
+          <a:prstGeom prst="roundRect">
+            <a:avLst>
+              <a:gd name="adj" fmla="val 11111"/>
+            </a:avLst>
+          </a:prstGeom>
+          <a:solidFill>
+            <a:schemeClr val="bg2"/>
+          </a:solidFill>
+          <a:ln/>
+        </p:spPr>
+      </p:sp>
+      <p:sp>
+        <p:nvSpPr>
+          <p:cNvPr id="28" name="flow-3-evtext"/>
+          <p:cNvSpPr txBox="1"/>
+          <p:nvPr/>
+        </p:nvSpPr>
+        <p:spPr>
+          <a:xfrm>
+            <a:off x="3611880" y="5248656"/>
+            <a:ext cx="3703320" cy="804672"/>
+          </a:xfrm>
+          <a:prstGeom prst="rect">
+            <a:avLst/>
+          </a:prstGeom>
+          <a:noFill/>
+          <a:ln/>
+        </p:spPr>
+        <p:txBody>
+          <a:bodyPr wrap="square" lIns="0" tIns="0" rIns="0" bIns="0" rtlCol="0" anchor="ctr"/>
+          <a:lstStyle/>
+          <a:p>
+            <a:pPr indent="0" marL="0">
+              <a:buNone/>
+            </a:pPr>
+            <a:r>
+              <a:rPr lang="en-US" sz="1400" dirty="0">
+                <a:solidFill>
+                  <a:schemeClr val="tx1"/>
+                </a:solidFill>
+              </a:rPr>
+              <a:t>pack-project.ts and the playbook let any team repeat the method</a:t>
+            </a:r>
+            <a:endParaRPr lang="en-US" sz="1400" dirty="0"/>
+          </a:p>
+        </p:txBody>
+      </p:sp>
+      <p:sp>
+        <p:nvSpPr>
+          <p:cNvPr id="29" name="flow-3-arrow2"/>
+          <p:cNvSpPr/>
+          <p:nvPr/>
+        </p:nvSpPr>
+        <p:spPr>
+          <a:xfrm>
+            <a:off x="7543800" y="5650992"/>
+            <a:ext cx="411480" cy="0"/>
+          </a:xfrm>
+          <a:prstGeom prst="line">
+            <a:avLst/>
+          </a:prstGeom>
+          <a:noFill/>
+          <a:ln w="22225">
+            <a:solidFill>
+              <a:schemeClr val="tx2"/>
+            </a:solidFill>
+            <a:prstDash val="solid"/>
+            <a:tailEnd type="triangle"/>
+          </a:ln>
+        </p:spPr>
+      </p:sp>
+      <p:sp>
+        <p:nvSpPr>
+          <p:cNvPr id="30" name="flow-3-objbox"/>
+          <p:cNvSpPr/>
+          <p:nvPr/>
+        </p:nvSpPr>
+        <p:spPr>
+          <a:xfrm>
+            <a:off x="8001000" y="5157216"/>
+            <a:ext cx="3639312" cy="987552"/>
+          </a:xfrm>
+          <a:prstGeom prst="roundRect">
+            <a:avLst>
+              <a:gd name="adj" fmla="val 11111"/>
+            </a:avLst>
+          </a:prstGeom>
+          <a:solidFill>
+            <a:schemeClr val="tx1"/>
+          </a:solidFill>
+          <a:ln/>
+        </p:spPr>
+      </p:sp>
+      <p:sp>
+        <p:nvSpPr>
+          <p:cNvPr id="31" name="flow-3-objtext"/>
+          <p:cNvSpPr txBox="1"/>
+          <p:nvPr/>
+        </p:nvSpPr>
+        <p:spPr>
+          <a:xfrm>
+            <a:off x="8183880" y="5248656"/>
+            <a:ext cx="3273552" cy="804672"/>
+          </a:xfrm>
+          <a:prstGeom prst="rect">
+            <a:avLst/>
+          </a:prstGeom>
+          <a:noFill/>
+          <a:ln/>
+        </p:spPr>
+        <p:txBody>
+          <a:bodyPr wrap="square" lIns="0" tIns="0" rIns="0" bIns="0" rtlCol="0" anchor="ctr"/>
+          <a:lstStyle/>
+          <a:p>
+            <a:pPr indent="0" marL="0">
+              <a:buNone/>
+            </a:pPr>
+            <a:r>
+              <a:rPr lang="en-US" sz="1500" b="1" dirty="0">
+                <a:solidFill>
+                  <a:schemeClr val="bg1"/>
+                </a:solidFill>
+              </a:rPr>
+              <a:t>Grow digital acumen and competencies</a:t>
+            </a:r>
+            <a:endParaRPr lang="en-US" sz="1500" dirty="0"/>
+          </a:p>
+          <a:p>
+            <a:pPr indent="0" marL="0">
+              <a:buNone/>
+            </a:pPr>
+            <a:r>
+              <a:rPr lang="en-US" sz="1100" dirty="0">
+                <a:solidFill>
+                  <a:schemeClr val="accent5"/>
+                </a:solidFill>
+              </a:rPr>
+              <a:t>Digital: develop our people · India TFO</a:t>
+            </a:r>
+            <a:endParaRPr lang="en-US" sz="1500" dirty="0"/>
+          </a:p>
+        </p:txBody>
+      </p:sp>
+    </p:spTree>
+  </p:cSld>
+  <p:clrMapOvr>
+    <a:masterClrMapping/>
+  </p:clrMapOvr>
+  <p:transition spd="med">
+    <p:fade/>
+  </p:transition>
+  <p:timing>
+    <p:tnLst>
+      <p:par>
+        <p:cTn id="1" dur="indefinite" restart="never" nodeType="tmRoot">
+          <p:childTnLst>
+            <p:seq concurrent="1" nextAc="seek">
+              <p:cTn id="2" dur="indefinite" nodeType="mainSeq">
+                <p:childTnLst>
+                  <p:par>
+                    <p:cTn id="86" fill="hold">
+                      <p:stCondLst>
+                        <p:cond delay="indefinite"/>
+                        <p:cond evt="onBegin" delay="0">
+                          <p:tn val="2"/>
+                        </p:cond>
+                      </p:stCondLst>
+                      <p:childTnLst>
+                        <p:par>
+                          <p:cTn id="9" fill="hold">
+                            <p:stCondLst>
+                              <p:cond delay="0"/>
+                            </p:stCondLst>
+                            <p:childTnLst>
+                              <p:par>
+                                <p:cTn id="3" presetID="10" presetClass="entr" presetSubtype="0" fill="hold" grpId="0" nodeType="afterEffect">
+                                  <p:stCondLst>
+                                    <p:cond delay="0"/>
+                                  </p:stCondLst>
+                                  <p:childTnLst>
+                                    <p:set>
+                                      <p:cBhvr>
+                                        <p:cTn id="4" dur="1" fill="hold">
+                                          <p:stCondLst>
+                                            <p:cond delay="0"/>
+                                          </p:stCondLst>
+                                        </p:cTn>
+                                        <p:tgtEl>
+                                          <p:spTgt spid="6"/>
+                                        </p:tgtEl>
+                                        <p:attrNameLst>
+                                          <p:attrName>style.visibility</p:attrName>
+                                        </p:attrNameLst>
+                                      </p:cBhvr>
+                                      <p:to>
+                                        <p:strVal val="visible"/>
+                                      </p:to>
+                                    </p:set>
+                                    <p:animEffect transition="in" filter="fade">
+                                      <p:cBhvr>
+                                        <p:cTn id="5" dur="450"/>
+                                        <p:tgtEl>
+                                          <p:spTgt spid="6"/>
+                                        </p:tgtEl>
+                                      </p:cBhvr>
+                                    </p:animEffect>
+                                  </p:childTnLst>
+                                </p:cTn>
+                              </p:par>
+                              <p:par>
+                                <p:cTn id="6" presetID="10" presetClass="entr" presetSubtype="0" fill="hold" grpId="0" nodeType="withEffect">
+                                  <p:stCondLst>
+                                    <p:cond delay="0"/>
+                                  </p:stCondLst>
+                                  <p:childTnLst>
+                                    <p:set>
+                                      <p:cBhvr>
+                                        <p:cTn id="7" dur="1" fill="hold">
+                                          <p:stCondLst>
+                                            <p:cond delay="0"/>
+                                          </p:stCondLst>
+                                        </p:cTn>
+                                        <p:tgtEl>
+                                          <p:spTgt spid="7"/>
+                                        </p:tgtEl>
+                                        <p:attrNameLst>
+                                          <p:attrName>style.visibility</p:attrName>
+                                        </p:attrNameLst>
+                                      </p:cBhvr>
+                                      <p:to>
+                                        <p:strVal val="visible"/>
+                                      </p:to>
+                                    </p:set>
+                                    <p:animEffect transition="in" filter="fade">
+                                      <p:cBhvr>
+                                        <p:cTn id="8" dur="450"/>
+                                        <p:tgtEl>
+                                          <p:spTgt spid="7"/>
+                                        </p:tgtEl>
+                                      </p:cBhvr>
+                                    </p:animEffect>
+                                  </p:childTnLst>
+                                </p:cTn>
+                              </p:par>
+                            </p:childTnLst>
+                          </p:cTn>
+                        </p:par>
+                        <p:par>
+                          <p:cTn id="28" fill="hold">
+                            <p:stCondLst>
+                              <p:cond delay="1100"/>
+                            </p:stCondLst>
+                            <p:childTnLst>
+                              <p:par>
+                                <p:cTn id="10" presetID="22" presetClass="entr" presetSubtype="8" fill="hold" grpId="0" nodeType="afterEffect">
+                                  <p:stCondLst>
+                                    <p:cond delay="0"/>
+                                  </p:stCondLst>
+                                  <p:childTnLst>
+                                    <p:set>
+                                      <p:cBhvr>
+                                        <p:cTn id="11" dur="1" fill="hold">
+                                          <p:stCondLst>
+                                            <p:cond delay="0"/>
+                                          </p:stCondLst>
+                                        </p:cTn>
+                                        <p:tgtEl>
+                                          <p:spTgt spid="8"/>
+                                        </p:tgtEl>
+                                        <p:attrNameLst>
+                                          <p:attrName>style.visibility</p:attrName>
+                                        </p:attrNameLst>
+                                      </p:cBhvr>
+                                      <p:to>
+                                        <p:strVal val="visible"/>
+                                      </p:to>
+                                    </p:set>
+                                    <p:animEffect transition="in" filter="wipe(left)">
+                                      <p:cBhvr>
+                                        <p:cTn id="12" dur="450"/>
+                                        <p:tgtEl>
+                                          <p:spTgt spid="8"/>
+                                        </p:tgtEl>
+                                      </p:cBhvr>
+                                    </p:animEffect>
+                                  </p:childTnLst>
+                                </p:cTn>
+                              </p:par>
+                              <p:par>
+                                <p:cTn id="13" presetID="10" presetClass="entr" presetSubtype="0" fill="hold" grpId="0" nodeType="withEffect">
+                                  <p:stCondLst>
+                                    <p:cond delay="250"/>
+                                  </p:stCondLst>
+                                  <p:childTnLst>
+                                    <p:set>
+                                      <p:cBhvr>
+                                        <p:cTn id="14" dur="1" fill="hold">
+                                          <p:stCondLst>
+                                            <p:cond delay="0"/>
+                                          </p:stCondLst>
+                                        </p:cTn>
+                                        <p:tgtEl>
+                                          <p:spTgt spid="9"/>
+                                        </p:tgtEl>
+                                        <p:attrNameLst>
+                                          <p:attrName>style.visibility</p:attrName>
+                                        </p:attrNameLst>
+                                      </p:cBhvr>
+                                      <p:to>
+                                        <p:strVal val="visible"/>
+                                      </p:to>
+                                    </p:set>
+                                    <p:animEffect transition="in" filter="fade">
+                                      <p:cBhvr>
+                                        <p:cTn id="15" dur="450"/>
+                                        <p:tgtEl>
+                                          <p:spTgt spid="9"/>
+                                        </p:tgtEl>
+                                      </p:cBhvr>
+                                    </p:animEffect>
+                                  </p:childTnLst>
+                                </p:cTn>
+                              </p:par>
+                              <p:par>
+                                <p:cTn id="16" presetID="10" presetClass="entr" presetSubtype="0" fill="hold" grpId="0" nodeType="withEffect">
+                                  <p:stCondLst>
+                                    <p:cond delay="250"/>
+                                  </p:stCondLst>
+                                  <p:childTnLst>
+                                    <p:set>
+                                      <p:cBhvr>
+                                        <p:cTn id="17" dur="1" fill="hold">
+                                          <p:stCondLst>
+                                            <p:cond delay="0"/>
+                                          </p:stCondLst>
+                                        </p:cTn>
+                                        <p:tgtEl>
+                                          <p:spTgt spid="10"/>
+                                        </p:tgtEl>
+                                        <p:attrNameLst>
+                                          <p:attrName>style.visibility</p:attrName>
+                                        </p:attrNameLst>
+                                      </p:cBhvr>
+                                      <p:to>
+                                        <p:strVal val="visible"/>
+                                      </p:to>
+                                    </p:set>
+                                    <p:animEffect transition="in" filter="fade">
+                                      <p:cBhvr>
+                                        <p:cTn id="18" dur="450"/>
+                                        <p:tgtEl>
+                                          <p:spTgt spid="10"/>
+                                        </p:tgtEl>
+                                      </p:cBhvr>
+                                    </p:animEffect>
+                                  </p:childTnLst>
+                                </p:cTn>
+                              </p:par>
+                              <p:par>
+                                <p:cTn id="19" presetID="22" presetClass="entr" presetSubtype="8" fill="hold" grpId="0" nodeType="withEffect">
+                                  <p:stCondLst>
+                                    <p:cond delay="550"/>
+                                  </p:stCondLst>
+                                  <p:childTnLst>
+                                    <p:set>
+                                      <p:cBhvr>
+                                        <p:cTn id="20" dur="1" fill="hold">
+                                          <p:stCondLst>
+                                            <p:cond delay="0"/>
+                                          </p:stCondLst>
+                                        </p:cTn>
+                                        <p:tgtEl>
+                                          <p:spTgt spid="11"/>
+                                        </p:tgtEl>
+                                        <p:attrNameLst>
+                                          <p:attrName>style.visibility</p:attrName>
+                                        </p:attrNameLst>
+                                      </p:cBhvr>
+                                      <p:to>
+                                        <p:strVal val="visible"/>
+                                      </p:to>
+                                    </p:set>
+                                    <p:animEffect transition="in" filter="wipe(left)">
+                                      <p:cBhvr>
+                                        <p:cTn id="21" dur="450"/>
+                                        <p:tgtEl>
+                                          <p:spTgt spid="11"/>
+                                        </p:tgtEl>
+                                      </p:cBhvr>
+                                    </p:animEffect>
+                                  </p:childTnLst>
+                                </p:cTn>
+                              </p:par>
+                              <p:par>
+                                <p:cTn id="22" presetID="10" presetClass="entr" presetSubtype="0" fill="hold" grpId="0" nodeType="withEffect">
+                                  <p:stCondLst>
+                                    <p:cond delay="800"/>
+                                  </p:stCondLst>
+                                  <p:childTnLst>
+                                    <p:set>
+                                      <p:cBhvr>
+                                        <p:cTn id="23" dur="1" fill="hold">
+                                          <p:stCondLst>
+                                            <p:cond delay="0"/>
+                                          </p:stCondLst>
+                                        </p:cTn>
+                                        <p:tgtEl>
+                                          <p:spTgt spid="12"/>
+                                        </p:tgtEl>
+                                        <p:attrNameLst>
+                                          <p:attrName>style.visibility</p:attrName>
+                                        </p:attrNameLst>
+                                      </p:cBhvr>
+                                      <p:to>
+                                        <p:strVal val="visible"/>
+                                      </p:to>
+                                    </p:set>
+                                    <p:animEffect transition="in" filter="fade">
+                                      <p:cBhvr>
+                                        <p:cTn id="24" dur="450"/>
+                                        <p:tgtEl>
+                                          <p:spTgt spid="12"/>
+                                        </p:tgtEl>
+                                      </p:cBhvr>
+                                    </p:animEffect>
+                                  </p:childTnLst>
+                                </p:cTn>
+                              </p:par>
+                              <p:par>
+                                <p:cTn id="25" presetID="10" presetClass="entr" presetSubtype="0" fill="hold" grpId="0" nodeType="withEffect">
+                                  <p:stCondLst>
+                                    <p:cond delay="800"/>
+                                  </p:stCondLst>
+                                  <p:childTnLst>
+                                    <p:set>
+                                      <p:cBhvr>
+                                        <p:cTn id="26" dur="1" fill="hold">
+                                          <p:stCondLst>
+                                            <p:cond delay="0"/>
+                                          </p:stCondLst>
+                                        </p:cTn>
+                                        <p:tgtEl>
+                                          <p:spTgt spid="13"/>
+                                        </p:tgtEl>
+                                        <p:attrNameLst>
+                                          <p:attrName>style.visibility</p:attrName>
+                                        </p:attrNameLst>
+                                      </p:cBhvr>
+                                      <p:to>
+                                        <p:strVal val="visible"/>
+                                      </p:to>
+                                    </p:set>
+                                    <p:animEffect transition="in" filter="fade">
+                                      <p:cBhvr>
+                                        <p:cTn id="27" dur="450"/>
+                                        <p:tgtEl>
+                                          <p:spTgt spid="13"/>
+                                        </p:tgtEl>
+                                      </p:cBhvr>
+                                    </p:animEffect>
+                                  </p:childTnLst>
+                                </p:cTn>
+                              </p:par>
+                            </p:childTnLst>
+                          </p:cTn>
+                        </p:par>
+                        <p:par>
+                          <p:cTn id="47" fill="hold">
+                            <p:stCondLst>
+                              <p:cond delay="2200"/>
+                            </p:stCondLst>
+                            <p:childTnLst>
+                              <p:par>
+                                <p:cTn id="29" presetID="22" presetClass="entr" presetSubtype="8" fill="hold" grpId="0" nodeType="afterEffect">
+                                  <p:stCondLst>
+                                    <p:cond delay="0"/>
+                                  </p:stCondLst>
+                                  <p:childTnLst>
+                                    <p:set>
+                                      <p:cBhvr>
+                                        <p:cTn id="30" dur="1" fill="hold">
+                                          <p:stCondLst>
+                                            <p:cond delay="0"/>
+                                          </p:stCondLst>
+                                        </p:cTn>
+                                        <p:tgtEl>
+                                          <p:spTgt spid="14"/>
+                                        </p:tgtEl>
+                                        <p:attrNameLst>
+                                          <p:attrName>style.visibility</p:attrName>
+                                        </p:attrNameLst>
+                                      </p:cBhvr>
+                                      <p:to>
+                                        <p:strVal val="visible"/>
+                                      </p:to>
+                                    </p:set>
+                                    <p:animEffect transition="in" filter="wipe(left)">
+                                      <p:cBhvr>
+                                        <p:cTn id="31" dur="450"/>
+                                        <p:tgtEl>
+                                          <p:spTgt spid="14"/>
+                                        </p:tgtEl>
+                                      </p:cBhvr>
+                                    </p:animEffect>
+                                  </p:childTnLst>
+                                </p:cTn>
+                              </p:par>
+                              <p:par>
+                                <p:cTn id="32" presetID="10" presetClass="entr" presetSubtype="0" fill="hold" grpId="0" nodeType="withEffect">
+                                  <p:stCondLst>
+                                    <p:cond delay="250"/>
+                                  </p:stCondLst>
+                                  <p:childTnLst>
+                                    <p:set>
+                                      <p:cBhvr>
+                                        <p:cTn id="33" dur="1" fill="hold">
+                                          <p:stCondLst>
+                                            <p:cond delay="0"/>
+                                          </p:stCondLst>
+                                        </p:cTn>
+                                        <p:tgtEl>
+                                          <p:spTgt spid="15"/>
+                                        </p:tgtEl>
+                                        <p:attrNameLst>
+                                          <p:attrName>style.visibility</p:attrName>
+                                        </p:attrNameLst>
+                                      </p:cBhvr>
+                                      <p:to>
+                                        <p:strVal val="visible"/>
+                                      </p:to>
+                                    </p:set>
+                                    <p:animEffect transition="in" filter="fade">
+                                      <p:cBhvr>
+                                        <p:cTn id="34" dur="450"/>
+                                        <p:tgtEl>
+                                          <p:spTgt spid="15"/>
+                                        </p:tgtEl>
+                                      </p:cBhvr>
+                                    </p:animEffect>
+                                  </p:childTnLst>
+                                </p:cTn>
+                              </p:par>
+                              <p:par>
+                                <p:cTn id="35" presetID="10" presetClass="entr" presetSubtype="0" fill="hold" grpId="0" nodeType="withEffect">
+                                  <p:stCondLst>
+                                    <p:cond delay="250"/>
+                                  </p:stCondLst>
+                                  <p:childTnLst>
+                                    <p:set>
+                                      <p:cBhvr>
+                                        <p:cTn id="36" dur="1" fill="hold">
+                                          <p:stCondLst>
+                                            <p:cond delay="0"/>
+                                          </p:stCondLst>
+                                        </p:cTn>
+                                        <p:tgtEl>
+                                          <p:spTgt spid="16"/>
+                                        </p:tgtEl>
+                                        <p:attrNameLst>
+                                          <p:attrName>style.visibility</p:attrName>
+                                        </p:attrNameLst>
+                                      </p:cBhvr>
+                                      <p:to>
+                                        <p:strVal val="visible"/>
+                                      </p:to>
+                                    </p:set>
+                                    <p:animEffect transition="in" filter="fade">
+                                      <p:cBhvr>
+                                        <p:cTn id="37" dur="450"/>
+                                        <p:tgtEl>
+                                          <p:spTgt spid="16"/>
+                                        </p:tgtEl>
+                                      </p:cBhvr>
+                                    </p:animEffect>
+                                  </p:childTnLst>
+                                </p:cTn>
+                              </p:par>
+                              <p:par>
+                                <p:cTn id="38" presetID="22" presetClass="entr" presetSubtype="8" fill="hold" grpId="0" nodeType="withEffect">
+                                  <p:stCondLst>
+                                    <p:cond delay="550"/>
+                                  </p:stCondLst>
+                                  <p:childTnLst>
+                                    <p:set>
+                                      <p:cBhvr>
+                                        <p:cTn id="39" dur="1" fill="hold">
+                                          <p:stCondLst>
+                                            <p:cond delay="0"/>
+                                          </p:stCondLst>
+                                        </p:cTn>
+                                        <p:tgtEl>
+                                          <p:spTgt spid="17"/>
+                                        </p:tgtEl>
+                                        <p:attrNameLst>
+                                          <p:attrName>style.visibility</p:attrName>
+                                        </p:attrNameLst>
+                                      </p:cBhvr>
+                                      <p:to>
+                                        <p:strVal val="visible"/>
+                                      </p:to>
+                                    </p:set>
+                                    <p:animEffect transition="in" filter="wipe(left)">
+                                      <p:cBhvr>
+                                        <p:cTn id="40" dur="450"/>
+                                        <p:tgtEl>
+                                          <p:spTgt spid="17"/>
+                                        </p:tgtEl>
+                                      </p:cBhvr>
+                                    </p:animEffect>
+                                  </p:childTnLst>
+                                </p:cTn>
+                              </p:par>
+                              <p:par>
+                                <p:cTn id="41" presetID="10" presetClass="entr" presetSubtype="0" fill="hold" grpId="0" nodeType="withEffect">
+                                  <p:stCondLst>
+                                    <p:cond delay="800"/>
+                                  </p:stCondLst>
+                                  <p:childTnLst>
+                                    <p:set>
+                                      <p:cBhvr>
+                                        <p:cTn id="42" dur="1" fill="hold">
+                                          <p:stCondLst>
+                                            <p:cond delay="0"/>
+                                          </p:stCondLst>
+                                        </p:cTn>
+                                        <p:tgtEl>
+                                          <p:spTgt spid="18"/>
+                                        </p:tgtEl>
+                                        <p:attrNameLst>
+                                          <p:attrName>style.visibility</p:attrName>
+                                        </p:attrNameLst>
+                                      </p:cBhvr>
+                                      <p:to>
+                                        <p:strVal val="visible"/>
+                                      </p:to>
+                                    </p:set>
+                                    <p:animEffect transition="in" filter="fade">
+                                      <p:cBhvr>
+                                        <p:cTn id="43" dur="450"/>
+                                        <p:tgtEl>
+                                          <p:spTgt spid="18"/>
+                                        </p:tgtEl>
+                                      </p:cBhvr>
+                                    </p:animEffect>
+                                  </p:childTnLst>
+                                </p:cTn>
+                              </p:par>
+                              <p:par>
+                                <p:cTn id="44" presetID="10" presetClass="entr" presetSubtype="0" fill="hold" grpId="0" nodeType="withEffect">
+                                  <p:stCondLst>
+                                    <p:cond delay="800"/>
+                                  </p:stCondLst>
+                                  <p:childTnLst>
+                                    <p:set>
+                                      <p:cBhvr>
+                                        <p:cTn id="45" dur="1" fill="hold">
+                                          <p:stCondLst>
+                                            <p:cond delay="0"/>
+                                          </p:stCondLst>
+                                        </p:cTn>
+                                        <p:tgtEl>
+                                          <p:spTgt spid="19"/>
+                                        </p:tgtEl>
+                                        <p:attrNameLst>
+                                          <p:attrName>style.visibility</p:attrName>
+                                        </p:attrNameLst>
+                                      </p:cBhvr>
+                                      <p:to>
+                                        <p:strVal val="visible"/>
+                                      </p:to>
+                                    </p:set>
+                                    <p:animEffect transition="in" filter="fade">
+                                      <p:cBhvr>
+                                        <p:cTn id="46" dur="450"/>
+                                        <p:tgtEl>
+                                          <p:spTgt spid="19"/>
+                                        </p:tgtEl>
+                                      </p:cBhvr>
+                                    </p:animEffect>
+                                  </p:childTnLst>
+                                </p:cTn>
+                              </p:par>
+                            </p:childTnLst>
+                          </p:cTn>
+                        </p:par>
+                        <p:par>
+                          <p:cTn id="66" fill="hold">
+                            <p:stCondLst>
+                              <p:cond delay="3300"/>
+                            </p:stCondLst>
+                            <p:childTnLst>
+                              <p:par>
+                                <p:cTn id="48" presetID="22" presetClass="entr" presetSubtype="8" fill="hold" grpId="0" nodeType="afterEffect">
+                                  <p:stCondLst>
+                                    <p:cond delay="0"/>
+                                  </p:stCondLst>
+                                  <p:childTnLst>
+                                    <p:set>
+                                      <p:cBhvr>
+                                        <p:cTn id="49" dur="1" fill="hold">
+                                          <p:stCondLst>
+                                            <p:cond delay="0"/>
+                                          </p:stCondLst>
+                                        </p:cTn>
+                                        <p:tgtEl>
+                                          <p:spTgt spid="20"/>
+                                        </p:tgtEl>
+                                        <p:attrNameLst>
+                                          <p:attrName>style.visibility</p:attrName>
+                                        </p:attrNameLst>
+                                      </p:cBhvr>
+                                      <p:to>
+                                        <p:strVal val="visible"/>
+                                      </p:to>
+                                    </p:set>
+                                    <p:animEffect transition="in" filter="wipe(left)">
+                                      <p:cBhvr>
+                                        <p:cTn id="50" dur="450"/>
+                                        <p:tgtEl>
+                                          <p:spTgt spid="20"/>
+                                        </p:tgtEl>
+                                      </p:cBhvr>
+                                    </p:animEffect>
+                                  </p:childTnLst>
+                                </p:cTn>
+                              </p:par>
+                              <p:par>
+                                <p:cTn id="51" presetID="10" presetClass="entr" presetSubtype="0" fill="hold" grpId="0" nodeType="withEffect">
+                                  <p:stCondLst>
+                                    <p:cond delay="250"/>
+                                  </p:stCondLst>
+                                  <p:childTnLst>
+                                    <p:set>
+                                      <p:cBhvr>
+                                        <p:cTn id="52" dur="1" fill="hold">
+                                          <p:stCondLst>
+                                            <p:cond delay="0"/>
+                                          </p:stCondLst>
+                                        </p:cTn>
+                                        <p:tgtEl>
+                                          <p:spTgt spid="21"/>
+                                        </p:tgtEl>
+                                        <p:attrNameLst>
+                                          <p:attrName>style.visibility</p:attrName>
+                                        </p:attrNameLst>
+                                      </p:cBhvr>
+                                      <p:to>
+                                        <p:strVal val="visible"/>
+                                      </p:to>
+                                    </p:set>
+                                    <p:animEffect transition="in" filter="fade">
+                                      <p:cBhvr>
+                                        <p:cTn id="53" dur="450"/>
+                                        <p:tgtEl>
+                                          <p:spTgt spid="21"/>
+                                        </p:tgtEl>
+                                      </p:cBhvr>
+                                    </p:animEffect>
+                                  </p:childTnLst>
+                                </p:cTn>
+                              </p:par>
+                              <p:par>
+                                <p:cTn id="54" presetID="10" presetClass="entr" presetSubtype="0" fill="hold" grpId="0" nodeType="withEffect">
+                                  <p:stCondLst>
+                                    <p:cond delay="250"/>
+                                  </p:stCondLst>
+                                  <p:childTnLst>
+                                    <p:set>
+                                      <p:cBhvr>
+                                        <p:cTn id="55" dur="1" fill="hold">
+                                          <p:stCondLst>
+                                            <p:cond delay="0"/>
+                                          </p:stCondLst>
+                                        </p:cTn>
+                                        <p:tgtEl>
+                                          <p:spTgt spid="22"/>
+                                        </p:tgtEl>
+                                        <p:attrNameLst>
+                                          <p:attrName>style.visibility</p:attrName>
+                                        </p:attrNameLst>
+                                      </p:cBhvr>
+                                      <p:to>
+                                        <p:strVal val="visible"/>
+                                      </p:to>
+                                    </p:set>
+                                    <p:animEffect transition="in" filter="fade">
+                                      <p:cBhvr>
+                                        <p:cTn id="56" dur="450"/>
+                                        <p:tgtEl>
+                                          <p:spTgt spid="22"/>
+                                        </p:tgtEl>
+                                      </p:cBhvr>
+                                    </p:animEffect>
+                                  </p:childTnLst>
+                                </p:cTn>
+                              </p:par>
+                              <p:par>
+                                <p:cTn id="57" presetID="22" presetClass="entr" presetSubtype="8" fill="hold" grpId="0" nodeType="withEffect">
+                                  <p:stCondLst>
+                                    <p:cond delay="550"/>
+                                  </p:stCondLst>
+                                  <p:childTnLst>
+                                    <p:set>
+                                      <p:cBhvr>
+                                        <p:cTn id="58" dur="1" fill="hold">
+                                          <p:stCondLst>
+                                            <p:cond delay="0"/>
+                                          </p:stCondLst>
+                                        </p:cTn>
+                                        <p:tgtEl>
+                                          <p:spTgt spid="23"/>
+                                        </p:tgtEl>
+                                        <p:attrNameLst>
+                                          <p:attrName>style.visibility</p:attrName>
+                                        </p:attrNameLst>
+                                      </p:cBhvr>
+                                      <p:to>
+                                        <p:strVal val="visible"/>
+                                      </p:to>
+                                    </p:set>
+                                    <p:animEffect transition="in" filter="wipe(left)">
+                                      <p:cBhvr>
+                                        <p:cTn id="59" dur="450"/>
+                                        <p:tgtEl>
+                                          <p:spTgt spid="23"/>
+                                        </p:tgtEl>
+                                      </p:cBhvr>
+                                    </p:animEffect>
+                                  </p:childTnLst>
+                                </p:cTn>
+                              </p:par>
+                              <p:par>
+                                <p:cTn id="60" presetID="10" presetClass="entr" presetSubtype="0" fill="hold" grpId="0" nodeType="withEffect">
+                                  <p:stCondLst>
+                                    <p:cond delay="800"/>
+                                  </p:stCondLst>
+                                  <p:childTnLst>
+                                    <p:set>
+                                      <p:cBhvr>
+                                        <p:cTn id="61" dur="1" fill="hold">
+                                          <p:stCondLst>
+                                            <p:cond delay="0"/>
+                                          </p:stCondLst>
+                                        </p:cTn>
+                                        <p:tgtEl>
+                                          <p:spTgt spid="24"/>
+                                        </p:tgtEl>
+                                        <p:attrNameLst>
+                                          <p:attrName>style.visibility</p:attrName>
+                                        </p:attrNameLst>
+                                      </p:cBhvr>
+                                      <p:to>
+                                        <p:strVal val="visible"/>
+                                      </p:to>
+                                    </p:set>
+                                    <p:animEffect transition="in" filter="fade">
+                                      <p:cBhvr>
+                                        <p:cTn id="62" dur="450"/>
+                                        <p:tgtEl>
+                                          <p:spTgt spid="24"/>
+                                        </p:tgtEl>
+                                      </p:cBhvr>
+                                    </p:animEffect>
+                                  </p:childTnLst>
+                                </p:cTn>
+                              </p:par>
+                              <p:par>
+                                <p:cTn id="63" presetID="10" presetClass="entr" presetSubtype="0" fill="hold" grpId="0" nodeType="withEffect">
+                                  <p:stCondLst>
+                                    <p:cond delay="800"/>
+                                  </p:stCondLst>
+                                  <p:childTnLst>
+                                    <p:set>
+                                      <p:cBhvr>
+                                        <p:cTn id="64" dur="1" fill="hold">
+                                          <p:stCondLst>
+                                            <p:cond delay="0"/>
+                                          </p:stCondLst>
+                                        </p:cTn>
+                                        <p:tgtEl>
+                                          <p:spTgt spid="25"/>
+                                        </p:tgtEl>
+                                        <p:attrNameLst>
+                                          <p:attrName>style.visibility</p:attrName>
+                                        </p:attrNameLst>
+                                      </p:cBhvr>
+                                      <p:to>
+                                        <p:strVal val="visible"/>
+                                      </p:to>
+                                    </p:set>
+                                    <p:animEffect transition="in" filter="fade">
+                                      <p:cBhvr>
+                                        <p:cTn id="65" dur="450"/>
+                                        <p:tgtEl>
+                                          <p:spTgt spid="25"/>
+                                        </p:tgtEl>
+                                      </p:cBhvr>
+                                    </p:animEffect>
+                                  </p:childTnLst>
+                                </p:cTn>
+                              </p:par>
+                            </p:childTnLst>
+                          </p:cTn>
+                        </p:par>
+                        <p:par>
+                          <p:cTn id="85" fill="hold">
+                            <p:stCondLst>
+                              <p:cond delay="4400"/>
+                            </p:stCondLst>
+                            <p:childTnLst>
+                              <p:par>
+                                <p:cTn id="67" presetID="22" presetClass="entr" presetSubtype="8" fill="hold" grpId="0" nodeType="afterEffect">
+                                  <p:stCondLst>
+                                    <p:cond delay="0"/>
+                                  </p:stCondLst>
+                                  <p:childTnLst>
+                                    <p:set>
+                                      <p:cBhvr>
+                                        <p:cTn id="68" dur="1" fill="hold">
+                                          <p:stCondLst>
+                                            <p:cond delay="0"/>
+                                          </p:stCondLst>
+                                        </p:cTn>
+                                        <p:tgtEl>
+                                          <p:spTgt spid="26"/>
+                                        </p:tgtEl>
+                                        <p:attrNameLst>
+                                          <p:attrName>style.visibility</p:attrName>
+                                        </p:attrNameLst>
+                                      </p:cBhvr>
+                                      <p:to>
+                                        <p:strVal val="visible"/>
+                                      </p:to>
+                                    </p:set>
+                                    <p:animEffect transition="in" filter="wipe(left)">
+                                      <p:cBhvr>
+                                        <p:cTn id="69" dur="450"/>
+                                        <p:tgtEl>
+                                          <p:spTgt spid="26"/>
+                                        </p:tgtEl>
+                                      </p:cBhvr>
+                                    </p:animEffect>
+                                  </p:childTnLst>
+                                </p:cTn>
+                              </p:par>
+                              <p:par>
+                                <p:cTn id="70" presetID="10" presetClass="entr" presetSubtype="0" fill="hold" grpId="0" nodeType="withEffect">
+                                  <p:stCondLst>
+                                    <p:cond delay="250"/>
+                                  </p:stCondLst>
+                                  <p:childTnLst>
+                                    <p:set>
+                                      <p:cBhvr>
+                                        <p:cTn id="71" dur="1" fill="hold">
+                                          <p:stCondLst>
+                                            <p:cond delay="0"/>
+                                          </p:stCondLst>
+                                        </p:cTn>
+                                        <p:tgtEl>
+                                          <p:spTgt spid="27"/>
+                                        </p:tgtEl>
+                                        <p:attrNameLst>
+                                          <p:attrName>style.visibility</p:attrName>
+                                        </p:attrNameLst>
+                                      </p:cBhvr>
+                                      <p:to>
+                                        <p:strVal val="visible"/>
+                                      </p:to>
+                                    </p:set>
+                                    <p:animEffect transition="in" filter="fade">
+                                      <p:cBhvr>
+                                        <p:cTn id="72" dur="450"/>
+                                        <p:tgtEl>
+                                          <p:spTgt spid="27"/>
+                                        </p:tgtEl>
+                                      </p:cBhvr>
+                                    </p:animEffect>
+                                  </p:childTnLst>
+                                </p:cTn>
+                              </p:par>
+                              <p:par>
+                                <p:cTn id="73" presetID="10" presetClass="entr" presetSubtype="0" fill="hold" grpId="0" nodeType="withEffect">
+                                  <p:stCondLst>
+                                    <p:cond delay="250"/>
+                                  </p:stCondLst>
+                                  <p:childTnLst>
+                                    <p:set>
+                                      <p:cBhvr>
+                                        <p:cTn id="74" dur="1" fill="hold">
+                                          <p:stCondLst>
+                                            <p:cond delay="0"/>
+                                          </p:stCondLst>
+                                        </p:cTn>
+                                        <p:tgtEl>
+                                          <p:spTgt spid="28"/>
+                                        </p:tgtEl>
+                                        <p:attrNameLst>
+                                          <p:attrName>style.visibility</p:attrName>
+                                        </p:attrNameLst>
+                                      </p:cBhvr>
+                                      <p:to>
+                                        <p:strVal val="visible"/>
+                                      </p:to>
+                                    </p:set>
+                                    <p:animEffect transition="in" filter="fade">
+                                      <p:cBhvr>
+                                        <p:cTn id="75" dur="450"/>
+                                        <p:tgtEl>
+                                          <p:spTgt spid="28"/>
+                                        </p:tgtEl>
+                                      </p:cBhvr>
+                                    </p:animEffect>
+                                  </p:childTnLst>
+                                </p:cTn>
+                              </p:par>
+                              <p:par>
+                                <p:cTn id="76" presetID="22" presetClass="entr" presetSubtype="8" fill="hold" grpId="0" nodeType="withEffect">
+                                  <p:stCondLst>
+                                    <p:cond delay="550"/>
+                                  </p:stCondLst>
+                                  <p:childTnLst>
+                                    <p:set>
+                                      <p:cBhvr>
+                                        <p:cTn id="77" dur="1" fill="hold">
+                                          <p:stCondLst>
+                                            <p:cond delay="0"/>
+                                          </p:stCondLst>
+                                        </p:cTn>
+                                        <p:tgtEl>
+                                          <p:spTgt spid="29"/>
+                                        </p:tgtEl>
+                                        <p:attrNameLst>
+                                          <p:attrName>style.visibility</p:attrName>
+                                        </p:attrNameLst>
+                                      </p:cBhvr>
+                                      <p:to>
+                                        <p:strVal val="visible"/>
+                                      </p:to>
+                                    </p:set>
+                                    <p:animEffect transition="in" filter="wipe(left)">
+                                      <p:cBhvr>
+                                        <p:cTn id="78" dur="450"/>
+                                        <p:tgtEl>
+                                          <p:spTgt spid="29"/>
+                                        </p:tgtEl>
+                                      </p:cBhvr>
+                                    </p:animEffect>
+                                  </p:childTnLst>
+                                </p:cTn>
+                              </p:par>
+                              <p:par>
+                                <p:cTn id="79" presetID="10" presetClass="entr" presetSubtype="0" fill="hold" grpId="0" nodeType="withEffect">
+                                  <p:stCondLst>
+                                    <p:cond delay="800"/>
+                                  </p:stCondLst>
+                                  <p:childTnLst>
+                                    <p:set>
+                                      <p:cBhvr>
+                                        <p:cTn id="80" dur="1" fill="hold">
+                                          <p:stCondLst>
+                                            <p:cond delay="0"/>
+                                          </p:stCondLst>
+                                        </p:cTn>
+                                        <p:tgtEl>
+                                          <p:spTgt spid="30"/>
+                                        </p:tgtEl>
+                                        <p:attrNameLst>
+                                          <p:attrName>style.visibility</p:attrName>
+                                        </p:attrNameLst>
+                                      </p:cBhvr>
+                                      <p:to>
+                                        <p:strVal val="visible"/>
+                                      </p:to>
+                                    </p:set>
+                                    <p:animEffect transition="in" filter="fade">
+                                      <p:cBhvr>
+                                        <p:cTn id="81" dur="450"/>
+                                        <p:tgtEl>
+                                          <p:spTgt spid="30"/>
+                                        </p:tgtEl>
+                                      </p:cBhvr>
+                                    </p:animEffect>
+                                  </p:childTnLst>
+                                </p:cTn>
+                              </p:par>
+                              <p:par>
+                                <p:cTn id="82" presetID="10" presetClass="entr" presetSubtype="0" fill="hold" grpId="0" nodeType="withEffect">
+                                  <p:stCondLst>
+                                    <p:cond delay="800"/>
+                                  </p:stCondLst>
+                                  <p:childTnLst>
+                                    <p:set>
+                                      <p:cBhvr>
+                                        <p:cTn id="83" dur="1" fill="hold">
+                                          <p:stCondLst>
+                                            <p:cond delay="0"/>
+                                          </p:stCondLst>
+                                        </p:cTn>
+                                        <p:tgtEl>
+                                          <p:spTgt spid="31"/>
+                                        </p:tgtEl>
+                                        <p:attrNameLst>
+                                          <p:attrName>style.visibility</p:attrName>
+                                        </p:attrNameLst>
+                                      </p:cBhvr>
+                                      <p:to>
+                                        <p:strVal val="visible"/>
+                                      </p:to>
+                                    </p:set>
+                                    <p:animEffect transition="in" filter="fade">
+                                      <p:cBhvr>
+                                        <p:cTn id="84" dur="450"/>
+                                        <p:tgtEl>
+                                          <p:spTgt spid="31"/>
+                                        </p:tgtEl>
+                                      </p:cBhvr>
+                                    </p:animEffect>
+                                  </p:childTnLst>
+                                </p:cTn>
+                              </p:par>
+                            </p:childTnLst>
+                          </p:cTn>
+                        </p:par>
+                      </p:childTnLst>
+                    </p:cTn>
+                  </p:par>
+                </p:childTnLst>
+              </p:cTn>
+              <p:prevCondLst>
+                <p:cond evt="onPrev" delay="0">
+                  <p:tgtEl>
+                    <p:sldTgt/>
+                  </p:tgtEl>
+                </p:cond>
+              </p:prevCondLst>
+              <p:nextCondLst>
+                <p:cond evt="onNext" delay="0">
+                  <p:tgtEl>
+                    <p:sldTgt/>
+                  </p:tgtEl>
+                </p:cond>
+              </p:nextCondLst>
+            </p:seq>
+          </p:childTnLst>
+        </p:cTn>
+      </p:par>
+    </p:tnLst>
+    <p:bldLst>
+      <p:bldP spid="6" grpId="0" animBg="1"/>
+      <p:bldP spid="7" grpId="0" animBg="1"/>
+      <p:bldP spid="8" grpId="0" animBg="1"/>
+      <p:bldP spid="9" grpId="0" animBg="1"/>
+      <p:bldP spid="10" grpId="0" animBg="1"/>
+      <p:bldP spid="11" grpId="0" animBg="1"/>
+      <p:bldP spid="12" grpId="0" animBg="1"/>
+      <p:bldP spid="13" grpId="0" animBg="1"/>
+      <p:bldP spid="14" grpId="0" animBg="1"/>
+      <p:bldP spid="15" grpId="0" animBg="1"/>
+      <p:bldP spid="16" grpId="0" animBg="1"/>
+      <p:bldP spid="17" grpId="0" animBg="1"/>
+      <p:bldP spid="18" grpId="0" animBg="1"/>
+      <p:bldP spid="19" grpId="0" animBg="1"/>
+      <p:bldP spid="20" grpId="0" animBg="1"/>
+      <p:bldP spid="21" grpId="0" animBg="1"/>
+      <p:bldP spid="22" grpId="0" animBg="1"/>
+      <p:bldP spid="23" grpId="0" animBg="1"/>
+      <p:bldP spid="24" grpId="0" animBg="1"/>
+      <p:bldP spid="25" grpId="0" animBg="1"/>
+      <p:bldP spid="26" grpId="0" animBg="1"/>
+      <p:bldP spid="27" grpId="0" animBg="1"/>
+      <p:bldP spid="28" grpId="0" animBg="1"/>
+      <p:bldP spid="29" grpId="0" animBg="1"/>
+      <p:bldP spid="30" grpId="0" animBg="1"/>
+      <p:bldP spid="31" grpId="0" animBg="1"/>
+    </p:bldLst>
+  </p:timing>
+</p:sld>
+</file>
+
+<file path=ppt/slides/slide12.xml><?xml version="1.0" encoding="utf-8"?>
+<p:sld xmlns:a="http://schemas.openxmlformats.org/drawingml/2006/main" xmlns:r="http://schemas.openxmlformats.org/officeDocument/2006/relationships" xmlns:p="http://schemas.openxmlformats.org/presentationml/2006/main">
+  <p:cSld name="Slide 12">
+    <p:spTree>
+      <p:nvGrpSpPr>
+        <p:cNvPr id="1" name=""/>
+        <p:cNvGrpSpPr/>
+        <p:nvPr/>
+      </p:nvGrpSpPr>
+      <p:grpSpPr>
+        <a:xfrm>
+          <a:off x="0" y="0"/>
+          <a:ext cx="0" cy="0"/>
+          <a:chOff x="0" y="0"/>
+          <a:chExt cx="0" cy="0"/>
+        </a:xfrm>
+      </p:grpSpPr>
+      <p:sp>
+        <p:nvSpPr>
+          <p:cNvPr id="2" name="Text 1"/>
+          <p:cNvSpPr/>
+          <p:nvPr>
+            <p:ph idx="101" type="title" hasCustomPrompt="1"/>
+          </p:nvPr>
+        </p:nvSpPr>
+        <p:spPr>
+          <a:xfrm>
+            <a:off x="548640" y="502920"/>
+            <a:ext cx="11094415" cy="822960"/>
+          </a:xfrm>
+          <a:prstGeom prst="rect">
+            <a:avLst/>
+          </a:prstGeom>
+          <a:noFill/>
+          <a:ln/>
+        </p:spPr>
+        <p:txBody>
+          <a:bodyPr wrap="square" lIns="0" tIns="0" rIns="0" bIns="0" rtlCol="0" anchor="t"/>
+          <a:lstStyle/>
+          <a:p>
+            <a:pPr algn="l" indent="0" marL="0">
+              <a:buNone/>
+            </a:pPr>
+            <a:r>
+              <a:rPr lang="en-US" sz="3600" b="1" dirty="0">
+                <a:solidFill>
                   <a:schemeClr val="bg1"/>
                 </a:solidFill>
               </a:rPr>
@@ -2910,6 +6464,24 @@
         <p:txBody>
           <a:bodyPr wrap="square" lIns="0" tIns="0" rIns="0" bIns="0" rtlCol="0" anchor="t"/>
           <a:lstStyle/>
+          <a:p>
+            <a:pPr marL="342900" indent="-342900">
+              <a:spcAft>
+                <a:spcPts val="800"/>
+              </a:spcAft>
+              <a:buSzPct val="100000"/>
+              <a:buChar char="•"/>
+            </a:pPr>
+            <a:r>
+              <a:rPr lang="en-US" sz="1600" dirty="0">
+                <a:solidFill>
+                  <a:schemeClr val="accent6"/>
+                </a:solidFill>
+              </a:rPr>
+              <a:t>Proposed at the architecture sync, aligned with [Architect], for functions beyond DMS</a:t>
+            </a:r>
+            <a:endParaRPr lang="en-US" sz="1600" dirty="0"/>
+          </a:p>
           <a:p>
             <a:pPr marL="342900" indent="-342900">
               <a:spcAft>
@@ -7107,7 +10679,7 @@
         <p:spPr>
           <a:xfrm>
             <a:off x="548640" y="3200400"/>
-            <a:ext cx="6583680" cy="3246120"/>
+            <a:ext cx="11094415" cy="3246120"/>
           </a:xfrm>
           <a:prstGeom prst="roundRect">
             <a:avLst>
@@ -7129,7 +10701,7 @@
         <p:spPr>
           <a:xfrm>
             <a:off x="777240" y="3310128"/>
-            <a:ext cx="6126480" cy="274320"/>
+            <a:ext cx="10637215" cy="274320"/>
           </a:xfrm>
           <a:prstGeom prst="rect">
             <a:avLst/>
@@ -7164,7 +10736,7 @@
         </p:nvGraphicFramePr>
         <p:xfrm>
           <a:off x="640080" y="3611880"/>
-          <a:ext cx="6400800" cy="2560320"/>
+          <a:ext cx="10911535" cy="2560320"/>
         </p:xfrm>
         <a:graphic xmlns:a="http://schemas.openxmlformats.org/drawingml/2006/main">
           <a:graphicData uri="http://schemas.openxmlformats.org/drawingml/2006/chart">
@@ -7181,7 +10753,7 @@
         <p:spPr>
           <a:xfrm>
             <a:off x="777240" y="6172200"/>
-            <a:ext cx="6126480" cy="228600"/>
+            <a:ext cx="10637215" cy="228600"/>
           </a:xfrm>
           <a:prstGeom prst="rect">
             <a:avLst/>
@@ -7205,246 +10777,6 @@
               <a:t>Approximate monthly values, read from the ERM usage chart</a:t>
             </a:r>
             <a:endParaRPr lang="en-US" sz="1000" dirty="0"/>
-          </a:p>
-        </p:txBody>
-      </p:sp>
-      <p:sp>
-        <p:nvSpPr>
-          <p:cNvPr id="24" name="loc-card"/>
-          <p:cNvSpPr/>
-          <p:nvPr/>
-        </p:nvSpPr>
-        <p:spPr>
-          <a:xfrm>
-            <a:off x="7406640" y="3200400"/>
-            <a:ext cx="4233672" cy="3246120"/>
-          </a:xfrm>
-          <a:prstGeom prst="roundRect">
-            <a:avLst>
-              <a:gd name="adj" fmla="val 3380"/>
-            </a:avLst>
-          </a:prstGeom>
-          <a:solidFill>
-            <a:schemeClr val="bg1"/>
-          </a:solidFill>
-          <a:ln/>
-        </p:spPr>
-      </p:sp>
-      <p:sp>
-        <p:nvSpPr>
-          <p:cNvPr id="25" name="loc-title"/>
-          <p:cNvSpPr txBox="1"/>
-          <p:nvPr/>
-        </p:nvSpPr>
-        <p:spPr>
-          <a:xfrm>
-            <a:off x="7635240" y="3310128"/>
-            <a:ext cx="3840480" cy="274320"/>
-          </a:xfrm>
-          <a:prstGeom prst="rect">
-            <a:avLst/>
-          </a:prstGeom>
-          <a:noFill/>
-          <a:ln/>
-        </p:spPr>
-        <p:txBody>
-          <a:bodyPr wrap="square" lIns="0" tIns="0" rIns="0" bIns="0" rtlCol="0" anchor="t"/>
-          <a:lstStyle/>
-          <a:p>
-            <a:pPr indent="0" marL="0">
-              <a:buNone/>
-            </a:pPr>
-            <a:r>
-              <a:rPr lang="en-US" sz="1100" b="1" spc="100" kern="0" dirty="0">
-                <a:solidFill>
-                  <a:schemeClr val="tx1"/>
-                </a:solidFill>
-              </a:rPr>
-              <a:t>LOCATION PROFILE: GLOBAL MULTI-SITE USE</a:t>
-            </a:r>
-            <a:endParaRPr lang="en-US" sz="1100" dirty="0"/>
-          </a:p>
-        </p:txBody>
-      </p:sp>
-      <p:sp>
-        <p:nvSpPr>
-          <p:cNvPr id="26" name="loc-intro"/>
-          <p:cNvSpPr txBox="1"/>
-          <p:nvPr/>
-        </p:nvSpPr>
-        <p:spPr>
-          <a:xfrm>
-            <a:off x="7635240" y="3657600"/>
-            <a:ext cx="3840480" cy="320040"/>
-          </a:xfrm>
-          <a:prstGeom prst="rect">
-            <a:avLst/>
-          </a:prstGeom>
-          <a:noFill/>
-          <a:ln/>
-        </p:spPr>
-        <p:txBody>
-          <a:bodyPr wrap="square" lIns="0" tIns="0" rIns="0" bIns="0" rtlCol="0" anchor="t"/>
-          <a:lstStyle/>
-          <a:p>
-            <a:pPr indent="0" marL="0">
-              <a:buNone/>
-            </a:pPr>
-            <a:r>
-              <a:rPr lang="en-US" sz="1300" dirty="0">
-                <a:solidFill>
-                  <a:schemeClr val="tx2"/>
-                </a:solidFill>
-              </a:rPr>
-              <a:t>Usage spans countries and engineering campuses:</a:t>
-            </a:r>
-            <a:endParaRPr lang="en-US" sz="1300" dirty="0"/>
-          </a:p>
-        </p:txBody>
-      </p:sp>
-      <p:sp>
-        <p:nvSpPr>
-          <p:cNvPr id="27" name="loc-list"/>
-          <p:cNvSpPr txBox="1"/>
-          <p:nvPr/>
-        </p:nvSpPr>
-        <p:spPr>
-          <a:xfrm>
-            <a:off x="7635240" y="4069080"/>
-            <a:ext cx="3840480" cy="2240280"/>
-          </a:xfrm>
-          <a:prstGeom prst="rect">
-            <a:avLst/>
-          </a:prstGeom>
-          <a:noFill/>
-          <a:ln/>
-        </p:spPr>
-        <p:txBody>
-          <a:bodyPr wrap="square" lIns="0" tIns="0" rIns="0" bIns="0" rtlCol="0" anchor="t"/>
-          <a:lstStyle/>
-          <a:p>
-            <a:pPr indent="0" marL="0">
-              <a:buNone/>
-            </a:pPr>
-            <a:r>
-              <a:rPr lang="en-US" sz="1300" b="1" dirty="0">
-                <a:solidFill>
-                  <a:schemeClr val="tx1"/>
-                </a:solidFill>
-              </a:rPr>
-              <a:t>France</a:t>
-            </a:r>
-            <a:endParaRPr lang="en-US" sz="1300" dirty="0"/>
-          </a:p>
-          <a:p>
-            <a:pPr indent="0" marL="0">
-              <a:spcAft>
-                <a:spcPts val="800"/>
-              </a:spcAft>
-              <a:buNone/>
-            </a:pPr>
-            <a:r>
-              <a:rPr lang="en-US" sz="1300" dirty="0">
-                <a:solidFill>
-                  <a:schemeClr val="tx2"/>
-                </a:solidFill>
-              </a:rPr>
-              <a:t>Blagnac Wings Campus (271 users), Saint-Martin (43)</a:t>
-            </a:r>
-            <a:endParaRPr lang="en-US" sz="1300" dirty="0"/>
-          </a:p>
-          <a:p>
-            <a:pPr indent="0" marL="0">
-              <a:buNone/>
-            </a:pPr>
-            <a:r>
-              <a:rPr lang="en-US" sz="1300" b="1" dirty="0">
-                <a:solidFill>
-                  <a:schemeClr val="tx1"/>
-                </a:solidFill>
-              </a:rPr>
-              <a:t>Germany</a:t>
-            </a:r>
-            <a:endParaRPr lang="en-US" sz="1300" dirty="0"/>
-          </a:p>
-          <a:p>
-            <a:pPr indent="0" marL="0">
-              <a:spcAft>
-                <a:spcPts val="800"/>
-              </a:spcAft>
-              <a:buNone/>
-            </a:pPr>
-            <a:r>
-              <a:rPr lang="en-US" sz="1300" dirty="0">
-                <a:solidFill>
-                  <a:schemeClr val="tx2"/>
-                </a:solidFill>
-              </a:rPr>
-              <a:t>Hamburg Finkenwerder (205 users)</a:t>
-            </a:r>
-            <a:endParaRPr lang="en-US" sz="1300" dirty="0"/>
-          </a:p>
-          <a:p>
-            <a:pPr indent="0" marL="0">
-              <a:buNone/>
-            </a:pPr>
-            <a:r>
-              <a:rPr lang="en-US" sz="1300" b="1" dirty="0">
-                <a:solidFill>
-                  <a:schemeClr val="tx1"/>
-                </a:solidFill>
-              </a:rPr>
-              <a:t>United Kingdom</a:t>
-            </a:r>
-            <a:endParaRPr lang="en-US" sz="1300" dirty="0"/>
-          </a:p>
-          <a:p>
-            <a:pPr indent="0" marL="0">
-              <a:spcAft>
-                <a:spcPts val="800"/>
-              </a:spcAft>
-              <a:buNone/>
-            </a:pPr>
-            <a:r>
-              <a:rPr lang="en-US" sz="1300" dirty="0">
-                <a:solidFill>
-                  <a:schemeClr val="tx2"/>
-                </a:solidFill>
-              </a:rPr>
-              <a:t>Broughton (32 users), Filton (26)</a:t>
-            </a:r>
-            <a:endParaRPr lang="en-US" sz="1300" dirty="0"/>
-          </a:p>
-          <a:p>
-            <a:pPr indent="0" marL="0">
-              <a:buNone/>
-            </a:pPr>
-            <a:r>
-              <a:rPr lang="en-US" sz="1300" b="1" dirty="0">
-                <a:solidFill>
-                  <a:schemeClr val="tx1"/>
-                </a:solidFill>
-              </a:rPr>
-              <a:t>Spain and international</a:t>
-            </a:r>
-            <a:endParaRPr lang="en-US" sz="1300" dirty="0"/>
-          </a:p>
-          <a:p>
-            <a:pPr indent="0" marL="0">
-              <a:spcAft>
-                <a:spcPts val="800"/>
-              </a:spcAft>
-              <a:buNone/>
-            </a:pPr>
-            <a:r>
-              <a:rPr lang="en-US" sz="1300" dirty="0">
-                <a:solidFill>
-                  <a:schemeClr val="tx2"/>
-                </a:solidFill>
-              </a:rPr>
-              <a:t>Getafe (25 users), Mirabel Canada (12), Bangalore India (7)</a:t>
-            </a:r>
-            <a:endParaRPr lang="en-US" sz="1300" dirty="0"/>
           </a:p>
         </p:txBody>
       </p:sp>
@@ -7465,7 +10797,7 @@
               <p:cTn id="2" dur="indefinite" nodeType="mainSeq">
                 <p:childTnLst>
                   <p:par>
-                    <p:cTn id="86" fill="hold">
+                    <p:cTn id="72" fill="hold">
                       <p:stCondLst>
                         <p:cond delay="indefinite"/>
                         <p:cond evt="onBegin" delay="0">
@@ -8253,164 +11585,6 @@
                                         <p:cTn id="70" dur="450"/>
                                         <p:tgtEl>
                                           <p:spTgt spid="22"/>
-                                        </p:tgtEl>
-                                      </p:cBhvr>
-                                    </p:animEffect>
-                                  </p:childTnLst>
-                                </p:cTn>
-                              </p:par>
-                            </p:childTnLst>
-                          </p:cTn>
-                        </p:par>
-                        <p:par>
-                          <p:cTn id="81" fill="hold">
-                            <p:stCondLst>
-                              <p:cond delay="2400"/>
-                            </p:stCondLst>
-                            <p:childTnLst>
-                              <p:par>
-                                <p:cTn id="72" presetID="10" presetClass="entr" presetSubtype="0" fill="hold" grpId="0" nodeType="afterEffect">
-                                  <p:stCondLst>
-                                    <p:cond delay="0"/>
-                                  </p:stCondLst>
-                                  <p:childTnLst>
-                                    <p:set>
-                                      <p:cBhvr>
-                                        <p:cTn id="73" dur="1" fill="hold">
-                                          <p:stCondLst>
-                                            <p:cond delay="0"/>
-                                          </p:stCondLst>
-                                        </p:cTn>
-                                        <p:tgtEl>
-                                          <p:spTgt spid="24"/>
-                                        </p:tgtEl>
-                                        <p:attrNameLst>
-                                          <p:attrName>style.visibility</p:attrName>
-                                        </p:attrNameLst>
-                                      </p:cBhvr>
-                                      <p:to>
-                                        <p:strVal val="visible"/>
-                                      </p:to>
-                                    </p:set>
-                                    <p:animEffect transition="in" filter="fade">
-                                      <p:cBhvr>
-                                        <p:cTn id="74" dur="450"/>
-                                        <p:tgtEl>
-                                          <p:spTgt spid="24"/>
-                                        </p:tgtEl>
-                                      </p:cBhvr>
-                                    </p:animEffect>
-                                  </p:childTnLst>
-                                </p:cTn>
-                              </p:par>
-                              <p:par>
-                                <p:cTn id="75" presetID="10" presetClass="entr" presetSubtype="0" fill="hold" grpId="0" nodeType="withEffect">
-                                  <p:stCondLst>
-                                    <p:cond delay="0"/>
-                                  </p:stCondLst>
-                                  <p:childTnLst>
-                                    <p:set>
-                                      <p:cBhvr>
-                                        <p:cTn id="76" dur="1" fill="hold">
-                                          <p:stCondLst>
-                                            <p:cond delay="0"/>
-                                          </p:stCondLst>
-                                        </p:cTn>
-                                        <p:tgtEl>
-                                          <p:spTgt spid="25"/>
-                                        </p:tgtEl>
-                                        <p:attrNameLst>
-                                          <p:attrName>style.visibility</p:attrName>
-                                        </p:attrNameLst>
-                                      </p:cBhvr>
-                                      <p:to>
-                                        <p:strVal val="visible"/>
-                                      </p:to>
-                                    </p:set>
-                                    <p:animEffect transition="in" filter="fade">
-                                      <p:cBhvr>
-                                        <p:cTn id="77" dur="450"/>
-                                        <p:tgtEl>
-                                          <p:spTgt spid="25"/>
-                                        </p:tgtEl>
-                                      </p:cBhvr>
-                                    </p:animEffect>
-                                  </p:childTnLst>
-                                </p:cTn>
-                              </p:par>
-                              <p:par>
-                                <p:cTn id="78" presetID="10" presetClass="entr" presetSubtype="0" fill="hold" grpId="0" nodeType="withEffect">
-                                  <p:stCondLst>
-                                    <p:cond delay="0"/>
-                                  </p:stCondLst>
-                                  <p:childTnLst>
-                                    <p:set>
-                                      <p:cBhvr>
-                                        <p:cTn id="79" dur="1" fill="hold">
-                                          <p:stCondLst>
-                                            <p:cond delay="0"/>
-                                          </p:stCondLst>
-                                        </p:cTn>
-                                        <p:tgtEl>
-                                          <p:spTgt spid="26"/>
-                                        </p:tgtEl>
-                                        <p:attrNameLst>
-                                          <p:attrName>style.visibility</p:attrName>
-                                        </p:attrNameLst>
-                                      </p:cBhvr>
-                                      <p:to>
-                                        <p:strVal val="visible"/>
-                                      </p:to>
-                                    </p:set>
-                                    <p:animEffect transition="in" filter="fade">
-                                      <p:cBhvr>
-                                        <p:cTn id="80" dur="450"/>
-                                        <p:tgtEl>
-                                          <p:spTgt spid="26"/>
-                                        </p:tgtEl>
-                                      </p:cBhvr>
-                                    </p:animEffect>
-                                  </p:childTnLst>
-                                </p:cTn>
-                              </p:par>
-                            </p:childTnLst>
-                          </p:cTn>
-                        </p:par>
-                        <p:par>
-                          <p:cTn id="85" fill="hold">
-                            <p:stCondLst>
-                              <p:cond delay="2800"/>
-                            </p:stCondLst>
-                            <p:childTnLst>
-                              <p:par>
-                                <p:cTn id="82" presetID="10" presetClass="entr" presetSubtype="0" fill="hold" grpId="0" nodeType="afterEffect">
-                                  <p:stCondLst>
-                                    <p:cond delay="0"/>
-                                  </p:stCondLst>
-                                  <p:childTnLst>
-                                    <p:set>
-                                      <p:cBhvr>
-                                        <p:cTn id="83" dur="1" fill="hold">
-                                          <p:stCondLst>
-                                            <p:cond delay="0"/>
-                                          </p:stCondLst>
-                                        </p:cTn>
-                                        <p:tgtEl>
-                                          <p:spTgt spid="27"/>
-                                        </p:tgtEl>
-                                        <p:attrNameLst>
-                                          <p:attrName>style.visibility</p:attrName>
-                                        </p:attrNameLst>
-                                      </p:cBhvr>
-                                      <p:to>
-                                        <p:strVal val="visible"/>
-                                      </p:to>
-                                    </p:set>
-                                    <p:animEffect transition="in" filter="fade">
-                                      <p:cBhvr>
-                                        <p:cTn id="84" dur="450"/>
-                                        <p:tgtEl>
-                                          <p:spTgt spid="27"/>
                                         </p:tgtEl>
                                       </p:cBhvr>
                                     </p:animEffect>
@@ -8465,10 +11639,6 @@
       <p:bldP spid="20" grpId="0" animBg="1"/>
       <p:bldP spid="21" grpId="0" animBg="1"/>
       <p:bldP spid="23" grpId="0" animBg="1"/>
-      <p:bldP spid="24" grpId="0" animBg="1"/>
-      <p:bldP spid="25" grpId="0" animBg="1"/>
-      <p:bldP spid="26" grpId="0" animBg="1"/>
-      <p:bldP spid="27" grpId="0" animBg="1"/>
     </p:bldLst>
   </p:timing>
 </p:sld>
@@ -8477,6 +11647,842 @@
 <file path=ppt/slides/slide4.xml><?xml version="1.0" encoding="utf-8"?>
 <p:sld xmlns:a="http://schemas.openxmlformats.org/drawingml/2006/main" xmlns:r="http://schemas.openxmlformats.org/officeDocument/2006/relationships" xmlns:p="http://schemas.openxmlformats.org/presentationml/2006/main">
   <p:cSld name="Slide 4">
+    <p:spTree>
+      <p:nvGrpSpPr>
+        <p:cNvPr id="1" name=""/>
+        <p:cNvGrpSpPr/>
+        <p:nvPr/>
+      </p:nvGrpSpPr>
+      <p:grpSpPr>
+        <a:xfrm>
+          <a:off x="0" y="0"/>
+          <a:ext cx="0" cy="0"/>
+          <a:chOff x="0" y="0"/>
+          <a:chExt cx="0" cy="0"/>
+        </a:xfrm>
+      </p:grpSpPr>
+      <p:sp>
+        <p:nvSpPr>
+          <p:cNvPr id="2" name="Text 1"/>
+          <p:cNvSpPr/>
+          <p:nvPr>
+            <p:ph idx="101" type="title" hasCustomPrompt="1"/>
+          </p:nvPr>
+        </p:nvSpPr>
+        <p:spPr>
+          <a:xfrm>
+            <a:off x="548640" y="502920"/>
+            <a:ext cx="11094415" cy="822960"/>
+          </a:xfrm>
+          <a:prstGeom prst="rect">
+            <a:avLst/>
+          </a:prstGeom>
+          <a:noFill/>
+          <a:ln/>
+        </p:spPr>
+        <p:txBody>
+          <a:bodyPr wrap="square" lIns="0" tIns="0" rIns="0" bIns="0" rtlCol="0" anchor="t"/>
+          <a:lstStyle/>
+          <a:p>
+            <a:pPr algn="l" indent="0" marL="0">
+              <a:buNone/>
+            </a:pPr>
+            <a:r>
+              <a:rPr lang="en-US" sz="3600" b="1" dirty="0">
+                <a:solidFill>
+                  <a:schemeClr val="tx1"/>
+                </a:solidFill>
+              </a:rPr>
+              <a:t>Used across Airbus organisations and sites</a:t>
+            </a:r>
+            <a:endParaRPr lang="en-US" sz="3600" dirty="0"/>
+          </a:p>
+        </p:txBody>
+      </p:sp>
+      <p:sp>
+        <p:nvSpPr>
+          <p:cNvPr id="3" name="org-sub"/>
+          <p:cNvSpPr txBox="1"/>
+          <p:nvPr/>
+        </p:nvSpPr>
+        <p:spPr>
+          <a:xfrm>
+            <a:off x="548640" y="1115568"/>
+            <a:ext cx="11094415" cy="320040"/>
+          </a:xfrm>
+          <a:prstGeom prst="rect">
+            <a:avLst/>
+          </a:prstGeom>
+          <a:noFill/>
+          <a:ln/>
+        </p:spPr>
+        <p:txBody>
+          <a:bodyPr wrap="square" lIns="0" tIns="0" rIns="0" bIns="0" rtlCol="0" anchor="t"/>
+          <a:lstStyle/>
+          <a:p>
+            <a:pPr indent="0" marL="0">
+              <a:buNone/>
+            </a:pPr>
+            <a:r>
+              <a:rPr lang="en-US" sz="1400" dirty="0">
+                <a:solidFill>
+                  <a:schemeClr val="tx2"/>
+                </a:solidFill>
+              </a:rPr>
+              <a:t>More than half of ERM users work outside its largest organisation, across 6 countries</a:t>
+            </a:r>
+            <a:endParaRPr lang="en-US" sz="1400" dirty="0"/>
+          </a:p>
+        </p:txBody>
+      </p:sp>
+      <p:sp>
+        <p:nvSpPr>
+          <p:cNvPr id="4" name="org-card"/>
+          <p:cNvSpPr/>
+          <p:nvPr/>
+        </p:nvSpPr>
+        <p:spPr>
+          <a:xfrm>
+            <a:off x="548640" y="1600200"/>
+            <a:ext cx="6766560" cy="4846320"/>
+          </a:xfrm>
+          <a:prstGeom prst="roundRect">
+            <a:avLst>
+              <a:gd name="adj" fmla="val 2264"/>
+            </a:avLst>
+          </a:prstGeom>
+          <a:solidFill>
+            <a:schemeClr val="bg2"/>
+          </a:solidFill>
+          <a:ln/>
+        </p:spPr>
+      </p:sp>
+      <p:sp>
+        <p:nvSpPr>
+          <p:cNvPr id="5" name="org-title"/>
+          <p:cNvSpPr txBox="1"/>
+          <p:nvPr/>
+        </p:nvSpPr>
+        <p:spPr>
+          <a:xfrm>
+            <a:off x="777240" y="1709928"/>
+            <a:ext cx="6309360" cy="274320"/>
+          </a:xfrm>
+          <a:prstGeom prst="rect">
+            <a:avLst/>
+          </a:prstGeom>
+          <a:noFill/>
+          <a:ln/>
+        </p:spPr>
+        <p:txBody>
+          <a:bodyPr wrap="square" lIns="0" tIns="0" rIns="0" bIns="0" rtlCol="0" anchor="t"/>
+          <a:lstStyle/>
+          <a:p>
+            <a:pPr indent="0" marL="0">
+              <a:buNone/>
+            </a:pPr>
+            <a:r>
+              <a:rPr lang="en-US" sz="1100" b="1" spc="100" kern="0" dirty="0">
+                <a:solidFill>
+                  <a:schemeClr val="tx1"/>
+                </a:solidFill>
+              </a:rPr>
+              <a:t>UNIQUE USERS BY ORGANISATION (SIGLUM 1)</a:t>
+            </a:r>
+            <a:endParaRPr lang="en-US" sz="1100" dirty="0"/>
+          </a:p>
+        </p:txBody>
+      </p:sp>
+      <p:graphicFrame>
+        <p:nvGraphicFramePr>
+          <p:cNvPr id="6" name="org-chart" descr=""/>
+          <p:cNvGraphicFramePr/>
+          <p:nvPr/>
+        </p:nvGraphicFramePr>
+        <p:xfrm>
+          <a:off x="640080" y="2011680"/>
+          <a:ext cx="6583680" cy="3794760"/>
+        </p:xfrm>
+        <a:graphic xmlns:a="http://schemas.openxmlformats.org/drawingml/2006/main">
+          <a:graphicData uri="http://schemas.openxmlformats.org/drawingml/2006/chart">
+            <c:chart xmlns:c="http://schemas.openxmlformats.org/drawingml/2006/chart" r:id="rId1"/>
+          </a:graphicData>
+        </a:graphic>
+      </p:graphicFrame>
+      <p:sp>
+        <p:nvSpPr>
+          <p:cNvPr id="7" name="org-caption"/>
+          <p:cNvSpPr txBox="1"/>
+          <p:nvPr/>
+        </p:nvSpPr>
+        <p:spPr>
+          <a:xfrm>
+            <a:off x="777240" y="5852160"/>
+            <a:ext cx="6309360" cy="457200"/>
+          </a:xfrm>
+          <a:prstGeom prst="rect">
+            <a:avLst/>
+          </a:prstGeom>
+          <a:noFill/>
+          <a:ln/>
+        </p:spPr>
+        <p:txBody>
+          <a:bodyPr wrap="square" lIns="0" tIns="0" rIns="0" bIns="0" rtlCol="0" anchor="t"/>
+          <a:lstStyle/>
+          <a:p>
+            <a:pPr indent="0" marL="0">
+              <a:buNone/>
+            </a:pPr>
+            <a:r>
+              <a:rPr lang="en-US" sz="1000" i="1" dirty="0">
+                <a:solidFill>
+                  <a:schemeClr val="tx2"/>
+                </a:solidFill>
+              </a:rPr>
+              <a:t>Plus about 12 smaller organisations (D, M, Z, Q, G, F, H, I, V, E, T…). Approximate values, read from the ERM usage chart</a:t>
+            </a:r>
+            <a:endParaRPr lang="en-US" sz="1000" dirty="0"/>
+          </a:p>
+        </p:txBody>
+      </p:sp>
+      <p:sp>
+        <p:nvSpPr>
+          <p:cNvPr id="8" name="loc-card"/>
+          <p:cNvSpPr/>
+          <p:nvPr/>
+        </p:nvSpPr>
+        <p:spPr>
+          <a:xfrm>
+            <a:off x="7589520" y="1600200"/>
+            <a:ext cx="4050792" cy="4846320"/>
+          </a:xfrm>
+          <a:prstGeom prst="roundRect">
+            <a:avLst>
+              <a:gd name="adj" fmla="val 2709"/>
+            </a:avLst>
+          </a:prstGeom>
+          <a:solidFill>
+            <a:schemeClr val="tx1"/>
+          </a:solidFill>
+          <a:ln/>
+        </p:spPr>
+      </p:sp>
+      <p:sp>
+        <p:nvSpPr>
+          <p:cNvPr id="9" name="loc-title"/>
+          <p:cNvSpPr txBox="1"/>
+          <p:nvPr/>
+        </p:nvSpPr>
+        <p:spPr>
+          <a:xfrm>
+            <a:off x="7818120" y="1737360"/>
+            <a:ext cx="3657600" cy="274320"/>
+          </a:xfrm>
+          <a:prstGeom prst="rect">
+            <a:avLst/>
+          </a:prstGeom>
+          <a:noFill/>
+          <a:ln/>
+        </p:spPr>
+        <p:txBody>
+          <a:bodyPr wrap="square" lIns="0" tIns="0" rIns="0" bIns="0" rtlCol="0" anchor="t"/>
+          <a:lstStyle/>
+          <a:p>
+            <a:pPr indent="0" marL="0">
+              <a:buNone/>
+            </a:pPr>
+            <a:r>
+              <a:rPr lang="en-US" sz="1100" b="1" spc="200" kern="0" dirty="0">
+                <a:solidFill>
+                  <a:schemeClr val="accent5"/>
+                </a:solidFill>
+              </a:rPr>
+              <a:t>LOCATION PROFILE</a:t>
+            </a:r>
+            <a:endParaRPr lang="en-US" sz="1100" dirty="0"/>
+          </a:p>
+        </p:txBody>
+      </p:sp>
+      <p:sp>
+        <p:nvSpPr>
+          <p:cNvPr id="10" name="loc-list"/>
+          <p:cNvSpPr txBox="1"/>
+          <p:nvPr/>
+        </p:nvSpPr>
+        <p:spPr>
+          <a:xfrm>
+            <a:off x="7818120" y="2148840"/>
+            <a:ext cx="3657600" cy="4114800"/>
+          </a:xfrm>
+          <a:prstGeom prst="rect">
+            <a:avLst/>
+          </a:prstGeom>
+          <a:noFill/>
+          <a:ln/>
+        </p:spPr>
+        <p:txBody>
+          <a:bodyPr wrap="square" lIns="0" tIns="0" rIns="0" bIns="0" rtlCol="0" anchor="t"/>
+          <a:lstStyle/>
+          <a:p>
+            <a:pPr indent="0" marL="0">
+              <a:buNone/>
+            </a:pPr>
+            <a:r>
+              <a:rPr lang="en-US" sz="1500" b="1" dirty="0">
+                <a:solidFill>
+                  <a:schemeClr val="bg1"/>
+                </a:solidFill>
+              </a:rPr>
+              <a:t>France</a:t>
+            </a:r>
+            <a:endParaRPr lang="en-US" sz="1500" dirty="0"/>
+          </a:p>
+          <a:p>
+            <a:pPr indent="0" marL="0">
+              <a:spcAft>
+                <a:spcPts val="900"/>
+              </a:spcAft>
+              <a:buNone/>
+            </a:pPr>
+            <a:r>
+              <a:rPr lang="en-US" sz="1300" dirty="0">
+                <a:solidFill>
+                  <a:schemeClr val="accent5"/>
+                </a:solidFill>
+              </a:rPr>
+              <a:t>Blagnac Wings Campus 271, Saint-Martin 43 users</a:t>
+            </a:r>
+            <a:endParaRPr lang="en-US" sz="1500" dirty="0"/>
+          </a:p>
+          <a:p>
+            <a:pPr indent="0" marL="0">
+              <a:buNone/>
+            </a:pPr>
+            <a:r>
+              <a:rPr lang="en-US" sz="1500" b="1" dirty="0">
+                <a:solidFill>
+                  <a:schemeClr val="bg1"/>
+                </a:solidFill>
+              </a:rPr>
+              <a:t>Germany</a:t>
+            </a:r>
+            <a:endParaRPr lang="en-US" sz="1500" dirty="0"/>
+          </a:p>
+          <a:p>
+            <a:pPr indent="0" marL="0">
+              <a:spcAft>
+                <a:spcPts val="900"/>
+              </a:spcAft>
+              <a:buNone/>
+            </a:pPr>
+            <a:r>
+              <a:rPr lang="en-US" sz="1300" dirty="0">
+                <a:solidFill>
+                  <a:schemeClr val="accent5"/>
+                </a:solidFill>
+              </a:rPr>
+              <a:t>Hamburg Finkenwerder 205 users</a:t>
+            </a:r>
+            <a:endParaRPr lang="en-US" sz="1500" dirty="0"/>
+          </a:p>
+          <a:p>
+            <a:pPr indent="0" marL="0">
+              <a:buNone/>
+            </a:pPr>
+            <a:r>
+              <a:rPr lang="en-US" sz="1500" b="1" dirty="0">
+                <a:solidFill>
+                  <a:schemeClr val="bg1"/>
+                </a:solidFill>
+              </a:rPr>
+              <a:t>United Kingdom</a:t>
+            </a:r>
+            <a:endParaRPr lang="en-US" sz="1500" dirty="0"/>
+          </a:p>
+          <a:p>
+            <a:pPr indent="0" marL="0">
+              <a:spcAft>
+                <a:spcPts val="900"/>
+              </a:spcAft>
+              <a:buNone/>
+            </a:pPr>
+            <a:r>
+              <a:rPr lang="en-US" sz="1300" dirty="0">
+                <a:solidFill>
+                  <a:schemeClr val="accent5"/>
+                </a:solidFill>
+              </a:rPr>
+              <a:t>Broughton 32, Filton 26 users</a:t>
+            </a:r>
+            <a:endParaRPr lang="en-US" sz="1500" dirty="0"/>
+          </a:p>
+          <a:p>
+            <a:pPr indent="0" marL="0">
+              <a:buNone/>
+            </a:pPr>
+            <a:r>
+              <a:rPr lang="en-US" sz="1500" b="1" dirty="0">
+                <a:solidFill>
+                  <a:schemeClr val="bg1"/>
+                </a:solidFill>
+              </a:rPr>
+              <a:t>Spain</a:t>
+            </a:r>
+            <a:endParaRPr lang="en-US" sz="1500" dirty="0"/>
+          </a:p>
+          <a:p>
+            <a:pPr indent="0" marL="0">
+              <a:spcAft>
+                <a:spcPts val="900"/>
+              </a:spcAft>
+              <a:buNone/>
+            </a:pPr>
+            <a:r>
+              <a:rPr lang="en-US" sz="1300" dirty="0">
+                <a:solidFill>
+                  <a:schemeClr val="accent5"/>
+                </a:solidFill>
+              </a:rPr>
+              <a:t>Getafe 25 users</a:t>
+            </a:r>
+            <a:endParaRPr lang="en-US" sz="1500" dirty="0"/>
+          </a:p>
+          <a:p>
+            <a:pPr indent="0" marL="0">
+              <a:buNone/>
+            </a:pPr>
+            <a:r>
+              <a:rPr lang="en-US" sz="1500" b="1" dirty="0">
+                <a:solidFill>
+                  <a:schemeClr val="bg1"/>
+                </a:solidFill>
+              </a:rPr>
+              <a:t>Canada</a:t>
+            </a:r>
+            <a:endParaRPr lang="en-US" sz="1500" dirty="0"/>
+          </a:p>
+          <a:p>
+            <a:pPr indent="0" marL="0">
+              <a:spcAft>
+                <a:spcPts val="900"/>
+              </a:spcAft>
+              <a:buNone/>
+            </a:pPr>
+            <a:r>
+              <a:rPr lang="en-US" sz="1300" dirty="0">
+                <a:solidFill>
+                  <a:schemeClr val="accent5"/>
+                </a:solidFill>
+              </a:rPr>
+              <a:t>Mirabel 12 users</a:t>
+            </a:r>
+            <a:endParaRPr lang="en-US" sz="1500" dirty="0"/>
+          </a:p>
+          <a:p>
+            <a:pPr indent="0" marL="0">
+              <a:buNone/>
+            </a:pPr>
+            <a:r>
+              <a:rPr lang="en-US" sz="1500" b="1" dirty="0">
+                <a:solidFill>
+                  <a:schemeClr val="bg1"/>
+                </a:solidFill>
+              </a:rPr>
+              <a:t>India</a:t>
+            </a:r>
+            <a:endParaRPr lang="en-US" sz="1500" dirty="0"/>
+          </a:p>
+          <a:p>
+            <a:pPr indent="0" marL="0">
+              <a:spcAft>
+                <a:spcPts val="900"/>
+              </a:spcAft>
+              <a:buNone/>
+            </a:pPr>
+            <a:r>
+              <a:rPr lang="en-US" sz="1300" dirty="0">
+                <a:solidFill>
+                  <a:schemeClr val="accent5"/>
+                </a:solidFill>
+              </a:rPr>
+              <a:t>Bangalore 7 users</a:t>
+            </a:r>
+            <a:endParaRPr lang="en-US" sz="1500" dirty="0"/>
+          </a:p>
+        </p:txBody>
+      </p:sp>
+    </p:spTree>
+  </p:cSld>
+  <p:clrMapOvr>
+    <a:masterClrMapping/>
+  </p:clrMapOvr>
+  <p:transition spd="med">
+    <p:fade/>
+  </p:transition>
+  <p:timing>
+    <p:tnLst>
+      <p:par>
+        <p:cTn id="1" dur="indefinite" restart="never" nodeType="tmRoot">
+          <p:childTnLst>
+            <p:seq concurrent="1" nextAc="seek">
+              <p:cTn id="2" dur="indefinite" nodeType="mainSeq">
+                <p:childTnLst>
+                  <p:par>
+                    <p:cTn id="30" fill="hold">
+                      <p:stCondLst>
+                        <p:cond delay="indefinite"/>
+                        <p:cond evt="onBegin" delay="0">
+                          <p:tn val="2"/>
+                        </p:cond>
+                      </p:stCondLst>
+                      <p:childTnLst>
+                        <p:par>
+                          <p:cTn id="6" fill="hold">
+                            <p:stCondLst>
+                              <p:cond delay="0"/>
+                            </p:stCondLst>
+                            <p:childTnLst>
+                              <p:par>
+                                <p:cTn id="3" presetID="10" presetClass="entr" presetSubtype="0" fill="hold" grpId="0" nodeType="afterEffect">
+                                  <p:stCondLst>
+                                    <p:cond delay="0"/>
+                                  </p:stCondLst>
+                                  <p:childTnLst>
+                                    <p:set>
+                                      <p:cBhvr>
+                                        <p:cTn id="4" dur="1" fill="hold">
+                                          <p:stCondLst>
+                                            <p:cond delay="0"/>
+                                          </p:stCondLst>
+                                        </p:cTn>
+                                        <p:tgtEl>
+                                          <p:spTgt spid="3"/>
+                                        </p:tgtEl>
+                                        <p:attrNameLst>
+                                          <p:attrName>style.visibility</p:attrName>
+                                        </p:attrNameLst>
+                                      </p:cBhvr>
+                                      <p:to>
+                                        <p:strVal val="visible"/>
+                                      </p:to>
+                                    </p:set>
+                                    <p:animEffect transition="in" filter="fade">
+                                      <p:cBhvr>
+                                        <p:cTn id="5" dur="450"/>
+                                        <p:tgtEl>
+                                          <p:spTgt spid="3"/>
+                                        </p:tgtEl>
+                                      </p:cBhvr>
+                                    </p:animEffect>
+                                  </p:childTnLst>
+                                </p:cTn>
+                              </p:par>
+                            </p:childTnLst>
+                          </p:cTn>
+                        </p:par>
+                        <p:par>
+                          <p:cTn id="19" fill="hold">
+                            <p:stCondLst>
+                              <p:cond delay="500"/>
+                            </p:stCondLst>
+                            <p:childTnLst>
+                              <p:par>
+                                <p:cTn id="7" presetID="10" presetClass="entr" presetSubtype="0" fill="hold" grpId="0" nodeType="afterEffect">
+                                  <p:stCondLst>
+                                    <p:cond delay="0"/>
+                                  </p:stCondLst>
+                                  <p:childTnLst>
+                                    <p:set>
+                                      <p:cBhvr>
+                                        <p:cTn id="8" dur="1" fill="hold">
+                                          <p:stCondLst>
+                                            <p:cond delay="0"/>
+                                          </p:stCondLst>
+                                        </p:cTn>
+                                        <p:tgtEl>
+                                          <p:spTgt spid="4"/>
+                                        </p:tgtEl>
+                                        <p:attrNameLst>
+                                          <p:attrName>style.visibility</p:attrName>
+                                        </p:attrNameLst>
+                                      </p:cBhvr>
+                                      <p:to>
+                                        <p:strVal val="visible"/>
+                                      </p:to>
+                                    </p:set>
+                                    <p:animEffect transition="in" filter="fade">
+                                      <p:cBhvr>
+                                        <p:cTn id="9" dur="450"/>
+                                        <p:tgtEl>
+                                          <p:spTgt spid="4"/>
+                                        </p:tgtEl>
+                                      </p:cBhvr>
+                                    </p:animEffect>
+                                  </p:childTnLst>
+                                </p:cTn>
+                              </p:par>
+                              <p:par>
+                                <p:cTn id="10" presetID="10" presetClass="entr" presetSubtype="0" fill="hold" grpId="0" nodeType="withEffect">
+                                  <p:stCondLst>
+                                    <p:cond delay="0"/>
+                                  </p:stCondLst>
+                                  <p:childTnLst>
+                                    <p:set>
+                                      <p:cBhvr>
+                                        <p:cTn id="11" dur="1" fill="hold">
+                                          <p:stCondLst>
+                                            <p:cond delay="0"/>
+                                          </p:stCondLst>
+                                        </p:cTn>
+                                        <p:tgtEl>
+                                          <p:spTgt spid="5"/>
+                                        </p:tgtEl>
+                                        <p:attrNameLst>
+                                          <p:attrName>style.visibility</p:attrName>
+                                        </p:attrNameLst>
+                                      </p:cBhvr>
+                                      <p:to>
+                                        <p:strVal val="visible"/>
+                                      </p:to>
+                                    </p:set>
+                                    <p:animEffect transition="in" filter="fade">
+                                      <p:cBhvr>
+                                        <p:cTn id="12" dur="450"/>
+                                        <p:tgtEl>
+                                          <p:spTgt spid="5"/>
+                                        </p:tgtEl>
+                                      </p:cBhvr>
+                                    </p:animEffect>
+                                  </p:childTnLst>
+                                </p:cTn>
+                              </p:par>
+                              <p:par>
+                                <p:cTn id="13" presetID="22" presetClass="entr" presetSubtype="8" fill="hold" grpId="0" nodeType="withEffect">
+                                  <p:stCondLst>
+                                    <p:cond delay="200"/>
+                                  </p:stCondLst>
+                                  <p:childTnLst>
+                                    <p:set>
+                                      <p:cBhvr>
+                                        <p:cTn id="14" dur="1" fill="hold">
+                                          <p:stCondLst>
+                                            <p:cond delay="0"/>
+                                          </p:stCondLst>
+                                        </p:cTn>
+                                        <p:tgtEl>
+                                          <p:spTgt spid="6"/>
+                                        </p:tgtEl>
+                                        <p:attrNameLst>
+                                          <p:attrName>style.visibility</p:attrName>
+                                        </p:attrNameLst>
+                                      </p:cBhvr>
+                                      <p:to>
+                                        <p:strVal val="visible"/>
+                                      </p:to>
+                                    </p:set>
+                                    <p:animEffect transition="in" filter="wipe(left)">
+                                      <p:cBhvr>
+                                        <p:cTn id="15" dur="450"/>
+                                        <p:tgtEl>
+                                          <p:spTgt spid="6"/>
+                                        </p:tgtEl>
+                                      </p:cBhvr>
+                                    </p:animEffect>
+                                  </p:childTnLst>
+                                </p:cTn>
+                              </p:par>
+                              <p:par>
+                                <p:cTn id="16" presetID="10" presetClass="entr" presetSubtype="0" fill="hold" grpId="0" nodeType="withEffect">
+                                  <p:stCondLst>
+                                    <p:cond delay="200"/>
+                                  </p:stCondLst>
+                                  <p:childTnLst>
+                                    <p:set>
+                                      <p:cBhvr>
+                                        <p:cTn id="17" dur="1" fill="hold">
+                                          <p:stCondLst>
+                                            <p:cond delay="0"/>
+                                          </p:stCondLst>
+                                        </p:cTn>
+                                        <p:tgtEl>
+                                          <p:spTgt spid="7"/>
+                                        </p:tgtEl>
+                                        <p:attrNameLst>
+                                          <p:attrName>style.visibility</p:attrName>
+                                        </p:attrNameLst>
+                                      </p:cBhvr>
+                                      <p:to>
+                                        <p:strVal val="visible"/>
+                                      </p:to>
+                                    </p:set>
+                                    <p:animEffect transition="in" filter="fade">
+                                      <p:cBhvr>
+                                        <p:cTn id="18" dur="450"/>
+                                        <p:tgtEl>
+                                          <p:spTgt spid="7"/>
+                                        </p:tgtEl>
+                                      </p:cBhvr>
+                                    </p:animEffect>
+                                  </p:childTnLst>
+                                </p:cTn>
+                              </p:par>
+                            </p:childTnLst>
+                          </p:cTn>
+                        </p:par>
+                        <p:par>
+                          <p:cTn id="29" fill="hold">
+                            <p:stCondLst>
+                              <p:cond delay="1000"/>
+                            </p:stCondLst>
+                            <p:childTnLst>
+                              <p:par>
+                                <p:cTn id="20" presetID="10" presetClass="entr" presetSubtype="0" fill="hold" grpId="0" nodeType="afterEffect">
+                                  <p:stCondLst>
+                                    <p:cond delay="0"/>
+                                  </p:stCondLst>
+                                  <p:childTnLst>
+                                    <p:set>
+                                      <p:cBhvr>
+                                        <p:cTn id="21" dur="1" fill="hold">
+                                          <p:stCondLst>
+                                            <p:cond delay="0"/>
+                                          </p:stCondLst>
+                                        </p:cTn>
+                                        <p:tgtEl>
+                                          <p:spTgt spid="8"/>
+                                        </p:tgtEl>
+                                        <p:attrNameLst>
+                                          <p:attrName>style.visibility</p:attrName>
+                                        </p:attrNameLst>
+                                      </p:cBhvr>
+                                      <p:to>
+                                        <p:strVal val="visible"/>
+                                      </p:to>
+                                    </p:set>
+                                    <p:animEffect transition="in" filter="fade">
+                                      <p:cBhvr>
+                                        <p:cTn id="22" dur="450"/>
+                                        <p:tgtEl>
+                                          <p:spTgt spid="8"/>
+                                        </p:tgtEl>
+                                      </p:cBhvr>
+                                    </p:animEffect>
+                                  </p:childTnLst>
+                                </p:cTn>
+                              </p:par>
+                              <p:par>
+                                <p:cTn id="23" presetID="10" presetClass="entr" presetSubtype="0" fill="hold" grpId="0" nodeType="withEffect">
+                                  <p:stCondLst>
+                                    <p:cond delay="0"/>
+                                  </p:stCondLst>
+                                  <p:childTnLst>
+                                    <p:set>
+                                      <p:cBhvr>
+                                        <p:cTn id="24" dur="1" fill="hold">
+                                          <p:stCondLst>
+                                            <p:cond delay="0"/>
+                                          </p:stCondLst>
+                                        </p:cTn>
+                                        <p:tgtEl>
+                                          <p:spTgt spid="9"/>
+                                        </p:tgtEl>
+                                        <p:attrNameLst>
+                                          <p:attrName>style.visibility</p:attrName>
+                                        </p:attrNameLst>
+                                      </p:cBhvr>
+                                      <p:to>
+                                        <p:strVal val="visible"/>
+                                      </p:to>
+                                    </p:set>
+                                    <p:animEffect transition="in" filter="fade">
+                                      <p:cBhvr>
+                                        <p:cTn id="25" dur="450"/>
+                                        <p:tgtEl>
+                                          <p:spTgt spid="9"/>
+                                        </p:tgtEl>
+                                      </p:cBhvr>
+                                    </p:animEffect>
+                                  </p:childTnLst>
+                                </p:cTn>
+                              </p:par>
+                              <p:par>
+                                <p:cTn id="26" presetID="10" presetClass="entr" presetSubtype="0" fill="hold" grpId="0" nodeType="withEffect">
+                                  <p:stCondLst>
+                                    <p:cond delay="0"/>
+                                  </p:stCondLst>
+                                  <p:childTnLst>
+                                    <p:set>
+                                      <p:cBhvr>
+                                        <p:cTn id="27" dur="1" fill="hold">
+                                          <p:stCondLst>
+                                            <p:cond delay="0"/>
+                                          </p:stCondLst>
+                                        </p:cTn>
+                                        <p:tgtEl>
+                                          <p:spTgt spid="10"/>
+                                        </p:tgtEl>
+                                        <p:attrNameLst>
+                                          <p:attrName>style.visibility</p:attrName>
+                                        </p:attrNameLst>
+                                      </p:cBhvr>
+                                      <p:to>
+                                        <p:strVal val="visible"/>
+                                      </p:to>
+                                    </p:set>
+                                    <p:animEffect transition="in" filter="fade">
+                                      <p:cBhvr>
+                                        <p:cTn id="28" dur="450"/>
+                                        <p:tgtEl>
+                                          <p:spTgt spid="10"/>
+                                        </p:tgtEl>
+                                      </p:cBhvr>
+                                    </p:animEffect>
+                                  </p:childTnLst>
+                                </p:cTn>
+                              </p:par>
+                            </p:childTnLst>
+                          </p:cTn>
+                        </p:par>
+                      </p:childTnLst>
+                    </p:cTn>
+                  </p:par>
+                </p:childTnLst>
+              </p:cTn>
+              <p:prevCondLst>
+                <p:cond evt="onPrev" delay="0">
+                  <p:tgtEl>
+                    <p:sldTgt/>
+                  </p:tgtEl>
+                </p:cond>
+              </p:prevCondLst>
+              <p:nextCondLst>
+                <p:cond evt="onNext" delay="0">
+                  <p:tgtEl>
+                    <p:sldTgt/>
+                  </p:tgtEl>
+                </p:cond>
+              </p:nextCondLst>
+            </p:seq>
+          </p:childTnLst>
+        </p:cTn>
+      </p:par>
+    </p:tnLst>
+    <p:bldLst>
+      <p:bldP spid="3" grpId="0" animBg="1"/>
+      <p:bldP spid="4" grpId="0" animBg="1"/>
+      <p:bldP spid="5" grpId="0" animBg="1"/>
+      <p:bldP spid="7" grpId="0" animBg="1"/>
+      <p:bldP spid="8" grpId="0" animBg="1"/>
+      <p:bldP spid="9" grpId="0" animBg="1"/>
+      <p:bldP spid="10" grpId="0" animBg="1"/>
+    </p:bldLst>
+  </p:timing>
+</p:sld>
+</file>
+
+<file path=ppt/slides/slide5.xml><?xml version="1.0" encoding="utf-8"?>
+<p:sld xmlns:a="http://schemas.openxmlformats.org/drawingml/2006/main" xmlns:r="http://schemas.openxmlformats.org/officeDocument/2006/relationships" xmlns:p="http://schemas.openxmlformats.org/presentationml/2006/main">
+  <p:cSld name="Slide 5">
     <p:spTree>
       <p:nvGrpSpPr>
         <p:cNvPr id="1" name=""/>
@@ -9373,304 +13379,6 @@
 </p:sld>
 </file>
 
-<file path=ppt/slides/slide5.xml><?xml version="1.0" encoding="utf-8"?>
-<p:sld xmlns:a="http://schemas.openxmlformats.org/drawingml/2006/main" xmlns:r="http://schemas.openxmlformats.org/officeDocument/2006/relationships" xmlns:p="http://schemas.openxmlformats.org/presentationml/2006/main">
-  <p:cSld name="Slide 5">
-    <p:spTree>
-      <p:nvGrpSpPr>
-        <p:cNvPr id="1" name=""/>
-        <p:cNvGrpSpPr/>
-        <p:nvPr/>
-      </p:nvGrpSpPr>
-      <p:grpSpPr>
-        <a:xfrm>
-          <a:off x="0" y="0"/>
-          <a:ext cx="0" cy="0"/>
-          <a:chOff x="0" y="0"/>
-          <a:chExt cx="0" cy="0"/>
-        </a:xfrm>
-      </p:grpSpPr>
-      <p:sp>
-        <p:nvSpPr>
-          <p:cNvPr id="2" name="Text 1"/>
-          <p:cNvSpPr/>
-          <p:nvPr>
-            <p:ph idx="101" type="title" hasCustomPrompt="1"/>
-          </p:nvPr>
-        </p:nvSpPr>
-        <p:spPr>
-          <a:xfrm>
-            <a:off x="548640" y="502920"/>
-            <a:ext cx="11094415" cy="822960"/>
-          </a:xfrm>
-          <a:prstGeom prst="rect">
-            <a:avLst/>
-          </a:prstGeom>
-          <a:noFill/>
-          <a:ln/>
-        </p:spPr>
-        <p:txBody>
-          <a:bodyPr wrap="square" lIns="0" tIns="0" rIns="0" bIns="0" rtlCol="0" anchor="t"/>
-          <a:lstStyle/>
-          <a:p>
-            <a:pPr algn="l" indent="0" marL="0">
-              <a:buNone/>
-            </a:pPr>
-            <a:r>
-              <a:rPr lang="en-US" sz="3600" b="1" dirty="0">
-                <a:solidFill>
-                  <a:schemeClr val="tx1"/>
-                </a:solidFill>
-              </a:rPr>
-              <a:t>Our method: AI drafts, people check</a:t>
-            </a:r>
-            <a:endParaRPr lang="en-US" sz="3600" dirty="0"/>
-          </a:p>
-        </p:txBody>
-      </p:sp>
-      <p:pic>
-        <p:nvPicPr>
-          <p:cNvPr id="3" name="gif-migration" descr="Animation: features flow from each Slate module through the 105-feature catalogue into the matching React tab, then new features appear">    </p:cNvPr>
-          <p:cNvPicPr>
-            <a:picLocks noChangeAspect="1"/>
-          </p:cNvPicPr>
-          <p:nvPr/>
-        </p:nvPicPr>
-        <p:blipFill>
-          <a:blip r:embed="rId1"/>
-          <a:stretch>
-            <a:fillRect/>
-          </a:stretch>
-        </p:blipFill>
-        <p:spPr>
-          <a:xfrm>
-            <a:off x="548640" y="1600200"/>
-            <a:ext cx="6858000" cy="4114800"/>
-          </a:xfrm>
-          <a:prstGeom prst="rect">
-            <a:avLst/>
-          </a:prstGeom>
-        </p:spPr>
-      </p:pic>
-      <p:sp>
-        <p:nvSpPr>
-          <p:cNvPr id="4" name="pack-card"/>
-          <p:cNvSpPr/>
-          <p:nvPr/>
-        </p:nvSpPr>
-        <p:spPr>
-          <a:xfrm>
-            <a:off x="7863840" y="1600200"/>
-            <a:ext cx="3776472" cy="1737360"/>
-          </a:xfrm>
-          <a:prstGeom prst="roundRect">
-            <a:avLst>
-              <a:gd name="adj" fmla="val 6316"/>
-            </a:avLst>
-          </a:prstGeom>
-          <a:solidFill>
-            <a:schemeClr val="tx1"/>
-          </a:solidFill>
-          <a:ln/>
-        </p:spPr>
-      </p:sp>
-      <p:sp>
-        <p:nvSpPr>
-          <p:cNvPr id="5" name="pack-title"/>
-          <p:cNvSpPr txBox="1"/>
-          <p:nvPr/>
-        </p:nvSpPr>
-        <p:spPr>
-          <a:xfrm>
-            <a:off x="8092440" y="1783080"/>
-            <a:ext cx="3383280" cy="457200"/>
-          </a:xfrm>
-          <a:prstGeom prst="rect">
-            <a:avLst/>
-          </a:prstGeom>
-          <a:noFill/>
-          <a:ln/>
-        </p:spPr>
-        <p:txBody>
-          <a:bodyPr wrap="square" lIns="0" tIns="0" rIns="0" bIns="0" rtlCol="0" anchor="t"/>
-          <a:lstStyle/>
-          <a:p>
-            <a:pPr indent="0" marL="0">
-              <a:buNone/>
-            </a:pPr>
-            <a:r>
-              <a:rPr lang="en-US" sz="2200" b="1" dirty="0">
-                <a:solidFill>
-                  <a:schemeClr val="bg1"/>
-                </a:solidFill>
-              </a:rPr>
-              <a:t>pack-project.ts</a:t>
-            </a:r>
-            <a:endParaRPr lang="en-US" sz="2200" dirty="0"/>
-          </a:p>
-        </p:txBody>
-      </p:sp>
-      <p:sp>
-        <p:nvSpPr>
-          <p:cNvPr id="6" name="pack-body"/>
-          <p:cNvSpPr txBox="1"/>
-          <p:nvPr/>
-        </p:nvSpPr>
-        <p:spPr>
-          <a:xfrm>
-            <a:off x="8092440" y="2286000"/>
-            <a:ext cx="3383280" cy="914400"/>
-          </a:xfrm>
-          <a:prstGeom prst="rect">
-            <a:avLst/>
-          </a:prstGeom>
-          <a:noFill/>
-          <a:ln/>
-        </p:spPr>
-        <p:txBody>
-          <a:bodyPr wrap="square" lIns="0" tIns="0" rIns="0" bIns="0" rtlCol="0" anchor="t"/>
-          <a:lstStyle/>
-          <a:p>
-            <a:pPr indent="0" marL="0">
-              <a:buNone/>
-            </a:pPr>
-            <a:r>
-              <a:rPr lang="en-US" sz="1500" dirty="0">
-                <a:solidFill>
-                  <a:schemeClr val="accent5"/>
-                </a:solidFill>
-              </a:rPr>
-              <a:t>Our script packs the whole React app, 75 files, into one dated file the AI reads in one go</a:t>
-            </a:r>
-            <a:endParaRPr lang="en-US" sz="1500" dirty="0"/>
-          </a:p>
-        </p:txBody>
-      </p:sp>
-      <p:sp>
-        <p:nvSpPr>
-          <p:cNvPr id="7" name="steps"/>
-          <p:cNvSpPr txBox="1"/>
-          <p:nvPr/>
-        </p:nvSpPr>
-        <p:spPr>
-          <a:xfrm>
-            <a:off x="7863840" y="3611880"/>
-            <a:ext cx="3776472" cy="2103120"/>
-          </a:xfrm>
-          <a:prstGeom prst="rect">
-            <a:avLst/>
-          </a:prstGeom>
-          <a:noFill/>
-          <a:ln/>
-        </p:spPr>
-        <p:txBody>
-          <a:bodyPr wrap="square" lIns="0" tIns="0" rIns="0" bIns="0" rtlCol="0" anchor="t"/>
-          <a:lstStyle/>
-          <a:p>
-            <a:pPr marL="342900" indent="-342900">
-              <a:spcAft>
-                <a:spcPts val="600"/>
-              </a:spcAft>
-              <a:buSzPct val="100000"/>
-              <a:buFont typeface="+mj-lt"/>
-              <a:buAutoNum type="arabicPeriod" startAt="1"/>
-            </a:pPr>
-            <a:r>
-              <a:rPr lang="en-US" sz="1600" dirty="0">
-                <a:solidFill>
-                  <a:schemeClr val="tx1"/>
-                </a:solidFill>
-              </a:rPr>
-              <a:t>Pack the context</a:t>
-            </a:r>
-            <a:endParaRPr lang="en-US" sz="1600" dirty="0"/>
-          </a:p>
-          <a:p>
-            <a:pPr marL="342900" indent="-342900">
-              <a:spcAft>
-                <a:spcPts val="600"/>
-              </a:spcAft>
-              <a:buSzPct val="100000"/>
-              <a:buFont typeface="+mj-lt"/>
-              <a:buAutoNum type="arabicPeriod" startAt="1"/>
-            </a:pPr>
-            <a:r>
-              <a:rPr lang="en-US" sz="1600" dirty="0">
-                <a:solidFill>
-                  <a:schemeClr val="tx1"/>
-                </a:solidFill>
-              </a:rPr>
-              <a:t>Extract legacy features</a:t>
-            </a:r>
-            <a:endParaRPr lang="en-US" sz="1600" dirty="0"/>
-          </a:p>
-          <a:p>
-            <a:pPr marL="342900" indent="-342900">
-              <a:spcAft>
-                <a:spcPts val="600"/>
-              </a:spcAft>
-              <a:buSzPct val="100000"/>
-              <a:buFont typeface="+mj-lt"/>
-              <a:buAutoNum type="arabicPeriod" startAt="1"/>
-            </a:pPr>
-            <a:r>
-              <a:rPr lang="en-US" sz="1600" dirty="0">
-                <a:solidFill>
-                  <a:schemeClr val="tx1"/>
-                </a:solidFill>
-              </a:rPr>
-              <a:t>Compare with the React code</a:t>
-            </a:r>
-            <a:endParaRPr lang="en-US" sz="1600" dirty="0"/>
-          </a:p>
-          <a:p>
-            <a:pPr marL="342900" indent="-342900">
-              <a:spcAft>
-                <a:spcPts val="600"/>
-              </a:spcAft>
-              <a:buSzPct val="100000"/>
-              <a:buFont typeface="+mj-lt"/>
-              <a:buAutoNum type="arabicPeriod" startAt="1"/>
-            </a:pPr>
-            <a:r>
-              <a:rPr lang="en-US" sz="1600" dirty="0">
-                <a:solidFill>
-                  <a:schemeClr val="tx1"/>
-                </a:solidFill>
-              </a:rPr>
-              <a:t>Fix gaps, re-pack, re-check</a:t>
-            </a:r>
-            <a:endParaRPr lang="en-US" sz="1600" dirty="0"/>
-          </a:p>
-          <a:p>
-            <a:pPr marL="342900" indent="-342900">
-              <a:spcAft>
-                <a:spcPts val="600"/>
-              </a:spcAft>
-              <a:buSzPct val="100000"/>
-              <a:buFont typeface="+mj-lt"/>
-              <a:buAutoNum type="arabicPeriod" startAt="1"/>
-            </a:pPr>
-            <a:r>
-              <a:rPr lang="en-US" sz="1600" dirty="0">
-                <a:solidFill>
-                  <a:schemeClr val="tx1"/>
-                </a:solidFill>
-              </a:rPr>
-              <a:t>Document the new app</a:t>
-            </a:r>
-            <a:endParaRPr lang="en-US" sz="1600" dirty="0"/>
-          </a:p>
-        </p:txBody>
-      </p:sp>
-    </p:spTree>
-  </p:cSld>
-  <p:clrMapOvr>
-    <a:masterClrMapping/>
-  </p:clrMapOvr>
-</p:sld>
-</file>
-
 <file path=ppt/slides/slide6.xml><?xml version="1.0" encoding="utf-8"?>
 <p:sld xmlns:a="http://schemas.openxmlformats.org/drawingml/2006/main" xmlns:r="http://schemas.openxmlformats.org/officeDocument/2006/relationships" xmlns:p="http://schemas.openxmlformats.org/presentationml/2006/main">
   <p:cSld name="Slide 6">
@@ -9720,6 +13428,304 @@
                   <a:schemeClr val="tx1"/>
                 </a:solidFill>
               </a:rPr>
+              <a:t>Our method: AI drafts, people check</a:t>
+            </a:r>
+            <a:endParaRPr lang="en-US" sz="3600" dirty="0"/>
+          </a:p>
+        </p:txBody>
+      </p:sp>
+      <p:pic>
+        <p:nvPicPr>
+          <p:cNvPr id="3" name="gif-migration" descr="Animation: features flow from each Slate module through the 105-feature catalogue into the matching React tab, then new features appear">    </p:cNvPr>
+          <p:cNvPicPr>
+            <a:picLocks noChangeAspect="1"/>
+          </p:cNvPicPr>
+          <p:nvPr/>
+        </p:nvPicPr>
+        <p:blipFill>
+          <a:blip r:embed="rId1"/>
+          <a:stretch>
+            <a:fillRect/>
+          </a:stretch>
+        </p:blipFill>
+        <p:spPr>
+          <a:xfrm>
+            <a:off x="548640" y="1600200"/>
+            <a:ext cx="6858000" cy="4114800"/>
+          </a:xfrm>
+          <a:prstGeom prst="rect">
+            <a:avLst/>
+          </a:prstGeom>
+        </p:spPr>
+      </p:pic>
+      <p:sp>
+        <p:nvSpPr>
+          <p:cNvPr id="4" name="pack-card"/>
+          <p:cNvSpPr/>
+          <p:nvPr/>
+        </p:nvSpPr>
+        <p:spPr>
+          <a:xfrm>
+            <a:off x="7863840" y="1600200"/>
+            <a:ext cx="3776472" cy="1737360"/>
+          </a:xfrm>
+          <a:prstGeom prst="roundRect">
+            <a:avLst>
+              <a:gd name="adj" fmla="val 6316"/>
+            </a:avLst>
+          </a:prstGeom>
+          <a:solidFill>
+            <a:schemeClr val="tx1"/>
+          </a:solidFill>
+          <a:ln/>
+        </p:spPr>
+      </p:sp>
+      <p:sp>
+        <p:nvSpPr>
+          <p:cNvPr id="5" name="pack-title"/>
+          <p:cNvSpPr txBox="1"/>
+          <p:nvPr/>
+        </p:nvSpPr>
+        <p:spPr>
+          <a:xfrm>
+            <a:off x="8092440" y="1783080"/>
+            <a:ext cx="3383280" cy="457200"/>
+          </a:xfrm>
+          <a:prstGeom prst="rect">
+            <a:avLst/>
+          </a:prstGeom>
+          <a:noFill/>
+          <a:ln/>
+        </p:spPr>
+        <p:txBody>
+          <a:bodyPr wrap="square" lIns="0" tIns="0" rIns="0" bIns="0" rtlCol="0" anchor="t"/>
+          <a:lstStyle/>
+          <a:p>
+            <a:pPr indent="0" marL="0">
+              <a:buNone/>
+            </a:pPr>
+            <a:r>
+              <a:rPr lang="en-US" sz="2200" b="1" dirty="0">
+                <a:solidFill>
+                  <a:schemeClr val="bg1"/>
+                </a:solidFill>
+              </a:rPr>
+              <a:t>pack-project.ts</a:t>
+            </a:r>
+            <a:endParaRPr lang="en-US" sz="2200" dirty="0"/>
+          </a:p>
+        </p:txBody>
+      </p:sp>
+      <p:sp>
+        <p:nvSpPr>
+          <p:cNvPr id="6" name="pack-body"/>
+          <p:cNvSpPr txBox="1"/>
+          <p:nvPr/>
+        </p:nvSpPr>
+        <p:spPr>
+          <a:xfrm>
+            <a:off x="8092440" y="2286000"/>
+            <a:ext cx="3383280" cy="914400"/>
+          </a:xfrm>
+          <a:prstGeom prst="rect">
+            <a:avLst/>
+          </a:prstGeom>
+          <a:noFill/>
+          <a:ln/>
+        </p:spPr>
+        <p:txBody>
+          <a:bodyPr wrap="square" lIns="0" tIns="0" rIns="0" bIns="0" rtlCol="0" anchor="t"/>
+          <a:lstStyle/>
+          <a:p>
+            <a:pPr indent="0" marL="0">
+              <a:buNone/>
+            </a:pPr>
+            <a:r>
+              <a:rPr lang="en-US" sz="1500" dirty="0">
+                <a:solidFill>
+                  <a:schemeClr val="accent5"/>
+                </a:solidFill>
+              </a:rPr>
+              <a:t>Our script packs the whole React app, 75 files, into one dated file the AI reads in one go</a:t>
+            </a:r>
+            <a:endParaRPr lang="en-US" sz="1500" dirty="0"/>
+          </a:p>
+        </p:txBody>
+      </p:sp>
+      <p:sp>
+        <p:nvSpPr>
+          <p:cNvPr id="7" name="steps"/>
+          <p:cNvSpPr txBox="1"/>
+          <p:nvPr/>
+        </p:nvSpPr>
+        <p:spPr>
+          <a:xfrm>
+            <a:off x="7863840" y="3611880"/>
+            <a:ext cx="3776472" cy="2103120"/>
+          </a:xfrm>
+          <a:prstGeom prst="rect">
+            <a:avLst/>
+          </a:prstGeom>
+          <a:noFill/>
+          <a:ln/>
+        </p:spPr>
+        <p:txBody>
+          <a:bodyPr wrap="square" lIns="0" tIns="0" rIns="0" bIns="0" rtlCol="0" anchor="t"/>
+          <a:lstStyle/>
+          <a:p>
+            <a:pPr marL="342900" indent="-342900">
+              <a:spcAft>
+                <a:spcPts val="600"/>
+              </a:spcAft>
+              <a:buSzPct val="100000"/>
+              <a:buFont typeface="+mj-lt"/>
+              <a:buAutoNum type="arabicPeriod" startAt="1"/>
+            </a:pPr>
+            <a:r>
+              <a:rPr lang="en-US" sz="1600" dirty="0">
+                <a:solidFill>
+                  <a:schemeClr val="tx1"/>
+                </a:solidFill>
+              </a:rPr>
+              <a:t>Pack the context</a:t>
+            </a:r>
+            <a:endParaRPr lang="en-US" sz="1600" dirty="0"/>
+          </a:p>
+          <a:p>
+            <a:pPr marL="342900" indent="-342900">
+              <a:spcAft>
+                <a:spcPts val="600"/>
+              </a:spcAft>
+              <a:buSzPct val="100000"/>
+              <a:buFont typeface="+mj-lt"/>
+              <a:buAutoNum type="arabicPeriod" startAt="1"/>
+            </a:pPr>
+            <a:r>
+              <a:rPr lang="en-US" sz="1600" dirty="0">
+                <a:solidFill>
+                  <a:schemeClr val="tx1"/>
+                </a:solidFill>
+              </a:rPr>
+              <a:t>Extract legacy features</a:t>
+            </a:r>
+            <a:endParaRPr lang="en-US" sz="1600" dirty="0"/>
+          </a:p>
+          <a:p>
+            <a:pPr marL="342900" indent="-342900">
+              <a:spcAft>
+                <a:spcPts val="600"/>
+              </a:spcAft>
+              <a:buSzPct val="100000"/>
+              <a:buFont typeface="+mj-lt"/>
+              <a:buAutoNum type="arabicPeriod" startAt="1"/>
+            </a:pPr>
+            <a:r>
+              <a:rPr lang="en-US" sz="1600" dirty="0">
+                <a:solidFill>
+                  <a:schemeClr val="tx1"/>
+                </a:solidFill>
+              </a:rPr>
+              <a:t>Compare with the React code</a:t>
+            </a:r>
+            <a:endParaRPr lang="en-US" sz="1600" dirty="0"/>
+          </a:p>
+          <a:p>
+            <a:pPr marL="342900" indent="-342900">
+              <a:spcAft>
+                <a:spcPts val="600"/>
+              </a:spcAft>
+              <a:buSzPct val="100000"/>
+              <a:buFont typeface="+mj-lt"/>
+              <a:buAutoNum type="arabicPeriod" startAt="1"/>
+            </a:pPr>
+            <a:r>
+              <a:rPr lang="en-US" sz="1600" dirty="0">
+                <a:solidFill>
+                  <a:schemeClr val="tx1"/>
+                </a:solidFill>
+              </a:rPr>
+              <a:t>Fix gaps, re-pack, re-check</a:t>
+            </a:r>
+            <a:endParaRPr lang="en-US" sz="1600" dirty="0"/>
+          </a:p>
+          <a:p>
+            <a:pPr marL="342900" indent="-342900">
+              <a:spcAft>
+                <a:spcPts val="600"/>
+              </a:spcAft>
+              <a:buSzPct val="100000"/>
+              <a:buFont typeface="+mj-lt"/>
+              <a:buAutoNum type="arabicPeriod" startAt="1"/>
+            </a:pPr>
+            <a:r>
+              <a:rPr lang="en-US" sz="1600" dirty="0">
+                <a:solidFill>
+                  <a:schemeClr val="tx1"/>
+                </a:solidFill>
+              </a:rPr>
+              <a:t>Document the new app</a:t>
+            </a:r>
+            <a:endParaRPr lang="en-US" sz="1600" dirty="0"/>
+          </a:p>
+        </p:txBody>
+      </p:sp>
+    </p:spTree>
+  </p:cSld>
+  <p:clrMapOvr>
+    <a:masterClrMapping/>
+  </p:clrMapOvr>
+</p:sld>
+</file>
+
+<file path=ppt/slides/slide7.xml><?xml version="1.0" encoding="utf-8"?>
+<p:sld xmlns:a="http://schemas.openxmlformats.org/drawingml/2006/main" xmlns:r="http://schemas.openxmlformats.org/officeDocument/2006/relationships" xmlns:p="http://schemas.openxmlformats.org/presentationml/2006/main">
+  <p:cSld name="Slide 7">
+    <p:spTree>
+      <p:nvGrpSpPr>
+        <p:cNvPr id="1" name=""/>
+        <p:cNvGrpSpPr/>
+        <p:nvPr/>
+      </p:nvGrpSpPr>
+      <p:grpSpPr>
+        <a:xfrm>
+          <a:off x="0" y="0"/>
+          <a:ext cx="0" cy="0"/>
+          <a:chOff x="0" y="0"/>
+          <a:chExt cx="0" cy="0"/>
+        </a:xfrm>
+      </p:grpSpPr>
+      <p:sp>
+        <p:nvSpPr>
+          <p:cNvPr id="2" name="Text 1"/>
+          <p:cNvSpPr/>
+          <p:nvPr>
+            <p:ph idx="101" type="title" hasCustomPrompt="1"/>
+          </p:nvPr>
+        </p:nvSpPr>
+        <p:spPr>
+          <a:xfrm>
+            <a:off x="548640" y="502920"/>
+            <a:ext cx="11094415" cy="822960"/>
+          </a:xfrm>
+          <a:prstGeom prst="rect">
+            <a:avLst/>
+          </a:prstGeom>
+          <a:noFill/>
+          <a:ln/>
+        </p:spPr>
+        <p:txBody>
+          <a:bodyPr wrap="square" lIns="0" tIns="0" rIns="0" bIns="0" rtlCol="0" anchor="t"/>
+          <a:lstStyle/>
+          <a:p>
+            <a:pPr algn="l" indent="0" marL="0">
+              <a:buNone/>
+            </a:pPr>
+            <a:r>
+              <a:rPr lang="en-US" sz="3600" b="1" dirty="0">
+                <a:solidFill>
+                  <a:schemeClr val="tx1"/>
+                </a:solidFill>
+              </a:rPr>
               <a:t>The process in numbers</a:t>
             </a:r>
             <a:endParaRPr lang="en-US" sz="3600" dirty="0"/>
@@ -10342,7 +14348,7 @@
                   <a:schemeClr val="tx1"/>
                 </a:solidFill>
               </a:rPr>
-              <a:t>5</a:t>
+              <a:t>11</a:t>
             </a:r>
             <a:endParaRPr lang="en-US" sz="4800" dirty="0"/>
           </a:p>
@@ -10378,7 +14384,7 @@
                   <a:schemeClr val="tx2"/>
                 </a:solidFill>
               </a:rPr>
-              <a:t>enhancements beyond the old app</a:t>
+              <a:t>new features beyond the old app</a:t>
             </a:r>
             <a:endParaRPr lang="en-US" sz="1500" dirty="0"/>
           </a:p>
@@ -11469,9 +15475,9 @@
 </p:sld>
 </file>
 
-<file path=ppt/slides/slide7.xml><?xml version="1.0" encoding="utf-8"?>
+<file path=ppt/slides/slide8.xml><?xml version="1.0" encoding="utf-8"?>
 <p:sld xmlns:a="http://schemas.openxmlformats.org/drawingml/2006/main" xmlns:r="http://schemas.openxmlformats.org/officeDocument/2006/relationships" xmlns:p="http://schemas.openxmlformats.org/presentationml/2006/main">
-  <p:cSld name="Slide 7">
+  <p:cSld name="Slide 8">
     <p:spTree>
       <p:nvGrpSpPr>
         <p:cNvPr id="1" name=""/>
@@ -11518,7 +15524,7 @@
                   <a:schemeClr val="tx1"/>
                 </a:solidFill>
               </a:rPr>
-              <a:t>Effort saved: about 76% versus manual</a:t>
+              <a:t>Effort saved: about 76%, or ~$80K</a:t>
             </a:r>
             <a:endParaRPr lang="en-US" sz="3600" dirty="0"/>
           </a:p>
@@ -11648,7 +15654,7 @@
                   <a:schemeClr val="tx2"/>
                 </a:solidFill>
               </a:rPr>
-              <a:t>sprints, ≈ 340 person-days</a:t>
+              <a:t>sprints, ≈ 340 person-days ≈ $105K</a:t>
             </a:r>
             <a:endParaRPr lang="en-US" sz="1400" dirty="0"/>
           </a:p>
@@ -11778,7 +15784,7 @@
                   <a:schemeClr val="tx2"/>
                 </a:solidFill>
               </a:rPr>
-              <a:t>sprints, in one PI</a:t>
+              <a:t>sprints, ≈ 80 person-days ≈ $25K</a:t>
             </a:r>
             <a:endParaRPr lang="en-US" sz="1400" dirty="0"/>
           </a:p>
@@ -11836,7 +15842,7 @@
                   <a:schemeClr val="accent5"/>
                 </a:solidFill>
               </a:rPr>
-              <a:t>~76%</a:t>
+              <a:t>~$80K</a:t>
             </a:r>
             <a:endParaRPr lang="en-US" sz="4800" dirty="0"/>
           </a:p>
@@ -11872,7 +15878,7 @@
                   <a:schemeClr val="bg1"/>
                 </a:solidFill>
               </a:rPr>
-              <a:t>Effort saved</a:t>
+              <a:t>Saved</a:t>
             </a:r>
             <a:endParaRPr lang="en-US" sz="1800" dirty="0"/>
           </a:p>
@@ -11908,7 +15914,7 @@
                   <a:schemeClr val="accent5"/>
                 </a:solidFill>
               </a:rPr>
-              <a:t>(17 − 4) ÷ 17 sprints</a:t>
+              <a:t>about 76% less effort: (17 − 4) ÷ 17</a:t>
             </a:r>
             <a:endParaRPr lang="en-US" sz="1400" dirty="0"/>
           </a:p>
@@ -12196,7 +16202,7 @@
                   <a:schemeClr val="tx2"/>
                 </a:solidFill>
               </a:rPr>
-              <a:t>Generic estimate, not a measured baseline: 105 features × (0.5 day discovery + 2 days build + 0.5 day parity testing) + 25 days documentation ≈ 340 person-days. Team of 2 developers, 2-week sprints = 20 person-days per sprint; 1 PI = 4 development sprints.</a:t>
+              <a:t>Generic estimate, not a measured baseline: 105 features × (0.5 day discovery + 2 days build + 0.5 day parity testing) + 25 days documentation ≈ 340 person-days. 2 developers, 2-week sprints = 20 person-days per sprint; 1 PI = 4 sprints; $38.50 per hour, 8 hours a day.</a:t>
             </a:r>
             <a:endParaRPr lang="en-US" sz="1100" dirty="0"/>
           </a:p>
@@ -13013,9 +17019,9 @@
 </p:sld>
 </file>
 
-<file path=ppt/slides/slide8.xml><?xml version="1.0" encoding="utf-8"?>
+<file path=ppt/slides/slide9.xml><?xml version="1.0" encoding="utf-8"?>
 <p:sld xmlns:a="http://schemas.openxmlformats.org/drawingml/2006/main" xmlns:r="http://schemas.openxmlformats.org/officeDocument/2006/relationships" xmlns:p="http://schemas.openxmlformats.org/presentationml/2006/main">
-  <p:cSld name="Slide 8">
+  <p:cSld name="Slide 9">
     <p:spTree>
       <p:nvGrpSpPr>
         <p:cNvPr id="1" name=""/>
@@ -13062,7 +17068,7 @@
                   <a:schemeClr val="tx1"/>
                 </a:solidFill>
               </a:rPr>
-              <a:t>What the business says</a:t>
+              <a:t>Faster to build, cheaper to run</a:t>
             </a:r>
             <a:endParaRPr lang="en-US" sz="3600" dirty="0"/>
           </a:p>
@@ -13070,14 +17076,36 @@
       </p:sp>
       <p:sp>
         <p:nvSpPr>
-          <p:cNvPr id="3" name="quote-sub"/>
+          <p:cNvPr id="3" name="ease-0-card"/>
+          <p:cNvSpPr/>
+          <p:nvPr/>
+        </p:nvSpPr>
+        <p:spPr>
+          <a:xfrm>
+            <a:off x="548640" y="1371600"/>
+            <a:ext cx="2567864" cy="1554480"/>
+          </a:xfrm>
+          <a:prstGeom prst="roundRect">
+            <a:avLst>
+              <a:gd name="adj" fmla="val 7059"/>
+            </a:avLst>
+          </a:prstGeom>
+          <a:solidFill>
+            <a:schemeClr val="bg1"/>
+          </a:solidFill>
+          <a:ln/>
+        </p:spPr>
+      </p:sp>
+      <p:sp>
+        <p:nvSpPr>
+          <p:cNvPr id="4" name="ease-0-value"/>
           <p:cNvSpPr txBox="1"/>
           <p:nvPr/>
         </p:nvSpPr>
         <p:spPr>
           <a:xfrm>
-            <a:off x="548640" y="1115568"/>
-            <a:ext cx="11094415" cy="320040"/>
+            <a:off x="749808" y="1481328"/>
+            <a:ext cx="2165528" cy="640080"/>
           </a:xfrm>
           <a:prstGeom prst="rect">
             <a:avLst/>
@@ -13093,31 +17121,255 @@
               <a:buNone/>
             </a:pPr>
             <a:r>
-              <a:rPr lang="en-US" sz="1400" dirty="0">
+              <a:rPr lang="en-US" sz="3400" b="1" dirty="0">
+                <a:solidFill>
+                  <a:schemeClr val="accent3"/>
+                </a:solidFill>
+              </a:rPr>
+              <a:t>11</a:t>
+            </a:r>
+            <a:endParaRPr lang="en-US" sz="3400" dirty="0"/>
+          </a:p>
+        </p:txBody>
+      </p:sp>
+      <p:sp>
+        <p:nvSpPr>
+          <p:cNvPr id="5" name="ease-0-label"/>
+          <p:cNvSpPr txBox="1"/>
+          <p:nvPr/>
+        </p:nvSpPr>
+        <p:spPr>
+          <a:xfrm>
+            <a:off x="749808" y="2148840"/>
+            <a:ext cx="2165528" cy="685800"/>
+          </a:xfrm>
+          <a:prstGeom prst="rect">
+            <a:avLst/>
+          </a:prstGeom>
+          <a:noFill/>
+          <a:ln/>
+        </p:spPr>
+        <p:txBody>
+          <a:bodyPr wrap="square" lIns="0" tIns="0" rIns="0" bIns="0" rtlCol="0" anchor="t"/>
+          <a:lstStyle/>
+          <a:p>
+            <a:pPr indent="0" marL="0">
+              <a:buNone/>
+            </a:pPr>
+            <a:r>
+              <a:rPr lang="en-US" sz="1300" dirty="0">
                 <a:solidFill>
                   <a:schemeClr val="tx2"/>
                 </a:solidFill>
               </a:rPr>
-              <a:t>Feedback from ERM business stakeholders, September 2026</a:t>
-            </a:r>
-            <a:endParaRPr lang="en-US" sz="1400" dirty="0"/>
+              <a:t>new features Slate never had, shipped in the same PI</a:t>
+            </a:r>
+            <a:endParaRPr lang="en-US" sz="1300" dirty="0"/>
           </a:p>
         </p:txBody>
       </p:sp>
       <p:sp>
         <p:nvSpPr>
-          <p:cNvPr id="4" name="quote-0-card"/>
+          <p:cNvPr id="6" name="ease-1-card"/>
           <p:cNvSpPr/>
           <p:nvPr/>
         </p:nvSpPr>
         <p:spPr>
           <a:xfrm>
-            <a:off x="548640" y="1645920"/>
-            <a:ext cx="3515258" cy="4480560"/>
+            <a:off x="3390824" y="1371600"/>
+            <a:ext cx="2567864" cy="1554480"/>
           </a:xfrm>
           <a:prstGeom prst="roundRect">
             <a:avLst>
-              <a:gd name="adj" fmla="val 3121"/>
+              <a:gd name="adj" fmla="val 7059"/>
+            </a:avLst>
+          </a:prstGeom>
+          <a:solidFill>
+            <a:schemeClr val="bg1"/>
+          </a:solidFill>
+          <a:ln/>
+        </p:spPr>
+      </p:sp>
+      <p:sp>
+        <p:nvSpPr>
+          <p:cNvPr id="7" name="ease-1-value"/>
+          <p:cNvSpPr txBox="1"/>
+          <p:nvPr/>
+        </p:nvSpPr>
+        <p:spPr>
+          <a:xfrm>
+            <a:off x="3591992" y="1481328"/>
+            <a:ext cx="2165528" cy="640080"/>
+          </a:xfrm>
+          <a:prstGeom prst="rect">
+            <a:avLst/>
+          </a:prstGeom>
+          <a:noFill/>
+          <a:ln/>
+        </p:spPr>
+        <p:txBody>
+          <a:bodyPr wrap="square" lIns="0" tIns="0" rIns="0" bIns="0" rtlCol="0" anchor="t"/>
+          <a:lstStyle/>
+          <a:p>
+            <a:pPr indent="0" marL="0">
+              <a:buNone/>
+            </a:pPr>
+            <a:r>
+              <a:rPr lang="en-US" sz="3400" b="1" dirty="0">
+                <a:solidFill>
+                  <a:schemeClr val="tx1"/>
+                </a:solidFill>
+              </a:rPr>
+              <a:t>11 files</a:t>
+            </a:r>
+            <a:endParaRPr lang="en-US" sz="3400" dirty="0"/>
+          </a:p>
+        </p:txBody>
+      </p:sp>
+      <p:sp>
+        <p:nvSpPr>
+          <p:cNvPr id="8" name="ease-1-label"/>
+          <p:cNvSpPr txBox="1"/>
+          <p:nvPr/>
+        </p:nvSpPr>
+        <p:spPr>
+          <a:xfrm>
+            <a:off x="3591992" y="2148840"/>
+            <a:ext cx="2165528" cy="685800"/>
+          </a:xfrm>
+          <a:prstGeom prst="rect">
+            <a:avLst/>
+          </a:prstGeom>
+          <a:noFill/>
+          <a:ln/>
+        </p:spPr>
+        <p:txBody>
+          <a:bodyPr wrap="square" lIns="0" tIns="0" rIns="0" bIns="0" rtlCol="0" anchor="t"/>
+          <a:lstStyle/>
+          <a:p>
+            <a:pPr indent="0" marL="0">
+              <a:buNone/>
+            </a:pPr>
+            <a:r>
+              <a:rPr lang="en-US" sz="1300" dirty="0">
+                <a:solidFill>
+                  <a:schemeClr val="tx2"/>
+                </a:solidFill>
+              </a:rPr>
+              <a:t>one change added app-wide notifications and auto-refresh</a:t>
+            </a:r>
+            <a:endParaRPr lang="en-US" sz="1300" dirty="0"/>
+          </a:p>
+        </p:txBody>
+      </p:sp>
+      <p:sp>
+        <p:nvSpPr>
+          <p:cNvPr id="9" name="ease-2-card"/>
+          <p:cNvSpPr/>
+          <p:nvPr/>
+        </p:nvSpPr>
+        <p:spPr>
+          <a:xfrm>
+            <a:off x="6233008" y="1371600"/>
+            <a:ext cx="2567864" cy="1554480"/>
+          </a:xfrm>
+          <a:prstGeom prst="roundRect">
+            <a:avLst>
+              <a:gd name="adj" fmla="val 7059"/>
+            </a:avLst>
+          </a:prstGeom>
+          <a:solidFill>
+            <a:schemeClr val="bg1"/>
+          </a:solidFill>
+          <a:ln/>
+        </p:spPr>
+      </p:sp>
+      <p:sp>
+        <p:nvSpPr>
+          <p:cNvPr id="10" name="ease-2-value"/>
+          <p:cNvSpPr txBox="1"/>
+          <p:nvPr/>
+        </p:nvSpPr>
+        <p:spPr>
+          <a:xfrm>
+            <a:off x="6434176" y="1481328"/>
+            <a:ext cx="2165528" cy="640080"/>
+          </a:xfrm>
+          <a:prstGeom prst="rect">
+            <a:avLst/>
+          </a:prstGeom>
+          <a:noFill/>
+          <a:ln/>
+        </p:spPr>
+        <p:txBody>
+          <a:bodyPr wrap="square" lIns="0" tIns="0" rIns="0" bIns="0" rtlCol="0" anchor="t"/>
+          <a:lstStyle/>
+          <a:p>
+            <a:pPr indent="0" marL="0">
+              <a:buNone/>
+            </a:pPr>
+            <a:r>
+              <a:rPr lang="en-US" sz="3400" b="1" dirty="0">
+                <a:solidFill>
+                  <a:schemeClr val="tx1"/>
+                </a:solidFill>
+              </a:rPr>
+              <a:t>−97%</a:t>
+            </a:r>
+            <a:endParaRPr lang="en-US" sz="3400" dirty="0"/>
+          </a:p>
+        </p:txBody>
+      </p:sp>
+      <p:sp>
+        <p:nvSpPr>
+          <p:cNvPr id="11" name="ease-2-label"/>
+          <p:cNvSpPr txBox="1"/>
+          <p:nvPr/>
+        </p:nvSpPr>
+        <p:spPr>
+          <a:xfrm>
+            <a:off x="6434176" y="2148840"/>
+            <a:ext cx="2165528" cy="685800"/>
+          </a:xfrm>
+          <a:prstGeom prst="rect">
+            <a:avLst/>
+          </a:prstGeom>
+          <a:noFill/>
+          <a:ln/>
+        </p:spPr>
+        <p:txBody>
+          <a:bodyPr wrap="square" lIns="0" tIns="0" rIns="0" bIns="0" rtlCol="0" anchor="t"/>
+          <a:lstStyle/>
+          <a:p>
+            <a:pPr indent="0" marL="0">
+              <a:buNone/>
+            </a:pPr>
+            <a:r>
+              <a:rPr lang="en-US" sz="1300" dirty="0">
+                <a:solidFill>
+                  <a:schemeClr val="tx2"/>
+                </a:solidFill>
+              </a:rPr>
+              <a:t>25 MB of Slate configuration became 0.8 MB of typed code</a:t>
+            </a:r>
+            <a:endParaRPr lang="en-US" sz="1300" dirty="0"/>
+          </a:p>
+        </p:txBody>
+      </p:sp>
+      <p:sp>
+        <p:nvSpPr>
+          <p:cNvPr id="12" name="ease-3-card"/>
+          <p:cNvSpPr/>
+          <p:nvPr/>
+        </p:nvSpPr>
+        <p:spPr>
+          <a:xfrm>
+            <a:off x="9075191" y="1371600"/>
+            <a:ext cx="2567864" cy="1554480"/>
+          </a:xfrm>
+          <a:prstGeom prst="roundRect">
+            <a:avLst>
+              <a:gd name="adj" fmla="val 7059"/>
             </a:avLst>
           </a:prstGeom>
           <a:solidFill>
@@ -13128,14 +17380,14 @@
       </p:sp>
       <p:sp>
         <p:nvSpPr>
-          <p:cNvPr id="5" name="quote-0-mark"/>
+          <p:cNvPr id="13" name="ease-3-value"/>
           <p:cNvSpPr txBox="1"/>
           <p:nvPr/>
         </p:nvSpPr>
         <p:spPr>
           <a:xfrm>
-            <a:off x="822960" y="1783080"/>
-            <a:ext cx="914400" cy="731520"/>
+            <a:off x="9276359" y="1481328"/>
+            <a:ext cx="2165528" cy="640080"/>
           </a:xfrm>
           <a:prstGeom prst="rect">
             <a:avLst/>
@@ -13151,27 +17403,27 @@
               <a:buNone/>
             </a:pPr>
             <a:r>
-              <a:rPr lang="en-US" sz="6000" b="1" dirty="0">
+              <a:rPr lang="en-US" sz="3400" b="1" dirty="0">
                 <a:solidFill>
                   <a:schemeClr val="accent5"/>
                 </a:solidFill>
               </a:rPr>
-              <a:t>“</a:t>
-            </a:r>
-            <a:endParaRPr lang="en-US" sz="6000" dirty="0"/>
+              <a:t>~$10K</a:t>
+            </a:r>
+            <a:endParaRPr lang="en-US" sz="3400" dirty="0"/>
           </a:p>
         </p:txBody>
       </p:sp>
       <p:sp>
         <p:nvSpPr>
-          <p:cNvPr id="6" name="quote-0-text"/>
+          <p:cNvPr id="14" name="ease-3-label"/>
           <p:cNvSpPr txBox="1"/>
           <p:nvPr/>
         </p:nvSpPr>
         <p:spPr>
           <a:xfrm>
-            <a:off x="822960" y="2514600"/>
-            <a:ext cx="2966618" cy="2606040"/>
+            <a:off x="9276359" y="2148840"/>
+            <a:ext cx="2165528" cy="685800"/>
           </a:xfrm>
           <a:prstGeom prst="rect">
             <a:avLst/>
@@ -13187,81 +17439,31 @@
               <a:buNone/>
             </a:pPr>
             <a:r>
-              <a:rPr lang="en-US" sz="1800" i="1" dirty="0">
-                <a:solidFill>
-                  <a:schemeClr val="bg1"/>
+              <a:rPr lang="en-US" sz="1300" dirty="0">
+                <a:solidFill>
+                  <a:schemeClr val="accent5"/>
                 </a:solidFill>
               </a:rPr>
-              <a:t>Thanks to a mix of regular teamwork with the business and strong IT skills, they have turned an idea into a proof of concept… User interface and performance have significantly improved since the first proof of concept.</a:t>
-            </a:r>
-            <a:endParaRPr lang="en-US" sz="1800" dirty="0"/>
+              <a:t>less maintenance effort every year (estimate)</a:t>
+            </a:r>
+            <a:endParaRPr lang="en-US" sz="1300" dirty="0"/>
           </a:p>
         </p:txBody>
       </p:sp>
       <p:sp>
         <p:nvSpPr>
-          <p:cNvPr id="7" name="quote-0-who"/>
-          <p:cNvSpPr txBox="1"/>
-          <p:nvPr/>
-        </p:nvSpPr>
-        <p:spPr>
-          <a:xfrm>
-            <a:off x="822960" y="5166360"/>
-            <a:ext cx="2966618" cy="731520"/>
-          </a:xfrm>
-          <a:prstGeom prst="rect">
-            <a:avLst/>
-          </a:prstGeom>
-          <a:noFill/>
-          <a:ln/>
-        </p:spPr>
-        <p:txBody>
-          <a:bodyPr wrap="square" lIns="0" tIns="0" rIns="0" bIns="0" rtlCol="0" anchor="b"/>
-          <a:lstStyle/>
-          <a:p>
-            <a:pPr indent="0" marL="0">
-              <a:buNone/>
-            </a:pPr>
-            <a:r>
-              <a:rPr lang="en-US" sz="1400" b="1" dirty="0">
-                <a:solidFill>
-                  <a:schemeClr val="bg1"/>
-                </a:solidFill>
-              </a:rPr>
-              <a:t>ERM Centre of Competence</a:t>
-            </a:r>
-            <a:endParaRPr lang="en-US" sz="1400" dirty="0"/>
-          </a:p>
-          <a:p>
-            <a:pPr indent="0" marL="0">
-              <a:buNone/>
-            </a:pPr>
-            <a:r>
-              <a:rPr lang="en-US" sz="1200" dirty="0">
-                <a:solidFill>
-                  <a:schemeClr val="accent5"/>
-                </a:solidFill>
-              </a:rPr>
-              <a:t>Enterprise Risk Management</a:t>
-            </a:r>
-            <a:endParaRPr lang="en-US" sz="1400" dirty="0"/>
-          </a:p>
-        </p:txBody>
-      </p:sp>
-      <p:sp>
-        <p:nvSpPr>
-          <p:cNvPr id="8" name="quote-1-card"/>
+          <p:cNvPr id="15" name="ease-old"/>
           <p:cNvSpPr/>
           <p:nvPr/>
         </p:nvSpPr>
         <p:spPr>
           <a:xfrm>
-            <a:off x="4338218" y="1645920"/>
-            <a:ext cx="3515258" cy="4480560"/>
+            <a:off x="548640" y="3154680"/>
+            <a:ext cx="5410048" cy="2423160"/>
           </a:xfrm>
           <a:prstGeom prst="roundRect">
             <a:avLst>
-              <a:gd name="adj" fmla="val 3121"/>
+              <a:gd name="adj" fmla="val 4528"/>
             </a:avLst>
           </a:prstGeom>
           <a:solidFill>
@@ -13272,14 +17474,14 @@
       </p:sp>
       <p:sp>
         <p:nvSpPr>
-          <p:cNvPr id="9" name="quote-1-mark"/>
+          <p:cNvPr id="16" name="ease-old-text"/>
           <p:cNvSpPr txBox="1"/>
           <p:nvPr/>
         </p:nvSpPr>
         <p:spPr>
           <a:xfrm>
-            <a:off x="4612538" y="1783080"/>
-            <a:ext cx="914400" cy="731520"/>
+            <a:off x="822960" y="3291840"/>
+            <a:ext cx="4861408" cy="2148840"/>
           </a:xfrm>
           <a:prstGeom prst="rect">
             <a:avLst/>
@@ -13292,30 +17494,126 @@
           <a:lstStyle/>
           <a:p>
             <a:pPr indent="0" marL="0">
+              <a:spcAft>
+                <a:spcPts val="600"/>
+              </a:spcAft>
               <a:buNone/>
             </a:pPr>
             <a:r>
-              <a:rPr lang="en-US" sz="6000" b="1" dirty="0">
-                <a:solidFill>
-                  <a:schemeClr val="accent3"/>
+              <a:rPr lang="en-US" sz="1100" b="1" spc="100" kern="0" dirty="0">
+                <a:solidFill>
+                  <a:schemeClr val="tx2"/>
                 </a:solidFill>
               </a:rPr>
-              <a:t>“</a:t>
-            </a:r>
-            <a:endParaRPr lang="en-US" sz="6000" dirty="0"/>
+              <a:t>ADDING A FEATURE IN SLATE</a:t>
+            </a:r>
+            <a:endParaRPr lang="en-US" sz="1100" dirty="0"/>
+          </a:p>
+          <a:p>
+            <a:pPr indent="0" marL="0">
+              <a:spcAft>
+                <a:spcPts val="600"/>
+              </a:spcAft>
+              <a:buNone/>
+            </a:pPr>
+            <a:r>
+              <a:rPr lang="en-US" sz="600" dirty="0">
+                <a:solidFill>
+                  <a:srgbClr val="000000"/>
+                </a:solidFill>
+              </a:rPr>
+              <a:t> </a:t>
+            </a:r>
+            <a:endParaRPr lang="en-US" sz="1100" dirty="0"/>
+          </a:p>
+          <a:p>
+            <a:pPr marL="342900" indent="-342900">
+              <a:spcAft>
+                <a:spcPts val="600"/>
+              </a:spcAft>
+              <a:buSzPct val="100000"/>
+              <a:buChar char="•"/>
+            </a:pPr>
+            <a:r>
+              <a:rPr lang="en-US" sz="1400" dirty="0">
+                <a:solidFill>
+                  <a:schemeClr val="tx1"/>
+                </a:solidFill>
+              </a:rPr>
+              <a:t>Wire widgets, events, variables and functions across 8 exports</a:t>
+            </a:r>
+            <a:endParaRPr lang="en-US" sz="1100" dirty="0"/>
+          </a:p>
+          <a:p>
+            <a:pPr marL="342900" indent="-342900">
+              <a:spcAft>
+                <a:spcPts val="600"/>
+              </a:spcAft>
+              <a:buSzPct val="100000"/>
+              <a:buChar char="•"/>
+            </a:pPr>
+            <a:r>
+              <a:rPr lang="en-US" sz="1400" dirty="0">
+                <a:solidFill>
+                  <a:schemeClr val="tx1"/>
+                </a:solidFill>
+              </a:rPr>
+              <a:t>Any change can break unrelated dashboards</a:t>
+            </a:r>
+            <a:endParaRPr lang="en-US" sz="1100" dirty="0"/>
+          </a:p>
+          <a:p>
+            <a:pPr marL="342900" indent="-342900">
+              <a:spcAft>
+                <a:spcPts val="600"/>
+              </a:spcAft>
+              <a:buSzPct val="100000"/>
+              <a:buChar char="•"/>
+            </a:pPr>
+            <a:r>
+              <a:rPr lang="en-US" sz="1400" dirty="0">
+                <a:solidFill>
+                  <a:schemeClr val="tx1"/>
+                </a:solidFill>
+              </a:rPr>
+              <a:t>No documentation to know what depends on what</a:t>
+            </a:r>
+            <a:endParaRPr lang="en-US" sz="1100" dirty="0"/>
           </a:p>
         </p:txBody>
       </p:sp>
       <p:sp>
         <p:nvSpPr>
-          <p:cNvPr id="10" name="quote-1-text"/>
+          <p:cNvPr id="17" name="ease-new"/>
+          <p:cNvSpPr/>
+          <p:nvPr/>
+        </p:nvSpPr>
+        <p:spPr>
+          <a:xfrm>
+            <a:off x="6233008" y="3154680"/>
+            <a:ext cx="5410048" cy="2423160"/>
+          </a:xfrm>
+          <a:prstGeom prst="roundRect">
+            <a:avLst>
+              <a:gd name="adj" fmla="val 4528"/>
+            </a:avLst>
+          </a:prstGeom>
+          <a:solidFill>
+            <a:schemeClr val="tx1"/>
+          </a:solidFill>
+          <a:ln/>
+        </p:spPr>
+      </p:sp>
+      <p:sp>
+        <p:nvSpPr>
+          <p:cNvPr id="18" name="ease-new-text"/>
           <p:cNvSpPr txBox="1"/>
           <p:nvPr/>
         </p:nvSpPr>
         <p:spPr>
           <a:xfrm>
-            <a:off x="4612538" y="2514600"/>
-            <a:ext cx="2966618" cy="2606040"/>
+            <a:off x="6507328" y="3291840"/>
+            <a:ext cx="4861408" cy="2148840"/>
           </a:xfrm>
           <a:prstGeom prst="rect">
             <a:avLst/>
@@ -13328,102 +17626,104 @@
           <a:lstStyle/>
           <a:p>
             <a:pPr indent="0" marL="0">
+              <a:spcAft>
+                <a:spcPts val="600"/>
+              </a:spcAft>
               <a:buNone/>
             </a:pPr>
             <a:r>
-              <a:rPr lang="en-US" sz="1800" i="1" dirty="0">
-                <a:solidFill>
-                  <a:schemeClr val="tx1"/>
+              <a:rPr lang="en-US" sz="1100" b="1" spc="100" kern="0" dirty="0">
+                <a:solidFill>
+                  <a:schemeClr val="accent5"/>
                 </a:solidFill>
               </a:rPr>
-              <a:t>The Skywise ERM dashboard application is a tremendous addition to our ERM toolset… More and more users regularly prepare and facilitate risks &amp; opportunities reviews with the application.</a:t>
-            </a:r>
-            <a:endParaRPr lang="en-US" sz="1800" dirty="0"/>
+              <a:t>ADDING A FEATURE IN REACT + OSDK</a:t>
+            </a:r>
+            <a:endParaRPr lang="en-US" sz="1100" dirty="0"/>
+          </a:p>
+          <a:p>
+            <a:pPr indent="0" marL="0">
+              <a:spcAft>
+                <a:spcPts val="600"/>
+              </a:spcAft>
+              <a:buNone/>
+            </a:pPr>
+            <a:r>
+              <a:rPr lang="en-US" sz="600" dirty="0">
+                <a:solidFill>
+                  <a:srgbClr val="000000"/>
+                </a:solidFill>
+              </a:rPr>
+              <a:t> </a:t>
+            </a:r>
+            <a:endParaRPr lang="en-US" sz="1100" dirty="0"/>
+          </a:p>
+          <a:p>
+            <a:pPr marL="342900" indent="-342900">
+              <a:spcAft>
+                <a:spcPts val="600"/>
+              </a:spcAft>
+              <a:buSzPct val="100000"/>
+              <a:buChar char="•"/>
+            </a:pPr>
+            <a:r>
+              <a:rPr lang="en-US" sz="1400" dirty="0">
+                <a:solidFill>
+                  <a:schemeClr val="bg1"/>
+                </a:solidFill>
+              </a:rPr>
+              <a:t>One isolated, typed component plus one OSDK call</a:t>
+            </a:r>
+            <a:endParaRPr lang="en-US" sz="1100" dirty="0"/>
+          </a:p>
+          <a:p>
+            <a:pPr marL="342900" indent="-342900">
+              <a:spcAft>
+                <a:spcPts val="600"/>
+              </a:spcAft>
+              <a:buSzPct val="100000"/>
+              <a:buChar char="•"/>
+            </a:pPr>
+            <a:r>
+              <a:rPr lang="en-US" sz="1400" dirty="0">
+                <a:solidFill>
+                  <a:schemeClr val="bg1"/>
+                </a:solidFill>
+              </a:rPr>
+              <a:t>pack-project.ts gives AI the whole app as context</a:t>
+            </a:r>
+            <a:endParaRPr lang="en-US" sz="1100" dirty="0"/>
+          </a:p>
+          <a:p>
+            <a:pPr marL="342900" indent="-342900">
+              <a:spcAft>
+                <a:spcPts val="600"/>
+              </a:spcAft>
+              <a:buSzPct val="100000"/>
+              <a:buChar char="•"/>
+            </a:pPr>
+            <a:r>
+              <a:rPr lang="en-US" sz="1400" dirty="0">
+                <a:solidFill>
+                  <a:schemeClr val="bg1"/>
+                </a:solidFill>
+              </a:rPr>
+              <a:t>Architecture and lifecycle diagrams show the impact</a:t>
+            </a:r>
+            <a:endParaRPr lang="en-US" sz="1100" dirty="0"/>
           </a:p>
         </p:txBody>
       </p:sp>
       <p:sp>
         <p:nvSpPr>
-          <p:cNvPr id="11" name="quote-1-who"/>
+          <p:cNvPr id="19" name="ease-foot"/>
           <p:cNvSpPr txBox="1"/>
           <p:nvPr/>
         </p:nvSpPr>
         <p:spPr>
           <a:xfrm>
-            <a:off x="4612538" y="5166360"/>
-            <a:ext cx="2966618" cy="731520"/>
-          </a:xfrm>
-          <a:prstGeom prst="rect">
-            <a:avLst/>
-          </a:prstGeom>
-          <a:noFill/>
-          <a:ln/>
-        </p:spPr>
-        <p:txBody>
-          <a:bodyPr wrap="square" lIns="0" tIns="0" rIns="0" bIns="0" rtlCol="0" anchor="b"/>
-          <a:lstStyle/>
-          <a:p>
-            <a:pPr indent="0" marL="0">
-              <a:buNone/>
-            </a:pPr>
-            <a:r>
-              <a:rPr lang="en-US" sz="1400" b="1" dirty="0">
-                <a:solidFill>
-                  <a:schemeClr val="tx1"/>
-                </a:solidFill>
-              </a:rPr>
-              <a:t>ERM stakeholder</a:t>
-            </a:r>
-            <a:endParaRPr lang="en-US" sz="1400" dirty="0"/>
-          </a:p>
-          <a:p>
-            <a:pPr indent="0" marL="0">
-              <a:buNone/>
-            </a:pPr>
-            <a:r>
-              <a:rPr lang="en-US" sz="1200" dirty="0">
-                <a:solidFill>
-                  <a:schemeClr val="tx2"/>
-                </a:solidFill>
-              </a:rPr>
-              <a:t>[Role]</a:t>
-            </a:r>
-            <a:endParaRPr lang="en-US" sz="1400" dirty="0"/>
-          </a:p>
-        </p:txBody>
-      </p:sp>
-      <p:sp>
-        <p:nvSpPr>
-          <p:cNvPr id="12" name="quote-2-card"/>
-          <p:cNvSpPr/>
-          <p:nvPr/>
-        </p:nvSpPr>
-        <p:spPr>
-          <a:xfrm>
-            <a:off x="8127797" y="1645920"/>
-            <a:ext cx="3515258" cy="4480560"/>
-          </a:xfrm>
-          <a:prstGeom prst="roundRect">
-            <a:avLst>
-              <a:gd name="adj" fmla="val 3121"/>
-            </a:avLst>
-          </a:prstGeom>
-          <a:solidFill>
-            <a:schemeClr val="bg1"/>
-          </a:solidFill>
-          <a:ln/>
-        </p:spPr>
-      </p:sp>
-      <p:sp>
-        <p:nvSpPr>
-          <p:cNvPr id="13" name="quote-2-mark"/>
-          <p:cNvSpPr txBox="1"/>
-          <p:nvPr/>
-        </p:nvSpPr>
-        <p:spPr>
-          <a:xfrm>
-            <a:off x="8402117" y="1783080"/>
-            <a:ext cx="914400" cy="731520"/>
+            <a:off x="548640" y="5760720"/>
+            <a:ext cx="11094415" cy="548640"/>
           </a:xfrm>
           <a:prstGeom prst="rect">
             <a:avLst/>
@@ -13439,100 +17739,14 @@
               <a:buNone/>
             </a:pPr>
             <a:r>
-              <a:rPr lang="en-US" sz="6000" b="1" dirty="0">
-                <a:solidFill>
-                  <a:schemeClr val="accent3"/>
+              <a:rPr lang="en-US" sz="1100" i="1" dirty="0">
+                <a:solidFill>
+                  <a:schemeClr val="tx2"/>
                 </a:solidFill>
               </a:rPr>
-              <a:t>“</a:t>
-            </a:r>
-            <a:endParaRPr lang="en-US" sz="6000" dirty="0"/>
-          </a:p>
-        </p:txBody>
-      </p:sp>
-      <p:sp>
-        <p:nvSpPr>
-          <p:cNvPr id="14" name="quote-2-text"/>
-          <p:cNvSpPr txBox="1"/>
-          <p:nvPr/>
-        </p:nvSpPr>
-        <p:spPr>
-          <a:xfrm>
-            <a:off x="8402117" y="2514600"/>
-            <a:ext cx="2966618" cy="2606040"/>
-          </a:xfrm>
-          <a:prstGeom prst="rect">
-            <a:avLst/>
-          </a:prstGeom>
-          <a:noFill/>
-          <a:ln/>
-        </p:spPr>
-        <p:txBody>
-          <a:bodyPr wrap="square" lIns="0" tIns="0" rIns="0" bIns="0" rtlCol="0" anchor="t"/>
-          <a:lstStyle/>
-          <a:p>
-            <a:pPr indent="0" marL="0">
-              <a:buNone/>
-            </a:pPr>
-            <a:r>
-              <a:rPr lang="en-US" sz="1800" i="1" dirty="0">
-                <a:solidFill>
-                  <a:schemeClr val="tx1"/>
-                </a:solidFill>
-              </a:rPr>
-              <a:t>They built great new features that make navigation easier and give us a much clearer view of our R&amp;O data. Whenever bugs or issues came up, they fixed them quickly and efficiently.</a:t>
-            </a:r>
-            <a:endParaRPr lang="en-US" sz="1800" dirty="0"/>
-          </a:p>
-        </p:txBody>
-      </p:sp>
-      <p:sp>
-        <p:nvSpPr>
-          <p:cNvPr id="15" name="quote-2-who"/>
-          <p:cNvSpPr txBox="1"/>
-          <p:nvPr/>
-        </p:nvSpPr>
-        <p:spPr>
-          <a:xfrm>
-            <a:off x="8402117" y="5166360"/>
-            <a:ext cx="2966618" cy="731520"/>
-          </a:xfrm>
-          <a:prstGeom prst="rect">
-            <a:avLst/>
-          </a:prstGeom>
-          <a:noFill/>
-          <a:ln/>
-        </p:spPr>
-        <p:txBody>
-          <a:bodyPr wrap="square" lIns="0" tIns="0" rIns="0" bIns="0" rtlCol="0" anchor="b"/>
-          <a:lstStyle/>
-          <a:p>
-            <a:pPr indent="0" marL="0">
-              <a:buNone/>
-            </a:pPr>
-            <a:r>
-              <a:rPr lang="en-US" sz="1400" b="1" dirty="0">
-                <a:solidFill>
-                  <a:schemeClr val="tx1"/>
-                </a:solidFill>
-              </a:rPr>
-              <a:t>Risk and Opportunity Manager</a:t>
-            </a:r>
-            <a:endParaRPr lang="en-US" sz="1400" dirty="0"/>
-          </a:p>
-          <a:p>
-            <a:pPr indent="0" marL="0">
-              <a:buNone/>
-            </a:pPr>
-            <a:r>
-              <a:rPr lang="en-US" sz="1200" dirty="0">
-                <a:solidFill>
-                  <a:schemeClr val="tx2"/>
-                </a:solidFill>
-              </a:rPr>
-              <a:t>Airbus Operations GmbH, Hamburg</a:t>
-            </a:r>
-            <a:endParaRPr lang="en-US" sz="1400" dirty="0"/>
+              <a:t>Estimates at $38.50 per developer hour, 8 hours a day. Maintenance: rule of thumb of ~20% of build effort a year (340 person-days → 68 a year, ≈ $21K), assumed halved by modular, typed, documented code (≈ $10K a year saved).</a:t>
+            </a:r>
+            <a:endParaRPr lang="en-US" sz="1100" dirty="0"/>
           </a:p>
         </p:txBody>
       </p:sp>
@@ -13553,7 +17767,7 @@
               <p:cTn id="2" dur="indefinite" nodeType="mainSeq">
                 <p:childTnLst>
                   <p:par>
-                    <p:cTn id="46" fill="hold">
+                    <p:cTn id="61" fill="hold">
                       <p:stCondLst>
                         <p:cond delay="indefinite"/>
                         <p:cond evt="onBegin" delay="0">
@@ -13562,7 +17776,7 @@
                       </p:stCondLst>
                       <p:childTnLst>
                         <p:par>
-                          <p:cTn id="6" fill="hold">
+                          <p:cTn id="12" fill="hold">
                             <p:stCondLst>
                               <p:cond delay="0"/>
                             </p:stCondLst>
@@ -13602,30 +17816,100 @@
                                   </p:childTnLst>
                                 </p:cTn>
                               </p:par>
+                              <p:par>
+                                <p:cTn id="6" presetID="10" presetClass="entr" presetSubtype="0" fill="hold" grpId="0" nodeType="withEffect">
+                                  <p:stCondLst>
+                                    <p:cond delay="0"/>
+                                  </p:stCondLst>
+                                  <p:childTnLst>
+                                    <p:set>
+                                      <p:cBhvr>
+                                        <p:cTn id="7" dur="1" fill="hold">
+                                          <p:stCondLst>
+                                            <p:cond delay="0"/>
+                                          </p:stCondLst>
+                                        </p:cTn>
+                                        <p:tgtEl>
+                                          <p:spTgt spid="4"/>
+                                        </p:tgtEl>
+                                        <p:attrNameLst>
+                                          <p:attrName>style.visibility</p:attrName>
+                                        </p:attrNameLst>
+                                      </p:cBhvr>
+                                      <p:to>
+                                        <p:strVal val="visible"/>
+                                      </p:to>
+                                    </p:set>
+                                    <p:animEffect transition="in" filter="fade">
+                                      <p:cBhvr>
+                                        <p:cTn id="8" dur="450"/>
+                                        <p:tgtEl>
+                                          <p:spTgt spid="4"/>
+                                        </p:tgtEl>
+                                      </p:cBhvr>
+                                    </p:animEffect>
+                                  </p:childTnLst>
+                                </p:cTn>
+                              </p:par>
+                              <p:par>
+                                <p:cTn id="9" presetID="10" presetClass="entr" presetSubtype="0" fill="hold" grpId="0" nodeType="withEffect">
+                                  <p:stCondLst>
+                                    <p:cond delay="0"/>
+                                  </p:stCondLst>
+                                  <p:childTnLst>
+                                    <p:set>
+                                      <p:cBhvr>
+                                        <p:cTn id="10" dur="1" fill="hold">
+                                          <p:stCondLst>
+                                            <p:cond delay="0"/>
+                                          </p:stCondLst>
+                                        </p:cTn>
+                                        <p:tgtEl>
+                                          <p:spTgt spid="5"/>
+                                        </p:tgtEl>
+                                        <p:attrNameLst>
+                                          <p:attrName>style.visibility</p:attrName>
+                                        </p:attrNameLst>
+                                      </p:cBhvr>
+                                      <p:to>
+                                        <p:strVal val="visible"/>
+                                      </p:to>
+                                    </p:set>
+                                    <p:animEffect transition="in" filter="fade">
+                                      <p:cBhvr>
+                                        <p:cTn id="11" dur="450"/>
+                                        <p:tgtEl>
+                                          <p:spTgt spid="5"/>
+                                        </p:tgtEl>
+                                      </p:cBhvr>
+                                    </p:animEffect>
+                                  </p:childTnLst>
+                                </p:cTn>
+                              </p:par>
                             </p:childTnLst>
                           </p:cTn>
                         </p:par>
                         <p:par>
-                          <p:cTn id="19" fill="hold">
+                          <p:cTn id="22" fill="hold">
                             <p:stCondLst>
-                              <p:cond delay="600"/>
+                              <p:cond delay="400"/>
                             </p:stCondLst>
                             <p:childTnLst>
                               <p:par>
-                                <p:cTn id="7" presetID="10" presetClass="entr" presetSubtype="0" fill="hold" grpId="0" nodeType="afterEffect">
+                                <p:cTn id="13" presetID="10" presetClass="entr" presetSubtype="0" fill="hold" grpId="0" nodeType="afterEffect">
                                   <p:stCondLst>
                                     <p:cond delay="0"/>
                                   </p:stCondLst>
                                   <p:childTnLst>
                                     <p:set>
                                       <p:cBhvr>
-                                        <p:cTn id="8" dur="1" fill="hold">
-                                          <p:stCondLst>
-                                            <p:cond delay="0"/>
-                                          </p:stCondLst>
-                                        </p:cTn>
-                                        <p:tgtEl>
-                                          <p:spTgt spid="4"/>
+                                        <p:cTn id="14" dur="1" fill="hold">
+                                          <p:stCondLst>
+                                            <p:cond delay="0"/>
+                                          </p:stCondLst>
+                                        </p:cTn>
+                                        <p:tgtEl>
+                                          <p:spTgt spid="6"/>
                                         </p:tgtEl>
                                         <p:attrNameLst>
                                           <p:attrName>style.visibility</p:attrName>
@@ -13637,30 +17921,30 @@
                                     </p:set>
                                     <p:animEffect transition="in" filter="fade">
                                       <p:cBhvr>
-                                        <p:cTn id="9" dur="450"/>
-                                        <p:tgtEl>
-                                          <p:spTgt spid="4"/>
-                                        </p:tgtEl>
-                                      </p:cBhvr>
-                                    </p:animEffect>
-                                  </p:childTnLst>
-                                </p:cTn>
-                              </p:par>
-                              <p:par>
-                                <p:cTn id="10" presetID="10" presetClass="entr" presetSubtype="0" fill="hold" grpId="0" nodeType="withEffect">
+                                        <p:cTn id="15" dur="450"/>
+                                        <p:tgtEl>
+                                          <p:spTgt spid="6"/>
+                                        </p:tgtEl>
+                                      </p:cBhvr>
+                                    </p:animEffect>
+                                  </p:childTnLst>
+                                </p:cTn>
+                              </p:par>
+                              <p:par>
+                                <p:cTn id="16" presetID="10" presetClass="entr" presetSubtype="0" fill="hold" grpId="0" nodeType="withEffect">
                                   <p:stCondLst>
                                     <p:cond delay="0"/>
                                   </p:stCondLst>
                                   <p:childTnLst>
                                     <p:set>
                                       <p:cBhvr>
-                                        <p:cTn id="11" dur="1" fill="hold">
-                                          <p:stCondLst>
-                                            <p:cond delay="0"/>
-                                          </p:stCondLst>
-                                        </p:cTn>
-                                        <p:tgtEl>
-                                          <p:spTgt spid="5"/>
+                                        <p:cTn id="17" dur="1" fill="hold">
+                                          <p:stCondLst>
+                                            <p:cond delay="0"/>
+                                          </p:stCondLst>
+                                        </p:cTn>
+                                        <p:tgtEl>
+                                          <p:spTgt spid="7"/>
                                         </p:tgtEl>
                                         <p:attrNameLst>
                                           <p:attrName>style.visibility</p:attrName>
@@ -13672,30 +17956,30 @@
                                     </p:set>
                                     <p:animEffect transition="in" filter="fade">
                                       <p:cBhvr>
-                                        <p:cTn id="12" dur="450"/>
-                                        <p:tgtEl>
-                                          <p:spTgt spid="5"/>
-                                        </p:tgtEl>
-                                      </p:cBhvr>
-                                    </p:animEffect>
-                                  </p:childTnLst>
-                                </p:cTn>
-                              </p:par>
-                              <p:par>
-                                <p:cTn id="13" presetID="10" presetClass="entr" presetSubtype="0" fill="hold" grpId="0" nodeType="withEffect">
+                                        <p:cTn id="18" dur="450"/>
+                                        <p:tgtEl>
+                                          <p:spTgt spid="7"/>
+                                        </p:tgtEl>
+                                      </p:cBhvr>
+                                    </p:animEffect>
+                                  </p:childTnLst>
+                                </p:cTn>
+                              </p:par>
+                              <p:par>
+                                <p:cTn id="19" presetID="10" presetClass="entr" presetSubtype="0" fill="hold" grpId="0" nodeType="withEffect">
                                   <p:stCondLst>
                                     <p:cond delay="0"/>
                                   </p:stCondLst>
                                   <p:childTnLst>
                                     <p:set>
                                       <p:cBhvr>
-                                        <p:cTn id="14" dur="1" fill="hold">
-                                          <p:stCondLst>
-                                            <p:cond delay="0"/>
-                                          </p:stCondLst>
-                                        </p:cTn>
-                                        <p:tgtEl>
-                                          <p:spTgt spid="6"/>
+                                        <p:cTn id="20" dur="1" fill="hold">
+                                          <p:stCondLst>
+                                            <p:cond delay="0"/>
+                                          </p:stCondLst>
+                                        </p:cTn>
+                                        <p:tgtEl>
+                                          <p:spTgt spid="8"/>
                                         </p:tgtEl>
                                         <p:attrNameLst>
                                           <p:attrName>style.visibility</p:attrName>
@@ -13707,44 +17991,9 @@
                                     </p:set>
                                     <p:animEffect transition="in" filter="fade">
                                       <p:cBhvr>
-                                        <p:cTn id="15" dur="450"/>
-                                        <p:tgtEl>
-                                          <p:spTgt spid="6"/>
-                                        </p:tgtEl>
-                                      </p:cBhvr>
-                                    </p:animEffect>
-                                  </p:childTnLst>
-                                </p:cTn>
-                              </p:par>
-                              <p:par>
-                                <p:cTn id="16" presetID="10" presetClass="entr" presetSubtype="0" fill="hold" grpId="0" nodeType="withEffect">
-                                  <p:stCondLst>
-                                    <p:cond delay="0"/>
-                                  </p:stCondLst>
-                                  <p:childTnLst>
-                                    <p:set>
-                                      <p:cBhvr>
-                                        <p:cTn id="17" dur="1" fill="hold">
-                                          <p:stCondLst>
-                                            <p:cond delay="0"/>
-                                          </p:stCondLst>
-                                        </p:cTn>
-                                        <p:tgtEl>
-                                          <p:spTgt spid="7"/>
-                                        </p:tgtEl>
-                                        <p:attrNameLst>
-                                          <p:attrName>style.visibility</p:attrName>
-                                        </p:attrNameLst>
-                                      </p:cBhvr>
-                                      <p:to>
-                                        <p:strVal val="visible"/>
-                                      </p:to>
-                                    </p:set>
-                                    <p:animEffect transition="in" filter="fade">
-                                      <p:cBhvr>
-                                        <p:cTn id="18" dur="450"/>
-                                        <p:tgtEl>
-                                          <p:spTgt spid="7"/>
+                                        <p:cTn id="21" dur="450"/>
+                                        <p:tgtEl>
+                                          <p:spTgt spid="8"/>
                                         </p:tgtEl>
                                       </p:cBhvr>
                                     </p:animEffect>
@@ -13757,46 +18006,11 @@
                         <p:par>
                           <p:cTn id="32" fill="hold">
                             <p:stCondLst>
-                              <p:cond delay="1200"/>
+                              <p:cond delay="800"/>
                             </p:stCondLst>
                             <p:childTnLst>
                               <p:par>
-                                <p:cTn id="20" presetID="10" presetClass="entr" presetSubtype="0" fill="hold" grpId="0" nodeType="afterEffect">
-                                  <p:stCondLst>
-                                    <p:cond delay="0"/>
-                                  </p:stCondLst>
-                                  <p:childTnLst>
-                                    <p:set>
-                                      <p:cBhvr>
-                                        <p:cTn id="21" dur="1" fill="hold">
-                                          <p:stCondLst>
-                                            <p:cond delay="0"/>
-                                          </p:stCondLst>
-                                        </p:cTn>
-                                        <p:tgtEl>
-                                          <p:spTgt spid="8"/>
-                                        </p:tgtEl>
-                                        <p:attrNameLst>
-                                          <p:attrName>style.visibility</p:attrName>
-                                        </p:attrNameLst>
-                                      </p:cBhvr>
-                                      <p:to>
-                                        <p:strVal val="visible"/>
-                                      </p:to>
-                                    </p:set>
-                                    <p:animEffect transition="in" filter="fade">
-                                      <p:cBhvr>
-                                        <p:cTn id="22" dur="450"/>
-                                        <p:tgtEl>
-                                          <p:spTgt spid="8"/>
-                                        </p:tgtEl>
-                                      </p:cBhvr>
-                                    </p:animEffect>
-                                  </p:childTnLst>
-                                </p:cTn>
-                              </p:par>
-                              <p:par>
-                                <p:cTn id="23" presetID="10" presetClass="entr" presetSubtype="0" fill="hold" grpId="0" nodeType="withEffect">
+                                <p:cTn id="23" presetID="10" presetClass="entr" presetSubtype="0" fill="hold" grpId="0" nodeType="afterEffect">
                                   <p:stCondLst>
                                     <p:cond delay="0"/>
                                   </p:stCondLst>
@@ -13904,9 +18118,9 @@
                           </p:cTn>
                         </p:par>
                         <p:par>
-                          <p:cTn id="45" fill="hold">
+                          <p:cTn id="42" fill="hold">
                             <p:stCondLst>
-                              <p:cond delay="1800"/>
+                              <p:cond delay="1200"/>
                             </p:stCondLst>
                             <p:childTnLst>
                               <p:par>
@@ -14014,15 +18228,24 @@
                                   </p:childTnLst>
                                 </p:cTn>
                               </p:par>
-                              <p:par>
-                                <p:cTn id="42" presetID="10" presetClass="entr" presetSubtype="0" fill="hold" grpId="0" nodeType="withEffect">
+                            </p:childTnLst>
+                          </p:cTn>
+                        </p:par>
+                        <p:par>
+                          <p:cTn id="49" fill="hold">
+                            <p:stCondLst>
+                              <p:cond delay="1600"/>
+                            </p:stCondLst>
+                            <p:childTnLst>
+                              <p:par>
+                                <p:cTn id="43" presetID="10" presetClass="entr" presetSubtype="0" fill="hold" grpId="0" nodeType="afterEffect">
                                   <p:stCondLst>
                                     <p:cond delay="0"/>
                                   </p:stCondLst>
                                   <p:childTnLst>
                                     <p:set>
                                       <p:cBhvr>
-                                        <p:cTn id="43" dur="1" fill="hold">
+                                        <p:cTn id="44" dur="1" fill="hold">
                                           <p:stCondLst>
                                             <p:cond delay="0"/>
                                           </p:stCondLst>
@@ -14040,9 +18263,167 @@
                                     </p:set>
                                     <p:animEffect transition="in" filter="fade">
                                       <p:cBhvr>
-                                        <p:cTn id="44" dur="450"/>
+                                        <p:cTn id="45" dur="450"/>
                                         <p:tgtEl>
                                           <p:spTgt spid="15"/>
+                                        </p:tgtEl>
+                                      </p:cBhvr>
+                                    </p:animEffect>
+                                  </p:childTnLst>
+                                </p:cTn>
+                              </p:par>
+                              <p:par>
+                                <p:cTn id="46" presetID="10" presetClass="entr" presetSubtype="0" fill="hold" grpId="0" nodeType="withEffect">
+                                  <p:stCondLst>
+                                    <p:cond delay="0"/>
+                                  </p:stCondLst>
+                                  <p:childTnLst>
+                                    <p:set>
+                                      <p:cBhvr>
+                                        <p:cTn id="47" dur="1" fill="hold">
+                                          <p:stCondLst>
+                                            <p:cond delay="0"/>
+                                          </p:stCondLst>
+                                        </p:cTn>
+                                        <p:tgtEl>
+                                          <p:spTgt spid="16"/>
+                                        </p:tgtEl>
+                                        <p:attrNameLst>
+                                          <p:attrName>style.visibility</p:attrName>
+                                        </p:attrNameLst>
+                                      </p:cBhvr>
+                                      <p:to>
+                                        <p:strVal val="visible"/>
+                                      </p:to>
+                                    </p:set>
+                                    <p:animEffect transition="in" filter="fade">
+                                      <p:cBhvr>
+                                        <p:cTn id="48" dur="450"/>
+                                        <p:tgtEl>
+                                          <p:spTgt spid="16"/>
+                                        </p:tgtEl>
+                                      </p:cBhvr>
+                                    </p:animEffect>
+                                  </p:childTnLst>
+                                </p:cTn>
+                              </p:par>
+                            </p:childTnLst>
+                          </p:cTn>
+                        </p:par>
+                        <p:par>
+                          <p:cTn id="56" fill="hold">
+                            <p:stCondLst>
+                              <p:cond delay="2000"/>
+                            </p:stCondLst>
+                            <p:childTnLst>
+                              <p:par>
+                                <p:cTn id="50" presetID="22" presetClass="entr" presetSubtype="8" fill="hold" grpId="0" nodeType="afterEffect">
+                                  <p:stCondLst>
+                                    <p:cond delay="0"/>
+                                  </p:stCondLst>
+                                  <p:childTnLst>
+                                    <p:set>
+                                      <p:cBhvr>
+                                        <p:cTn id="51" dur="1" fill="hold">
+                                          <p:stCondLst>
+                                            <p:cond delay="0"/>
+                                          </p:stCondLst>
+                                        </p:cTn>
+                                        <p:tgtEl>
+                                          <p:spTgt spid="17"/>
+                                        </p:tgtEl>
+                                        <p:attrNameLst>
+                                          <p:attrName>style.visibility</p:attrName>
+                                        </p:attrNameLst>
+                                      </p:cBhvr>
+                                      <p:to>
+                                        <p:strVal val="visible"/>
+                                      </p:to>
+                                    </p:set>
+                                    <p:animEffect transition="in" filter="wipe(left)">
+                                      <p:cBhvr>
+                                        <p:cTn id="52" dur="450"/>
+                                        <p:tgtEl>
+                                          <p:spTgt spid="17"/>
+                                        </p:tgtEl>
+                                      </p:cBhvr>
+                                    </p:animEffect>
+                                  </p:childTnLst>
+                                </p:cTn>
+                              </p:par>
+                              <p:par>
+                                <p:cTn id="53" presetID="22" presetClass="entr" presetSubtype="8" fill="hold" grpId="0" nodeType="withEffect">
+                                  <p:stCondLst>
+                                    <p:cond delay="0"/>
+                                  </p:stCondLst>
+                                  <p:childTnLst>
+                                    <p:set>
+                                      <p:cBhvr>
+                                        <p:cTn id="54" dur="1" fill="hold">
+                                          <p:stCondLst>
+                                            <p:cond delay="0"/>
+                                          </p:stCondLst>
+                                        </p:cTn>
+                                        <p:tgtEl>
+                                          <p:spTgt spid="18"/>
+                                        </p:tgtEl>
+                                        <p:attrNameLst>
+                                          <p:attrName>style.visibility</p:attrName>
+                                        </p:attrNameLst>
+                                      </p:cBhvr>
+                                      <p:to>
+                                        <p:strVal val="visible"/>
+                                      </p:to>
+                                    </p:set>
+                                    <p:animEffect transition="in" filter="wipe(left)">
+                                      <p:cBhvr>
+                                        <p:cTn id="55" dur="450"/>
+                                        <p:tgtEl>
+                                          <p:spTgt spid="18"/>
+                                        </p:tgtEl>
+                                      </p:cBhvr>
+                                    </p:animEffect>
+                                  </p:childTnLst>
+                                </p:cTn>
+                              </p:par>
+                            </p:childTnLst>
+                          </p:cTn>
+                        </p:par>
+                        <p:par>
+                          <p:cTn id="60" fill="hold">
+                            <p:stCondLst>
+                              <p:cond delay="2400"/>
+                            </p:stCondLst>
+                            <p:childTnLst>
+                              <p:par>
+                                <p:cTn id="57" presetID="10" presetClass="entr" presetSubtype="0" fill="hold" grpId="0" nodeType="afterEffect">
+                                  <p:stCondLst>
+                                    <p:cond delay="0"/>
+                                  </p:stCondLst>
+                                  <p:childTnLst>
+                                    <p:set>
+                                      <p:cBhvr>
+                                        <p:cTn id="58" dur="1" fill="hold">
+                                          <p:stCondLst>
+                                            <p:cond delay="0"/>
+                                          </p:stCondLst>
+                                        </p:cTn>
+                                        <p:tgtEl>
+                                          <p:spTgt spid="19"/>
+                                        </p:tgtEl>
+                                        <p:attrNameLst>
+                                          <p:attrName>style.visibility</p:attrName>
+                                        </p:attrNameLst>
+                                      </p:cBhvr>
+                                      <p:to>
+                                        <p:strVal val="visible"/>
+                                      </p:to>
+                                    </p:set>
+                                    <p:animEffect transition="in" filter="fade">
+                                      <p:cBhvr>
+                                        <p:cTn id="59" dur="450"/>
+                                        <p:tgtEl>
+                                          <p:spTgt spid="19"/>
                                         </p:tgtEl>
                                       </p:cBhvr>
                                     </p:animEffect>
@@ -14090,2031 +18471,10 @@
       <p:bldP spid="13" grpId="0" animBg="1"/>
       <p:bldP spid="14" grpId="0" animBg="1"/>
       <p:bldP spid="15" grpId="0" animBg="1"/>
-    </p:bldLst>
-  </p:timing>
-</p:sld>
-</file>
-
-<file path=ppt/slides/slide9.xml><?xml version="1.0" encoding="utf-8"?>
-<p:sld xmlns:a="http://schemas.openxmlformats.org/drawingml/2006/main" xmlns:r="http://schemas.openxmlformats.org/officeDocument/2006/relationships" xmlns:p="http://schemas.openxmlformats.org/presentationml/2006/main">
-  <p:cSld name="Slide 9">
-    <p:spTree>
-      <p:nvGrpSpPr>
-        <p:cNvPr id="1" name=""/>
-        <p:cNvGrpSpPr/>
-        <p:nvPr/>
-      </p:nvGrpSpPr>
-      <p:grpSpPr>
-        <a:xfrm>
-          <a:off x="0" y="0"/>
-          <a:ext cx="0" cy="0"/>
-          <a:chOff x="0" y="0"/>
-          <a:chExt cx="0" cy="0"/>
-        </a:xfrm>
-      </p:grpSpPr>
-      <p:sp>
-        <p:nvSpPr>
-          <p:cNvPr id="2" name="Text 1"/>
-          <p:cNvSpPr/>
-          <p:nvPr>
-            <p:ph idx="101" type="title" hasCustomPrompt="1"/>
-          </p:nvPr>
-        </p:nvSpPr>
-        <p:spPr>
-          <a:xfrm>
-            <a:off x="548640" y="502920"/>
-            <a:ext cx="11094415" cy="822960"/>
-          </a:xfrm>
-          <a:prstGeom prst="rect">
-            <a:avLst/>
-          </a:prstGeom>
-          <a:noFill/>
-          <a:ln/>
-        </p:spPr>
-        <p:txBody>
-          <a:bodyPr wrap="square" lIns="0" tIns="0" rIns="0" bIns="0" rtlCol="0" anchor="t"/>
-          <a:lstStyle/>
-          <a:p>
-            <a:pPr algn="l" indent="0" marL="0">
-              <a:buNone/>
-            </a:pPr>
-            <a:r>
-              <a:rPr lang="en-US" sz="3600" b="1" dirty="0">
-                <a:solidFill>
-                  <a:schemeClr val="tx1"/>
-                </a:solidFill>
-              </a:rPr>
-              <a:t>Our contribution to the 2026 objectives</a:t>
-            </a:r>
-            <a:endParaRPr lang="en-US" sz="3600" dirty="0"/>
-          </a:p>
-        </p:txBody>
-      </p:sp>
-      <p:sp>
-        <p:nvSpPr>
-          <p:cNvPr id="3" name="flowhead-src"/>
-          <p:cNvSpPr txBox="1"/>
-          <p:nvPr/>
-        </p:nvSpPr>
-        <p:spPr>
-          <a:xfrm>
-            <a:off x="548640" y="1280160"/>
-            <a:ext cx="2377440" cy="274320"/>
-          </a:xfrm>
-          <a:prstGeom prst="rect">
-            <a:avLst/>
-          </a:prstGeom>
-          <a:noFill/>
-          <a:ln/>
-        </p:spPr>
-        <p:txBody>
-          <a:bodyPr wrap="square" lIns="0" tIns="0" rIns="0" bIns="0" rtlCol="0" anchor="t"/>
-          <a:lstStyle/>
-          <a:p>
-            <a:pPr indent="0" marL="0">
-              <a:buNone/>
-            </a:pPr>
-            <a:r>
-              <a:rPr lang="en-US" sz="1100" b="1" spc="100" kern="0" dirty="0">
-                <a:solidFill>
-                  <a:schemeClr val="tx2"/>
-                </a:solidFill>
-              </a:rPr>
-              <a:t>OUR PROJECT</a:t>
-            </a:r>
-            <a:endParaRPr lang="en-US" sz="1100" dirty="0"/>
-          </a:p>
-        </p:txBody>
-      </p:sp>
-      <p:sp>
-        <p:nvSpPr>
-          <p:cNvPr id="4" name="flowhead-ev"/>
-          <p:cNvSpPr txBox="1"/>
-          <p:nvPr/>
-        </p:nvSpPr>
-        <p:spPr>
-          <a:xfrm>
-            <a:off x="3429000" y="1280160"/>
-            <a:ext cx="4069080" cy="274320"/>
-          </a:xfrm>
-          <a:prstGeom prst="rect">
-            <a:avLst/>
-          </a:prstGeom>
-          <a:noFill/>
-          <a:ln/>
-        </p:spPr>
-        <p:txBody>
-          <a:bodyPr wrap="square" lIns="0" tIns="0" rIns="0" bIns="0" rtlCol="0" anchor="t"/>
-          <a:lstStyle/>
-          <a:p>
-            <a:pPr indent="0" marL="0">
-              <a:buNone/>
-            </a:pPr>
-            <a:r>
-              <a:rPr lang="en-US" sz="1100" b="1" spc="100" kern="0" dirty="0">
-                <a:solidFill>
-                  <a:schemeClr val="tx2"/>
-                </a:solidFill>
-              </a:rPr>
-              <a:t>EVIDENCE</a:t>
-            </a:r>
-            <a:endParaRPr lang="en-US" sz="1100" dirty="0"/>
-          </a:p>
-        </p:txBody>
-      </p:sp>
-      <p:sp>
-        <p:nvSpPr>
-          <p:cNvPr id="5" name="flowhead-obj"/>
-          <p:cNvSpPr txBox="1"/>
-          <p:nvPr/>
-        </p:nvSpPr>
-        <p:spPr>
-          <a:xfrm>
-            <a:off x="8001000" y="1280160"/>
-            <a:ext cx="3639312" cy="274320"/>
-          </a:xfrm>
-          <a:prstGeom prst="rect">
-            <a:avLst/>
-          </a:prstGeom>
-          <a:noFill/>
-          <a:ln/>
-        </p:spPr>
-        <p:txBody>
-          <a:bodyPr wrap="square" lIns="0" tIns="0" rIns="0" bIns="0" rtlCol="0" anchor="t"/>
-          <a:lstStyle/>
-          <a:p>
-            <a:pPr indent="0" marL="0">
-              <a:buNone/>
-            </a:pPr>
-            <a:r>
-              <a:rPr lang="en-US" sz="1100" b="1" spc="100" kern="0" dirty="0">
-                <a:solidFill>
-                  <a:schemeClr val="tx2"/>
-                </a:solidFill>
-              </a:rPr>
-              <a:t>2026 OBJECTIVE</a:t>
-            </a:r>
-            <a:endParaRPr lang="en-US" sz="1100" dirty="0"/>
-          </a:p>
-        </p:txBody>
-      </p:sp>
-      <p:sp>
-        <p:nvSpPr>
-          <p:cNvPr id="6" name="flow-src-box"/>
-          <p:cNvSpPr/>
-          <p:nvPr/>
-        </p:nvSpPr>
-        <p:spPr>
-          <a:xfrm>
-            <a:off x="548640" y="1645920"/>
-            <a:ext cx="2377440" cy="4498848"/>
-          </a:xfrm>
-          <a:prstGeom prst="roundRect">
-            <a:avLst>
-              <a:gd name="adj" fmla="val 4615"/>
-            </a:avLst>
-          </a:prstGeom>
-          <a:solidFill>
-            <a:schemeClr val="accent4"/>
-          </a:solidFill>
-          <a:ln/>
-        </p:spPr>
-      </p:sp>
-      <p:sp>
-        <p:nvSpPr>
-          <p:cNvPr id="7" name="flow-src-text"/>
-          <p:cNvSpPr txBox="1"/>
-          <p:nvPr/>
-        </p:nvSpPr>
-        <p:spPr>
-          <a:xfrm>
-            <a:off x="777240" y="1920240"/>
-            <a:ext cx="1920240" cy="3950208"/>
-          </a:xfrm>
-          <a:prstGeom prst="rect">
-            <a:avLst/>
-          </a:prstGeom>
-          <a:noFill/>
-          <a:ln/>
-        </p:spPr>
-        <p:txBody>
-          <a:bodyPr wrap="square" lIns="0" tIns="0" rIns="0" bIns="0" rtlCol="0" anchor="ctr"/>
-          <a:lstStyle/>
-          <a:p>
-            <a:pPr indent="0" marL="0">
-              <a:buNone/>
-            </a:pPr>
-            <a:r>
-              <a:rPr lang="en-US" sz="2000" b="1" dirty="0">
-                <a:solidFill>
-                  <a:schemeClr val="bg1"/>
-                </a:solidFill>
-              </a:rPr>
-              <a:t>AI-assisted migration of ERM</a:t>
-            </a:r>
-            <a:endParaRPr lang="en-US" sz="2000" dirty="0"/>
-          </a:p>
-          <a:p>
-            <a:pPr indent="0" marL="0">
-              <a:buNone/>
-            </a:pPr>
-            <a:r>
-              <a:rPr lang="en-US" sz="1000" dirty="0">
-                <a:solidFill>
-                  <a:srgbClr val="000000"/>
-                </a:solidFill>
-              </a:rPr>
-              <a:t> </a:t>
-            </a:r>
-            <a:endParaRPr lang="en-US" sz="2000" dirty="0"/>
-          </a:p>
-          <a:p>
-            <a:pPr indent="0" marL="0">
-              <a:buNone/>
-            </a:pPr>
-            <a:r>
-              <a:rPr lang="en-US" sz="1400" dirty="0">
-                <a:solidFill>
-                  <a:schemeClr val="bg1"/>
-                </a:solidFill>
-              </a:rPr>
-              <a:t>Slate to React + OSDK</a:t>
-            </a:r>
-            <a:endParaRPr lang="en-US" sz="2000" dirty="0"/>
-          </a:p>
-          <a:p>
-            <a:pPr indent="0" marL="0">
-              <a:buNone/>
-            </a:pPr>
-            <a:r>
-              <a:rPr lang="en-US" sz="1400" dirty="0">
-                <a:solidFill>
-                  <a:schemeClr val="bg1"/>
-                </a:solidFill>
-              </a:rPr>
-              <a:t>2 developers · 1 PI</a:t>
-            </a:r>
-            <a:endParaRPr lang="en-US" sz="2000" dirty="0"/>
-          </a:p>
-          <a:p>
-            <a:pPr indent="0" marL="0">
-              <a:buNone/>
-            </a:pPr>
-            <a:r>
-              <a:rPr lang="en-US" sz="1400" dirty="0">
-                <a:solidFill>
-                  <a:schemeClr val="bg1"/>
-                </a:solidFill>
-              </a:rPr>
-              <a:t>pack-project.ts</a:t>
-            </a:r>
-            <a:endParaRPr lang="en-US" sz="2000" dirty="0"/>
-          </a:p>
-        </p:txBody>
-      </p:sp>
-      <p:sp>
-        <p:nvSpPr>
-          <p:cNvPr id="8" name="flow-0-arrow1"/>
-          <p:cNvSpPr/>
-          <p:nvPr/>
-        </p:nvSpPr>
-        <p:spPr>
-          <a:xfrm>
-            <a:off x="2971800" y="2139696"/>
-            <a:ext cx="411480" cy="0"/>
-          </a:xfrm>
-          <a:prstGeom prst="line">
-            <a:avLst/>
-          </a:prstGeom>
-          <a:noFill/>
-          <a:ln w="22225">
-            <a:solidFill>
-              <a:schemeClr val="tx2"/>
-            </a:solidFill>
-            <a:prstDash val="solid"/>
-            <a:tailEnd type="triangle"/>
-          </a:ln>
-        </p:spPr>
-      </p:sp>
-      <p:sp>
-        <p:nvSpPr>
-          <p:cNvPr id="9" name="flow-0-evbox"/>
-          <p:cNvSpPr/>
-          <p:nvPr/>
-        </p:nvSpPr>
-        <p:spPr>
-          <a:xfrm>
-            <a:off x="3429000" y="1645920"/>
-            <a:ext cx="4069080" cy="987552"/>
-          </a:xfrm>
-          <a:prstGeom prst="roundRect">
-            <a:avLst>
-              <a:gd name="adj" fmla="val 11111"/>
-            </a:avLst>
-          </a:prstGeom>
-          <a:solidFill>
-            <a:schemeClr val="bg2"/>
-          </a:solidFill>
-          <a:ln/>
-        </p:spPr>
-      </p:sp>
-      <p:sp>
-        <p:nvSpPr>
-          <p:cNvPr id="10" name="flow-0-evtext"/>
-          <p:cNvSpPr txBox="1"/>
-          <p:nvPr/>
-        </p:nvSpPr>
-        <p:spPr>
-          <a:xfrm>
-            <a:off x="3611880" y="1737360"/>
-            <a:ext cx="3703320" cy="804672"/>
-          </a:xfrm>
-          <a:prstGeom prst="rect">
-            <a:avLst/>
-          </a:prstGeom>
-          <a:noFill/>
-          <a:ln/>
-        </p:spPr>
-        <p:txBody>
-          <a:bodyPr wrap="square" lIns="0" tIns="0" rIns="0" bIns="0" rtlCol="0" anchor="ctr"/>
-          <a:lstStyle/>
-          <a:p>
-            <a:pPr indent="0" marL="0">
-              <a:buNone/>
-            </a:pPr>
-            <a:r>
-              <a:rPr lang="en-US" sz="1400" dirty="0">
-                <a:solidFill>
-                  <a:schemeClr val="tx1"/>
-                </a:solidFill>
-              </a:rPr>
-              <a:t>AI read 8 Slate exports and the packed React code: 105 features recovered, 31 gaps found</a:t>
-            </a:r>
-            <a:endParaRPr lang="en-US" sz="1400" dirty="0"/>
-          </a:p>
-        </p:txBody>
-      </p:sp>
-      <p:sp>
-        <p:nvSpPr>
-          <p:cNvPr id="11" name="flow-0-arrow2"/>
-          <p:cNvSpPr/>
-          <p:nvPr/>
-        </p:nvSpPr>
-        <p:spPr>
-          <a:xfrm>
-            <a:off x="7543800" y="2139696"/>
-            <a:ext cx="411480" cy="0"/>
-          </a:xfrm>
-          <a:prstGeom prst="line">
-            <a:avLst/>
-          </a:prstGeom>
-          <a:noFill/>
-          <a:ln w="22225">
-            <a:solidFill>
-              <a:schemeClr val="tx2"/>
-            </a:solidFill>
-            <a:prstDash val="solid"/>
-            <a:tailEnd type="triangle"/>
-          </a:ln>
-        </p:spPr>
-      </p:sp>
-      <p:sp>
-        <p:nvSpPr>
-          <p:cNvPr id="12" name="flow-0-objbox"/>
-          <p:cNvSpPr/>
-          <p:nvPr/>
-        </p:nvSpPr>
-        <p:spPr>
-          <a:xfrm>
-            <a:off x="8001000" y="1645920"/>
-            <a:ext cx="3639312" cy="987552"/>
-          </a:xfrm>
-          <a:prstGeom prst="roundRect">
-            <a:avLst>
-              <a:gd name="adj" fmla="val 11111"/>
-            </a:avLst>
-          </a:prstGeom>
-          <a:solidFill>
-            <a:schemeClr val="tx1"/>
-          </a:solidFill>
-          <a:ln/>
-        </p:spPr>
-      </p:sp>
-      <p:sp>
-        <p:nvSpPr>
-          <p:cNvPr id="13" name="flow-0-objtext"/>
-          <p:cNvSpPr txBox="1"/>
-          <p:nvPr/>
-        </p:nvSpPr>
-        <p:spPr>
-          <a:xfrm>
-            <a:off x="8183880" y="1737360"/>
-            <a:ext cx="3273552" cy="804672"/>
-          </a:xfrm>
-          <a:prstGeom prst="rect">
-            <a:avLst/>
-          </a:prstGeom>
-          <a:noFill/>
-          <a:ln/>
-        </p:spPr>
-        <p:txBody>
-          <a:bodyPr wrap="square" lIns="0" tIns="0" rIns="0" bIns="0" rtlCol="0" anchor="ctr"/>
-          <a:lstStyle/>
-          <a:p>
-            <a:pPr indent="0" marL="0">
-              <a:buNone/>
-            </a:pPr>
-            <a:r>
-              <a:rPr lang="en-US" sz="1500" b="1" dirty="0">
-                <a:solidFill>
-                  <a:schemeClr val="bg1"/>
-                </a:solidFill>
-              </a:rPr>
-              <a:t>Leverage AI to solve business problems</a:t>
-            </a:r>
-            <a:endParaRPr lang="en-US" sz="1500" dirty="0"/>
-          </a:p>
-          <a:p>
-            <a:pPr indent="0" marL="0">
-              <a:buNone/>
-            </a:pPr>
-            <a:r>
-              <a:rPr lang="en-US" sz="1100" dirty="0">
-                <a:solidFill>
-                  <a:schemeClr val="accent5"/>
-                </a:solidFill>
-              </a:rPr>
-              <a:t>India TFO · Digital: democratise AI</a:t>
-            </a:r>
-            <a:endParaRPr lang="en-US" sz="1500" dirty="0"/>
-          </a:p>
-        </p:txBody>
-      </p:sp>
-      <p:sp>
-        <p:nvSpPr>
-          <p:cNvPr id="14" name="flow-1-arrow1"/>
-          <p:cNvSpPr/>
-          <p:nvPr/>
-        </p:nvSpPr>
-        <p:spPr>
-          <a:xfrm>
-            <a:off x="2971800" y="3310128"/>
-            <a:ext cx="411480" cy="0"/>
-          </a:xfrm>
-          <a:prstGeom prst="line">
-            <a:avLst/>
-          </a:prstGeom>
-          <a:noFill/>
-          <a:ln w="22225">
-            <a:solidFill>
-              <a:schemeClr val="tx2"/>
-            </a:solidFill>
-            <a:prstDash val="solid"/>
-            <a:tailEnd type="triangle"/>
-          </a:ln>
-        </p:spPr>
-      </p:sp>
-      <p:sp>
-        <p:nvSpPr>
-          <p:cNvPr id="15" name="flow-1-evbox"/>
-          <p:cNvSpPr/>
-          <p:nvPr/>
-        </p:nvSpPr>
-        <p:spPr>
-          <a:xfrm>
-            <a:off x="3429000" y="2816352"/>
-            <a:ext cx="4069080" cy="987552"/>
-          </a:xfrm>
-          <a:prstGeom prst="roundRect">
-            <a:avLst>
-              <a:gd name="adj" fmla="val 11111"/>
-            </a:avLst>
-          </a:prstGeom>
-          <a:solidFill>
-            <a:schemeClr val="bg2"/>
-          </a:solidFill>
-          <a:ln/>
-        </p:spPr>
-      </p:sp>
-      <p:sp>
-        <p:nvSpPr>
-          <p:cNvPr id="16" name="flow-1-evtext"/>
-          <p:cNvSpPr txBox="1"/>
-          <p:nvPr/>
-        </p:nvSpPr>
-        <p:spPr>
-          <a:xfrm>
-            <a:off x="3611880" y="2907792"/>
-            <a:ext cx="3703320" cy="804672"/>
-          </a:xfrm>
-          <a:prstGeom prst="rect">
-            <a:avLst/>
-          </a:prstGeom>
-          <a:noFill/>
-          <a:ln/>
-        </p:spPr>
-        <p:txBody>
-          <a:bodyPr wrap="square" lIns="0" tIns="0" rIns="0" bIns="0" rtlCol="0" anchor="ctr"/>
-          <a:lstStyle/>
-          <a:p>
-            <a:pPr indent="0" marL="0">
-              <a:buNone/>
-            </a:pPr>
-            <a:r>
-              <a:rPr lang="en-US" sz="1400" dirty="0">
-                <a:solidFill>
-                  <a:schemeClr val="tx1"/>
-                </a:solidFill>
-              </a:rPr>
-              <a:t>Delivered in 1 PI by 2 developers, about 76% less effort than a manual estimate</a:t>
-            </a:r>
-            <a:endParaRPr lang="en-US" sz="1400" dirty="0"/>
-          </a:p>
-        </p:txBody>
-      </p:sp>
-      <p:sp>
-        <p:nvSpPr>
-          <p:cNvPr id="17" name="flow-1-arrow2"/>
-          <p:cNvSpPr/>
-          <p:nvPr/>
-        </p:nvSpPr>
-        <p:spPr>
-          <a:xfrm>
-            <a:off x="7543800" y="3310128"/>
-            <a:ext cx="411480" cy="0"/>
-          </a:xfrm>
-          <a:prstGeom prst="line">
-            <a:avLst/>
-          </a:prstGeom>
-          <a:noFill/>
-          <a:ln w="22225">
-            <a:solidFill>
-              <a:schemeClr val="tx2"/>
-            </a:solidFill>
-            <a:prstDash val="solid"/>
-            <a:tailEnd type="triangle"/>
-          </a:ln>
-        </p:spPr>
-      </p:sp>
-      <p:sp>
-        <p:nvSpPr>
-          <p:cNvPr id="18" name="flow-1-objbox"/>
-          <p:cNvSpPr/>
-          <p:nvPr/>
-        </p:nvSpPr>
-        <p:spPr>
-          <a:xfrm>
-            <a:off x="8001000" y="2816352"/>
-            <a:ext cx="3639312" cy="987552"/>
-          </a:xfrm>
-          <a:prstGeom prst="roundRect">
-            <a:avLst>
-              <a:gd name="adj" fmla="val 11111"/>
-            </a:avLst>
-          </a:prstGeom>
-          <a:solidFill>
-            <a:schemeClr val="tx1"/>
-          </a:solidFill>
-          <a:ln/>
-        </p:spPr>
-      </p:sp>
-      <p:sp>
-        <p:nvSpPr>
-          <p:cNvPr id="19" name="flow-1-objtext"/>
-          <p:cNvSpPr txBox="1"/>
-          <p:nvPr/>
-        </p:nvSpPr>
-        <p:spPr>
-          <a:xfrm>
-            <a:off x="8183880" y="2907792"/>
-            <a:ext cx="3273552" cy="804672"/>
-          </a:xfrm>
-          <a:prstGeom prst="rect">
-            <a:avLst/>
-          </a:prstGeom>
-          <a:noFill/>
-          <a:ln/>
-        </p:spPr>
-        <p:txBody>
-          <a:bodyPr wrap="square" lIns="0" tIns="0" rIns="0" bIns="0" rtlCol="0" anchor="ctr"/>
-          <a:lstStyle/>
-          <a:p>
-            <a:pPr indent="0" marL="0">
-              <a:buNone/>
-            </a:pPr>
-            <a:r>
-              <a:rPr lang="en-US" sz="1500" b="1" dirty="0">
-                <a:solidFill>
-                  <a:schemeClr val="bg1"/>
-                </a:solidFill>
-              </a:rPr>
-              <a:t>Deliver on time, on cost, on quality</a:t>
-            </a:r>
-            <a:endParaRPr lang="en-US" sz="1500" dirty="0"/>
-          </a:p>
-          <a:p>
-            <a:pPr indent="0" marL="0">
-              <a:buNone/>
-            </a:pPr>
-            <a:r>
-              <a:rPr lang="en-US" sz="1100" dirty="0">
-                <a:solidFill>
-                  <a:schemeClr val="accent5"/>
-                </a:solidFill>
-              </a:rPr>
-              <a:t>Digital: optimise our digital resources</a:t>
-            </a:r>
-            <a:endParaRPr lang="en-US" sz="1500" dirty="0"/>
-          </a:p>
-        </p:txBody>
-      </p:sp>
-      <p:sp>
-        <p:nvSpPr>
-          <p:cNvPr id="20" name="flow-2-arrow1"/>
-          <p:cNvSpPr/>
-          <p:nvPr/>
-        </p:nvSpPr>
-        <p:spPr>
-          <a:xfrm>
-            <a:off x="2971800" y="4480560"/>
-            <a:ext cx="411480" cy="0"/>
-          </a:xfrm>
-          <a:prstGeom prst="line">
-            <a:avLst/>
-          </a:prstGeom>
-          <a:noFill/>
-          <a:ln w="22225">
-            <a:solidFill>
-              <a:schemeClr val="tx2"/>
-            </a:solidFill>
-            <a:prstDash val="solid"/>
-            <a:tailEnd type="triangle"/>
-          </a:ln>
-        </p:spPr>
-      </p:sp>
-      <p:sp>
-        <p:nvSpPr>
-          <p:cNvPr id="21" name="flow-2-evbox"/>
-          <p:cNvSpPr/>
-          <p:nvPr/>
-        </p:nvSpPr>
-        <p:spPr>
-          <a:xfrm>
-            <a:off x="3429000" y="3986784"/>
-            <a:ext cx="4069080" cy="987552"/>
-          </a:xfrm>
-          <a:prstGeom prst="roundRect">
-            <a:avLst>
-              <a:gd name="adj" fmla="val 11111"/>
-            </a:avLst>
-          </a:prstGeom>
-          <a:solidFill>
-            <a:schemeClr val="bg2"/>
-          </a:solidFill>
-          <a:ln/>
-        </p:spPr>
-      </p:sp>
-      <p:sp>
-        <p:nvSpPr>
-          <p:cNvPr id="22" name="flow-2-evtext"/>
-          <p:cNvSpPr txBox="1"/>
-          <p:nvPr/>
-        </p:nvSpPr>
-        <p:spPr>
-          <a:xfrm>
-            <a:off x="3611880" y="4078224"/>
-            <a:ext cx="3703320" cy="804672"/>
-          </a:xfrm>
-          <a:prstGeom prst="rect">
-            <a:avLst/>
-          </a:prstGeom>
-          <a:noFill/>
-          <a:ln/>
-        </p:spPr>
-        <p:txBody>
-          <a:bodyPr wrap="square" lIns="0" tIns="0" rIns="0" bIns="0" rtlCol="0" anchor="ctr"/>
-          <a:lstStyle/>
-          <a:p>
-            <a:pPr indent="0" marL="0">
-              <a:buNone/>
-            </a:pPr>
-            <a:r>
-              <a:rPr lang="en-US" sz="1400" dirty="0">
-                <a:solidFill>
-                  <a:schemeClr val="tx1"/>
-                </a:solidFill>
-              </a:rPr>
-              <a:t>All 105 features tracked for parity; ERM moved off legacy Slate onto a standard, maintainable stack</a:t>
-            </a:r>
-            <a:endParaRPr lang="en-US" sz="1400" dirty="0"/>
-          </a:p>
-        </p:txBody>
-      </p:sp>
-      <p:sp>
-        <p:nvSpPr>
-          <p:cNvPr id="23" name="flow-2-arrow2"/>
-          <p:cNvSpPr/>
-          <p:nvPr/>
-        </p:nvSpPr>
-        <p:spPr>
-          <a:xfrm>
-            <a:off x="7543800" y="4480560"/>
-            <a:ext cx="411480" cy="0"/>
-          </a:xfrm>
-          <a:prstGeom prst="line">
-            <a:avLst/>
-          </a:prstGeom>
-          <a:noFill/>
-          <a:ln w="22225">
-            <a:solidFill>
-              <a:schemeClr val="tx2"/>
-            </a:solidFill>
-            <a:prstDash val="solid"/>
-            <a:tailEnd type="triangle"/>
-          </a:ln>
-        </p:spPr>
-      </p:sp>
-      <p:sp>
-        <p:nvSpPr>
-          <p:cNvPr id="24" name="flow-2-objbox"/>
-          <p:cNvSpPr/>
-          <p:nvPr/>
-        </p:nvSpPr>
-        <p:spPr>
-          <a:xfrm>
-            <a:off x="8001000" y="3986784"/>
-            <a:ext cx="3639312" cy="987552"/>
-          </a:xfrm>
-          <a:prstGeom prst="roundRect">
-            <a:avLst>
-              <a:gd name="adj" fmla="val 11111"/>
-            </a:avLst>
-          </a:prstGeom>
-          <a:solidFill>
-            <a:schemeClr val="tx1"/>
-          </a:solidFill>
-          <a:ln/>
-        </p:spPr>
-      </p:sp>
-      <p:sp>
-        <p:nvSpPr>
-          <p:cNvPr id="25" name="flow-2-objtext"/>
-          <p:cNvSpPr txBox="1"/>
-          <p:nvPr/>
-        </p:nvSpPr>
-        <p:spPr>
-          <a:xfrm>
-            <a:off x="8183880" y="4078224"/>
-            <a:ext cx="3273552" cy="804672"/>
-          </a:xfrm>
-          <a:prstGeom prst="rect">
-            <a:avLst/>
-          </a:prstGeom>
-          <a:noFill/>
-          <a:ln/>
-        </p:spPr>
-        <p:txBody>
-          <a:bodyPr wrap="square" lIns="0" tIns="0" rIns="0" bIns="0" rtlCol="0" anchor="ctr"/>
-          <a:lstStyle/>
-          <a:p>
-            <a:pPr indent="0" marL="0">
-              <a:buNone/>
-            </a:pPr>
-            <a:r>
-              <a:rPr lang="en-US" sz="1500" b="1" dirty="0">
-                <a:solidFill>
-                  <a:schemeClr val="bg1"/>
-                </a:solidFill>
-              </a:rPr>
-              <a:t>Ensure our operational performance</a:t>
-            </a:r>
-            <a:endParaRPr lang="en-US" sz="1500" dirty="0"/>
-          </a:p>
-          <a:p>
-            <a:pPr indent="0" marL="0">
-              <a:buNone/>
-            </a:pPr>
-            <a:r>
-              <a:rPr lang="en-US" sz="1100" dirty="0">
-                <a:solidFill>
-                  <a:schemeClr val="accent5"/>
-                </a:solidFill>
-              </a:rPr>
-              <a:t>Digital: availability of systems for operations</a:t>
-            </a:r>
-            <a:endParaRPr lang="en-US" sz="1500" dirty="0"/>
-          </a:p>
-        </p:txBody>
-      </p:sp>
-      <p:sp>
-        <p:nvSpPr>
-          <p:cNvPr id="26" name="flow-3-arrow1"/>
-          <p:cNvSpPr/>
-          <p:nvPr/>
-        </p:nvSpPr>
-        <p:spPr>
-          <a:xfrm>
-            <a:off x="2971800" y="5650992"/>
-            <a:ext cx="411480" cy="0"/>
-          </a:xfrm>
-          <a:prstGeom prst="line">
-            <a:avLst/>
-          </a:prstGeom>
-          <a:noFill/>
-          <a:ln w="22225">
-            <a:solidFill>
-              <a:schemeClr val="tx2"/>
-            </a:solidFill>
-            <a:prstDash val="solid"/>
-            <a:tailEnd type="triangle"/>
-          </a:ln>
-        </p:spPr>
-      </p:sp>
-      <p:sp>
-        <p:nvSpPr>
-          <p:cNvPr id="27" name="flow-3-evbox"/>
-          <p:cNvSpPr/>
-          <p:nvPr/>
-        </p:nvSpPr>
-        <p:spPr>
-          <a:xfrm>
-            <a:off x="3429000" y="5157216"/>
-            <a:ext cx="4069080" cy="987552"/>
-          </a:xfrm>
-          <a:prstGeom prst="roundRect">
-            <a:avLst>
-              <a:gd name="adj" fmla="val 11111"/>
-            </a:avLst>
-          </a:prstGeom>
-          <a:solidFill>
-            <a:schemeClr val="bg2"/>
-          </a:solidFill>
-          <a:ln/>
-        </p:spPr>
-      </p:sp>
-      <p:sp>
-        <p:nvSpPr>
-          <p:cNvPr id="28" name="flow-3-evtext"/>
-          <p:cNvSpPr txBox="1"/>
-          <p:nvPr/>
-        </p:nvSpPr>
-        <p:spPr>
-          <a:xfrm>
-            <a:off x="3611880" y="5248656"/>
-            <a:ext cx="3703320" cy="804672"/>
-          </a:xfrm>
-          <a:prstGeom prst="rect">
-            <a:avLst/>
-          </a:prstGeom>
-          <a:noFill/>
-          <a:ln/>
-        </p:spPr>
-        <p:txBody>
-          <a:bodyPr wrap="square" lIns="0" tIns="0" rIns="0" bIns="0" rtlCol="0" anchor="ctr"/>
-          <a:lstStyle/>
-          <a:p>
-            <a:pPr indent="0" marL="0">
-              <a:buNone/>
-            </a:pPr>
-            <a:r>
-              <a:rPr lang="en-US" sz="1400" dirty="0">
-                <a:solidFill>
-                  <a:schemeClr val="tx1"/>
-                </a:solidFill>
-              </a:rPr>
-              <a:t>pack-project.ts and the playbook let any team repeat the method</a:t>
-            </a:r>
-            <a:endParaRPr lang="en-US" sz="1400" dirty="0"/>
-          </a:p>
-        </p:txBody>
-      </p:sp>
-      <p:sp>
-        <p:nvSpPr>
-          <p:cNvPr id="29" name="flow-3-arrow2"/>
-          <p:cNvSpPr/>
-          <p:nvPr/>
-        </p:nvSpPr>
-        <p:spPr>
-          <a:xfrm>
-            <a:off x="7543800" y="5650992"/>
-            <a:ext cx="411480" cy="0"/>
-          </a:xfrm>
-          <a:prstGeom prst="line">
-            <a:avLst/>
-          </a:prstGeom>
-          <a:noFill/>
-          <a:ln w="22225">
-            <a:solidFill>
-              <a:schemeClr val="tx2"/>
-            </a:solidFill>
-            <a:prstDash val="solid"/>
-            <a:tailEnd type="triangle"/>
-          </a:ln>
-        </p:spPr>
-      </p:sp>
-      <p:sp>
-        <p:nvSpPr>
-          <p:cNvPr id="30" name="flow-3-objbox"/>
-          <p:cNvSpPr/>
-          <p:nvPr/>
-        </p:nvSpPr>
-        <p:spPr>
-          <a:xfrm>
-            <a:off x="8001000" y="5157216"/>
-            <a:ext cx="3639312" cy="987552"/>
-          </a:xfrm>
-          <a:prstGeom prst="roundRect">
-            <a:avLst>
-              <a:gd name="adj" fmla="val 11111"/>
-            </a:avLst>
-          </a:prstGeom>
-          <a:solidFill>
-            <a:schemeClr val="tx1"/>
-          </a:solidFill>
-          <a:ln/>
-        </p:spPr>
-      </p:sp>
-      <p:sp>
-        <p:nvSpPr>
-          <p:cNvPr id="31" name="flow-3-objtext"/>
-          <p:cNvSpPr txBox="1"/>
-          <p:nvPr/>
-        </p:nvSpPr>
-        <p:spPr>
-          <a:xfrm>
-            <a:off x="8183880" y="5248656"/>
-            <a:ext cx="3273552" cy="804672"/>
-          </a:xfrm>
-          <a:prstGeom prst="rect">
-            <a:avLst/>
-          </a:prstGeom>
-          <a:noFill/>
-          <a:ln/>
-        </p:spPr>
-        <p:txBody>
-          <a:bodyPr wrap="square" lIns="0" tIns="0" rIns="0" bIns="0" rtlCol="0" anchor="ctr"/>
-          <a:lstStyle/>
-          <a:p>
-            <a:pPr indent="0" marL="0">
-              <a:buNone/>
-            </a:pPr>
-            <a:r>
-              <a:rPr lang="en-US" sz="1500" b="1" dirty="0">
-                <a:solidFill>
-                  <a:schemeClr val="bg1"/>
-                </a:solidFill>
-              </a:rPr>
-              <a:t>Grow digital acumen and competencies</a:t>
-            </a:r>
-            <a:endParaRPr lang="en-US" sz="1500" dirty="0"/>
-          </a:p>
-          <a:p>
-            <a:pPr indent="0" marL="0">
-              <a:buNone/>
-            </a:pPr>
-            <a:r>
-              <a:rPr lang="en-US" sz="1100" dirty="0">
-                <a:solidFill>
-                  <a:schemeClr val="accent5"/>
-                </a:solidFill>
-              </a:rPr>
-              <a:t>Digital: develop our people · India TFO</a:t>
-            </a:r>
-            <a:endParaRPr lang="en-US" sz="1500" dirty="0"/>
-          </a:p>
-        </p:txBody>
-      </p:sp>
-    </p:spTree>
-  </p:cSld>
-  <p:clrMapOvr>
-    <a:masterClrMapping/>
-  </p:clrMapOvr>
-  <p:transition spd="med">
-    <p:fade/>
-  </p:transition>
-  <p:timing>
-    <p:tnLst>
-      <p:par>
-        <p:cTn id="1" dur="indefinite" restart="never" nodeType="tmRoot">
-          <p:childTnLst>
-            <p:seq concurrent="1" nextAc="seek">
-              <p:cTn id="2" dur="indefinite" nodeType="mainSeq">
-                <p:childTnLst>
-                  <p:par>
-                    <p:cTn id="86" fill="hold">
-                      <p:stCondLst>
-                        <p:cond delay="indefinite"/>
-                        <p:cond evt="onBegin" delay="0">
-                          <p:tn val="2"/>
-                        </p:cond>
-                      </p:stCondLst>
-                      <p:childTnLst>
-                        <p:par>
-                          <p:cTn id="9" fill="hold">
-                            <p:stCondLst>
-                              <p:cond delay="0"/>
-                            </p:stCondLst>
-                            <p:childTnLst>
-                              <p:par>
-                                <p:cTn id="3" presetID="10" presetClass="entr" presetSubtype="0" fill="hold" grpId="0" nodeType="afterEffect">
-                                  <p:stCondLst>
-                                    <p:cond delay="0"/>
-                                  </p:stCondLst>
-                                  <p:childTnLst>
-                                    <p:set>
-                                      <p:cBhvr>
-                                        <p:cTn id="4" dur="1" fill="hold">
-                                          <p:stCondLst>
-                                            <p:cond delay="0"/>
-                                          </p:stCondLst>
-                                        </p:cTn>
-                                        <p:tgtEl>
-                                          <p:spTgt spid="6"/>
-                                        </p:tgtEl>
-                                        <p:attrNameLst>
-                                          <p:attrName>style.visibility</p:attrName>
-                                        </p:attrNameLst>
-                                      </p:cBhvr>
-                                      <p:to>
-                                        <p:strVal val="visible"/>
-                                      </p:to>
-                                    </p:set>
-                                    <p:animEffect transition="in" filter="fade">
-                                      <p:cBhvr>
-                                        <p:cTn id="5" dur="450"/>
-                                        <p:tgtEl>
-                                          <p:spTgt spid="6"/>
-                                        </p:tgtEl>
-                                      </p:cBhvr>
-                                    </p:animEffect>
-                                  </p:childTnLst>
-                                </p:cTn>
-                              </p:par>
-                              <p:par>
-                                <p:cTn id="6" presetID="10" presetClass="entr" presetSubtype="0" fill="hold" grpId="0" nodeType="withEffect">
-                                  <p:stCondLst>
-                                    <p:cond delay="0"/>
-                                  </p:stCondLst>
-                                  <p:childTnLst>
-                                    <p:set>
-                                      <p:cBhvr>
-                                        <p:cTn id="7" dur="1" fill="hold">
-                                          <p:stCondLst>
-                                            <p:cond delay="0"/>
-                                          </p:stCondLst>
-                                        </p:cTn>
-                                        <p:tgtEl>
-                                          <p:spTgt spid="7"/>
-                                        </p:tgtEl>
-                                        <p:attrNameLst>
-                                          <p:attrName>style.visibility</p:attrName>
-                                        </p:attrNameLst>
-                                      </p:cBhvr>
-                                      <p:to>
-                                        <p:strVal val="visible"/>
-                                      </p:to>
-                                    </p:set>
-                                    <p:animEffect transition="in" filter="fade">
-                                      <p:cBhvr>
-                                        <p:cTn id="8" dur="450"/>
-                                        <p:tgtEl>
-                                          <p:spTgt spid="7"/>
-                                        </p:tgtEl>
-                                      </p:cBhvr>
-                                    </p:animEffect>
-                                  </p:childTnLst>
-                                </p:cTn>
-                              </p:par>
-                            </p:childTnLst>
-                          </p:cTn>
-                        </p:par>
-                        <p:par>
-                          <p:cTn id="28" fill="hold">
-                            <p:stCondLst>
-                              <p:cond delay="1100"/>
-                            </p:stCondLst>
-                            <p:childTnLst>
-                              <p:par>
-                                <p:cTn id="10" presetID="22" presetClass="entr" presetSubtype="8" fill="hold" grpId="0" nodeType="afterEffect">
-                                  <p:stCondLst>
-                                    <p:cond delay="0"/>
-                                  </p:stCondLst>
-                                  <p:childTnLst>
-                                    <p:set>
-                                      <p:cBhvr>
-                                        <p:cTn id="11" dur="1" fill="hold">
-                                          <p:stCondLst>
-                                            <p:cond delay="0"/>
-                                          </p:stCondLst>
-                                        </p:cTn>
-                                        <p:tgtEl>
-                                          <p:spTgt spid="8"/>
-                                        </p:tgtEl>
-                                        <p:attrNameLst>
-                                          <p:attrName>style.visibility</p:attrName>
-                                        </p:attrNameLst>
-                                      </p:cBhvr>
-                                      <p:to>
-                                        <p:strVal val="visible"/>
-                                      </p:to>
-                                    </p:set>
-                                    <p:animEffect transition="in" filter="wipe(left)">
-                                      <p:cBhvr>
-                                        <p:cTn id="12" dur="450"/>
-                                        <p:tgtEl>
-                                          <p:spTgt spid="8"/>
-                                        </p:tgtEl>
-                                      </p:cBhvr>
-                                    </p:animEffect>
-                                  </p:childTnLst>
-                                </p:cTn>
-                              </p:par>
-                              <p:par>
-                                <p:cTn id="13" presetID="10" presetClass="entr" presetSubtype="0" fill="hold" grpId="0" nodeType="withEffect">
-                                  <p:stCondLst>
-                                    <p:cond delay="250"/>
-                                  </p:stCondLst>
-                                  <p:childTnLst>
-                                    <p:set>
-                                      <p:cBhvr>
-                                        <p:cTn id="14" dur="1" fill="hold">
-                                          <p:stCondLst>
-                                            <p:cond delay="0"/>
-                                          </p:stCondLst>
-                                        </p:cTn>
-                                        <p:tgtEl>
-                                          <p:spTgt spid="9"/>
-                                        </p:tgtEl>
-                                        <p:attrNameLst>
-                                          <p:attrName>style.visibility</p:attrName>
-                                        </p:attrNameLst>
-                                      </p:cBhvr>
-                                      <p:to>
-                                        <p:strVal val="visible"/>
-                                      </p:to>
-                                    </p:set>
-                                    <p:animEffect transition="in" filter="fade">
-                                      <p:cBhvr>
-                                        <p:cTn id="15" dur="450"/>
-                                        <p:tgtEl>
-                                          <p:spTgt spid="9"/>
-                                        </p:tgtEl>
-                                      </p:cBhvr>
-                                    </p:animEffect>
-                                  </p:childTnLst>
-                                </p:cTn>
-                              </p:par>
-                              <p:par>
-                                <p:cTn id="16" presetID="10" presetClass="entr" presetSubtype="0" fill="hold" grpId="0" nodeType="withEffect">
-                                  <p:stCondLst>
-                                    <p:cond delay="250"/>
-                                  </p:stCondLst>
-                                  <p:childTnLst>
-                                    <p:set>
-                                      <p:cBhvr>
-                                        <p:cTn id="17" dur="1" fill="hold">
-                                          <p:stCondLst>
-                                            <p:cond delay="0"/>
-                                          </p:stCondLst>
-                                        </p:cTn>
-                                        <p:tgtEl>
-                                          <p:spTgt spid="10"/>
-                                        </p:tgtEl>
-                                        <p:attrNameLst>
-                                          <p:attrName>style.visibility</p:attrName>
-                                        </p:attrNameLst>
-                                      </p:cBhvr>
-                                      <p:to>
-                                        <p:strVal val="visible"/>
-                                      </p:to>
-                                    </p:set>
-                                    <p:animEffect transition="in" filter="fade">
-                                      <p:cBhvr>
-                                        <p:cTn id="18" dur="450"/>
-                                        <p:tgtEl>
-                                          <p:spTgt spid="10"/>
-                                        </p:tgtEl>
-                                      </p:cBhvr>
-                                    </p:animEffect>
-                                  </p:childTnLst>
-                                </p:cTn>
-                              </p:par>
-                              <p:par>
-                                <p:cTn id="19" presetID="22" presetClass="entr" presetSubtype="8" fill="hold" grpId="0" nodeType="withEffect">
-                                  <p:stCondLst>
-                                    <p:cond delay="550"/>
-                                  </p:stCondLst>
-                                  <p:childTnLst>
-                                    <p:set>
-                                      <p:cBhvr>
-                                        <p:cTn id="20" dur="1" fill="hold">
-                                          <p:stCondLst>
-                                            <p:cond delay="0"/>
-                                          </p:stCondLst>
-                                        </p:cTn>
-                                        <p:tgtEl>
-                                          <p:spTgt spid="11"/>
-                                        </p:tgtEl>
-                                        <p:attrNameLst>
-                                          <p:attrName>style.visibility</p:attrName>
-                                        </p:attrNameLst>
-                                      </p:cBhvr>
-                                      <p:to>
-                                        <p:strVal val="visible"/>
-                                      </p:to>
-                                    </p:set>
-                                    <p:animEffect transition="in" filter="wipe(left)">
-                                      <p:cBhvr>
-                                        <p:cTn id="21" dur="450"/>
-                                        <p:tgtEl>
-                                          <p:spTgt spid="11"/>
-                                        </p:tgtEl>
-                                      </p:cBhvr>
-                                    </p:animEffect>
-                                  </p:childTnLst>
-                                </p:cTn>
-                              </p:par>
-                              <p:par>
-                                <p:cTn id="22" presetID="10" presetClass="entr" presetSubtype="0" fill="hold" grpId="0" nodeType="withEffect">
-                                  <p:stCondLst>
-                                    <p:cond delay="800"/>
-                                  </p:stCondLst>
-                                  <p:childTnLst>
-                                    <p:set>
-                                      <p:cBhvr>
-                                        <p:cTn id="23" dur="1" fill="hold">
-                                          <p:stCondLst>
-                                            <p:cond delay="0"/>
-                                          </p:stCondLst>
-                                        </p:cTn>
-                                        <p:tgtEl>
-                                          <p:spTgt spid="12"/>
-                                        </p:tgtEl>
-                                        <p:attrNameLst>
-                                          <p:attrName>style.visibility</p:attrName>
-                                        </p:attrNameLst>
-                                      </p:cBhvr>
-                                      <p:to>
-                                        <p:strVal val="visible"/>
-                                      </p:to>
-                                    </p:set>
-                                    <p:animEffect transition="in" filter="fade">
-                                      <p:cBhvr>
-                                        <p:cTn id="24" dur="450"/>
-                                        <p:tgtEl>
-                                          <p:spTgt spid="12"/>
-                                        </p:tgtEl>
-                                      </p:cBhvr>
-                                    </p:animEffect>
-                                  </p:childTnLst>
-                                </p:cTn>
-                              </p:par>
-                              <p:par>
-                                <p:cTn id="25" presetID="10" presetClass="entr" presetSubtype="0" fill="hold" grpId="0" nodeType="withEffect">
-                                  <p:stCondLst>
-                                    <p:cond delay="800"/>
-                                  </p:stCondLst>
-                                  <p:childTnLst>
-                                    <p:set>
-                                      <p:cBhvr>
-                                        <p:cTn id="26" dur="1" fill="hold">
-                                          <p:stCondLst>
-                                            <p:cond delay="0"/>
-                                          </p:stCondLst>
-                                        </p:cTn>
-                                        <p:tgtEl>
-                                          <p:spTgt spid="13"/>
-                                        </p:tgtEl>
-                                        <p:attrNameLst>
-                                          <p:attrName>style.visibility</p:attrName>
-                                        </p:attrNameLst>
-                                      </p:cBhvr>
-                                      <p:to>
-                                        <p:strVal val="visible"/>
-                                      </p:to>
-                                    </p:set>
-                                    <p:animEffect transition="in" filter="fade">
-                                      <p:cBhvr>
-                                        <p:cTn id="27" dur="450"/>
-                                        <p:tgtEl>
-                                          <p:spTgt spid="13"/>
-                                        </p:tgtEl>
-                                      </p:cBhvr>
-                                    </p:animEffect>
-                                  </p:childTnLst>
-                                </p:cTn>
-                              </p:par>
-                            </p:childTnLst>
-                          </p:cTn>
-                        </p:par>
-                        <p:par>
-                          <p:cTn id="47" fill="hold">
-                            <p:stCondLst>
-                              <p:cond delay="2200"/>
-                            </p:stCondLst>
-                            <p:childTnLst>
-                              <p:par>
-                                <p:cTn id="29" presetID="22" presetClass="entr" presetSubtype="8" fill="hold" grpId="0" nodeType="afterEffect">
-                                  <p:stCondLst>
-                                    <p:cond delay="0"/>
-                                  </p:stCondLst>
-                                  <p:childTnLst>
-                                    <p:set>
-                                      <p:cBhvr>
-                                        <p:cTn id="30" dur="1" fill="hold">
-                                          <p:stCondLst>
-                                            <p:cond delay="0"/>
-                                          </p:stCondLst>
-                                        </p:cTn>
-                                        <p:tgtEl>
-                                          <p:spTgt spid="14"/>
-                                        </p:tgtEl>
-                                        <p:attrNameLst>
-                                          <p:attrName>style.visibility</p:attrName>
-                                        </p:attrNameLst>
-                                      </p:cBhvr>
-                                      <p:to>
-                                        <p:strVal val="visible"/>
-                                      </p:to>
-                                    </p:set>
-                                    <p:animEffect transition="in" filter="wipe(left)">
-                                      <p:cBhvr>
-                                        <p:cTn id="31" dur="450"/>
-                                        <p:tgtEl>
-                                          <p:spTgt spid="14"/>
-                                        </p:tgtEl>
-                                      </p:cBhvr>
-                                    </p:animEffect>
-                                  </p:childTnLst>
-                                </p:cTn>
-                              </p:par>
-                              <p:par>
-                                <p:cTn id="32" presetID="10" presetClass="entr" presetSubtype="0" fill="hold" grpId="0" nodeType="withEffect">
-                                  <p:stCondLst>
-                                    <p:cond delay="250"/>
-                                  </p:stCondLst>
-                                  <p:childTnLst>
-                                    <p:set>
-                                      <p:cBhvr>
-                                        <p:cTn id="33" dur="1" fill="hold">
-                                          <p:stCondLst>
-                                            <p:cond delay="0"/>
-                                          </p:stCondLst>
-                                        </p:cTn>
-                                        <p:tgtEl>
-                                          <p:spTgt spid="15"/>
-                                        </p:tgtEl>
-                                        <p:attrNameLst>
-                                          <p:attrName>style.visibility</p:attrName>
-                                        </p:attrNameLst>
-                                      </p:cBhvr>
-                                      <p:to>
-                                        <p:strVal val="visible"/>
-                                      </p:to>
-                                    </p:set>
-                                    <p:animEffect transition="in" filter="fade">
-                                      <p:cBhvr>
-                                        <p:cTn id="34" dur="450"/>
-                                        <p:tgtEl>
-                                          <p:spTgt spid="15"/>
-                                        </p:tgtEl>
-                                      </p:cBhvr>
-                                    </p:animEffect>
-                                  </p:childTnLst>
-                                </p:cTn>
-                              </p:par>
-                              <p:par>
-                                <p:cTn id="35" presetID="10" presetClass="entr" presetSubtype="0" fill="hold" grpId="0" nodeType="withEffect">
-                                  <p:stCondLst>
-                                    <p:cond delay="250"/>
-                                  </p:stCondLst>
-                                  <p:childTnLst>
-                                    <p:set>
-                                      <p:cBhvr>
-                                        <p:cTn id="36" dur="1" fill="hold">
-                                          <p:stCondLst>
-                                            <p:cond delay="0"/>
-                                          </p:stCondLst>
-                                        </p:cTn>
-                                        <p:tgtEl>
-                                          <p:spTgt spid="16"/>
-                                        </p:tgtEl>
-                                        <p:attrNameLst>
-                                          <p:attrName>style.visibility</p:attrName>
-                                        </p:attrNameLst>
-                                      </p:cBhvr>
-                                      <p:to>
-                                        <p:strVal val="visible"/>
-                                      </p:to>
-                                    </p:set>
-                                    <p:animEffect transition="in" filter="fade">
-                                      <p:cBhvr>
-                                        <p:cTn id="37" dur="450"/>
-                                        <p:tgtEl>
-                                          <p:spTgt spid="16"/>
-                                        </p:tgtEl>
-                                      </p:cBhvr>
-                                    </p:animEffect>
-                                  </p:childTnLst>
-                                </p:cTn>
-                              </p:par>
-                              <p:par>
-                                <p:cTn id="38" presetID="22" presetClass="entr" presetSubtype="8" fill="hold" grpId="0" nodeType="withEffect">
-                                  <p:stCondLst>
-                                    <p:cond delay="550"/>
-                                  </p:stCondLst>
-                                  <p:childTnLst>
-                                    <p:set>
-                                      <p:cBhvr>
-                                        <p:cTn id="39" dur="1" fill="hold">
-                                          <p:stCondLst>
-                                            <p:cond delay="0"/>
-                                          </p:stCondLst>
-                                        </p:cTn>
-                                        <p:tgtEl>
-                                          <p:spTgt spid="17"/>
-                                        </p:tgtEl>
-                                        <p:attrNameLst>
-                                          <p:attrName>style.visibility</p:attrName>
-                                        </p:attrNameLst>
-                                      </p:cBhvr>
-                                      <p:to>
-                                        <p:strVal val="visible"/>
-                                      </p:to>
-                                    </p:set>
-                                    <p:animEffect transition="in" filter="wipe(left)">
-                                      <p:cBhvr>
-                                        <p:cTn id="40" dur="450"/>
-                                        <p:tgtEl>
-                                          <p:spTgt spid="17"/>
-                                        </p:tgtEl>
-                                      </p:cBhvr>
-                                    </p:animEffect>
-                                  </p:childTnLst>
-                                </p:cTn>
-                              </p:par>
-                              <p:par>
-                                <p:cTn id="41" presetID="10" presetClass="entr" presetSubtype="0" fill="hold" grpId="0" nodeType="withEffect">
-                                  <p:stCondLst>
-                                    <p:cond delay="800"/>
-                                  </p:stCondLst>
-                                  <p:childTnLst>
-                                    <p:set>
-                                      <p:cBhvr>
-                                        <p:cTn id="42" dur="1" fill="hold">
-                                          <p:stCondLst>
-                                            <p:cond delay="0"/>
-                                          </p:stCondLst>
-                                        </p:cTn>
-                                        <p:tgtEl>
-                                          <p:spTgt spid="18"/>
-                                        </p:tgtEl>
-                                        <p:attrNameLst>
-                                          <p:attrName>style.visibility</p:attrName>
-                                        </p:attrNameLst>
-                                      </p:cBhvr>
-                                      <p:to>
-                                        <p:strVal val="visible"/>
-                                      </p:to>
-                                    </p:set>
-                                    <p:animEffect transition="in" filter="fade">
-                                      <p:cBhvr>
-                                        <p:cTn id="43" dur="450"/>
-                                        <p:tgtEl>
-                                          <p:spTgt spid="18"/>
-                                        </p:tgtEl>
-                                      </p:cBhvr>
-                                    </p:animEffect>
-                                  </p:childTnLst>
-                                </p:cTn>
-                              </p:par>
-                              <p:par>
-                                <p:cTn id="44" presetID="10" presetClass="entr" presetSubtype="0" fill="hold" grpId="0" nodeType="withEffect">
-                                  <p:stCondLst>
-                                    <p:cond delay="800"/>
-                                  </p:stCondLst>
-                                  <p:childTnLst>
-                                    <p:set>
-                                      <p:cBhvr>
-                                        <p:cTn id="45" dur="1" fill="hold">
-                                          <p:stCondLst>
-                                            <p:cond delay="0"/>
-                                          </p:stCondLst>
-                                        </p:cTn>
-                                        <p:tgtEl>
-                                          <p:spTgt spid="19"/>
-                                        </p:tgtEl>
-                                        <p:attrNameLst>
-                                          <p:attrName>style.visibility</p:attrName>
-                                        </p:attrNameLst>
-                                      </p:cBhvr>
-                                      <p:to>
-                                        <p:strVal val="visible"/>
-                                      </p:to>
-                                    </p:set>
-                                    <p:animEffect transition="in" filter="fade">
-                                      <p:cBhvr>
-                                        <p:cTn id="46" dur="450"/>
-                                        <p:tgtEl>
-                                          <p:spTgt spid="19"/>
-                                        </p:tgtEl>
-                                      </p:cBhvr>
-                                    </p:animEffect>
-                                  </p:childTnLst>
-                                </p:cTn>
-                              </p:par>
-                            </p:childTnLst>
-                          </p:cTn>
-                        </p:par>
-                        <p:par>
-                          <p:cTn id="66" fill="hold">
-                            <p:stCondLst>
-                              <p:cond delay="3300"/>
-                            </p:stCondLst>
-                            <p:childTnLst>
-                              <p:par>
-                                <p:cTn id="48" presetID="22" presetClass="entr" presetSubtype="8" fill="hold" grpId="0" nodeType="afterEffect">
-                                  <p:stCondLst>
-                                    <p:cond delay="0"/>
-                                  </p:stCondLst>
-                                  <p:childTnLst>
-                                    <p:set>
-                                      <p:cBhvr>
-                                        <p:cTn id="49" dur="1" fill="hold">
-                                          <p:stCondLst>
-                                            <p:cond delay="0"/>
-                                          </p:stCondLst>
-                                        </p:cTn>
-                                        <p:tgtEl>
-                                          <p:spTgt spid="20"/>
-                                        </p:tgtEl>
-                                        <p:attrNameLst>
-                                          <p:attrName>style.visibility</p:attrName>
-                                        </p:attrNameLst>
-                                      </p:cBhvr>
-                                      <p:to>
-                                        <p:strVal val="visible"/>
-                                      </p:to>
-                                    </p:set>
-                                    <p:animEffect transition="in" filter="wipe(left)">
-                                      <p:cBhvr>
-                                        <p:cTn id="50" dur="450"/>
-                                        <p:tgtEl>
-                                          <p:spTgt spid="20"/>
-                                        </p:tgtEl>
-                                      </p:cBhvr>
-                                    </p:animEffect>
-                                  </p:childTnLst>
-                                </p:cTn>
-                              </p:par>
-                              <p:par>
-                                <p:cTn id="51" presetID="10" presetClass="entr" presetSubtype="0" fill="hold" grpId="0" nodeType="withEffect">
-                                  <p:stCondLst>
-                                    <p:cond delay="250"/>
-                                  </p:stCondLst>
-                                  <p:childTnLst>
-                                    <p:set>
-                                      <p:cBhvr>
-                                        <p:cTn id="52" dur="1" fill="hold">
-                                          <p:stCondLst>
-                                            <p:cond delay="0"/>
-                                          </p:stCondLst>
-                                        </p:cTn>
-                                        <p:tgtEl>
-                                          <p:spTgt spid="21"/>
-                                        </p:tgtEl>
-                                        <p:attrNameLst>
-                                          <p:attrName>style.visibility</p:attrName>
-                                        </p:attrNameLst>
-                                      </p:cBhvr>
-                                      <p:to>
-                                        <p:strVal val="visible"/>
-                                      </p:to>
-                                    </p:set>
-                                    <p:animEffect transition="in" filter="fade">
-                                      <p:cBhvr>
-                                        <p:cTn id="53" dur="450"/>
-                                        <p:tgtEl>
-                                          <p:spTgt spid="21"/>
-                                        </p:tgtEl>
-                                      </p:cBhvr>
-                                    </p:animEffect>
-                                  </p:childTnLst>
-                                </p:cTn>
-                              </p:par>
-                              <p:par>
-                                <p:cTn id="54" presetID="10" presetClass="entr" presetSubtype="0" fill="hold" grpId="0" nodeType="withEffect">
-                                  <p:stCondLst>
-                                    <p:cond delay="250"/>
-                                  </p:stCondLst>
-                                  <p:childTnLst>
-                                    <p:set>
-                                      <p:cBhvr>
-                                        <p:cTn id="55" dur="1" fill="hold">
-                                          <p:stCondLst>
-                                            <p:cond delay="0"/>
-                                          </p:stCondLst>
-                                        </p:cTn>
-                                        <p:tgtEl>
-                                          <p:spTgt spid="22"/>
-                                        </p:tgtEl>
-                                        <p:attrNameLst>
-                                          <p:attrName>style.visibility</p:attrName>
-                                        </p:attrNameLst>
-                                      </p:cBhvr>
-                                      <p:to>
-                                        <p:strVal val="visible"/>
-                                      </p:to>
-                                    </p:set>
-                                    <p:animEffect transition="in" filter="fade">
-                                      <p:cBhvr>
-                                        <p:cTn id="56" dur="450"/>
-                                        <p:tgtEl>
-                                          <p:spTgt spid="22"/>
-                                        </p:tgtEl>
-                                      </p:cBhvr>
-                                    </p:animEffect>
-                                  </p:childTnLst>
-                                </p:cTn>
-                              </p:par>
-                              <p:par>
-                                <p:cTn id="57" presetID="22" presetClass="entr" presetSubtype="8" fill="hold" grpId="0" nodeType="withEffect">
-                                  <p:stCondLst>
-                                    <p:cond delay="550"/>
-                                  </p:stCondLst>
-                                  <p:childTnLst>
-                                    <p:set>
-                                      <p:cBhvr>
-                                        <p:cTn id="58" dur="1" fill="hold">
-                                          <p:stCondLst>
-                                            <p:cond delay="0"/>
-                                          </p:stCondLst>
-                                        </p:cTn>
-                                        <p:tgtEl>
-                                          <p:spTgt spid="23"/>
-                                        </p:tgtEl>
-                                        <p:attrNameLst>
-                                          <p:attrName>style.visibility</p:attrName>
-                                        </p:attrNameLst>
-                                      </p:cBhvr>
-                                      <p:to>
-                                        <p:strVal val="visible"/>
-                                      </p:to>
-                                    </p:set>
-                                    <p:animEffect transition="in" filter="wipe(left)">
-                                      <p:cBhvr>
-                                        <p:cTn id="59" dur="450"/>
-                                        <p:tgtEl>
-                                          <p:spTgt spid="23"/>
-                                        </p:tgtEl>
-                                      </p:cBhvr>
-                                    </p:animEffect>
-                                  </p:childTnLst>
-                                </p:cTn>
-                              </p:par>
-                              <p:par>
-                                <p:cTn id="60" presetID="10" presetClass="entr" presetSubtype="0" fill="hold" grpId="0" nodeType="withEffect">
-                                  <p:stCondLst>
-                                    <p:cond delay="800"/>
-                                  </p:stCondLst>
-                                  <p:childTnLst>
-                                    <p:set>
-                                      <p:cBhvr>
-                                        <p:cTn id="61" dur="1" fill="hold">
-                                          <p:stCondLst>
-                                            <p:cond delay="0"/>
-                                          </p:stCondLst>
-                                        </p:cTn>
-                                        <p:tgtEl>
-                                          <p:spTgt spid="24"/>
-                                        </p:tgtEl>
-                                        <p:attrNameLst>
-                                          <p:attrName>style.visibility</p:attrName>
-                                        </p:attrNameLst>
-                                      </p:cBhvr>
-                                      <p:to>
-                                        <p:strVal val="visible"/>
-                                      </p:to>
-                                    </p:set>
-                                    <p:animEffect transition="in" filter="fade">
-                                      <p:cBhvr>
-                                        <p:cTn id="62" dur="450"/>
-                                        <p:tgtEl>
-                                          <p:spTgt spid="24"/>
-                                        </p:tgtEl>
-                                      </p:cBhvr>
-                                    </p:animEffect>
-                                  </p:childTnLst>
-                                </p:cTn>
-                              </p:par>
-                              <p:par>
-                                <p:cTn id="63" presetID="10" presetClass="entr" presetSubtype="0" fill="hold" grpId="0" nodeType="withEffect">
-                                  <p:stCondLst>
-                                    <p:cond delay="800"/>
-                                  </p:stCondLst>
-                                  <p:childTnLst>
-                                    <p:set>
-                                      <p:cBhvr>
-                                        <p:cTn id="64" dur="1" fill="hold">
-                                          <p:stCondLst>
-                                            <p:cond delay="0"/>
-                                          </p:stCondLst>
-                                        </p:cTn>
-                                        <p:tgtEl>
-                                          <p:spTgt spid="25"/>
-                                        </p:tgtEl>
-                                        <p:attrNameLst>
-                                          <p:attrName>style.visibility</p:attrName>
-                                        </p:attrNameLst>
-                                      </p:cBhvr>
-                                      <p:to>
-                                        <p:strVal val="visible"/>
-                                      </p:to>
-                                    </p:set>
-                                    <p:animEffect transition="in" filter="fade">
-                                      <p:cBhvr>
-                                        <p:cTn id="65" dur="450"/>
-                                        <p:tgtEl>
-                                          <p:spTgt spid="25"/>
-                                        </p:tgtEl>
-                                      </p:cBhvr>
-                                    </p:animEffect>
-                                  </p:childTnLst>
-                                </p:cTn>
-                              </p:par>
-                            </p:childTnLst>
-                          </p:cTn>
-                        </p:par>
-                        <p:par>
-                          <p:cTn id="85" fill="hold">
-                            <p:stCondLst>
-                              <p:cond delay="4400"/>
-                            </p:stCondLst>
-                            <p:childTnLst>
-                              <p:par>
-                                <p:cTn id="67" presetID="22" presetClass="entr" presetSubtype="8" fill="hold" grpId="0" nodeType="afterEffect">
-                                  <p:stCondLst>
-                                    <p:cond delay="0"/>
-                                  </p:stCondLst>
-                                  <p:childTnLst>
-                                    <p:set>
-                                      <p:cBhvr>
-                                        <p:cTn id="68" dur="1" fill="hold">
-                                          <p:stCondLst>
-                                            <p:cond delay="0"/>
-                                          </p:stCondLst>
-                                        </p:cTn>
-                                        <p:tgtEl>
-                                          <p:spTgt spid="26"/>
-                                        </p:tgtEl>
-                                        <p:attrNameLst>
-                                          <p:attrName>style.visibility</p:attrName>
-                                        </p:attrNameLst>
-                                      </p:cBhvr>
-                                      <p:to>
-                                        <p:strVal val="visible"/>
-                                      </p:to>
-                                    </p:set>
-                                    <p:animEffect transition="in" filter="wipe(left)">
-                                      <p:cBhvr>
-                                        <p:cTn id="69" dur="450"/>
-                                        <p:tgtEl>
-                                          <p:spTgt spid="26"/>
-                                        </p:tgtEl>
-                                      </p:cBhvr>
-                                    </p:animEffect>
-                                  </p:childTnLst>
-                                </p:cTn>
-                              </p:par>
-                              <p:par>
-                                <p:cTn id="70" presetID="10" presetClass="entr" presetSubtype="0" fill="hold" grpId="0" nodeType="withEffect">
-                                  <p:stCondLst>
-                                    <p:cond delay="250"/>
-                                  </p:stCondLst>
-                                  <p:childTnLst>
-                                    <p:set>
-                                      <p:cBhvr>
-                                        <p:cTn id="71" dur="1" fill="hold">
-                                          <p:stCondLst>
-                                            <p:cond delay="0"/>
-                                          </p:stCondLst>
-                                        </p:cTn>
-                                        <p:tgtEl>
-                                          <p:spTgt spid="27"/>
-                                        </p:tgtEl>
-                                        <p:attrNameLst>
-                                          <p:attrName>style.visibility</p:attrName>
-                                        </p:attrNameLst>
-                                      </p:cBhvr>
-                                      <p:to>
-                                        <p:strVal val="visible"/>
-                                      </p:to>
-                                    </p:set>
-                                    <p:animEffect transition="in" filter="fade">
-                                      <p:cBhvr>
-                                        <p:cTn id="72" dur="450"/>
-                                        <p:tgtEl>
-                                          <p:spTgt spid="27"/>
-                                        </p:tgtEl>
-                                      </p:cBhvr>
-                                    </p:animEffect>
-                                  </p:childTnLst>
-                                </p:cTn>
-                              </p:par>
-                              <p:par>
-                                <p:cTn id="73" presetID="10" presetClass="entr" presetSubtype="0" fill="hold" grpId="0" nodeType="withEffect">
-                                  <p:stCondLst>
-                                    <p:cond delay="250"/>
-                                  </p:stCondLst>
-                                  <p:childTnLst>
-                                    <p:set>
-                                      <p:cBhvr>
-                                        <p:cTn id="74" dur="1" fill="hold">
-                                          <p:stCondLst>
-                                            <p:cond delay="0"/>
-                                          </p:stCondLst>
-                                        </p:cTn>
-                                        <p:tgtEl>
-                                          <p:spTgt spid="28"/>
-                                        </p:tgtEl>
-                                        <p:attrNameLst>
-                                          <p:attrName>style.visibility</p:attrName>
-                                        </p:attrNameLst>
-                                      </p:cBhvr>
-                                      <p:to>
-                                        <p:strVal val="visible"/>
-                                      </p:to>
-                                    </p:set>
-                                    <p:animEffect transition="in" filter="fade">
-                                      <p:cBhvr>
-                                        <p:cTn id="75" dur="450"/>
-                                        <p:tgtEl>
-                                          <p:spTgt spid="28"/>
-                                        </p:tgtEl>
-                                      </p:cBhvr>
-                                    </p:animEffect>
-                                  </p:childTnLst>
-                                </p:cTn>
-                              </p:par>
-                              <p:par>
-                                <p:cTn id="76" presetID="22" presetClass="entr" presetSubtype="8" fill="hold" grpId="0" nodeType="withEffect">
-                                  <p:stCondLst>
-                                    <p:cond delay="550"/>
-                                  </p:stCondLst>
-                                  <p:childTnLst>
-                                    <p:set>
-                                      <p:cBhvr>
-                                        <p:cTn id="77" dur="1" fill="hold">
-                                          <p:stCondLst>
-                                            <p:cond delay="0"/>
-                                          </p:stCondLst>
-                                        </p:cTn>
-                                        <p:tgtEl>
-                                          <p:spTgt spid="29"/>
-                                        </p:tgtEl>
-                                        <p:attrNameLst>
-                                          <p:attrName>style.visibility</p:attrName>
-                                        </p:attrNameLst>
-                                      </p:cBhvr>
-                                      <p:to>
-                                        <p:strVal val="visible"/>
-                                      </p:to>
-                                    </p:set>
-                                    <p:animEffect transition="in" filter="wipe(left)">
-                                      <p:cBhvr>
-                                        <p:cTn id="78" dur="450"/>
-                                        <p:tgtEl>
-                                          <p:spTgt spid="29"/>
-                                        </p:tgtEl>
-                                      </p:cBhvr>
-                                    </p:animEffect>
-                                  </p:childTnLst>
-                                </p:cTn>
-                              </p:par>
-                              <p:par>
-                                <p:cTn id="79" presetID="10" presetClass="entr" presetSubtype="0" fill="hold" grpId="0" nodeType="withEffect">
-                                  <p:stCondLst>
-                                    <p:cond delay="800"/>
-                                  </p:stCondLst>
-                                  <p:childTnLst>
-                                    <p:set>
-                                      <p:cBhvr>
-                                        <p:cTn id="80" dur="1" fill="hold">
-                                          <p:stCondLst>
-                                            <p:cond delay="0"/>
-                                          </p:stCondLst>
-                                        </p:cTn>
-                                        <p:tgtEl>
-                                          <p:spTgt spid="30"/>
-                                        </p:tgtEl>
-                                        <p:attrNameLst>
-                                          <p:attrName>style.visibility</p:attrName>
-                                        </p:attrNameLst>
-                                      </p:cBhvr>
-                                      <p:to>
-                                        <p:strVal val="visible"/>
-                                      </p:to>
-                                    </p:set>
-                                    <p:animEffect transition="in" filter="fade">
-                                      <p:cBhvr>
-                                        <p:cTn id="81" dur="450"/>
-                                        <p:tgtEl>
-                                          <p:spTgt spid="30"/>
-                                        </p:tgtEl>
-                                      </p:cBhvr>
-                                    </p:animEffect>
-                                  </p:childTnLst>
-                                </p:cTn>
-                              </p:par>
-                              <p:par>
-                                <p:cTn id="82" presetID="10" presetClass="entr" presetSubtype="0" fill="hold" grpId="0" nodeType="withEffect">
-                                  <p:stCondLst>
-                                    <p:cond delay="800"/>
-                                  </p:stCondLst>
-                                  <p:childTnLst>
-                                    <p:set>
-                                      <p:cBhvr>
-                                        <p:cTn id="83" dur="1" fill="hold">
-                                          <p:stCondLst>
-                                            <p:cond delay="0"/>
-                                          </p:stCondLst>
-                                        </p:cTn>
-                                        <p:tgtEl>
-                                          <p:spTgt spid="31"/>
-                                        </p:tgtEl>
-                                        <p:attrNameLst>
-                                          <p:attrName>style.visibility</p:attrName>
-                                        </p:attrNameLst>
-                                      </p:cBhvr>
-                                      <p:to>
-                                        <p:strVal val="visible"/>
-                                      </p:to>
-                                    </p:set>
-                                    <p:animEffect transition="in" filter="fade">
-                                      <p:cBhvr>
-                                        <p:cTn id="84" dur="450"/>
-                                        <p:tgtEl>
-                                          <p:spTgt spid="31"/>
-                                        </p:tgtEl>
-                                      </p:cBhvr>
-                                    </p:animEffect>
-                                  </p:childTnLst>
-                                </p:cTn>
-                              </p:par>
-                            </p:childTnLst>
-                          </p:cTn>
-                        </p:par>
-                      </p:childTnLst>
-                    </p:cTn>
-                  </p:par>
-                </p:childTnLst>
-              </p:cTn>
-              <p:prevCondLst>
-                <p:cond evt="onPrev" delay="0">
-                  <p:tgtEl>
-                    <p:sldTgt/>
-                  </p:tgtEl>
-                </p:cond>
-              </p:prevCondLst>
-              <p:nextCondLst>
-                <p:cond evt="onNext" delay="0">
-                  <p:tgtEl>
-                    <p:sldTgt/>
-                  </p:tgtEl>
-                </p:cond>
-              </p:nextCondLst>
-            </p:seq>
-          </p:childTnLst>
-        </p:cTn>
-      </p:par>
-    </p:tnLst>
-    <p:bldLst>
-      <p:bldP spid="6" grpId="0" animBg="1"/>
-      <p:bldP spid="7" grpId="0" animBg="1"/>
-      <p:bldP spid="8" grpId="0" animBg="1"/>
-      <p:bldP spid="9" grpId="0" animBg="1"/>
-      <p:bldP spid="10" grpId="0" animBg="1"/>
-      <p:bldP spid="11" grpId="0" animBg="1"/>
-      <p:bldP spid="12" grpId="0" animBg="1"/>
-      <p:bldP spid="13" grpId="0" animBg="1"/>
-      <p:bldP spid="14" grpId="0" animBg="1"/>
-      <p:bldP spid="15" grpId="0" animBg="1"/>
       <p:bldP spid="16" grpId="0" animBg="1"/>
       <p:bldP spid="17" grpId="0" animBg="1"/>
       <p:bldP spid="18" grpId="0" animBg="1"/>
       <p:bldP spid="19" grpId="0" animBg="1"/>
-      <p:bldP spid="20" grpId="0" animBg="1"/>
-      <p:bldP spid="21" grpId="0" animBg="1"/>
-      <p:bldP spid="22" grpId="0" animBg="1"/>
-      <p:bldP spid="23" grpId="0" animBg="1"/>
-      <p:bldP spid="24" grpId="0" animBg="1"/>
-      <p:bldP spid="25" grpId="0" animBg="1"/>
-      <p:bldP spid="26" grpId="0" animBg="1"/>
-      <p:bldP spid="27" grpId="0" animBg="1"/>
-      <p:bldP spid="28" grpId="0" animBg="1"/>
-      <p:bldP spid="29" grpId="0" animBg="1"/>
-      <p:bldP spid="30" grpId="0" animBg="1"/>
-      <p:bldP spid="31" grpId="0" animBg="1"/>
     </p:bldLst>
   </p:timing>
 </p:sld>

--- a/erm-migration/docs/ERM-Migration-Jury-Pitch.pptx
+++ b/erm-migration/docs/ERM-Migration-Jury-Pitch.pptx
@@ -118,25 +118,25 @@
   <p:extLst>
     <p:ext uri="{521415D9-36F7-43E2-AB2F-B90AF26B5E84}">
       <p14:sectionLst xmlns:p14="http://schemas.microsoft.com/office/powerpoint/2010/main">
-        <p14:section name="Pitch" id="{83b1d746-5b28-bed1-c464-566bdc46c5ea}">
+        <p14:section name="Pitch" id="{ae9ea79a-8763-fce4-c601-7c01435e77bb}">
           <p14:sldIdLst>
             <p14:sldId id="256"/>
           </p14:sldIdLst>
         </p14:section>
-        <p14:section name="Context" id="{53bd2f11-1b3a-425f-dfa3-638970568ff5}">
+        <p14:section name="Context" id="{79b7cf9a-53bf-95d8-4740-0edbf2997356}">
           <p14:sldIdLst>
             <p14:sldId id="257"/>
             <p14:sldId id="258"/>
             <p14:sldId id="259"/>
           </p14:sldIdLst>
         </p14:section>
-        <p14:section name="Problem and method" id="{81d264ee-4375-f104-7b5e-94509d06cdfc}">
+        <p14:section name="Problem and method" id="{38a1a9ee-6f6b-72dd-a5e5-4d428aecac0f}">
           <p14:sldIdLst>
             <p14:sldId id="260"/>
             <p14:sldId id="261"/>
           </p14:sldIdLst>
         </p14:section>
-        <p14:section name="Impact" id="{5a036a39-1e8b-97f6-a7f4-333f28002c40}">
+        <p14:section name="Impact" id="{71040fbf-aa2b-5fcd-68c4-00a52a4366da}">
           <p14:sldIdLst>
             <p14:sldId id="262"/>
             <p14:sldId id="263"/>
@@ -145,7 +145,7 @@
             <p14:sldId id="266"/>
           </p14:sldIdLst>
         </p14:section>
-        <p14:section name="Reuse" id="{e309fc29-39cd-325d-1291-d37e4b108333}">
+        <p14:section name="Reuse" id="{8d9c2379-9d35-b1f1-30c9-5260282694f3}">
           <p14:sldIdLst>
             <p14:sldId id="267"/>
           </p14:sldIdLst>
@@ -239,83 +239,81 @@
             </c:spPr>
           </c:marker>
           <c:cat>
-            <c:multiLvlStrRef>
+            <c:strRef>
               <c:f>Sheet1!$A$2:$A$24</c:f>
-              <c:multiLvlStrCache>
+              <c:strCache>
                 <c:ptCount val="23"/>
-                <c:lvl>
-                  <c:pt idx="0">
-                    <c:v>Aug 24</c:v>
-                  </c:pt>
-                  <c:pt idx="1">
-                    <c:v>Sep 24</c:v>
-                  </c:pt>
-                  <c:pt idx="2">
-                    <c:v>Oct 24</c:v>
-                  </c:pt>
-                  <c:pt idx="3">
-                    <c:v>Nov 24</c:v>
-                  </c:pt>
-                  <c:pt idx="4">
-                    <c:v>Dec 24</c:v>
-                  </c:pt>
-                  <c:pt idx="5">
-                    <c:v>Jan 25</c:v>
-                  </c:pt>
-                  <c:pt idx="6">
-                    <c:v>Feb 25</c:v>
-                  </c:pt>
-                  <c:pt idx="7">
-                    <c:v>Mar 25</c:v>
-                  </c:pt>
-                  <c:pt idx="8">
-                    <c:v>Apr 25</c:v>
-                  </c:pt>
-                  <c:pt idx="9">
-                    <c:v>May 25</c:v>
-                  </c:pt>
-                  <c:pt idx="10">
-                    <c:v>Jun 25</c:v>
-                  </c:pt>
-                  <c:pt idx="11">
-                    <c:v>Jul 25</c:v>
-                  </c:pt>
-                  <c:pt idx="12">
-                    <c:v>Aug 25</c:v>
-                  </c:pt>
-                  <c:pt idx="13">
-                    <c:v>Sep 25</c:v>
-                  </c:pt>
-                  <c:pt idx="14">
-                    <c:v>Oct 25</c:v>
-                  </c:pt>
-                  <c:pt idx="15">
-                    <c:v>Nov 25</c:v>
-                  </c:pt>
-                  <c:pt idx="16">
-                    <c:v>Dec 25</c:v>
-                  </c:pt>
-                  <c:pt idx="17">
-                    <c:v>Jan 26</c:v>
-                  </c:pt>
-                  <c:pt idx="18">
-                    <c:v>Feb 26</c:v>
-                  </c:pt>
-                  <c:pt idx="19">
-                    <c:v>Mar 26</c:v>
-                  </c:pt>
-                  <c:pt idx="20">
-                    <c:v>Apr 26</c:v>
-                  </c:pt>
-                  <c:pt idx="21">
-                    <c:v>May 26</c:v>
-                  </c:pt>
-                  <c:pt idx="22">
-                    <c:v>Jun 26</c:v>
-                  </c:pt>
-                </c:lvl>
-              </c:multiLvlStrCache>
-            </c:multiLvlStrRef>
+                <c:pt idx="0">
+                  <c:v>Aug 2024</c:v>
+                </c:pt>
+                <c:pt idx="1">
+                  <c:v>Sep 2024</c:v>
+                </c:pt>
+                <c:pt idx="2">
+                  <c:v>Oct 2024</c:v>
+                </c:pt>
+                <c:pt idx="3">
+                  <c:v>Nov 2024</c:v>
+                </c:pt>
+                <c:pt idx="4">
+                  <c:v>Dec 2024</c:v>
+                </c:pt>
+                <c:pt idx="5">
+                  <c:v>Jan 2025</c:v>
+                </c:pt>
+                <c:pt idx="6">
+                  <c:v>Feb 2025</c:v>
+                </c:pt>
+                <c:pt idx="7">
+                  <c:v>Mar 2025</c:v>
+                </c:pt>
+                <c:pt idx="8">
+                  <c:v>Apr 2025</c:v>
+                </c:pt>
+                <c:pt idx="9">
+                  <c:v>May 2025</c:v>
+                </c:pt>
+                <c:pt idx="10">
+                  <c:v>Jun 2025</c:v>
+                </c:pt>
+                <c:pt idx="11">
+                  <c:v>Jul 2025</c:v>
+                </c:pt>
+                <c:pt idx="12">
+                  <c:v>Aug 2025</c:v>
+                </c:pt>
+                <c:pt idx="13">
+                  <c:v>Sep 2025</c:v>
+                </c:pt>
+                <c:pt idx="14">
+                  <c:v>Oct 2025</c:v>
+                </c:pt>
+                <c:pt idx="15">
+                  <c:v>Nov 2025</c:v>
+                </c:pt>
+                <c:pt idx="16">
+                  <c:v>Dec 2025</c:v>
+                </c:pt>
+                <c:pt idx="17">
+                  <c:v>Jan 2026</c:v>
+                </c:pt>
+                <c:pt idx="18">
+                  <c:v>Feb 2026</c:v>
+                </c:pt>
+                <c:pt idx="19">
+                  <c:v>Mar 2026</c:v>
+                </c:pt>
+                <c:pt idx="20">
+                  <c:v>Apr 2026</c:v>
+                </c:pt>
+                <c:pt idx="21">
+                  <c:v>May 2026</c:v>
+                </c:pt>
+                <c:pt idx="22">
+                  <c:v>Jun 2026</c:v>
+                </c:pt>
+              </c:strCache>
+            </c:strRef>
           </c:cat>
           <c:val>
             <c:numRef>
@@ -465,7 +463,7 @@
         <c:crosses val="autoZero"/>
         <c:auto val="1"/>
         <c:lblAlgn val="ctr"/>
-        <c:noMultiLvlLbl val="1"/>
+        <c:noMultiLvlLbl val="0"/>
         <c:tickLblSkip val="2"/>
       </c:catAx>
       <c:valAx>
@@ -632,35 +630,33 @@
             <c:showLeaderLines val="0"/>
           </c:dLbls>
           <c:cat>
-            <c:multiLvlStrRef>
+            <c:strRef>
               <c:f>Sheet1!$A$2:$A$8</c:f>
-              <c:multiLvlStrCache>
+              <c:strCache>
                 <c:ptCount val="7"/>
-                <c:lvl>
-                  <c:pt idx="0">
-                    <c:v>B</c:v>
-                  </c:pt>
-                  <c:pt idx="1">
-                    <c:v>O</c:v>
-                  </c:pt>
-                  <c:pt idx="2">
-                    <c:v>P</c:v>
-                  </c:pt>
-                  <c:pt idx="3">
-                    <c:v>A</c:v>
-                  </c:pt>
-                  <c:pt idx="4">
-                    <c:v>L</c:v>
-                  </c:pt>
-                  <c:pt idx="5">
-                    <c:v>S</c:v>
-                  </c:pt>
-                  <c:pt idx="6">
-                    <c:v>K</c:v>
-                  </c:pt>
-                </c:lvl>
-              </c:multiLvlStrCache>
-            </c:multiLvlStrRef>
+                <c:pt idx="0">
+                  <c:v>B</c:v>
+                </c:pt>
+                <c:pt idx="1">
+                  <c:v>O</c:v>
+                </c:pt>
+                <c:pt idx="2">
+                  <c:v>P</c:v>
+                </c:pt>
+                <c:pt idx="3">
+                  <c:v>A</c:v>
+                </c:pt>
+                <c:pt idx="4">
+                  <c:v>L</c:v>
+                </c:pt>
+                <c:pt idx="5">
+                  <c:v>S</c:v>
+                </c:pt>
+                <c:pt idx="6">
+                  <c:v>K</c:v>
+                </c:pt>
+              </c:strCache>
+            </c:strRef>
           </c:cat>
           <c:val>
             <c:numRef>
@@ -762,7 +758,7 @@
         <c:crosses val="autoZero"/>
         <c:auto val="1"/>
         <c:lblAlgn val="ctr"/>
-        <c:noMultiLvlLbl val="1"/>
+        <c:noMultiLvlLbl val="0"/>
       </c:catAx>
       <c:valAx>
         <c:axId val="2094734552"/>

--- a/erm-migration/docs/ERM-Migration-Jury-Pitch.pptx
+++ b/erm-migration/docs/ERM-Migration-Jury-Pitch.pptx
@@ -118,25 +118,25 @@
   <p:extLst>
     <p:ext uri="{521415D9-36F7-43E2-AB2F-B90AF26B5E84}">
       <p14:sectionLst xmlns:p14="http://schemas.microsoft.com/office/powerpoint/2010/main">
-        <p14:section name="Pitch" id="{ae9ea79a-8763-fce4-c601-7c01435e77bb}">
+        <p14:section name="Pitch" id="{7071248d-7807-7429-82b8-ece5f28c3e4e}">
           <p14:sldIdLst>
             <p14:sldId id="256"/>
           </p14:sldIdLst>
         </p14:section>
-        <p14:section name="Context" id="{79b7cf9a-53bf-95d8-4740-0edbf2997356}">
+        <p14:section name="Context" id="{df148892-2f9e-ef1e-4176-612012b12e68}">
           <p14:sldIdLst>
             <p14:sldId id="257"/>
             <p14:sldId id="258"/>
             <p14:sldId id="259"/>
           </p14:sldIdLst>
         </p14:section>
-        <p14:section name="Problem and method" id="{38a1a9ee-6f6b-72dd-a5e5-4d428aecac0f}">
+        <p14:section name="Problem and method" id="{33e91224-0154-467b-2d42-c71ae8d47523}">
           <p14:sldIdLst>
             <p14:sldId id="260"/>
             <p14:sldId id="261"/>
           </p14:sldIdLst>
         </p14:section>
-        <p14:section name="Impact" id="{71040fbf-aa2b-5fcd-68c4-00a52a4366da}">
+        <p14:section name="Impact" id="{1bbd2fa5-2e46-6654-7dda-f41341f8316b}">
           <p14:sldIdLst>
             <p14:sldId id="262"/>
             <p14:sldId id="263"/>
@@ -145,7 +145,7 @@
             <p14:sldId id="266"/>
           </p14:sldIdLst>
         </p14:section>
-        <p14:section name="Reuse" id="{8d9c2379-9d35-b1f1-30c9-5260282694f3}">
+        <p14:section name="Reuse" id="{7fb5def7-deae-0d13-563f-280c922fe70d}">
           <p14:sldIdLst>
             <p14:sldId id="267"/>
           </p14:sldIdLst>
@@ -1232,7 +1232,7 @@
           <a:p>
             <a:r>
               <a:rPr lang="en-US" dirty="0"/>
-              <a:t>Open with the one-line pitch: two developers took ERM, a business-critical Slate application with no documentation, and moved it to Airbus DevX with React and OSDK in one PI, using an AI-assisted method we designed ourselves. The story: what ERM is and who relies on it, why it had to move, how we did it with AI, what it saved, how it serves our 2026 objectives, and why other teams can reuse it.</a:t>
+              <a:t>Open with the one-line pitch: two developers took ERM, a business-critical Slate application with no documentation, and rebuilt it for Airbus DevX with React and OSDK in one PI, ready for go-live, using an AI-assisted method we designed ourselves. The story: what ERM is and who relies on it, why it had to move, how we did it with AI, what it saved, how it serves our 2026 objectives, and why other teams can reuse it.</a:t>
             </a:r>
             <a:endParaRPr lang="en-US" dirty="0"/>
           </a:p>
@@ -1936,7 +1936,7 @@
           <a:p>
             <a:r>
               <a:rPr lang="en-US" dirty="0"/>
-              <a:t>The key idea is context. AI only knows what you give it, so we wrote pack-project.ts: one command walks the React project and writes every source file, under its path, into a single dated dump. The AI sees components, hooks, OSDK calls and types together. The Slate side is already one JSON file per module. With both, the AI compares each of the 105 features to the React code. The animation shows each Slate module landing in its React tab. Gaps get fixed, reviewed and deployed; then we re-pack and re-check until nothing unplanned is left. Features we dropped on purpose, like the heatmap slider and report KPIs, are marked as choices, not gaps.</a:t>
+              <a:t>The key idea is context. AI only knows what you give it, so we wrote pack-project.ts: one command walks the React project and writes every source file, under its path, into a single dated dump. The AI sees components, hooks, OSDK calls and types together. The Slate side is already one JSON file per module. With both, the AI compares each of the 105 features to the React code. The animation shows each Slate module landing in its React tab. Gaps get fixed and reviewed, and the backend sharing fix is deployed; then we re-pack and re-check until nothing unplanned is left. Features we dropped on purpose, like the heatmap slider and report KPIs, are marked as choices, not gaps.</a:t>
             </a:r>
             <a:endParaRPr lang="en-US" dirty="0"/>
           </a:p>
@@ -2200,7 +2200,7 @@
           <a:p>
             <a:r>
               <a:rPr lang="en-US" dirty="0"/>
-              <a:t>Building new features is now easy, and that keeps paying back. During the same PI we shipped 11 features Slate never had: permissions-only edit for locked versions, a web address per tab, a searchable dashboard switcher, a criticality-differs filter, category and impact-category filters, a fourth one-pager layout with custom slots, resizable columns saved per board, report classification and cover toggle, slideshow mode, one-pager selection shortcuts, and showing risks by ID or title. One change added app-wide notifications and automatic list refresh across 11 files. 25 MB of Slate configuration became about 0.8 MB of typed source in 75 files. In Slate, a feature meant wiring widgets, events, variables and functions across 8 exports, with no documentation; in React it is one typed component and one OSDK call, and pack-project.ts gives AI the whole app as context. On recurring cost: using a common rule of thumb that maintenance costs about 20% of build effort a year, a Slate-equivalent app would need about 68 person-days a year, around $21,000 at $38.50 an hour. Assuming modular, typed, documented code halves that, we save around $10,000 a year. Say clearly these are estimates.</a:t>
+              <a:t>Building new features is now easy, and that keeps paying back. During the same PI we built 11 features Slate never had: permissions-only edit for locked versions, a web address per tab, a searchable dashboard switcher, a criticality-differs filter, category and impact-category filters, a fourth one-pager layout with custom slots, resizable columns saved per board, report classification and cover toggle, slideshow mode, one-pager selection shortcuts, and showing risks by ID or title. One change added app-wide notifications and automatic list refresh across 11 files. 25 MB of Slate configuration became about 0.8 MB of typed source in 75 files. In Slate, a feature meant wiring widgets, events, variables and functions across 8 exports, with no documentation; in React it is one typed component and one OSDK call, and pack-project.ts gives AI the whole app as context. On recurring cost: using a common rule of thumb that maintenance costs about 20% of build effort a year, a Slate-equivalent app would need about 68 person-days a year, around $21,000 at $38.50 an hour. Assuming modular, typed, documented code halves that, we save around $10,000 a year. Say clearly these are estimates.</a:t>
             </a:r>
             <a:endParaRPr lang="en-US" dirty="0"/>
           </a:p>
@@ -13816,7 +13816,7 @@
                   <a:schemeClr val="accent5"/>
                 </a:solidFill>
               </a:rPr>
-              <a:t>Whole migration done in one SAFe Program Increment</a:t>
+              <a:t>Whole migration built in one SAFe Program Increment</a:t>
             </a:r>
             <a:endParaRPr lang="en-US" sz="1500" dirty="0"/>
           </a:p>
@@ -17158,7 +17158,7 @@
                   <a:schemeClr val="tx2"/>
                 </a:solidFill>
               </a:rPr>
-              <a:t>new features Slate never had, shipped in the same PI</a:t>
+              <a:t>new features Slate never had, built in the same PI</a:t>
             </a:r>
             <a:endParaRPr lang="en-US" sz="1300" dirty="0"/>
           </a:p>

--- a/erm-migration/docs/ERM-Migration-Jury-Pitch.pptx
+++ b/erm-migration/docs/ERM-Migration-Jury-Pitch.pptx
@@ -118,25 +118,25 @@
   <p:extLst>
     <p:ext uri="{521415D9-36F7-43E2-AB2F-B90AF26B5E84}">
       <p14:sectionLst xmlns:p14="http://schemas.microsoft.com/office/powerpoint/2010/main">
-        <p14:section name="Pitch" id="{7071248d-7807-7429-82b8-ece5f28c3e4e}">
+        <p14:section name="Pitch" id="{d916c957-daf2-c608-d878-8673d4279de4}">
           <p14:sldIdLst>
             <p14:sldId id="256"/>
           </p14:sldIdLst>
         </p14:section>
-        <p14:section name="Context" id="{df148892-2f9e-ef1e-4176-612012b12e68}">
+        <p14:section name="Context" id="{91f07159-1eff-7fef-99ef-16bb23de2640}">
           <p14:sldIdLst>
             <p14:sldId id="257"/>
             <p14:sldId id="258"/>
             <p14:sldId id="259"/>
           </p14:sldIdLst>
         </p14:section>
-        <p14:section name="Problem and method" id="{33e91224-0154-467b-2d42-c71ae8d47523}">
+        <p14:section name="Problem and method" id="{a40653da-c0c5-a815-7d21-3a4f03fca472}">
           <p14:sldIdLst>
             <p14:sldId id="260"/>
             <p14:sldId id="261"/>
           </p14:sldIdLst>
         </p14:section>
-        <p14:section name="Impact" id="{1bbd2fa5-2e46-6654-7dda-f41341f8316b}">
+        <p14:section name="Impact" id="{72119732-8eef-6e12-fa01-e32899b55249}">
           <p14:sldIdLst>
             <p14:sldId id="262"/>
             <p14:sldId id="263"/>
@@ -145,7 +145,7 @@
             <p14:sldId id="266"/>
           </p14:sldIdLst>
         </p14:section>
-        <p14:section name="Reuse" id="{7fb5def7-deae-0d13-563f-280c922fe70d}">
+        <p14:section name="Reuse" id="{1d88723a-52ec-60e5-75ed-0f0d34fa04f1}">
           <p14:sldIdLst>
             <p14:sldId id="267"/>
           </p14:sldIdLst>
@@ -6376,7 +6376,7 @@
                   <a:schemeClr val="accent6"/>
                 </a:solidFill>
               </a:rPr>
-              <a:t>Backend and frontend fixes shipped together</a:t>
+              <a:t>Backend and frontend fixes delivered together</a:t>
             </a:r>
             <a:endParaRPr lang="en-US" sz="1600" dirty="0"/>
           </a:p>

--- a/erm-migration/docs/ERM-Migration-Jury-Pitch.pptx
+++ b/erm-migration/docs/ERM-Migration-Jury-Pitch.pptx
@@ -118,25 +118,25 @@
   <p:extLst>
     <p:ext uri="{521415D9-36F7-43E2-AB2F-B90AF26B5E84}">
       <p14:sectionLst xmlns:p14="http://schemas.microsoft.com/office/powerpoint/2010/main">
-        <p14:section name="Pitch" id="{d916c957-daf2-c608-d878-8673d4279de4}">
+        <p14:section name="Pitch" id="{39d5b421-b7c5-776b-9880-1fb9a7d5555d}">
           <p14:sldIdLst>
             <p14:sldId id="256"/>
           </p14:sldIdLst>
         </p14:section>
-        <p14:section name="Context" id="{91f07159-1eff-7fef-99ef-16bb23de2640}">
+        <p14:section name="Context" id="{3e9bfaa9-cb89-78cd-c9fc-d15db49999f6}">
           <p14:sldIdLst>
             <p14:sldId id="257"/>
             <p14:sldId id="258"/>
             <p14:sldId id="259"/>
           </p14:sldIdLst>
         </p14:section>
-        <p14:section name="Problem and method" id="{a40653da-c0c5-a815-7d21-3a4f03fca472}">
+        <p14:section name="Problem and method" id="{6515b38d-5baa-0eb1-8306-2ef8415a0834}">
           <p14:sldIdLst>
             <p14:sldId id="260"/>
             <p14:sldId id="261"/>
           </p14:sldIdLst>
         </p14:section>
-        <p14:section name="Impact" id="{72119732-8eef-6e12-fa01-e32899b55249}">
+        <p14:section name="Impact" id="{faddd1e6-c95b-53cc-9af7-ccd2c2d39f87}">
           <p14:sldIdLst>
             <p14:sldId id="262"/>
             <p14:sldId id="263"/>
@@ -145,7 +145,7 @@
             <p14:sldId id="266"/>
           </p14:sldIdLst>
         </p14:section>
-        <p14:section name="Reuse" id="{1d88723a-52ec-60e5-75ed-0f0d34fa04f1}">
+        <p14:section name="Reuse" id="{58499a7c-bb27-cb5d-6f2f-07703843f999}">
           <p14:sldIdLst>
             <p14:sldId id="267"/>
           </p14:sldIdLst>
@@ -2200,7 +2200,7 @@
           <a:p>
             <a:r>
               <a:rPr lang="en-US" dirty="0"/>
-              <a:t>Building new features is now easy, and that keeps paying back. During the same PI we built 11 features Slate never had: permissions-only edit for locked versions, a web address per tab, a searchable dashboard switcher, a criticality-differs filter, category and impact-category filters, a fourth one-pager layout with custom slots, resizable columns saved per board, report classification and cover toggle, slideshow mode, one-pager selection shortcuts, and showing risks by ID or title. One change added app-wide notifications and automatic list refresh across 11 files. 25 MB of Slate configuration became about 0.8 MB of typed source in 75 files. In Slate, a feature meant wiring widgets, events, variables and functions across 8 exports, with no documentation; in React it is one typed component and one OSDK call, and pack-project.ts gives AI the whole app as context. On recurring cost: using a common rule of thumb that maintenance costs about 20% of build effort a year, a Slate-equivalent app would need about 68 person-days a year, around $21,000 at $38.50 an hour. Assuming modular, typed, documented code halves that, we save around $10,000 a year. Say clearly these are estimates.</a:t>
+              <a:t>Building new features is now easy, and that keeps paying back. During the same PI we built 11 features Slate never had: permissions-only edit for locked versions, a web address per tab, a searchable dashboard switcher, a criticality-differs filter, category and impact-category filters, a fourth one-pager layout with custom slots, resizable columns saved per board, report classification and cover toggle, slideshow mode, one-pager selection shortcuts, and showing risks by ID or title. 25 MB of Slate configuration became about 0.8 MB of typed source in 75 files. In Slate, a feature meant wiring widgets, events, variables and functions across 8 exports, with no documentation; in React it is one typed component and one OSDK call, and pack-project.ts gives AI the whole app as context. On recurring cost: using a common rule of thumb that maintenance costs about 20% of build effort a year, a Slate-equivalent app would need about 68 person-days a year, around $21,000 at $38.50 an hour. Assuming modular, typed, documented code halves that, we save around $10,000 a year. Say clearly these are estimates.</a:t>
             </a:r>
             <a:endParaRPr lang="en-US" dirty="0"/>
           </a:p>
@@ -17079,7 +17079,7 @@
         <p:spPr>
           <a:xfrm>
             <a:off x="548640" y="1371600"/>
-            <a:ext cx="2567864" cy="1554480"/>
+            <a:ext cx="3515258" cy="1554480"/>
           </a:xfrm>
           <a:prstGeom prst="roundRect">
             <a:avLst>
@@ -17101,7 +17101,7 @@
         <p:spPr>
           <a:xfrm>
             <a:off x="749808" y="1481328"/>
-            <a:ext cx="2165528" cy="640080"/>
+            <a:ext cx="3112922" cy="640080"/>
           </a:xfrm>
           <a:prstGeom prst="rect">
             <a:avLst/>
@@ -17137,7 +17137,7 @@
         <p:spPr>
           <a:xfrm>
             <a:off x="749808" y="2148840"/>
-            <a:ext cx="2165528" cy="685800"/>
+            <a:ext cx="3112922" cy="685800"/>
           </a:xfrm>
           <a:prstGeom prst="rect">
             <a:avLst/>
@@ -17172,8 +17172,8 @@
         </p:nvSpPr>
         <p:spPr>
           <a:xfrm>
-            <a:off x="3390824" y="1371600"/>
-            <a:ext cx="2567864" cy="1554480"/>
+            <a:off x="4338218" y="1371600"/>
+            <a:ext cx="3515258" cy="1554480"/>
           </a:xfrm>
           <a:prstGeom prst="roundRect">
             <a:avLst>
@@ -17194,8 +17194,8 @@
         </p:nvSpPr>
         <p:spPr>
           <a:xfrm>
-            <a:off x="3591992" y="1481328"/>
-            <a:ext cx="2165528" cy="640080"/>
+            <a:off x="4539386" y="1481328"/>
+            <a:ext cx="3112922" cy="640080"/>
           </a:xfrm>
           <a:prstGeom prst="rect">
             <a:avLst/>
@@ -17216,7 +17216,7 @@
                   <a:schemeClr val="tx1"/>
                 </a:solidFill>
               </a:rPr>
-              <a:t>11 files</a:t>
+              <a:t>−97%</a:t>
             </a:r>
             <a:endParaRPr lang="en-US" sz="3400" dirty="0"/>
           </a:p>
@@ -17230,8 +17230,8 @@
         </p:nvSpPr>
         <p:spPr>
           <a:xfrm>
-            <a:off x="3591992" y="2148840"/>
-            <a:ext cx="2165528" cy="685800"/>
+            <a:off x="4539386" y="2148840"/>
+            <a:ext cx="3112922" cy="685800"/>
           </a:xfrm>
           <a:prstGeom prst="rect">
             <a:avLst/>
@@ -17252,7 +17252,7 @@
                   <a:schemeClr val="tx2"/>
                 </a:solidFill>
               </a:rPr>
-              <a:t>one change added app-wide notifications and auto-refresh</a:t>
+              <a:t>25 MB of Slate configuration became 0.8 MB of typed code</a:t>
             </a:r>
             <a:endParaRPr lang="en-US" sz="1300" dirty="0"/>
           </a:p>
@@ -17266,8 +17266,8 @@
         </p:nvSpPr>
         <p:spPr>
           <a:xfrm>
-            <a:off x="6233008" y="1371600"/>
-            <a:ext cx="2567864" cy="1554480"/>
+            <a:off x="8127797" y="1371600"/>
+            <a:ext cx="3515258" cy="1554480"/>
           </a:xfrm>
           <a:prstGeom prst="roundRect">
             <a:avLst>
@@ -17275,7 +17275,7 @@
             </a:avLst>
           </a:prstGeom>
           <a:solidFill>
-            <a:schemeClr val="bg1"/>
+            <a:schemeClr val="tx1"/>
           </a:solidFill>
           <a:ln/>
         </p:spPr>
@@ -17288,8 +17288,8 @@
         </p:nvSpPr>
         <p:spPr>
           <a:xfrm>
-            <a:off x="6434176" y="1481328"/>
-            <a:ext cx="2165528" cy="640080"/>
+            <a:off x="8328965" y="1481328"/>
+            <a:ext cx="3112922" cy="640080"/>
           </a:xfrm>
           <a:prstGeom prst="rect">
             <a:avLst/>
@@ -17307,10 +17307,10 @@
             <a:r>
               <a:rPr lang="en-US" sz="3400" b="1" dirty="0">
                 <a:solidFill>
-                  <a:schemeClr val="tx1"/>
+                  <a:schemeClr val="accent5"/>
                 </a:solidFill>
               </a:rPr>
-              <a:t>−97%</a:t>
+              <a:t>~$10K</a:t>
             </a:r>
             <a:endParaRPr lang="en-US" sz="3400" dirty="0"/>
           </a:p>
@@ -17324,8 +17324,8 @@
         </p:nvSpPr>
         <p:spPr>
           <a:xfrm>
-            <a:off x="6434176" y="2148840"/>
-            <a:ext cx="2165528" cy="685800"/>
+            <a:off x="8328965" y="2148840"/>
+            <a:ext cx="3112922" cy="685800"/>
           </a:xfrm>
           <a:prstGeom prst="rect">
             <a:avLst/>
@@ -17343,100 +17343,6 @@
             <a:r>
               <a:rPr lang="en-US" sz="1300" dirty="0">
                 <a:solidFill>
-                  <a:schemeClr val="tx2"/>
-                </a:solidFill>
-              </a:rPr>
-              <a:t>25 MB of Slate configuration became 0.8 MB of typed code</a:t>
-            </a:r>
-            <a:endParaRPr lang="en-US" sz="1300" dirty="0"/>
-          </a:p>
-        </p:txBody>
-      </p:sp>
-      <p:sp>
-        <p:nvSpPr>
-          <p:cNvPr id="12" name="ease-3-card"/>
-          <p:cNvSpPr/>
-          <p:nvPr/>
-        </p:nvSpPr>
-        <p:spPr>
-          <a:xfrm>
-            <a:off x="9075191" y="1371600"/>
-            <a:ext cx="2567864" cy="1554480"/>
-          </a:xfrm>
-          <a:prstGeom prst="roundRect">
-            <a:avLst>
-              <a:gd name="adj" fmla="val 7059"/>
-            </a:avLst>
-          </a:prstGeom>
-          <a:solidFill>
-            <a:schemeClr val="tx1"/>
-          </a:solidFill>
-          <a:ln/>
-        </p:spPr>
-      </p:sp>
-      <p:sp>
-        <p:nvSpPr>
-          <p:cNvPr id="13" name="ease-3-value"/>
-          <p:cNvSpPr txBox="1"/>
-          <p:nvPr/>
-        </p:nvSpPr>
-        <p:spPr>
-          <a:xfrm>
-            <a:off x="9276359" y="1481328"/>
-            <a:ext cx="2165528" cy="640080"/>
-          </a:xfrm>
-          <a:prstGeom prst="rect">
-            <a:avLst/>
-          </a:prstGeom>
-          <a:noFill/>
-          <a:ln/>
-        </p:spPr>
-        <p:txBody>
-          <a:bodyPr wrap="square" lIns="0" tIns="0" rIns="0" bIns="0" rtlCol="0" anchor="t"/>
-          <a:lstStyle/>
-          <a:p>
-            <a:pPr indent="0" marL="0">
-              <a:buNone/>
-            </a:pPr>
-            <a:r>
-              <a:rPr lang="en-US" sz="3400" b="1" dirty="0">
-                <a:solidFill>
-                  <a:schemeClr val="accent5"/>
-                </a:solidFill>
-              </a:rPr>
-              <a:t>~$10K</a:t>
-            </a:r>
-            <a:endParaRPr lang="en-US" sz="3400" dirty="0"/>
-          </a:p>
-        </p:txBody>
-      </p:sp>
-      <p:sp>
-        <p:nvSpPr>
-          <p:cNvPr id="14" name="ease-3-label"/>
-          <p:cNvSpPr txBox="1"/>
-          <p:nvPr/>
-        </p:nvSpPr>
-        <p:spPr>
-          <a:xfrm>
-            <a:off x="9276359" y="2148840"/>
-            <a:ext cx="2165528" cy="685800"/>
-          </a:xfrm>
-          <a:prstGeom prst="rect">
-            <a:avLst/>
-          </a:prstGeom>
-          <a:noFill/>
-          <a:ln/>
-        </p:spPr>
-        <p:txBody>
-          <a:bodyPr wrap="square" lIns="0" tIns="0" rIns="0" bIns="0" rtlCol="0" anchor="t"/>
-          <a:lstStyle/>
-          <a:p>
-            <a:pPr indent="0" marL="0">
-              <a:buNone/>
-            </a:pPr>
-            <a:r>
-              <a:rPr lang="en-US" sz="1300" dirty="0">
-                <a:solidFill>
                   <a:schemeClr val="accent5"/>
                 </a:solidFill>
               </a:rPr>
@@ -17448,7 +17354,7 @@
       </p:sp>
       <p:sp>
         <p:nvSpPr>
-          <p:cNvPr id="15" name="ease-old"/>
+          <p:cNvPr id="12" name="ease-old"/>
           <p:cNvSpPr/>
           <p:nvPr/>
         </p:nvSpPr>
@@ -17470,7 +17376,7 @@
       </p:sp>
       <p:sp>
         <p:nvSpPr>
-          <p:cNvPr id="16" name="ease-old-text"/>
+          <p:cNvPr id="13" name="ease-old-text"/>
           <p:cNvSpPr txBox="1"/>
           <p:nvPr/>
         </p:nvSpPr>
@@ -17580,7 +17486,7 @@
       </p:sp>
       <p:sp>
         <p:nvSpPr>
-          <p:cNvPr id="17" name="ease-new"/>
+          <p:cNvPr id="14" name="ease-new"/>
           <p:cNvSpPr/>
           <p:nvPr/>
         </p:nvSpPr>
@@ -17602,7 +17508,7 @@
       </p:sp>
       <p:sp>
         <p:nvSpPr>
-          <p:cNvPr id="18" name="ease-new-text"/>
+          <p:cNvPr id="15" name="ease-new-text"/>
           <p:cNvSpPr txBox="1"/>
           <p:nvPr/>
         </p:nvSpPr>
@@ -17712,7 +17618,7 @@
       </p:sp>
       <p:sp>
         <p:nvSpPr>
-          <p:cNvPr id="19" name="ease-foot"/>
+          <p:cNvPr id="16" name="ease-foot"/>
           <p:cNvSpPr txBox="1"/>
           <p:nvPr/>
         </p:nvSpPr>
@@ -17763,7 +17669,7 @@
               <p:cTn id="2" dur="indefinite" nodeType="mainSeq">
                 <p:childTnLst>
                   <p:par>
-                    <p:cTn id="61" fill="hold">
+                    <p:cTn id="51" fill="hold">
                       <p:stCondLst>
                         <p:cond delay="indefinite"/>
                         <p:cond evt="onBegin" delay="0">
@@ -18114,7 +18020,7 @@
                           </p:cTn>
                         </p:par>
                         <p:par>
-                          <p:cTn id="42" fill="hold">
+                          <p:cTn id="39" fill="hold">
                             <p:stCondLst>
                               <p:cond delay="1200"/>
                             </p:stCondLst>
@@ -18189,58 +18095,58 @@
                                   </p:childTnLst>
                                 </p:cTn>
                               </p:par>
-                              <p:par>
-                                <p:cTn id="39" presetID="10" presetClass="entr" presetSubtype="0" fill="hold" grpId="0" nodeType="withEffect">
-                                  <p:stCondLst>
-                                    <p:cond delay="0"/>
-                                  </p:stCondLst>
-                                  <p:childTnLst>
-                                    <p:set>
-                                      <p:cBhvr>
-                                        <p:cTn id="40" dur="1" fill="hold">
-                                          <p:stCondLst>
-                                            <p:cond delay="0"/>
-                                          </p:stCondLst>
-                                        </p:cTn>
-                                        <p:tgtEl>
-                                          <p:spTgt spid="14"/>
-                                        </p:tgtEl>
-                                        <p:attrNameLst>
-                                          <p:attrName>style.visibility</p:attrName>
-                                        </p:attrNameLst>
-                                      </p:cBhvr>
-                                      <p:to>
-                                        <p:strVal val="visible"/>
-                                      </p:to>
-                                    </p:set>
-                                    <p:animEffect transition="in" filter="fade">
-                                      <p:cBhvr>
-                                        <p:cTn id="41" dur="450"/>
-                                        <p:tgtEl>
-                                          <p:spTgt spid="14"/>
-                                        </p:tgtEl>
-                                      </p:cBhvr>
-                                    </p:animEffect>
-                                  </p:childTnLst>
-                                </p:cTn>
-                              </p:par>
                             </p:childTnLst>
                           </p:cTn>
                         </p:par>
                         <p:par>
-                          <p:cTn id="49" fill="hold">
+                          <p:cTn id="46" fill="hold">
                             <p:stCondLst>
                               <p:cond delay="1600"/>
                             </p:stCondLst>
                             <p:childTnLst>
                               <p:par>
-                                <p:cTn id="43" presetID="10" presetClass="entr" presetSubtype="0" fill="hold" grpId="0" nodeType="afterEffect">
+                                <p:cTn id="40" presetID="22" presetClass="entr" presetSubtype="8" fill="hold" grpId="0" nodeType="afterEffect">
                                   <p:stCondLst>
                                     <p:cond delay="0"/>
                                   </p:stCondLst>
                                   <p:childTnLst>
                                     <p:set>
                                       <p:cBhvr>
+                                        <p:cTn id="41" dur="1" fill="hold">
+                                          <p:stCondLst>
+                                            <p:cond delay="0"/>
+                                          </p:stCondLst>
+                                        </p:cTn>
+                                        <p:tgtEl>
+                                          <p:spTgt spid="14"/>
+                                        </p:tgtEl>
+                                        <p:attrNameLst>
+                                          <p:attrName>style.visibility</p:attrName>
+                                        </p:attrNameLst>
+                                      </p:cBhvr>
+                                      <p:to>
+                                        <p:strVal val="visible"/>
+                                      </p:to>
+                                    </p:set>
+                                    <p:animEffect transition="in" filter="wipe(left)">
+                                      <p:cBhvr>
+                                        <p:cTn id="42" dur="450"/>
+                                        <p:tgtEl>
+                                          <p:spTgt spid="14"/>
+                                        </p:tgtEl>
+                                      </p:cBhvr>
+                                    </p:animEffect>
+                                  </p:childTnLst>
+                                </p:cTn>
+                              </p:par>
+                              <p:par>
+                                <p:cTn id="43" presetID="22" presetClass="entr" presetSubtype="8" fill="hold" grpId="0" nodeType="withEffect">
+                                  <p:stCondLst>
+                                    <p:cond delay="0"/>
+                                  </p:stCondLst>
+                                  <p:childTnLst>
+                                    <p:set>
+                                      <p:cBhvr>
                                         <p:cTn id="44" dur="1" fill="hold">
                                           <p:stCondLst>
                                             <p:cond delay="0"/>
@@ -18257,46 +18163,11 @@
                                         <p:strVal val="visible"/>
                                       </p:to>
                                     </p:set>
-                                    <p:animEffect transition="in" filter="fade">
+                                    <p:animEffect transition="in" filter="wipe(left)">
                                       <p:cBhvr>
                                         <p:cTn id="45" dur="450"/>
                                         <p:tgtEl>
                                           <p:spTgt spid="15"/>
-                                        </p:tgtEl>
-                                      </p:cBhvr>
-                                    </p:animEffect>
-                                  </p:childTnLst>
-                                </p:cTn>
-                              </p:par>
-                              <p:par>
-                                <p:cTn id="46" presetID="10" presetClass="entr" presetSubtype="0" fill="hold" grpId="0" nodeType="withEffect">
-                                  <p:stCondLst>
-                                    <p:cond delay="0"/>
-                                  </p:stCondLst>
-                                  <p:childTnLst>
-                                    <p:set>
-                                      <p:cBhvr>
-                                        <p:cTn id="47" dur="1" fill="hold">
-                                          <p:stCondLst>
-                                            <p:cond delay="0"/>
-                                          </p:stCondLst>
-                                        </p:cTn>
-                                        <p:tgtEl>
-                                          <p:spTgt spid="16"/>
-                                        </p:tgtEl>
-                                        <p:attrNameLst>
-                                          <p:attrName>style.visibility</p:attrName>
-                                        </p:attrNameLst>
-                                      </p:cBhvr>
-                                      <p:to>
-                                        <p:strVal val="visible"/>
-                                      </p:to>
-                                    </p:set>
-                                    <p:animEffect transition="in" filter="fade">
-                                      <p:cBhvr>
-                                        <p:cTn id="48" dur="450"/>
-                                        <p:tgtEl>
-                                          <p:spTgt spid="16"/>
                                         </p:tgtEl>
                                       </p:cBhvr>
                                     </p:animEffect>
@@ -18307,105 +18178,26 @@
                           </p:cTn>
                         </p:par>
                         <p:par>
-                          <p:cTn id="56" fill="hold">
+                          <p:cTn id="50" fill="hold">
                             <p:stCondLst>
                               <p:cond delay="2000"/>
                             </p:stCondLst>
                             <p:childTnLst>
                               <p:par>
-                                <p:cTn id="50" presetID="22" presetClass="entr" presetSubtype="8" fill="hold" grpId="0" nodeType="afterEffect">
+                                <p:cTn id="47" presetID="10" presetClass="entr" presetSubtype="0" fill="hold" grpId="0" nodeType="afterEffect">
                                   <p:stCondLst>
                                     <p:cond delay="0"/>
                                   </p:stCondLst>
                                   <p:childTnLst>
                                     <p:set>
                                       <p:cBhvr>
-                                        <p:cTn id="51" dur="1" fill="hold">
-                                          <p:stCondLst>
-                                            <p:cond delay="0"/>
-                                          </p:stCondLst>
-                                        </p:cTn>
-                                        <p:tgtEl>
-                                          <p:spTgt spid="17"/>
-                                        </p:tgtEl>
-                                        <p:attrNameLst>
-                                          <p:attrName>style.visibility</p:attrName>
-                                        </p:attrNameLst>
-                                      </p:cBhvr>
-                                      <p:to>
-                                        <p:strVal val="visible"/>
-                                      </p:to>
-                                    </p:set>
-                                    <p:animEffect transition="in" filter="wipe(left)">
-                                      <p:cBhvr>
-                                        <p:cTn id="52" dur="450"/>
-                                        <p:tgtEl>
-                                          <p:spTgt spid="17"/>
-                                        </p:tgtEl>
-                                      </p:cBhvr>
-                                    </p:animEffect>
-                                  </p:childTnLst>
-                                </p:cTn>
-                              </p:par>
-                              <p:par>
-                                <p:cTn id="53" presetID="22" presetClass="entr" presetSubtype="8" fill="hold" grpId="0" nodeType="withEffect">
-                                  <p:stCondLst>
-                                    <p:cond delay="0"/>
-                                  </p:stCondLst>
-                                  <p:childTnLst>
-                                    <p:set>
-                                      <p:cBhvr>
-                                        <p:cTn id="54" dur="1" fill="hold">
-                                          <p:stCondLst>
-                                            <p:cond delay="0"/>
-                                          </p:stCondLst>
-                                        </p:cTn>
-                                        <p:tgtEl>
-                                          <p:spTgt spid="18"/>
-                                        </p:tgtEl>
-                                        <p:attrNameLst>
-                                          <p:attrName>style.visibility</p:attrName>
-                                        </p:attrNameLst>
-                                      </p:cBhvr>
-                                      <p:to>
-                                        <p:strVal val="visible"/>
-                                      </p:to>
-                                    </p:set>
-                                    <p:animEffect transition="in" filter="wipe(left)">
-                                      <p:cBhvr>
-                                        <p:cTn id="55" dur="450"/>
-                                        <p:tgtEl>
-                                          <p:spTgt spid="18"/>
-                                        </p:tgtEl>
-                                      </p:cBhvr>
-                                    </p:animEffect>
-                                  </p:childTnLst>
-                                </p:cTn>
-                              </p:par>
-                            </p:childTnLst>
-                          </p:cTn>
-                        </p:par>
-                        <p:par>
-                          <p:cTn id="60" fill="hold">
-                            <p:stCondLst>
-                              <p:cond delay="2400"/>
-                            </p:stCondLst>
-                            <p:childTnLst>
-                              <p:par>
-                                <p:cTn id="57" presetID="10" presetClass="entr" presetSubtype="0" fill="hold" grpId="0" nodeType="afterEffect">
-                                  <p:stCondLst>
-                                    <p:cond delay="0"/>
-                                  </p:stCondLst>
-                                  <p:childTnLst>
-                                    <p:set>
-                                      <p:cBhvr>
-                                        <p:cTn id="58" dur="1" fill="hold">
-                                          <p:stCondLst>
-                                            <p:cond delay="0"/>
-                                          </p:stCondLst>
-                                        </p:cTn>
-                                        <p:tgtEl>
-                                          <p:spTgt spid="19"/>
+                                        <p:cTn id="48" dur="1" fill="hold">
+                                          <p:stCondLst>
+                                            <p:cond delay="0"/>
+                                          </p:stCondLst>
+                                        </p:cTn>
+                                        <p:tgtEl>
+                                          <p:spTgt spid="16"/>
                                         </p:tgtEl>
                                         <p:attrNameLst>
                                           <p:attrName>style.visibility</p:attrName>
@@ -18417,9 +18209,9 @@
                                     </p:set>
                                     <p:animEffect transition="in" filter="fade">
                                       <p:cBhvr>
-                                        <p:cTn id="59" dur="450"/>
-                                        <p:tgtEl>
-                                          <p:spTgt spid="19"/>
+                                        <p:cTn id="49" dur="450"/>
+                                        <p:tgtEl>
+                                          <p:spTgt spid="16"/>
                                         </p:tgtEl>
                                       </p:cBhvr>
                                     </p:animEffect>
@@ -18468,9 +18260,6 @@
       <p:bldP spid="14" grpId="0" animBg="1"/>
       <p:bldP spid="15" grpId="0" animBg="1"/>
       <p:bldP spid="16" grpId="0" animBg="1"/>
-      <p:bldP spid="17" grpId="0" animBg="1"/>
-      <p:bldP spid="18" grpId="0" animBg="1"/>
-      <p:bldP spid="19" grpId="0" animBg="1"/>
     </p:bldLst>
   </p:timing>
 </p:sld>

--- a/erm-migration/docs/ERM-Migration-Jury-Pitch.pptx
+++ b/erm-migration/docs/ERM-Migration-Jury-Pitch.pptx
@@ -118,25 +118,25 @@
   <p:extLst>
     <p:ext uri="{521415D9-36F7-43E2-AB2F-B90AF26B5E84}">
       <p14:sectionLst xmlns:p14="http://schemas.microsoft.com/office/powerpoint/2010/main">
-        <p14:section name="Pitch" id="{39d5b421-b7c5-776b-9880-1fb9a7d5555d}">
+        <p14:section name="Pitch" id="{e0f2fcc6-89af-e2eb-375a-5ede0328d660}">
           <p14:sldIdLst>
             <p14:sldId id="256"/>
           </p14:sldIdLst>
         </p14:section>
-        <p14:section name="Context" id="{3e9bfaa9-cb89-78cd-c9fc-d15db49999f6}">
+        <p14:section name="Context" id="{03b0231a-67f0-1f49-718c-1444f20813a5}">
           <p14:sldIdLst>
             <p14:sldId id="257"/>
             <p14:sldId id="258"/>
             <p14:sldId id="259"/>
           </p14:sldIdLst>
         </p14:section>
-        <p14:section name="Problem and method" id="{6515b38d-5baa-0eb1-8306-2ef8415a0834}">
+        <p14:section name="Problem and method" id="{1b95ffdb-cb19-5e0a-2249-c1e9c01984a1}">
           <p14:sldIdLst>
             <p14:sldId id="260"/>
             <p14:sldId id="261"/>
           </p14:sldIdLst>
         </p14:section>
-        <p14:section name="Impact" id="{faddd1e6-c95b-53cc-9af7-ccd2c2d39f87}">
+        <p14:section name="Impact" id="{81b118b7-f9ff-fe9e-bf0e-507f826d454a}">
           <p14:sldIdLst>
             <p14:sldId id="262"/>
             <p14:sldId id="263"/>
@@ -145,7 +145,7 @@
             <p14:sldId id="266"/>
           </p14:sldIdLst>
         </p14:section>
-        <p14:section name="Reuse" id="{58499a7c-bb27-cb5d-6f2f-07703843f999}">
+        <p14:section name="Reuse" id="{eac49c80-bfc6-0c22-b3e7-011deeec0773}">
           <p14:sldIdLst>
             <p14:sldId id="267"/>
           </p14:sldIdLst>
@@ -15520,7 +15520,7 @@
                   <a:schemeClr val="tx1"/>
                 </a:solidFill>
               </a:rPr>
-              <a:t>Effort saved: about 76%, or ~$80K</a:t>
+              <a:t>Effort saved: about 76%</a:t>
             </a:r>
             <a:endParaRPr lang="en-US" sz="3600" dirty="0"/>
           </a:p>
@@ -15573,14 +15573,14 @@
               <a:buNone/>
             </a:pPr>
             <a:r>
-              <a:rPr lang="en-US" sz="4800" b="1" dirty="0">
-                <a:solidFill>
-                  <a:schemeClr val="tx1"/>
+              <a:rPr lang="en-US" sz="3000" b="1" dirty="0">
+                <a:solidFill>
+                  <a:schemeClr val="tx2"/>
                 </a:solidFill>
               </a:rPr>
-              <a:t>~17</a:t>
-            </a:r>
-            <a:endParaRPr lang="en-US" sz="4800" dirty="0"/>
+              <a:t>~17 sprints</a:t>
+            </a:r>
+            <a:endParaRPr lang="en-US" sz="3000" dirty="0"/>
           </a:p>
         </p:txBody>
       </p:sp>
@@ -15650,7 +15650,7 @@
                   <a:schemeClr val="tx2"/>
                 </a:solidFill>
               </a:rPr>
-              <a:t>sprints, ≈ 340 person-days ≈ $105K</a:t>
+              <a:t>≈ 340 person-days ≈ $105K</a:t>
             </a:r>
             <a:endParaRPr lang="en-US" sz="1400" dirty="0"/>
           </a:p>
@@ -15703,14 +15703,14 @@
               <a:buNone/>
             </a:pPr>
             <a:r>
-              <a:rPr lang="en-US" sz="4800" b="1" dirty="0">
-                <a:solidFill>
-                  <a:schemeClr val="tx1"/>
+              <a:rPr lang="en-US" sz="3000" b="1" dirty="0">
+                <a:solidFill>
+                  <a:schemeClr val="tx2"/>
                 </a:solidFill>
               </a:rPr>
-              <a:t>4</a:t>
-            </a:r>
-            <a:endParaRPr lang="en-US" sz="4800" dirty="0"/>
+              <a:t>4 sprints</a:t>
+            </a:r>
+            <a:endParaRPr lang="en-US" sz="3000" dirty="0"/>
           </a:p>
         </p:txBody>
       </p:sp>
@@ -15780,7 +15780,7 @@
                   <a:schemeClr val="tx2"/>
                 </a:solidFill>
               </a:rPr>
-              <a:t>sprints, ≈ 80 person-days ≈ $25K</a:t>
+              <a:t>≈ 80 person-days ≈ $25K</a:t>
             </a:r>
             <a:endParaRPr lang="en-US" sz="1400" dirty="0"/>
           </a:p>
@@ -15833,14 +15833,14 @@
               <a:buNone/>
             </a:pPr>
             <a:r>
-              <a:rPr lang="en-US" sz="4800" b="1" dirty="0">
+              <a:rPr lang="en-US" sz="6000" b="1" dirty="0">
                 <a:solidFill>
                   <a:schemeClr val="accent5"/>
                 </a:solidFill>
               </a:rPr>
-              <a:t>~$80K</a:t>
-            </a:r>
-            <a:endParaRPr lang="en-US" sz="4800" dirty="0"/>
+              <a:t>~76%</a:t>
+            </a:r>
+            <a:endParaRPr lang="en-US" sz="6000" dirty="0"/>
           </a:p>
         </p:txBody>
       </p:sp>
@@ -15874,7 +15874,7 @@
                   <a:schemeClr val="bg1"/>
                 </a:solidFill>
               </a:rPr>
-              <a:t>Saved</a:t>
+              <a:t>Less effort</a:t>
             </a:r>
             <a:endParaRPr lang="en-US" sz="1800" dirty="0"/>
           </a:p>
@@ -15910,7 +15910,7 @@
                   <a:schemeClr val="accent5"/>
                 </a:solidFill>
               </a:rPr>
-              <a:t>about 76% less effort: (17 − 4) ÷ 17</a:t>
+              <a:t>≈ $80K saved: (17 − 4) ÷ 17</a:t>
             </a:r>
             <a:endParaRPr lang="en-US" sz="1400" dirty="0"/>
           </a:p>

--- a/erm-migration/docs/ERM-Migration-Jury-Pitch.pptx
+++ b/erm-migration/docs/ERM-Migration-Jury-Pitch.pptx
@@ -118,25 +118,25 @@
   <p:extLst>
     <p:ext uri="{521415D9-36F7-43E2-AB2F-B90AF26B5E84}">
       <p14:sectionLst xmlns:p14="http://schemas.microsoft.com/office/powerpoint/2010/main">
-        <p14:section name="Pitch" id="{e0f2fcc6-89af-e2eb-375a-5ede0328d660}">
+        <p14:section name="Pitch" id="{d66adf37-90da-ffe9-0608-3233144e66db}">
           <p14:sldIdLst>
             <p14:sldId id="256"/>
           </p14:sldIdLst>
         </p14:section>
-        <p14:section name="Context" id="{03b0231a-67f0-1f49-718c-1444f20813a5}">
+        <p14:section name="Context" id="{19d3d027-b5c9-92d8-fa80-398978cbb2c1}">
           <p14:sldIdLst>
             <p14:sldId id="257"/>
             <p14:sldId id="258"/>
             <p14:sldId id="259"/>
           </p14:sldIdLst>
         </p14:section>
-        <p14:section name="Problem and method" id="{1b95ffdb-cb19-5e0a-2249-c1e9c01984a1}">
+        <p14:section name="Problem and method" id="{15fe09a9-89d9-6f50-b66d-6db86a531b12}">
           <p14:sldIdLst>
             <p14:sldId id="260"/>
             <p14:sldId id="261"/>
           </p14:sldIdLst>
         </p14:section>
-        <p14:section name="Impact" id="{81b118b7-f9ff-fe9e-bf0e-507f826d454a}">
+        <p14:section name="Impact" id="{fda0c153-961f-fd4e-0f21-b743f97aea0d}">
           <p14:sldIdLst>
             <p14:sldId id="262"/>
             <p14:sldId id="263"/>
@@ -145,7 +145,7 @@
             <p14:sldId id="266"/>
           </p14:sldIdLst>
         </p14:section>
-        <p14:section name="Reuse" id="{eac49c80-bfc6-0c22-b3e7-011deeec0773}">
+        <p14:section name="Reuse" id="{ef3c2977-9028-26f9-9386-e1af9395dfe8}">
           <p14:sldIdLst>
             <p14:sldId id="267"/>
           </p14:sldIdLst>
@@ -1232,7 +1232,10 @@
           <a:p>
             <a:r>
               <a:rPr lang="en-US" dirty="0"/>
-              <a:t>Open with the one-line pitch: two developers took ERM, a business-critical Slate application with no documentation, and rebuilt it for Airbus DevX with React and OSDK in one PI, ready for go-live, using an AI-assisted method we designed ourselves. The story: what ERM is and who relies on it, why it had to move, how we did it with AI, what it saved, how it serves our 2026 objectives, and why other teams can reuse it.</a:t>
+              <a:t>In the next few minutes I'd like to tell you how two of us rebuilt a business-critical application in a single PI, and why the way we did it matters for more than this one app.
+The application is ERM, Enterprise Risk Management. It wasn't ours to begin with. It started as a Business Owned Tool, built in Slate by another team, and it grew quickly because people needed it. When it came to us, our job was to standardise it and enhance it, and to move it onto Airbus DevX, without breaking anything for the people who use it every day.
+And we did it with an AI-assisted method that any other team can pick up.
+So let me start with what ERM actually does.</a:t>
             </a:r>
             <a:endParaRPr lang="en-US" dirty="0"/>
           </a:p>
@@ -1320,7 +1323,11 @@
           <a:p>
             <a:r>
               <a:rPr lang="en-US" dirty="0"/>
-              <a:t>Let the business speak. These are testimonials sent by ERM stakeholders in September 2026 about the team and the ERM tool. A member of the ERM centre of competence: teamwork with the business and strong IT skills turned an idea into a user-friendly industrial solution, ERM reports are now generated in a much more automated way, and the user interface and performance have significantly improved. An ERM stakeholder: the ERM dashboard is a tremendous addition to the ERM toolset, and more and more users prepare and run their risk and opportunity reviews with it. A Risk and Opportunity Manager in Hamburg: new features made navigation easier and gave a much clearer view of R&amp;O data, and issues were fixed quickly. Make clear these speak about the team and the tool overall.</a:t>
+              <a:t>I'd rather the business said this than us. These came from ERM stakeholders in September, and they talk about the team and the tool as a whole.
+The ERM Centre of Competence says that regular teamwork with the business, together with strong IT skills, turned an idea into a user-friendly industrial solution, and that the interface and performance have clearly improved.
+Another stakeholder calls it a tremendous addition to the ERM toolset, and says more and more people now prepare and run their risk reviews with it.
+And a Risk and Opportunity Manager in Hamburg says the new features make navigation easier and give a much clearer view of their data, and that whenever something went wrong, it was fixed quickly.
+That's the part we're proudest of, because it was teamwork from start to finish. Which brings me to how this fits where Airbus is heading.</a:t>
             </a:r>
             <a:endParaRPr lang="en-US" dirty="0"/>
           </a:p>
@@ -1408,7 +1415,12 @@
           <a:p>
             <a:r>
               <a:rPr lang="en-US" dirty="0"/>
-              <a:t>This slide ties the project to four 2026 objectives; the flow builds one branch at a time. One: Leverage AI to solve business problems. The AI read all 8 Slate exports and the packed React code, recovered 105 features from an undocumented app and found 31 gaps. Two: Deliver on time, on cost, on quality. Two developers delivered it in one PI, about 76% less effort than a generic manual estimate. Three: Ensure our operational performance. ERM is a business system; every one of its 105 features was tracked for parity, and it is rebuilt on standard, maintainable React and OSDK code, ready to replace the legacy Slate configuration. Four: Grow digital acumen and competencies. pack-project.ts and the playbook mean other teams can repeat this, which builds AI-assisted engineering skills across the organisation.</a:t>
+              <a:t>We didn't do this for its own sake. It lines up with four of our 2026 objectives, and I'll take them one at a time as they appear.
+First, leverage AI to solve business problems: the AI recovered a hundred and five features from an app nobody had documented, and found thirty-one gaps.
+Second, deliver on time, on cost, on quality: one PI, two developers, about seventy-six percent less effort.
+Third, operational performance: ERM is a business system, so every feature was tracked for parity, and it's now rebuilt on standard, maintainable code, ready to leave Slate.
+Fourth, digital acumen: pack-project.ts and the playbook let other teams do the same, so the skill spreads beyond the two of us.
+So the last question is: what happens next?</a:t>
             </a:r>
             <a:endParaRPr lang="en-US" dirty="0"/>
           </a:p>
@@ -1496,7 +1508,11 @@
           <a:p>
             <a:r>
               <a:rPr lang="en-US" dirty="0"/>
-              <a:t>Close on reuse. This was a team effort across business, data and security, backend and frontend; name the teams. The method needs only the legacy export, the new codebase and an AI model, so it carries over to other Slate apps and to other legacy tools. The pieces are ready: pack-project.ts, the comparison document layout and the diagram formats. End with the five-word playbook and invite questions.</a:t>
+              <a:t>First, none of this happened alone. Business users confirmed the feature catalogue, data and security owners made sure restricted views stayed restricted, and backend and frontend fixes went out together. (Name the people and teams here if you can.)
+What we'd like to leave behind isn't only a new ERM, it's a method. Pack, extract, compare, fix, document. The pieces are ready to reuse as they are: the packing script, the comparison template and the diagram formats.
+It fits any Slate app, and really any low-code tool where the knowledge lives in configuration and nobody wrote it down.
+And we've taken the first step: together with [Architect], we're proposing it at the architecture sync, so functions beyond DMS can use it. We'd welcome your support for that.
+Pack, extract, compare, fix, document, and repeat for the next app. Thank you. I'm happy to take your questions.</a:t>
             </a:r>
             <a:endParaRPr lang="en-US" dirty="0"/>
           </a:p>
@@ -1584,7 +1600,11 @@
           <a:p>
             <a:r>
               <a:rPr lang="en-US" dirty="0"/>
-              <a:t>Start with what ERM is, so the jury knows why this app matters. ERM helps stakeholders understand risks and the actions they need. The dashboard turns Active Risk Manager data in Skywise into ERM reports. Five capabilities: one place for ARM data with role-based views; custom dashboards; live editing and trend following; a governed quarterly release workflow; and sharing risks across divisions. On the right: risks and opportunities from ARM are grouped into dashboards, which produce reports and the criticality, key messages, trend and status views. Data flows from ARM through a restricted view and the Ontology into the app, so users only see the risks they have access to.</a:t>
+              <a:t>ERM helps people understand their risks, what decisions rest on them, and what needs to happen next.
+The data starts in Active Risk Manager, ARM. It flows through a restricted view into the Foundry ontology, so people only see what they're allowed to see, and ERM sits on top of that.
+In practice, a risk manager builds a dashboard for their area and groups the risks and opportunities they care about. They update criticality, status and key messages live, and follow the trend over time. Every quarter the dashboards go through a formal review and release, so management sees a governed picture. And risks can be shared and co-managed across divisions.
+At the end of that path are the reports people take into their reviews.
+So ERM isn't a side tool, it's part of how risk is reported. And a lot of people rely on it.</a:t>
             </a:r>
             <a:endParaRPr lang="en-US" dirty="0"/>
           </a:p>
@@ -1672,7 +1692,13 @@
           <a:p>
             <a:r>
               <a:rPr lang="en-US" dirty="0"/>
-              <a:t>Make the stakes clear. 892 people have used ERM across engineering, programmes and operations, with a monthly peak above 320 active risk managers. More than 1,600 dashboards have been created and more than 10 are updated every day. The trend shows monthly unique users growing from launch in summer 2024 to around 300 a month in 2026. That is why the migration could not be a rewrite from memory: every feature had to be found and carried over.</a:t>
+              <a:t>Just a few highlights here, because the point is simple.
+Close to nine hundred people have used ERM. In a busy reporting month, more than three hundred are active. They've built over sixteen hundred dashboards, and more than ten are updated every single day.
+The trend at the bottom tells the more interesting story. Since launch, usage has grown steadily, with the usual ups and downs from month to month. This year it's settled at around three hundred users a month. That's not a tool people try once; it's one they come back to every month.
+What this means for a migration is in the subtitle: if we broke one feature, we wouldn't inconvenience a single team, we'd disrupt risk reporting for hundreds of risk managers.
+And it isn't concentrated in one place.
+— — —
+Reference if asked: 892 lifetime unique users; 320+ active in a peak month; 1,600+ dashboards; 10+ updated every day. Chart values are read from the ERM usage chart, so they are approximate.</a:t>
             </a:r>
             <a:endParaRPr lang="en-US" dirty="0"/>
           </a:p>
@@ -1760,7 +1786,12 @@
           <a:p>
             <a:r>
               <a:rPr lang="en-US" dirty="0"/>
-              <a:t>ERM is not one team's tool. By organisation, the largest group, siglum B, has around 345 users, followed by O, P, A, L, S and K, and about a dozen smaller organisations. By site, Blagnac and Hamburg lead, with users in the UK, Spain, Canada and India too. The values on the organisation chart are read from the usage dashboard, so treat them as approximate. A migration that broke ERM would hit risk reporting across the company.</a:t>
+              <a:t>More than half of ERM's users work outside its largest organisation. You can see one big group on the left, and then a long tail: half a dozen more organisations of fifty to a hundred and twenty users each, and about a dozen smaller ones.
+Geographically, the picture is the same. It's mostly France and Germany, with Blagnac and Hamburg as the two biggest sites, but there are users in the UK, Spain, Canada and India too.
+So it's used across organisations, sites and countries, by people with very different ways of working, different review rhythms and different reporting needs. Every one of them expects their dashboards and reports to work exactly as before.
+That's why we couldn't afford to break it. And under the surface, the app was fragile.
+— — —
+Reference if asked: largest organisation B (~345), then O (~120), P (~95), A (~60), L, S (~55 each), K (~50). Sites: Blagnac 271, Saint-Martin 43, Hamburg 205, Broughton 32, Filton 26, Getafe 25, Mirabel 12, Bangalore 7. Approximate values.</a:t>
             </a:r>
             <a:endParaRPr lang="en-US" dirty="0"/>
           </a:p>
@@ -1848,7 +1879,12 @@
           <a:p>
             <a:r>
               <a:rPr lang="en-US" dirty="0"/>
-              <a:t>Why migrate at all. In Slate, even a simple action triggers a cascade of widgets, events, actions and variables, so one change can break unrelated features, and every tab switch recalculates large variable trees. On top of that, nothing was documented: 8 exports, about 25 MB of configuration. Let the animation play: we first broke the app into its shell and 7 modules, then had AI extract every feature, 105 in total. The target is Airbus DevX with React and OSDK: modular components that can change safely and navigate instantly.</a:t>
+              <a:t>Let me show you how it was built. The old app is one Slate shell, the board menu, with seven modules running inside it as separate frames: search, heat map, one-pager, waterfall, action tracker, report table and print. The shell alone holds forty-four functions, ninety-six events and fourteen actions, and it pushes data into every module by passing messages.
+For users that showed up as problems. One click sets off a chain of widgets, events and variables, so a small change could break a dashboard somewhere else. And every tab switch recalculated large variable trees, so it felt slow.
+For a migration it was even harder, because nothing was documented. Eight Slate exports, about twenty-five megabytes of configuration, and no list of what the app really did.
+The target was clear: React and OSDK on DevX. The question was how to get there.
+— — —
+Reference if asked: behind the shell sit Foundry Functions for versions, sharing and search, 18 Foundry action types for board, risk, key-message and settings writes, and the ERM ontology. Roles were read from a user-profile object and only enforced in the screen.</a:t>
             </a:r>
             <a:endParaRPr lang="en-US" dirty="0"/>
           </a:p>
@@ -1936,7 +1972,9 @@
           <a:p>
             <a:r>
               <a:rPr lang="en-US" dirty="0"/>
-              <a:t>The key idea is context. AI only knows what you give it, so we wrote pack-project.ts: one command walks the React project and writes every source file, under its path, into a single dated dump. The AI sees components, hooks, OSDK calls and types together. The Slate side is already one JSON file per module. With both, the AI compares each of the 105 features to the React code. The animation shows each Slate module landing in its React tab. Gaps get fixed and reviewed, and the backend sharing fix is deployed; then we re-pack and re-check until nothing unplanned is left. Features we dropped on purpose, like the heatmap slider and report KPIs, are marked as choices, not gaps.</a:t>
+              <a:t>Done the usual way, this is a long project. You interview users and click through every screen just to find out what the app does. Then you read the configuration piece by piece, rebuild feature by feature, and only discover the gaps in testing, near the end. Documentation comes last, if at all.
+We turned it around, in the five steps on screen. First, pack: our own script, pack-project.ts, puts the whole React app into one file, so the AI sees every component at once instead of fragments. Then extract: the AI read all eight Slate exports and wrote the feature catalogue for us. Compare: it checked every feature against the packed code and listed the gaps. Fix: we fixed them, re-packed and checked again. And document: the diagrams were produced along the way, not afterwards.
+One rule throughout: the AI drafts, we check, fix and decide. So what came out of it?</a:t>
             </a:r>
             <a:endParaRPr lang="en-US" dirty="0"/>
           </a:p>
@@ -2024,7 +2062,16 @@
           <a:p>
             <a:r>
               <a:rPr lang="en-US" dirty="0"/>
-              <a:t>Walk the numbers left to right. One PI for the whole migration. 105 features recovered from an app with no documentation, out of 8 Slate exports totalling about 25 MB. pack-project.ts turned 75 React files into one context file. The AI review found and prioritised 31 gaps, 7 of them security or data-integrity issues such as unsanitised rich text and permission checks, all caught in review. The React app adds 11 features the old app did not have, from a searchable dashboard switcher and a web address per tab to a report slideshow; the next slides show them. Security and data-integrity findings caught in review: stored cross-site scripting from unsanitised rich HTML in 5 places; permission checks that matched e-mails by substring instead of exactly; sharing payload arrays misaligned with the wrong fields; settings JSON overwritten whole from a stale copy; reports printing shared risks the legacy app left out; no 100-risk print cap, a legacy cybersecurity limit; and children edits in the risk drawer silently discarded. Documentation went from nothing to 10 documents: 8 architecture and lifecycle diagrams, the feature comparison and the playbook.</a:t>
+              <a:t>Here's the process in numbers.
+The whole migration fit into one PI. The AI recovered a hundred and five features from an app with no documentation, by reading eight Slate exports. And every time we checked our work, the whole React app, seventy-five files, went into a single context for the AI, so nothing was reviewed in isolation.
+That review found thirty-one gaps, which we prioritised and worked through one by one, before users ever saw them, including seven security and data issues the old app had been living with.
+We didn't just copy the old app either. We built eleven new features it never had, like a searchable dashboard switcher, slideshow mode and a web address for every tab.
+And documentation went from nothing to ten documents: eight diagrams and two guides.
+The obvious next question is what all this saved.
+— — —
+Reference if asked.
+The 11 new features: permissions-only edit for locked versions; a web address per tab; a searchable dashboard switcher; a criticality-differs filter; category and impact-category filters; a fourth one-pager layout with custom slots; resizable columns saved per board; report classification and cover toggle; slideshow mode; one-pager selection shortcuts; showing risks by ID or title.
+Security and data-integrity findings caught in review: stored cross-site scripting from unsanitised rich HTML in 5 places; permission checks that matched e-mails by substring instead of exactly; sharing payload arrays misaligned with the wrong fields; settings JSON overwritten whole from a stale copy; reports printing shared risks the legacy app left out; no 100-risk print cap, a legacy cybersecurity limit; children edits in the risk drawer silently discarded. The dashboard sharing-access fix is deployed.</a:t>
             </a:r>
             <a:endParaRPr lang="en-US" dirty="0"/>
           </a:p>
@@ -2112,7 +2159,13 @@
           <a:p>
             <a:r>
               <a:rPr lang="en-US" dirty="0"/>
-              <a:t>These are generic industry-style estimates, not our measured baseline; say so if asked. A manual migration of 105 features typically needs about half a day per feature to reverse-engineer it, two days to rebuild it and half a day to test parity, plus about 25 days to document the app: roughly 340 person-days, or about 17 sprints for our team of 2 developers, more than 4 PIs. We did it in one PI, 4 development sprints, which is about 76% less effort. At $38.50 per developer hour, that is roughly $105,000 of manual effort against about $25,000 actual: around $80,000 saved. Then say where the time went: discovery was the biggest saving, because the AI catalogued 105 features straight from the Slate exports with no documentation to read; gap analysis, because every feature was checked against the packed React code; and documentation, because the diagrams were produced alongside the work instead of afterwards.</a:t>
+              <a:t>The number I'd like you to remember from today is this one: about seventy-six percent less effort.
+If we'd done this by hand, a fair estimate is around seventeen sprints for two developers. We did it in four. In money, at our hourly rate, that's around eighty thousand dollars saved.
+To be upfront, this is a generic estimate, not a measured baseline, and the basis is in the footnote. But it's a conservative one.
+Where did the time go? Mostly in three places. Discovery: the AI catalogued a hundred and five features from the exports, where we'd otherwise have spent weeks clicking and asking. Gap analysis: every feature was checked against the code, not by hand. And documentation: the diagrams came out alongside the work instead of at the end.
+And the savings don't stop when the migration ends.
+— — —
+Reference if asked: 105 features × (0.5 day discovery + 2 days build + 0.5 day parity testing) + 25 days documentation ≈ 340 person-days ≈ 17 sprints for two developers; 4 sprints ≈ 80 person-days used. At $38.50 per developer hour, 8 hours a day: ≈ $105K against ≈ $25K.</a:t>
             </a:r>
             <a:endParaRPr lang="en-US" dirty="0"/>
           </a:p>
@@ -2200,7 +2253,13 @@
           <a:p>
             <a:r>
               <a:rPr lang="en-US" dirty="0"/>
-              <a:t>Building new features is now easy, and that keeps paying back. During the same PI we built 11 features Slate never had: permissions-only edit for locked versions, a web address per tab, a searchable dashboard switcher, a criticality-differs filter, category and impact-category filters, a fourth one-pager layout with custom slots, resizable columns saved per board, report classification and cover toggle, slideshow mode, one-pager selection shortcuts, and showing risks by ID or title. 25 MB of Slate configuration became about 0.8 MB of typed source in 75 files. In Slate, a feature meant wiring widgets, events, variables and functions across 8 exports, with no documentation; in React it is one typed component and one OSDK call, and pack-project.ts gives AI the whole app as context. On recurring cost: using a common rule of thumb that maintenance costs about 20% of build effort a year, a Slate-equivalent app would need about 68 person-days a year, around $21,000 at $38.50 an hour. Assuming modular, typed, documented code halves that, we save around $10,000 a year. Say clearly these are estimates.</a:t>
+              <a:t>The new app is faster to build on and cheaper to run.
+In the same PI we built those eleven features Slate never had. And twenty-five megabytes of Slate configuration became less than one megabyte of typed code.
+The difference is easiest to see when you add a feature. In Slate, you wire widgets, events, variables and functions across eight exports, and any change can break a dashboard somewhere else, with no documentation to tell you what depends on what. In React, it's one isolated, typed component and one data call. pack-project.ts gives the AI the whole app as context, and the diagrams show what a change will touch.
+Over time that adds up to around ten thousand dollars a year less maintenance effort, again as an estimate.
+But numbers are only half the story. Here's what the users say.
+— — —
+Reference if asked: maintenance rule of thumb of ~20% of build effort a year (340 person-days → 68 a year, ≈ $21K), assumed halved by modular, typed, documented code (≈ $10K a year saved).</a:t>
             </a:r>
             <a:endParaRPr lang="en-US" dirty="0"/>
           </a:p>

--- a/erm-migration/docs/ERM-Migration-Jury-Pitch.pptx
+++ b/erm-migration/docs/ERM-Migration-Jury-Pitch.pptx
@@ -1974,7 +1974,10 @@
               <a:rPr lang="en-US" dirty="0"/>
               <a:t>Done the usual way, this is a long project. You interview users and click through every screen just to find out what the app does. Then you read the configuration piece by piece, rebuild feature by feature, and only discover the gaps in testing, near the end. Documentation comes last, if at all.
 We turned it around, in the five steps on screen. First, pack: our own script, pack-project.ts, puts the whole React app into one file, so the AI sees every component at once instead of fragments. Then extract: the AI read all eight Slate exports and wrote the feature catalogue for us. Compare: it checked every feature against the packed code and listed the gaps. Fix: we fixed them, re-packed and checked again. And document: the diagrams were produced along the way, not afterwards.
-One rule throughout: the AI drafts, we check, fix and decide. So what came out of it?</a:t>
+One rule throughout: the AI drafts, we check, fix and decide. So what came out of it? Let me show you first, then give you the numbers.
+— — —
+Play the trailer here: 1 min 34 s, full screen, sound on. Let it run without talking over it. It shows sample data only and ends on "Coming soon", which matches where we are: the app isn't live yet.
+Before you start: have the video open and cued (docs/trailer-storyboard/animatic.mp4 for now; swap in the final Blender render when it's ready), or embed it on this slide. Add about 1 min 40 s to your timing.</a:t>
             </a:r>
             <a:endParaRPr lang="en-US" dirty="0"/>
           </a:p>
@@ -2062,7 +2065,7 @@
           <a:p>
             <a:r>
               <a:rPr lang="en-US" dirty="0"/>
-              <a:t>Here's the process in numbers.
+              <a:t>That was ERM 2.0: everything people rely on, carried over, every tab rebuilt, and faster. Now, here's how we got there, in numbers.
 The whole migration fit into one PI. The AI recovered a hundred and five features from an app with no documentation, by reading eight Slate exports. And every time we checked our work, the whole React app, seventy-five files, went into a single context for the AI, so nothing was reviewed in isolation.
 That review found thirty-one gaps, which we prioritised and worked through one by one, before users ever saw them, including seven security and data issues the old app had been living with.
 We didn't just copy the old app either. We built eleven new features it never had, like a searchable dashboard switcher, slideshow mode and a web address for every tab.
